--- a/docs/tcc/apresentacao-mapill.pptx
+++ b/docs/tcc/apresentacao-mapill.pptx
@@ -1094,7 +1094,7 @@
           </a:p>
           <a:p>
             <a:r>
-              <a:t>Encerro por aqui. Obrigado pela atenção, e fico à disposição para as perguntas.</a:t>
+              <a:t>Encerro por aqui. Quem quiser conhecer o Mapill pode usar o QR code, que leva à página do aplicativo, onde também está o APK para instalar no Android. Obrigado pela atenção, e fico à disposição para as perguntas.</a:t>
             </a:r>
           </a:p>
         </p:txBody>
@@ -9809,9 +9809,59 @@
           <a:p/>
         </p:txBody>
       </p:sp>
+      <p:sp>
+        <p:nvSpPr>
+          <p:cNvPr id="3" name="Rounded Rectangle 2"/>
+          <p:cNvSpPr/>
+          <p:nvPr/>
+        </p:nvSpPr>
+        <p:spPr>
+          <a:xfrm>
+            <a:off x="8403336" y="1280160"/>
+            <a:ext cx="3200400" cy="4206240"/>
+          </a:xfrm>
+          <a:prstGeom prst="roundRect">
+            <a:avLst>
+              <a:gd name="adj" fmla="val 4000"/>
+            </a:avLst>
+          </a:prstGeom>
+          <a:solidFill>
+            <a:srgbClr val="FFFFFF"/>
+          </a:solidFill>
+          <a:ln>
+            <a:noFill/>
+          </a:ln>
+          <a:effectLst>
+            <a:outerShdw blurRad="127000" dist="25400" dir="5400000" algn="t" rotWithShape="0">
+              <a:srgbClr val="191C1E">
+                <a:alpha val="9000"/>
+              </a:srgbClr>
+            </a:outerShdw>
+          </a:effectLst>
+        </p:spPr>
+        <p:style>
+          <a:lnRef idx="1">
+            <a:schemeClr val="accent1"/>
+          </a:lnRef>
+          <a:fillRef idx="3">
+            <a:schemeClr val="accent1"/>
+          </a:fillRef>
+          <a:effectRef idx="2">
+            <a:schemeClr val="accent1"/>
+          </a:effectRef>
+          <a:fontRef idx="minor">
+            <a:schemeClr val="lt1"/>
+          </a:fontRef>
+        </p:style>
+        <p:txBody>
+          <a:bodyPr rtlCol="0" anchor="ctr"/>
+          <a:lstStyle/>
+          <a:p/>
+        </p:txBody>
+      </p:sp>
       <p:pic>
         <p:nvPicPr>
-          <p:cNvPr id="3" name="Picture 2" descr="p78_2.png"/>
+          <p:cNvPr id="4" name="Picture 3" descr="qr.png"/>
           <p:cNvPicPr>
             <a:picLocks noChangeAspect="1"/>
           </p:cNvPicPr>
@@ -9825,26 +9875,97 @@
         </p:blipFill>
         <p:spPr>
           <a:xfrm>
-            <a:off x="8732520" y="777240"/>
-            <a:ext cx="2365272" cy="5303520"/>
-          </a:xfrm>
-          <a:prstGeom prst="roundRect">
-            <a:avLst>
-              <a:gd name="adj" fmla="val 10824"/>
-            </a:avLst>
-          </a:prstGeom>
-          <a:effectLst>
-            <a:outerShdw blurRad="177800" dist="50800" dir="5400000" algn="t" rotWithShape="0">
-              <a:srgbClr val="191C1E">
-                <a:alpha val="14000"/>
-              </a:srgbClr>
-            </a:outerShdw>
-          </a:effectLst>
+            <a:off x="8769096" y="1645920"/>
+            <a:ext cx="2468880" cy="2468880"/>
+          </a:xfrm>
+          <a:prstGeom prst="rect">
+            <a:avLst/>
+          </a:prstGeom>
         </p:spPr>
       </p:pic>
+      <p:sp>
+        <p:nvSpPr>
+          <p:cNvPr id="5" name="TextBox 4"/>
+          <p:cNvSpPr txBox="1"/>
+          <p:nvPr/>
+        </p:nvSpPr>
+        <p:spPr>
+          <a:xfrm>
+            <a:off x="8403336" y="4343400"/>
+            <a:ext cx="3200400" cy="1097280"/>
+          </a:xfrm>
+          <a:prstGeom prst="rect">
+            <a:avLst/>
+          </a:prstGeom>
+          <a:noFill/>
+        </p:spPr>
+        <p:txBody>
+          <a:bodyPr wrap="square" lIns="0" rIns="0" tIns="0" bIns="0" anchor="t">
+            <a:spAutoFit/>
+          </a:bodyPr>
+          <a:lstStyle/>
+          <a:p>
+            <a:pPr algn="ctr">
+              <a:lnSpc>
+                <a:spcPct val="110000"/>
+              </a:lnSpc>
+              <a:spcAft>
+                <a:spcPts val="400"/>
+              </a:spcAft>
+            </a:pPr>
+            <a:r>
+              <a:rPr sz="1700" b="1">
+                <a:solidFill>
+                  <a:srgbClr val="191C1E"/>
+                </a:solidFill>
+                <a:latin typeface="Plus Jakarta Sans"/>
+              </a:rPr>
+              <a:t>Conheça o Mapill</a:t>
+            </a:r>
+          </a:p>
+          <a:p>
+            <a:pPr algn="ctr">
+              <a:lnSpc>
+                <a:spcPct val="110000"/>
+              </a:lnSpc>
+              <a:spcAft>
+                <a:spcPts val="400"/>
+              </a:spcAft>
+            </a:pPr>
+            <a:r>
+              <a:rPr sz="1300" b="0">
+                <a:solidFill>
+                  <a:srgbClr val="545F73"/>
+                </a:solidFill>
+                <a:latin typeface="Plus Jakarta Sans"/>
+              </a:rPr>
+              <a:t>Página do app, com o APK para Android</a:t>
+            </a:r>
+          </a:p>
+          <a:p>
+            <a:pPr algn="ctr">
+              <a:lnSpc>
+                <a:spcPct val="110000"/>
+              </a:lnSpc>
+              <a:spcAft>
+                <a:spcPts val="400"/>
+              </a:spcAft>
+            </a:pPr>
+            <a:r>
+              <a:rPr sz="1300" b="1">
+                <a:solidFill>
+                  <a:srgbClr val="0B5FD9"/>
+                </a:solidFill>
+                <a:latin typeface="Plus Jakarta Sans"/>
+              </a:rPr>
+              <a:t>mapill-website.vercel.app</a:t>
+            </a:r>
+          </a:p>
+        </p:txBody>
+      </p:sp>
       <p:pic>
         <p:nvPicPr>
-          <p:cNvPr id="4" name="Picture 3" descr="lockup-claro.png"/>
+          <p:cNvPr id="6" name="Picture 5" descr="lockup-claro.png"/>
           <p:cNvPicPr>
             <a:picLocks noChangeAspect="1"/>
           </p:cNvPicPr>
@@ -9868,7 +9989,7 @@
       </p:pic>
       <p:sp>
         <p:nvSpPr>
-          <p:cNvPr id="5" name="TextBox 4"/>
+          <p:cNvPr id="7" name="TextBox 6"/>
           <p:cNvSpPr txBox="1"/>
           <p:nvPr/>
         </p:nvSpPr>
@@ -9910,7 +10031,7 @@
       </p:sp>
       <p:sp>
         <p:nvSpPr>
-          <p:cNvPr id="6" name="TextBox 5"/>
+          <p:cNvPr id="8" name="TextBox 7"/>
           <p:cNvSpPr txBox="1"/>
           <p:nvPr/>
         </p:nvSpPr>
@@ -10009,7 +10130,7 @@
       </p:sp>
       <p:pic>
         <p:nvPicPr>
-          <p:cNvPr id="7" name="Picture 6" descr="unidavi.png"/>
+          <p:cNvPr id="9" name="Picture 8" descr="unidavi.png"/>
           <p:cNvPicPr>
             <a:picLocks noChangeAspect="1"/>
           </p:cNvPicPr>

--- a/docs/tcc/apresentacao-mapill.pptx
+++ b/docs/tcc/apresentacao-mapill.pptx
@@ -1395,7 +1395,7 @@
           </a:p>
           <a:p>
             <a:r>
-              <a:t>Essa frase abre o meu trabalho, e resume por que ele existe. Quando o paciente não segue o tratamento, o quadro piora de um jeito que poderia ser evitado, e isso acaba em atendimentos de emergência e internações. Além disso, o remédio depende do horário certo, porque fora do intervalo ele oscila entre não fazer efeito e se tornar tóxico. Por isso o Mapill não tenta ser um aplicativo de saúde completo. Ele atua no ponto exato da falha, que é lembrar da dose, registrar o que aconteceu e avisar antes de o remédio acabar.</a:t>
+              <a:t>Essa frase abre o meu trabalho, e resume por que ele existe. Quase nunca o paciente deixa de tomar o remédio por descuido. O lembrete que ele usa, como um bilhete na geladeira, só funciona se ele passar por ali na hora certa, e controlar de cabeça o estoque e os horários de vários remédios cansa. E o horário importa, porque fora do intervalo o remédio oscila entre não fazer efeito e se tornar tóxico. Por isso o Mapill não tenta ser um aplicativo de saúde completo. Ele atua no ponto exato da falha, que é lembrar da dose, registrar o que aconteceu e avisar antes de o remédio acabar.</a:t>
             </a:r>
           </a:p>
         </p:txBody>
@@ -10227,6 +10227,43 @@
                 </a:solidFill>
                 <a:latin typeface="Plus Jakarta Sans"/>
               </a:rPr>
+              <a:t>NORMAN, Donald A. </a:t>
+            </a:r>
+            <a:r>
+              <a:rPr sz="1100" b="1">
+                <a:solidFill>
+                  <a:srgbClr val="191C1E"/>
+                </a:solidFill>
+                <a:latin typeface="Plus Jakarta Sans"/>
+              </a:rPr>
+              <a:t>The design of everyday things</a:t>
+            </a:r>
+            <a:r>
+              <a:rPr sz="1100" b="0">
+                <a:solidFill>
+                  <a:srgbClr val="191C1E"/>
+                </a:solidFill>
+                <a:latin typeface="Plus Jakarta Sans"/>
+              </a:rPr>
+              <a:t>. Revised and expanded edition. New York: Basic Books, 2013.</a:t>
+            </a:r>
+          </a:p>
+          <a:p>
+            <a:pPr algn="l">
+              <a:lnSpc>
+                <a:spcPct val="105000"/>
+              </a:lnSpc>
+              <a:spcAft>
+                <a:spcPts val="900"/>
+              </a:spcAft>
+            </a:pPr>
+            <a:r>
+              <a:rPr sz="1100" b="0">
+                <a:solidFill>
+                  <a:srgbClr val="191C1E"/>
+                </a:solidFill>
+                <a:latin typeface="Plus Jakarta Sans"/>
+              </a:rPr>
               <a:t>RISKO, Evan F.; GILBERT, Sam J. Cognitive offloading. </a:t>
             </a:r>
             <a:r>
@@ -11759,7 +11796,7 @@
             <a:avLst/>
           </a:prstGeom>
           <a:solidFill>
-            <a:srgbClr val="C90000"/>
+            <a:srgbClr val="0B5FD9"/>
           </a:solidFill>
           <a:ln>
             <a:noFill/>
@@ -11809,7 +11846,7 @@
                 </a:solidFill>
                 <a:latin typeface="Plus Jakarta Sans"/>
               </a:rPr>
-              <a:t>Agravamentos evitáveis</a:t>
+              <a:t>Lembrete preso ao lugar</a:t>
             </a:r>
           </a:p>
           <a:p>
@@ -11828,7 +11865,7 @@
                 </a:solidFill>
                 <a:latin typeface="Plus Jakarta Sans"/>
               </a:rPr>
-              <a:t>o quadro piora quando o tratamento é interrompido</a:t>
+              <a:t>o bilhete na geladeira só lembra quem passa por ela (Norman, 2013)</a:t>
             </a:r>
           </a:p>
         </p:txBody>
@@ -11878,7 +11915,7 @@
             <a:avLst/>
           </a:prstGeom>
           <a:solidFill>
-            <a:srgbClr val="C90000"/>
+            <a:srgbClr val="0B5FD9"/>
           </a:solidFill>
           <a:ln>
             <a:noFill/>
@@ -11928,7 +11965,7 @@
                 </a:solidFill>
                 <a:latin typeface="Plus Jakarta Sans"/>
               </a:rPr>
-              <a:t>Emergências e internações</a:t>
+              <a:t>Tudo de cabeça</a:t>
             </a:r>
           </a:p>
           <a:p>
@@ -11947,7 +11984,7 @@
                 </a:solidFill>
                 <a:latin typeface="Plus Jakarta Sans"/>
               </a:rPr>
-              <a:t>que o controle adequado da medicação evitaria</a:t>
+              <a:t>controlar estoque e horários de vários remédios cansa</a:t>
             </a:r>
           </a:p>
         </p:txBody>
@@ -11997,7 +12034,7 @@
             <a:avLst/>
           </a:prstGeom>
           <a:solidFill>
-            <a:srgbClr val="C90000"/>
+            <a:srgbClr val="0B5FD9"/>
           </a:solidFill>
           <a:ln>
             <a:noFill/>

--- a/docs/tcc/apresentacao-mapill.pptx
+++ b/docs/tcc/apresentacao-mapill.pptx
@@ -1395,7 +1395,7 @@
           </a:p>
           <a:p>
             <a:r>
-              <a:t>Essa frase abre o meu trabalho, e resume por que ele existe. Quase nunca o paciente deixa de tomar o remédio por descuido. O lembrete que ele usa, como um bilhete na geladeira, só funciona se ele passar por ali na hora certa, e controlar de cabeça o estoque e os horários de vários remédios cansa. E o horário importa, porque fora do intervalo o remédio oscila entre não fazer efeito e se tornar tóxico. Por isso o Mapill não tenta ser um aplicativo de saúde completo. Ele atua no ponto exato da falha, que é lembrar da dose, registrar o que aconteceu e avisar antes de o remédio acabar.</a:t>
+              <a:t>Essa frase abre o meu trabalho, e resume por que ele existe. Quase nunca o paciente deixa de tomar o remédio por descuido. Muitas vezes o lembrete é um bilhete na geladeira, que só funciona se ele passar por ali na hora certa, e controlar de cabeça o estoque e os horários de vários remédios sobrecarrega a memória. E o horário importa, porque fora do intervalo o remédio oscila entre não fazer efeito e se tornar tóxico. Por isso o Mapill não tenta ser um aplicativo de saúde completo. Ele atua no ponto exato da falha, que é lembrar da dose, registrar o que aconteceu e avisar antes de o remédio acabar.</a:t>
             </a:r>
           </a:p>
         </p:txBody>
@@ -10227,43 +10227,6 @@
                 </a:solidFill>
                 <a:latin typeface="Plus Jakarta Sans"/>
               </a:rPr>
-              <a:t>NORMAN, Donald A. </a:t>
-            </a:r>
-            <a:r>
-              <a:rPr sz="1100" b="1">
-                <a:solidFill>
-                  <a:srgbClr val="191C1E"/>
-                </a:solidFill>
-                <a:latin typeface="Plus Jakarta Sans"/>
-              </a:rPr>
-              <a:t>The design of everyday things</a:t>
-            </a:r>
-            <a:r>
-              <a:rPr sz="1100" b="0">
-                <a:solidFill>
-                  <a:srgbClr val="191C1E"/>
-                </a:solidFill>
-                <a:latin typeface="Plus Jakarta Sans"/>
-              </a:rPr>
-              <a:t>. Revised and expanded edition. New York: Basic Books, 2013.</a:t>
-            </a:r>
-          </a:p>
-          <a:p>
-            <a:pPr algn="l">
-              <a:lnSpc>
-                <a:spcPct val="105000"/>
-              </a:lnSpc>
-              <a:spcAft>
-                <a:spcPts val="900"/>
-              </a:spcAft>
-            </a:pPr>
-            <a:r>
-              <a:rPr sz="1100" b="0">
-                <a:solidFill>
-                  <a:srgbClr val="191C1E"/>
-                </a:solidFill>
-                <a:latin typeface="Plus Jakarta Sans"/>
-              </a:rPr>
               <a:t>RISKO, Evan F.; GILBERT, Sam J. Cognitive offloading. </a:t>
             </a:r>
             <a:r>
@@ -11865,7 +11828,7 @@
                 </a:solidFill>
                 <a:latin typeface="Plus Jakarta Sans"/>
               </a:rPr>
-              <a:t>o bilhete na geladeira só lembra quem passa por ela (Norman, 2013)</a:t>
+              <a:t>só funciona se o paciente estiver ali na hora certa</a:t>
             </a:r>
           </a:p>
         </p:txBody>
@@ -11984,7 +11947,7 @@
                 </a:solidFill>
                 <a:latin typeface="Plus Jakarta Sans"/>
               </a:rPr>
-              <a:t>controlar estoque e horários de vários remédios cansa</a:t>
+              <a:t>lembrar horários e calcular o estoque de vários remédios sobrecarrega a memória</a:t>
             </a:r>
           </a:p>
         </p:txBody>

--- a/docs/tcc/apresentacao-mapill.pptx
+++ b/docs/tcc/apresentacao-mapill.pptx
@@ -11809,7 +11809,7 @@
                 </a:solidFill>
                 <a:latin typeface="Plus Jakarta Sans"/>
               </a:rPr>
-              <a:t>Lembrete preso ao lugar</a:t>
+              <a:t>Falta um lembrete confiável</a:t>
             </a:r>
           </a:p>
           <a:p>
@@ -11828,7 +11828,7 @@
                 </a:solidFill>
                 <a:latin typeface="Plus Jakarta Sans"/>
               </a:rPr>
-              <a:t>só funciona se o paciente estiver ali na hora certa</a:t>
+              <a:t>bilhetes e anotações só funcionam se o paciente olhar na hora certa</a:t>
             </a:r>
           </a:p>
         </p:txBody>

--- a/docs/tcc/apresentacao-mapill.pptx
+++ b/docs/tcc/apresentacao-mapill.pptx
@@ -1395,7 +1395,7 @@
           </a:p>
           <a:p>
             <a:r>
-              <a:t>Essa frase abre o meu trabalho, e resume por que ele existe. Quase nunca o paciente deixa de tomar o remédio por descuido. Muitas vezes o lembrete é um bilhete na geladeira, que só funciona se ele passar por ali na hora certa, e controlar de cabeça o estoque e os horários de vários remédios sobrecarrega a memória. E o horário importa, porque fora do intervalo o remédio oscila entre não fazer efeito e se tornar tóxico. Por isso o Mapill não tenta ser um aplicativo de saúde completo. Ele atua no ponto exato da falha, que é lembrar da dose, registrar o que aconteceu e avisar antes de o remédio acabar.</a:t>
+              <a:t>Essa frase abre o meu trabalho, e resume por que ele existe. As duas falhas que eu comentei aparecem no dia a dia de formas bem concretas. Na cognitiva, o paciente esquece a dose, ou não lembra se já tomou. O Mapill avisa no horário, mesmo com o aplicativo fechado, e guarda cada resposta com data e hora. Na logística, o remédio acaba sem aviso, ou a consulta e a receita passam do prazo. O app desconta o estoque a cada dose e avisa antes de acabar, e lembra dos compromissos e da validade da receita.</a:t>
             </a:r>
           </a:p>
         </p:txBody>
@@ -9945,43 +9945,6 @@
                 </a:solidFill>
                 <a:latin typeface="Plus Jakarta Sans"/>
               </a:rPr>
-              <a:t>BRUNTON, Laurence L.; KNOLLMANN, Björn C. (ed.). </a:t>
-            </a:r>
-            <a:r>
-              <a:rPr sz="1100" b="1">
-                <a:solidFill>
-                  <a:srgbClr val="191C1E"/>
-                </a:solidFill>
-                <a:latin typeface="Plus Jakarta Sans"/>
-              </a:rPr>
-              <a:t>As bases farmacológicas da terapêutica de Goodman &amp; Gilman</a:t>
-            </a:r>
-            <a:r>
-              <a:rPr sz="1100" b="0">
-                <a:solidFill>
-                  <a:srgbClr val="191C1E"/>
-                </a:solidFill>
-                <a:latin typeface="Plus Jakarta Sans"/>
-              </a:rPr>
-              <a:t>. 14. ed. Porto Alegre: Artmed, 2024.</a:t>
-            </a:r>
-          </a:p>
-          <a:p>
-            <a:pPr algn="l">
-              <a:lnSpc>
-                <a:spcPct val="105000"/>
-              </a:lnSpc>
-              <a:spcAft>
-                <a:spcPts val="900"/>
-              </a:spcAft>
-            </a:pPr>
-            <a:r>
-              <a:rPr sz="1100" b="0">
-                <a:solidFill>
-                  <a:srgbClr val="191C1E"/>
-                </a:solidFill>
-                <a:latin typeface="Plus Jakarta Sans"/>
-              </a:rPr>
               <a:t>KLEPPMANN, Martin. </a:t>
             </a:r>
             <a:r>
@@ -11723,11 +11686,11 @@
         <p:spPr>
           <a:xfrm>
             <a:off x="685800" y="2377440"/>
-            <a:ext cx="3454298" cy="1920240"/>
+            <a:ext cx="5272887" cy="3429000"/>
           </a:xfrm>
           <a:prstGeom prst="roundRect">
             <a:avLst>
-              <a:gd name="adj" fmla="val 6666"/>
+              <a:gd name="adj" fmla="val 3733"/>
             </a:avLst>
           </a:prstGeom>
           <a:solidFill>
@@ -11746,20 +11709,132 @@
       </p:sp>
       <p:sp>
         <p:nvSpPr>
-          <p:cNvPr id="8" name="Rectangle 7"/>
+          <p:cNvPr id="8" name="TextBox 7"/>
+          <p:cNvSpPr txBox="1"/>
+          <p:nvPr/>
+        </p:nvSpPr>
+        <p:spPr>
+          <a:xfrm>
+            <a:off x="1051560" y="2606040"/>
+            <a:ext cx="4541367" cy="365760"/>
+          </a:xfrm>
+          <a:prstGeom prst="rect">
+            <a:avLst/>
+          </a:prstGeom>
+          <a:noFill/>
+        </p:spPr>
+        <p:txBody>
+          <a:bodyPr wrap="square" lIns="0" rIns="0" tIns="0" bIns="0" anchor="t">
+            <a:spAutoFit/>
+          </a:bodyPr>
+          <a:lstStyle/>
+          <a:p>
+            <a:pPr algn="l">
+              <a:lnSpc>
+                <a:spcPct val="110000"/>
+              </a:lnSpc>
+              <a:spcAft>
+                <a:spcPts val="600"/>
+              </a:spcAft>
+            </a:pPr>
+            <a:r>
+              <a:rPr sz="1200" b="1" spc="200">
+                <a:solidFill>
+                  <a:srgbClr val="0B5FD9"/>
+                </a:solidFill>
+                <a:latin typeface="Plus Jakarta Sans"/>
+              </a:rPr>
+              <a:t>FALHA COGNITIVA</a:t>
+            </a:r>
+          </a:p>
+        </p:txBody>
+      </p:sp>
+      <p:sp>
+        <p:nvSpPr>
+          <p:cNvPr id="9" name="TextBox 8"/>
+          <p:cNvSpPr txBox="1"/>
+          <p:nvPr/>
+        </p:nvSpPr>
+        <p:spPr>
+          <a:xfrm>
+            <a:off x="1051560" y="3108960"/>
+            <a:ext cx="4541367" cy="1097280"/>
+          </a:xfrm>
+          <a:prstGeom prst="rect">
+            <a:avLst/>
+          </a:prstGeom>
+          <a:noFill/>
+        </p:spPr>
+        <p:txBody>
+          <a:bodyPr wrap="square" lIns="0" rIns="0" tIns="0" bIns="0" anchor="t">
+            <a:spAutoFit/>
+          </a:bodyPr>
+          <a:lstStyle/>
+          <a:p>
+            <a:pPr algn="l">
+              <a:lnSpc>
+                <a:spcPct val="110000"/>
+              </a:lnSpc>
+              <a:spcAft>
+                <a:spcPts val="400"/>
+              </a:spcAft>
+            </a:pPr>
+            <a:r>
+              <a:rPr sz="1900" b="1">
+                <a:solidFill>
+                  <a:srgbClr val="191C1E"/>
+                </a:solidFill>
+                <a:latin typeface="Plus Jakarta Sans"/>
+              </a:rPr>
+              <a:t>Esqueceu a dose</a:t>
+            </a:r>
+          </a:p>
+          <a:p>
+            <a:pPr algn="l">
+              <a:lnSpc>
+                <a:spcPct val="110000"/>
+              </a:lnSpc>
+              <a:spcAft>
+                <a:spcPts val="400"/>
+              </a:spcAft>
+            </a:pPr>
+            <a:r>
+              <a:rPr sz="1500" b="1">
+                <a:solidFill>
+                  <a:srgbClr val="0B5FD9"/>
+                </a:solidFill>
+                <a:latin typeface="Plus Jakarta Sans"/>
+              </a:rPr>
+              <a:t>→  </a:t>
+            </a:r>
+            <a:r>
+              <a:rPr sz="1500" b="0">
+                <a:solidFill>
+                  <a:srgbClr val="545F73"/>
+                </a:solidFill>
+                <a:latin typeface="Plus Jakarta Sans"/>
+              </a:rPr>
+              <a:t>alarme no horário, mesmo com o app fechado</a:t>
+            </a:r>
+          </a:p>
+        </p:txBody>
+      </p:sp>
+      <p:sp>
+        <p:nvSpPr>
+          <p:cNvPr id="10" name="Rectangle 9"/>
           <p:cNvSpPr/>
           <p:nvPr/>
         </p:nvSpPr>
         <p:spPr>
           <a:xfrm>
-            <a:off x="685800" y="2377440"/>
-            <a:ext cx="3454298" cy="91440"/>
+            <a:off x="1051560" y="4206240"/>
+            <a:ext cx="4541367" cy="18288"/>
           </a:xfrm>
           <a:prstGeom prst="rect">
             <a:avLst/>
           </a:prstGeom>
           <a:solidFill>
-            <a:srgbClr val="0B5FD9"/>
+            <a:srgbClr val="E3E7EE"/>
           </a:solidFill>
           <a:ln>
             <a:noFill/>
@@ -11774,14 +11849,14 @@
       </p:sp>
       <p:sp>
         <p:nvSpPr>
-          <p:cNvPr id="9" name="TextBox 8"/>
-          <p:cNvSpPr txBox="1"/>
-          <p:nvPr/>
-        </p:nvSpPr>
-        <p:spPr>
-          <a:xfrm>
-            <a:off x="1005840" y="2697480"/>
-            <a:ext cx="2814218" cy="1554480"/>
+          <p:cNvPr id="11" name="TextBox 10"/>
+          <p:cNvSpPr txBox="1"/>
+          <p:nvPr/>
+        </p:nvSpPr>
+        <p:spPr>
+          <a:xfrm>
+            <a:off x="1051560" y="4389120"/>
+            <a:ext cx="4541367" cy="1097280"/>
           </a:xfrm>
           <a:prstGeom prst="rect">
             <a:avLst/>
@@ -11799,7 +11874,7 @@
                 <a:spcPct val="110000"/>
               </a:lnSpc>
               <a:spcAft>
-                <a:spcPts val="500"/>
+                <a:spcPts val="400"/>
               </a:spcAft>
             </a:pPr>
             <a:r>
@@ -11809,18 +11884,27 @@
                 </a:solidFill>
                 <a:latin typeface="Plus Jakarta Sans"/>
               </a:rPr>
-              <a:t>Falta um lembrete confiável</a:t>
-            </a:r>
-          </a:p>
-          <a:p>
-            <a:pPr algn="l">
-              <a:lnSpc>
-                <a:spcPct val="110000"/>
-              </a:lnSpc>
-              <a:spcAft>
-                <a:spcPts val="500"/>
-              </a:spcAft>
-            </a:pPr>
+              <a:t>Não lembra se já tomou</a:t>
+            </a:r>
+          </a:p>
+          <a:p>
+            <a:pPr algn="l">
+              <a:lnSpc>
+                <a:spcPct val="110000"/>
+              </a:lnSpc>
+              <a:spcAft>
+                <a:spcPts val="400"/>
+              </a:spcAft>
+            </a:pPr>
+            <a:r>
+              <a:rPr sz="1500" b="1">
+                <a:solidFill>
+                  <a:srgbClr val="0B5FD9"/>
+                </a:solidFill>
+                <a:latin typeface="Plus Jakarta Sans"/>
+              </a:rPr>
+              <a:t>→  </a:t>
+            </a:r>
             <a:r>
               <a:rPr sz="1500" b="0">
                 <a:solidFill>
@@ -11828,25 +11912,25 @@
                 </a:solidFill>
                 <a:latin typeface="Plus Jakarta Sans"/>
               </a:rPr>
-              <a:t>bilhetes e anotações só funcionam se o paciente olhar na hora certa</a:t>
-            </a:r>
-          </a:p>
-        </p:txBody>
-      </p:sp>
-      <p:sp>
-        <p:nvSpPr>
-          <p:cNvPr id="10" name="Rounded Rectangle 9"/>
+              <a:t>cada resposta fica registrada com data e hora</a:t>
+            </a:r>
+          </a:p>
+        </p:txBody>
+      </p:sp>
+      <p:sp>
+        <p:nvSpPr>
+          <p:cNvPr id="12" name="Rounded Rectangle 11"/>
           <p:cNvSpPr/>
           <p:nvPr/>
         </p:nvSpPr>
         <p:spPr>
           <a:xfrm>
-            <a:off x="4368698" y="2377440"/>
-            <a:ext cx="3454298" cy="1920240"/>
+            <a:off x="6233007" y="2377440"/>
+            <a:ext cx="5272887" cy="3429000"/>
           </a:xfrm>
           <a:prstGeom prst="roundRect">
             <a:avLst>
-              <a:gd name="adj" fmla="val 6666"/>
+              <a:gd name="adj" fmla="val 3733"/>
             </a:avLst>
           </a:prstGeom>
           <a:solidFill>
@@ -11865,20 +11949,132 @@
       </p:sp>
       <p:sp>
         <p:nvSpPr>
-          <p:cNvPr id="11" name="Rectangle 10"/>
+          <p:cNvPr id="13" name="TextBox 12"/>
+          <p:cNvSpPr txBox="1"/>
+          <p:nvPr/>
+        </p:nvSpPr>
+        <p:spPr>
+          <a:xfrm>
+            <a:off x="6598767" y="2606040"/>
+            <a:ext cx="4541367" cy="365760"/>
+          </a:xfrm>
+          <a:prstGeom prst="rect">
+            <a:avLst/>
+          </a:prstGeom>
+          <a:noFill/>
+        </p:spPr>
+        <p:txBody>
+          <a:bodyPr wrap="square" lIns="0" rIns="0" tIns="0" bIns="0" anchor="t">
+            <a:spAutoFit/>
+          </a:bodyPr>
+          <a:lstStyle/>
+          <a:p>
+            <a:pPr algn="l">
+              <a:lnSpc>
+                <a:spcPct val="110000"/>
+              </a:lnSpc>
+              <a:spcAft>
+                <a:spcPts val="600"/>
+              </a:spcAft>
+            </a:pPr>
+            <a:r>
+              <a:rPr sz="1200" b="1" spc="200">
+                <a:solidFill>
+                  <a:srgbClr val="0B5FD9"/>
+                </a:solidFill>
+                <a:latin typeface="Plus Jakarta Sans"/>
+              </a:rPr>
+              <a:t>FALHA LOGÍSTICA</a:t>
+            </a:r>
+          </a:p>
+        </p:txBody>
+      </p:sp>
+      <p:sp>
+        <p:nvSpPr>
+          <p:cNvPr id="14" name="TextBox 13"/>
+          <p:cNvSpPr txBox="1"/>
+          <p:nvPr/>
+        </p:nvSpPr>
+        <p:spPr>
+          <a:xfrm>
+            <a:off x="6598767" y="3108960"/>
+            <a:ext cx="4541367" cy="1097280"/>
+          </a:xfrm>
+          <a:prstGeom prst="rect">
+            <a:avLst/>
+          </a:prstGeom>
+          <a:noFill/>
+        </p:spPr>
+        <p:txBody>
+          <a:bodyPr wrap="square" lIns="0" rIns="0" tIns="0" bIns="0" anchor="t">
+            <a:spAutoFit/>
+          </a:bodyPr>
+          <a:lstStyle/>
+          <a:p>
+            <a:pPr algn="l">
+              <a:lnSpc>
+                <a:spcPct val="110000"/>
+              </a:lnSpc>
+              <a:spcAft>
+                <a:spcPts val="400"/>
+              </a:spcAft>
+            </a:pPr>
+            <a:r>
+              <a:rPr sz="1900" b="1">
+                <a:solidFill>
+                  <a:srgbClr val="191C1E"/>
+                </a:solidFill>
+                <a:latin typeface="Plus Jakarta Sans"/>
+              </a:rPr>
+              <a:t>O remédio acabou</a:t>
+            </a:r>
+          </a:p>
+          <a:p>
+            <a:pPr algn="l">
+              <a:lnSpc>
+                <a:spcPct val="110000"/>
+              </a:lnSpc>
+              <a:spcAft>
+                <a:spcPts val="400"/>
+              </a:spcAft>
+            </a:pPr>
+            <a:r>
+              <a:rPr sz="1500" b="1">
+                <a:solidFill>
+                  <a:srgbClr val="0B5FD9"/>
+                </a:solidFill>
+                <a:latin typeface="Plus Jakarta Sans"/>
+              </a:rPr>
+              <a:t>→  </a:t>
+            </a:r>
+            <a:r>
+              <a:rPr sz="1500" b="0">
+                <a:solidFill>
+                  <a:srgbClr val="545F73"/>
+                </a:solidFill>
+                <a:latin typeface="Plus Jakarta Sans"/>
+              </a:rPr>
+              <a:t>estoque descontado a cada dose, com aviso antes de acabar</a:t>
+            </a:r>
+          </a:p>
+        </p:txBody>
+      </p:sp>
+      <p:sp>
+        <p:nvSpPr>
+          <p:cNvPr id="15" name="Rectangle 14"/>
           <p:cNvSpPr/>
           <p:nvPr/>
         </p:nvSpPr>
         <p:spPr>
           <a:xfrm>
-            <a:off x="4368698" y="2377440"/>
-            <a:ext cx="3454298" cy="91440"/>
+            <a:off x="6598767" y="4206240"/>
+            <a:ext cx="4541367" cy="18288"/>
           </a:xfrm>
           <a:prstGeom prst="rect">
             <a:avLst/>
           </a:prstGeom>
           <a:solidFill>
-            <a:srgbClr val="0B5FD9"/>
+            <a:srgbClr val="E3E7EE"/>
           </a:solidFill>
           <a:ln>
             <a:noFill/>
@@ -11893,14 +12089,14 @@
       </p:sp>
       <p:sp>
         <p:nvSpPr>
-          <p:cNvPr id="12" name="TextBox 11"/>
-          <p:cNvSpPr txBox="1"/>
-          <p:nvPr/>
-        </p:nvSpPr>
-        <p:spPr>
-          <a:xfrm>
-            <a:off x="4688738" y="2697480"/>
-            <a:ext cx="2814218" cy="1554480"/>
+          <p:cNvPr id="16" name="TextBox 15"/>
+          <p:cNvSpPr txBox="1"/>
+          <p:nvPr/>
+        </p:nvSpPr>
+        <p:spPr>
+          <a:xfrm>
+            <a:off x="6598767" y="4389120"/>
+            <a:ext cx="4541367" cy="1097280"/>
           </a:xfrm>
           <a:prstGeom prst="rect">
             <a:avLst/>
@@ -11918,7 +12114,7 @@
                 <a:spcPct val="110000"/>
               </a:lnSpc>
               <a:spcAft>
-                <a:spcPts val="500"/>
+                <a:spcPts val="400"/>
               </a:spcAft>
             </a:pPr>
             <a:r>
@@ -11928,18 +12124,27 @@
                 </a:solidFill>
                 <a:latin typeface="Plus Jakarta Sans"/>
               </a:rPr>
-              <a:t>Tudo de cabeça</a:t>
-            </a:r>
-          </a:p>
-          <a:p>
-            <a:pPr algn="l">
-              <a:lnSpc>
-                <a:spcPct val="110000"/>
-              </a:lnSpc>
-              <a:spcAft>
-                <a:spcPts val="500"/>
-              </a:spcAft>
-            </a:pPr>
+              <a:t>A consulta ou a receita passou</a:t>
+            </a:r>
+          </a:p>
+          <a:p>
+            <a:pPr algn="l">
+              <a:lnSpc>
+                <a:spcPct val="110000"/>
+              </a:lnSpc>
+              <a:spcAft>
+                <a:spcPts val="400"/>
+              </a:spcAft>
+            </a:pPr>
+            <a:r>
+              <a:rPr sz="1500" b="1">
+                <a:solidFill>
+                  <a:srgbClr val="0B5FD9"/>
+                </a:solidFill>
+                <a:latin typeface="Plus Jakarta Sans"/>
+              </a:rPr>
+              <a:t>→  </a:t>
+            </a:r>
             <a:r>
               <a:rPr sz="1500" b="0">
                 <a:solidFill>
@@ -11947,217 +12152,7 @@
                 </a:solidFill>
                 <a:latin typeface="Plus Jakarta Sans"/>
               </a:rPr>
-              <a:t>lembrar horários e calcular o estoque de vários remédios sobrecarrega a memória</a:t>
-            </a:r>
-          </a:p>
-        </p:txBody>
-      </p:sp>
-      <p:sp>
-        <p:nvSpPr>
-          <p:cNvPr id="13" name="Rounded Rectangle 12"/>
-          <p:cNvSpPr/>
-          <p:nvPr/>
-        </p:nvSpPr>
-        <p:spPr>
-          <a:xfrm>
-            <a:off x="8051596" y="2377440"/>
-            <a:ext cx="3454298" cy="1920240"/>
-          </a:xfrm>
-          <a:prstGeom prst="roundRect">
-            <a:avLst>
-              <a:gd name="adj" fmla="val 6666"/>
-            </a:avLst>
-          </a:prstGeom>
-          <a:solidFill>
-            <a:srgbClr val="FFFFFF"/>
-          </a:solidFill>
-          <a:ln>
-            <a:noFill/>
-          </a:ln>
-          <a:effectLst/>
-        </p:spPr>
-        <p:txBody>
-          <a:bodyPr rtlCol="0" anchor="ctr"/>
-          <a:lstStyle/>
-          <a:p/>
-        </p:txBody>
-      </p:sp>
-      <p:sp>
-        <p:nvSpPr>
-          <p:cNvPr id="14" name="Rectangle 13"/>
-          <p:cNvSpPr/>
-          <p:nvPr/>
-        </p:nvSpPr>
-        <p:spPr>
-          <a:xfrm>
-            <a:off x="8051596" y="2377440"/>
-            <a:ext cx="3454298" cy="91440"/>
-          </a:xfrm>
-          <a:prstGeom prst="rect">
-            <a:avLst/>
-          </a:prstGeom>
-          <a:solidFill>
-            <a:srgbClr val="0B5FD9"/>
-          </a:solidFill>
-          <a:ln>
-            <a:noFill/>
-          </a:ln>
-          <a:effectLst/>
-        </p:spPr>
-        <p:txBody>
-          <a:bodyPr rtlCol="0" anchor="ctr"/>
-          <a:lstStyle/>
-          <a:p/>
-        </p:txBody>
-      </p:sp>
-      <p:sp>
-        <p:nvSpPr>
-          <p:cNvPr id="15" name="TextBox 14"/>
-          <p:cNvSpPr txBox="1"/>
-          <p:nvPr/>
-        </p:nvSpPr>
-        <p:spPr>
-          <a:xfrm>
-            <a:off x="8371636" y="2697480"/>
-            <a:ext cx="2814218" cy="1554480"/>
-          </a:xfrm>
-          <a:prstGeom prst="rect">
-            <a:avLst/>
-          </a:prstGeom>
-          <a:noFill/>
-        </p:spPr>
-        <p:txBody>
-          <a:bodyPr wrap="square" lIns="0" rIns="0" tIns="0" bIns="0" anchor="t">
-            <a:spAutoFit/>
-          </a:bodyPr>
-          <a:lstStyle/>
-          <a:p>
-            <a:pPr algn="l">
-              <a:lnSpc>
-                <a:spcPct val="110000"/>
-              </a:lnSpc>
-              <a:spcAft>
-                <a:spcPts val="500"/>
-              </a:spcAft>
-            </a:pPr>
-            <a:r>
-              <a:rPr sz="1900" b="1">
-                <a:solidFill>
-                  <a:srgbClr val="191C1E"/>
-                </a:solidFill>
-                <a:latin typeface="Plus Jakarta Sans"/>
-              </a:rPr>
-              <a:t>Horário importa</a:t>
-            </a:r>
-          </a:p>
-          <a:p>
-            <a:pPr algn="l">
-              <a:lnSpc>
-                <a:spcPct val="110000"/>
-              </a:lnSpc>
-              <a:spcAft>
-                <a:spcPts val="500"/>
-              </a:spcAft>
-            </a:pPr>
-            <a:r>
-              <a:rPr sz="1500" b="0">
-                <a:solidFill>
-                  <a:srgbClr val="545F73"/>
-                </a:solidFill>
-                <a:latin typeface="Plus Jakarta Sans"/>
-              </a:rPr>
-              <a:t>fora do intervalo, o remédio oscila entre ineficácia e toxicidade (Brunton; Knollmann, 2024)</a:t>
-            </a:r>
-          </a:p>
-        </p:txBody>
-      </p:sp>
-      <p:sp>
-        <p:nvSpPr>
-          <p:cNvPr id="16" name="Rounded Rectangle 15"/>
-          <p:cNvSpPr/>
-          <p:nvPr/>
-        </p:nvSpPr>
-        <p:spPr>
-          <a:xfrm>
-            <a:off x="685800" y="4572000"/>
-            <a:ext cx="10820095" cy="1234440"/>
-          </a:xfrm>
-          <a:prstGeom prst="roundRect">
-            <a:avLst>
-              <a:gd name="adj" fmla="val 10370"/>
-            </a:avLst>
-          </a:prstGeom>
-          <a:solidFill>
-            <a:srgbClr val="EAF1FE"/>
-          </a:solidFill>
-          <a:ln>
-            <a:noFill/>
-          </a:ln>
-          <a:effectLst/>
-        </p:spPr>
-        <p:txBody>
-          <a:bodyPr rtlCol="0" anchor="ctr"/>
-          <a:lstStyle/>
-          <a:p/>
-        </p:txBody>
-      </p:sp>
-      <p:sp>
-        <p:nvSpPr>
-          <p:cNvPr id="17" name="TextBox 16"/>
-          <p:cNvSpPr txBox="1"/>
-          <p:nvPr/>
-        </p:nvSpPr>
-        <p:spPr>
-          <a:xfrm>
-            <a:off x="1051560" y="4572000"/>
-            <a:ext cx="10088575" cy="1234440"/>
-          </a:xfrm>
-          <a:prstGeom prst="rect">
-            <a:avLst/>
-          </a:prstGeom>
-          <a:noFill/>
-        </p:spPr>
-        <p:txBody>
-          <a:bodyPr wrap="square" lIns="0" rIns="0" tIns="0" bIns="0" anchor="ctr">
-            <a:spAutoFit/>
-          </a:bodyPr>
-          <a:lstStyle/>
-          <a:p>
-            <a:pPr algn="l">
-              <a:lnSpc>
-                <a:spcPct val="110000"/>
-              </a:lnSpc>
-              <a:spcAft>
-                <a:spcPts val="400"/>
-              </a:spcAft>
-            </a:pPr>
-            <a:r>
-              <a:rPr sz="1100" b="1" spc="200">
-                <a:solidFill>
-                  <a:srgbClr val="0A3F8F"/>
-                </a:solidFill>
-                <a:latin typeface="Plus Jakarta Sans"/>
-              </a:rPr>
-              <a:t>O MAPILL ATUA NO PONTO DA FALHA</a:t>
-            </a:r>
-          </a:p>
-          <a:p>
-            <a:pPr algn="l">
-              <a:lnSpc>
-                <a:spcPct val="110000"/>
-              </a:lnSpc>
-              <a:spcAft>
-                <a:spcPts val="400"/>
-              </a:spcAft>
-            </a:pPr>
-            <a:r>
-              <a:rPr sz="2000" b="1">
-                <a:solidFill>
-                  <a:srgbClr val="0A3F8F"/>
-                </a:solidFill>
-                <a:latin typeface="Plus Jakarta Sans"/>
-              </a:rPr>
-              <a:t>Lembrar a dose  ·  registrar o que aconteceu  ·  avisar antes de o remédio acabar</a:t>
+              <a:t>compromissos e validade da receita com lembrete</a:t>
             </a:r>
           </a:p>
         </p:txBody>

--- a/docs/tcc/apresentacao-mapill.pptx
+++ b/docs/tcc/apresentacao-mapill.pptx
@@ -3309,36 +3309,14 @@
           </a:bodyPr>
           <a:lstStyle/>
           <a:p>
-            <a:pPr indent="0" lvl="0" marL="0" rtl="0" algn="l">
-              <a:spcBef>
-                <a:spcPts val="0"/>
-              </a:spcBef>
-              <a:spcAft>
-                <a:spcPts val="0"/>
-              </a:spcAft>
-              <a:buNone/>
-            </a:pPr>
-            <a:r>
-              <a:rPr lang="en-US"/>
-              <a:t>[1 min]</a:t>
-            </a:r>
-            <a:endParaRPr/>
-          </a:p>
-          <a:p>
-            <a:pPr indent="0" lvl="0" marL="0" rtl="0" algn="l">
-              <a:spcBef>
-                <a:spcPts val="0"/>
-              </a:spcBef>
-              <a:spcAft>
-                <a:spcPts val="0"/>
-              </a:spcAft>
-              <a:buNone/>
-            </a:pPr>
-            <a:r>
-              <a:rPr lang="en-US"/>
-              <a:t>Vou passar rápido pela fundamentação, só pelo que justifica as principais decisões do projeto. Esquecer a dose é uma falha da memória prospectiva, que é lembrar de fazer algo no futuro, e por isso o centro do app é um alarme. A desoneração cognitiva explica por que o app deve calcular estoque e horários pelo paciente. O conceito de fonte única de verdade justifica juntar tudo num só lugar. O paradigma offline-first e o critério Last-Write-Wins sustentam o funcionamento sem internet e a sincronização. E as heurísticas de Nielsen, as diretrizes de acessibilidade da WCAG e a LGPD orientam a interface e o tratamento dos dados de saúde.</a:t>
-            </a:r>
-            <a:endParaRPr/>
+            <a:r>
+              <a:t>[1 min 10 s]</a:t>
+            </a:r>
+          </a:p>
+          <a:p>
+            <a:r>
+              <a:t>Vou passar rápido pela fundamentação, só pelo que sustenta as decisões do projeto. A memória prospectiva é a que usamos para lembrar de fazer algo no futuro, como tomar o remédio às oito horas, e é justamente ela que falha quando a dose é esquecida. Por isso o centro do app é um alarme, que lembra pelo paciente. A desoneração cognitiva é passar para uma ferramenta aquilo que a cabeça teria de guardar ou calcular, e é o que o app faz com o estoque e os horários. A fonte única de verdade é ter um só lugar com a informação certa, por isso remédios, estoque e consultas ficam no mesmo aplicativo. O offline-first é o app funcionar sem internet, e o Last-Write-Wins define que, num conflito entre duas edições, vence a mais recente. E as heurísticas de Nielsen, a WCAG e a LGPD orientam a interface, a acessibilidade e a proteção dos dados.</a:t>
+            </a:r>
           </a:p>
         </p:txBody>
       </p:sp>
@@ -27065,18 +27043,144 @@
       </p:sp>
       <p:sp>
         <p:nvSpPr>
-          <p:cNvPr id="216" name="Google Shape;216;p7"/>
+          <p:cNvPr id="216" name="TextBox 215"/>
+          <p:cNvSpPr txBox="1"/>
+          <p:nvPr/>
+        </p:nvSpPr>
+        <p:spPr>
+          <a:xfrm>
+            <a:off x="1005840" y="1572768"/>
+            <a:ext cx="3017520" cy="274320"/>
+          </a:xfrm>
+          <a:prstGeom prst="rect">
+            <a:avLst/>
+          </a:prstGeom>
+          <a:noFill/>
+        </p:spPr>
+        <p:txBody>
+          <a:bodyPr wrap="square" lIns="0" rIns="0" tIns="0" bIns="0" anchor="t">
+            <a:spAutoFit/>
+          </a:bodyPr>
+          <a:lstStyle/>
+          <a:p>
+            <a:pPr algn="l">
+              <a:lnSpc>
+                <a:spcPct val="110000"/>
+              </a:lnSpc>
+              <a:spcAft>
+                <a:spcPts val="600"/>
+              </a:spcAft>
+            </a:pPr>
+            <a:r>
+              <a:rPr sz="1100" b="1" spc="200">
+                <a:solidFill>
+                  <a:srgbClr val="545F73"/>
+                </a:solidFill>
+                <a:latin typeface="Plus Jakarta Sans"/>
+              </a:rPr>
+              <a:t>CONCEITO</a:t>
+            </a:r>
+          </a:p>
+        </p:txBody>
+      </p:sp>
+      <p:sp>
+        <p:nvSpPr>
+          <p:cNvPr id="217" name="TextBox 216"/>
+          <p:cNvSpPr txBox="1"/>
+          <p:nvPr/>
+        </p:nvSpPr>
+        <p:spPr>
+          <a:xfrm>
+            <a:off x="4297680" y="1572768"/>
+            <a:ext cx="4160520" cy="274320"/>
+          </a:xfrm>
+          <a:prstGeom prst="rect">
+            <a:avLst/>
+          </a:prstGeom>
+          <a:noFill/>
+        </p:spPr>
+        <p:txBody>
+          <a:bodyPr wrap="square" lIns="0" rIns="0" tIns="0" bIns="0" anchor="t">
+            <a:spAutoFit/>
+          </a:bodyPr>
+          <a:lstStyle/>
+          <a:p>
+            <a:pPr algn="l">
+              <a:lnSpc>
+                <a:spcPct val="110000"/>
+              </a:lnSpc>
+              <a:spcAft>
+                <a:spcPts val="600"/>
+              </a:spcAft>
+            </a:pPr>
+            <a:r>
+              <a:rPr sz="1100" b="1" spc="200">
+                <a:solidFill>
+                  <a:srgbClr val="545F73"/>
+                </a:solidFill>
+                <a:latin typeface="Plus Jakarta Sans"/>
+              </a:rPr>
+              <a:t>O QUE É</a:t>
+            </a:r>
+          </a:p>
+        </p:txBody>
+      </p:sp>
+      <p:sp>
+        <p:nvSpPr>
+          <p:cNvPr id="218" name="TextBox 217"/>
+          <p:cNvSpPr txBox="1"/>
+          <p:nvPr/>
+        </p:nvSpPr>
+        <p:spPr>
+          <a:xfrm>
+            <a:off x="8778240" y="1572768"/>
+            <a:ext cx="2423160" cy="274320"/>
+          </a:xfrm>
+          <a:prstGeom prst="rect">
+            <a:avLst/>
+          </a:prstGeom>
+          <a:noFill/>
+        </p:spPr>
+        <p:txBody>
+          <a:bodyPr wrap="square" lIns="0" rIns="0" tIns="0" bIns="0" anchor="t">
+            <a:spAutoFit/>
+          </a:bodyPr>
+          <a:lstStyle/>
+          <a:p>
+            <a:pPr algn="l">
+              <a:lnSpc>
+                <a:spcPct val="110000"/>
+              </a:lnSpc>
+              <a:spcAft>
+                <a:spcPts val="600"/>
+              </a:spcAft>
+            </a:pPr>
+            <a:r>
+              <a:rPr sz="1100" b="1" spc="200">
+                <a:solidFill>
+                  <a:srgbClr val="545F73"/>
+                </a:solidFill>
+                <a:latin typeface="Plus Jakarta Sans"/>
+              </a:rPr>
+              <a:t>NO MAPILL</a:t>
+            </a:r>
+          </a:p>
+        </p:txBody>
+      </p:sp>
+      <p:sp>
+        <p:nvSpPr>
+          <p:cNvPr id="219" name="Rounded Rectangle 218"/>
           <p:cNvSpPr/>
           <p:nvPr/>
         </p:nvSpPr>
         <p:spPr>
           <a:xfrm>
-            <a:off x="685800" y="1783080"/>
-            <a:ext cx="10820095" cy="713232"/>
+            <a:off x="685800" y="1901952"/>
+            <a:ext cx="10820095" cy="749808"/>
           </a:xfrm>
           <a:prstGeom prst="roundRect">
             <a:avLst>
-              <a:gd fmla="val 17948" name="adj"/>
+              <a:gd name="adj" fmla="val 17073"/>
             </a:avLst>
           </a:prstGeom>
           <a:solidFill>
@@ -27085,237 +27189,207 @@
           <a:ln>
             <a:noFill/>
           </a:ln>
-        </p:spPr>
-        <p:txBody>
-          <a:bodyPr anchorCtr="0" anchor="ctr" bIns="45700" lIns="91425" spcFirstLastPara="1" rIns="91425" wrap="square" tIns="45700">
-            <a:noAutofit/>
-          </a:bodyPr>
+          <a:effectLst/>
+        </p:spPr>
+        <p:txBody>
+          <a:bodyPr rtlCol="0" anchor="ctr"/>
           <a:lstStyle/>
           <a:p>
-            <a:pPr indent="0" lvl="0" marL="0" marR="0" rtl="0" algn="l">
-              <a:spcBef>
-                <a:spcPts val="0"/>
-              </a:spcBef>
-              <a:spcAft>
-                <a:spcPts val="0"/>
-              </a:spcAft>
-              <a:buNone/>
-            </a:pPr>
-            <a:r>
-              <a:t/>
-            </a:r>
-            <a:endParaRPr sz="1800">
-              <a:solidFill>
-                <a:schemeClr val="dk1"/>
-              </a:solidFill>
-              <a:latin typeface="Calibri"/>
-              <a:ea typeface="Calibri"/>
-              <a:cs typeface="Calibri"/>
-              <a:sym typeface="Calibri"/>
-            </a:endParaRPr>
-          </a:p>
-        </p:txBody>
-      </p:sp>
-      <p:sp>
-        <p:nvSpPr>
-          <p:cNvPr id="217" name="Google Shape;217;p7"/>
+            <a:pPr algn="ctr"/>
+          </a:p>
+        </p:txBody>
+      </p:sp>
+      <p:sp>
+        <p:nvSpPr>
+          <p:cNvPr id="220" name="Rounded Rectangle 219"/>
+          <p:cNvSpPr/>
+          <p:nvPr/>
+        </p:nvSpPr>
+        <p:spPr>
+          <a:xfrm>
+            <a:off x="8549640" y="1901952"/>
+            <a:ext cx="2956255" cy="749808"/>
+          </a:xfrm>
+          <a:prstGeom prst="roundRect">
+            <a:avLst>
+              <a:gd name="adj" fmla="val 17073"/>
+            </a:avLst>
+          </a:prstGeom>
+          <a:solidFill>
+            <a:srgbClr val="EAF1FE"/>
+          </a:solidFill>
+          <a:ln>
+            <a:noFill/>
+          </a:ln>
+          <a:effectLst/>
+        </p:spPr>
+        <p:txBody>
+          <a:bodyPr rtlCol="0" anchor="ctr"/>
+          <a:lstStyle/>
+          <a:p>
+            <a:pPr algn="ctr"/>
+          </a:p>
+        </p:txBody>
+      </p:sp>
+      <p:sp>
+        <p:nvSpPr>
+          <p:cNvPr id="221" name="TextBox 220"/>
           <p:cNvSpPr txBox="1"/>
           <p:nvPr/>
         </p:nvSpPr>
         <p:spPr>
           <a:xfrm>
-            <a:off x="1005840" y="1783080"/>
-            <a:ext cx="5120640" cy="713232"/>
+            <a:off x="1005840" y="1901952"/>
+            <a:ext cx="3017520" cy="749808"/>
           </a:xfrm>
           <a:prstGeom prst="rect">
             <a:avLst/>
           </a:prstGeom>
           <a:noFill/>
-          <a:ln>
-            <a:noFill/>
-          </a:ln>
-        </p:spPr>
-        <p:txBody>
-          <a:bodyPr anchorCtr="0" anchor="ctr" bIns="0" lIns="0" spcFirstLastPara="1" rIns="0" wrap="square" tIns="0">
+        </p:spPr>
+        <p:txBody>
+          <a:bodyPr wrap="square" lIns="0" rIns="0" tIns="0" bIns="0" anchor="ctr">
             <a:spAutoFit/>
           </a:bodyPr>
           <a:lstStyle/>
           <a:p>
-            <a:pPr indent="0" lvl="0" marL="0" marR="0" rtl="0" algn="l">
+            <a:pPr algn="l">
               <a:lnSpc>
-                <a:spcPct val="110000"/>
+                <a:spcPct val="100000"/>
               </a:lnSpc>
-              <a:spcBef>
-                <a:spcPts val="0"/>
-              </a:spcBef>
-              <a:spcAft>
-                <a:spcPts val="0"/>
-              </a:spcAft>
-              <a:buNone/>
-            </a:pPr>
-            <a:r>
-              <a:rPr b="1" lang="en-US" sz="1700">
+              <a:spcAft>
+                <a:spcPts val="100"/>
+              </a:spcAft>
+            </a:pPr>
+            <a:r>
+              <a:rPr sz="1500" b="1">
                 <a:solidFill>
                   <a:srgbClr val="191C1E"/>
                 </a:solidFill>
                 <a:latin typeface="Plus Jakarta Sans"/>
-                <a:ea typeface="Plus Jakarta Sans"/>
-                <a:cs typeface="Plus Jakarta Sans"/>
-                <a:sym typeface="Plus Jakarta Sans"/>
               </a:rPr>
               <a:t>Memória prospectiva</a:t>
             </a:r>
-            <a:endParaRPr/>
-          </a:p>
-          <a:p>
-            <a:pPr indent="0" lvl="0" marL="0" marR="0" rtl="0" algn="l">
+          </a:p>
+          <a:p>
+            <a:pPr algn="l">
               <a:lnSpc>
-                <a:spcPct val="110000"/>
+                <a:spcPct val="100000"/>
               </a:lnSpc>
-              <a:spcBef>
-                <a:spcPts val="0"/>
-              </a:spcBef>
-              <a:spcAft>
-                <a:spcPts val="0"/>
-              </a:spcAft>
-              <a:buNone/>
-            </a:pPr>
-            <a:r>
-              <a:rPr b="0" lang="en-US" sz="1200">
+              <a:spcAft>
+                <a:spcPts val="100"/>
+              </a:spcAft>
+            </a:pPr>
+            <a:r>
+              <a:rPr sz="1000" b="0">
                 <a:solidFill>
                   <a:srgbClr val="545F73"/>
                 </a:solidFill>
                 <a:latin typeface="Plus Jakarta Sans"/>
-                <a:ea typeface="Plus Jakarta Sans"/>
-                <a:cs typeface="Plus Jakarta Sans"/>
-                <a:sym typeface="Plus Jakarta Sans"/>
               </a:rPr>
               <a:t>Baddeley; Eysenck; Anderson, 2010</a:t>
             </a:r>
-            <a:endParaRPr/>
-          </a:p>
-        </p:txBody>
-      </p:sp>
-      <p:sp>
-        <p:nvSpPr>
-          <p:cNvPr id="218" name="Google Shape;218;p7"/>
+          </a:p>
+        </p:txBody>
+      </p:sp>
+      <p:sp>
+        <p:nvSpPr>
+          <p:cNvPr id="222" name="TextBox 221"/>
           <p:cNvSpPr txBox="1"/>
           <p:nvPr/>
         </p:nvSpPr>
         <p:spPr>
           <a:xfrm>
-            <a:off x="5989320" y="1783080"/>
-            <a:ext cx="457200" cy="713232"/>
+            <a:off x="4297680" y="1901952"/>
+            <a:ext cx="4160520" cy="749808"/>
           </a:xfrm>
           <a:prstGeom prst="rect">
             <a:avLst/>
           </a:prstGeom>
           <a:noFill/>
-          <a:ln>
-            <a:noFill/>
-          </a:ln>
-        </p:spPr>
-        <p:txBody>
-          <a:bodyPr anchorCtr="0" anchor="ctr" bIns="0" lIns="0" spcFirstLastPara="1" rIns="0" wrap="square" tIns="0">
+        </p:spPr>
+        <p:txBody>
+          <a:bodyPr wrap="square" lIns="0" rIns="0" tIns="0" bIns="0" anchor="ctr">
             <a:spAutoFit/>
           </a:bodyPr>
           <a:lstStyle/>
           <a:p>
-            <a:pPr indent="0" lvl="0" marL="0" marR="0" rtl="0" algn="l">
+            <a:pPr algn="l">
               <a:lnSpc>
-                <a:spcPct val="110000"/>
+                <a:spcPct val="105000"/>
               </a:lnSpc>
-              <a:spcBef>
-                <a:spcPts val="0"/>
-              </a:spcBef>
-              <a:spcAft>
-                <a:spcPts val="0"/>
-              </a:spcAft>
-              <a:buNone/>
-            </a:pPr>
-            <a:r>
-              <a:rPr b="1" lang="en-US" sz="2000">
-                <a:solidFill>
-                  <a:srgbClr val="0B5FD9"/>
+              <a:spcAft>
+                <a:spcPts val="600"/>
+              </a:spcAft>
+            </a:pPr>
+            <a:r>
+              <a:rPr sz="1300" b="0">
+                <a:solidFill>
+                  <a:srgbClr val="191C1E"/>
                 </a:solidFill>
                 <a:latin typeface="Plus Jakarta Sans"/>
-                <a:ea typeface="Plus Jakarta Sans"/>
-                <a:cs typeface="Plus Jakarta Sans"/>
-                <a:sym typeface="Plus Jakarta Sans"/>
               </a:rPr>
-              <a:t>→</a:t>
-            </a:r>
-            <a:endParaRPr/>
-          </a:p>
-        </p:txBody>
-      </p:sp>
-      <p:sp>
-        <p:nvSpPr>
-          <p:cNvPr id="219" name="Google Shape;219;p7"/>
+              <a:t>lembrar de fazer algo no futuro, como tomar o remédio às 8h</a:t>
+            </a:r>
+          </a:p>
+        </p:txBody>
+      </p:sp>
+      <p:sp>
+        <p:nvSpPr>
+          <p:cNvPr id="223" name="TextBox 222"/>
           <p:cNvSpPr txBox="1"/>
           <p:nvPr/>
         </p:nvSpPr>
         <p:spPr>
           <a:xfrm>
-            <a:off x="6537960" y="1783080"/>
-            <a:ext cx="4754880" cy="713232"/>
+            <a:off x="8778240" y="1901952"/>
+            <a:ext cx="2423160" cy="749808"/>
           </a:xfrm>
           <a:prstGeom prst="rect">
             <a:avLst/>
           </a:prstGeom>
           <a:noFill/>
-          <a:ln>
-            <a:noFill/>
-          </a:ln>
-        </p:spPr>
-        <p:txBody>
-          <a:bodyPr anchorCtr="0" anchor="ctr" bIns="0" lIns="0" spcFirstLastPara="1" rIns="0" wrap="square" tIns="0">
+        </p:spPr>
+        <p:txBody>
+          <a:bodyPr wrap="square" lIns="0" rIns="0" tIns="0" bIns="0" anchor="ctr">
             <a:spAutoFit/>
           </a:bodyPr>
           <a:lstStyle/>
           <a:p>
-            <a:pPr indent="0" lvl="0" marL="0" marR="0" rtl="0" algn="l">
+            <a:pPr algn="l">
               <a:lnSpc>
-                <a:spcPct val="110000"/>
+                <a:spcPct val="105000"/>
               </a:lnSpc>
-              <a:spcBef>
-                <a:spcPts val="0"/>
-              </a:spcBef>
-              <a:spcAft>
-                <a:spcPts val="0"/>
-              </a:spcAft>
-              <a:buNone/>
-            </a:pPr>
-            <a:r>
-              <a:rPr b="0" lang="en-US" sz="1700">
-                <a:solidFill>
-                  <a:srgbClr val="191C1E"/>
+              <a:spcAft>
+                <a:spcPts val="600"/>
+              </a:spcAft>
+            </a:pPr>
+            <a:r>
+              <a:rPr sz="1300" b="1">
+                <a:solidFill>
+                  <a:srgbClr val="0A3F8F"/>
                 </a:solidFill>
                 <a:latin typeface="Plus Jakarta Sans"/>
-                <a:ea typeface="Plus Jakarta Sans"/>
-                <a:cs typeface="Plus Jakarta Sans"/>
-                <a:sym typeface="Plus Jakarta Sans"/>
               </a:rPr>
-              <a:t>O alarme é a pista externa</a:t>
-            </a:r>
-            <a:endParaRPr/>
-          </a:p>
-        </p:txBody>
-      </p:sp>
-      <p:sp>
-        <p:nvSpPr>
-          <p:cNvPr id="220" name="Google Shape;220;p7"/>
+              <a:t>o alarme lembra pelo paciente</a:t>
+            </a:r>
+          </a:p>
+        </p:txBody>
+      </p:sp>
+      <p:sp>
+        <p:nvSpPr>
+          <p:cNvPr id="224" name="Rounded Rectangle 223"/>
           <p:cNvSpPr/>
           <p:nvPr/>
         </p:nvSpPr>
         <p:spPr>
           <a:xfrm>
-            <a:off x="685800" y="2633472"/>
-            <a:ext cx="10820095" cy="713232"/>
+            <a:off x="685800" y="2743200"/>
+            <a:ext cx="10820095" cy="749808"/>
           </a:xfrm>
           <a:prstGeom prst="roundRect">
             <a:avLst>
-              <a:gd fmla="val 17948" name="adj"/>
+              <a:gd name="adj" fmla="val 17073"/>
             </a:avLst>
           </a:prstGeom>
           <a:solidFill>
@@ -27324,237 +27398,207 @@
           <a:ln>
             <a:noFill/>
           </a:ln>
-        </p:spPr>
-        <p:txBody>
-          <a:bodyPr anchorCtr="0" anchor="ctr" bIns="45700" lIns="91425" spcFirstLastPara="1" rIns="91425" wrap="square" tIns="45700">
-            <a:noAutofit/>
-          </a:bodyPr>
+          <a:effectLst/>
+        </p:spPr>
+        <p:txBody>
+          <a:bodyPr rtlCol="0" anchor="ctr"/>
           <a:lstStyle/>
           <a:p>
-            <a:pPr indent="0" lvl="0" marL="0" marR="0" rtl="0" algn="l">
-              <a:spcBef>
-                <a:spcPts val="0"/>
-              </a:spcBef>
-              <a:spcAft>
-                <a:spcPts val="0"/>
-              </a:spcAft>
-              <a:buNone/>
-            </a:pPr>
-            <a:r>
-              <a:t/>
-            </a:r>
-            <a:endParaRPr sz="1800">
-              <a:solidFill>
-                <a:schemeClr val="dk1"/>
-              </a:solidFill>
-              <a:latin typeface="Calibri"/>
-              <a:ea typeface="Calibri"/>
-              <a:cs typeface="Calibri"/>
-              <a:sym typeface="Calibri"/>
-            </a:endParaRPr>
-          </a:p>
-        </p:txBody>
-      </p:sp>
-      <p:sp>
-        <p:nvSpPr>
-          <p:cNvPr id="221" name="Google Shape;221;p7"/>
+            <a:pPr algn="ctr"/>
+          </a:p>
+        </p:txBody>
+      </p:sp>
+      <p:sp>
+        <p:nvSpPr>
+          <p:cNvPr id="225" name="Rounded Rectangle 224"/>
+          <p:cNvSpPr/>
+          <p:nvPr/>
+        </p:nvSpPr>
+        <p:spPr>
+          <a:xfrm>
+            <a:off x="8549640" y="2743200"/>
+            <a:ext cx="2956255" cy="749808"/>
+          </a:xfrm>
+          <a:prstGeom prst="roundRect">
+            <a:avLst>
+              <a:gd name="adj" fmla="val 17073"/>
+            </a:avLst>
+          </a:prstGeom>
+          <a:solidFill>
+            <a:srgbClr val="EAF1FE"/>
+          </a:solidFill>
+          <a:ln>
+            <a:noFill/>
+          </a:ln>
+          <a:effectLst/>
+        </p:spPr>
+        <p:txBody>
+          <a:bodyPr rtlCol="0" anchor="ctr"/>
+          <a:lstStyle/>
+          <a:p>
+            <a:pPr algn="ctr"/>
+          </a:p>
+        </p:txBody>
+      </p:sp>
+      <p:sp>
+        <p:nvSpPr>
+          <p:cNvPr id="226" name="TextBox 225"/>
           <p:cNvSpPr txBox="1"/>
           <p:nvPr/>
         </p:nvSpPr>
         <p:spPr>
           <a:xfrm>
-            <a:off x="1005840" y="2633472"/>
-            <a:ext cx="5120640" cy="713232"/>
+            <a:off x="1005840" y="2743200"/>
+            <a:ext cx="3017520" cy="749808"/>
           </a:xfrm>
           <a:prstGeom prst="rect">
             <a:avLst/>
           </a:prstGeom>
           <a:noFill/>
-          <a:ln>
-            <a:noFill/>
-          </a:ln>
-        </p:spPr>
-        <p:txBody>
-          <a:bodyPr anchorCtr="0" anchor="ctr" bIns="0" lIns="0" spcFirstLastPara="1" rIns="0" wrap="square" tIns="0">
+        </p:spPr>
+        <p:txBody>
+          <a:bodyPr wrap="square" lIns="0" rIns="0" tIns="0" bIns="0" anchor="ctr">
             <a:spAutoFit/>
           </a:bodyPr>
           <a:lstStyle/>
           <a:p>
-            <a:pPr indent="0" lvl="0" marL="0" marR="0" rtl="0" algn="l">
+            <a:pPr algn="l">
               <a:lnSpc>
-                <a:spcPct val="110000"/>
+                <a:spcPct val="100000"/>
               </a:lnSpc>
-              <a:spcBef>
-                <a:spcPts val="0"/>
-              </a:spcBef>
-              <a:spcAft>
-                <a:spcPts val="0"/>
-              </a:spcAft>
-              <a:buNone/>
-            </a:pPr>
-            <a:r>
-              <a:rPr b="1" lang="en-US" sz="1700">
+              <a:spcAft>
+                <a:spcPts val="100"/>
+              </a:spcAft>
+            </a:pPr>
+            <a:r>
+              <a:rPr sz="1500" b="1">
                 <a:solidFill>
                   <a:srgbClr val="191C1E"/>
                 </a:solidFill>
                 <a:latin typeface="Plus Jakarta Sans"/>
-                <a:ea typeface="Plus Jakarta Sans"/>
-                <a:cs typeface="Plus Jakarta Sans"/>
-                <a:sym typeface="Plus Jakarta Sans"/>
               </a:rPr>
               <a:t>Desoneração cognitiva</a:t>
             </a:r>
-            <a:endParaRPr/>
-          </a:p>
-          <a:p>
-            <a:pPr indent="0" lvl="0" marL="0" marR="0" rtl="0" algn="l">
+          </a:p>
+          <a:p>
+            <a:pPr algn="l">
               <a:lnSpc>
-                <a:spcPct val="110000"/>
+                <a:spcPct val="100000"/>
               </a:lnSpc>
-              <a:spcBef>
-                <a:spcPts val="0"/>
-              </a:spcBef>
-              <a:spcAft>
-                <a:spcPts val="0"/>
-              </a:spcAft>
-              <a:buNone/>
-            </a:pPr>
-            <a:r>
-              <a:rPr b="0" lang="en-US" sz="1200">
+              <a:spcAft>
+                <a:spcPts val="100"/>
+              </a:spcAft>
+            </a:pPr>
+            <a:r>
+              <a:rPr sz="1000" b="0">
                 <a:solidFill>
                   <a:srgbClr val="545F73"/>
                 </a:solidFill>
                 <a:latin typeface="Plus Jakarta Sans"/>
-                <a:ea typeface="Plus Jakarta Sans"/>
-                <a:cs typeface="Plus Jakarta Sans"/>
-                <a:sym typeface="Plus Jakarta Sans"/>
               </a:rPr>
               <a:t>Risko; Gilbert, 2016</a:t>
             </a:r>
-            <a:endParaRPr/>
-          </a:p>
-        </p:txBody>
-      </p:sp>
-      <p:sp>
-        <p:nvSpPr>
-          <p:cNvPr id="222" name="Google Shape;222;p7"/>
+          </a:p>
+        </p:txBody>
+      </p:sp>
+      <p:sp>
+        <p:nvSpPr>
+          <p:cNvPr id="227" name="TextBox 226"/>
           <p:cNvSpPr txBox="1"/>
           <p:nvPr/>
         </p:nvSpPr>
         <p:spPr>
           <a:xfrm>
-            <a:off x="5989320" y="2633472"/>
-            <a:ext cx="457200" cy="713232"/>
+            <a:off x="4297680" y="2743200"/>
+            <a:ext cx="4160520" cy="749808"/>
           </a:xfrm>
           <a:prstGeom prst="rect">
             <a:avLst/>
           </a:prstGeom>
           <a:noFill/>
-          <a:ln>
-            <a:noFill/>
-          </a:ln>
-        </p:spPr>
-        <p:txBody>
-          <a:bodyPr anchorCtr="0" anchor="ctr" bIns="0" lIns="0" spcFirstLastPara="1" rIns="0" wrap="square" tIns="0">
+        </p:spPr>
+        <p:txBody>
+          <a:bodyPr wrap="square" lIns="0" rIns="0" tIns="0" bIns="0" anchor="ctr">
             <a:spAutoFit/>
           </a:bodyPr>
           <a:lstStyle/>
           <a:p>
-            <a:pPr indent="0" lvl="0" marL="0" marR="0" rtl="0" algn="l">
+            <a:pPr algn="l">
               <a:lnSpc>
-                <a:spcPct val="110000"/>
+                <a:spcPct val="105000"/>
               </a:lnSpc>
-              <a:spcBef>
-                <a:spcPts val="0"/>
-              </a:spcBef>
-              <a:spcAft>
-                <a:spcPts val="0"/>
-              </a:spcAft>
-              <a:buNone/>
-            </a:pPr>
-            <a:r>
-              <a:rPr b="1" lang="en-US" sz="2000">
-                <a:solidFill>
-                  <a:srgbClr val="0B5FD9"/>
+              <a:spcAft>
+                <a:spcPts val="600"/>
+              </a:spcAft>
+            </a:pPr>
+            <a:r>
+              <a:rPr sz="1300" b="0">
+                <a:solidFill>
+                  <a:srgbClr val="191C1E"/>
                 </a:solidFill>
                 <a:latin typeface="Plus Jakarta Sans"/>
-                <a:ea typeface="Plus Jakarta Sans"/>
-                <a:cs typeface="Plus Jakarta Sans"/>
-                <a:sym typeface="Plus Jakarta Sans"/>
               </a:rPr>
-              <a:t>→</a:t>
-            </a:r>
-            <a:endParaRPr/>
-          </a:p>
-        </p:txBody>
-      </p:sp>
-      <p:sp>
-        <p:nvSpPr>
-          <p:cNvPr id="223" name="Google Shape;223;p7"/>
+              <a:t>passar para uma ferramenta o que a cabeça teria de guardar ou calcular</a:t>
+            </a:r>
+          </a:p>
+        </p:txBody>
+      </p:sp>
+      <p:sp>
+        <p:nvSpPr>
+          <p:cNvPr id="228" name="TextBox 227"/>
           <p:cNvSpPr txBox="1"/>
           <p:nvPr/>
         </p:nvSpPr>
         <p:spPr>
           <a:xfrm>
-            <a:off x="6537960" y="2633472"/>
-            <a:ext cx="4754880" cy="713232"/>
+            <a:off x="8778240" y="2743200"/>
+            <a:ext cx="2423160" cy="749808"/>
           </a:xfrm>
           <a:prstGeom prst="rect">
             <a:avLst/>
           </a:prstGeom>
           <a:noFill/>
-          <a:ln>
-            <a:noFill/>
-          </a:ln>
-        </p:spPr>
-        <p:txBody>
-          <a:bodyPr anchorCtr="0" anchor="ctr" bIns="0" lIns="0" spcFirstLastPara="1" rIns="0" wrap="square" tIns="0">
+        </p:spPr>
+        <p:txBody>
+          <a:bodyPr wrap="square" lIns="0" rIns="0" tIns="0" bIns="0" anchor="ctr">
             <a:spAutoFit/>
           </a:bodyPr>
           <a:lstStyle/>
           <a:p>
-            <a:pPr indent="0" lvl="0" marL="0" marR="0" rtl="0" algn="l">
+            <a:pPr algn="l">
               <a:lnSpc>
-                <a:spcPct val="110000"/>
+                <a:spcPct val="105000"/>
               </a:lnSpc>
-              <a:spcBef>
-                <a:spcPts val="0"/>
-              </a:spcBef>
-              <a:spcAft>
-                <a:spcPts val="0"/>
-              </a:spcAft>
-              <a:buNone/>
-            </a:pPr>
-            <a:r>
-              <a:rPr b="0" lang="en-US" sz="1700">
-                <a:solidFill>
-                  <a:srgbClr val="191C1E"/>
+              <a:spcAft>
+                <a:spcPts val="600"/>
+              </a:spcAft>
+            </a:pPr>
+            <a:r>
+              <a:rPr sz="1300" b="1">
+                <a:solidFill>
+                  <a:srgbClr val="0A3F8F"/>
                 </a:solidFill>
                 <a:latin typeface="Plus Jakarta Sans"/>
-                <a:ea typeface="Plus Jakarta Sans"/>
-                <a:cs typeface="Plus Jakarta Sans"/>
-                <a:sym typeface="Plus Jakarta Sans"/>
               </a:rPr>
-              <a:t>O app calcula estoque e horários</a:t>
-            </a:r>
-            <a:endParaRPr/>
-          </a:p>
-        </p:txBody>
-      </p:sp>
-      <p:sp>
-        <p:nvSpPr>
-          <p:cNvPr id="224" name="Google Shape;224;p7"/>
+              <a:t>o app calcula estoque e horários</a:t>
+            </a:r>
+          </a:p>
+        </p:txBody>
+      </p:sp>
+      <p:sp>
+        <p:nvSpPr>
+          <p:cNvPr id="229" name="Rounded Rectangle 228"/>
           <p:cNvSpPr/>
           <p:nvPr/>
         </p:nvSpPr>
         <p:spPr>
           <a:xfrm>
-            <a:off x="685800" y="3483864"/>
-            <a:ext cx="10820095" cy="713232"/>
+            <a:off x="685800" y="3584448"/>
+            <a:ext cx="10820095" cy="749808"/>
           </a:xfrm>
           <a:prstGeom prst="roundRect">
             <a:avLst>
-              <a:gd fmla="val 17948" name="adj"/>
+              <a:gd name="adj" fmla="val 17073"/>
             </a:avLst>
           </a:prstGeom>
           <a:solidFill>
@@ -27563,237 +27607,207 @@
           <a:ln>
             <a:noFill/>
           </a:ln>
-        </p:spPr>
-        <p:txBody>
-          <a:bodyPr anchorCtr="0" anchor="ctr" bIns="45700" lIns="91425" spcFirstLastPara="1" rIns="91425" wrap="square" tIns="45700">
-            <a:noAutofit/>
-          </a:bodyPr>
+          <a:effectLst/>
+        </p:spPr>
+        <p:txBody>
+          <a:bodyPr rtlCol="0" anchor="ctr"/>
           <a:lstStyle/>
           <a:p>
-            <a:pPr indent="0" lvl="0" marL="0" marR="0" rtl="0" algn="l">
-              <a:spcBef>
-                <a:spcPts val="0"/>
-              </a:spcBef>
-              <a:spcAft>
-                <a:spcPts val="0"/>
-              </a:spcAft>
-              <a:buNone/>
-            </a:pPr>
-            <a:r>
-              <a:t/>
-            </a:r>
-            <a:endParaRPr sz="1800">
-              <a:solidFill>
-                <a:schemeClr val="dk1"/>
-              </a:solidFill>
-              <a:latin typeface="Calibri"/>
-              <a:ea typeface="Calibri"/>
-              <a:cs typeface="Calibri"/>
-              <a:sym typeface="Calibri"/>
-            </a:endParaRPr>
-          </a:p>
-        </p:txBody>
-      </p:sp>
-      <p:sp>
-        <p:nvSpPr>
-          <p:cNvPr id="225" name="Google Shape;225;p7"/>
+            <a:pPr algn="ctr"/>
+          </a:p>
+        </p:txBody>
+      </p:sp>
+      <p:sp>
+        <p:nvSpPr>
+          <p:cNvPr id="230" name="Rounded Rectangle 229"/>
+          <p:cNvSpPr/>
+          <p:nvPr/>
+        </p:nvSpPr>
+        <p:spPr>
+          <a:xfrm>
+            <a:off x="8549640" y="3584448"/>
+            <a:ext cx="2956255" cy="749808"/>
+          </a:xfrm>
+          <a:prstGeom prst="roundRect">
+            <a:avLst>
+              <a:gd name="adj" fmla="val 17073"/>
+            </a:avLst>
+          </a:prstGeom>
+          <a:solidFill>
+            <a:srgbClr val="EAF1FE"/>
+          </a:solidFill>
+          <a:ln>
+            <a:noFill/>
+          </a:ln>
+          <a:effectLst/>
+        </p:spPr>
+        <p:txBody>
+          <a:bodyPr rtlCol="0" anchor="ctr"/>
+          <a:lstStyle/>
+          <a:p>
+            <a:pPr algn="ctr"/>
+          </a:p>
+        </p:txBody>
+      </p:sp>
+      <p:sp>
+        <p:nvSpPr>
+          <p:cNvPr id="231" name="TextBox 230"/>
           <p:cNvSpPr txBox="1"/>
           <p:nvPr/>
         </p:nvSpPr>
         <p:spPr>
           <a:xfrm>
-            <a:off x="1005840" y="3483864"/>
-            <a:ext cx="5120640" cy="713232"/>
+            <a:off x="1005840" y="3584448"/>
+            <a:ext cx="3017520" cy="749808"/>
           </a:xfrm>
           <a:prstGeom prst="rect">
             <a:avLst/>
           </a:prstGeom>
           <a:noFill/>
-          <a:ln>
-            <a:noFill/>
-          </a:ln>
-        </p:spPr>
-        <p:txBody>
-          <a:bodyPr anchorCtr="0" anchor="ctr" bIns="0" lIns="0" spcFirstLastPara="1" rIns="0" wrap="square" tIns="0">
+        </p:spPr>
+        <p:txBody>
+          <a:bodyPr wrap="square" lIns="0" rIns="0" tIns="0" bIns="0" anchor="ctr">
             <a:spAutoFit/>
           </a:bodyPr>
           <a:lstStyle/>
           <a:p>
-            <a:pPr indent="0" lvl="0" marL="0" marR="0" rtl="0" algn="l">
+            <a:pPr algn="l">
               <a:lnSpc>
-                <a:spcPct val="110000"/>
+                <a:spcPct val="100000"/>
               </a:lnSpc>
-              <a:spcBef>
-                <a:spcPts val="0"/>
-              </a:spcBef>
-              <a:spcAft>
-                <a:spcPts val="0"/>
-              </a:spcAft>
-              <a:buNone/>
-            </a:pPr>
-            <a:r>
-              <a:rPr b="1" lang="en-US" sz="1700">
+              <a:spcAft>
+                <a:spcPts val="100"/>
+              </a:spcAft>
+            </a:pPr>
+            <a:r>
+              <a:rPr sz="1500" b="1">
                 <a:solidFill>
                   <a:srgbClr val="191C1E"/>
                 </a:solidFill>
                 <a:latin typeface="Plus Jakarta Sans"/>
-                <a:ea typeface="Plus Jakarta Sans"/>
-                <a:cs typeface="Plus Jakarta Sans"/>
-                <a:sym typeface="Plus Jakarta Sans"/>
               </a:rPr>
               <a:t>Fonte única de verdade</a:t>
             </a:r>
-            <a:endParaRPr/>
-          </a:p>
-          <a:p>
-            <a:pPr indent="0" lvl="0" marL="0" marR="0" rtl="0" algn="l">
+          </a:p>
+          <a:p>
+            <a:pPr algn="l">
               <a:lnSpc>
-                <a:spcPct val="110000"/>
+                <a:spcPct val="100000"/>
               </a:lnSpc>
-              <a:spcBef>
-                <a:spcPts val="0"/>
-              </a:spcBef>
-              <a:spcAft>
-                <a:spcPts val="0"/>
-              </a:spcAft>
-              <a:buNone/>
-            </a:pPr>
-            <a:r>
-              <a:rPr b="0" lang="en-US" sz="1200">
+              <a:spcAft>
+                <a:spcPts val="100"/>
+              </a:spcAft>
+            </a:pPr>
+            <a:r>
+              <a:rPr sz="1000" b="0">
                 <a:solidFill>
                   <a:srgbClr val="545F73"/>
                 </a:solidFill>
                 <a:latin typeface="Plus Jakarta Sans"/>
-                <a:ea typeface="Plus Jakarta Sans"/>
-                <a:cs typeface="Plus Jakarta Sans"/>
-                <a:sym typeface="Plus Jakarta Sans"/>
               </a:rPr>
               <a:t>Loshin, 2010</a:t>
             </a:r>
-            <a:endParaRPr/>
-          </a:p>
-        </p:txBody>
-      </p:sp>
-      <p:sp>
-        <p:nvSpPr>
-          <p:cNvPr id="226" name="Google Shape;226;p7"/>
+          </a:p>
+        </p:txBody>
+      </p:sp>
+      <p:sp>
+        <p:nvSpPr>
+          <p:cNvPr id="232" name="TextBox 231"/>
           <p:cNvSpPr txBox="1"/>
           <p:nvPr/>
         </p:nvSpPr>
         <p:spPr>
           <a:xfrm>
-            <a:off x="5989320" y="3483864"/>
-            <a:ext cx="457200" cy="713232"/>
+            <a:off x="4297680" y="3584448"/>
+            <a:ext cx="4160520" cy="749808"/>
           </a:xfrm>
           <a:prstGeom prst="rect">
             <a:avLst/>
           </a:prstGeom>
           <a:noFill/>
-          <a:ln>
-            <a:noFill/>
-          </a:ln>
-        </p:spPr>
-        <p:txBody>
-          <a:bodyPr anchorCtr="0" anchor="ctr" bIns="0" lIns="0" spcFirstLastPara="1" rIns="0" wrap="square" tIns="0">
+        </p:spPr>
+        <p:txBody>
+          <a:bodyPr wrap="square" lIns="0" rIns="0" tIns="0" bIns="0" anchor="ctr">
             <a:spAutoFit/>
           </a:bodyPr>
           <a:lstStyle/>
           <a:p>
-            <a:pPr indent="0" lvl="0" marL="0" marR="0" rtl="0" algn="l">
+            <a:pPr algn="l">
               <a:lnSpc>
-                <a:spcPct val="110000"/>
+                <a:spcPct val="105000"/>
               </a:lnSpc>
-              <a:spcBef>
-                <a:spcPts val="0"/>
-              </a:spcBef>
-              <a:spcAft>
-                <a:spcPts val="0"/>
-              </a:spcAft>
-              <a:buNone/>
-            </a:pPr>
-            <a:r>
-              <a:rPr b="1" lang="en-US" sz="2000">
-                <a:solidFill>
-                  <a:srgbClr val="0B5FD9"/>
+              <a:spcAft>
+                <a:spcPts val="600"/>
+              </a:spcAft>
+            </a:pPr>
+            <a:r>
+              <a:rPr sz="1300" b="0">
+                <a:solidFill>
+                  <a:srgbClr val="191C1E"/>
                 </a:solidFill>
                 <a:latin typeface="Plus Jakarta Sans"/>
-                <a:ea typeface="Plus Jakarta Sans"/>
-                <a:cs typeface="Plus Jakarta Sans"/>
-                <a:sym typeface="Plus Jakarta Sans"/>
               </a:rPr>
-              <a:t>→</a:t>
-            </a:r>
-            <a:endParaRPr/>
-          </a:p>
-        </p:txBody>
-      </p:sp>
-      <p:sp>
-        <p:nvSpPr>
-          <p:cNvPr id="227" name="Google Shape;227;p7"/>
+              <a:t>um só lugar com a versão certa da informação, sem cópias desencontradas</a:t>
+            </a:r>
+          </a:p>
+        </p:txBody>
+      </p:sp>
+      <p:sp>
+        <p:nvSpPr>
+          <p:cNvPr id="233" name="TextBox 232"/>
           <p:cNvSpPr txBox="1"/>
           <p:nvPr/>
         </p:nvSpPr>
         <p:spPr>
           <a:xfrm>
-            <a:off x="6537960" y="3483864"/>
-            <a:ext cx="4754880" cy="713232"/>
+            <a:off x="8778240" y="3584448"/>
+            <a:ext cx="2423160" cy="749808"/>
           </a:xfrm>
           <a:prstGeom prst="rect">
             <a:avLst/>
           </a:prstGeom>
           <a:noFill/>
-          <a:ln>
-            <a:noFill/>
-          </a:ln>
-        </p:spPr>
-        <p:txBody>
-          <a:bodyPr anchorCtr="0" anchor="ctr" bIns="0" lIns="0" spcFirstLastPara="1" rIns="0" wrap="square" tIns="0">
+        </p:spPr>
+        <p:txBody>
+          <a:bodyPr wrap="square" lIns="0" rIns="0" tIns="0" bIns="0" anchor="ctr">
             <a:spAutoFit/>
           </a:bodyPr>
           <a:lstStyle/>
           <a:p>
-            <a:pPr indent="0" lvl="0" marL="0" marR="0" rtl="0" algn="l">
+            <a:pPr algn="l">
               <a:lnSpc>
-                <a:spcPct val="110000"/>
+                <a:spcPct val="105000"/>
               </a:lnSpc>
-              <a:spcBef>
-                <a:spcPts val="0"/>
-              </a:spcBef>
-              <a:spcAft>
-                <a:spcPts val="0"/>
-              </a:spcAft>
-              <a:buNone/>
-            </a:pPr>
-            <a:r>
-              <a:rPr b="0" lang="en-US" sz="1700">
-                <a:solidFill>
-                  <a:srgbClr val="191C1E"/>
+              <a:spcAft>
+                <a:spcPts val="600"/>
+              </a:spcAft>
+            </a:pPr>
+            <a:r>
+              <a:rPr sz="1300" b="1">
+                <a:solidFill>
+                  <a:srgbClr val="0A3F8F"/>
                 </a:solidFill>
                 <a:latin typeface="Plus Jakarta Sans"/>
-                <a:ea typeface="Plus Jakarta Sans"/>
-                <a:cs typeface="Plus Jakarta Sans"/>
-                <a:sym typeface="Plus Jakarta Sans"/>
               </a:rPr>
-              <a:t>Remédios, estoque e consultas num lugar só</a:t>
-            </a:r>
-            <a:endParaRPr/>
-          </a:p>
-        </p:txBody>
-      </p:sp>
-      <p:sp>
-        <p:nvSpPr>
-          <p:cNvPr id="228" name="Google Shape;228;p7"/>
+              <a:t>remédios, estoque e consultas juntos</a:t>
+            </a:r>
+          </a:p>
+        </p:txBody>
+      </p:sp>
+      <p:sp>
+        <p:nvSpPr>
+          <p:cNvPr id="234" name="Rounded Rectangle 233"/>
           <p:cNvSpPr/>
           <p:nvPr/>
         </p:nvSpPr>
         <p:spPr>
           <a:xfrm>
-            <a:off x="685800" y="4334256"/>
-            <a:ext cx="10820095" cy="713232"/>
+            <a:off x="685800" y="4425696"/>
+            <a:ext cx="10820095" cy="749808"/>
           </a:xfrm>
           <a:prstGeom prst="roundRect">
             <a:avLst>
-              <a:gd fmla="val 17948" name="adj"/>
+              <a:gd name="adj" fmla="val 17073"/>
             </a:avLst>
           </a:prstGeom>
           <a:solidFill>
@@ -27802,237 +27816,207 @@
           <a:ln>
             <a:noFill/>
           </a:ln>
-        </p:spPr>
-        <p:txBody>
-          <a:bodyPr anchorCtr="0" anchor="ctr" bIns="45700" lIns="91425" spcFirstLastPara="1" rIns="91425" wrap="square" tIns="45700">
-            <a:noAutofit/>
-          </a:bodyPr>
+          <a:effectLst/>
+        </p:spPr>
+        <p:txBody>
+          <a:bodyPr rtlCol="0" anchor="ctr"/>
           <a:lstStyle/>
           <a:p>
-            <a:pPr indent="0" lvl="0" marL="0" marR="0" rtl="0" algn="l">
-              <a:spcBef>
-                <a:spcPts val="0"/>
-              </a:spcBef>
-              <a:spcAft>
-                <a:spcPts val="0"/>
-              </a:spcAft>
-              <a:buNone/>
-            </a:pPr>
-            <a:r>
-              <a:t/>
-            </a:r>
-            <a:endParaRPr sz="1800">
-              <a:solidFill>
-                <a:schemeClr val="dk1"/>
-              </a:solidFill>
-              <a:latin typeface="Calibri"/>
-              <a:ea typeface="Calibri"/>
-              <a:cs typeface="Calibri"/>
-              <a:sym typeface="Calibri"/>
-            </a:endParaRPr>
-          </a:p>
-        </p:txBody>
-      </p:sp>
-      <p:sp>
-        <p:nvSpPr>
-          <p:cNvPr id="229" name="Google Shape;229;p7"/>
+            <a:pPr algn="ctr"/>
+          </a:p>
+        </p:txBody>
+      </p:sp>
+      <p:sp>
+        <p:nvSpPr>
+          <p:cNvPr id="235" name="Rounded Rectangle 234"/>
+          <p:cNvSpPr/>
+          <p:nvPr/>
+        </p:nvSpPr>
+        <p:spPr>
+          <a:xfrm>
+            <a:off x="8549640" y="4425696"/>
+            <a:ext cx="2956255" cy="749808"/>
+          </a:xfrm>
+          <a:prstGeom prst="roundRect">
+            <a:avLst>
+              <a:gd name="adj" fmla="val 17073"/>
+            </a:avLst>
+          </a:prstGeom>
+          <a:solidFill>
+            <a:srgbClr val="EAF1FE"/>
+          </a:solidFill>
+          <a:ln>
+            <a:noFill/>
+          </a:ln>
+          <a:effectLst/>
+        </p:spPr>
+        <p:txBody>
+          <a:bodyPr rtlCol="0" anchor="ctr"/>
+          <a:lstStyle/>
+          <a:p>
+            <a:pPr algn="ctr"/>
+          </a:p>
+        </p:txBody>
+      </p:sp>
+      <p:sp>
+        <p:nvSpPr>
+          <p:cNvPr id="236" name="TextBox 235"/>
           <p:cNvSpPr txBox="1"/>
           <p:nvPr/>
         </p:nvSpPr>
         <p:spPr>
           <a:xfrm>
-            <a:off x="1005840" y="4334256"/>
-            <a:ext cx="5120640" cy="713232"/>
+            <a:off x="1005840" y="4425696"/>
+            <a:ext cx="3017520" cy="749808"/>
           </a:xfrm>
           <a:prstGeom prst="rect">
             <a:avLst/>
           </a:prstGeom>
           <a:noFill/>
-          <a:ln>
-            <a:noFill/>
-          </a:ln>
-        </p:spPr>
-        <p:txBody>
-          <a:bodyPr anchorCtr="0" anchor="ctr" bIns="0" lIns="0" spcFirstLastPara="1" rIns="0" wrap="square" tIns="0">
+        </p:spPr>
+        <p:txBody>
+          <a:bodyPr wrap="square" lIns="0" rIns="0" tIns="0" bIns="0" anchor="ctr">
             <a:spAutoFit/>
           </a:bodyPr>
           <a:lstStyle/>
           <a:p>
-            <a:pPr indent="0" lvl="0" marL="0" marR="0" rtl="0" algn="l">
+            <a:pPr algn="l">
               <a:lnSpc>
-                <a:spcPct val="110000"/>
+                <a:spcPct val="100000"/>
               </a:lnSpc>
-              <a:spcBef>
-                <a:spcPts val="0"/>
-              </a:spcBef>
-              <a:spcAft>
-                <a:spcPts val="0"/>
-              </a:spcAft>
-              <a:buNone/>
-            </a:pPr>
-            <a:r>
-              <a:rPr b="1" lang="en-US" sz="1700">
+              <a:spcAft>
+                <a:spcPts val="100"/>
+              </a:spcAft>
+            </a:pPr>
+            <a:r>
+              <a:rPr sz="1500" b="1">
                 <a:solidFill>
                   <a:srgbClr val="191C1E"/>
                 </a:solidFill>
                 <a:latin typeface="Plus Jakarta Sans"/>
-                <a:ea typeface="Plus Jakarta Sans"/>
-                <a:cs typeface="Plus Jakarta Sans"/>
-                <a:sym typeface="Plus Jakarta Sans"/>
               </a:rPr>
               <a:t>Offline-first e Last-Write-Wins</a:t>
             </a:r>
-            <a:endParaRPr/>
-          </a:p>
-          <a:p>
-            <a:pPr indent="0" lvl="0" marL="0" marR="0" rtl="0" algn="l">
+          </a:p>
+          <a:p>
+            <a:pPr algn="l">
               <a:lnSpc>
-                <a:spcPct val="110000"/>
+                <a:spcPct val="100000"/>
               </a:lnSpc>
-              <a:spcBef>
-                <a:spcPts val="0"/>
-              </a:spcBef>
-              <a:spcAft>
-                <a:spcPts val="0"/>
-              </a:spcAft>
-              <a:buNone/>
-            </a:pPr>
-            <a:r>
-              <a:rPr b="0" lang="en-US" sz="1200">
+              <a:spcAft>
+                <a:spcPts val="100"/>
+              </a:spcAft>
+            </a:pPr>
+            <a:r>
+              <a:rPr sz="1000" b="0">
                 <a:solidFill>
                   <a:srgbClr val="545F73"/>
                 </a:solidFill>
                 <a:latin typeface="Plus Jakarta Sans"/>
-                <a:ea typeface="Plus Jakarta Sans"/>
-                <a:cs typeface="Plus Jakarta Sans"/>
-                <a:sym typeface="Plus Jakarta Sans"/>
               </a:rPr>
               <a:t>Allsopp, 2014; Kleppmann, 2017</a:t>
             </a:r>
-            <a:endParaRPr/>
-          </a:p>
-        </p:txBody>
-      </p:sp>
-      <p:sp>
-        <p:nvSpPr>
-          <p:cNvPr id="230" name="Google Shape;230;p7"/>
+          </a:p>
+        </p:txBody>
+      </p:sp>
+      <p:sp>
+        <p:nvSpPr>
+          <p:cNvPr id="237" name="TextBox 236"/>
           <p:cNvSpPr txBox="1"/>
           <p:nvPr/>
         </p:nvSpPr>
         <p:spPr>
           <a:xfrm>
-            <a:off x="5989320" y="4334256"/>
-            <a:ext cx="457200" cy="713232"/>
+            <a:off x="4297680" y="4425696"/>
+            <a:ext cx="4160520" cy="749808"/>
           </a:xfrm>
           <a:prstGeom prst="rect">
             <a:avLst/>
           </a:prstGeom>
           <a:noFill/>
-          <a:ln>
-            <a:noFill/>
-          </a:ln>
-        </p:spPr>
-        <p:txBody>
-          <a:bodyPr anchorCtr="0" anchor="ctr" bIns="0" lIns="0" spcFirstLastPara="1" rIns="0" wrap="square" tIns="0">
+        </p:spPr>
+        <p:txBody>
+          <a:bodyPr wrap="square" lIns="0" rIns="0" tIns="0" bIns="0" anchor="ctr">
             <a:spAutoFit/>
           </a:bodyPr>
           <a:lstStyle/>
           <a:p>
-            <a:pPr indent="0" lvl="0" marL="0" marR="0" rtl="0" algn="l">
+            <a:pPr algn="l">
               <a:lnSpc>
-                <a:spcPct val="110000"/>
+                <a:spcPct val="105000"/>
               </a:lnSpc>
-              <a:spcBef>
-                <a:spcPts val="0"/>
-              </a:spcBef>
-              <a:spcAft>
-                <a:spcPts val="0"/>
-              </a:spcAft>
-              <a:buNone/>
-            </a:pPr>
-            <a:r>
-              <a:rPr b="1" lang="en-US" sz="2000">
-                <a:solidFill>
-                  <a:srgbClr val="0B5FD9"/>
+              <a:spcAft>
+                <a:spcPts val="600"/>
+              </a:spcAft>
+            </a:pPr>
+            <a:r>
+              <a:rPr sz="1300" b="0">
+                <a:solidFill>
+                  <a:srgbClr val="191C1E"/>
                 </a:solidFill>
                 <a:latin typeface="Plus Jakarta Sans"/>
-                <a:ea typeface="Plus Jakarta Sans"/>
-                <a:cs typeface="Plus Jakarta Sans"/>
-                <a:sym typeface="Plus Jakarta Sans"/>
               </a:rPr>
-              <a:t>→</a:t>
-            </a:r>
-            <a:endParaRPr/>
-          </a:p>
-        </p:txBody>
-      </p:sp>
-      <p:sp>
-        <p:nvSpPr>
-          <p:cNvPr id="231" name="Google Shape;231;p7"/>
+              <a:t>o app funciona sem internet e, num conflito, vence a edição mais recente</a:t>
+            </a:r>
+          </a:p>
+        </p:txBody>
+      </p:sp>
+      <p:sp>
+        <p:nvSpPr>
+          <p:cNvPr id="238" name="TextBox 237"/>
           <p:cNvSpPr txBox="1"/>
           <p:nvPr/>
         </p:nvSpPr>
         <p:spPr>
           <a:xfrm>
-            <a:off x="6537960" y="4334256"/>
-            <a:ext cx="4754880" cy="713232"/>
+            <a:off x="8778240" y="4425696"/>
+            <a:ext cx="2423160" cy="749808"/>
           </a:xfrm>
           <a:prstGeom prst="rect">
             <a:avLst/>
           </a:prstGeom>
           <a:noFill/>
-          <a:ln>
-            <a:noFill/>
-          </a:ln>
-        </p:spPr>
-        <p:txBody>
-          <a:bodyPr anchorCtr="0" anchor="ctr" bIns="0" lIns="0" spcFirstLastPara="1" rIns="0" wrap="square" tIns="0">
+        </p:spPr>
+        <p:txBody>
+          <a:bodyPr wrap="square" lIns="0" rIns="0" tIns="0" bIns="0" anchor="ctr">
             <a:spAutoFit/>
           </a:bodyPr>
           <a:lstStyle/>
           <a:p>
-            <a:pPr indent="0" lvl="0" marL="0" marR="0" rtl="0" algn="l">
+            <a:pPr algn="l">
               <a:lnSpc>
-                <a:spcPct val="110000"/>
+                <a:spcPct val="105000"/>
               </a:lnSpc>
-              <a:spcBef>
-                <a:spcPts val="0"/>
-              </a:spcBef>
-              <a:spcAft>
-                <a:spcPts val="0"/>
-              </a:spcAft>
-              <a:buNone/>
-            </a:pPr>
-            <a:r>
-              <a:rPr b="0" lang="en-US" sz="1700">
-                <a:solidFill>
-                  <a:srgbClr val="191C1E"/>
+              <a:spcAft>
+                <a:spcPts val="600"/>
+              </a:spcAft>
+            </a:pPr>
+            <a:r>
+              <a:rPr sz="1300" b="1">
+                <a:solidFill>
+                  <a:srgbClr val="0A3F8F"/>
                 </a:solidFill>
                 <a:latin typeface="Plus Jakarta Sans"/>
-                <a:ea typeface="Plus Jakarta Sans"/>
-                <a:cs typeface="Plus Jakarta Sans"/>
-                <a:sym typeface="Plus Jakarta Sans"/>
               </a:rPr>
-              <a:t>Funciona sem internet e sincroniza</a:t>
-            </a:r>
-            <a:endParaRPr/>
-          </a:p>
-        </p:txBody>
-      </p:sp>
-      <p:sp>
-        <p:nvSpPr>
-          <p:cNvPr id="232" name="Google Shape;232;p7"/>
+              <a:t>grava no aparelho e sincroniza depois</a:t>
+            </a:r>
+          </a:p>
+        </p:txBody>
+      </p:sp>
+      <p:sp>
+        <p:nvSpPr>
+          <p:cNvPr id="239" name="Rounded Rectangle 238"/>
           <p:cNvSpPr/>
           <p:nvPr/>
         </p:nvSpPr>
         <p:spPr>
           <a:xfrm>
-            <a:off x="685800" y="5184648"/>
-            <a:ext cx="10820095" cy="713232"/>
+            <a:off x="685800" y="5266944"/>
+            <a:ext cx="10820095" cy="749808"/>
           </a:xfrm>
           <a:prstGeom prst="roundRect">
             <a:avLst>
-              <a:gd fmla="val 17948" name="adj"/>
+              <a:gd name="adj" fmla="val 17073"/>
             </a:avLst>
           </a:prstGeom>
           <a:solidFill>
@@ -28041,220 +28025,190 @@
           <a:ln>
             <a:noFill/>
           </a:ln>
-        </p:spPr>
-        <p:txBody>
-          <a:bodyPr anchorCtr="0" anchor="ctr" bIns="45700" lIns="91425" spcFirstLastPara="1" rIns="91425" wrap="square" tIns="45700">
-            <a:noAutofit/>
-          </a:bodyPr>
+          <a:effectLst/>
+        </p:spPr>
+        <p:txBody>
+          <a:bodyPr rtlCol="0" anchor="ctr"/>
           <a:lstStyle/>
           <a:p>
-            <a:pPr indent="0" lvl="0" marL="0" marR="0" rtl="0" algn="l">
-              <a:spcBef>
-                <a:spcPts val="0"/>
-              </a:spcBef>
-              <a:spcAft>
-                <a:spcPts val="0"/>
-              </a:spcAft>
-              <a:buNone/>
-            </a:pPr>
-            <a:r>
-              <a:t/>
-            </a:r>
-            <a:endParaRPr sz="1800">
-              <a:solidFill>
-                <a:schemeClr val="dk1"/>
-              </a:solidFill>
-              <a:latin typeface="Calibri"/>
-              <a:ea typeface="Calibri"/>
-              <a:cs typeface="Calibri"/>
-              <a:sym typeface="Calibri"/>
-            </a:endParaRPr>
-          </a:p>
-        </p:txBody>
-      </p:sp>
-      <p:sp>
-        <p:nvSpPr>
-          <p:cNvPr id="233" name="Google Shape;233;p7"/>
+            <a:pPr algn="ctr"/>
+          </a:p>
+        </p:txBody>
+      </p:sp>
+      <p:sp>
+        <p:nvSpPr>
+          <p:cNvPr id="240" name="Rounded Rectangle 239"/>
+          <p:cNvSpPr/>
+          <p:nvPr/>
+        </p:nvSpPr>
+        <p:spPr>
+          <a:xfrm>
+            <a:off x="8549640" y="5266944"/>
+            <a:ext cx="2956255" cy="749808"/>
+          </a:xfrm>
+          <a:prstGeom prst="roundRect">
+            <a:avLst>
+              <a:gd name="adj" fmla="val 17073"/>
+            </a:avLst>
+          </a:prstGeom>
+          <a:solidFill>
+            <a:srgbClr val="EAF1FE"/>
+          </a:solidFill>
+          <a:ln>
+            <a:noFill/>
+          </a:ln>
+          <a:effectLst/>
+        </p:spPr>
+        <p:txBody>
+          <a:bodyPr rtlCol="0" anchor="ctr"/>
+          <a:lstStyle/>
+          <a:p>
+            <a:pPr algn="ctr"/>
+          </a:p>
+        </p:txBody>
+      </p:sp>
+      <p:sp>
+        <p:nvSpPr>
+          <p:cNvPr id="241" name="TextBox 240"/>
           <p:cNvSpPr txBox="1"/>
           <p:nvPr/>
         </p:nvSpPr>
         <p:spPr>
           <a:xfrm>
-            <a:off x="1005840" y="5184648"/>
-            <a:ext cx="5120640" cy="713232"/>
+            <a:off x="1005840" y="5266944"/>
+            <a:ext cx="3017520" cy="749808"/>
           </a:xfrm>
           <a:prstGeom prst="rect">
             <a:avLst/>
           </a:prstGeom>
           <a:noFill/>
-          <a:ln>
-            <a:noFill/>
-          </a:ln>
-        </p:spPr>
-        <p:txBody>
-          <a:bodyPr anchorCtr="0" anchor="ctr" bIns="0" lIns="0" spcFirstLastPara="1" rIns="0" wrap="square" tIns="0">
+        </p:spPr>
+        <p:txBody>
+          <a:bodyPr wrap="square" lIns="0" rIns="0" tIns="0" bIns="0" anchor="ctr">
             <a:spAutoFit/>
           </a:bodyPr>
           <a:lstStyle/>
           <a:p>
-            <a:pPr indent="0" lvl="0" marL="0" marR="0" rtl="0" algn="l">
+            <a:pPr algn="l">
               <a:lnSpc>
-                <a:spcPct val="110000"/>
+                <a:spcPct val="100000"/>
               </a:lnSpc>
-              <a:spcBef>
-                <a:spcPts val="0"/>
-              </a:spcBef>
-              <a:spcAft>
-                <a:spcPts val="0"/>
-              </a:spcAft>
-              <a:buNone/>
-            </a:pPr>
-            <a:r>
-              <a:rPr b="1" lang="en-US" sz="1700">
+              <a:spcAft>
+                <a:spcPts val="100"/>
+              </a:spcAft>
+            </a:pPr>
+            <a:r>
+              <a:rPr sz="1500" b="1">
                 <a:solidFill>
                   <a:srgbClr val="191C1E"/>
                 </a:solidFill>
                 <a:latin typeface="Plus Jakarta Sans"/>
-                <a:ea typeface="Plus Jakarta Sans"/>
-                <a:cs typeface="Plus Jakarta Sans"/>
-                <a:sym typeface="Plus Jakarta Sans"/>
               </a:rPr>
-              <a:t>Usabilidade, acessibilidade e LGPD</a:t>
-            </a:r>
-            <a:endParaRPr/>
-          </a:p>
-          <a:p>
-            <a:pPr indent="0" lvl="0" marL="0" marR="0" rtl="0" algn="l">
+              <a:t>Nielsen, WCAG e LGPD</a:t>
+            </a:r>
+          </a:p>
+          <a:p>
+            <a:pPr algn="l">
               <a:lnSpc>
-                <a:spcPct val="110000"/>
+                <a:spcPct val="100000"/>
               </a:lnSpc>
-              <a:spcBef>
-                <a:spcPts val="0"/>
-              </a:spcBef>
-              <a:spcAft>
-                <a:spcPts val="0"/>
-              </a:spcAft>
-              <a:buNone/>
-            </a:pPr>
-            <a:r>
-              <a:rPr b="0" lang="en-US" sz="1200">
+              <a:spcAft>
+                <a:spcPts val="100"/>
+              </a:spcAft>
+            </a:pPr>
+            <a:r>
+              <a:rPr sz="1000" b="0">
                 <a:solidFill>
                   <a:srgbClr val="545F73"/>
                 </a:solidFill>
                 <a:latin typeface="Plus Jakarta Sans"/>
-                <a:ea typeface="Plus Jakarta Sans"/>
-                <a:cs typeface="Plus Jakarta Sans"/>
-                <a:sym typeface="Plus Jakarta Sans"/>
               </a:rPr>
               <a:t>Nielsen, 1994; W3C, 2018; Brasil, 2018</a:t>
             </a:r>
-            <a:endParaRPr/>
-          </a:p>
-        </p:txBody>
-      </p:sp>
-      <p:sp>
-        <p:nvSpPr>
-          <p:cNvPr id="234" name="Google Shape;234;p7"/>
+          </a:p>
+        </p:txBody>
+      </p:sp>
+      <p:sp>
+        <p:nvSpPr>
+          <p:cNvPr id="242" name="TextBox 241"/>
           <p:cNvSpPr txBox="1"/>
           <p:nvPr/>
         </p:nvSpPr>
         <p:spPr>
           <a:xfrm>
-            <a:off x="5989320" y="5184648"/>
-            <a:ext cx="457200" cy="713232"/>
+            <a:off x="4297680" y="5266944"/>
+            <a:ext cx="4160520" cy="749808"/>
           </a:xfrm>
           <a:prstGeom prst="rect">
             <a:avLst/>
           </a:prstGeom>
           <a:noFill/>
-          <a:ln>
-            <a:noFill/>
-          </a:ln>
-        </p:spPr>
-        <p:txBody>
-          <a:bodyPr anchorCtr="0" anchor="ctr" bIns="0" lIns="0" spcFirstLastPara="1" rIns="0" wrap="square" tIns="0">
+        </p:spPr>
+        <p:txBody>
+          <a:bodyPr wrap="square" lIns="0" rIns="0" tIns="0" bIns="0" anchor="ctr">
             <a:spAutoFit/>
           </a:bodyPr>
           <a:lstStyle/>
           <a:p>
-            <a:pPr indent="0" lvl="0" marL="0" marR="0" rtl="0" algn="l">
+            <a:pPr algn="l">
               <a:lnSpc>
-                <a:spcPct val="110000"/>
+                <a:spcPct val="105000"/>
               </a:lnSpc>
-              <a:spcBef>
-                <a:spcPts val="0"/>
-              </a:spcBef>
-              <a:spcAft>
-                <a:spcPts val="0"/>
-              </a:spcAft>
-              <a:buNone/>
-            </a:pPr>
-            <a:r>
-              <a:rPr b="1" lang="en-US" sz="2000">
-                <a:solidFill>
-                  <a:srgbClr val="0B5FD9"/>
+              <a:spcAft>
+                <a:spcPts val="600"/>
+              </a:spcAft>
+            </a:pPr>
+            <a:r>
+              <a:rPr sz="1300" b="0">
+                <a:solidFill>
+                  <a:srgbClr val="191C1E"/>
                 </a:solidFill>
                 <a:latin typeface="Plus Jakarta Sans"/>
-                <a:ea typeface="Plus Jakarta Sans"/>
-                <a:cs typeface="Plus Jakarta Sans"/>
-                <a:sym typeface="Plus Jakarta Sans"/>
               </a:rPr>
-              <a:t>→</a:t>
-            </a:r>
-            <a:endParaRPr/>
-          </a:p>
-        </p:txBody>
-      </p:sp>
-      <p:sp>
-        <p:nvSpPr>
-          <p:cNvPr id="235" name="Google Shape;235;p7"/>
+              <a:t>regras de usabilidade, de acessibilidade e de proteção de dados pessoais</a:t>
+            </a:r>
+          </a:p>
+        </p:txBody>
+      </p:sp>
+      <p:sp>
+        <p:nvSpPr>
+          <p:cNvPr id="243" name="TextBox 242"/>
           <p:cNvSpPr txBox="1"/>
           <p:nvPr/>
         </p:nvSpPr>
         <p:spPr>
           <a:xfrm>
-            <a:off x="6537960" y="5184648"/>
-            <a:ext cx="4754880" cy="713232"/>
+            <a:off x="8778240" y="5266944"/>
+            <a:ext cx="2423160" cy="749808"/>
           </a:xfrm>
           <a:prstGeom prst="rect">
             <a:avLst/>
           </a:prstGeom>
           <a:noFill/>
-          <a:ln>
-            <a:noFill/>
-          </a:ln>
-        </p:spPr>
-        <p:txBody>
-          <a:bodyPr anchorCtr="0" anchor="ctr" bIns="0" lIns="0" spcFirstLastPara="1" rIns="0" wrap="square" tIns="0">
+        </p:spPr>
+        <p:txBody>
+          <a:bodyPr wrap="square" lIns="0" rIns="0" tIns="0" bIns="0" anchor="ctr">
             <a:spAutoFit/>
           </a:bodyPr>
           <a:lstStyle/>
           <a:p>
-            <a:pPr indent="0" lvl="0" marL="0" marR="0" rtl="0" algn="l">
+            <a:pPr algn="l">
               <a:lnSpc>
-                <a:spcPct val="110000"/>
+                <a:spcPct val="105000"/>
               </a:lnSpc>
-              <a:spcBef>
-                <a:spcPts val="0"/>
-              </a:spcBef>
-              <a:spcAft>
-                <a:spcPts val="0"/>
-              </a:spcAft>
-              <a:buNone/>
-            </a:pPr>
-            <a:r>
-              <a:rPr b="0" lang="en-US" sz="1700">
-                <a:solidFill>
-                  <a:srgbClr val="191C1E"/>
+              <a:spcAft>
+                <a:spcPts val="600"/>
+              </a:spcAft>
+            </a:pPr>
+            <a:r>
+              <a:rPr sz="1300" b="1">
+                <a:solidFill>
+                  <a:srgbClr val="0A3F8F"/>
                 </a:solidFill>
                 <a:latin typeface="Plus Jakarta Sans"/>
-                <a:ea typeface="Plus Jakarta Sans"/>
-                <a:cs typeface="Plus Jakarta Sans"/>
-                <a:sym typeface="Plus Jakarta Sans"/>
               </a:rPr>
-              <a:t>Interface segura e dados protegidos</a:t>
-            </a:r>
-            <a:endParaRPr/>
+              <a:t>interface segura e dados protegidos</a:t>
+            </a:r>
           </a:p>
         </p:txBody>
       </p:sp>

--- a/docs/tcc/apresentacao-mapill.pptx
+++ b/docs/tcc/apresentacao-mapill.pptx
@@ -24,16 +24,17 @@
     <p:sldId id="269" r:id="rId19"/>
     <p:sldId id="270" r:id="rId20"/>
     <p:sldId id="271" r:id="rId21"/>
+    <p:sldId id="272" r:id="rId22"/>
   </p:sldIdLst>
   <p:sldSz cy="6858000" cx="12191675"/>
   <p:notesSz cx="6858000" cy="9144000"/>
   <p:embeddedFontLst>
     <p:embeddedFont>
       <p:font typeface="Plus Jakarta Sans"/>
-      <p:regular r:id="rId22"/>
-      <p:bold r:id="rId23"/>
-      <p:italic r:id="rId24"/>
-      <p:boldItalic r:id="rId25"/>
+      <p:regular r:id="rId23"/>
+      <p:bold r:id="rId24"/>
+      <p:italic r:id="rId25"/>
+      <p:boldItalic r:id="rId26"/>
     </p:embeddedFont>
   </p:embeddedFontLst>
   <p:defaultTextStyle>
@@ -281,7 +282,7 @@
       </p15:sldGuideLst>
     </p:ext>
     <p:ext uri="GoogleSlidesCustomDataVersion2">
-      <go:slidesCustomData xmlns:go="http://customooxmlschemas.google.com/" r:id="rId26" roundtripDataSignature="AMtx7mg6FbXJjdh49iTc75Vx0a1gAZRn4A=="/>
+      <go:slidesCustomData xmlns:go="http://customooxmlschemas.google.com/" r:id="rId27" roundtripDataSignature="AMtx7mjSvJh6ebE56uB912QqdW4DRvg0hw=="/>
     </p:ext>
   </p:extLst>
 </p:presentation>
@@ -1678,7 +1679,7 @@
       </p:grpSpPr>
       <p:sp>
         <p:nvSpPr>
-          <p:cNvPr id="339" name="Google Shape;339;p13:notes"/>
+          <p:cNvPr id="339" name="Google Shape;339;h16db80fa709ec415_0_4:notes"/>
           <p:cNvSpPr/>
           <p:nvPr>
             <p:ph idx="2" type="sldImg"/>
@@ -1717,7 +1718,7 @@
       </p:sp>
       <p:sp>
         <p:nvSpPr>
-          <p:cNvPr id="340" name="Google Shape;340;p13:notes"/>
+          <p:cNvPr id="340" name="Google Shape;340;h16db80fa709ec415_0_4:notes"/>
           <p:cNvSpPr txBox="1"/>
           <p:nvPr>
             <p:ph idx="1" type="body"/>
@@ -1757,7 +1758,7 @@
             </a:pPr>
             <a:r>
               <a:rPr lang="en-US"/>
-              <a:t>[1 min]</a:t>
+              <a:t>[8 min]</a:t>
             </a:r>
             <a:endParaRPr/>
           </a:p>
@@ -1777,7 +1778,245 @@
             </a:pPr>
             <a:r>
               <a:rPr lang="en-US"/>
-              <a:t>A validação foi feita por mim, num aparelho físico, seguindo um roteiro escrito em que cada passo tinha o resultado esperado. O segundo aparelho foi simulado direto na base remota. Os cinco cenários da arquitetura offline-first foram aprovados, três deles depois de ajustes que os próprios testes revelaram, como fazer a edição mais recente prevalecer também no servidor. O alarme funcionou nas quatro combinações de celular bloqueado ou em uso, com o app nos recentes ou fora deles. A limitação apareceu depois de reiniciar o celular. O alarme só tocou quando o aparelho foi desbloqueado, por uma restrição de inicialização automática que o fabricante aplica, e que o Android não deixa contornar. O app passou a orientar o paciente a liberar essa permissão.</a:t>
+              <a:t>Agora vou mostrar o aplicativo funcionando no meu celular.</a:t>
+            </a:r>
+            <a:endParaRPr/>
+          </a:p>
+          <a:p>
+            <a:pPr indent="0" lvl="0" marL="0" rtl="0" algn="l">
+              <a:lnSpc>
+                <a:spcPct val="100000"/>
+              </a:lnSpc>
+              <a:spcBef>
+                <a:spcPts val="0"/>
+              </a:spcBef>
+              <a:spcAft>
+                <a:spcPts val="0"/>
+              </a:spcAft>
+              <a:buSzPts val="1100"/>
+              <a:buNone/>
+            </a:pPr>
+            <a:r>
+              <a:t/>
+            </a:r>
+            <a:endParaRPr/>
+          </a:p>
+          <a:p>
+            <a:pPr indent="0" lvl="0" marL="0" rtl="0" algn="l">
+              <a:lnSpc>
+                <a:spcPct val="100000"/>
+              </a:lnSpc>
+              <a:spcBef>
+                <a:spcPts val="0"/>
+              </a:spcBef>
+              <a:spcAft>
+                <a:spcPts val="0"/>
+              </a:spcAft>
+              <a:buSzPts val="1100"/>
+              <a:buNone/>
+            </a:pPr>
+            <a:r>
+              <a:rPr lang="en-US"/>
+              <a:t>Caminho (detalhe no roteiro):</a:t>
+            </a:r>
+            <a:endParaRPr/>
+          </a:p>
+          <a:p>
+            <a:pPr indent="0" lvl="0" marL="0" rtl="0" algn="l">
+              <a:lnSpc>
+                <a:spcPct val="100000"/>
+              </a:lnSpc>
+              <a:spcBef>
+                <a:spcPts val="0"/>
+              </a:spcBef>
+              <a:spcAft>
+                <a:spcPts val="0"/>
+              </a:spcAft>
+              <a:buSzPts val="1100"/>
+              <a:buNone/>
+            </a:pPr>
+            <a:r>
+              <a:rPr lang="en-US"/>
+              <a:t>a. Cadastro por código de barras (1 min 30 s)</a:t>
+            </a:r>
+            <a:endParaRPr/>
+          </a:p>
+          <a:p>
+            <a:pPr indent="0" lvl="0" marL="0" rtl="0" algn="l">
+              <a:lnSpc>
+                <a:spcPct val="100000"/>
+              </a:lnSpc>
+              <a:spcBef>
+                <a:spcPts val="0"/>
+              </a:spcBef>
+              <a:spcAft>
+                <a:spcPts val="0"/>
+              </a:spcAft>
+              <a:buSzPts val="1100"/>
+              <a:buNone/>
+            </a:pPr>
+            <a:r>
+              <a:rPr lang="en-US"/>
+              <a:t>b. Tela inicial (45 s)</a:t>
+            </a:r>
+            <a:endParaRPr/>
+          </a:p>
+          <a:p>
+            <a:pPr indent="0" lvl="0" marL="0" rtl="0" algn="l">
+              <a:lnSpc>
+                <a:spcPct val="100000"/>
+              </a:lnSpc>
+              <a:spcBef>
+                <a:spcPts val="0"/>
+              </a:spcBef>
+              <a:spcAft>
+                <a:spcPts val="0"/>
+              </a:spcAft>
+              <a:buSzPts val="1100"/>
+              <a:buNone/>
+            </a:pPr>
+            <a:r>
+              <a:rPr lang="en-US"/>
+              <a:t>c. Alarme com o celular bloqueado (2 min)</a:t>
+            </a:r>
+            <a:endParaRPr/>
+          </a:p>
+          <a:p>
+            <a:pPr indent="0" lvl="0" marL="0" rtl="0" algn="l">
+              <a:lnSpc>
+                <a:spcPct val="100000"/>
+              </a:lnSpc>
+              <a:spcBef>
+                <a:spcPts val="0"/>
+              </a:spcBef>
+              <a:spcAft>
+                <a:spcPts val="0"/>
+              </a:spcAft>
+              <a:buSzPts val="1100"/>
+              <a:buNone/>
+            </a:pPr>
+            <a:r>
+              <a:rPr lang="en-US"/>
+              <a:t>d. Adesão, calendário e correção (1 min 30 s)</a:t>
+            </a:r>
+            <a:endParaRPr/>
+          </a:p>
+          <a:p>
+            <a:pPr indent="0" lvl="0" marL="0" rtl="0" algn="l">
+              <a:lnSpc>
+                <a:spcPct val="100000"/>
+              </a:lnSpc>
+              <a:spcBef>
+                <a:spcPts val="0"/>
+              </a:spcBef>
+              <a:spcAft>
+                <a:spcPts val="0"/>
+              </a:spcAft>
+              <a:buSzPts val="1100"/>
+              <a:buNone/>
+            </a:pPr>
+            <a:r>
+              <a:rPr lang="en-US"/>
+              <a:t>e. Relatório em PDF (1 min)</a:t>
+            </a:r>
+            <a:endParaRPr/>
+          </a:p>
+          <a:p>
+            <a:pPr indent="0" lvl="0" marL="0" rtl="0" algn="l">
+              <a:lnSpc>
+                <a:spcPct val="100000"/>
+              </a:lnSpc>
+              <a:spcBef>
+                <a:spcPts val="0"/>
+              </a:spcBef>
+              <a:spcAft>
+                <a:spcPts val="0"/>
+              </a:spcAft>
+              <a:buSzPts val="1100"/>
+              <a:buNone/>
+            </a:pPr>
+            <a:r>
+              <a:rPr lang="en-US"/>
+              <a:t>f. Temas e cores (45 s)</a:t>
+            </a:r>
+            <a:endParaRPr/>
+          </a:p>
+          <a:p>
+            <a:pPr indent="0" lvl="0" marL="0" rtl="0" algn="l">
+              <a:lnSpc>
+                <a:spcPct val="100000"/>
+              </a:lnSpc>
+              <a:spcBef>
+                <a:spcPts val="0"/>
+              </a:spcBef>
+              <a:spcAft>
+                <a:spcPts val="0"/>
+              </a:spcAft>
+              <a:buSzPts val="1100"/>
+              <a:buNone/>
+            </a:pPr>
+            <a:r>
+              <a:rPr lang="en-US"/>
+              <a:t>Folga de 30 s.</a:t>
+            </a:r>
+            <a:endParaRPr/>
+          </a:p>
+          <a:p>
+            <a:pPr indent="0" lvl="0" marL="0" rtl="0" algn="l">
+              <a:lnSpc>
+                <a:spcPct val="100000"/>
+              </a:lnSpc>
+              <a:spcBef>
+                <a:spcPts val="0"/>
+              </a:spcBef>
+              <a:spcAft>
+                <a:spcPts val="0"/>
+              </a:spcAft>
+              <a:buSzPts val="1100"/>
+              <a:buNone/>
+            </a:pPr>
+            <a:r>
+              <a:t/>
+            </a:r>
+            <a:endParaRPr/>
+          </a:p>
+          <a:p>
+            <a:pPr indent="0" lvl="0" marL="0" rtl="0" algn="l">
+              <a:lnSpc>
+                <a:spcPct val="100000"/>
+              </a:lnSpc>
+              <a:spcBef>
+                <a:spcPts val="0"/>
+              </a:spcBef>
+              <a:spcAft>
+                <a:spcPts val="0"/>
+              </a:spcAft>
+              <a:buSzPts val="1100"/>
+              <a:buNone/>
+            </a:pPr>
+            <a:r>
+              <a:rPr lang="en-US"/>
+              <a:t>Se o espelhamento falhar, abrir o vídeo reserva no trecho correspondente. Se tudo falhar, narrar a partir das telas deste slide.</a:t>
+            </a:r>
+            <a:endParaRPr/>
+          </a:p>
+          <a:p>
+            <a:pPr indent="0" lvl="0" marL="0" rtl="0" algn="l">
+              <a:lnSpc>
+                <a:spcPct val="100000"/>
+              </a:lnSpc>
+              <a:spcBef>
+                <a:spcPts val="0"/>
+              </a:spcBef>
+              <a:spcAft>
+                <a:spcPts val="0"/>
+              </a:spcAft>
+              <a:buSzPts val="1100"/>
+              <a:buNone/>
+            </a:pPr>
+            <a:r>
+              <a:rPr lang="en-US"/>
+              <a:t>Se atrasar, cortar nesta ordem: f, depois e, depois a correção em d.</a:t>
             </a:r>
             <a:endParaRPr/>
           </a:p>
@@ -1785,7 +2024,7 @@
       </p:sp>
       <p:sp>
         <p:nvSpPr>
-          <p:cNvPr id="341" name="Google Shape;341;p13:notes"/>
+          <p:cNvPr id="341" name="Google Shape;341;h16db80fa709ec415_0_4:notes"/>
           <p:cNvSpPr txBox="1"/>
           <p:nvPr>
             <p:ph idx="12" type="sldNum"/>
@@ -1855,7 +2094,7 @@
   <p:cSld>
     <p:spTree>
       <p:nvGrpSpPr>
-        <p:cNvPr id="368" name="Shape 368"/>
+        <p:cNvPr id="347" name="Shape 347"/>
         <p:cNvGrpSpPr/>
         <p:nvPr/>
       </p:nvGrpSpPr>
@@ -1869,7 +2108,7 @@
       </p:grpSpPr>
       <p:sp>
         <p:nvSpPr>
-          <p:cNvPr id="369" name="Google Shape;369;p14:notes"/>
+          <p:cNvPr id="348" name="Google Shape;348;p13:notes"/>
           <p:cNvSpPr/>
           <p:nvPr>
             <p:ph idx="2" type="sldImg"/>
@@ -1908,7 +2147,7 @@
       </p:sp>
       <p:sp>
         <p:nvSpPr>
-          <p:cNvPr id="370" name="Google Shape;370;p14:notes"/>
+          <p:cNvPr id="349" name="Google Shape;349;p13:notes"/>
           <p:cNvSpPr txBox="1"/>
           <p:nvPr>
             <p:ph idx="1" type="body"/>
@@ -1968,7 +2207,7 @@
             </a:pPr>
             <a:r>
               <a:rPr lang="en-US"/>
-              <a:t>Os objetivos foram atendidos, com a ressalva do alarme depois de reiniciar o celular. O trabalho mostra que é possível ter, no mesmo aplicativo, o funcionamento sem internet e a fidelidade do registro clínico. Os diferenciais em relação ao que as soluções analisadas descrevem são descontar o estoque pela dose de verdade, corrigir sem apagar o que foi registrado e separar a dose pulada da dose sem resposta, o que deixa confiável o histórico levado ao médico. As limitações são claras. Testei em um só modelo de aparelho, sem usuários do público-alvo, e apenas no Android, e as fotos e receitas anexadas ainda ficam só no aparelho.</a:t>
+              <a:t>A validação foi feita por mim, num aparelho físico, seguindo um roteiro escrito em que cada passo tinha o resultado esperado. O segundo aparelho foi simulado direto na base remota. Os cinco cenários da arquitetura offline-first foram aprovados, três deles depois de ajustes que os próprios testes revelaram, como fazer a edição mais recente prevalecer também no servidor. O alarme funcionou nas quatro combinações de celular bloqueado ou em uso, com o app nos recentes ou fora deles. A limitação apareceu depois de reiniciar o celular. O alarme só tocou quando o aparelho foi desbloqueado, por uma restrição de inicialização automática que o fabricante aplica, e que o Android não deixa contornar. O app passou a orientar o paciente a liberar essa permissão.</a:t>
             </a:r>
             <a:endParaRPr/>
           </a:p>
@@ -1976,7 +2215,7 @@
       </p:sp>
       <p:sp>
         <p:nvSpPr>
-          <p:cNvPr id="371" name="Google Shape;371;p14:notes"/>
+          <p:cNvPr id="350" name="Google Shape;350;p13:notes"/>
           <p:cNvSpPr txBox="1"/>
           <p:nvPr>
             <p:ph idx="12" type="sldNum"/>
@@ -2046,7 +2285,7 @@
   <p:cSld>
     <p:spTree>
       <p:nvGrpSpPr>
-        <p:cNvPr id="386" name="Shape 386"/>
+        <p:cNvPr id="377" name="Shape 377"/>
         <p:cNvGrpSpPr/>
         <p:nvPr/>
       </p:nvGrpSpPr>
@@ -2060,7 +2299,7 @@
       </p:grpSpPr>
       <p:sp>
         <p:nvSpPr>
-          <p:cNvPr id="387" name="Google Shape;387;p15:notes"/>
+          <p:cNvPr id="378" name="Google Shape;378;p14:notes"/>
           <p:cNvSpPr/>
           <p:nvPr>
             <p:ph idx="2" type="sldImg"/>
@@ -2099,7 +2338,7 @@
       </p:sp>
       <p:sp>
         <p:nvSpPr>
-          <p:cNvPr id="388" name="Google Shape;388;p15:notes"/>
+          <p:cNvPr id="379" name="Google Shape;379;p14:notes"/>
           <p:cNvSpPr txBox="1"/>
           <p:nvPr>
             <p:ph idx="1" type="body"/>
@@ -2124,50 +2363,20 @@
           </a:bodyPr>
           <a:lstStyle/>
           <a:p>
-            <a:pPr indent="0" lvl="0" marL="0" rtl="0" algn="l">
-              <a:lnSpc>
-                <a:spcPct val="100000"/>
-              </a:lnSpc>
-              <a:spcBef>
-                <a:spcPts val="0"/>
-              </a:spcBef>
-              <a:spcAft>
-                <a:spcPts val="0"/>
-              </a:spcAft>
-              <a:buSzPts val="1100"/>
-              <a:buNone/>
-            </a:pPr>
-            <a:r>
-              <a:rPr lang="en-US"/>
-              <a:t>[40 s]</a:t>
-            </a:r>
-            <a:endParaRPr/>
-          </a:p>
-          <a:p>
-            <a:pPr indent="0" lvl="0" marL="0" rtl="0" algn="l">
-              <a:lnSpc>
-                <a:spcPct val="100000"/>
-              </a:lnSpc>
-              <a:spcBef>
-                <a:spcPts val="0"/>
-              </a:spcBef>
-              <a:spcAft>
-                <a:spcPts val="0"/>
-              </a:spcAft>
-              <a:buSzPts val="1100"/>
-              <a:buNone/>
-            </a:pPr>
-            <a:r>
-              <a:rPr lang="en-US"/>
-              <a:t>Como próximos passos, o principal é avaliar o app com os pacientes para quem ele foi pensado, idosos e polimedicados, porque só assim dá para medir o efeito real na adesão. Também quero validar o alarme em aparelhos de outros fabricantes, fazer a versão para iOS e publicar nas lojas, permitir que médicos e cuidadores consultem a conta do paciente e organizar o cuidado por tratamento, como numa terapia oncológica com várias sessões e remédios ao mesmo tempo.</a:t>
-            </a:r>
-            <a:endParaRPr/>
+            <a:r>
+              <a:t>[1 min]</a:t>
+            </a:r>
+          </a:p>
+          <a:p>
+            <a:r>
+              <a:t>Para fechar, volto à pergunta do começo. O Mapill centraliza num só aplicativo os remédios, o estoque, as consultas e as receitas. É confiável porque o histórico não mente, já que uma correção nunca apaga o que foi registrado e uma dose esquecida nunca é marcada como pulada. É seguro porque cada usuário só acessa os próprios dados, e quem não quiser criar conta pode usar tudo assim mesmo. A usabilidade foi guiada pelas heurísticas de Nielsen, mas ainda não foi testada com pacientes, e esse é justamente o primeiro passo que vem a seguir. Com isso, os objetivos do trabalho foram atendidos.</a:t>
+            </a:r>
           </a:p>
         </p:txBody>
       </p:sp>
       <p:sp>
         <p:nvSpPr>
-          <p:cNvPr id="389" name="Google Shape;389;p15:notes"/>
+          <p:cNvPr id="380" name="Google Shape;380;p14:notes"/>
           <p:cNvSpPr txBox="1"/>
           <p:nvPr>
             <p:ph idx="12" type="sldNum"/>
@@ -2237,7 +2446,7 @@
   <p:cSld>
     <p:spTree>
       <p:nvGrpSpPr>
-        <p:cNvPr id="410" name="Shape 410"/>
+        <p:cNvPr id="395" name="Shape 395"/>
         <p:cNvGrpSpPr/>
         <p:nvPr/>
       </p:nvGrpSpPr>
@@ -2251,7 +2460,7 @@
       </p:grpSpPr>
       <p:sp>
         <p:nvSpPr>
-          <p:cNvPr id="411" name="Google Shape;411;p16:notes"/>
+          <p:cNvPr id="396" name="Google Shape;396;p15:notes"/>
           <p:cNvSpPr/>
           <p:nvPr>
             <p:ph idx="2" type="sldImg"/>
@@ -2290,7 +2499,7 @@
       </p:sp>
       <p:sp>
         <p:nvSpPr>
-          <p:cNvPr id="412" name="Google Shape;412;p16:notes"/>
+          <p:cNvPr id="397" name="Google Shape;397;p15:notes"/>
           <p:cNvSpPr txBox="1"/>
           <p:nvPr>
             <p:ph idx="1" type="body"/>
@@ -2315,30 +2524,20 @@
           </a:bodyPr>
           <a:lstStyle/>
           <a:p>
-            <a:pPr indent="0" lvl="0" marL="0" rtl="0" algn="l">
-              <a:lnSpc>
-                <a:spcPct val="100000"/>
-              </a:lnSpc>
-              <a:spcBef>
-                <a:spcPts val="0"/>
-              </a:spcBef>
-              <a:spcAft>
-                <a:spcPts val="0"/>
-              </a:spcAft>
-              <a:buSzPts val="1100"/>
-              <a:buNone/>
-            </a:pPr>
-            <a:r>
-              <a:rPr lang="en-US"/>
-              <a:t>[só passar, ou mostrar se a banca pedir]</a:t>
-            </a:r>
-            <a:endParaRPr/>
+            <a:r>
+              <a:t>[45 s]</a:t>
+            </a:r>
+          </a:p>
+          <a:p>
+            <a:r>
+              <a:t>As limitações apontam os próximos passos. Como não testei com usuários, o principal é avaliar o app com os pacientes para quem ele foi pensado, idosos e polimedicados, porque só assim dá para medir o efeito real na adesão. Como testei num só modelo de aparelho, quero validar o alarme em outros fabricantes. Como o app é só para Android, vem a versão para iOS e a publicação nas lojas. Além disso, quero permitir que médicos e cuidadores consultem a conta do paciente, sincronizar as fotos e receitas anexadas, que hoje ficam só no aparelho, e organizar o cuidado por tratamento, como numa terapia oncológica com várias sessões e remédios ao mesmo tempo.</a:t>
+            </a:r>
           </a:p>
         </p:txBody>
       </p:sp>
       <p:sp>
         <p:nvSpPr>
-          <p:cNvPr id="413" name="Google Shape;413;p16:notes"/>
+          <p:cNvPr id="398" name="Google Shape;398;p15:notes"/>
           <p:cNvSpPr txBox="1"/>
           <p:nvPr>
             <p:ph idx="12" type="sldNum"/>
@@ -2408,7 +2607,7 @@
   <p:cSld>
     <p:spTree>
       <p:nvGrpSpPr>
-        <p:cNvPr id="420" name="Shape 420"/>
+        <p:cNvPr id="419" name="Shape 419"/>
         <p:cNvGrpSpPr/>
         <p:nvPr/>
       </p:nvGrpSpPr>
@@ -2422,7 +2621,7 @@
       </p:grpSpPr>
       <p:sp>
         <p:nvSpPr>
-          <p:cNvPr id="421" name="Google Shape;421;p17:notes"/>
+          <p:cNvPr id="420" name="Google Shape;420;p16:notes"/>
           <p:cNvSpPr/>
           <p:nvPr>
             <p:ph idx="2" type="sldImg"/>
@@ -2461,7 +2660,7 @@
       </p:sp>
       <p:sp>
         <p:nvSpPr>
-          <p:cNvPr id="422" name="Google Shape;422;p17:notes"/>
+          <p:cNvPr id="421" name="Google Shape;421;p16:notes"/>
           <p:cNvSpPr txBox="1"/>
           <p:nvPr>
             <p:ph idx="1" type="body"/>
@@ -2501,27 +2700,7 @@
             </a:pPr>
             <a:r>
               <a:rPr lang="en-US"/>
-              <a:t>[15 s]</a:t>
-            </a:r>
-            <a:endParaRPr/>
-          </a:p>
-          <a:p>
-            <a:pPr indent="0" lvl="0" marL="0" rtl="0" algn="l">
-              <a:lnSpc>
-                <a:spcPct val="100000"/>
-              </a:lnSpc>
-              <a:spcBef>
-                <a:spcPts val="0"/>
-              </a:spcBef>
-              <a:spcAft>
-                <a:spcPts val="0"/>
-              </a:spcAft>
-              <a:buSzPts val="1100"/>
-              <a:buNone/>
-            </a:pPr>
-            <a:r>
-              <a:rPr lang="en-US"/>
-              <a:t>Encerro por aqui. Quem quiser conhecer o Mapill pode usar o QR code, que leva à página do aplicativo, onde também está o APK para instalar no Android. Obrigado pela atenção, e fico à disposição para as perguntas.</a:t>
+              <a:t>[só passar, ou mostrar se a banca pedir]</a:t>
             </a:r>
             <a:endParaRPr/>
           </a:p>
@@ -2529,7 +2708,198 @@
       </p:sp>
       <p:sp>
         <p:nvSpPr>
-          <p:cNvPr id="423" name="Google Shape;423;p17:notes"/>
+          <p:cNvPr id="422" name="Google Shape;422;p16:notes"/>
+          <p:cNvSpPr txBox="1"/>
+          <p:nvPr>
+            <p:ph idx="12" type="sldNum"/>
+          </p:nvPr>
+        </p:nvSpPr>
+        <p:spPr>
+          <a:xfrm>
+            <a:off x="0" y="0"/>
+            <a:ext cx="3000000" cy="3000000"/>
+          </a:xfrm>
+          <a:prstGeom prst="rect">
+            <a:avLst/>
+          </a:prstGeom>
+          <a:noFill/>
+          <a:ln>
+            <a:noFill/>
+          </a:ln>
+        </p:spPr>
+        <p:txBody>
+          <a:bodyPr anchorCtr="0" anchor="ctr" bIns="91425" lIns="91425" spcFirstLastPara="1" rIns="91425" wrap="square" tIns="91425">
+            <a:noAutofit/>
+          </a:bodyPr>
+          <a:lstStyle/>
+          <a:p>
+            <a:pPr indent="0" lvl="0" marL="0" marR="0" rtl="0" algn="l">
+              <a:lnSpc>
+                <a:spcPct val="100000"/>
+              </a:lnSpc>
+              <a:spcBef>
+                <a:spcPts val="0"/>
+              </a:spcBef>
+              <a:spcAft>
+                <a:spcPts val="0"/>
+              </a:spcAft>
+              <a:buClr>
+                <a:srgbClr val="000000"/>
+              </a:buClr>
+              <a:buSzPts val="1400"/>
+              <a:buFont typeface="Arial"/>
+              <a:buNone/>
+            </a:pPr>
+            <a:r>
+              <a:t/>
+            </a:r>
+            <a:endParaRPr b="0" i="0" spc="0" sz="1400" u="none" cap="none" strike="noStrike">
+              <a:solidFill>
+                <a:srgbClr val="000000"/>
+              </a:solidFill>
+              <a:latin typeface="Arial"/>
+              <a:ea typeface="Arial"/>
+              <a:cs typeface="Arial"/>
+              <a:sym typeface="Arial"/>
+            </a:endParaRPr>
+          </a:p>
+        </p:txBody>
+      </p:sp>
+    </p:spTree>
+  </p:cSld>
+  <p:clrMapOvr>
+    <a:masterClrMapping/>
+  </p:clrMapOvr>
+</p:notes>
+</file>
+
+<file path=ppt/notesSlides/notesSlide17.xml><?xml version="1.0" encoding="utf-8"?>
+<p:notes xmlns:a="http://schemas.openxmlformats.org/drawingml/2006/main" xmlns:r="http://schemas.openxmlformats.org/officeDocument/2006/relationships" xmlns:mc="http://schemas.openxmlformats.org/markup-compatibility/2006" xmlns:mv="urn:schemas-microsoft-com:mac:vml" xmlns:p="http://schemas.openxmlformats.org/presentationml/2006/main" xmlns:c="http://schemas.openxmlformats.org/drawingml/2006/chart" xmlns:dgm="http://schemas.openxmlformats.org/drawingml/2006/diagram" xmlns:o="urn:schemas-microsoft-com:office:office" xmlns:v="urn:schemas-microsoft-com:vml" xmlns:pvml="urn:schemas-microsoft-com:office:powerpoint" xmlns:com="http://schemas.openxmlformats.org/drawingml/2006/compatibility" xmlns:p14="http://schemas.microsoft.com/office/powerpoint/2010/main" xmlns:p15="http://schemas.microsoft.com/office/powerpoint/2012/main" xmlns:ahyp="http://schemas.microsoft.com/office/drawing/2018/hyperlinkcolor" showMasterPhAnim="0" showMasterSp="0">
+  <p:cSld>
+    <p:spTree>
+      <p:nvGrpSpPr>
+        <p:cNvPr id="429" name="Shape 429"/>
+        <p:cNvGrpSpPr/>
+        <p:nvPr/>
+      </p:nvGrpSpPr>
+      <p:grpSpPr>
+        <a:xfrm>
+          <a:off x="0" y="0"/>
+          <a:ext cx="0" cy="0"/>
+          <a:chOff x="0" y="0"/>
+          <a:chExt cx="0" cy="0"/>
+        </a:xfrm>
+      </p:grpSpPr>
+      <p:sp>
+        <p:nvSpPr>
+          <p:cNvPr id="430" name="Google Shape;430;p17:notes"/>
+          <p:cNvSpPr/>
+          <p:nvPr>
+            <p:ph idx="2" type="sldImg"/>
+          </p:nvPr>
+        </p:nvSpPr>
+        <p:spPr>
+          <a:xfrm>
+            <a:off x="0" y="0"/>
+            <a:ext cx="3000000" cy="3000000"/>
+          </a:xfrm>
+          <a:custGeom>
+            <a:rect b="b" l="l" r="r" t="t"/>
+            <a:pathLst>
+              <a:path extrusionOk="0" h="120000" w="120000">
+                <a:moveTo>
+                  <a:pt x="0" y="0"/>
+                </a:moveTo>
+                <a:lnTo>
+                  <a:pt x="120000" y="0"/>
+                </a:lnTo>
+                <a:lnTo>
+                  <a:pt x="120000" y="120000"/>
+                </a:lnTo>
+                <a:lnTo>
+                  <a:pt x="0" y="120000"/>
+                </a:lnTo>
+                <a:close/>
+              </a:path>
+            </a:pathLst>
+          </a:custGeom>
+          <a:noFill/>
+          <a:ln>
+            <a:noFill/>
+          </a:ln>
+        </p:spPr>
+      </p:sp>
+      <p:sp>
+        <p:nvSpPr>
+          <p:cNvPr id="431" name="Google Shape;431;p17:notes"/>
+          <p:cNvSpPr txBox="1"/>
+          <p:nvPr>
+            <p:ph idx="1" type="body"/>
+          </p:nvPr>
+        </p:nvSpPr>
+        <p:spPr>
+          <a:xfrm>
+            <a:off x="0" y="0"/>
+            <a:ext cx="3000000" cy="3000000"/>
+          </a:xfrm>
+          <a:prstGeom prst="rect">
+            <a:avLst/>
+          </a:prstGeom>
+          <a:noFill/>
+          <a:ln>
+            <a:noFill/>
+          </a:ln>
+        </p:spPr>
+        <p:txBody>
+          <a:bodyPr anchorCtr="0" anchor="t" bIns="45700" lIns="91425" spcFirstLastPara="1" rIns="91425" wrap="square" tIns="45700">
+            <a:noAutofit/>
+          </a:bodyPr>
+          <a:lstStyle/>
+          <a:p>
+            <a:pPr indent="0" lvl="0" marL="0" rtl="0" algn="l">
+              <a:lnSpc>
+                <a:spcPct val="100000"/>
+              </a:lnSpc>
+              <a:spcBef>
+                <a:spcPts val="0"/>
+              </a:spcBef>
+              <a:spcAft>
+                <a:spcPts val="0"/>
+              </a:spcAft>
+              <a:buSzPts val="1100"/>
+              <a:buNone/>
+            </a:pPr>
+            <a:r>
+              <a:rPr lang="en-US"/>
+              <a:t>[15 s]</a:t>
+            </a:r>
+            <a:endParaRPr/>
+          </a:p>
+          <a:p>
+            <a:pPr indent="0" lvl="0" marL="0" rtl="0" algn="l">
+              <a:lnSpc>
+                <a:spcPct val="100000"/>
+              </a:lnSpc>
+              <a:spcBef>
+                <a:spcPts val="0"/>
+              </a:spcBef>
+              <a:spcAft>
+                <a:spcPts val="0"/>
+              </a:spcAft>
+              <a:buSzPts val="1100"/>
+              <a:buNone/>
+            </a:pPr>
+            <a:r>
+              <a:rPr lang="en-US"/>
+              <a:t>Encerro por aqui. Quem quiser conhecer o Mapill pode usar o QR code, que leva à página do aplicativo, onde também está o APK para instalar no Android. Obrigado pela atenção, e fico à disposição para as perguntas.</a:t>
+            </a:r>
+            <a:endParaRPr/>
+          </a:p>
+        </p:txBody>
+      </p:sp>
+      <p:sp>
+        <p:nvSpPr>
+          <p:cNvPr id="432" name="Google Shape;432;p17:notes"/>
           <p:cNvSpPr txBox="1"/>
           <p:nvPr>
             <p:ph idx="12" type="sldNum"/>
@@ -18055,7 +18425,7 @@
                 <a:cs typeface="Plus Jakarta Sans"/>
                 <a:sym typeface="Plus Jakarta Sans"/>
               </a:rPr>
-              <a:t>11</a:t>
+              <a:t>10</a:t>
             </a:r>
             <a:endParaRPr b="0" i="0" spc="0" sz="1400" u="none" cap="none" strike="noStrike">
               <a:solidFill>
@@ -19112,7 +19482,7 @@
                 <a:cs typeface="Plus Jakarta Sans"/>
                 <a:sym typeface="Plus Jakarta Sans"/>
               </a:rPr>
-              <a:t>12</a:t>
+              <a:t>11</a:t>
             </a:r>
             <a:endParaRPr b="0" i="0" spc="0" sz="1400" u="none" cap="none" strike="noStrike">
               <a:solidFill>
@@ -19868,14 +20238,14 @@
       </p:grpSpPr>
       <p:sp>
         <p:nvSpPr>
-          <p:cNvPr id="343" name="Google Shape;343;p13"/>
+          <p:cNvPr id="343" name="Google Shape;343;h16db80fa709ec415_0_4"/>
           <p:cNvSpPr txBox="1"/>
           <p:nvPr/>
         </p:nvSpPr>
         <p:spPr>
           <a:xfrm>
             <a:off x="685800" y="502920"/>
-            <a:ext cx="8229600" cy="274320"/>
+            <a:ext cx="8229600" cy="184800"/>
           </a:xfrm>
           <a:prstGeom prst="rect">
             <a:avLst/>
@@ -19918,7 +20288,7 @@
                 <a:cs typeface="Plus Jakarta Sans"/>
                 <a:sym typeface="Plus Jakarta Sans"/>
               </a:rPr>
-              <a:t>RESULTADOS</a:t>
+              <a:t>MAPILL · DEMONSTRAÇÃO</a:t>
             </a:r>
             <a:endParaRPr b="0" i="0" spc="0" sz="1400" u="none" cap="none" strike="noStrike">
               <a:solidFill>
@@ -19934,14 +20304,14 @@
       </p:sp>
       <p:sp>
         <p:nvSpPr>
-          <p:cNvPr id="344" name="Google Shape;344;p13"/>
+          <p:cNvPr id="344" name="Google Shape;344;h16db80fa709ec415_0_4"/>
           <p:cNvSpPr txBox="1"/>
           <p:nvPr/>
         </p:nvSpPr>
         <p:spPr>
           <a:xfrm>
             <a:off x="685800" y="804672"/>
-            <a:ext cx="10820095" cy="822960"/>
+            <a:ext cx="10820100" cy="431100"/>
           </a:xfrm>
           <a:prstGeom prst="rect">
             <a:avLst/>
@@ -19975,7 +20345,7 @@
               <a:buNone/>
             </a:pPr>
             <a:r>
-              <a:rPr b="1" i="0" lang="en-US" spc="0" sz="2800" u="none" cap="none" strike="noStrike">
+              <a:rPr b="1" lang="en-US" sz="2800">
                 <a:solidFill>
                   <a:srgbClr val="191C1E"/>
                 </a:solidFill>
@@ -19984,7 +20354,7 @@
                 <a:cs typeface="Plus Jakarta Sans"/>
                 <a:sym typeface="Plus Jakarta Sans"/>
               </a:rPr>
-              <a:t>Cinco cenários offline-first aprovados em aparelho físico</a:t>
+              <a:t>Vídeo demonstrando o uso do Mapill</a:t>
             </a:r>
             <a:endParaRPr b="0" i="0" spc="0" sz="1400" u="none" cap="none" strike="noStrike">
               <a:solidFill>
@@ -20000,14 +20370,14 @@
       </p:sp>
       <p:sp>
         <p:nvSpPr>
-          <p:cNvPr id="345" name="Google Shape;345;p13"/>
+          <p:cNvPr id="345" name="Google Shape;345;h16db80fa709ec415_0_4"/>
           <p:cNvSpPr txBox="1"/>
           <p:nvPr/>
         </p:nvSpPr>
         <p:spPr>
           <a:xfrm>
             <a:off x="685800" y="6419088"/>
-            <a:ext cx="7315200" cy="228600"/>
+            <a:ext cx="7315200" cy="153900"/>
           </a:xfrm>
           <a:prstGeom prst="rect">
             <a:avLst/>
@@ -20066,14 +20436,14 @@
       </p:sp>
       <p:sp>
         <p:nvSpPr>
-          <p:cNvPr id="346" name="Google Shape;346;p13"/>
+          <p:cNvPr id="346" name="Google Shape;346;h16db80fa709ec415_0_4"/>
           <p:cNvSpPr txBox="1"/>
           <p:nvPr/>
         </p:nvSpPr>
         <p:spPr>
           <a:xfrm>
             <a:off x="10591495" y="6419088"/>
-            <a:ext cx="914400" cy="228600"/>
+            <a:ext cx="914400" cy="153900"/>
           </a:xfrm>
           <a:prstGeom prst="rect">
             <a:avLst/>
@@ -20116,1575 +20486,7 @@
                 <a:cs typeface="Plus Jakarta Sans"/>
                 <a:sym typeface="Plus Jakarta Sans"/>
               </a:rPr>
-              <a:t>13</a:t>
-            </a:r>
-            <a:endParaRPr b="0" i="0" spc="0" sz="1400" u="none" cap="none" strike="noStrike">
-              <a:solidFill>
-                <a:srgbClr val="000000"/>
-              </a:solidFill>
-              <a:latin typeface="Arial"/>
-              <a:ea typeface="Arial"/>
-              <a:cs typeface="Arial"/>
-              <a:sym typeface="Arial"/>
-            </a:endParaRPr>
-          </a:p>
-        </p:txBody>
-      </p:sp>
-      <p:sp>
-        <p:nvSpPr>
-          <p:cNvPr id="347" name="Google Shape;347;p13"/>
-          <p:cNvSpPr/>
-          <p:nvPr/>
-        </p:nvSpPr>
-        <p:spPr>
-          <a:xfrm>
-            <a:off x="685800" y="1783080"/>
-            <a:ext cx="6675120" cy="4160520"/>
-          </a:xfrm>
-          <a:prstGeom prst="roundRect">
-            <a:avLst>
-              <a:gd fmla="val 3076" name="adj"/>
-            </a:avLst>
-          </a:prstGeom>
-          <a:solidFill>
-            <a:srgbClr val="FFFFFF"/>
-          </a:solidFill>
-          <a:ln>
-            <a:noFill/>
-          </a:ln>
-        </p:spPr>
-        <p:txBody>
-          <a:bodyPr anchorCtr="0" anchor="ctr" bIns="45700" lIns="91425" spcFirstLastPara="1" rIns="91425" wrap="square" tIns="45700">
-            <a:noAutofit/>
-          </a:bodyPr>
-          <a:lstStyle/>
-          <a:p>
-            <a:pPr indent="0" lvl="0" marL="0" marR="0" rtl="0" algn="l">
-              <a:lnSpc>
-                <a:spcPct val="100000"/>
-              </a:lnSpc>
-              <a:spcBef>
-                <a:spcPts val="0"/>
-              </a:spcBef>
-              <a:spcAft>
-                <a:spcPts val="0"/>
-              </a:spcAft>
-              <a:buClr>
-                <a:srgbClr val="000000"/>
-              </a:buClr>
-              <a:buSzPts val="1800"/>
-              <a:buFont typeface="Arial"/>
-              <a:buNone/>
-            </a:pPr>
-            <a:r>
-              <a:t/>
-            </a:r>
-            <a:endParaRPr b="0" i="0" spc="0" sz="1800" u="none" cap="none" strike="noStrike">
-              <a:solidFill>
-                <a:schemeClr val="dk1"/>
-              </a:solidFill>
-              <a:latin typeface="Calibri"/>
-              <a:ea typeface="Calibri"/>
-              <a:cs typeface="Calibri"/>
-              <a:sym typeface="Calibri"/>
-            </a:endParaRPr>
-          </a:p>
-        </p:txBody>
-      </p:sp>
-      <p:sp>
-        <p:nvSpPr>
-          <p:cNvPr id="348" name="Google Shape;348;p13"/>
-          <p:cNvSpPr txBox="1"/>
-          <p:nvPr/>
-        </p:nvSpPr>
-        <p:spPr>
-          <a:xfrm>
-            <a:off x="1005840" y="1965960"/>
-            <a:ext cx="3931920" cy="548640"/>
-          </a:xfrm>
-          <a:prstGeom prst="rect">
-            <a:avLst/>
-          </a:prstGeom>
-          <a:noFill/>
-          <a:ln>
-            <a:noFill/>
-          </a:ln>
-        </p:spPr>
-        <p:txBody>
-          <a:bodyPr anchorCtr="0" anchor="ctr" bIns="0" lIns="0" spcFirstLastPara="1" rIns="0" wrap="square" tIns="0">
-            <a:spAutoFit/>
-          </a:bodyPr>
-          <a:lstStyle/>
-          <a:p>
-            <a:pPr indent="0" lvl="0" marL="0" marR="0" rtl="0" algn="l">
-              <a:lnSpc>
-                <a:spcPct val="110000"/>
-              </a:lnSpc>
-              <a:spcBef>
-                <a:spcPts val="0"/>
-              </a:spcBef>
-              <a:spcAft>
-                <a:spcPts val="0"/>
-              </a:spcAft>
-              <a:buClr>
-                <a:srgbClr val="000000"/>
-              </a:buClr>
-              <a:buSzPts val="1600"/>
-              <a:buFont typeface="Arial"/>
-              <a:buNone/>
-            </a:pPr>
-            <a:r>
-              <a:rPr b="0" i="0" lang="en-US" spc="0" sz="1600" u="none" cap="none" strike="noStrike">
-                <a:solidFill>
-                  <a:srgbClr val="191C1E"/>
-                </a:solidFill>
-                <a:latin typeface="Plus Jakarta Sans"/>
-                <a:ea typeface="Plus Jakarta Sans"/>
-                <a:cs typeface="Plus Jakarta Sans"/>
-                <a:sym typeface="Plus Jakarta Sans"/>
-              </a:rPr>
-              <a:t>Ausência de conexão</a:t>
-            </a:r>
-            <a:endParaRPr b="0" i="0" spc="0" sz="1400" u="none" cap="none" strike="noStrike">
-              <a:solidFill>
-                <a:srgbClr val="000000"/>
-              </a:solidFill>
-              <a:latin typeface="Arial"/>
-              <a:ea typeface="Arial"/>
-              <a:cs typeface="Arial"/>
-              <a:sym typeface="Arial"/>
-            </a:endParaRPr>
-          </a:p>
-        </p:txBody>
-      </p:sp>
-      <p:sp>
-        <p:nvSpPr>
-          <p:cNvPr id="349" name="Google Shape;349;p13"/>
-          <p:cNvSpPr/>
-          <p:nvPr/>
-        </p:nvSpPr>
-        <p:spPr>
-          <a:xfrm>
-            <a:off x="5852160" y="2075688"/>
-            <a:ext cx="1234440" cy="329184"/>
-          </a:xfrm>
-          <a:prstGeom prst="roundRect">
-            <a:avLst>
-              <a:gd fmla="val 50000" name="adj"/>
-            </a:avLst>
-          </a:prstGeom>
-          <a:solidFill>
-            <a:srgbClr val="E3F6EA"/>
-          </a:solidFill>
-          <a:ln>
-            <a:noFill/>
-          </a:ln>
-        </p:spPr>
-        <p:txBody>
-          <a:bodyPr anchorCtr="0" anchor="ctr" bIns="45700" lIns="91425" spcFirstLastPara="1" rIns="91425" wrap="square" tIns="45700">
-            <a:noAutofit/>
-          </a:bodyPr>
-          <a:lstStyle/>
-          <a:p>
-            <a:pPr indent="0" lvl="0" marL="0" marR="0" rtl="0" algn="l">
-              <a:lnSpc>
-                <a:spcPct val="100000"/>
-              </a:lnSpc>
-              <a:spcBef>
-                <a:spcPts val="0"/>
-              </a:spcBef>
-              <a:spcAft>
-                <a:spcPts val="0"/>
-              </a:spcAft>
-              <a:buClr>
-                <a:srgbClr val="000000"/>
-              </a:buClr>
-              <a:buSzPts val="1800"/>
-              <a:buFont typeface="Arial"/>
-              <a:buNone/>
-            </a:pPr>
-            <a:r>
-              <a:t/>
-            </a:r>
-            <a:endParaRPr b="0" i="0" spc="0" sz="1800" u="none" cap="none" strike="noStrike">
-              <a:solidFill>
-                <a:schemeClr val="dk1"/>
-              </a:solidFill>
-              <a:latin typeface="Calibri"/>
-              <a:ea typeface="Calibri"/>
-              <a:cs typeface="Calibri"/>
-              <a:sym typeface="Calibri"/>
-            </a:endParaRPr>
-          </a:p>
-        </p:txBody>
-      </p:sp>
-      <p:sp>
-        <p:nvSpPr>
-          <p:cNvPr id="350" name="Google Shape;350;p13"/>
-          <p:cNvSpPr txBox="1"/>
-          <p:nvPr/>
-        </p:nvSpPr>
-        <p:spPr>
-          <a:xfrm>
-            <a:off x="5852160" y="2075688"/>
-            <a:ext cx="1234440" cy="329184"/>
-          </a:xfrm>
-          <a:prstGeom prst="rect">
-            <a:avLst/>
-          </a:prstGeom>
-          <a:noFill/>
-          <a:ln>
-            <a:noFill/>
-          </a:ln>
-        </p:spPr>
-        <p:txBody>
-          <a:bodyPr anchorCtr="0" anchor="ctr" bIns="0" lIns="0" spcFirstLastPara="1" rIns="0" wrap="square" tIns="0">
-            <a:spAutoFit/>
-          </a:bodyPr>
-          <a:lstStyle/>
-          <a:p>
-            <a:pPr indent="0" lvl="0" marL="0" marR="0" rtl="0" algn="ctr">
-              <a:lnSpc>
-                <a:spcPct val="110000"/>
-              </a:lnSpc>
-              <a:spcBef>
-                <a:spcPts val="0"/>
-              </a:spcBef>
-              <a:spcAft>
-                <a:spcPts val="0"/>
-              </a:spcAft>
-              <a:buClr>
-                <a:srgbClr val="000000"/>
-              </a:buClr>
-              <a:buSzPts val="1200"/>
-              <a:buFont typeface="Arial"/>
-              <a:buNone/>
-            </a:pPr>
-            <a:r>
-              <a:rPr b="1" i="0" lang="en-US" spc="0" sz="1200" u="none" cap="none" strike="noStrike">
-                <a:solidFill>
-                  <a:srgbClr val="11803E"/>
-                </a:solidFill>
-                <a:latin typeface="Plus Jakarta Sans"/>
-                <a:ea typeface="Plus Jakarta Sans"/>
-                <a:cs typeface="Plus Jakarta Sans"/>
-                <a:sym typeface="Plus Jakarta Sans"/>
-              </a:rPr>
-              <a:t>Aprovado</a:t>
-            </a:r>
-            <a:endParaRPr b="0" i="0" spc="0" sz="1400" u="none" cap="none" strike="noStrike">
-              <a:solidFill>
-                <a:srgbClr val="000000"/>
-              </a:solidFill>
-              <a:latin typeface="Arial"/>
-              <a:ea typeface="Arial"/>
-              <a:cs typeface="Arial"/>
-              <a:sym typeface="Arial"/>
-            </a:endParaRPr>
-          </a:p>
-        </p:txBody>
-      </p:sp>
-      <p:sp>
-        <p:nvSpPr>
-          <p:cNvPr id="351" name="Google Shape;351;p13"/>
-          <p:cNvSpPr txBox="1"/>
-          <p:nvPr/>
-        </p:nvSpPr>
-        <p:spPr>
-          <a:xfrm>
-            <a:off x="1005840" y="2724912"/>
-            <a:ext cx="3931920" cy="548640"/>
-          </a:xfrm>
-          <a:prstGeom prst="rect">
-            <a:avLst/>
-          </a:prstGeom>
-          <a:noFill/>
-          <a:ln>
-            <a:noFill/>
-          </a:ln>
-        </p:spPr>
-        <p:txBody>
-          <a:bodyPr anchorCtr="0" anchor="ctr" bIns="0" lIns="0" spcFirstLastPara="1" rIns="0" wrap="square" tIns="0">
-            <a:spAutoFit/>
-          </a:bodyPr>
-          <a:lstStyle/>
-          <a:p>
-            <a:pPr indent="0" lvl="0" marL="0" marR="0" rtl="0" algn="l">
-              <a:lnSpc>
-                <a:spcPct val="110000"/>
-              </a:lnSpc>
-              <a:spcBef>
-                <a:spcPts val="0"/>
-              </a:spcBef>
-              <a:spcAft>
-                <a:spcPts val="0"/>
-              </a:spcAft>
-              <a:buClr>
-                <a:srgbClr val="000000"/>
-              </a:buClr>
-              <a:buSzPts val="1600"/>
-              <a:buFont typeface="Arial"/>
-              <a:buNone/>
-            </a:pPr>
-            <a:r>
-              <a:rPr b="0" i="0" lang="en-US" spc="0" sz="1600" u="none" cap="none" strike="noStrike">
-                <a:solidFill>
-                  <a:srgbClr val="191C1E"/>
-                </a:solidFill>
-                <a:latin typeface="Plus Jakarta Sans"/>
-                <a:ea typeface="Plus Jakarta Sans"/>
-                <a:cs typeface="Plus Jakarta Sans"/>
-                <a:sym typeface="Plus Jakarta Sans"/>
-              </a:rPr>
-              <a:t>Restabelecimento da conectividade</a:t>
-            </a:r>
-            <a:endParaRPr b="0" i="0" spc="0" sz="1400" u="none" cap="none" strike="noStrike">
-              <a:solidFill>
-                <a:srgbClr val="000000"/>
-              </a:solidFill>
-              <a:latin typeface="Arial"/>
-              <a:ea typeface="Arial"/>
-              <a:cs typeface="Arial"/>
-              <a:sym typeface="Arial"/>
-            </a:endParaRPr>
-          </a:p>
-        </p:txBody>
-      </p:sp>
-      <p:sp>
-        <p:nvSpPr>
-          <p:cNvPr id="352" name="Google Shape;352;p13"/>
-          <p:cNvSpPr/>
-          <p:nvPr/>
-        </p:nvSpPr>
-        <p:spPr>
-          <a:xfrm>
-            <a:off x="5852160" y="2834640"/>
-            <a:ext cx="1234440" cy="329184"/>
-          </a:xfrm>
-          <a:prstGeom prst="roundRect">
-            <a:avLst>
-              <a:gd fmla="val 50000" name="adj"/>
-            </a:avLst>
-          </a:prstGeom>
-          <a:solidFill>
-            <a:srgbClr val="E3F6EA"/>
-          </a:solidFill>
-          <a:ln>
-            <a:noFill/>
-          </a:ln>
-        </p:spPr>
-        <p:txBody>
-          <a:bodyPr anchorCtr="0" anchor="ctr" bIns="45700" lIns="91425" spcFirstLastPara="1" rIns="91425" wrap="square" tIns="45700">
-            <a:noAutofit/>
-          </a:bodyPr>
-          <a:lstStyle/>
-          <a:p>
-            <a:pPr indent="0" lvl="0" marL="0" marR="0" rtl="0" algn="l">
-              <a:lnSpc>
-                <a:spcPct val="100000"/>
-              </a:lnSpc>
-              <a:spcBef>
-                <a:spcPts val="0"/>
-              </a:spcBef>
-              <a:spcAft>
-                <a:spcPts val="0"/>
-              </a:spcAft>
-              <a:buClr>
-                <a:srgbClr val="000000"/>
-              </a:buClr>
-              <a:buSzPts val="1800"/>
-              <a:buFont typeface="Arial"/>
-              <a:buNone/>
-            </a:pPr>
-            <a:r>
-              <a:t/>
-            </a:r>
-            <a:endParaRPr b="0" i="0" spc="0" sz="1800" u="none" cap="none" strike="noStrike">
-              <a:solidFill>
-                <a:schemeClr val="dk1"/>
-              </a:solidFill>
-              <a:latin typeface="Calibri"/>
-              <a:ea typeface="Calibri"/>
-              <a:cs typeface="Calibri"/>
-              <a:sym typeface="Calibri"/>
-            </a:endParaRPr>
-          </a:p>
-        </p:txBody>
-      </p:sp>
-      <p:sp>
-        <p:nvSpPr>
-          <p:cNvPr id="353" name="Google Shape;353;p13"/>
-          <p:cNvSpPr txBox="1"/>
-          <p:nvPr/>
-        </p:nvSpPr>
-        <p:spPr>
-          <a:xfrm>
-            <a:off x="5852160" y="2834640"/>
-            <a:ext cx="1234440" cy="329184"/>
-          </a:xfrm>
-          <a:prstGeom prst="rect">
-            <a:avLst/>
-          </a:prstGeom>
-          <a:noFill/>
-          <a:ln>
-            <a:noFill/>
-          </a:ln>
-        </p:spPr>
-        <p:txBody>
-          <a:bodyPr anchorCtr="0" anchor="ctr" bIns="0" lIns="0" spcFirstLastPara="1" rIns="0" wrap="square" tIns="0">
-            <a:spAutoFit/>
-          </a:bodyPr>
-          <a:lstStyle/>
-          <a:p>
-            <a:pPr indent="0" lvl="0" marL="0" marR="0" rtl="0" algn="ctr">
-              <a:lnSpc>
-                <a:spcPct val="110000"/>
-              </a:lnSpc>
-              <a:spcBef>
-                <a:spcPts val="0"/>
-              </a:spcBef>
-              <a:spcAft>
-                <a:spcPts val="0"/>
-              </a:spcAft>
-              <a:buClr>
-                <a:srgbClr val="000000"/>
-              </a:buClr>
-              <a:buSzPts val="1200"/>
-              <a:buFont typeface="Arial"/>
-              <a:buNone/>
-            </a:pPr>
-            <a:r>
-              <a:rPr b="1" i="0" lang="en-US" spc="0" sz="1200" u="none" cap="none" strike="noStrike">
-                <a:solidFill>
-                  <a:srgbClr val="11803E"/>
-                </a:solidFill>
-                <a:latin typeface="Plus Jakarta Sans"/>
-                <a:ea typeface="Plus Jakarta Sans"/>
-                <a:cs typeface="Plus Jakarta Sans"/>
-                <a:sym typeface="Plus Jakarta Sans"/>
-              </a:rPr>
-              <a:t>Aprovado</a:t>
-            </a:r>
-            <a:endParaRPr b="0" i="0" spc="0" sz="1400" u="none" cap="none" strike="noStrike">
-              <a:solidFill>
-                <a:srgbClr val="000000"/>
-              </a:solidFill>
-              <a:latin typeface="Arial"/>
-              <a:ea typeface="Arial"/>
-              <a:cs typeface="Arial"/>
-              <a:sym typeface="Arial"/>
-            </a:endParaRPr>
-          </a:p>
-        </p:txBody>
-      </p:sp>
-      <p:sp>
-        <p:nvSpPr>
-          <p:cNvPr id="354" name="Google Shape;354;p13"/>
-          <p:cNvSpPr txBox="1"/>
-          <p:nvPr/>
-        </p:nvSpPr>
-        <p:spPr>
-          <a:xfrm>
-            <a:off x="1005840" y="3483863"/>
-            <a:ext cx="3931920" cy="548640"/>
-          </a:xfrm>
-          <a:prstGeom prst="rect">
-            <a:avLst/>
-          </a:prstGeom>
-          <a:noFill/>
-          <a:ln>
-            <a:noFill/>
-          </a:ln>
-        </p:spPr>
-        <p:txBody>
-          <a:bodyPr anchorCtr="0" anchor="ctr" bIns="0" lIns="0" spcFirstLastPara="1" rIns="0" wrap="square" tIns="0">
-            <a:spAutoFit/>
-          </a:bodyPr>
-          <a:lstStyle/>
-          <a:p>
-            <a:pPr indent="0" lvl="0" marL="0" marR="0" rtl="0" algn="l">
-              <a:lnSpc>
-                <a:spcPct val="110000"/>
-              </a:lnSpc>
-              <a:spcBef>
-                <a:spcPts val="0"/>
-              </a:spcBef>
-              <a:spcAft>
-                <a:spcPts val="0"/>
-              </a:spcAft>
-              <a:buClr>
-                <a:srgbClr val="000000"/>
-              </a:buClr>
-              <a:buSzPts val="1600"/>
-              <a:buFont typeface="Arial"/>
-              <a:buNone/>
-            </a:pPr>
-            <a:r>
-              <a:rPr b="0" i="0" lang="en-US" spc="0" sz="1600" u="none" cap="none" strike="noStrike">
-                <a:solidFill>
-                  <a:srgbClr val="191C1E"/>
-                </a:solidFill>
-                <a:latin typeface="Plus Jakarta Sans"/>
-                <a:ea typeface="Plus Jakarta Sans"/>
-                <a:cs typeface="Plus Jakarta Sans"/>
-                <a:sym typeface="Plus Jakarta Sans"/>
-              </a:rPr>
-              <a:t>Sincronização por restauração</a:t>
-            </a:r>
-            <a:endParaRPr b="0" i="0" spc="0" sz="1400" u="none" cap="none" strike="noStrike">
-              <a:solidFill>
-                <a:srgbClr val="000000"/>
-              </a:solidFill>
-              <a:latin typeface="Arial"/>
-              <a:ea typeface="Arial"/>
-              <a:cs typeface="Arial"/>
-              <a:sym typeface="Arial"/>
-            </a:endParaRPr>
-          </a:p>
-        </p:txBody>
-      </p:sp>
-      <p:sp>
-        <p:nvSpPr>
-          <p:cNvPr id="355" name="Google Shape;355;p13"/>
-          <p:cNvSpPr/>
-          <p:nvPr/>
-        </p:nvSpPr>
-        <p:spPr>
-          <a:xfrm>
-            <a:off x="4846320" y="3593591"/>
-            <a:ext cx="2240280" cy="329184"/>
-          </a:xfrm>
-          <a:prstGeom prst="roundRect">
-            <a:avLst>
-              <a:gd fmla="val 50000" name="adj"/>
-            </a:avLst>
-          </a:prstGeom>
-          <a:solidFill>
-            <a:srgbClr val="E3F6EA"/>
-          </a:solidFill>
-          <a:ln>
-            <a:noFill/>
-          </a:ln>
-        </p:spPr>
-        <p:txBody>
-          <a:bodyPr anchorCtr="0" anchor="ctr" bIns="45700" lIns="91425" spcFirstLastPara="1" rIns="91425" wrap="square" tIns="45700">
-            <a:noAutofit/>
-          </a:bodyPr>
-          <a:lstStyle/>
-          <a:p>
-            <a:pPr indent="0" lvl="0" marL="0" marR="0" rtl="0" algn="l">
-              <a:lnSpc>
-                <a:spcPct val="100000"/>
-              </a:lnSpc>
-              <a:spcBef>
-                <a:spcPts val="0"/>
-              </a:spcBef>
-              <a:spcAft>
-                <a:spcPts val="0"/>
-              </a:spcAft>
-              <a:buClr>
-                <a:srgbClr val="000000"/>
-              </a:buClr>
-              <a:buSzPts val="1800"/>
-              <a:buFont typeface="Arial"/>
-              <a:buNone/>
-            </a:pPr>
-            <a:r>
-              <a:t/>
-            </a:r>
-            <a:endParaRPr b="0" i="0" spc="0" sz="1800" u="none" cap="none" strike="noStrike">
-              <a:solidFill>
-                <a:schemeClr val="dk1"/>
-              </a:solidFill>
-              <a:latin typeface="Calibri"/>
-              <a:ea typeface="Calibri"/>
-              <a:cs typeface="Calibri"/>
-              <a:sym typeface="Calibri"/>
-            </a:endParaRPr>
-          </a:p>
-        </p:txBody>
-      </p:sp>
-      <p:sp>
-        <p:nvSpPr>
-          <p:cNvPr id="356" name="Google Shape;356;p13"/>
-          <p:cNvSpPr txBox="1"/>
-          <p:nvPr/>
-        </p:nvSpPr>
-        <p:spPr>
-          <a:xfrm>
-            <a:off x="4846320" y="3593591"/>
-            <a:ext cx="2240280" cy="329184"/>
-          </a:xfrm>
-          <a:prstGeom prst="rect">
-            <a:avLst/>
-          </a:prstGeom>
-          <a:noFill/>
-          <a:ln>
-            <a:noFill/>
-          </a:ln>
-        </p:spPr>
-        <p:txBody>
-          <a:bodyPr anchorCtr="0" anchor="ctr" bIns="0" lIns="0" spcFirstLastPara="1" rIns="0" wrap="square" tIns="0">
-            <a:spAutoFit/>
-          </a:bodyPr>
-          <a:lstStyle/>
-          <a:p>
-            <a:pPr indent="0" lvl="0" marL="0" marR="0" rtl="0" algn="ctr">
-              <a:lnSpc>
-                <a:spcPct val="110000"/>
-              </a:lnSpc>
-              <a:spcBef>
-                <a:spcPts val="0"/>
-              </a:spcBef>
-              <a:spcAft>
-                <a:spcPts val="0"/>
-              </a:spcAft>
-              <a:buClr>
-                <a:srgbClr val="000000"/>
-              </a:buClr>
-              <a:buSzPts val="1200"/>
-              <a:buFont typeface="Arial"/>
-              <a:buNone/>
-            </a:pPr>
-            <a:r>
-              <a:rPr b="1" i="0" lang="en-US" spc="0" sz="1200" u="none" cap="none" strike="noStrike">
-                <a:solidFill>
-                  <a:srgbClr val="11803E"/>
-                </a:solidFill>
-                <a:latin typeface="Plus Jakarta Sans"/>
-                <a:ea typeface="Plus Jakarta Sans"/>
-                <a:cs typeface="Plus Jakarta Sans"/>
-                <a:sym typeface="Plus Jakarta Sans"/>
-              </a:rPr>
-              <a:t>Aprovado, com ajustes</a:t>
-            </a:r>
-            <a:endParaRPr b="0" i="0" spc="0" sz="1400" u="none" cap="none" strike="noStrike">
-              <a:solidFill>
-                <a:srgbClr val="000000"/>
-              </a:solidFill>
-              <a:latin typeface="Arial"/>
-              <a:ea typeface="Arial"/>
-              <a:cs typeface="Arial"/>
-              <a:sym typeface="Arial"/>
-            </a:endParaRPr>
-          </a:p>
-        </p:txBody>
-      </p:sp>
-      <p:sp>
-        <p:nvSpPr>
-          <p:cNvPr id="357" name="Google Shape;357;p13"/>
-          <p:cNvSpPr txBox="1"/>
-          <p:nvPr/>
-        </p:nvSpPr>
-        <p:spPr>
-          <a:xfrm>
-            <a:off x="1005840" y="4242816"/>
-            <a:ext cx="3931920" cy="548640"/>
-          </a:xfrm>
-          <a:prstGeom prst="rect">
-            <a:avLst/>
-          </a:prstGeom>
-          <a:noFill/>
-          <a:ln>
-            <a:noFill/>
-          </a:ln>
-        </p:spPr>
-        <p:txBody>
-          <a:bodyPr anchorCtr="0" anchor="ctr" bIns="0" lIns="0" spcFirstLastPara="1" rIns="0" wrap="square" tIns="0">
-            <a:spAutoFit/>
-          </a:bodyPr>
-          <a:lstStyle/>
-          <a:p>
-            <a:pPr indent="0" lvl="0" marL="0" marR="0" rtl="0" algn="l">
-              <a:lnSpc>
-                <a:spcPct val="110000"/>
-              </a:lnSpc>
-              <a:spcBef>
-                <a:spcPts val="0"/>
-              </a:spcBef>
-              <a:spcAft>
-                <a:spcPts val="0"/>
-              </a:spcAft>
-              <a:buClr>
-                <a:srgbClr val="000000"/>
-              </a:buClr>
-              <a:buSzPts val="1600"/>
-              <a:buFont typeface="Arial"/>
-              <a:buNone/>
-            </a:pPr>
-            <a:r>
-              <a:rPr b="0" i="0" lang="en-US" spc="0" sz="1600" u="none" cap="none" strike="noStrike">
-                <a:solidFill>
-                  <a:srgbClr val="191C1E"/>
-                </a:solidFill>
-                <a:latin typeface="Plus Jakarta Sans"/>
-                <a:ea typeface="Plus Jakarta Sans"/>
-                <a:cs typeface="Plus Jakarta Sans"/>
-                <a:sym typeface="Plus Jakarta Sans"/>
-              </a:rPr>
-              <a:t>Sincronização entre dispositivos</a:t>
-            </a:r>
-            <a:endParaRPr b="0" i="0" spc="0" sz="1400" u="none" cap="none" strike="noStrike">
-              <a:solidFill>
-                <a:srgbClr val="000000"/>
-              </a:solidFill>
-              <a:latin typeface="Arial"/>
-              <a:ea typeface="Arial"/>
-              <a:cs typeface="Arial"/>
-              <a:sym typeface="Arial"/>
-            </a:endParaRPr>
-          </a:p>
-        </p:txBody>
-      </p:sp>
-      <p:sp>
-        <p:nvSpPr>
-          <p:cNvPr id="358" name="Google Shape;358;p13"/>
-          <p:cNvSpPr/>
-          <p:nvPr/>
-        </p:nvSpPr>
-        <p:spPr>
-          <a:xfrm>
-            <a:off x="4846320" y="4352544"/>
-            <a:ext cx="2240280" cy="329184"/>
-          </a:xfrm>
-          <a:prstGeom prst="roundRect">
-            <a:avLst>
-              <a:gd fmla="val 50000" name="adj"/>
-            </a:avLst>
-          </a:prstGeom>
-          <a:solidFill>
-            <a:srgbClr val="E3F6EA"/>
-          </a:solidFill>
-          <a:ln>
-            <a:noFill/>
-          </a:ln>
-        </p:spPr>
-        <p:txBody>
-          <a:bodyPr anchorCtr="0" anchor="ctr" bIns="45700" lIns="91425" spcFirstLastPara="1" rIns="91425" wrap="square" tIns="45700">
-            <a:noAutofit/>
-          </a:bodyPr>
-          <a:lstStyle/>
-          <a:p>
-            <a:pPr indent="0" lvl="0" marL="0" marR="0" rtl="0" algn="l">
-              <a:lnSpc>
-                <a:spcPct val="100000"/>
-              </a:lnSpc>
-              <a:spcBef>
-                <a:spcPts val="0"/>
-              </a:spcBef>
-              <a:spcAft>
-                <a:spcPts val="0"/>
-              </a:spcAft>
-              <a:buClr>
-                <a:srgbClr val="000000"/>
-              </a:buClr>
-              <a:buSzPts val="1800"/>
-              <a:buFont typeface="Arial"/>
-              <a:buNone/>
-            </a:pPr>
-            <a:r>
-              <a:t/>
-            </a:r>
-            <a:endParaRPr b="0" i="0" spc="0" sz="1800" u="none" cap="none" strike="noStrike">
-              <a:solidFill>
-                <a:schemeClr val="dk1"/>
-              </a:solidFill>
-              <a:latin typeface="Calibri"/>
-              <a:ea typeface="Calibri"/>
-              <a:cs typeface="Calibri"/>
-              <a:sym typeface="Calibri"/>
-            </a:endParaRPr>
-          </a:p>
-        </p:txBody>
-      </p:sp>
-      <p:sp>
-        <p:nvSpPr>
-          <p:cNvPr id="359" name="Google Shape;359;p13"/>
-          <p:cNvSpPr txBox="1"/>
-          <p:nvPr/>
-        </p:nvSpPr>
-        <p:spPr>
-          <a:xfrm>
-            <a:off x="4846320" y="4352544"/>
-            <a:ext cx="2240280" cy="329184"/>
-          </a:xfrm>
-          <a:prstGeom prst="rect">
-            <a:avLst/>
-          </a:prstGeom>
-          <a:noFill/>
-          <a:ln>
-            <a:noFill/>
-          </a:ln>
-        </p:spPr>
-        <p:txBody>
-          <a:bodyPr anchorCtr="0" anchor="ctr" bIns="0" lIns="0" spcFirstLastPara="1" rIns="0" wrap="square" tIns="0">
-            <a:spAutoFit/>
-          </a:bodyPr>
-          <a:lstStyle/>
-          <a:p>
-            <a:pPr indent="0" lvl="0" marL="0" marR="0" rtl="0" algn="ctr">
-              <a:lnSpc>
-                <a:spcPct val="110000"/>
-              </a:lnSpc>
-              <a:spcBef>
-                <a:spcPts val="0"/>
-              </a:spcBef>
-              <a:spcAft>
-                <a:spcPts val="0"/>
-              </a:spcAft>
-              <a:buClr>
-                <a:srgbClr val="000000"/>
-              </a:buClr>
-              <a:buSzPts val="1200"/>
-              <a:buFont typeface="Arial"/>
-              <a:buNone/>
-            </a:pPr>
-            <a:r>
-              <a:rPr b="1" i="0" lang="en-US" spc="0" sz="1200" u="none" cap="none" strike="noStrike">
-                <a:solidFill>
-                  <a:srgbClr val="11803E"/>
-                </a:solidFill>
-                <a:latin typeface="Plus Jakarta Sans"/>
-                <a:ea typeface="Plus Jakarta Sans"/>
-                <a:cs typeface="Plus Jakarta Sans"/>
-                <a:sym typeface="Plus Jakarta Sans"/>
-              </a:rPr>
-              <a:t>Aprovado, com ajustes</a:t>
-            </a:r>
-            <a:endParaRPr b="0" i="0" spc="0" sz="1400" u="none" cap="none" strike="noStrike">
-              <a:solidFill>
-                <a:srgbClr val="000000"/>
-              </a:solidFill>
-              <a:latin typeface="Arial"/>
-              <a:ea typeface="Arial"/>
-              <a:cs typeface="Arial"/>
-              <a:sym typeface="Arial"/>
-            </a:endParaRPr>
-          </a:p>
-        </p:txBody>
-      </p:sp>
-      <p:sp>
-        <p:nvSpPr>
-          <p:cNvPr id="360" name="Google Shape;360;p13"/>
-          <p:cNvSpPr txBox="1"/>
-          <p:nvPr/>
-        </p:nvSpPr>
-        <p:spPr>
-          <a:xfrm>
-            <a:off x="1005840" y="5001768"/>
-            <a:ext cx="3931920" cy="548640"/>
-          </a:xfrm>
-          <a:prstGeom prst="rect">
-            <a:avLst/>
-          </a:prstGeom>
-          <a:noFill/>
-          <a:ln>
-            <a:noFill/>
-          </a:ln>
-        </p:spPr>
-        <p:txBody>
-          <a:bodyPr anchorCtr="0" anchor="ctr" bIns="0" lIns="0" spcFirstLastPara="1" rIns="0" wrap="square" tIns="0">
-            <a:spAutoFit/>
-          </a:bodyPr>
-          <a:lstStyle/>
-          <a:p>
-            <a:pPr indent="0" lvl="0" marL="0" marR="0" rtl="0" algn="l">
-              <a:lnSpc>
-                <a:spcPct val="110000"/>
-              </a:lnSpc>
-              <a:spcBef>
-                <a:spcPts val="0"/>
-              </a:spcBef>
-              <a:spcAft>
-                <a:spcPts val="0"/>
-              </a:spcAft>
-              <a:buClr>
-                <a:srgbClr val="000000"/>
-              </a:buClr>
-              <a:buSzPts val="1600"/>
-              <a:buFont typeface="Arial"/>
-              <a:buNone/>
-            </a:pPr>
-            <a:r>
-              <a:rPr b="0" i="0" lang="en-US" spc="0" sz="1600" u="none" cap="none" strike="noStrike">
-                <a:solidFill>
-                  <a:srgbClr val="191C1E"/>
-                </a:solidFill>
-                <a:latin typeface="Plus Jakarta Sans"/>
-                <a:ea typeface="Plus Jakarta Sans"/>
-                <a:cs typeface="Plus Jakarta Sans"/>
-                <a:sym typeface="Plus Jakarta Sans"/>
-              </a:rPr>
-              <a:t>Conflito entre registros</a:t>
-            </a:r>
-            <a:endParaRPr b="0" i="0" spc="0" sz="1400" u="none" cap="none" strike="noStrike">
-              <a:solidFill>
-                <a:srgbClr val="000000"/>
-              </a:solidFill>
-              <a:latin typeface="Arial"/>
-              <a:ea typeface="Arial"/>
-              <a:cs typeface="Arial"/>
-              <a:sym typeface="Arial"/>
-            </a:endParaRPr>
-          </a:p>
-        </p:txBody>
-      </p:sp>
-      <p:sp>
-        <p:nvSpPr>
-          <p:cNvPr id="361" name="Google Shape;361;p13"/>
-          <p:cNvSpPr/>
-          <p:nvPr/>
-        </p:nvSpPr>
-        <p:spPr>
-          <a:xfrm>
-            <a:off x="4846320" y="5111496"/>
-            <a:ext cx="2240280" cy="329184"/>
-          </a:xfrm>
-          <a:prstGeom prst="roundRect">
-            <a:avLst>
-              <a:gd fmla="val 50000" name="adj"/>
-            </a:avLst>
-          </a:prstGeom>
-          <a:solidFill>
-            <a:srgbClr val="E3F6EA"/>
-          </a:solidFill>
-          <a:ln>
-            <a:noFill/>
-          </a:ln>
-        </p:spPr>
-        <p:txBody>
-          <a:bodyPr anchorCtr="0" anchor="ctr" bIns="45700" lIns="91425" spcFirstLastPara="1" rIns="91425" wrap="square" tIns="45700">
-            <a:noAutofit/>
-          </a:bodyPr>
-          <a:lstStyle/>
-          <a:p>
-            <a:pPr indent="0" lvl="0" marL="0" marR="0" rtl="0" algn="l">
-              <a:lnSpc>
-                <a:spcPct val="100000"/>
-              </a:lnSpc>
-              <a:spcBef>
-                <a:spcPts val="0"/>
-              </a:spcBef>
-              <a:spcAft>
-                <a:spcPts val="0"/>
-              </a:spcAft>
-              <a:buClr>
-                <a:srgbClr val="000000"/>
-              </a:buClr>
-              <a:buSzPts val="1800"/>
-              <a:buFont typeface="Arial"/>
-              <a:buNone/>
-            </a:pPr>
-            <a:r>
-              <a:t/>
-            </a:r>
-            <a:endParaRPr b="0" i="0" spc="0" sz="1800" u="none" cap="none" strike="noStrike">
-              <a:solidFill>
-                <a:schemeClr val="dk1"/>
-              </a:solidFill>
-              <a:latin typeface="Calibri"/>
-              <a:ea typeface="Calibri"/>
-              <a:cs typeface="Calibri"/>
-              <a:sym typeface="Calibri"/>
-            </a:endParaRPr>
-          </a:p>
-        </p:txBody>
-      </p:sp>
-      <p:sp>
-        <p:nvSpPr>
-          <p:cNvPr id="362" name="Google Shape;362;p13"/>
-          <p:cNvSpPr txBox="1"/>
-          <p:nvPr/>
-        </p:nvSpPr>
-        <p:spPr>
-          <a:xfrm>
-            <a:off x="4846320" y="5111496"/>
-            <a:ext cx="2240280" cy="329184"/>
-          </a:xfrm>
-          <a:prstGeom prst="rect">
-            <a:avLst/>
-          </a:prstGeom>
-          <a:noFill/>
-          <a:ln>
-            <a:noFill/>
-          </a:ln>
-        </p:spPr>
-        <p:txBody>
-          <a:bodyPr anchorCtr="0" anchor="ctr" bIns="0" lIns="0" spcFirstLastPara="1" rIns="0" wrap="square" tIns="0">
-            <a:spAutoFit/>
-          </a:bodyPr>
-          <a:lstStyle/>
-          <a:p>
-            <a:pPr indent="0" lvl="0" marL="0" marR="0" rtl="0" algn="ctr">
-              <a:lnSpc>
-                <a:spcPct val="110000"/>
-              </a:lnSpc>
-              <a:spcBef>
-                <a:spcPts val="0"/>
-              </a:spcBef>
-              <a:spcAft>
-                <a:spcPts val="0"/>
-              </a:spcAft>
-              <a:buClr>
-                <a:srgbClr val="000000"/>
-              </a:buClr>
-              <a:buSzPts val="1200"/>
-              <a:buFont typeface="Arial"/>
-              <a:buNone/>
-            </a:pPr>
-            <a:r>
-              <a:rPr b="1" i="0" lang="en-US" spc="0" sz="1200" u="none" cap="none" strike="noStrike">
-                <a:solidFill>
-                  <a:srgbClr val="11803E"/>
-                </a:solidFill>
-                <a:latin typeface="Plus Jakarta Sans"/>
-                <a:ea typeface="Plus Jakarta Sans"/>
-                <a:cs typeface="Plus Jakarta Sans"/>
-                <a:sym typeface="Plus Jakarta Sans"/>
-              </a:rPr>
-              <a:t>Aprovado, com ajustes</a:t>
-            </a:r>
-            <a:endParaRPr b="0" i="0" spc="0" sz="1400" u="none" cap="none" strike="noStrike">
-              <a:solidFill>
-                <a:srgbClr val="000000"/>
-              </a:solidFill>
-              <a:latin typeface="Arial"/>
-              <a:ea typeface="Arial"/>
-              <a:cs typeface="Arial"/>
-              <a:sym typeface="Arial"/>
-            </a:endParaRPr>
-          </a:p>
-        </p:txBody>
-      </p:sp>
-      <p:sp>
-        <p:nvSpPr>
-          <p:cNvPr id="363" name="Google Shape;363;p13"/>
-          <p:cNvSpPr txBox="1"/>
-          <p:nvPr/>
-        </p:nvSpPr>
-        <p:spPr>
-          <a:xfrm>
-            <a:off x="685800" y="6053328"/>
-            <a:ext cx="7315200" cy="274320"/>
-          </a:xfrm>
-          <a:prstGeom prst="rect">
-            <a:avLst/>
-          </a:prstGeom>
-          <a:noFill/>
-          <a:ln>
-            <a:noFill/>
-          </a:ln>
-        </p:spPr>
-        <p:txBody>
-          <a:bodyPr anchorCtr="0" anchor="t" bIns="0" lIns="0" spcFirstLastPara="1" rIns="0" wrap="square" tIns="0">
-            <a:spAutoFit/>
-          </a:bodyPr>
-          <a:lstStyle/>
-          <a:p>
-            <a:pPr indent="0" lvl="0" marL="0" marR="0" rtl="0" algn="l">
-              <a:lnSpc>
-                <a:spcPct val="110000"/>
-              </a:lnSpc>
-              <a:spcBef>
-                <a:spcPts val="0"/>
-              </a:spcBef>
-              <a:spcAft>
-                <a:spcPts val="0"/>
-              </a:spcAft>
-              <a:buClr>
-                <a:srgbClr val="000000"/>
-              </a:buClr>
-              <a:buSzPts val="1000"/>
-              <a:buFont typeface="Arial"/>
-              <a:buNone/>
-            </a:pPr>
-            <a:r>
-              <a:rPr b="0" i="0" lang="en-US" spc="0" sz="1000" u="none" cap="none" strike="noStrike">
-                <a:solidFill>
-                  <a:srgbClr val="545F73"/>
-                </a:solidFill>
-                <a:latin typeface="Plus Jakarta Sans"/>
-                <a:ea typeface="Plus Jakarta Sans"/>
-                <a:cs typeface="Plus Jakarta Sans"/>
-                <a:sym typeface="Plus Jakarta Sans"/>
-              </a:rPr>
-              <a:t>Fonte: Quadro 28 do TCC. Xiaomi Redmi Note 14 Pro 5G, Android 16.</a:t>
-            </a:r>
-            <a:endParaRPr b="0" i="0" spc="0" sz="1400" u="none" cap="none" strike="noStrike">
-              <a:solidFill>
-                <a:srgbClr val="000000"/>
-              </a:solidFill>
-              <a:latin typeface="Arial"/>
-              <a:ea typeface="Arial"/>
-              <a:cs typeface="Arial"/>
-              <a:sym typeface="Arial"/>
-            </a:endParaRPr>
-          </a:p>
-        </p:txBody>
-      </p:sp>
-      <p:sp>
-        <p:nvSpPr>
-          <p:cNvPr id="364" name="Google Shape;364;p13"/>
-          <p:cNvSpPr/>
-          <p:nvPr/>
-        </p:nvSpPr>
-        <p:spPr>
-          <a:xfrm>
-            <a:off x="7680960" y="1783080"/>
-            <a:ext cx="3822191" cy="1920240"/>
-          </a:xfrm>
-          <a:prstGeom prst="roundRect">
-            <a:avLst>
-              <a:gd fmla="val 6666" name="adj"/>
-            </a:avLst>
-          </a:prstGeom>
-          <a:solidFill>
-            <a:srgbClr val="FFFFFF"/>
-          </a:solidFill>
-          <a:ln>
-            <a:noFill/>
-          </a:ln>
-        </p:spPr>
-        <p:txBody>
-          <a:bodyPr anchorCtr="0" anchor="ctr" bIns="45700" lIns="91425" spcFirstLastPara="1" rIns="91425" wrap="square" tIns="45700">
-            <a:noAutofit/>
-          </a:bodyPr>
-          <a:lstStyle/>
-          <a:p>
-            <a:pPr indent="0" lvl="0" marL="0" marR="0" rtl="0" algn="l">
-              <a:lnSpc>
-                <a:spcPct val="100000"/>
-              </a:lnSpc>
-              <a:spcBef>
-                <a:spcPts val="0"/>
-              </a:spcBef>
-              <a:spcAft>
-                <a:spcPts val="0"/>
-              </a:spcAft>
-              <a:buClr>
-                <a:srgbClr val="000000"/>
-              </a:buClr>
-              <a:buSzPts val="1800"/>
-              <a:buFont typeface="Arial"/>
-              <a:buNone/>
-            </a:pPr>
-            <a:r>
-              <a:t/>
-            </a:r>
-            <a:endParaRPr b="0" i="0" spc="0" sz="1800" u="none" cap="none" strike="noStrike">
-              <a:solidFill>
-                <a:schemeClr val="dk1"/>
-              </a:solidFill>
-              <a:latin typeface="Calibri"/>
-              <a:ea typeface="Calibri"/>
-              <a:cs typeface="Calibri"/>
-              <a:sym typeface="Calibri"/>
-            </a:endParaRPr>
-          </a:p>
-        </p:txBody>
-      </p:sp>
-      <p:sp>
-        <p:nvSpPr>
-          <p:cNvPr id="365" name="Google Shape;365;p13"/>
-          <p:cNvSpPr txBox="1"/>
-          <p:nvPr/>
-        </p:nvSpPr>
-        <p:spPr>
-          <a:xfrm>
-            <a:off x="7946100" y="2163580"/>
-            <a:ext cx="3291900" cy="1232400"/>
-          </a:xfrm>
-          <a:prstGeom prst="rect">
-            <a:avLst/>
-          </a:prstGeom>
-          <a:noFill/>
-          <a:ln>
-            <a:noFill/>
-          </a:ln>
-        </p:spPr>
-        <p:txBody>
-          <a:bodyPr anchorCtr="0" anchor="ctr" bIns="0" lIns="0" spcFirstLastPara="1" rIns="0" wrap="square" tIns="0">
-            <a:spAutoFit/>
-          </a:bodyPr>
-          <a:lstStyle/>
-          <a:p>
-            <a:pPr indent="0" lvl="0" marL="0" marR="0" rtl="0" algn="l">
-              <a:lnSpc>
-                <a:spcPct val="110000"/>
-              </a:lnSpc>
-              <a:spcBef>
-                <a:spcPts val="0"/>
-              </a:spcBef>
-              <a:spcAft>
-                <a:spcPts val="0"/>
-              </a:spcAft>
-              <a:buClr>
-                <a:srgbClr val="000000"/>
-              </a:buClr>
-              <a:buSzPts val="1100"/>
-              <a:buFont typeface="Arial"/>
-              <a:buNone/>
-            </a:pPr>
-            <a:r>
-              <a:rPr b="1" i="0" lang="en-US" spc="200" sz="1100" u="none" cap="none" strike="noStrike">
-                <a:solidFill>
-                  <a:srgbClr val="11803E"/>
-                </a:solidFill>
-                <a:latin typeface="Plus Jakarta Sans"/>
-                <a:ea typeface="Plus Jakarta Sans"/>
-                <a:cs typeface="Plus Jakarta Sans"/>
-                <a:sym typeface="Plus Jakarta Sans"/>
-              </a:rPr>
-              <a:t>ALARME</a:t>
-            </a:r>
-            <a:endParaRPr b="1" i="0" spc="200" sz="1100" u="none" cap="none" strike="noStrike">
-              <a:solidFill>
-                <a:srgbClr val="11803E"/>
-              </a:solidFill>
-              <a:latin typeface="Plus Jakarta Sans"/>
-              <a:ea typeface="Plus Jakarta Sans"/>
-              <a:cs typeface="Plus Jakarta Sans"/>
-              <a:sym typeface="Plus Jakarta Sans"/>
-            </a:endParaRPr>
-          </a:p>
-          <a:p>
-            <a:pPr indent="0" lvl="0" marL="0" marR="0" rtl="0" algn="l">
-              <a:lnSpc>
-                <a:spcPct val="110000"/>
-              </a:lnSpc>
-              <a:spcBef>
-                <a:spcPts val="0"/>
-              </a:spcBef>
-              <a:spcAft>
-                <a:spcPts val="0"/>
-              </a:spcAft>
-              <a:buClr>
-                <a:srgbClr val="000000"/>
-              </a:buClr>
-              <a:buSzPts val="1100"/>
-              <a:buFont typeface="Arial"/>
-              <a:buNone/>
-            </a:pPr>
-            <a:r>
-              <a:t/>
-            </a:r>
-            <a:endParaRPr b="1" spc="200" sz="1100">
-              <a:solidFill>
-                <a:srgbClr val="11803E"/>
-              </a:solidFill>
-              <a:latin typeface="Plus Jakarta Sans"/>
-              <a:ea typeface="Plus Jakarta Sans"/>
-              <a:cs typeface="Plus Jakarta Sans"/>
-              <a:sym typeface="Plus Jakarta Sans"/>
-            </a:endParaRPr>
-          </a:p>
-          <a:p>
-            <a:pPr indent="0" lvl="0" marL="0" marR="0" rtl="0" algn="l">
-              <a:lnSpc>
-                <a:spcPct val="110000"/>
-              </a:lnSpc>
-              <a:spcBef>
-                <a:spcPts val="400"/>
-              </a:spcBef>
-              <a:spcAft>
-                <a:spcPts val="0"/>
-              </a:spcAft>
-              <a:buClr>
-                <a:srgbClr val="000000"/>
-              </a:buClr>
-              <a:buSzPts val="1800"/>
-              <a:buFont typeface="Arial"/>
-              <a:buNone/>
-            </a:pPr>
-            <a:r>
-              <a:rPr b="1" i="0" lang="en-US" spc="0" sz="1800" u="none" cap="none" strike="noStrike">
-                <a:solidFill>
-                  <a:srgbClr val="191C1E"/>
-                </a:solidFill>
-                <a:latin typeface="Plus Jakarta Sans"/>
-                <a:ea typeface="Plus Jakarta Sans"/>
-                <a:cs typeface="Plus Jakarta Sans"/>
-                <a:sym typeface="Plus Jakarta Sans"/>
-              </a:rPr>
-              <a:t>Aprovado nas 4 combinações</a:t>
-            </a:r>
-            <a:endParaRPr b="0" i="0" spc="0" sz="1400" u="none" cap="none" strike="noStrike">
-              <a:solidFill>
-                <a:srgbClr val="000000"/>
-              </a:solidFill>
-              <a:latin typeface="Arial"/>
-              <a:ea typeface="Arial"/>
-              <a:cs typeface="Arial"/>
-              <a:sym typeface="Arial"/>
-            </a:endParaRPr>
-          </a:p>
-          <a:p>
-            <a:pPr indent="0" lvl="0" marL="0" marR="0" rtl="0" algn="l">
-              <a:lnSpc>
-                <a:spcPct val="110000"/>
-              </a:lnSpc>
-              <a:spcBef>
-                <a:spcPts val="400"/>
-              </a:spcBef>
-              <a:spcAft>
-                <a:spcPts val="0"/>
-              </a:spcAft>
-              <a:buClr>
-                <a:srgbClr val="000000"/>
-              </a:buClr>
-              <a:buSzPts val="1400"/>
-              <a:buFont typeface="Arial"/>
-              <a:buNone/>
-            </a:pPr>
-            <a:r>
-              <a:rPr b="0" i="0" lang="en-US" spc="0" sz="1400" u="none" cap="none" strike="noStrike">
-                <a:solidFill>
-                  <a:srgbClr val="545F73"/>
-                </a:solidFill>
-                <a:latin typeface="Plus Jakarta Sans"/>
-                <a:ea typeface="Plus Jakarta Sans"/>
-                <a:cs typeface="Plus Jakarta Sans"/>
-                <a:sym typeface="Plus Jakarta Sans"/>
-              </a:rPr>
-              <a:t>Bloqueado ou em uso, app nos recentes ou não</a:t>
-            </a:r>
-            <a:endParaRPr b="0" i="0" spc="0" sz="1400" u="none" cap="none" strike="noStrike">
-              <a:solidFill>
-                <a:srgbClr val="000000"/>
-              </a:solidFill>
-              <a:latin typeface="Arial"/>
-              <a:ea typeface="Arial"/>
-              <a:cs typeface="Arial"/>
-              <a:sym typeface="Arial"/>
-            </a:endParaRPr>
-          </a:p>
-        </p:txBody>
-      </p:sp>
-      <p:sp>
-        <p:nvSpPr>
-          <p:cNvPr id="366" name="Google Shape;366;p13"/>
-          <p:cNvSpPr/>
-          <p:nvPr/>
-        </p:nvSpPr>
-        <p:spPr>
-          <a:xfrm>
-            <a:off x="7680960" y="3931920"/>
-            <a:ext cx="3822191" cy="2011680"/>
-          </a:xfrm>
-          <a:prstGeom prst="roundRect">
-            <a:avLst>
-              <a:gd fmla="val 6363" name="adj"/>
-            </a:avLst>
-          </a:prstGeom>
-          <a:solidFill>
-            <a:srgbClr val="FDF3C4"/>
-          </a:solidFill>
-          <a:ln>
-            <a:noFill/>
-          </a:ln>
-        </p:spPr>
-        <p:txBody>
-          <a:bodyPr anchorCtr="0" anchor="ctr" bIns="45700" lIns="91425" spcFirstLastPara="1" rIns="91425" wrap="square" tIns="45700">
-            <a:noAutofit/>
-          </a:bodyPr>
-          <a:lstStyle/>
-          <a:p>
-            <a:pPr indent="0" lvl="0" marL="0" marR="0" rtl="0" algn="l">
-              <a:lnSpc>
-                <a:spcPct val="100000"/>
-              </a:lnSpc>
-              <a:spcBef>
-                <a:spcPts val="0"/>
-              </a:spcBef>
-              <a:spcAft>
-                <a:spcPts val="0"/>
-              </a:spcAft>
-              <a:buClr>
-                <a:srgbClr val="000000"/>
-              </a:buClr>
-              <a:buSzPts val="1800"/>
-              <a:buFont typeface="Arial"/>
-              <a:buNone/>
-            </a:pPr>
-            <a:r>
-              <a:t/>
-            </a:r>
-            <a:endParaRPr b="0" i="0" spc="0" sz="1800" u="none" cap="none" strike="noStrike">
-              <a:solidFill>
-                <a:schemeClr val="dk1"/>
-              </a:solidFill>
-              <a:latin typeface="Calibri"/>
-              <a:ea typeface="Calibri"/>
-              <a:cs typeface="Calibri"/>
-              <a:sym typeface="Calibri"/>
-            </a:endParaRPr>
-          </a:p>
-        </p:txBody>
-      </p:sp>
-      <p:sp>
-        <p:nvSpPr>
-          <p:cNvPr id="367" name="Google Shape;367;p13"/>
-          <p:cNvSpPr txBox="1"/>
-          <p:nvPr/>
-        </p:nvSpPr>
-        <p:spPr>
-          <a:xfrm>
-            <a:off x="8000975" y="4304608"/>
-            <a:ext cx="3291900" cy="1266300"/>
-          </a:xfrm>
-          <a:prstGeom prst="rect">
-            <a:avLst/>
-          </a:prstGeom>
-          <a:noFill/>
-          <a:ln>
-            <a:noFill/>
-          </a:ln>
-        </p:spPr>
-        <p:txBody>
-          <a:bodyPr anchorCtr="0" anchor="ctr" bIns="0" lIns="0" spcFirstLastPara="1" rIns="0" wrap="square" tIns="0">
-            <a:spAutoFit/>
-          </a:bodyPr>
-          <a:lstStyle/>
-          <a:p>
-            <a:pPr indent="0" lvl="0" marL="0" marR="0" rtl="0" algn="l">
-              <a:lnSpc>
-                <a:spcPct val="110000"/>
-              </a:lnSpc>
-              <a:spcBef>
-                <a:spcPts val="0"/>
-              </a:spcBef>
-              <a:spcAft>
-                <a:spcPts val="0"/>
-              </a:spcAft>
-              <a:buClr>
-                <a:srgbClr val="000000"/>
-              </a:buClr>
-              <a:buSzPts val="1100"/>
-              <a:buFont typeface="Arial"/>
-              <a:buNone/>
-            </a:pPr>
-            <a:r>
-              <a:rPr b="1" i="0" lang="en-US" spc="200" sz="1100" u="none" cap="none" strike="noStrike">
-                <a:solidFill>
-                  <a:srgbClr val="5C4A0F"/>
-                </a:solidFill>
-                <a:latin typeface="Plus Jakarta Sans"/>
-                <a:ea typeface="Plus Jakarta Sans"/>
-                <a:cs typeface="Plus Jakarta Sans"/>
-                <a:sym typeface="Plus Jakarta Sans"/>
-              </a:rPr>
-              <a:t>LIMITAÇÃO</a:t>
-            </a:r>
-            <a:endParaRPr b="1" i="0" spc="200" sz="1100" u="none" cap="none" strike="noStrike">
-              <a:solidFill>
-                <a:srgbClr val="5C4A0F"/>
-              </a:solidFill>
-              <a:latin typeface="Plus Jakarta Sans"/>
-              <a:ea typeface="Plus Jakarta Sans"/>
-              <a:cs typeface="Plus Jakarta Sans"/>
-              <a:sym typeface="Plus Jakarta Sans"/>
-            </a:endParaRPr>
-          </a:p>
-          <a:p>
-            <a:pPr indent="0" lvl="0" marL="0" marR="0" rtl="0" algn="l">
-              <a:lnSpc>
-                <a:spcPct val="110000"/>
-              </a:lnSpc>
-              <a:spcBef>
-                <a:spcPts val="0"/>
-              </a:spcBef>
-              <a:spcAft>
-                <a:spcPts val="0"/>
-              </a:spcAft>
-              <a:buClr>
-                <a:srgbClr val="000000"/>
-              </a:buClr>
-              <a:buSzPts val="1100"/>
-              <a:buFont typeface="Arial"/>
-              <a:buNone/>
-            </a:pPr>
-            <a:r>
-              <a:t/>
-            </a:r>
-            <a:endParaRPr b="1" spc="200" sz="1100">
-              <a:solidFill>
-                <a:srgbClr val="5C4A0F"/>
-              </a:solidFill>
-              <a:latin typeface="Plus Jakarta Sans"/>
-              <a:ea typeface="Plus Jakarta Sans"/>
-              <a:cs typeface="Plus Jakarta Sans"/>
-              <a:sym typeface="Plus Jakarta Sans"/>
-            </a:endParaRPr>
-          </a:p>
-          <a:p>
-            <a:pPr indent="0" lvl="0" marL="0" marR="0" rtl="0" algn="l">
-              <a:lnSpc>
-                <a:spcPct val="110000"/>
-              </a:lnSpc>
-              <a:spcBef>
-                <a:spcPts val="400"/>
-              </a:spcBef>
-              <a:spcAft>
-                <a:spcPts val="0"/>
-              </a:spcAft>
-              <a:buClr>
-                <a:srgbClr val="000000"/>
-              </a:buClr>
-              <a:buSzPts val="1700"/>
-              <a:buFont typeface="Arial"/>
-              <a:buNone/>
-            </a:pPr>
-            <a:r>
-              <a:rPr b="1" i="0" lang="en-US" spc="0" sz="1700" u="none" cap="none" strike="noStrike">
-                <a:solidFill>
-                  <a:srgbClr val="191C1E"/>
-                </a:solidFill>
-                <a:latin typeface="Plus Jakarta Sans"/>
-                <a:ea typeface="Plus Jakarta Sans"/>
-                <a:cs typeface="Plus Jakarta Sans"/>
-                <a:sym typeface="Plus Jakarta Sans"/>
-              </a:rPr>
-              <a:t>Após reiniciar, o alarme esperou o desbloqueio</a:t>
-            </a:r>
-            <a:endParaRPr b="0" i="0" spc="0" sz="1400" u="none" cap="none" strike="noStrike">
-              <a:solidFill>
-                <a:srgbClr val="000000"/>
-              </a:solidFill>
-              <a:latin typeface="Arial"/>
-              <a:ea typeface="Arial"/>
-              <a:cs typeface="Arial"/>
-              <a:sym typeface="Arial"/>
-            </a:endParaRPr>
-          </a:p>
-          <a:p>
-            <a:pPr indent="0" lvl="0" marL="0" marR="0" rtl="0" algn="l">
-              <a:lnSpc>
-                <a:spcPct val="110000"/>
-              </a:lnSpc>
-              <a:spcBef>
-                <a:spcPts val="400"/>
-              </a:spcBef>
-              <a:spcAft>
-                <a:spcPts val="0"/>
-              </a:spcAft>
-              <a:buClr>
-                <a:srgbClr val="000000"/>
-              </a:buClr>
-              <a:buSzPts val="1400"/>
-              <a:buFont typeface="Arial"/>
-              <a:buNone/>
-            </a:pPr>
-            <a:r>
-              <a:rPr b="0" i="0" lang="en-US" spc="0" sz="1400" u="none" cap="none" strike="noStrike">
-                <a:solidFill>
-                  <a:srgbClr val="5C4A0F"/>
-                </a:solidFill>
-                <a:latin typeface="Plus Jakarta Sans"/>
-                <a:ea typeface="Plus Jakarta Sans"/>
-                <a:cs typeface="Plus Jakarta Sans"/>
-                <a:sym typeface="Plus Jakarta Sans"/>
-              </a:rPr>
-              <a:t>Restrição de Autostart do fabricante</a:t>
+              <a:t>12</a:t>
             </a:r>
             <a:endParaRPr b="0" i="0" spc="0" sz="1400" u="none" cap="none" strike="noStrike">
               <a:solidFill>
@@ -21718,7 +20520,7 @@
     </p:bg>
     <p:spTree>
       <p:nvGrpSpPr>
-        <p:cNvPr id="372" name="Shape 372"/>
+        <p:cNvPr id="351" name="Shape 351"/>
         <p:cNvGrpSpPr/>
         <p:nvPr/>
       </p:nvGrpSpPr>
@@ -21732,7 +20534,7 @@
       </p:grpSpPr>
       <p:sp>
         <p:nvSpPr>
-          <p:cNvPr id="373" name="Google Shape;373;p14"/>
+          <p:cNvPr id="352" name="Google Shape;352;p13"/>
           <p:cNvSpPr txBox="1"/>
           <p:nvPr/>
         </p:nvSpPr>
@@ -21782,7 +20584,7 @@
                 <a:cs typeface="Plus Jakarta Sans"/>
                 <a:sym typeface="Plus Jakarta Sans"/>
               </a:rPr>
-              <a:t>CONCLUSÃO</a:t>
+              <a:t>RESULTADOS</a:t>
             </a:r>
             <a:endParaRPr b="0" i="0" spc="0" sz="1400" u="none" cap="none" strike="noStrike">
               <a:solidFill>
@@ -21798,7 +20600,7 @@
       </p:sp>
       <p:sp>
         <p:nvSpPr>
-          <p:cNvPr id="374" name="Google Shape;374;p14"/>
+          <p:cNvPr id="353" name="Google Shape;353;p13"/>
           <p:cNvSpPr txBox="1"/>
           <p:nvPr/>
         </p:nvSpPr>
@@ -21848,7 +20650,7 @@
                 <a:cs typeface="Plus Jakarta Sans"/>
                 <a:sym typeface="Plus Jakarta Sans"/>
               </a:rPr>
-              <a:t>Offline e registro clínico fiel são compatíveis</a:t>
+              <a:t>Cinco cenários offline-first aprovados em aparelho físico</a:t>
             </a:r>
             <a:endParaRPr b="0" i="0" spc="0" sz="1400" u="none" cap="none" strike="noStrike">
               <a:solidFill>
@@ -21864,7 +20666,7 @@
       </p:sp>
       <p:sp>
         <p:nvSpPr>
-          <p:cNvPr id="375" name="Google Shape;375;p14"/>
+          <p:cNvPr id="354" name="Google Shape;354;p13"/>
           <p:cNvSpPr txBox="1"/>
           <p:nvPr/>
         </p:nvSpPr>
@@ -21930,7 +20732,7 @@
       </p:sp>
       <p:sp>
         <p:nvSpPr>
-          <p:cNvPr id="376" name="Google Shape;376;p14"/>
+          <p:cNvPr id="355" name="Google Shape;355;p13"/>
           <p:cNvSpPr txBox="1"/>
           <p:nvPr/>
         </p:nvSpPr>
@@ -21980,7 +20782,7 @@
                 <a:cs typeface="Plus Jakarta Sans"/>
                 <a:sym typeface="Plus Jakarta Sans"/>
               </a:rPr>
-              <a:t>14</a:t>
+              <a:t>13</a:t>
             </a:r>
             <a:endParaRPr b="0" i="0" spc="0" sz="1400" u="none" cap="none" strike="noStrike">
               <a:solidFill>
@@ -21996,22 +20798,22 @@
       </p:sp>
       <p:sp>
         <p:nvSpPr>
-          <p:cNvPr id="377" name="Google Shape;377;p14"/>
+          <p:cNvPr id="356" name="Google Shape;356;p13"/>
           <p:cNvSpPr/>
           <p:nvPr/>
         </p:nvSpPr>
         <p:spPr>
           <a:xfrm>
             <a:off x="685800" y="1783080"/>
-            <a:ext cx="10820095" cy="777240"/>
+            <a:ext cx="6675000" cy="4160400"/>
           </a:xfrm>
           <a:prstGeom prst="roundRect">
             <a:avLst>
-              <a:gd fmla="val 16470" name="adj"/>
+              <a:gd fmla="val 3076" name="adj"/>
             </a:avLst>
           </a:prstGeom>
           <a:solidFill>
-            <a:srgbClr val="E3F6EA"/>
+            <a:srgbClr val="FFFFFF"/>
           </a:solidFill>
           <a:ln>
             <a:noFill/>
@@ -22057,14 +20859,14 @@
       </p:sp>
       <p:sp>
         <p:nvSpPr>
-          <p:cNvPr id="378" name="Google Shape;378;p14"/>
+          <p:cNvPr id="357" name="Google Shape;357;p13"/>
           <p:cNvSpPr txBox="1"/>
           <p:nvPr/>
         </p:nvSpPr>
         <p:spPr>
           <a:xfrm>
-            <a:off x="1051560" y="1783080"/>
-            <a:ext cx="10088575" cy="777240"/>
+            <a:off x="1005840" y="1965960"/>
+            <a:ext cx="3931920" cy="548640"/>
           </a:xfrm>
           <a:prstGeom prst="rect">
             <a:avLst/>
@@ -22093,21 +20895,21 @@
               <a:buClr>
                 <a:srgbClr val="000000"/>
               </a:buClr>
-              <a:buSzPts val="1800"/>
-              <a:buFont typeface="Arial"/>
-              <a:buNone/>
-            </a:pPr>
-            <a:r>
-              <a:rPr b="1" i="0" lang="en-US" spc="0" sz="1800" u="none" cap="none" strike="noStrike">
-                <a:solidFill>
-                  <a:srgbClr val="11803E"/>
+              <a:buSzPts val="1600"/>
+              <a:buFont typeface="Arial"/>
+              <a:buNone/>
+            </a:pPr>
+            <a:r>
+              <a:rPr b="0" i="0" lang="en-US" spc="0" sz="1600" u="none" cap="none" strike="noStrike">
+                <a:solidFill>
+                  <a:srgbClr val="191C1E"/>
                 </a:solidFill>
                 <a:latin typeface="Plus Jakarta Sans"/>
                 <a:ea typeface="Plus Jakarta Sans"/>
                 <a:cs typeface="Plus Jakarta Sans"/>
                 <a:sym typeface="Plus Jakarta Sans"/>
               </a:rPr>
-              <a:t>Objetivos atendidos, com a ressalva do alarme após reiniciar o aparelho</a:t>
+              <a:t>Ausência de conexão</a:t>
             </a:r>
             <a:endParaRPr b="0" i="0" spc="0" sz="1400" u="none" cap="none" strike="noStrike">
               <a:solidFill>
@@ -22123,22 +20925,22 @@
       </p:sp>
       <p:sp>
         <p:nvSpPr>
-          <p:cNvPr id="379" name="Google Shape;379;p14"/>
+          <p:cNvPr id="358" name="Google Shape;358;p13"/>
           <p:cNvSpPr/>
           <p:nvPr/>
         </p:nvSpPr>
         <p:spPr>
           <a:xfrm>
-            <a:off x="685800" y="2834640"/>
-            <a:ext cx="3454298" cy="1691640"/>
+            <a:off x="5852160" y="2075688"/>
+            <a:ext cx="1234440" cy="329184"/>
           </a:xfrm>
           <a:prstGeom prst="roundRect">
             <a:avLst>
-              <a:gd fmla="val 7567" name="adj"/>
+              <a:gd fmla="val 50000" name="adj"/>
             </a:avLst>
           </a:prstGeom>
           <a:solidFill>
-            <a:srgbClr val="FFFFFF"/>
+            <a:srgbClr val="E3F6EA"/>
           </a:solidFill>
           <a:ln>
             <a:noFill/>
@@ -22184,14 +20986,14 @@
       </p:sp>
       <p:sp>
         <p:nvSpPr>
-          <p:cNvPr id="380" name="Google Shape;380;p14"/>
+          <p:cNvPr id="359" name="Google Shape;359;p13"/>
           <p:cNvSpPr txBox="1"/>
           <p:nvPr/>
         </p:nvSpPr>
         <p:spPr>
           <a:xfrm>
-            <a:off x="1005840" y="2834640"/>
-            <a:ext cx="2814218" cy="1691640"/>
+            <a:off x="5852160" y="2075688"/>
+            <a:ext cx="1234440" cy="329184"/>
           </a:xfrm>
           <a:prstGeom prst="rect">
             <a:avLst/>
@@ -22207,7 +21009,7 @@
           </a:bodyPr>
           <a:lstStyle/>
           <a:p>
-            <a:pPr indent="0" lvl="0" marL="0" marR="0" rtl="0" algn="l">
+            <a:pPr indent="0" lvl="0" marL="0" marR="0" rtl="0" algn="ctr">
               <a:lnSpc>
                 <a:spcPct val="110000"/>
               </a:lnSpc>
@@ -22220,21 +21022,21 @@
               <a:buClr>
                 <a:srgbClr val="000000"/>
               </a:buClr>
-              <a:buSzPts val="1900"/>
-              <a:buFont typeface="Arial"/>
-              <a:buNone/>
-            </a:pPr>
-            <a:r>
-              <a:rPr b="1" i="0" lang="en-US" spc="0" sz="1900" u="none" cap="none" strike="noStrike">
-                <a:solidFill>
-                  <a:srgbClr val="191C1E"/>
+              <a:buSzPts val="1200"/>
+              <a:buFont typeface="Arial"/>
+              <a:buNone/>
+            </a:pPr>
+            <a:r>
+              <a:rPr b="1" i="0" lang="en-US" spc="0" sz="1200" u="none" cap="none" strike="noStrike">
+                <a:solidFill>
+                  <a:srgbClr val="11803E"/>
                 </a:solidFill>
                 <a:latin typeface="Plus Jakarta Sans"/>
                 <a:ea typeface="Plus Jakarta Sans"/>
                 <a:cs typeface="Plus Jakarta Sans"/>
                 <a:sym typeface="Plus Jakarta Sans"/>
               </a:rPr>
-              <a:t>Estoque pela dose</a:t>
+              <a:t>Aprovado</a:t>
             </a:r>
             <a:endParaRPr b="0" i="0" spc="0" sz="1400" u="none" cap="none" strike="noStrike">
               <a:solidFill>
@@ -22246,35 +21048,61 @@
               <a:sym typeface="Arial"/>
             </a:endParaRPr>
           </a:p>
+        </p:txBody>
+      </p:sp>
+      <p:sp>
+        <p:nvSpPr>
+          <p:cNvPr id="360" name="Google Shape;360;p13"/>
+          <p:cNvSpPr txBox="1"/>
+          <p:nvPr/>
+        </p:nvSpPr>
+        <p:spPr>
+          <a:xfrm>
+            <a:off x="1005840" y="2724912"/>
+            <a:ext cx="3931920" cy="548640"/>
+          </a:xfrm>
+          <a:prstGeom prst="rect">
+            <a:avLst/>
+          </a:prstGeom>
+          <a:noFill/>
+          <a:ln>
+            <a:noFill/>
+          </a:ln>
+        </p:spPr>
+        <p:txBody>
+          <a:bodyPr anchorCtr="0" anchor="ctr" bIns="0" lIns="0" spcFirstLastPara="1" rIns="0" wrap="square" tIns="0">
+            <a:spAutoFit/>
+          </a:bodyPr>
+          <a:lstStyle/>
           <a:p>
             <a:pPr indent="0" lvl="0" marL="0" marR="0" rtl="0" algn="l">
               <a:lnSpc>
                 <a:spcPct val="110000"/>
               </a:lnSpc>
               <a:spcBef>
-                <a:spcPts val="400"/>
-              </a:spcBef>
-              <a:spcAft>
-                <a:spcPts val="0"/>
-              </a:spcAft>
-              <a:buClr>
-                <a:srgbClr val="000000"/>
-              </a:buClr>
-              <a:buSzPts val="1500"/>
-              <a:buFont typeface="Arial"/>
-              <a:buNone/>
-            </a:pPr>
-            <a:r>
-              <a:rPr b="0" i="0" lang="en-US" spc="0" sz="1500" u="none" cap="none" strike="noStrike">
-                <a:solidFill>
-                  <a:srgbClr val="545F73"/>
+                <a:spcPts val="0"/>
+              </a:spcBef>
+              <a:spcAft>
+                <a:spcPts val="0"/>
+              </a:spcAft>
+              <a:buClr>
+                <a:srgbClr val="000000"/>
+              </a:buClr>
+              <a:buSzPts val="1600"/>
+              <a:buFont typeface="Arial"/>
+              <a:buNone/>
+            </a:pPr>
+            <a:r>
+              <a:rPr b="0" i="0" lang="en-US" spc="0" sz="1600" u="none" cap="none" strike="noStrike">
+                <a:solidFill>
+                  <a:srgbClr val="191C1E"/>
                 </a:solidFill>
                 <a:latin typeface="Plus Jakarta Sans"/>
                 <a:ea typeface="Plus Jakarta Sans"/>
                 <a:cs typeface="Plus Jakarta Sans"/>
                 <a:sym typeface="Plus Jakarta Sans"/>
               </a:rPr>
-              <a:t>desconta a quantidade realmente tomada</a:t>
+              <a:t>Restabelecimento da conectividade</a:t>
             </a:r>
             <a:endParaRPr b="0" i="0" spc="0" sz="1400" u="none" cap="none" strike="noStrike">
               <a:solidFill>
@@ -22290,22 +21118,22 @@
       </p:sp>
       <p:sp>
         <p:nvSpPr>
-          <p:cNvPr id="381" name="Google Shape;381;p14"/>
+          <p:cNvPr id="361" name="Google Shape;361;p13"/>
           <p:cNvSpPr/>
           <p:nvPr/>
         </p:nvSpPr>
         <p:spPr>
           <a:xfrm>
-            <a:off x="4368698" y="2834640"/>
-            <a:ext cx="3454298" cy="1691640"/>
+            <a:off x="5852160" y="2834640"/>
+            <a:ext cx="1234440" cy="329184"/>
           </a:xfrm>
           <a:prstGeom prst="roundRect">
             <a:avLst>
-              <a:gd fmla="val 7567" name="adj"/>
+              <a:gd fmla="val 50000" name="adj"/>
             </a:avLst>
           </a:prstGeom>
           <a:solidFill>
-            <a:srgbClr val="FFFFFF"/>
+            <a:srgbClr val="E3F6EA"/>
           </a:solidFill>
           <a:ln>
             <a:noFill/>
@@ -22351,14 +21179,14 @@
       </p:sp>
       <p:sp>
         <p:nvSpPr>
-          <p:cNvPr id="382" name="Google Shape;382;p14"/>
+          <p:cNvPr id="362" name="Google Shape;362;p13"/>
           <p:cNvSpPr txBox="1"/>
           <p:nvPr/>
         </p:nvSpPr>
         <p:spPr>
           <a:xfrm>
-            <a:off x="4688738" y="2834640"/>
-            <a:ext cx="2814218" cy="1691640"/>
+            <a:off x="5852135" y="2906840"/>
+            <a:ext cx="1234500" cy="184800"/>
           </a:xfrm>
           <a:prstGeom prst="rect">
             <a:avLst/>
@@ -22374,7 +21202,7 @@
           </a:bodyPr>
           <a:lstStyle/>
           <a:p>
-            <a:pPr indent="0" lvl="0" marL="0" marR="0" rtl="0" algn="l">
+            <a:pPr indent="0" lvl="0" marL="0" marR="0" rtl="0" algn="ctr">
               <a:lnSpc>
                 <a:spcPct val="110000"/>
               </a:lnSpc>
@@ -22387,21 +21215,21 @@
               <a:buClr>
                 <a:srgbClr val="000000"/>
               </a:buClr>
-              <a:buSzPts val="1900"/>
-              <a:buFont typeface="Arial"/>
-              <a:buNone/>
-            </a:pPr>
-            <a:r>
-              <a:rPr b="1" i="0" lang="en-US" spc="0" sz="1900" u="none" cap="none" strike="noStrike">
-                <a:solidFill>
-                  <a:srgbClr val="191C1E"/>
+              <a:buSzPts val="1200"/>
+              <a:buFont typeface="Arial"/>
+              <a:buNone/>
+            </a:pPr>
+            <a:r>
+              <a:rPr b="1" i="0" lang="en-US" spc="0" sz="1200" u="none" cap="none" strike="noStrike">
+                <a:solidFill>
+                  <a:srgbClr val="11803E"/>
                 </a:solidFill>
                 <a:latin typeface="Plus Jakarta Sans"/>
                 <a:ea typeface="Plus Jakarta Sans"/>
                 <a:cs typeface="Plus Jakarta Sans"/>
                 <a:sym typeface="Plus Jakarta Sans"/>
               </a:rPr>
-              <a:t>Correção que preserva</a:t>
+              <a:t>Aprovado</a:t>
             </a:r>
             <a:endParaRPr b="0" i="0" spc="0" sz="1400" u="none" cap="none" strike="noStrike">
               <a:solidFill>
@@ -22413,35 +21241,61 @@
               <a:sym typeface="Arial"/>
             </a:endParaRPr>
           </a:p>
+        </p:txBody>
+      </p:sp>
+      <p:sp>
+        <p:nvSpPr>
+          <p:cNvPr id="363" name="Google Shape;363;p13"/>
+          <p:cNvSpPr txBox="1"/>
+          <p:nvPr/>
+        </p:nvSpPr>
+        <p:spPr>
+          <a:xfrm>
+            <a:off x="1005840" y="3483863"/>
+            <a:ext cx="3931920" cy="548640"/>
+          </a:xfrm>
+          <a:prstGeom prst="rect">
+            <a:avLst/>
+          </a:prstGeom>
+          <a:noFill/>
+          <a:ln>
+            <a:noFill/>
+          </a:ln>
+        </p:spPr>
+        <p:txBody>
+          <a:bodyPr anchorCtr="0" anchor="ctr" bIns="0" lIns="0" spcFirstLastPara="1" rIns="0" wrap="square" tIns="0">
+            <a:spAutoFit/>
+          </a:bodyPr>
+          <a:lstStyle/>
           <a:p>
             <a:pPr indent="0" lvl="0" marL="0" marR="0" rtl="0" algn="l">
               <a:lnSpc>
                 <a:spcPct val="110000"/>
               </a:lnSpc>
               <a:spcBef>
-                <a:spcPts val="400"/>
-              </a:spcBef>
-              <a:spcAft>
-                <a:spcPts val="0"/>
-              </a:spcAft>
-              <a:buClr>
-                <a:srgbClr val="000000"/>
-              </a:buClr>
-              <a:buSzPts val="1500"/>
-              <a:buFont typeface="Arial"/>
-              <a:buNone/>
-            </a:pPr>
-            <a:r>
-              <a:rPr b="0" i="0" lang="en-US" spc="0" sz="1500" u="none" cap="none" strike="noStrike">
-                <a:solidFill>
-                  <a:srgbClr val="545F73"/>
+                <a:spcPts val="0"/>
+              </a:spcBef>
+              <a:spcAft>
+                <a:spcPts val="0"/>
+              </a:spcAft>
+              <a:buClr>
+                <a:srgbClr val="000000"/>
+              </a:buClr>
+              <a:buSzPts val="1600"/>
+              <a:buFont typeface="Arial"/>
+              <a:buNone/>
+            </a:pPr>
+            <a:r>
+              <a:rPr b="0" i="0" lang="en-US" spc="0" sz="1600" u="none" cap="none" strike="noStrike">
+                <a:solidFill>
+                  <a:srgbClr val="191C1E"/>
                 </a:solidFill>
                 <a:latin typeface="Plus Jakarta Sans"/>
                 <a:ea typeface="Plus Jakarta Sans"/>
                 <a:cs typeface="Plus Jakarta Sans"/>
                 <a:sym typeface="Plus Jakarta Sans"/>
               </a:rPr>
-              <a:t>o registro original continua rastreável</a:t>
+              <a:t>Sincronização por restauração</a:t>
             </a:r>
             <a:endParaRPr b="0" i="0" spc="0" sz="1400" u="none" cap="none" strike="noStrike">
               <a:solidFill>
@@ -22457,18 +21311,216 @@
       </p:sp>
       <p:sp>
         <p:nvSpPr>
-          <p:cNvPr id="383" name="Google Shape;383;p14"/>
+          <p:cNvPr id="364" name="Google Shape;364;p13"/>
+          <p:cNvSpPr txBox="1"/>
+          <p:nvPr/>
+        </p:nvSpPr>
+        <p:spPr>
+          <a:xfrm>
+            <a:off x="1005840" y="4242816"/>
+            <a:ext cx="3931920" cy="548640"/>
+          </a:xfrm>
+          <a:prstGeom prst="rect">
+            <a:avLst/>
+          </a:prstGeom>
+          <a:noFill/>
+          <a:ln>
+            <a:noFill/>
+          </a:ln>
+        </p:spPr>
+        <p:txBody>
+          <a:bodyPr anchorCtr="0" anchor="ctr" bIns="0" lIns="0" spcFirstLastPara="1" rIns="0" wrap="square" tIns="0">
+            <a:spAutoFit/>
+          </a:bodyPr>
+          <a:lstStyle/>
+          <a:p>
+            <a:pPr indent="0" lvl="0" marL="0" marR="0" rtl="0" algn="l">
+              <a:lnSpc>
+                <a:spcPct val="110000"/>
+              </a:lnSpc>
+              <a:spcBef>
+                <a:spcPts val="0"/>
+              </a:spcBef>
+              <a:spcAft>
+                <a:spcPts val="0"/>
+              </a:spcAft>
+              <a:buClr>
+                <a:srgbClr val="000000"/>
+              </a:buClr>
+              <a:buSzPts val="1600"/>
+              <a:buFont typeface="Arial"/>
+              <a:buNone/>
+            </a:pPr>
+            <a:r>
+              <a:rPr b="0" i="0" lang="en-US" spc="0" sz="1600" u="none" cap="none" strike="noStrike">
+                <a:solidFill>
+                  <a:srgbClr val="191C1E"/>
+                </a:solidFill>
+                <a:latin typeface="Plus Jakarta Sans"/>
+                <a:ea typeface="Plus Jakarta Sans"/>
+                <a:cs typeface="Plus Jakarta Sans"/>
+                <a:sym typeface="Plus Jakarta Sans"/>
+              </a:rPr>
+              <a:t>Sincronização entre dispositivos</a:t>
+            </a:r>
+            <a:endParaRPr b="0" i="0" spc="0" sz="1400" u="none" cap="none" strike="noStrike">
+              <a:solidFill>
+                <a:srgbClr val="000000"/>
+              </a:solidFill>
+              <a:latin typeface="Arial"/>
+              <a:ea typeface="Arial"/>
+              <a:cs typeface="Arial"/>
+              <a:sym typeface="Arial"/>
+            </a:endParaRPr>
+          </a:p>
+        </p:txBody>
+      </p:sp>
+      <p:sp>
+        <p:nvSpPr>
+          <p:cNvPr id="365" name="Google Shape;365;p13"/>
+          <p:cNvSpPr txBox="1"/>
+          <p:nvPr/>
+        </p:nvSpPr>
+        <p:spPr>
+          <a:xfrm>
+            <a:off x="1005840" y="5001768"/>
+            <a:ext cx="3931920" cy="548640"/>
+          </a:xfrm>
+          <a:prstGeom prst="rect">
+            <a:avLst/>
+          </a:prstGeom>
+          <a:noFill/>
+          <a:ln>
+            <a:noFill/>
+          </a:ln>
+        </p:spPr>
+        <p:txBody>
+          <a:bodyPr anchorCtr="0" anchor="ctr" bIns="0" lIns="0" spcFirstLastPara="1" rIns="0" wrap="square" tIns="0">
+            <a:spAutoFit/>
+          </a:bodyPr>
+          <a:lstStyle/>
+          <a:p>
+            <a:pPr indent="0" lvl="0" marL="0" marR="0" rtl="0" algn="l">
+              <a:lnSpc>
+                <a:spcPct val="110000"/>
+              </a:lnSpc>
+              <a:spcBef>
+                <a:spcPts val="0"/>
+              </a:spcBef>
+              <a:spcAft>
+                <a:spcPts val="0"/>
+              </a:spcAft>
+              <a:buClr>
+                <a:srgbClr val="000000"/>
+              </a:buClr>
+              <a:buSzPts val="1600"/>
+              <a:buFont typeface="Arial"/>
+              <a:buNone/>
+            </a:pPr>
+            <a:r>
+              <a:rPr b="0" i="0" lang="en-US" spc="0" sz="1600" u="none" cap="none" strike="noStrike">
+                <a:solidFill>
+                  <a:srgbClr val="191C1E"/>
+                </a:solidFill>
+                <a:latin typeface="Plus Jakarta Sans"/>
+                <a:ea typeface="Plus Jakarta Sans"/>
+                <a:cs typeface="Plus Jakarta Sans"/>
+                <a:sym typeface="Plus Jakarta Sans"/>
+              </a:rPr>
+              <a:t>Conflito entre registros</a:t>
+            </a:r>
+            <a:endParaRPr b="0" i="0" spc="0" sz="1400" u="none" cap="none" strike="noStrike">
+              <a:solidFill>
+                <a:srgbClr val="000000"/>
+              </a:solidFill>
+              <a:latin typeface="Arial"/>
+              <a:ea typeface="Arial"/>
+              <a:cs typeface="Arial"/>
+              <a:sym typeface="Arial"/>
+            </a:endParaRPr>
+          </a:p>
+        </p:txBody>
+      </p:sp>
+      <p:sp>
+        <p:nvSpPr>
+          <p:cNvPr id="366" name="Google Shape;366;p13"/>
+          <p:cNvSpPr txBox="1"/>
+          <p:nvPr/>
+        </p:nvSpPr>
+        <p:spPr>
+          <a:xfrm>
+            <a:off x="685800" y="6053328"/>
+            <a:ext cx="7315200" cy="274320"/>
+          </a:xfrm>
+          <a:prstGeom prst="rect">
+            <a:avLst/>
+          </a:prstGeom>
+          <a:noFill/>
+          <a:ln>
+            <a:noFill/>
+          </a:ln>
+        </p:spPr>
+        <p:txBody>
+          <a:bodyPr anchorCtr="0" anchor="t" bIns="0" lIns="0" spcFirstLastPara="1" rIns="0" wrap="square" tIns="0">
+            <a:spAutoFit/>
+          </a:bodyPr>
+          <a:lstStyle/>
+          <a:p>
+            <a:pPr indent="0" lvl="0" marL="0" marR="0" rtl="0" algn="l">
+              <a:lnSpc>
+                <a:spcPct val="110000"/>
+              </a:lnSpc>
+              <a:spcBef>
+                <a:spcPts val="0"/>
+              </a:spcBef>
+              <a:spcAft>
+                <a:spcPts val="0"/>
+              </a:spcAft>
+              <a:buClr>
+                <a:srgbClr val="000000"/>
+              </a:buClr>
+              <a:buSzPts val="1000"/>
+              <a:buFont typeface="Arial"/>
+              <a:buNone/>
+            </a:pPr>
+            <a:r>
+              <a:rPr b="0" i="0" lang="en-US" spc="0" sz="1000" u="none" cap="none" strike="noStrike">
+                <a:solidFill>
+                  <a:srgbClr val="545F73"/>
+                </a:solidFill>
+                <a:latin typeface="Plus Jakarta Sans"/>
+                <a:ea typeface="Plus Jakarta Sans"/>
+                <a:cs typeface="Plus Jakarta Sans"/>
+                <a:sym typeface="Plus Jakarta Sans"/>
+              </a:rPr>
+              <a:t>Fonte: Quadro 28 do TCC. Xiaomi Redmi Note 14 Pro 5G, Android 16.</a:t>
+            </a:r>
+            <a:endParaRPr b="0" i="0" spc="0" sz="1400" u="none" cap="none" strike="noStrike">
+              <a:solidFill>
+                <a:srgbClr val="000000"/>
+              </a:solidFill>
+              <a:latin typeface="Arial"/>
+              <a:ea typeface="Arial"/>
+              <a:cs typeface="Arial"/>
+              <a:sym typeface="Arial"/>
+            </a:endParaRPr>
+          </a:p>
+        </p:txBody>
+      </p:sp>
+      <p:sp>
+        <p:nvSpPr>
+          <p:cNvPr id="367" name="Google Shape;367;p13"/>
           <p:cNvSpPr/>
           <p:nvPr/>
         </p:nvSpPr>
         <p:spPr>
           <a:xfrm>
-            <a:off x="8051596" y="2834640"/>
-            <a:ext cx="3454200" cy="1691700"/>
+            <a:off x="7680960" y="1783080"/>
+            <a:ext cx="3822191" cy="1920240"/>
           </a:xfrm>
           <a:prstGeom prst="roundRect">
             <a:avLst>
-              <a:gd fmla="val 7567" name="adj"/>
+              <a:gd fmla="val 6666" name="adj"/>
             </a:avLst>
           </a:prstGeom>
           <a:solidFill>
@@ -22518,14 +21570,14 @@
       </p:sp>
       <p:sp>
         <p:nvSpPr>
-          <p:cNvPr id="384" name="Google Shape;384;p14"/>
+          <p:cNvPr id="368" name="Google Shape;368;p13"/>
           <p:cNvSpPr txBox="1"/>
           <p:nvPr/>
         </p:nvSpPr>
         <p:spPr>
           <a:xfrm>
-            <a:off x="8371625" y="3249458"/>
-            <a:ext cx="2814300" cy="858000"/>
+            <a:off x="7946100" y="2163580"/>
+            <a:ext cx="3291900" cy="1262100"/>
           </a:xfrm>
           <a:prstGeom prst="rect">
             <a:avLst/>
@@ -22554,24 +21606,83 @@
               <a:buClr>
                 <a:srgbClr val="000000"/>
               </a:buClr>
-              <a:buSzPts val="1900"/>
-              <a:buFont typeface="Arial"/>
-              <a:buNone/>
-            </a:pPr>
-            <a:r>
-              <a:rPr b="1" i="0" lang="en-US" spc="0" sz="1900" u="none" cap="none" strike="noStrike">
-                <a:solidFill>
-                  <a:srgbClr val="191C1E"/>
+              <a:buSzPts val="1100"/>
+              <a:buFont typeface="Arial"/>
+              <a:buNone/>
+            </a:pPr>
+            <a:r>
+              <a:rPr b="1" i="0" lang="en-US" spc="200" sz="1100" u="none" cap="none" strike="noStrike">
+                <a:solidFill>
+                  <a:srgbClr val="11803E"/>
                 </a:solidFill>
                 <a:latin typeface="Plus Jakarta Sans"/>
                 <a:ea typeface="Plus Jakarta Sans"/>
                 <a:cs typeface="Plus Jakarta Sans"/>
                 <a:sym typeface="Plus Jakarta Sans"/>
               </a:rPr>
-              <a:t>Pulada </a:t>
-            </a:r>
-            <a:r>
-              <a:rPr b="1" lang="en-US" sz="1900">
+              <a:t>ALARME</a:t>
+            </a:r>
+            <a:endParaRPr b="1" i="0" spc="200" sz="1100" u="none" cap="none" strike="noStrike">
+              <a:solidFill>
+                <a:srgbClr val="11803E"/>
+              </a:solidFill>
+              <a:latin typeface="Plus Jakarta Sans"/>
+              <a:ea typeface="Plus Jakarta Sans"/>
+              <a:cs typeface="Plus Jakarta Sans"/>
+              <a:sym typeface="Plus Jakarta Sans"/>
+            </a:endParaRPr>
+          </a:p>
+          <a:p>
+            <a:pPr indent="0" lvl="0" marL="0" marR="0" rtl="0" algn="l">
+              <a:lnSpc>
+                <a:spcPct val="110000"/>
+              </a:lnSpc>
+              <a:spcBef>
+                <a:spcPts val="0"/>
+              </a:spcBef>
+              <a:spcAft>
+                <a:spcPts val="0"/>
+              </a:spcAft>
+              <a:buClr>
+                <a:srgbClr val="000000"/>
+              </a:buClr>
+              <a:buSzPts val="1100"/>
+              <a:buFont typeface="Arial"/>
+              <a:buNone/>
+            </a:pPr>
+            <a:r>
+              <a:t/>
+            </a:r>
+            <a:endParaRPr b="1" spc="200" sz="1100">
+              <a:solidFill>
+                <a:srgbClr val="11803E"/>
+              </a:solidFill>
+              <a:latin typeface="Plus Jakarta Sans"/>
+              <a:ea typeface="Plus Jakarta Sans"/>
+              <a:cs typeface="Plus Jakarta Sans"/>
+              <a:sym typeface="Plus Jakarta Sans"/>
+            </a:endParaRPr>
+          </a:p>
+          <a:p>
+            <a:pPr indent="0" lvl="0" marL="0" marR="0" rtl="0" algn="l">
+              <a:lnSpc>
+                <a:spcPct val="110000"/>
+              </a:lnSpc>
+              <a:spcBef>
+                <a:spcPts val="400"/>
+              </a:spcBef>
+              <a:spcAft>
+                <a:spcPts val="0"/>
+              </a:spcAft>
+              <a:buClr>
+                <a:srgbClr val="000000"/>
+              </a:buClr>
+              <a:buSzPts val="1800"/>
+              <a:buFont typeface="Arial"/>
+              <a:buNone/>
+            </a:pPr>
+            <a:r>
+              <a:rPr b="1" i="0" lang="en-US" spc="0" sz="1800" u="none" cap="none" strike="noStrike">
                 <a:solidFill>
                   <a:srgbClr val="191C1E"/>
                 </a:solidFill>
@@ -22580,31 +21691,7 @@
                 <a:cs typeface="Plus Jakarta Sans"/>
                 <a:sym typeface="Plus Jakarta Sans"/>
               </a:rPr>
-              <a:t>/</a:t>
-            </a:r>
-            <a:r>
-              <a:rPr b="1" i="0" lang="en-US" spc="0" sz="1900" u="none" cap="none" strike="noStrike">
-                <a:solidFill>
-                  <a:srgbClr val="191C1E"/>
-                </a:solidFill>
-                <a:latin typeface="Plus Jakarta Sans"/>
-                <a:ea typeface="Plus Jakarta Sans"/>
-                <a:cs typeface="Plus Jakarta Sans"/>
-                <a:sym typeface="Plus Jakarta Sans"/>
-              </a:rPr>
-              <a:t> </a:t>
-            </a:r>
-            <a:r>
-              <a:rPr b="1" i="0" lang="en-US" spc="0" sz="1900" u="none" cap="none" strike="noStrike">
-                <a:solidFill>
-                  <a:srgbClr val="191C1E"/>
-                </a:solidFill>
-                <a:latin typeface="Plus Jakarta Sans"/>
-                <a:ea typeface="Plus Jakarta Sans"/>
-                <a:cs typeface="Plus Jakarta Sans"/>
-                <a:sym typeface="Plus Jakarta Sans"/>
-              </a:rPr>
-              <a:t>sem resposta</a:t>
+              <a:t>Aprovado nas 4 combinações</a:t>
             </a:r>
             <a:endParaRPr b="0" i="0" spc="0" sz="1400" u="none" cap="none" strike="noStrike">
               <a:solidFill>
@@ -22619,7 +21706,7 @@
           <a:p>
             <a:pPr indent="0" lvl="0" marL="0" marR="0" rtl="0" algn="l">
               <a:lnSpc>
-                <a:spcPct val="110000"/>
+                <a:spcPct val="100000"/>
               </a:lnSpc>
               <a:spcBef>
                 <a:spcPts val="400"/>
@@ -22630,12 +21717,12 @@
               <a:buClr>
                 <a:srgbClr val="000000"/>
               </a:buClr>
-              <a:buSzPts val="1500"/>
-              <a:buFont typeface="Arial"/>
-              <a:buNone/>
-            </a:pPr>
-            <a:r>
-              <a:rPr b="0" i="0" lang="en-US" spc="0" sz="1500" u="none" cap="none" strike="noStrike">
+              <a:buSzPts val="1400"/>
+              <a:buFont typeface="Arial"/>
+              <a:buNone/>
+            </a:pPr>
+            <a:r>
+              <a:rPr b="0" i="0" lang="en-US" spc="0" sz="1400" u="none" cap="none" strike="noStrike">
                 <a:solidFill>
                   <a:srgbClr val="545F73"/>
                 </a:solidFill>
@@ -22644,7 +21731,59 @@
                 <a:cs typeface="Plus Jakarta Sans"/>
                 <a:sym typeface="Plus Jakarta Sans"/>
               </a:rPr>
-              <a:t>histórico fiel para o profissional de saúde</a:t>
+              <a:t>Bloqueado ou em uso</a:t>
+            </a:r>
+            <a:r>
+              <a:rPr lang="en-US">
+                <a:solidFill>
+                  <a:srgbClr val="545F73"/>
+                </a:solidFill>
+                <a:latin typeface="Plus Jakarta Sans"/>
+                <a:ea typeface="Plus Jakarta Sans"/>
+                <a:cs typeface="Plus Jakarta Sans"/>
+                <a:sym typeface="Plus Jakarta Sans"/>
+              </a:rPr>
+              <a:t> / </a:t>
+            </a:r>
+            <a:endParaRPr>
+              <a:solidFill>
+                <a:srgbClr val="545F73"/>
+              </a:solidFill>
+              <a:latin typeface="Plus Jakarta Sans"/>
+              <a:ea typeface="Plus Jakarta Sans"/>
+              <a:cs typeface="Plus Jakarta Sans"/>
+              <a:sym typeface="Plus Jakarta Sans"/>
+            </a:endParaRPr>
+          </a:p>
+          <a:p>
+            <a:pPr indent="0" lvl="0" marL="0" marR="0" rtl="0" algn="l">
+              <a:lnSpc>
+                <a:spcPct val="100000"/>
+              </a:lnSpc>
+              <a:spcBef>
+                <a:spcPts val="400"/>
+              </a:spcBef>
+              <a:spcAft>
+                <a:spcPts val="0"/>
+              </a:spcAft>
+              <a:buClr>
+                <a:srgbClr val="000000"/>
+              </a:buClr>
+              <a:buSzPts val="1400"/>
+              <a:buFont typeface="Arial"/>
+              <a:buNone/>
+            </a:pPr>
+            <a:r>
+              <a:rPr b="0" i="0" lang="en-US" spc="0" sz="1400" u="none" cap="none" strike="noStrike">
+                <a:solidFill>
+                  <a:srgbClr val="545F73"/>
+                </a:solidFill>
+                <a:latin typeface="Plus Jakarta Sans"/>
+                <a:ea typeface="Plus Jakarta Sans"/>
+                <a:cs typeface="Plus Jakarta Sans"/>
+                <a:sym typeface="Plus Jakarta Sans"/>
+              </a:rPr>
+              <a:t>app nos recentes ou não</a:t>
             </a:r>
             <a:endParaRPr b="0" i="0" spc="0" sz="1400" u="none" cap="none" strike="noStrike">
               <a:solidFill>
@@ -22660,14 +21799,81 @@
       </p:sp>
       <p:sp>
         <p:nvSpPr>
-          <p:cNvPr id="385" name="Google Shape;385;p14"/>
+          <p:cNvPr id="369" name="Google Shape;369;p13"/>
+          <p:cNvSpPr/>
+          <p:nvPr/>
+        </p:nvSpPr>
+        <p:spPr>
+          <a:xfrm>
+            <a:off x="7680960" y="3931920"/>
+            <a:ext cx="3822191" cy="2011680"/>
+          </a:xfrm>
+          <a:prstGeom prst="roundRect">
+            <a:avLst>
+              <a:gd fmla="val 6363" name="adj"/>
+            </a:avLst>
+          </a:prstGeom>
+          <a:solidFill>
+            <a:srgbClr val="FDF3C4"/>
+          </a:solidFill>
+          <a:ln cap="flat" cmpd="sng" w="38100">
+            <a:solidFill>
+              <a:srgbClr val="FFF2CC"/>
+            </a:solidFill>
+            <a:prstDash val="solid"/>
+            <a:round/>
+            <a:headEnd len="sm" w="sm" type="none"/>
+            <a:tailEnd len="sm" w="sm" type="none"/>
+          </a:ln>
+        </p:spPr>
+        <p:txBody>
+          <a:bodyPr anchorCtr="0" anchor="ctr" bIns="45700" lIns="91425" spcFirstLastPara="1" rIns="91425" wrap="square" tIns="45700">
+            <a:noAutofit/>
+          </a:bodyPr>
+          <a:lstStyle/>
+          <a:p>
+            <a:pPr indent="0" lvl="0" marL="0" marR="0" rtl="0" algn="l">
+              <a:lnSpc>
+                <a:spcPct val="100000"/>
+              </a:lnSpc>
+              <a:spcBef>
+                <a:spcPts val="0"/>
+              </a:spcBef>
+              <a:spcAft>
+                <a:spcPts val="0"/>
+              </a:spcAft>
+              <a:buClr>
+                <a:srgbClr val="000000"/>
+              </a:buClr>
+              <a:buSzPts val="1800"/>
+              <a:buFont typeface="Arial"/>
+              <a:buNone/>
+            </a:pPr>
+            <a:r>
+              <a:t/>
+            </a:r>
+            <a:endParaRPr b="0" i="0" spc="0" sz="1800" u="none" cap="none" strike="noStrike">
+              <a:solidFill>
+                <a:schemeClr val="dk1"/>
+              </a:solidFill>
+              <a:latin typeface="Calibri"/>
+              <a:ea typeface="Calibri"/>
+              <a:cs typeface="Calibri"/>
+              <a:sym typeface="Calibri"/>
+            </a:endParaRPr>
+          </a:p>
+        </p:txBody>
+      </p:sp>
+      <p:sp>
+        <p:nvSpPr>
+          <p:cNvPr id="370" name="Google Shape;370;p13"/>
           <p:cNvSpPr txBox="1"/>
           <p:nvPr/>
         </p:nvSpPr>
         <p:spPr>
           <a:xfrm>
-            <a:off x="685800" y="4892040"/>
-            <a:ext cx="10820095" cy="914400"/>
+            <a:off x="8000975" y="4304608"/>
+            <a:ext cx="3291900" cy="1266300"/>
           </a:xfrm>
           <a:prstGeom prst="rect">
             <a:avLst/>
@@ -22678,7 +21884,7 @@
           </a:ln>
         </p:spPr>
         <p:txBody>
-          <a:bodyPr anchorCtr="0" anchor="t" bIns="0" lIns="0" spcFirstLastPara="1" rIns="0" wrap="square" tIns="0">
+          <a:bodyPr anchorCtr="0" anchor="ctr" bIns="0" lIns="0" spcFirstLastPara="1" rIns="0" wrap="square" tIns="0">
             <a:spAutoFit/>
           </a:bodyPr>
           <a:lstStyle/>
@@ -22703,14 +21909,85 @@
             <a:r>
               <a:rPr b="1" i="0" lang="en-US" spc="200" sz="1100" u="none" cap="none" strike="noStrike">
                 <a:solidFill>
-                  <a:srgbClr val="545F73"/>
+                  <a:srgbClr val="5C4A0F"/>
                 </a:solidFill>
                 <a:latin typeface="Plus Jakarta Sans"/>
                 <a:ea typeface="Plus Jakarta Sans"/>
                 <a:cs typeface="Plus Jakarta Sans"/>
                 <a:sym typeface="Plus Jakarta Sans"/>
               </a:rPr>
-              <a:t>LIMITAÇÕES</a:t>
+              <a:t>LIMITAÇÃO</a:t>
+            </a:r>
+            <a:endParaRPr b="1" i="0" spc="200" sz="1100" u="none" cap="none" strike="noStrike">
+              <a:solidFill>
+                <a:srgbClr val="5C4A0F"/>
+              </a:solidFill>
+              <a:latin typeface="Plus Jakarta Sans"/>
+              <a:ea typeface="Plus Jakarta Sans"/>
+              <a:cs typeface="Plus Jakarta Sans"/>
+              <a:sym typeface="Plus Jakarta Sans"/>
+            </a:endParaRPr>
+          </a:p>
+          <a:p>
+            <a:pPr indent="0" lvl="0" marL="0" marR="0" rtl="0" algn="l">
+              <a:lnSpc>
+                <a:spcPct val="110000"/>
+              </a:lnSpc>
+              <a:spcBef>
+                <a:spcPts val="0"/>
+              </a:spcBef>
+              <a:spcAft>
+                <a:spcPts val="0"/>
+              </a:spcAft>
+              <a:buClr>
+                <a:srgbClr val="000000"/>
+              </a:buClr>
+              <a:buSzPts val="1100"/>
+              <a:buFont typeface="Arial"/>
+              <a:buNone/>
+            </a:pPr>
+            <a:r>
+              <a:t/>
+            </a:r>
+            <a:endParaRPr b="1" spc="200" sz="1100">
+              <a:solidFill>
+                <a:srgbClr val="5C4A0F"/>
+              </a:solidFill>
+              <a:latin typeface="Plus Jakarta Sans"/>
+              <a:ea typeface="Plus Jakarta Sans"/>
+              <a:cs typeface="Plus Jakarta Sans"/>
+              <a:sym typeface="Plus Jakarta Sans"/>
+            </a:endParaRPr>
+          </a:p>
+          <a:p>
+            <a:pPr indent="0" lvl="0" marL="0" marR="0" rtl="0" algn="l">
+              <a:lnSpc>
+                <a:spcPct val="110000"/>
+              </a:lnSpc>
+              <a:spcBef>
+                <a:spcPts val="400"/>
+              </a:spcBef>
+              <a:spcAft>
+                <a:spcPts val="0"/>
+              </a:spcAft>
+              <a:buClr>
+                <a:srgbClr val="000000"/>
+              </a:buClr>
+              <a:buSzPts val="1700"/>
+              <a:buFont typeface="Arial"/>
+              <a:buNone/>
+            </a:pPr>
+            <a:r>
+              <a:rPr b="1" i="0" lang="en-US" spc="0" sz="1700" u="none" cap="none" strike="noStrike">
+                <a:solidFill>
+                  <a:srgbClr val="191C1E"/>
+                </a:solidFill>
+                <a:latin typeface="Plus Jakarta Sans"/>
+                <a:ea typeface="Plus Jakarta Sans"/>
+                <a:cs typeface="Plus Jakarta Sans"/>
+                <a:sym typeface="Plus Jakarta Sans"/>
+              </a:rPr>
+              <a:t>Após reiniciar, o alarme esperou o desbloqueio</a:t>
             </a:r>
             <a:endParaRPr b="0" i="0" spc="0" sz="1400" u="none" cap="none" strike="noStrike">
               <a:solidFill>
@@ -22736,21 +22013,426 @@
               <a:buClr>
                 <a:srgbClr val="000000"/>
               </a:buClr>
-              <a:buSzPts val="1600"/>
-              <a:buFont typeface="Arial"/>
-              <a:buNone/>
-            </a:pPr>
-            <a:r>
-              <a:rPr b="0" i="0" lang="en-US" spc="0" sz="1600" u="none" cap="none" strike="noStrike">
-                <a:solidFill>
-                  <a:srgbClr val="191C1E"/>
+              <a:buSzPts val="1400"/>
+              <a:buFont typeface="Arial"/>
+              <a:buNone/>
+            </a:pPr>
+            <a:r>
+              <a:rPr b="0" i="0" lang="en-US" spc="0" sz="1400" u="none" cap="none" strike="noStrike">
+                <a:solidFill>
+                  <a:srgbClr val="5C4A0F"/>
                 </a:solidFill>
                 <a:latin typeface="Plus Jakarta Sans"/>
                 <a:ea typeface="Plus Jakarta Sans"/>
                 <a:cs typeface="Plus Jakarta Sans"/>
                 <a:sym typeface="Plus Jakarta Sans"/>
               </a:rPr>
-              <a:t>Um modelo de aparelho  ·  sem teste com usuários  ·  só Android  ·  anexos ficam no aparelho</a:t>
+              <a:t>Restrição de </a:t>
+            </a:r>
+            <a:r>
+              <a:rPr b="0" i="1" lang="en-US" spc="0" sz="1400" cap="none" strike="noStrike">
+                <a:solidFill>
+                  <a:srgbClr val="5C4A0F"/>
+                </a:solidFill>
+                <a:latin typeface="Plus Jakarta Sans"/>
+                <a:ea typeface="Plus Jakarta Sans"/>
+                <a:cs typeface="Plus Jakarta Sans"/>
+                <a:sym typeface="Plus Jakarta Sans"/>
+              </a:rPr>
+              <a:t>Autostart</a:t>
+            </a:r>
+            <a:r>
+              <a:rPr b="0" i="0" lang="en-US" spc="0" sz="1400" u="none" cap="none" strike="noStrike">
+                <a:solidFill>
+                  <a:srgbClr val="5C4A0F"/>
+                </a:solidFill>
+                <a:latin typeface="Plus Jakarta Sans"/>
+                <a:ea typeface="Plus Jakarta Sans"/>
+                <a:cs typeface="Plus Jakarta Sans"/>
+                <a:sym typeface="Plus Jakarta Sans"/>
+              </a:rPr>
+              <a:t> do fabricante</a:t>
+            </a:r>
+            <a:endParaRPr b="0" i="0" spc="0" sz="1400" u="none" cap="none" strike="noStrike">
+              <a:solidFill>
+                <a:srgbClr val="000000"/>
+              </a:solidFill>
+              <a:latin typeface="Arial"/>
+              <a:ea typeface="Arial"/>
+              <a:cs typeface="Arial"/>
+              <a:sym typeface="Arial"/>
+            </a:endParaRPr>
+          </a:p>
+        </p:txBody>
+      </p:sp>
+      <p:sp>
+        <p:nvSpPr>
+          <p:cNvPr id="371" name="Google Shape;371;p13"/>
+          <p:cNvSpPr/>
+          <p:nvPr/>
+        </p:nvSpPr>
+        <p:spPr>
+          <a:xfrm>
+            <a:off x="5852110" y="4333790"/>
+            <a:ext cx="1234500" cy="329100"/>
+          </a:xfrm>
+          <a:prstGeom prst="roundRect">
+            <a:avLst>
+              <a:gd fmla="val 50000" name="adj"/>
+            </a:avLst>
+          </a:prstGeom>
+          <a:solidFill>
+            <a:srgbClr val="E3F6EA"/>
+          </a:solidFill>
+          <a:ln>
+            <a:noFill/>
+          </a:ln>
+        </p:spPr>
+        <p:txBody>
+          <a:bodyPr anchorCtr="0" anchor="ctr" bIns="45700" lIns="91425" spcFirstLastPara="1" rIns="91425" wrap="square" tIns="45700">
+            <a:noAutofit/>
+          </a:bodyPr>
+          <a:lstStyle/>
+          <a:p>
+            <a:pPr indent="0" lvl="0" marL="0" marR="0" rtl="0" algn="l">
+              <a:lnSpc>
+                <a:spcPct val="100000"/>
+              </a:lnSpc>
+              <a:spcBef>
+                <a:spcPts val="0"/>
+              </a:spcBef>
+              <a:spcAft>
+                <a:spcPts val="0"/>
+              </a:spcAft>
+              <a:buClr>
+                <a:srgbClr val="000000"/>
+              </a:buClr>
+              <a:buSzPts val="1800"/>
+              <a:buFont typeface="Arial"/>
+              <a:buNone/>
+            </a:pPr>
+            <a:r>
+              <a:t/>
+            </a:r>
+            <a:endParaRPr b="0" i="0" spc="0" sz="1800" u="none" cap="none" strike="noStrike">
+              <a:solidFill>
+                <a:schemeClr val="dk1"/>
+              </a:solidFill>
+              <a:latin typeface="Calibri"/>
+              <a:ea typeface="Calibri"/>
+              <a:cs typeface="Calibri"/>
+              <a:sym typeface="Calibri"/>
+            </a:endParaRPr>
+          </a:p>
+        </p:txBody>
+      </p:sp>
+      <p:sp>
+        <p:nvSpPr>
+          <p:cNvPr id="372" name="Google Shape;372;p13"/>
+          <p:cNvSpPr/>
+          <p:nvPr/>
+        </p:nvSpPr>
+        <p:spPr>
+          <a:xfrm>
+            <a:off x="5852110" y="5119415"/>
+            <a:ext cx="1234500" cy="329100"/>
+          </a:xfrm>
+          <a:prstGeom prst="roundRect">
+            <a:avLst>
+              <a:gd fmla="val 50000" name="adj"/>
+            </a:avLst>
+          </a:prstGeom>
+          <a:solidFill>
+            <a:srgbClr val="E3F6EA"/>
+          </a:solidFill>
+          <a:ln>
+            <a:noFill/>
+          </a:ln>
+        </p:spPr>
+        <p:txBody>
+          <a:bodyPr anchorCtr="0" anchor="ctr" bIns="45700" lIns="91425" spcFirstLastPara="1" rIns="91425" wrap="square" tIns="45700">
+            <a:noAutofit/>
+          </a:bodyPr>
+          <a:lstStyle/>
+          <a:p>
+            <a:pPr indent="0" lvl="0" marL="0" marR="0" rtl="0" algn="l">
+              <a:lnSpc>
+                <a:spcPct val="100000"/>
+              </a:lnSpc>
+              <a:spcBef>
+                <a:spcPts val="0"/>
+              </a:spcBef>
+              <a:spcAft>
+                <a:spcPts val="0"/>
+              </a:spcAft>
+              <a:buClr>
+                <a:srgbClr val="000000"/>
+              </a:buClr>
+              <a:buSzPts val="1800"/>
+              <a:buFont typeface="Arial"/>
+              <a:buNone/>
+            </a:pPr>
+            <a:r>
+              <a:t/>
+            </a:r>
+            <a:endParaRPr b="0" i="0" spc="0" sz="1800" u="none" cap="none" strike="noStrike">
+              <a:solidFill>
+                <a:schemeClr val="dk1"/>
+              </a:solidFill>
+              <a:latin typeface="Calibri"/>
+              <a:ea typeface="Calibri"/>
+              <a:cs typeface="Calibri"/>
+              <a:sym typeface="Calibri"/>
+            </a:endParaRPr>
+          </a:p>
+        </p:txBody>
+      </p:sp>
+      <p:sp>
+        <p:nvSpPr>
+          <p:cNvPr id="373" name="Google Shape;373;p13"/>
+          <p:cNvSpPr txBox="1"/>
+          <p:nvPr/>
+        </p:nvSpPr>
+        <p:spPr>
+          <a:xfrm>
+            <a:off x="5852110" y="4405953"/>
+            <a:ext cx="1234500" cy="184800"/>
+          </a:xfrm>
+          <a:prstGeom prst="rect">
+            <a:avLst/>
+          </a:prstGeom>
+          <a:noFill/>
+          <a:ln>
+            <a:noFill/>
+          </a:ln>
+        </p:spPr>
+        <p:txBody>
+          <a:bodyPr anchorCtr="0" anchor="ctr" bIns="0" lIns="0" spcFirstLastPara="1" rIns="0" wrap="square" tIns="0">
+            <a:spAutoFit/>
+          </a:bodyPr>
+          <a:lstStyle/>
+          <a:p>
+            <a:pPr indent="0" lvl="0" marL="0" marR="0" rtl="0" algn="ctr">
+              <a:lnSpc>
+                <a:spcPct val="110000"/>
+              </a:lnSpc>
+              <a:spcBef>
+                <a:spcPts val="0"/>
+              </a:spcBef>
+              <a:spcAft>
+                <a:spcPts val="0"/>
+              </a:spcAft>
+              <a:buClr>
+                <a:srgbClr val="000000"/>
+              </a:buClr>
+              <a:buSzPts val="1200"/>
+              <a:buFont typeface="Arial"/>
+              <a:buNone/>
+            </a:pPr>
+            <a:r>
+              <a:rPr b="1" i="0" lang="en-US" spc="0" sz="1200" u="none" cap="none" strike="noStrike">
+                <a:solidFill>
+                  <a:srgbClr val="11803E"/>
+                </a:solidFill>
+                <a:latin typeface="Plus Jakarta Sans"/>
+                <a:ea typeface="Plus Jakarta Sans"/>
+                <a:cs typeface="Plus Jakarta Sans"/>
+                <a:sym typeface="Plus Jakarta Sans"/>
+              </a:rPr>
+              <a:t>Aprovado</a:t>
+            </a:r>
+            <a:endParaRPr b="0" i="0" spc="0" sz="1400" u="none" cap="none" strike="noStrike">
+              <a:solidFill>
+                <a:srgbClr val="000000"/>
+              </a:solidFill>
+              <a:latin typeface="Arial"/>
+              <a:ea typeface="Arial"/>
+              <a:cs typeface="Arial"/>
+              <a:sym typeface="Arial"/>
+            </a:endParaRPr>
+          </a:p>
+        </p:txBody>
+      </p:sp>
+      <p:sp>
+        <p:nvSpPr>
+          <p:cNvPr id="374" name="Google Shape;374;p13"/>
+          <p:cNvSpPr/>
+          <p:nvPr/>
+        </p:nvSpPr>
+        <p:spPr>
+          <a:xfrm>
+            <a:off x="5852135" y="3584253"/>
+            <a:ext cx="1234500" cy="329100"/>
+          </a:xfrm>
+          <a:prstGeom prst="roundRect">
+            <a:avLst>
+              <a:gd fmla="val 50000" name="adj"/>
+            </a:avLst>
+          </a:prstGeom>
+          <a:solidFill>
+            <a:srgbClr val="E3F6EA"/>
+          </a:solidFill>
+          <a:ln>
+            <a:noFill/>
+          </a:ln>
+        </p:spPr>
+        <p:txBody>
+          <a:bodyPr anchorCtr="0" anchor="ctr" bIns="45700" lIns="91425" spcFirstLastPara="1" rIns="91425" wrap="square" tIns="45700">
+            <a:noAutofit/>
+          </a:bodyPr>
+          <a:lstStyle/>
+          <a:p>
+            <a:pPr indent="0" lvl="0" marL="0" marR="0" rtl="0" algn="l">
+              <a:lnSpc>
+                <a:spcPct val="100000"/>
+              </a:lnSpc>
+              <a:spcBef>
+                <a:spcPts val="0"/>
+              </a:spcBef>
+              <a:spcAft>
+                <a:spcPts val="0"/>
+              </a:spcAft>
+              <a:buClr>
+                <a:srgbClr val="000000"/>
+              </a:buClr>
+              <a:buSzPts val="1800"/>
+              <a:buFont typeface="Arial"/>
+              <a:buNone/>
+            </a:pPr>
+            <a:r>
+              <a:t/>
+            </a:r>
+            <a:endParaRPr b="0" i="0" spc="0" sz="1800" u="none" cap="none" strike="noStrike">
+              <a:solidFill>
+                <a:schemeClr val="dk1"/>
+              </a:solidFill>
+              <a:latin typeface="Calibri"/>
+              <a:ea typeface="Calibri"/>
+              <a:cs typeface="Calibri"/>
+              <a:sym typeface="Calibri"/>
+            </a:endParaRPr>
+          </a:p>
+        </p:txBody>
+      </p:sp>
+      <p:sp>
+        <p:nvSpPr>
+          <p:cNvPr id="375" name="Google Shape;375;p13"/>
+          <p:cNvSpPr txBox="1"/>
+          <p:nvPr/>
+        </p:nvSpPr>
+        <p:spPr>
+          <a:xfrm>
+            <a:off x="5852135" y="3656415"/>
+            <a:ext cx="1234500" cy="184800"/>
+          </a:xfrm>
+          <a:prstGeom prst="rect">
+            <a:avLst/>
+          </a:prstGeom>
+          <a:noFill/>
+          <a:ln>
+            <a:noFill/>
+          </a:ln>
+        </p:spPr>
+        <p:txBody>
+          <a:bodyPr anchorCtr="0" anchor="ctr" bIns="0" lIns="0" spcFirstLastPara="1" rIns="0" wrap="square" tIns="0">
+            <a:spAutoFit/>
+          </a:bodyPr>
+          <a:lstStyle/>
+          <a:p>
+            <a:pPr indent="0" lvl="0" marL="0" marR="0" rtl="0" algn="ctr">
+              <a:lnSpc>
+                <a:spcPct val="110000"/>
+              </a:lnSpc>
+              <a:spcBef>
+                <a:spcPts val="0"/>
+              </a:spcBef>
+              <a:spcAft>
+                <a:spcPts val="0"/>
+              </a:spcAft>
+              <a:buClr>
+                <a:srgbClr val="000000"/>
+              </a:buClr>
+              <a:buSzPts val="1200"/>
+              <a:buFont typeface="Arial"/>
+              <a:buNone/>
+            </a:pPr>
+            <a:r>
+              <a:rPr b="1" i="0" lang="en-US" spc="0" sz="1200" u="none" cap="none" strike="noStrike">
+                <a:solidFill>
+                  <a:srgbClr val="11803E"/>
+                </a:solidFill>
+                <a:latin typeface="Plus Jakarta Sans"/>
+                <a:ea typeface="Plus Jakarta Sans"/>
+                <a:cs typeface="Plus Jakarta Sans"/>
+                <a:sym typeface="Plus Jakarta Sans"/>
+              </a:rPr>
+              <a:t>Aprovado</a:t>
+            </a:r>
+            <a:endParaRPr b="0" i="0" spc="0" sz="1400" u="none" cap="none" strike="noStrike">
+              <a:solidFill>
+                <a:srgbClr val="000000"/>
+              </a:solidFill>
+              <a:latin typeface="Arial"/>
+              <a:ea typeface="Arial"/>
+              <a:cs typeface="Arial"/>
+              <a:sym typeface="Arial"/>
+            </a:endParaRPr>
+          </a:p>
+        </p:txBody>
+      </p:sp>
+      <p:sp>
+        <p:nvSpPr>
+          <p:cNvPr id="376" name="Google Shape;376;p13"/>
+          <p:cNvSpPr txBox="1"/>
+          <p:nvPr/>
+        </p:nvSpPr>
+        <p:spPr>
+          <a:xfrm>
+            <a:off x="5852110" y="5191578"/>
+            <a:ext cx="1234500" cy="184800"/>
+          </a:xfrm>
+          <a:prstGeom prst="rect">
+            <a:avLst/>
+          </a:prstGeom>
+          <a:noFill/>
+          <a:ln>
+            <a:noFill/>
+          </a:ln>
+        </p:spPr>
+        <p:txBody>
+          <a:bodyPr anchorCtr="0" anchor="ctr" bIns="0" lIns="0" spcFirstLastPara="1" rIns="0" wrap="square" tIns="0">
+            <a:spAutoFit/>
+          </a:bodyPr>
+          <a:lstStyle/>
+          <a:p>
+            <a:pPr indent="0" lvl="0" marL="0" marR="0" rtl="0" algn="ctr">
+              <a:lnSpc>
+                <a:spcPct val="110000"/>
+              </a:lnSpc>
+              <a:spcBef>
+                <a:spcPts val="0"/>
+              </a:spcBef>
+              <a:spcAft>
+                <a:spcPts val="0"/>
+              </a:spcAft>
+              <a:buClr>
+                <a:srgbClr val="000000"/>
+              </a:buClr>
+              <a:buSzPts val="1200"/>
+              <a:buFont typeface="Arial"/>
+              <a:buNone/>
+            </a:pPr>
+            <a:r>
+              <a:rPr b="1" i="0" lang="en-US" spc="0" sz="1200" u="none" cap="none" strike="noStrike">
+                <a:solidFill>
+                  <a:srgbClr val="11803E"/>
+                </a:solidFill>
+                <a:latin typeface="Plus Jakarta Sans"/>
+                <a:ea typeface="Plus Jakarta Sans"/>
+                <a:cs typeface="Plus Jakarta Sans"/>
+                <a:sym typeface="Plus Jakarta Sans"/>
+              </a:rPr>
+              <a:t>Aprovado</a:t>
             </a:r>
             <a:endParaRPr b="0" i="0" spc="0" sz="1400" u="none" cap="none" strike="noStrike">
               <a:solidFill>
@@ -22784,7 +22466,7 @@
     </p:bg>
     <p:spTree>
       <p:nvGrpSpPr>
-        <p:cNvPr id="390" name="Shape 390"/>
+        <p:cNvPr id="381" name="Shape 381"/>
         <p:cNvGrpSpPr/>
         <p:nvPr/>
       </p:nvGrpSpPr>
@@ -22798,7 +22480,7 @@
       </p:grpSpPr>
       <p:sp>
         <p:nvSpPr>
-          <p:cNvPr id="391" name="Google Shape;391;p15"/>
+          <p:cNvPr id="382" name="Google Shape;382;p14"/>
           <p:cNvSpPr txBox="1"/>
           <p:nvPr/>
         </p:nvSpPr>
@@ -22848,7 +22530,7 @@
                 <a:cs typeface="Plus Jakarta Sans"/>
                 <a:sym typeface="Plus Jakarta Sans"/>
               </a:rPr>
-              <a:t>TRABALHOS FUTUROS</a:t>
+              <a:t>CONCLUSÃO</a:t>
             </a:r>
             <a:endParaRPr b="0" i="0" spc="0" sz="1400" u="none" cap="none" strike="noStrike">
               <a:solidFill>
@@ -22864,7 +22546,7 @@
       </p:sp>
       <p:sp>
         <p:nvSpPr>
-          <p:cNvPr id="392" name="Google Shape;392;p15"/>
+          <p:cNvPr id="383" name="Google Shape;383;p14"/>
           <p:cNvSpPr txBox="1"/>
           <p:nvPr/>
         </p:nvSpPr>
@@ -22914,7 +22596,7 @@
                 <a:cs typeface="Plus Jakarta Sans"/>
                 <a:sym typeface="Plus Jakarta Sans"/>
               </a:rPr>
-              <a:t>Próximos passos</a:t>
+              <a:t>A resposta à pergunta de pesquisa</a:t>
             </a:r>
             <a:endParaRPr b="0" i="0" spc="0" sz="1400" u="none" cap="none" strike="noStrike">
               <a:solidFill>
@@ -22930,7 +22612,7 @@
       </p:sp>
       <p:sp>
         <p:nvSpPr>
-          <p:cNvPr id="393" name="Google Shape;393;p15"/>
+          <p:cNvPr id="384" name="Google Shape;384;p14"/>
           <p:cNvSpPr txBox="1"/>
           <p:nvPr/>
         </p:nvSpPr>
@@ -22996,7 +22678,7 @@
       </p:sp>
       <p:sp>
         <p:nvSpPr>
-          <p:cNvPr id="394" name="Google Shape;394;p15"/>
+          <p:cNvPr id="385" name="Google Shape;385;p14"/>
           <p:cNvSpPr txBox="1"/>
           <p:nvPr/>
         </p:nvSpPr>
@@ -23046,7 +22728,7 @@
                 <a:cs typeface="Plus Jakarta Sans"/>
                 <a:sym typeface="Plus Jakarta Sans"/>
               </a:rPr>
-              <a:t>15</a:t>
+              <a:t>14</a:t>
             </a:r>
             <a:endParaRPr b="0" i="0" spc="0" sz="1400" u="none" cap="none" strike="noStrike">
               <a:solidFill>
@@ -23062,22 +22744,22 @@
       </p:sp>
       <p:sp>
         <p:nvSpPr>
-          <p:cNvPr id="395" name="Google Shape;395;p15"/>
+          <p:cNvPr id="900" name="Mapill;900"/>
           <p:cNvSpPr/>
           <p:nvPr/>
         </p:nvSpPr>
         <p:spPr>
           <a:xfrm>
             <a:off x="685800" y="1783080"/>
-            <a:ext cx="10820095" cy="713232"/>
+            <a:ext cx="10820095" cy="731520"/>
           </a:xfrm>
           <a:prstGeom prst="roundRect">
             <a:avLst>
-              <a:gd fmla="val 17948" name="adj"/>
+              <a:gd fmla="val 7567" name="adj"/>
             </a:avLst>
           </a:prstGeom>
           <a:solidFill>
-            <a:srgbClr val="EAF1FE"/>
+            <a:srgbClr val="FFFFFF"/>
           </a:solidFill>
           <a:ln>
             <a:noFill/>
@@ -23123,14 +22805,14 @@
       </p:sp>
       <p:sp>
         <p:nvSpPr>
-          <p:cNvPr id="396" name="Google Shape;396;p15"/>
+          <p:cNvPr id="901" name="Mapill;901"/>
           <p:cNvSpPr txBox="1"/>
           <p:nvPr/>
         </p:nvSpPr>
         <p:spPr>
           <a:xfrm>
             <a:off x="1005840" y="1783080"/>
-            <a:ext cx="548640" cy="713232"/>
+            <a:ext cx="2560320" cy="731520"/>
           </a:xfrm>
           <a:prstGeom prst="rect">
             <a:avLst/>
@@ -23159,21 +22841,21 @@
               <a:buClr>
                 <a:srgbClr val="000000"/>
               </a:buClr>
-              <a:buSzPts val="1700"/>
-              <a:buFont typeface="Arial"/>
-              <a:buNone/>
-            </a:pPr>
-            <a:r>
-              <a:rPr b="1" i="0" lang="en-US" spc="0" sz="1700" u="none" cap="none" strike="noStrike">
-                <a:solidFill>
-                  <a:srgbClr val="0B5FD9"/>
+              <a:buSzPts val="1900"/>
+              <a:buFont typeface="Arial"/>
+              <a:buNone/>
+            </a:pPr>
+            <a:r>
+              <a:rPr b="1" i="0" lang="en-US" spc="0" sz="1900" u="none" cap="none" strike="noStrike">
+                <a:solidFill>
+                  <a:srgbClr val="191C1E"/>
                 </a:solidFill>
                 <a:latin typeface="Plus Jakarta Sans"/>
                 <a:ea typeface="Plus Jakarta Sans"/>
                 <a:cs typeface="Plus Jakarta Sans"/>
                 <a:sym typeface="Plus Jakarta Sans"/>
               </a:rPr>
-              <a:t>1</a:t>
+              <a:t>Centralizar</a:t>
             </a:r>
             <a:endParaRPr b="0" i="0" spc="0" sz="1400" u="none" cap="none" strike="noStrike">
               <a:solidFill>
@@ -23189,14 +22871,14 @@
       </p:sp>
       <p:sp>
         <p:nvSpPr>
-          <p:cNvPr id="397" name="Google Shape;397;p15"/>
+          <p:cNvPr id="902" name="Mapill;902"/>
           <p:cNvSpPr txBox="1"/>
           <p:nvPr/>
         </p:nvSpPr>
         <p:spPr>
           <a:xfrm>
-            <a:off x="1554480" y="1783080"/>
-            <a:ext cx="9144000" cy="713232"/>
+            <a:off x="3749040" y="1783080"/>
+            <a:ext cx="7498080" cy="731520"/>
           </a:xfrm>
           <a:prstGeom prst="rect">
             <a:avLst/>
@@ -23217,29 +22899,29 @@
                 <a:spcPct val="110000"/>
               </a:lnSpc>
               <a:spcBef>
-                <a:spcPts val="0"/>
-              </a:spcBef>
-              <a:spcAft>
-                <a:spcPts val="0"/>
-              </a:spcAft>
-              <a:buClr>
-                <a:srgbClr val="000000"/>
-              </a:buClr>
-              <a:buSzPts val="1800"/>
-              <a:buFont typeface="Arial"/>
-              <a:buNone/>
-            </a:pPr>
-            <a:r>
-              <a:rPr b="1" i="0" lang="en-US" spc="0" sz="1800" u="none" cap="none" strike="noStrike">
-                <a:solidFill>
-                  <a:srgbClr val="0A3F8F"/>
+                <a:spcPts val="400"/>
+              </a:spcBef>
+              <a:spcAft>
+                <a:spcPts val="0"/>
+              </a:spcAft>
+              <a:buClr>
+                <a:srgbClr val="000000"/>
+              </a:buClr>
+              <a:buSzPts val="1500"/>
+              <a:buFont typeface="Arial"/>
+              <a:buNone/>
+            </a:pPr>
+            <a:r>
+              <a:rPr b="0" i="0" lang="en-US" spc="0" sz="1700" u="none" cap="none" strike="noStrike">
+                <a:solidFill>
+                  <a:srgbClr val="545F73"/>
                 </a:solidFill>
                 <a:latin typeface="Plus Jakarta Sans"/>
                 <a:ea typeface="Plus Jakarta Sans"/>
                 <a:cs typeface="Plus Jakarta Sans"/>
                 <a:sym typeface="Plus Jakarta Sans"/>
               </a:rPr>
-              <a:t>Avaliação de usabilidade com pacientes idosos e polimedicados</a:t>
+              <a:t>remédios, estoque, consultas e receitas num só aplicativo</a:t>
             </a:r>
             <a:endParaRPr b="0" i="0" spc="0" sz="1400" u="none" cap="none" strike="noStrike">
               <a:solidFill>
@@ -23255,18 +22937,18 @@
       </p:sp>
       <p:sp>
         <p:nvSpPr>
-          <p:cNvPr id="398" name="Google Shape;398;p15"/>
+          <p:cNvPr id="903" name="Mapill;903"/>
           <p:cNvSpPr/>
           <p:nvPr/>
         </p:nvSpPr>
         <p:spPr>
           <a:xfrm>
-            <a:off x="685800" y="2633472"/>
-            <a:ext cx="10820095" cy="713232"/>
+            <a:off x="685800" y="2606040"/>
+            <a:ext cx="10820095" cy="731520"/>
           </a:xfrm>
           <a:prstGeom prst="roundRect">
             <a:avLst>
-              <a:gd fmla="val 17948" name="adj"/>
+              <a:gd fmla="val 7567" name="adj"/>
             </a:avLst>
           </a:prstGeom>
           <a:solidFill>
@@ -23316,14 +22998,14 @@
       </p:sp>
       <p:sp>
         <p:nvSpPr>
-          <p:cNvPr id="399" name="Google Shape;399;p15"/>
+          <p:cNvPr id="904" name="Mapill;904"/>
           <p:cNvSpPr txBox="1"/>
           <p:nvPr/>
         </p:nvSpPr>
         <p:spPr>
           <a:xfrm>
-            <a:off x="1005840" y="2633472"/>
-            <a:ext cx="548640" cy="713232"/>
+            <a:off x="1005840" y="2606040"/>
+            <a:ext cx="2560320" cy="731520"/>
           </a:xfrm>
           <a:prstGeom prst="rect">
             <a:avLst/>
@@ -23352,21 +23034,21 @@
               <a:buClr>
                 <a:srgbClr val="000000"/>
               </a:buClr>
-              <a:buSzPts val="1700"/>
-              <a:buFont typeface="Arial"/>
-              <a:buNone/>
-            </a:pPr>
-            <a:r>
-              <a:rPr b="1" i="0" lang="en-US" spc="0" sz="1700" u="none" cap="none" strike="noStrike">
-                <a:solidFill>
-                  <a:srgbClr val="0B5FD9"/>
+              <a:buSzPts val="1900"/>
+              <a:buFont typeface="Arial"/>
+              <a:buNone/>
+            </a:pPr>
+            <a:r>
+              <a:rPr b="1" i="0" lang="en-US" spc="0" sz="1900" u="none" cap="none" strike="noStrike">
+                <a:solidFill>
+                  <a:srgbClr val="191C1E"/>
                 </a:solidFill>
                 <a:latin typeface="Plus Jakarta Sans"/>
                 <a:ea typeface="Plus Jakarta Sans"/>
                 <a:cs typeface="Plus Jakarta Sans"/>
                 <a:sym typeface="Plus Jakarta Sans"/>
               </a:rPr>
-              <a:t>2</a:t>
+              <a:t>Confiabilidade</a:t>
             </a:r>
             <a:endParaRPr b="0" i="0" spc="0" sz="1400" u="none" cap="none" strike="noStrike">
               <a:solidFill>
@@ -23382,14 +23064,14 @@
       </p:sp>
       <p:sp>
         <p:nvSpPr>
-          <p:cNvPr id="400" name="Google Shape;400;p15"/>
+          <p:cNvPr id="905" name="Mapill;905"/>
           <p:cNvSpPr txBox="1"/>
           <p:nvPr/>
         </p:nvSpPr>
         <p:spPr>
           <a:xfrm>
-            <a:off x="1554480" y="2633472"/>
-            <a:ext cx="9144000" cy="713232"/>
+            <a:off x="3749040" y="2606040"/>
+            <a:ext cx="7498080" cy="731520"/>
           </a:xfrm>
           <a:prstGeom prst="rect">
             <a:avLst/>
@@ -23410,29 +23092,29 @@
                 <a:spcPct val="110000"/>
               </a:lnSpc>
               <a:spcBef>
-                <a:spcPts val="0"/>
-              </a:spcBef>
-              <a:spcAft>
-                <a:spcPts val="0"/>
-              </a:spcAft>
-              <a:buClr>
-                <a:srgbClr val="000000"/>
-              </a:buClr>
-              <a:buSzPts val="1800"/>
-              <a:buFont typeface="Arial"/>
-              <a:buNone/>
-            </a:pPr>
-            <a:r>
-              <a:rPr b="0" i="0" lang="en-US" spc="0" sz="1800" u="none" cap="none" strike="noStrike">
-                <a:solidFill>
-                  <a:srgbClr val="191C1E"/>
+                <a:spcPts val="400"/>
+              </a:spcBef>
+              <a:spcAft>
+                <a:spcPts val="0"/>
+              </a:spcAft>
+              <a:buClr>
+                <a:srgbClr val="000000"/>
+              </a:buClr>
+              <a:buSzPts val="1500"/>
+              <a:buFont typeface="Arial"/>
+              <a:buNone/>
+            </a:pPr>
+            <a:r>
+              <a:rPr b="0" i="0" lang="en-US" spc="0" sz="1700" u="none" cap="none" strike="noStrike">
+                <a:solidFill>
+                  <a:srgbClr val="545F73"/>
                 </a:solidFill>
                 <a:latin typeface="Plus Jakarta Sans"/>
                 <a:ea typeface="Plus Jakarta Sans"/>
                 <a:cs typeface="Plus Jakarta Sans"/>
                 <a:sym typeface="Plus Jakarta Sans"/>
               </a:rPr>
-              <a:t>Alarme validado em outros fabricantes</a:t>
+              <a:t>corrigir não apaga o original, e pulada não vira sem resposta</a:t>
             </a:r>
             <a:endParaRPr b="0" i="0" spc="0" sz="1400" u="none" cap="none" strike="noStrike">
               <a:solidFill>
@@ -23448,18 +23130,18 @@
       </p:sp>
       <p:sp>
         <p:nvSpPr>
-          <p:cNvPr id="401" name="Google Shape;401;p15"/>
+          <p:cNvPr id="906" name="Mapill;906"/>
           <p:cNvSpPr/>
           <p:nvPr/>
         </p:nvSpPr>
         <p:spPr>
           <a:xfrm>
-            <a:off x="685800" y="3483864"/>
-            <a:ext cx="10820095" cy="713232"/>
+            <a:off x="685800" y="3429000"/>
+            <a:ext cx="10820095" cy="731520"/>
           </a:xfrm>
           <a:prstGeom prst="roundRect">
             <a:avLst>
-              <a:gd fmla="val 17948" name="adj"/>
+              <a:gd fmla="val 7567" name="adj"/>
             </a:avLst>
           </a:prstGeom>
           <a:solidFill>
@@ -23509,14 +23191,14 @@
       </p:sp>
       <p:sp>
         <p:nvSpPr>
-          <p:cNvPr id="402" name="Google Shape;402;p15"/>
+          <p:cNvPr id="907" name="Mapill;907"/>
           <p:cNvSpPr txBox="1"/>
           <p:nvPr/>
         </p:nvSpPr>
         <p:spPr>
           <a:xfrm>
-            <a:off x="1005840" y="3483864"/>
-            <a:ext cx="548640" cy="713232"/>
+            <a:off x="1005840" y="3429000"/>
+            <a:ext cx="2560320" cy="731520"/>
           </a:xfrm>
           <a:prstGeom prst="rect">
             <a:avLst/>
@@ -23545,21 +23227,21 @@
               <a:buClr>
                 <a:srgbClr val="000000"/>
               </a:buClr>
-              <a:buSzPts val="1700"/>
-              <a:buFont typeface="Arial"/>
-              <a:buNone/>
-            </a:pPr>
-            <a:r>
-              <a:rPr b="1" i="0" lang="en-US" spc="0" sz="1700" u="none" cap="none" strike="noStrike">
-                <a:solidFill>
-                  <a:srgbClr val="0B5FD9"/>
+              <a:buSzPts val="1900"/>
+              <a:buFont typeface="Arial"/>
+              <a:buNone/>
+            </a:pPr>
+            <a:r>
+              <a:rPr b="1" i="0" lang="en-US" spc="0" sz="1900" u="none" cap="none" strike="noStrike">
+                <a:solidFill>
+                  <a:srgbClr val="191C1E"/>
                 </a:solidFill>
                 <a:latin typeface="Plus Jakarta Sans"/>
                 <a:ea typeface="Plus Jakarta Sans"/>
                 <a:cs typeface="Plus Jakarta Sans"/>
                 <a:sym typeface="Plus Jakarta Sans"/>
               </a:rPr>
-              <a:t>3</a:t>
+              <a:t>Segurança</a:t>
             </a:r>
             <a:endParaRPr b="0" i="0" spc="0" sz="1400" u="none" cap="none" strike="noStrike">
               <a:solidFill>
@@ -23575,14 +23257,14 @@
       </p:sp>
       <p:sp>
         <p:nvSpPr>
-          <p:cNvPr id="403" name="Google Shape;403;p15"/>
+          <p:cNvPr id="908" name="Mapill;908"/>
           <p:cNvSpPr txBox="1"/>
           <p:nvPr/>
         </p:nvSpPr>
         <p:spPr>
           <a:xfrm>
-            <a:off x="1554480" y="3483864"/>
-            <a:ext cx="9144000" cy="713232"/>
+            <a:off x="3749040" y="3429000"/>
+            <a:ext cx="7498080" cy="731520"/>
           </a:xfrm>
           <a:prstGeom prst="rect">
             <a:avLst/>
@@ -23603,29 +23285,29 @@
                 <a:spcPct val="110000"/>
               </a:lnSpc>
               <a:spcBef>
-                <a:spcPts val="0"/>
-              </a:spcBef>
-              <a:spcAft>
-                <a:spcPts val="0"/>
-              </a:spcAft>
-              <a:buClr>
-                <a:srgbClr val="000000"/>
-              </a:buClr>
-              <a:buSzPts val="1800"/>
-              <a:buFont typeface="Arial"/>
-              <a:buNone/>
-            </a:pPr>
-            <a:r>
-              <a:rPr b="0" i="0" lang="en-US" spc="0" sz="1800" u="none" cap="none" strike="noStrike">
-                <a:solidFill>
-                  <a:srgbClr val="191C1E"/>
+                <a:spcPts val="400"/>
+              </a:spcBef>
+              <a:spcAft>
+                <a:spcPts val="0"/>
+              </a:spcAft>
+              <a:buClr>
+                <a:srgbClr val="000000"/>
+              </a:buClr>
+              <a:buSzPts val="1500"/>
+              <a:buFont typeface="Arial"/>
+              <a:buNone/>
+            </a:pPr>
+            <a:r>
+              <a:rPr b="0" i="0" lang="en-US" spc="0" sz="1700" u="none" cap="none" strike="noStrike">
+                <a:solidFill>
+                  <a:srgbClr val="545F73"/>
                 </a:solidFill>
                 <a:latin typeface="Plus Jakarta Sans"/>
                 <a:ea typeface="Plus Jakarta Sans"/>
                 <a:cs typeface="Plus Jakarta Sans"/>
                 <a:sym typeface="Plus Jakarta Sans"/>
               </a:rPr>
-              <a:t>Versão para iOS e publicação nas lojas</a:t>
+              <a:t>cada usuário só acessa os próprios dados, e dá para usar sem conta</a:t>
             </a:r>
             <a:endParaRPr b="0" i="0" spc="0" sz="1400" u="none" cap="none" strike="noStrike">
               <a:solidFill>
@@ -23641,18 +23323,18 @@
       </p:sp>
       <p:sp>
         <p:nvSpPr>
-          <p:cNvPr id="404" name="Google Shape;404;p15"/>
+          <p:cNvPr id="909" name="Mapill;909"/>
           <p:cNvSpPr/>
           <p:nvPr/>
         </p:nvSpPr>
         <p:spPr>
           <a:xfrm>
-            <a:off x="685800" y="4334256"/>
-            <a:ext cx="10820095" cy="713232"/>
+            <a:off x="685800" y="4251960"/>
+            <a:ext cx="10820095" cy="731520"/>
           </a:xfrm>
           <a:prstGeom prst="roundRect">
             <a:avLst>
-              <a:gd fmla="val 17948" name="adj"/>
+              <a:gd fmla="val 7567" name="adj"/>
             </a:avLst>
           </a:prstGeom>
           <a:solidFill>
@@ -23702,14 +23384,14 @@
       </p:sp>
       <p:sp>
         <p:nvSpPr>
-          <p:cNvPr id="405" name="Google Shape;405;p15"/>
+          <p:cNvPr id="910" name="Mapill;910"/>
           <p:cNvSpPr txBox="1"/>
           <p:nvPr/>
         </p:nvSpPr>
         <p:spPr>
           <a:xfrm>
-            <a:off x="1005840" y="4334256"/>
-            <a:ext cx="548640" cy="713232"/>
+            <a:off x="1005840" y="4251960"/>
+            <a:ext cx="2560320" cy="731520"/>
           </a:xfrm>
           <a:prstGeom prst="rect">
             <a:avLst/>
@@ -23738,21 +23420,21 @@
               <a:buClr>
                 <a:srgbClr val="000000"/>
               </a:buClr>
-              <a:buSzPts val="1700"/>
-              <a:buFont typeface="Arial"/>
-              <a:buNone/>
-            </a:pPr>
-            <a:r>
-              <a:rPr b="1" i="0" lang="en-US" spc="0" sz="1700" u="none" cap="none" strike="noStrike">
-                <a:solidFill>
-                  <a:srgbClr val="0B5FD9"/>
+              <a:buSzPts val="1900"/>
+              <a:buFont typeface="Arial"/>
+              <a:buNone/>
+            </a:pPr>
+            <a:r>
+              <a:rPr b="1" i="0" lang="en-US" spc="0" sz="1900" u="none" cap="none" strike="noStrike">
+                <a:solidFill>
+                  <a:srgbClr val="191C1E"/>
                 </a:solidFill>
                 <a:latin typeface="Plus Jakarta Sans"/>
                 <a:ea typeface="Plus Jakarta Sans"/>
                 <a:cs typeface="Plus Jakarta Sans"/>
                 <a:sym typeface="Plus Jakarta Sans"/>
               </a:rPr>
-              <a:t>4</a:t>
+              <a:t>Usabilidade</a:t>
             </a:r>
             <a:endParaRPr b="0" i="0" spc="0" sz="1400" u="none" cap="none" strike="noStrike">
               <a:solidFill>
@@ -23768,14 +23450,14 @@
       </p:sp>
       <p:sp>
         <p:nvSpPr>
-          <p:cNvPr id="406" name="Google Shape;406;p15"/>
+          <p:cNvPr id="911" name="Mapill;911"/>
           <p:cNvSpPr txBox="1"/>
           <p:nvPr/>
         </p:nvSpPr>
         <p:spPr>
           <a:xfrm>
-            <a:off x="1554480" y="4334256"/>
-            <a:ext cx="9144000" cy="713232"/>
+            <a:off x="3749040" y="4251960"/>
+            <a:ext cx="7498080" cy="731520"/>
           </a:xfrm>
           <a:prstGeom prst="rect">
             <a:avLst/>
@@ -23796,29 +23478,29 @@
                 <a:spcPct val="110000"/>
               </a:lnSpc>
               <a:spcBef>
-                <a:spcPts val="0"/>
-              </a:spcBef>
-              <a:spcAft>
-                <a:spcPts val="0"/>
-              </a:spcAft>
-              <a:buClr>
-                <a:srgbClr val="000000"/>
-              </a:buClr>
-              <a:buSzPts val="1800"/>
-              <a:buFont typeface="Arial"/>
-              <a:buNone/>
-            </a:pPr>
-            <a:r>
-              <a:rPr b="0" i="0" lang="en-US" spc="0" sz="1800" u="none" cap="none" strike="noStrike">
-                <a:solidFill>
-                  <a:srgbClr val="191C1E"/>
+                <a:spcPts val="400"/>
+              </a:spcBef>
+              <a:spcAft>
+                <a:spcPts val="0"/>
+              </a:spcAft>
+              <a:buClr>
+                <a:srgbClr val="000000"/>
+              </a:buClr>
+              <a:buSzPts val="1500"/>
+              <a:buFont typeface="Arial"/>
+              <a:buNone/>
+            </a:pPr>
+            <a:r>
+              <a:rPr b="0" i="0" lang="en-US" spc="0" sz="1700" u="none" cap="none" strike="noStrike">
+                <a:solidFill>
+                  <a:srgbClr val="545F73"/>
                 </a:solidFill>
                 <a:latin typeface="Plus Jakarta Sans"/>
                 <a:ea typeface="Plus Jakarta Sans"/>
                 <a:cs typeface="Plus Jakarta Sans"/>
                 <a:sym typeface="Plus Jakarta Sans"/>
               </a:rPr>
-              <a:t>Acesso de consulta para médicos e cuidadores</a:t>
+              <a:t>guiada pelas heurísticas de Nielsen, ainda sem teste com pacientes</a:t>
             </a:r>
             <a:endParaRPr b="0" i="0" spc="0" sz="1400" u="none" cap="none" strike="noStrike">
               <a:solidFill>
@@ -23834,22 +23516,22 @@
       </p:sp>
       <p:sp>
         <p:nvSpPr>
-          <p:cNvPr id="407" name="Google Shape;407;p15"/>
+          <p:cNvPr id="386" name="Google Shape;386;p14"/>
           <p:cNvSpPr/>
           <p:nvPr/>
         </p:nvSpPr>
         <p:spPr>
           <a:xfrm>
-            <a:off x="685800" y="5184648"/>
-            <a:ext cx="10820095" cy="713232"/>
+            <a:off x="685800" y="5166360"/>
+            <a:ext cx="10820095" cy="640080"/>
           </a:xfrm>
           <a:prstGeom prst="roundRect">
             <a:avLst>
-              <a:gd fmla="val 17948" name="adj"/>
+              <a:gd fmla="val 16470" name="adj"/>
             </a:avLst>
           </a:prstGeom>
           <a:solidFill>
-            <a:srgbClr val="FFFFFF"/>
+            <a:srgbClr val="E3F6EA"/>
           </a:solidFill>
           <a:ln>
             <a:noFill/>
@@ -23895,14 +23577,14 @@
       </p:sp>
       <p:sp>
         <p:nvSpPr>
-          <p:cNvPr id="408" name="Google Shape;408;p15"/>
+          <p:cNvPr id="387" name="Google Shape;387;p14"/>
           <p:cNvSpPr txBox="1"/>
           <p:nvPr/>
         </p:nvSpPr>
         <p:spPr>
           <a:xfrm>
-            <a:off x="1005840" y="5184648"/>
-            <a:ext cx="548640" cy="713232"/>
+            <a:off x="1005860" y="5347800"/>
+            <a:ext cx="10088700" cy="277200"/>
           </a:xfrm>
           <a:prstGeom prst="rect">
             <a:avLst/>
@@ -23931,87 +23613,21 @@
               <a:buClr>
                 <a:srgbClr val="000000"/>
               </a:buClr>
-              <a:buSzPts val="1700"/>
-              <a:buFont typeface="Arial"/>
-              <a:buNone/>
-            </a:pPr>
-            <a:r>
-              <a:rPr b="1" i="0" lang="en-US" spc="0" sz="1700" u="none" cap="none" strike="noStrike">
-                <a:solidFill>
-                  <a:srgbClr val="0B5FD9"/>
+              <a:buSzPts val="1800"/>
+              <a:buFont typeface="Arial"/>
+              <a:buNone/>
+            </a:pPr>
+            <a:r>
+              <a:rPr b="1" i="0" lang="en-US" spc="0" sz="1800" u="none" cap="none" strike="noStrike">
+                <a:solidFill>
+                  <a:srgbClr val="11803E"/>
                 </a:solidFill>
                 <a:latin typeface="Plus Jakarta Sans"/>
                 <a:ea typeface="Plus Jakarta Sans"/>
                 <a:cs typeface="Plus Jakarta Sans"/>
                 <a:sym typeface="Plus Jakarta Sans"/>
               </a:rPr>
-              <a:t>5</a:t>
-            </a:r>
-            <a:endParaRPr b="0" i="0" spc="0" sz="1400" u="none" cap="none" strike="noStrike">
-              <a:solidFill>
-                <a:srgbClr val="000000"/>
-              </a:solidFill>
-              <a:latin typeface="Arial"/>
-              <a:ea typeface="Arial"/>
-              <a:cs typeface="Arial"/>
-              <a:sym typeface="Arial"/>
-            </a:endParaRPr>
-          </a:p>
-        </p:txBody>
-      </p:sp>
-      <p:sp>
-        <p:nvSpPr>
-          <p:cNvPr id="409" name="Google Shape;409;p15"/>
-          <p:cNvSpPr txBox="1"/>
-          <p:nvPr/>
-        </p:nvSpPr>
-        <p:spPr>
-          <a:xfrm>
-            <a:off x="1554480" y="5184648"/>
-            <a:ext cx="9144000" cy="713232"/>
-          </a:xfrm>
-          <a:prstGeom prst="rect">
-            <a:avLst/>
-          </a:prstGeom>
-          <a:noFill/>
-          <a:ln>
-            <a:noFill/>
-          </a:ln>
-        </p:spPr>
-        <p:txBody>
-          <a:bodyPr anchorCtr="0" anchor="ctr" bIns="0" lIns="0" spcFirstLastPara="1" rIns="0" wrap="square" tIns="0">
-            <a:spAutoFit/>
-          </a:bodyPr>
-          <a:lstStyle/>
-          <a:p>
-            <a:pPr indent="0" lvl="0" marL="0" marR="0" rtl="0" algn="l">
-              <a:lnSpc>
-                <a:spcPct val="110000"/>
-              </a:lnSpc>
-              <a:spcBef>
-                <a:spcPts val="0"/>
-              </a:spcBef>
-              <a:spcAft>
-                <a:spcPts val="0"/>
-              </a:spcAft>
-              <a:buClr>
-                <a:srgbClr val="000000"/>
-              </a:buClr>
-              <a:buSzPts val="1800"/>
-              <a:buFont typeface="Arial"/>
-              <a:buNone/>
-            </a:pPr>
-            <a:r>
-              <a:rPr b="0" i="0" lang="en-US" spc="0" sz="1800" u="none" cap="none" strike="noStrike">
-                <a:solidFill>
-                  <a:srgbClr val="191C1E"/>
-                </a:solidFill>
-                <a:latin typeface="Plus Jakarta Sans"/>
-                <a:ea typeface="Plus Jakarta Sans"/>
-                <a:cs typeface="Plus Jakarta Sans"/>
-                <a:sym typeface="Plus Jakarta Sans"/>
-              </a:rPr>
-              <a:t>Cuidado organizado por tratamento, como na oncologia</a:t>
+              <a:t>Objetivos atendidos</a:t>
             </a:r>
             <a:endParaRPr b="0" i="0" spc="0" sz="1400" u="none" cap="none" strike="noStrike">
               <a:solidFill>
@@ -24045,7 +23661,7 @@
     </p:bg>
     <p:spTree>
       <p:nvGrpSpPr>
-        <p:cNvPr id="414" name="Shape 414"/>
+        <p:cNvPr id="399" name="Shape 399"/>
         <p:cNvGrpSpPr/>
         <p:nvPr/>
       </p:nvGrpSpPr>
@@ -24059,7 +23675,7 @@
       </p:grpSpPr>
       <p:sp>
         <p:nvSpPr>
-          <p:cNvPr id="415" name="Google Shape;415;p16"/>
+          <p:cNvPr id="400" name="Google Shape;400;p15"/>
           <p:cNvSpPr txBox="1"/>
           <p:nvPr/>
         </p:nvSpPr>
@@ -24109,7 +23725,7 @@
                 <a:cs typeface="Plus Jakarta Sans"/>
                 <a:sym typeface="Plus Jakarta Sans"/>
               </a:rPr>
-              <a:t>REFERÊNCIAS</a:t>
+              <a:t>TRABALHOS FUTUROS</a:t>
             </a:r>
             <a:endParaRPr b="0" i="0" spc="0" sz="1400" u="none" cap="none" strike="noStrike">
               <a:solidFill>
@@ -24125,7 +23741,73 @@
       </p:sp>
       <p:sp>
         <p:nvSpPr>
-          <p:cNvPr id="416" name="Google Shape;416;p16"/>
+          <p:cNvPr id="401" name="Google Shape;401;p15"/>
+          <p:cNvSpPr txBox="1"/>
+          <p:nvPr/>
+        </p:nvSpPr>
+        <p:spPr>
+          <a:xfrm>
+            <a:off x="685800" y="804672"/>
+            <a:ext cx="10820095" cy="822960"/>
+          </a:xfrm>
+          <a:prstGeom prst="rect">
+            <a:avLst/>
+          </a:prstGeom>
+          <a:noFill/>
+          <a:ln>
+            <a:noFill/>
+          </a:ln>
+        </p:spPr>
+        <p:txBody>
+          <a:bodyPr anchorCtr="0" anchor="t" bIns="0" lIns="0" spcFirstLastPara="1" rIns="0" wrap="square" tIns="0">
+            <a:spAutoFit/>
+          </a:bodyPr>
+          <a:lstStyle/>
+          <a:p>
+            <a:pPr indent="0" lvl="0" marL="0" marR="0" rtl="0" algn="l">
+              <a:lnSpc>
+                <a:spcPct val="100000"/>
+              </a:lnSpc>
+              <a:spcBef>
+                <a:spcPts val="0"/>
+              </a:spcBef>
+              <a:spcAft>
+                <a:spcPts val="0"/>
+              </a:spcAft>
+              <a:buClr>
+                <a:srgbClr val="000000"/>
+              </a:buClr>
+              <a:buSzPts val="2800"/>
+              <a:buFont typeface="Arial"/>
+              <a:buNone/>
+            </a:pPr>
+            <a:r>
+              <a:rPr b="1" i="0" lang="en-US" spc="0" sz="2800" u="none" cap="none" strike="noStrike">
+                <a:solidFill>
+                  <a:srgbClr val="191C1E"/>
+                </a:solidFill>
+                <a:latin typeface="Plus Jakarta Sans"/>
+                <a:ea typeface="Plus Jakarta Sans"/>
+                <a:cs typeface="Plus Jakarta Sans"/>
+                <a:sym typeface="Plus Jakarta Sans"/>
+              </a:rPr>
+              <a:t>Cada limitação aponta um próximo passo</a:t>
+            </a:r>
+            <a:endParaRPr b="0" i="0" spc="0" sz="1400" u="none" cap="none" strike="noStrike">
+              <a:solidFill>
+                <a:srgbClr val="000000"/>
+              </a:solidFill>
+              <a:latin typeface="Arial"/>
+              <a:ea typeface="Arial"/>
+              <a:cs typeface="Arial"/>
+              <a:sym typeface="Arial"/>
+            </a:endParaRPr>
+          </a:p>
+        </p:txBody>
+      </p:sp>
+      <p:sp>
+        <p:nvSpPr>
+          <p:cNvPr id="402" name="Google Shape;402;p15"/>
           <p:cNvSpPr txBox="1"/>
           <p:nvPr/>
         </p:nvSpPr>
@@ -24191,7 +23873,7 @@
       </p:sp>
       <p:sp>
         <p:nvSpPr>
-          <p:cNvPr id="417" name="Google Shape;417;p16"/>
+          <p:cNvPr id="403" name="Google Shape;403;p15"/>
           <p:cNvSpPr txBox="1"/>
           <p:nvPr/>
         </p:nvSpPr>
@@ -24241,7 +23923,7 @@
                 <a:cs typeface="Plus Jakarta Sans"/>
                 <a:sym typeface="Plus Jakarta Sans"/>
               </a:rPr>
-              <a:t>16</a:t>
+              <a:t>15</a:t>
             </a:r>
             <a:endParaRPr b="0" i="0" spc="0" sz="1400" u="none" cap="none" strike="noStrike">
               <a:solidFill>
@@ -24257,14 +23939,75 @@
       </p:sp>
       <p:sp>
         <p:nvSpPr>
-          <p:cNvPr id="418" name="Google Shape;418;p16"/>
+          <p:cNvPr id="404" name="Google Shape;404;p15"/>
+          <p:cNvSpPr/>
+          <p:nvPr/>
+        </p:nvSpPr>
+        <p:spPr>
+          <a:xfrm>
+            <a:off x="685800" y="1783080"/>
+            <a:ext cx="10820095" cy="713232"/>
+          </a:xfrm>
+          <a:prstGeom prst="roundRect">
+            <a:avLst>
+              <a:gd fmla="val 17948" name="adj"/>
+            </a:avLst>
+          </a:prstGeom>
+          <a:solidFill>
+            <a:schemeClr val="lt1"/>
+          </a:solidFill>
+          <a:ln>
+            <a:noFill/>
+          </a:ln>
+        </p:spPr>
+        <p:txBody>
+          <a:bodyPr anchorCtr="0" anchor="ctr" bIns="45700" lIns="91425" spcFirstLastPara="1" rIns="91425" wrap="square" tIns="45700">
+            <a:noAutofit/>
+          </a:bodyPr>
+          <a:lstStyle/>
+          <a:p>
+            <a:pPr indent="0" lvl="0" marL="0" marR="0" rtl="0" algn="l">
+              <a:lnSpc>
+                <a:spcPct val="100000"/>
+              </a:lnSpc>
+              <a:spcBef>
+                <a:spcPts val="0"/>
+              </a:spcBef>
+              <a:spcAft>
+                <a:spcPts val="0"/>
+              </a:spcAft>
+              <a:buClr>
+                <a:srgbClr val="000000"/>
+              </a:buClr>
+              <a:buSzPts val="1800"/>
+              <a:buFont typeface="Arial"/>
+              <a:buNone/>
+            </a:pPr>
+            <a:r>
+              <a:t/>
+            </a:r>
+            <a:endParaRPr b="0" i="0" spc="0" sz="1800" u="none" cap="none" strike="noStrike">
+              <a:solidFill>
+                <a:schemeClr val="dk1"/>
+              </a:solidFill>
+              <a:latin typeface="Calibri"/>
+              <a:ea typeface="Calibri"/>
+              <a:cs typeface="Calibri"/>
+              <a:sym typeface="Calibri"/>
+            </a:endParaRPr>
+          </a:p>
+        </p:txBody>
+      </p:sp>
+      <p:sp>
+        <p:nvSpPr>
+          <p:cNvPr id="405" name="Google Shape;405;p15"/>
           <p:cNvSpPr txBox="1"/>
           <p:nvPr/>
         </p:nvSpPr>
         <p:spPr>
           <a:xfrm>
-            <a:off x="685800" y="1005840"/>
-            <a:ext cx="5257800" cy="5120640"/>
+            <a:off x="1005840" y="1783080"/>
+            <a:ext cx="548640" cy="713232"/>
           </a:xfrm>
           <a:prstGeom prst="rect">
             <a:avLst/>
@@ -24275,63 +24018,39 @@
           </a:ln>
         </p:spPr>
         <p:txBody>
-          <a:bodyPr anchorCtr="0" anchor="t" bIns="0" lIns="0" spcFirstLastPara="1" rIns="0" wrap="square" tIns="0">
+          <a:bodyPr anchorCtr="0" anchor="ctr" bIns="0" lIns="0" spcFirstLastPara="1" rIns="0" wrap="square" tIns="0">
             <a:spAutoFit/>
           </a:bodyPr>
           <a:lstStyle/>
           <a:p>
             <a:pPr indent="0" lvl="0" marL="0" marR="0" rtl="0" algn="l">
               <a:lnSpc>
-                <a:spcPct val="105000"/>
-              </a:lnSpc>
-              <a:spcBef>
-                <a:spcPts val="0"/>
-              </a:spcBef>
-              <a:spcAft>
-                <a:spcPts val="0"/>
-              </a:spcAft>
-              <a:buClr>
-                <a:srgbClr val="000000"/>
-              </a:buClr>
-              <a:buSzPts val="1100"/>
-              <a:buFont typeface="Arial"/>
-              <a:buNone/>
-            </a:pPr>
-            <a:r>
-              <a:rPr b="0" i="0" lang="en-US" spc="0" sz="1100" u="none" cap="none" strike="noStrike">
-                <a:solidFill>
-                  <a:srgbClr val="191C1E"/>
+                <a:spcPct val="110000"/>
+              </a:lnSpc>
+              <a:spcBef>
+                <a:spcPts val="0"/>
+              </a:spcBef>
+              <a:spcAft>
+                <a:spcPts val="0"/>
+              </a:spcAft>
+              <a:buClr>
+                <a:srgbClr val="000000"/>
+              </a:buClr>
+              <a:buSzPts val="1700"/>
+              <a:buFont typeface="Arial"/>
+              <a:buNone/>
+            </a:pPr>
+            <a:r>
+              <a:rPr b="1" i="0" lang="en-US" spc="0" sz="1700" u="none" cap="none" strike="noStrike">
+                <a:solidFill>
+                  <a:srgbClr val="0B5FD9"/>
                 </a:solidFill>
                 <a:latin typeface="Plus Jakarta Sans"/>
                 <a:ea typeface="Plus Jakarta Sans"/>
                 <a:cs typeface="Plus Jakarta Sans"/>
                 <a:sym typeface="Plus Jakarta Sans"/>
               </a:rPr>
-              <a:t>ALLSOPP, John. </a:t>
-            </a:r>
-            <a:r>
-              <a:rPr b="1" i="0" lang="en-US" spc="0" sz="1100" u="none" cap="none" strike="noStrike">
-                <a:solidFill>
-                  <a:srgbClr val="191C1E"/>
-                </a:solidFill>
-                <a:latin typeface="Plus Jakarta Sans"/>
-                <a:ea typeface="Plus Jakarta Sans"/>
-                <a:cs typeface="Plus Jakarta Sans"/>
-                <a:sym typeface="Plus Jakarta Sans"/>
-              </a:rPr>
-              <a:t>The web's future is offline</a:t>
-            </a:r>
-            <a:r>
-              <a:rPr b="0" i="0" lang="en-US" spc="0" sz="1100" u="none" cap="none" strike="noStrike">
-                <a:solidFill>
-                  <a:srgbClr val="191C1E"/>
-                </a:solidFill>
-                <a:latin typeface="Plus Jakarta Sans"/>
-                <a:ea typeface="Plus Jakarta Sans"/>
-                <a:cs typeface="Plus Jakarta Sans"/>
-                <a:sym typeface="Plus Jakarta Sans"/>
-              </a:rPr>
-              <a:t>. beyond tellerrand, 2014. Disponível em: https://www.youtube.com/watch?v=VvwhcoZhoI4. Acesso em: 8 maio 2026.</a:t>
+              <a:t>1</a:t>
             </a:r>
             <a:endParaRPr b="0" i="0" spc="0" sz="1400" u="none" cap="none" strike="noStrike">
               <a:solidFill>
@@ -24343,59 +24062,184 @@
               <a:sym typeface="Arial"/>
             </a:endParaRPr>
           </a:p>
+        </p:txBody>
+      </p:sp>
+      <p:sp>
+        <p:nvSpPr>
+          <p:cNvPr id="406" name="Google Shape;406;p15"/>
+          <p:cNvSpPr txBox="1"/>
+          <p:nvPr/>
+        </p:nvSpPr>
+        <p:spPr>
+          <a:xfrm>
+            <a:off x="1554480" y="2001093"/>
+            <a:ext cx="6400800" cy="277200"/>
+          </a:xfrm>
+          <a:prstGeom prst="rect">
+            <a:avLst/>
+          </a:prstGeom>
+          <a:noFill/>
+          <a:ln>
+            <a:noFill/>
+          </a:ln>
+        </p:spPr>
+        <p:txBody>
+          <a:bodyPr anchorCtr="0" anchor="ctr" bIns="0" lIns="0" spcFirstLastPara="1" rIns="0" wrap="square" tIns="0">
+            <a:spAutoFit/>
+          </a:bodyPr>
+          <a:lstStyle/>
           <a:p>
             <a:pPr indent="0" lvl="0" marL="0" marR="0" rtl="0" algn="l">
               <a:lnSpc>
-                <a:spcPct val="105000"/>
-              </a:lnSpc>
-              <a:spcBef>
-                <a:spcPts val="900"/>
-              </a:spcBef>
-              <a:spcAft>
-                <a:spcPts val="0"/>
-              </a:spcAft>
-              <a:buClr>
-                <a:srgbClr val="000000"/>
-              </a:buClr>
-              <a:buSzPts val="1100"/>
-              <a:buFont typeface="Arial"/>
-              <a:buNone/>
-            </a:pPr>
-            <a:r>
-              <a:rPr b="0" i="0" lang="en-US" spc="0" sz="1100" u="none" cap="none" strike="noStrike">
-                <a:solidFill>
-                  <a:srgbClr val="191C1E"/>
+                <a:spcPct val="110000"/>
+              </a:lnSpc>
+              <a:spcBef>
+                <a:spcPts val="0"/>
+              </a:spcBef>
+              <a:spcAft>
+                <a:spcPts val="0"/>
+              </a:spcAft>
+              <a:buClr>
+                <a:srgbClr val="000000"/>
+              </a:buClr>
+              <a:buSzPts val="1800"/>
+              <a:buFont typeface="Arial"/>
+              <a:buNone/>
+            </a:pPr>
+            <a:r>
+              <a:rPr i="0" lang="en-US" spc="0" sz="1800" u="none" cap="none" strike="noStrike">
+                <a:solidFill>
+                  <a:schemeClr val="dk1"/>
                 </a:solidFill>
                 <a:latin typeface="Plus Jakarta Sans"/>
                 <a:ea typeface="Plus Jakarta Sans"/>
                 <a:cs typeface="Plus Jakarta Sans"/>
                 <a:sym typeface="Plus Jakarta Sans"/>
               </a:rPr>
-              <a:t>BADDELEY, Alan; EYSENCK, Michael W.; ANDERSON, Michael C. </a:t>
-            </a:r>
-            <a:r>
-              <a:rPr b="1" i="0" lang="en-US" spc="0" sz="1100" u="none" cap="none" strike="noStrike">
-                <a:solidFill>
-                  <a:srgbClr val="191C1E"/>
+              <a:t>Avaliação com pacientes idosos e polimedicados</a:t>
+            </a:r>
+            <a:endParaRPr i="0" spc="0" sz="1400" u="none" cap="none" strike="noStrike">
+              <a:solidFill>
+                <a:schemeClr val="dk1"/>
+              </a:solidFill>
+            </a:endParaRPr>
+          </a:p>
+        </p:txBody>
+      </p:sp>
+      <p:sp>
+        <p:nvSpPr>
+          <p:cNvPr id="407" name="Google Shape;407;p15"/>
+          <p:cNvSpPr/>
+          <p:nvPr/>
+        </p:nvSpPr>
+        <p:spPr>
+          <a:xfrm>
+            <a:off x="685800" y="2633472"/>
+            <a:ext cx="10820095" cy="713232"/>
+          </a:xfrm>
+          <a:prstGeom prst="roundRect">
+            <a:avLst>
+              <a:gd fmla="val 17948" name="adj"/>
+            </a:avLst>
+          </a:prstGeom>
+          <a:solidFill>
+            <a:srgbClr val="FFFFFF"/>
+          </a:solidFill>
+          <a:ln>
+            <a:noFill/>
+          </a:ln>
+        </p:spPr>
+        <p:txBody>
+          <a:bodyPr anchorCtr="0" anchor="ctr" bIns="45700" lIns="91425" spcFirstLastPara="1" rIns="91425" wrap="square" tIns="45700">
+            <a:noAutofit/>
+          </a:bodyPr>
+          <a:lstStyle/>
+          <a:p>
+            <a:pPr indent="0" lvl="0" marL="0" marR="0" rtl="0" algn="l">
+              <a:lnSpc>
+                <a:spcPct val="100000"/>
+              </a:lnSpc>
+              <a:spcBef>
+                <a:spcPts val="0"/>
+              </a:spcBef>
+              <a:spcAft>
+                <a:spcPts val="0"/>
+              </a:spcAft>
+              <a:buClr>
+                <a:srgbClr val="000000"/>
+              </a:buClr>
+              <a:buSzPts val="1800"/>
+              <a:buFont typeface="Arial"/>
+              <a:buNone/>
+            </a:pPr>
+            <a:r>
+              <a:t/>
+            </a:r>
+            <a:endParaRPr b="0" i="0" spc="0" sz="1800" u="none" cap="none" strike="noStrike">
+              <a:solidFill>
+                <a:schemeClr val="dk1"/>
+              </a:solidFill>
+              <a:latin typeface="Calibri"/>
+              <a:ea typeface="Calibri"/>
+              <a:cs typeface="Calibri"/>
+              <a:sym typeface="Calibri"/>
+            </a:endParaRPr>
+          </a:p>
+        </p:txBody>
+      </p:sp>
+      <p:sp>
+        <p:nvSpPr>
+          <p:cNvPr id="408" name="Google Shape;408;p15"/>
+          <p:cNvSpPr txBox="1"/>
+          <p:nvPr/>
+        </p:nvSpPr>
+        <p:spPr>
+          <a:xfrm>
+            <a:off x="1005840" y="2633472"/>
+            <a:ext cx="548640" cy="713232"/>
+          </a:xfrm>
+          <a:prstGeom prst="rect">
+            <a:avLst/>
+          </a:prstGeom>
+          <a:noFill/>
+          <a:ln>
+            <a:noFill/>
+          </a:ln>
+        </p:spPr>
+        <p:txBody>
+          <a:bodyPr anchorCtr="0" anchor="ctr" bIns="0" lIns="0" spcFirstLastPara="1" rIns="0" wrap="square" tIns="0">
+            <a:spAutoFit/>
+          </a:bodyPr>
+          <a:lstStyle/>
+          <a:p>
+            <a:pPr indent="0" lvl="0" marL="0" marR="0" rtl="0" algn="l">
+              <a:lnSpc>
+                <a:spcPct val="110000"/>
+              </a:lnSpc>
+              <a:spcBef>
+                <a:spcPts val="0"/>
+              </a:spcBef>
+              <a:spcAft>
+                <a:spcPts val="0"/>
+              </a:spcAft>
+              <a:buClr>
+                <a:srgbClr val="000000"/>
+              </a:buClr>
+              <a:buSzPts val="1700"/>
+              <a:buFont typeface="Arial"/>
+              <a:buNone/>
+            </a:pPr>
+            <a:r>
+              <a:rPr b="1" i="0" lang="en-US" spc="0" sz="1700" u="none" cap="none" strike="noStrike">
+                <a:solidFill>
+                  <a:srgbClr val="0B5FD9"/>
                 </a:solidFill>
                 <a:latin typeface="Plus Jakarta Sans"/>
                 <a:ea typeface="Plus Jakarta Sans"/>
                 <a:cs typeface="Plus Jakarta Sans"/>
                 <a:sym typeface="Plus Jakarta Sans"/>
               </a:rPr>
-              <a:t>Memória</a:t>
-            </a:r>
-            <a:r>
-              <a:rPr b="0" i="0" lang="en-US" spc="0" sz="1100" u="none" cap="none" strike="noStrike">
-                <a:solidFill>
-                  <a:srgbClr val="191C1E"/>
-                </a:solidFill>
-                <a:latin typeface="Plus Jakarta Sans"/>
-                <a:ea typeface="Plus Jakarta Sans"/>
-                <a:cs typeface="Plus Jakarta Sans"/>
-                <a:sym typeface="Plus Jakarta Sans"/>
-              </a:rPr>
-              <a:t>. Porto Alegre: Artmed, 2010.</a:t>
+              <a:t>2</a:t>
             </a:r>
             <a:endParaRPr b="0" i="0" spc="0" sz="1400" u="none" cap="none" strike="noStrike">
               <a:solidFill>
@@ -24407,26 +24251,52 @@
               <a:sym typeface="Arial"/>
             </a:endParaRPr>
           </a:p>
+        </p:txBody>
+      </p:sp>
+      <p:sp>
+        <p:nvSpPr>
+          <p:cNvPr id="409" name="Google Shape;409;p15"/>
+          <p:cNvSpPr txBox="1"/>
+          <p:nvPr/>
+        </p:nvSpPr>
+        <p:spPr>
+          <a:xfrm>
+            <a:off x="1554480" y="2633472"/>
+            <a:ext cx="6400800" cy="713232"/>
+          </a:xfrm>
+          <a:prstGeom prst="rect">
+            <a:avLst/>
+          </a:prstGeom>
+          <a:noFill/>
+          <a:ln>
+            <a:noFill/>
+          </a:ln>
+        </p:spPr>
+        <p:txBody>
+          <a:bodyPr anchorCtr="0" anchor="ctr" bIns="0" lIns="0" spcFirstLastPara="1" rIns="0" wrap="square" tIns="0">
+            <a:spAutoFit/>
+          </a:bodyPr>
+          <a:lstStyle/>
           <a:p>
             <a:pPr indent="0" lvl="0" marL="0" marR="0" rtl="0" algn="l">
               <a:lnSpc>
-                <a:spcPct val="105000"/>
-              </a:lnSpc>
-              <a:spcBef>
-                <a:spcPts val="900"/>
-              </a:spcBef>
-              <a:spcAft>
-                <a:spcPts val="0"/>
-              </a:spcAft>
-              <a:buClr>
-                <a:srgbClr val="000000"/>
-              </a:buClr>
-              <a:buSzPts val="1100"/>
-              <a:buFont typeface="Arial"/>
-              <a:buNone/>
-            </a:pPr>
-            <a:r>
-              <a:rPr b="0" i="0" lang="en-US" spc="0" sz="1100" u="none" cap="none" strike="noStrike">
+                <a:spcPct val="110000"/>
+              </a:lnSpc>
+              <a:spcBef>
+                <a:spcPts val="0"/>
+              </a:spcBef>
+              <a:spcAft>
+                <a:spcPts val="0"/>
+              </a:spcAft>
+              <a:buClr>
+                <a:srgbClr val="000000"/>
+              </a:buClr>
+              <a:buSzPts val="1800"/>
+              <a:buFont typeface="Arial"/>
+              <a:buNone/>
+            </a:pPr>
+            <a:r>
+              <a:rPr b="0" i="0" lang="en-US" spc="0" sz="1800" u="none" cap="none" strike="noStrike">
                 <a:solidFill>
                   <a:srgbClr val="191C1E"/>
                 </a:solidFill>
@@ -24435,7 +24305,7 @@
                 <a:cs typeface="Plus Jakarta Sans"/>
                 <a:sym typeface="Plus Jakarta Sans"/>
               </a:rPr>
-              <a:t>BRASIL. [Lei Geral de Proteção de Dados Pessoais (LGPD)]. Lei nº 13.709, de 14 de agosto de 2018. Brasília, DF: Presidência da República, 2018.</a:t>
+              <a:t>Alarme validado em outros fabricantes</a:t>
             </a:r>
             <a:endParaRPr b="0" i="0" spc="0" sz="1400" u="none" cap="none" strike="noStrike">
               <a:solidFill>
@@ -24447,59 +24317,122 @@
               <a:sym typeface="Arial"/>
             </a:endParaRPr>
           </a:p>
+        </p:txBody>
+      </p:sp>
+      <p:sp>
+        <p:nvSpPr>
+          <p:cNvPr id="410" name="Google Shape;410;p15"/>
+          <p:cNvSpPr/>
+          <p:nvPr/>
+        </p:nvSpPr>
+        <p:spPr>
+          <a:xfrm>
+            <a:off x="685800" y="3483864"/>
+            <a:ext cx="10820095" cy="713232"/>
+          </a:xfrm>
+          <a:prstGeom prst="roundRect">
+            <a:avLst>
+              <a:gd fmla="val 17948" name="adj"/>
+            </a:avLst>
+          </a:prstGeom>
+          <a:solidFill>
+            <a:srgbClr val="FFFFFF"/>
+          </a:solidFill>
+          <a:ln>
+            <a:noFill/>
+          </a:ln>
+        </p:spPr>
+        <p:txBody>
+          <a:bodyPr anchorCtr="0" anchor="ctr" bIns="45700" lIns="91425" spcFirstLastPara="1" rIns="91425" wrap="square" tIns="45700">
+            <a:noAutofit/>
+          </a:bodyPr>
+          <a:lstStyle/>
           <a:p>
             <a:pPr indent="0" lvl="0" marL="0" marR="0" rtl="0" algn="l">
               <a:lnSpc>
-                <a:spcPct val="105000"/>
-              </a:lnSpc>
-              <a:spcBef>
-                <a:spcPts val="900"/>
-              </a:spcBef>
-              <a:spcAft>
-                <a:spcPts val="0"/>
-              </a:spcAft>
-              <a:buClr>
-                <a:srgbClr val="000000"/>
-              </a:buClr>
-              <a:buSzPts val="1100"/>
-              <a:buFont typeface="Arial"/>
-              <a:buNone/>
-            </a:pPr>
-            <a:r>
-              <a:rPr b="0" i="0" lang="en-US" spc="0" sz="1100" u="none" cap="none" strike="noStrike">
-                <a:solidFill>
-                  <a:srgbClr val="191C1E"/>
+                <a:spcPct val="100000"/>
+              </a:lnSpc>
+              <a:spcBef>
+                <a:spcPts val="0"/>
+              </a:spcBef>
+              <a:spcAft>
+                <a:spcPts val="0"/>
+              </a:spcAft>
+              <a:buClr>
+                <a:srgbClr val="000000"/>
+              </a:buClr>
+              <a:buSzPts val="1800"/>
+              <a:buFont typeface="Arial"/>
+              <a:buNone/>
+            </a:pPr>
+            <a:r>
+              <a:t/>
+            </a:r>
+            <a:endParaRPr b="0" i="0" spc="0" sz="1800" u="none" cap="none" strike="noStrike">
+              <a:solidFill>
+                <a:schemeClr val="dk1"/>
+              </a:solidFill>
+              <a:latin typeface="Calibri"/>
+              <a:ea typeface="Calibri"/>
+              <a:cs typeface="Calibri"/>
+              <a:sym typeface="Calibri"/>
+            </a:endParaRPr>
+          </a:p>
+        </p:txBody>
+      </p:sp>
+      <p:sp>
+        <p:nvSpPr>
+          <p:cNvPr id="411" name="Google Shape;411;p15"/>
+          <p:cNvSpPr txBox="1"/>
+          <p:nvPr/>
+        </p:nvSpPr>
+        <p:spPr>
+          <a:xfrm>
+            <a:off x="1005840" y="3483864"/>
+            <a:ext cx="548640" cy="713232"/>
+          </a:xfrm>
+          <a:prstGeom prst="rect">
+            <a:avLst/>
+          </a:prstGeom>
+          <a:noFill/>
+          <a:ln>
+            <a:noFill/>
+          </a:ln>
+        </p:spPr>
+        <p:txBody>
+          <a:bodyPr anchorCtr="0" anchor="ctr" bIns="0" lIns="0" spcFirstLastPara="1" rIns="0" wrap="square" tIns="0">
+            <a:spAutoFit/>
+          </a:bodyPr>
+          <a:lstStyle/>
+          <a:p>
+            <a:pPr indent="0" lvl="0" marL="0" marR="0" rtl="0" algn="l">
+              <a:lnSpc>
+                <a:spcPct val="110000"/>
+              </a:lnSpc>
+              <a:spcBef>
+                <a:spcPts val="0"/>
+              </a:spcBef>
+              <a:spcAft>
+                <a:spcPts val="0"/>
+              </a:spcAft>
+              <a:buClr>
+                <a:srgbClr val="000000"/>
+              </a:buClr>
+              <a:buSzPts val="1700"/>
+              <a:buFont typeface="Arial"/>
+              <a:buNone/>
+            </a:pPr>
+            <a:r>
+              <a:rPr b="1" i="0" lang="en-US" spc="0" sz="1700" u="none" cap="none" strike="noStrike">
+                <a:solidFill>
+                  <a:srgbClr val="0B5FD9"/>
                 </a:solidFill>
                 <a:latin typeface="Plus Jakarta Sans"/>
                 <a:ea typeface="Plus Jakarta Sans"/>
                 <a:cs typeface="Plus Jakarta Sans"/>
                 <a:sym typeface="Plus Jakarta Sans"/>
               </a:rPr>
-              <a:t>KLEPPMANN, Martin. </a:t>
-            </a:r>
-            <a:r>
-              <a:rPr b="1" i="0" lang="en-US" spc="0" sz="1100" u="none" cap="none" strike="noStrike">
-                <a:solidFill>
-                  <a:srgbClr val="191C1E"/>
-                </a:solidFill>
-                <a:latin typeface="Plus Jakarta Sans"/>
-                <a:ea typeface="Plus Jakarta Sans"/>
-                <a:cs typeface="Plus Jakarta Sans"/>
-                <a:sym typeface="Plus Jakarta Sans"/>
-              </a:rPr>
-              <a:t>Designing data-intensive applications</a:t>
-            </a:r>
-            <a:r>
-              <a:rPr b="0" i="0" lang="en-US" spc="0" sz="1100" u="none" cap="none" strike="noStrike">
-                <a:solidFill>
-                  <a:srgbClr val="191C1E"/>
-                </a:solidFill>
-                <a:latin typeface="Plus Jakarta Sans"/>
-                <a:ea typeface="Plus Jakarta Sans"/>
-                <a:cs typeface="Plus Jakarta Sans"/>
-                <a:sym typeface="Plus Jakarta Sans"/>
-              </a:rPr>
-              <a:t>: the big ideas behind reliable, scalable, and maintainable systems. Sebastopol: O'Reilly Media, 2017.</a:t>
+              <a:t>3</a:t>
             </a:r>
             <a:endParaRPr b="0" i="0" spc="0" sz="1400" u="none" cap="none" strike="noStrike">
               <a:solidFill>
@@ -24511,26 +24444,52 @@
               <a:sym typeface="Arial"/>
             </a:endParaRPr>
           </a:p>
+        </p:txBody>
+      </p:sp>
+      <p:sp>
+        <p:nvSpPr>
+          <p:cNvPr id="412" name="Google Shape;412;p15"/>
+          <p:cNvSpPr txBox="1"/>
+          <p:nvPr/>
+        </p:nvSpPr>
+        <p:spPr>
+          <a:xfrm>
+            <a:off x="1554480" y="3483864"/>
+            <a:ext cx="6400800" cy="713232"/>
+          </a:xfrm>
+          <a:prstGeom prst="rect">
+            <a:avLst/>
+          </a:prstGeom>
+          <a:noFill/>
+          <a:ln>
+            <a:noFill/>
+          </a:ln>
+        </p:spPr>
+        <p:txBody>
+          <a:bodyPr anchorCtr="0" anchor="ctr" bIns="0" lIns="0" spcFirstLastPara="1" rIns="0" wrap="square" tIns="0">
+            <a:spAutoFit/>
+          </a:bodyPr>
+          <a:lstStyle/>
           <a:p>
             <a:pPr indent="0" lvl="0" marL="0" marR="0" rtl="0" algn="l">
               <a:lnSpc>
-                <a:spcPct val="105000"/>
-              </a:lnSpc>
-              <a:spcBef>
-                <a:spcPts val="900"/>
-              </a:spcBef>
-              <a:spcAft>
-                <a:spcPts val="0"/>
-              </a:spcAft>
-              <a:buClr>
-                <a:srgbClr val="000000"/>
-              </a:buClr>
-              <a:buSzPts val="1100"/>
-              <a:buFont typeface="Arial"/>
-              <a:buNone/>
-            </a:pPr>
-            <a:r>
-              <a:rPr b="0" i="0" lang="en-US" spc="0" sz="1100" u="none" cap="none" strike="noStrike">
+                <a:spcPct val="110000"/>
+              </a:lnSpc>
+              <a:spcBef>
+                <a:spcPts val="0"/>
+              </a:spcBef>
+              <a:spcAft>
+                <a:spcPts val="0"/>
+              </a:spcAft>
+              <a:buClr>
+                <a:srgbClr val="000000"/>
+              </a:buClr>
+              <a:buSzPts val="1800"/>
+              <a:buFont typeface="Arial"/>
+              <a:buNone/>
+            </a:pPr>
+            <a:r>
+              <a:rPr b="0" i="0" lang="en-US" spc="0" sz="1800" u="none" cap="none" strike="noStrike">
                 <a:solidFill>
                   <a:srgbClr val="191C1E"/>
                 </a:solidFill>
@@ -24539,31 +24498,7 @@
                 <a:cs typeface="Plus Jakarta Sans"/>
                 <a:sym typeface="Plus Jakarta Sans"/>
               </a:rPr>
-              <a:t>LOSHIN, David. </a:t>
-            </a:r>
-            <a:r>
-              <a:rPr b="1" i="0" lang="en-US" spc="0" sz="1100" u="none" cap="none" strike="noStrike">
-                <a:solidFill>
-                  <a:srgbClr val="191C1E"/>
-                </a:solidFill>
-                <a:latin typeface="Plus Jakarta Sans"/>
-                <a:ea typeface="Plus Jakarta Sans"/>
-                <a:cs typeface="Plus Jakarta Sans"/>
-                <a:sym typeface="Plus Jakarta Sans"/>
-              </a:rPr>
-              <a:t>Master data management</a:t>
-            </a:r>
-            <a:r>
-              <a:rPr b="0" i="0" lang="en-US" spc="0" sz="1100" u="none" cap="none" strike="noStrike">
-                <a:solidFill>
-                  <a:srgbClr val="191C1E"/>
-                </a:solidFill>
-                <a:latin typeface="Plus Jakarta Sans"/>
-                <a:ea typeface="Plus Jakarta Sans"/>
-                <a:cs typeface="Plus Jakarta Sans"/>
-                <a:sym typeface="Plus Jakarta Sans"/>
-              </a:rPr>
-              <a:t>. Burlington: Morgan Kaufmann, 2010.</a:t>
+              <a:t>Versão para iOS e publicação nas lojas</a:t>
             </a:r>
             <a:endParaRPr b="0" i="0" spc="0" sz="1400" u="none" cap="none" strike="noStrike">
               <a:solidFill>
@@ -24575,59 +24510,122 @@
               <a:sym typeface="Arial"/>
             </a:endParaRPr>
           </a:p>
+        </p:txBody>
+      </p:sp>
+      <p:sp>
+        <p:nvSpPr>
+          <p:cNvPr id="413" name="Google Shape;413;p15"/>
+          <p:cNvSpPr/>
+          <p:nvPr/>
+        </p:nvSpPr>
+        <p:spPr>
+          <a:xfrm>
+            <a:off x="685800" y="4334256"/>
+            <a:ext cx="10820095" cy="713232"/>
+          </a:xfrm>
+          <a:prstGeom prst="roundRect">
+            <a:avLst>
+              <a:gd fmla="val 17948" name="adj"/>
+            </a:avLst>
+          </a:prstGeom>
+          <a:solidFill>
+            <a:srgbClr val="FFFFFF"/>
+          </a:solidFill>
+          <a:ln>
+            <a:noFill/>
+          </a:ln>
+        </p:spPr>
+        <p:txBody>
+          <a:bodyPr anchorCtr="0" anchor="ctr" bIns="45700" lIns="91425" spcFirstLastPara="1" rIns="91425" wrap="square" tIns="45700">
+            <a:noAutofit/>
+          </a:bodyPr>
+          <a:lstStyle/>
           <a:p>
             <a:pPr indent="0" lvl="0" marL="0" marR="0" rtl="0" algn="l">
               <a:lnSpc>
-                <a:spcPct val="105000"/>
-              </a:lnSpc>
-              <a:spcBef>
-                <a:spcPts val="900"/>
-              </a:spcBef>
-              <a:spcAft>
-                <a:spcPts val="0"/>
-              </a:spcAft>
-              <a:buClr>
-                <a:srgbClr val="000000"/>
-              </a:buClr>
-              <a:buSzPts val="1100"/>
-              <a:buFont typeface="Arial"/>
-              <a:buNone/>
-            </a:pPr>
-            <a:r>
-              <a:rPr b="0" i="0" lang="en-US" spc="0" sz="1100" u="none" cap="none" strike="noStrike">
-                <a:solidFill>
-                  <a:srgbClr val="191C1E"/>
+                <a:spcPct val="100000"/>
+              </a:lnSpc>
+              <a:spcBef>
+                <a:spcPts val="0"/>
+              </a:spcBef>
+              <a:spcAft>
+                <a:spcPts val="0"/>
+              </a:spcAft>
+              <a:buClr>
+                <a:srgbClr val="000000"/>
+              </a:buClr>
+              <a:buSzPts val="1800"/>
+              <a:buFont typeface="Arial"/>
+              <a:buNone/>
+            </a:pPr>
+            <a:r>
+              <a:t/>
+            </a:r>
+            <a:endParaRPr b="0" i="0" spc="0" sz="1800" u="none" cap="none" strike="noStrike">
+              <a:solidFill>
+                <a:schemeClr val="dk1"/>
+              </a:solidFill>
+              <a:latin typeface="Calibri"/>
+              <a:ea typeface="Calibri"/>
+              <a:cs typeface="Calibri"/>
+              <a:sym typeface="Calibri"/>
+            </a:endParaRPr>
+          </a:p>
+        </p:txBody>
+      </p:sp>
+      <p:sp>
+        <p:nvSpPr>
+          <p:cNvPr id="414" name="Google Shape;414;p15"/>
+          <p:cNvSpPr txBox="1"/>
+          <p:nvPr/>
+        </p:nvSpPr>
+        <p:spPr>
+          <a:xfrm>
+            <a:off x="1005840" y="4334256"/>
+            <a:ext cx="548640" cy="713232"/>
+          </a:xfrm>
+          <a:prstGeom prst="rect">
+            <a:avLst/>
+          </a:prstGeom>
+          <a:noFill/>
+          <a:ln>
+            <a:noFill/>
+          </a:ln>
+        </p:spPr>
+        <p:txBody>
+          <a:bodyPr anchorCtr="0" anchor="ctr" bIns="0" lIns="0" spcFirstLastPara="1" rIns="0" wrap="square" tIns="0">
+            <a:spAutoFit/>
+          </a:bodyPr>
+          <a:lstStyle/>
+          <a:p>
+            <a:pPr indent="0" lvl="0" marL="0" marR="0" rtl="0" algn="l">
+              <a:lnSpc>
+                <a:spcPct val="110000"/>
+              </a:lnSpc>
+              <a:spcBef>
+                <a:spcPts val="0"/>
+              </a:spcBef>
+              <a:spcAft>
+                <a:spcPts val="0"/>
+              </a:spcAft>
+              <a:buClr>
+                <a:srgbClr val="000000"/>
+              </a:buClr>
+              <a:buSzPts val="1700"/>
+              <a:buFont typeface="Arial"/>
+              <a:buNone/>
+            </a:pPr>
+            <a:r>
+              <a:rPr b="1" i="0" lang="en-US" spc="0" sz="1700" u="none" cap="none" strike="noStrike">
+                <a:solidFill>
+                  <a:srgbClr val="0B5FD9"/>
                 </a:solidFill>
                 <a:latin typeface="Plus Jakarta Sans"/>
                 <a:ea typeface="Plus Jakarta Sans"/>
                 <a:cs typeface="Plus Jakarta Sans"/>
                 <a:sym typeface="Plus Jakarta Sans"/>
               </a:rPr>
-              <a:t>MARTIN, Robert C. </a:t>
-            </a:r>
-            <a:r>
-              <a:rPr b="1" i="0" lang="en-US" spc="0" sz="1100" u="none" cap="none" strike="noStrike">
-                <a:solidFill>
-                  <a:srgbClr val="191C1E"/>
-                </a:solidFill>
-                <a:latin typeface="Plus Jakarta Sans"/>
-                <a:ea typeface="Plus Jakarta Sans"/>
-                <a:cs typeface="Plus Jakarta Sans"/>
-                <a:sym typeface="Plus Jakarta Sans"/>
-              </a:rPr>
-              <a:t>Arquitetura limpa</a:t>
-            </a:r>
-            <a:r>
-              <a:rPr b="0" i="0" lang="en-US" spc="0" sz="1100" u="none" cap="none" strike="noStrike">
-                <a:solidFill>
-                  <a:srgbClr val="191C1E"/>
-                </a:solidFill>
-                <a:latin typeface="Plus Jakarta Sans"/>
-                <a:ea typeface="Plus Jakarta Sans"/>
-                <a:cs typeface="Plus Jakarta Sans"/>
-                <a:sym typeface="Plus Jakarta Sans"/>
-              </a:rPr>
-              <a:t>: o guia do artesão para estrutura e design de software. Rio de Janeiro: Alta Books, 2019.</a:t>
+              <a:t>4</a:t>
             </a:r>
             <a:endParaRPr b="0" i="0" spc="0" sz="1400" u="none" cap="none" strike="noStrike">
               <a:solidFill>
@@ -24643,14 +24641,14 @@
       </p:sp>
       <p:sp>
         <p:nvSpPr>
-          <p:cNvPr id="419" name="Google Shape;419;p16"/>
+          <p:cNvPr id="415" name="Google Shape;415;p15"/>
           <p:cNvSpPr txBox="1"/>
           <p:nvPr/>
         </p:nvSpPr>
         <p:spPr>
           <a:xfrm>
-            <a:off x="6217920" y="1005840"/>
-            <a:ext cx="5257800" cy="5120640"/>
+            <a:off x="1554480" y="4334256"/>
+            <a:ext cx="9144000" cy="713232"/>
           </a:xfrm>
           <a:prstGeom prst="rect">
             <a:avLst/>
@@ -24661,30 +24659,30 @@
           </a:ln>
         </p:spPr>
         <p:txBody>
-          <a:bodyPr anchorCtr="0" anchor="t" bIns="0" lIns="0" spcFirstLastPara="1" rIns="0" wrap="square" tIns="0">
+          <a:bodyPr anchorCtr="0" anchor="ctr" bIns="0" lIns="0" spcFirstLastPara="1" rIns="0" wrap="square" tIns="0">
             <a:spAutoFit/>
           </a:bodyPr>
           <a:lstStyle/>
           <a:p>
             <a:pPr indent="0" lvl="0" marL="0" marR="0" rtl="0" algn="l">
               <a:lnSpc>
-                <a:spcPct val="105000"/>
-              </a:lnSpc>
-              <a:spcBef>
-                <a:spcPts val="0"/>
-              </a:spcBef>
-              <a:spcAft>
-                <a:spcPts val="0"/>
-              </a:spcAft>
-              <a:buClr>
-                <a:srgbClr val="000000"/>
-              </a:buClr>
-              <a:buSzPts val="1100"/>
-              <a:buFont typeface="Arial"/>
-              <a:buNone/>
-            </a:pPr>
-            <a:r>
-              <a:rPr b="0" i="0" lang="en-US" spc="0" sz="1100" u="none" cap="none" strike="noStrike">
+                <a:spcPct val="110000"/>
+              </a:lnSpc>
+              <a:spcBef>
+                <a:spcPts val="0"/>
+              </a:spcBef>
+              <a:spcAft>
+                <a:spcPts val="0"/>
+              </a:spcAft>
+              <a:buClr>
+                <a:srgbClr val="000000"/>
+              </a:buClr>
+              <a:buSzPts val="1800"/>
+              <a:buFont typeface="Arial"/>
+              <a:buNone/>
+            </a:pPr>
+            <a:r>
+              <a:rPr b="0" i="0" lang="en-US" spc="0" sz="1800" u="none" cap="none" strike="noStrike">
                 <a:solidFill>
                   <a:srgbClr val="191C1E"/>
                 </a:solidFill>
@@ -24693,31 +24691,7 @@
                 <a:cs typeface="Plus Jakarta Sans"/>
                 <a:sym typeface="Plus Jakarta Sans"/>
               </a:rPr>
-              <a:t>MEDISAFE. </a:t>
-            </a:r>
-            <a:r>
-              <a:rPr b="1" i="0" lang="en-US" spc="0" sz="1100" u="none" cap="none" strike="noStrike">
-                <a:solidFill>
-                  <a:srgbClr val="191C1E"/>
-                </a:solidFill>
-                <a:latin typeface="Plus Jakarta Sans"/>
-                <a:ea typeface="Plus Jakarta Sans"/>
-                <a:cs typeface="Plus Jakarta Sans"/>
-                <a:sym typeface="Plus Jakarta Sans"/>
-              </a:rPr>
-              <a:t>Medisafe</a:t>
-            </a:r>
-            <a:r>
-              <a:rPr b="0" i="0" lang="en-US" spc="0" sz="1100" u="none" cap="none" strike="noStrike">
-                <a:solidFill>
-                  <a:srgbClr val="191C1E"/>
-                </a:solidFill>
-                <a:latin typeface="Plus Jakarta Sans"/>
-                <a:ea typeface="Plus Jakarta Sans"/>
-                <a:cs typeface="Plus Jakarta Sans"/>
-                <a:sym typeface="Plus Jakarta Sans"/>
-              </a:rPr>
-              <a:t>: medication management. 2026. Disponível em: https://www.medisafe.com. Acesso em: 20 ago. 2026.</a:t>
+              <a:t>Acesso de consulta para médicos e cuidadores</a:t>
             </a:r>
             <a:endParaRPr b="0" i="0" spc="0" sz="1400" u="none" cap="none" strike="noStrike">
               <a:solidFill>
@@ -24729,59 +24703,122 @@
               <a:sym typeface="Arial"/>
             </a:endParaRPr>
           </a:p>
+        </p:txBody>
+      </p:sp>
+      <p:sp>
+        <p:nvSpPr>
+          <p:cNvPr id="416" name="Google Shape;416;p15"/>
+          <p:cNvSpPr/>
+          <p:nvPr/>
+        </p:nvSpPr>
+        <p:spPr>
+          <a:xfrm>
+            <a:off x="685800" y="5184648"/>
+            <a:ext cx="10820095" cy="713232"/>
+          </a:xfrm>
+          <a:prstGeom prst="roundRect">
+            <a:avLst>
+              <a:gd fmla="val 17948" name="adj"/>
+            </a:avLst>
+          </a:prstGeom>
+          <a:solidFill>
+            <a:srgbClr val="FFFFFF"/>
+          </a:solidFill>
+          <a:ln>
+            <a:noFill/>
+          </a:ln>
+        </p:spPr>
+        <p:txBody>
+          <a:bodyPr anchorCtr="0" anchor="ctr" bIns="45700" lIns="91425" spcFirstLastPara="1" rIns="91425" wrap="square" tIns="45700">
+            <a:noAutofit/>
+          </a:bodyPr>
+          <a:lstStyle/>
           <a:p>
             <a:pPr indent="0" lvl="0" marL="0" marR="0" rtl="0" algn="l">
               <a:lnSpc>
-                <a:spcPct val="105000"/>
-              </a:lnSpc>
-              <a:spcBef>
-                <a:spcPts val="900"/>
-              </a:spcBef>
-              <a:spcAft>
-                <a:spcPts val="0"/>
-              </a:spcAft>
-              <a:buClr>
-                <a:srgbClr val="000000"/>
-              </a:buClr>
-              <a:buSzPts val="1100"/>
-              <a:buFont typeface="Arial"/>
-              <a:buNone/>
-            </a:pPr>
-            <a:r>
-              <a:rPr b="0" i="0" lang="en-US" spc="0" sz="1100" u="none" cap="none" strike="noStrike">
-                <a:solidFill>
-                  <a:srgbClr val="191C1E"/>
+                <a:spcPct val="100000"/>
+              </a:lnSpc>
+              <a:spcBef>
+                <a:spcPts val="0"/>
+              </a:spcBef>
+              <a:spcAft>
+                <a:spcPts val="0"/>
+              </a:spcAft>
+              <a:buClr>
+                <a:srgbClr val="000000"/>
+              </a:buClr>
+              <a:buSzPts val="1800"/>
+              <a:buFont typeface="Arial"/>
+              <a:buNone/>
+            </a:pPr>
+            <a:r>
+              <a:t/>
+            </a:r>
+            <a:endParaRPr b="0" i="0" spc="0" sz="1800" u="none" cap="none" strike="noStrike">
+              <a:solidFill>
+                <a:schemeClr val="dk1"/>
+              </a:solidFill>
+              <a:latin typeface="Calibri"/>
+              <a:ea typeface="Calibri"/>
+              <a:cs typeface="Calibri"/>
+              <a:sym typeface="Calibri"/>
+            </a:endParaRPr>
+          </a:p>
+        </p:txBody>
+      </p:sp>
+      <p:sp>
+        <p:nvSpPr>
+          <p:cNvPr id="417" name="Google Shape;417;p15"/>
+          <p:cNvSpPr txBox="1"/>
+          <p:nvPr/>
+        </p:nvSpPr>
+        <p:spPr>
+          <a:xfrm>
+            <a:off x="1005840" y="5184648"/>
+            <a:ext cx="548640" cy="713232"/>
+          </a:xfrm>
+          <a:prstGeom prst="rect">
+            <a:avLst/>
+          </a:prstGeom>
+          <a:noFill/>
+          <a:ln>
+            <a:noFill/>
+          </a:ln>
+        </p:spPr>
+        <p:txBody>
+          <a:bodyPr anchorCtr="0" anchor="ctr" bIns="0" lIns="0" spcFirstLastPara="1" rIns="0" wrap="square" tIns="0">
+            <a:spAutoFit/>
+          </a:bodyPr>
+          <a:lstStyle/>
+          <a:p>
+            <a:pPr indent="0" lvl="0" marL="0" marR="0" rtl="0" algn="l">
+              <a:lnSpc>
+                <a:spcPct val="110000"/>
+              </a:lnSpc>
+              <a:spcBef>
+                <a:spcPts val="0"/>
+              </a:spcBef>
+              <a:spcAft>
+                <a:spcPts val="0"/>
+              </a:spcAft>
+              <a:buClr>
+                <a:srgbClr val="000000"/>
+              </a:buClr>
+              <a:buSzPts val="1700"/>
+              <a:buFont typeface="Arial"/>
+              <a:buNone/>
+            </a:pPr>
+            <a:r>
+              <a:rPr b="1" i="0" lang="en-US" spc="0" sz="1700" u="none" cap="none" strike="noStrike">
+                <a:solidFill>
+                  <a:srgbClr val="0B5FD9"/>
                 </a:solidFill>
                 <a:latin typeface="Plus Jakarta Sans"/>
                 <a:ea typeface="Plus Jakarta Sans"/>
                 <a:cs typeface="Plus Jakarta Sans"/>
                 <a:sym typeface="Plus Jakarta Sans"/>
               </a:rPr>
-              <a:t>MYTHERAPY. </a:t>
-            </a:r>
-            <a:r>
-              <a:rPr b="1" i="0" lang="en-US" spc="0" sz="1100" u="none" cap="none" strike="noStrike">
-                <a:solidFill>
-                  <a:srgbClr val="191C1E"/>
-                </a:solidFill>
-                <a:latin typeface="Plus Jakarta Sans"/>
-                <a:ea typeface="Plus Jakarta Sans"/>
-                <a:cs typeface="Plus Jakarta Sans"/>
-                <a:sym typeface="Plus Jakarta Sans"/>
-              </a:rPr>
-              <a:t>MyTherapy</a:t>
-            </a:r>
-            <a:r>
-              <a:rPr b="0" i="0" lang="en-US" spc="0" sz="1100" u="none" cap="none" strike="noStrike">
-                <a:solidFill>
-                  <a:srgbClr val="191C1E"/>
-                </a:solidFill>
-                <a:latin typeface="Plus Jakarta Sans"/>
-                <a:ea typeface="Plus Jakarta Sans"/>
-                <a:cs typeface="Plus Jakarta Sans"/>
-                <a:sym typeface="Plus Jakarta Sans"/>
-              </a:rPr>
-              <a:t>: medication reminder and pill tracker. 2026. Disponível em: https://www.mytherapyapp.com. Acesso em: 20 ago. 2026.</a:t>
+              <a:t>5</a:t>
             </a:r>
             <a:endParaRPr b="0" i="0" spc="0" sz="1400" u="none" cap="none" strike="noStrike">
               <a:solidFill>
@@ -24793,26 +24830,52 @@
               <a:sym typeface="Arial"/>
             </a:endParaRPr>
           </a:p>
+        </p:txBody>
+      </p:sp>
+      <p:sp>
+        <p:nvSpPr>
+          <p:cNvPr id="418" name="Google Shape;418;p15"/>
+          <p:cNvSpPr txBox="1"/>
+          <p:nvPr/>
+        </p:nvSpPr>
+        <p:spPr>
+          <a:xfrm>
+            <a:off x="1554480" y="5184648"/>
+            <a:ext cx="9144000" cy="713232"/>
+          </a:xfrm>
+          <a:prstGeom prst="rect">
+            <a:avLst/>
+          </a:prstGeom>
+          <a:noFill/>
+          <a:ln>
+            <a:noFill/>
+          </a:ln>
+        </p:spPr>
+        <p:txBody>
+          <a:bodyPr anchorCtr="0" anchor="ctr" bIns="0" lIns="0" spcFirstLastPara="1" rIns="0" wrap="square" tIns="0">
+            <a:spAutoFit/>
+          </a:bodyPr>
+          <a:lstStyle/>
           <a:p>
             <a:pPr indent="0" lvl="0" marL="0" marR="0" rtl="0" algn="l">
               <a:lnSpc>
-                <a:spcPct val="105000"/>
-              </a:lnSpc>
-              <a:spcBef>
-                <a:spcPts val="900"/>
-              </a:spcBef>
-              <a:spcAft>
-                <a:spcPts val="0"/>
-              </a:spcAft>
-              <a:buClr>
-                <a:srgbClr val="000000"/>
-              </a:buClr>
-              <a:buSzPts val="1100"/>
-              <a:buFont typeface="Arial"/>
-              <a:buNone/>
-            </a:pPr>
-            <a:r>
-              <a:rPr b="0" i="0" lang="en-US" spc="0" sz="1100" u="none" cap="none" strike="noStrike">
+                <a:spcPct val="110000"/>
+              </a:lnSpc>
+              <a:spcBef>
+                <a:spcPts val="0"/>
+              </a:spcBef>
+              <a:spcAft>
+                <a:spcPts val="0"/>
+              </a:spcAft>
+              <a:buClr>
+                <a:srgbClr val="000000"/>
+              </a:buClr>
+              <a:buSzPts val="1800"/>
+              <a:buFont typeface="Arial"/>
+              <a:buNone/>
+            </a:pPr>
+            <a:r>
+              <a:rPr b="0" i="0" lang="en-US" spc="0" sz="1800" u="none" cap="none" strike="noStrike">
                 <a:solidFill>
                   <a:srgbClr val="191C1E"/>
                 </a:solidFill>
@@ -24821,31 +24884,7 @@
                 <a:cs typeface="Plus Jakarta Sans"/>
                 <a:sym typeface="Plus Jakarta Sans"/>
               </a:rPr>
-              <a:t>NIELSEN, Jakob. </a:t>
-            </a:r>
-            <a:r>
-              <a:rPr b="1" i="0" lang="en-US" spc="0" sz="1100" u="none" cap="none" strike="noStrike">
-                <a:solidFill>
-                  <a:srgbClr val="191C1E"/>
-                </a:solidFill>
-                <a:latin typeface="Plus Jakarta Sans"/>
-                <a:ea typeface="Plus Jakarta Sans"/>
-                <a:cs typeface="Plus Jakarta Sans"/>
-                <a:sym typeface="Plus Jakarta Sans"/>
-              </a:rPr>
-              <a:t>Usability engineering</a:t>
-            </a:r>
-            <a:r>
-              <a:rPr b="0" i="0" lang="en-US" spc="0" sz="1100" u="none" cap="none" strike="noStrike">
-                <a:solidFill>
-                  <a:srgbClr val="191C1E"/>
-                </a:solidFill>
-                <a:latin typeface="Plus Jakarta Sans"/>
-                <a:ea typeface="Plus Jakarta Sans"/>
-                <a:cs typeface="Plus Jakarta Sans"/>
-                <a:sym typeface="Plus Jakarta Sans"/>
-              </a:rPr>
-              <a:t>. San Diego: Academic Press, 1994.</a:t>
+              <a:t>Cuidado organizado por tratamento, como na oncologia</a:t>
             </a:r>
             <a:endParaRPr b="0" i="0" spc="0" sz="1400" u="none" cap="none" strike="noStrike">
               <a:solidFill>
@@ -24857,59 +24896,123 @@
               <a:sym typeface="Arial"/>
             </a:endParaRPr>
           </a:p>
-          <a:p>
-            <a:pPr indent="0" lvl="0" marL="0" marR="0" rtl="0" algn="l">
-              <a:lnSpc>
-                <a:spcPct val="105000"/>
-              </a:lnSpc>
-              <a:spcBef>
-                <a:spcPts val="900"/>
-              </a:spcBef>
-              <a:spcAft>
-                <a:spcPts val="0"/>
-              </a:spcAft>
-              <a:buClr>
-                <a:srgbClr val="000000"/>
-              </a:buClr>
-              <a:buSzPts val="1100"/>
-              <a:buFont typeface="Arial"/>
-              <a:buNone/>
-            </a:pPr>
-            <a:r>
-              <a:rPr b="0" i="0" lang="en-US" spc="0" sz="1100" u="none" cap="none" strike="noStrike">
-                <a:solidFill>
-                  <a:srgbClr val="191C1E"/>
+        </p:txBody>
+      </p:sp>
+      <p:sp>
+        <p:nvSpPr>
+          <p:cNvPr id="912" name="Mapill;912"/>
+          <p:cNvSpPr txBox="1"/>
+          <p:nvPr/>
+        </p:nvSpPr>
+        <p:spPr>
+          <a:xfrm>
+            <a:off x="8046720" y="1783080"/>
+            <a:ext cx="3200400" cy="713232"/>
+          </a:xfrm>
+          <a:prstGeom prst="rect">
+            <a:avLst/>
+          </a:prstGeom>
+          <a:noFill/>
+          <a:ln>
+            <a:noFill/>
+          </a:ln>
+        </p:spPr>
+        <p:txBody>
+          <a:bodyPr anchorCtr="0" anchor="ctr" bIns="0" lIns="0" spcFirstLastPara="1" rIns="0" wrap="square" tIns="0">
+            <a:spAutoFit/>
+          </a:bodyPr>
+          <a:lstStyle/>
+          <a:p>
+            <a:pPr indent="0" lvl="0" marL="0" marR="0" rtl="0" algn="r">
+              <a:lnSpc>
+                <a:spcPct val="110000"/>
+              </a:lnSpc>
+              <a:spcBef>
+                <a:spcPts val="0"/>
+              </a:spcBef>
+              <a:spcAft>
+                <a:spcPts val="0"/>
+              </a:spcAft>
+              <a:buClr>
+                <a:srgbClr val="000000"/>
+              </a:buClr>
+              <a:buSzPts val="1800"/>
+              <a:buFont typeface="Arial"/>
+              <a:buNone/>
+            </a:pPr>
+            <a:r>
+              <a:rPr i="0" lang="en-US" spc="0" sz="1300" u="none" cap="none" strike="noStrike">
+                <a:solidFill>
+                  <a:srgbClr val="545F73"/>
                 </a:solidFill>
                 <a:latin typeface="Plus Jakarta Sans"/>
                 <a:ea typeface="Plus Jakarta Sans"/>
                 <a:cs typeface="Plus Jakarta Sans"/>
                 <a:sym typeface="Plus Jakarta Sans"/>
               </a:rPr>
-              <a:t>RISKO, Evan F.; GILBERT, Sam J. Cognitive offloading. </a:t>
-            </a:r>
-            <a:r>
-              <a:rPr b="1" i="0" lang="en-US" spc="0" sz="1100" u="none" cap="none" strike="noStrike">
-                <a:solidFill>
-                  <a:srgbClr val="191C1E"/>
+              <a:t>limitação · sem teste com usuários</a:t>
+            </a:r>
+            <a:endParaRPr i="0" spc="0" sz="1400" u="none" cap="none" strike="noStrike">
+              <a:solidFill>
+                <a:schemeClr val="dk1"/>
+              </a:solidFill>
+            </a:endParaRPr>
+          </a:p>
+        </p:txBody>
+      </p:sp>
+      <p:sp>
+        <p:nvSpPr>
+          <p:cNvPr id="913" name="Mapill;913"/>
+          <p:cNvSpPr txBox="1"/>
+          <p:nvPr/>
+        </p:nvSpPr>
+        <p:spPr>
+          <a:xfrm>
+            <a:off x="8046720" y="2633472"/>
+            <a:ext cx="3200400" cy="713232"/>
+          </a:xfrm>
+          <a:prstGeom prst="rect">
+            <a:avLst/>
+          </a:prstGeom>
+          <a:noFill/>
+          <a:ln>
+            <a:noFill/>
+          </a:ln>
+        </p:spPr>
+        <p:txBody>
+          <a:bodyPr anchorCtr="0" anchor="ctr" bIns="0" lIns="0" spcFirstLastPara="1" rIns="0" wrap="square" tIns="0">
+            <a:spAutoFit/>
+          </a:bodyPr>
+          <a:lstStyle/>
+          <a:p>
+            <a:pPr indent="0" lvl="0" marL="0" marR="0" rtl="0" algn="r">
+              <a:lnSpc>
+                <a:spcPct val="110000"/>
+              </a:lnSpc>
+              <a:spcBef>
+                <a:spcPts val="0"/>
+              </a:spcBef>
+              <a:spcAft>
+                <a:spcPts val="0"/>
+              </a:spcAft>
+              <a:buClr>
+                <a:srgbClr val="000000"/>
+              </a:buClr>
+              <a:buSzPts val="1800"/>
+              <a:buFont typeface="Arial"/>
+              <a:buNone/>
+            </a:pPr>
+            <a:r>
+              <a:rPr b="0" i="0" lang="en-US" spc="0" sz="1300" u="none" cap="none" strike="noStrike">
+                <a:solidFill>
+                  <a:srgbClr val="545F73"/>
                 </a:solidFill>
                 <a:latin typeface="Plus Jakarta Sans"/>
                 <a:ea typeface="Plus Jakarta Sans"/>
                 <a:cs typeface="Plus Jakarta Sans"/>
                 <a:sym typeface="Plus Jakarta Sans"/>
               </a:rPr>
-              <a:t>Trends in Cognitive Sciences</a:t>
-            </a:r>
-            <a:r>
-              <a:rPr b="0" i="0" lang="en-US" spc="0" sz="1100" u="none" cap="none" strike="noStrike">
-                <a:solidFill>
-                  <a:srgbClr val="191C1E"/>
-                </a:solidFill>
-                <a:latin typeface="Plus Jakarta Sans"/>
-                <a:ea typeface="Plus Jakarta Sans"/>
-                <a:cs typeface="Plus Jakarta Sans"/>
-                <a:sym typeface="Plus Jakarta Sans"/>
-              </a:rPr>
-              <a:t>, v. 20, n. 9, p. 676-688, 2016.</a:t>
+              <a:t>limitação · um só modelo de aparelho</a:t>
             </a:r>
             <a:endParaRPr b="0" i="0" spc="0" sz="1400" u="none" cap="none" strike="noStrike">
               <a:solidFill>
@@ -24921,123 +25024,61 @@
               <a:sym typeface="Arial"/>
             </a:endParaRPr>
           </a:p>
-          <a:p>
-            <a:pPr indent="0" lvl="0" marL="0" marR="0" rtl="0" algn="l">
-              <a:lnSpc>
-                <a:spcPct val="105000"/>
-              </a:lnSpc>
-              <a:spcBef>
-                <a:spcPts val="900"/>
-              </a:spcBef>
-              <a:spcAft>
-                <a:spcPts val="0"/>
-              </a:spcAft>
-              <a:buClr>
-                <a:srgbClr val="000000"/>
-              </a:buClr>
-              <a:buSzPts val="1100"/>
-              <a:buFont typeface="Arial"/>
-              <a:buNone/>
-            </a:pPr>
-            <a:r>
-              <a:rPr b="0" i="0" lang="en-US" spc="0" sz="1100" u="none" cap="none" strike="noStrike">
-                <a:solidFill>
-                  <a:srgbClr val="191C1E"/>
+        </p:txBody>
+      </p:sp>
+      <p:sp>
+        <p:nvSpPr>
+          <p:cNvPr id="914" name="Mapill;914"/>
+          <p:cNvSpPr txBox="1"/>
+          <p:nvPr/>
+        </p:nvSpPr>
+        <p:spPr>
+          <a:xfrm>
+            <a:off x="8046720" y="3483864"/>
+            <a:ext cx="3200400" cy="713232"/>
+          </a:xfrm>
+          <a:prstGeom prst="rect">
+            <a:avLst/>
+          </a:prstGeom>
+          <a:noFill/>
+          <a:ln>
+            <a:noFill/>
+          </a:ln>
+        </p:spPr>
+        <p:txBody>
+          <a:bodyPr anchorCtr="0" anchor="ctr" bIns="0" lIns="0" spcFirstLastPara="1" rIns="0" wrap="square" tIns="0">
+            <a:spAutoFit/>
+          </a:bodyPr>
+          <a:lstStyle/>
+          <a:p>
+            <a:pPr indent="0" lvl="0" marL="0" marR="0" rtl="0" algn="r">
+              <a:lnSpc>
+                <a:spcPct val="110000"/>
+              </a:lnSpc>
+              <a:spcBef>
+                <a:spcPts val="0"/>
+              </a:spcBef>
+              <a:spcAft>
+                <a:spcPts val="0"/>
+              </a:spcAft>
+              <a:buClr>
+                <a:srgbClr val="000000"/>
+              </a:buClr>
+              <a:buSzPts val="1800"/>
+              <a:buFont typeface="Arial"/>
+              <a:buNone/>
+            </a:pPr>
+            <a:r>
+              <a:rPr b="0" i="0" lang="en-US" spc="0" sz="1300" u="none" cap="none" strike="noStrike">
+                <a:solidFill>
+                  <a:srgbClr val="545F73"/>
                 </a:solidFill>
                 <a:latin typeface="Plus Jakarta Sans"/>
                 <a:ea typeface="Plus Jakarta Sans"/>
                 <a:cs typeface="Plus Jakarta Sans"/>
                 <a:sym typeface="Plus Jakarta Sans"/>
               </a:rPr>
-              <a:t>WORLD HEALTH ORGANIZATION (WHO). </a:t>
-            </a:r>
-            <a:r>
-              <a:rPr b="1" i="0" lang="en-US" spc="0" sz="1100" u="none" cap="none" strike="noStrike">
-                <a:solidFill>
-                  <a:srgbClr val="191C1E"/>
-                </a:solidFill>
-                <a:latin typeface="Plus Jakarta Sans"/>
-                <a:ea typeface="Plus Jakarta Sans"/>
-                <a:cs typeface="Plus Jakarta Sans"/>
-                <a:sym typeface="Plus Jakarta Sans"/>
-              </a:rPr>
-              <a:t>Adherence to long-term therapies</a:t>
-            </a:r>
-            <a:r>
-              <a:rPr b="0" i="0" lang="en-US" spc="0" sz="1100" u="none" cap="none" strike="noStrike">
-                <a:solidFill>
-                  <a:srgbClr val="191C1E"/>
-                </a:solidFill>
-                <a:latin typeface="Plus Jakarta Sans"/>
-                <a:ea typeface="Plus Jakarta Sans"/>
-                <a:cs typeface="Plus Jakarta Sans"/>
-                <a:sym typeface="Plus Jakarta Sans"/>
-              </a:rPr>
-              <a:t>: evidence for action. Geneva: World Health Organization, 2003.</a:t>
-            </a:r>
-            <a:endParaRPr b="0" i="0" spc="0" sz="1400" u="none" cap="none" strike="noStrike">
-              <a:solidFill>
-                <a:srgbClr val="000000"/>
-              </a:solidFill>
-              <a:latin typeface="Arial"/>
-              <a:ea typeface="Arial"/>
-              <a:cs typeface="Arial"/>
-              <a:sym typeface="Arial"/>
-            </a:endParaRPr>
-          </a:p>
-          <a:p>
-            <a:pPr indent="0" lvl="0" marL="0" marR="0" rtl="0" algn="l">
-              <a:lnSpc>
-                <a:spcPct val="105000"/>
-              </a:lnSpc>
-              <a:spcBef>
-                <a:spcPts val="900"/>
-              </a:spcBef>
-              <a:spcAft>
-                <a:spcPts val="0"/>
-              </a:spcAft>
-              <a:buClr>
-                <a:srgbClr val="000000"/>
-              </a:buClr>
-              <a:buSzPts val="1100"/>
-              <a:buFont typeface="Arial"/>
-              <a:buNone/>
-            </a:pPr>
-            <a:r>
-              <a:rPr b="0" i="0" lang="en-US" spc="0" sz="1100" u="none" cap="none" strike="noStrike">
-                <a:solidFill>
-                  <a:srgbClr val="191C1E"/>
-                </a:solidFill>
-                <a:latin typeface="Plus Jakarta Sans"/>
-                <a:ea typeface="Plus Jakarta Sans"/>
-                <a:cs typeface="Plus Jakarta Sans"/>
-                <a:sym typeface="Plus Jakarta Sans"/>
-              </a:rPr>
-              <a:t>WORLD WIDE WEB CONSORTIUM (W3C). </a:t>
-            </a:r>
-            <a:r>
-              <a:rPr b="1" i="0" lang="en-US" spc="0" sz="1100" u="none" cap="none" strike="noStrike">
-                <a:solidFill>
-                  <a:srgbClr val="191C1E"/>
-                </a:solidFill>
-                <a:latin typeface="Plus Jakarta Sans"/>
-                <a:ea typeface="Plus Jakarta Sans"/>
-                <a:cs typeface="Plus Jakarta Sans"/>
-                <a:sym typeface="Plus Jakarta Sans"/>
-              </a:rPr>
-              <a:t>Web Content Accessibility Guidelines (WCAG) 2.1</a:t>
-            </a:r>
-            <a:r>
-              <a:rPr b="0" i="0" lang="en-US" spc="0" sz="1100" u="none" cap="none" strike="noStrike">
-                <a:solidFill>
-                  <a:srgbClr val="191C1E"/>
-                </a:solidFill>
-                <a:latin typeface="Plus Jakarta Sans"/>
-                <a:ea typeface="Plus Jakarta Sans"/>
-                <a:cs typeface="Plus Jakarta Sans"/>
-                <a:sym typeface="Plus Jakarta Sans"/>
-              </a:rPr>
-              <a:t>. Cambridge, MA: W3C, 2018. Disponível em: https://www.w3.org/TR/WCAG21/. Acesso em: 10 set. 2026.</a:t>
+              <a:t>limitação · só Android</a:t>
             </a:r>
             <a:endParaRPr b="0" i="0" spc="0" sz="1400" u="none" cap="none" strike="noStrike">
               <a:solidFill>
@@ -25071,7 +25112,7 @@
     </p:bg>
     <p:spTree>
       <p:nvGrpSpPr>
-        <p:cNvPr id="424" name="Shape 424"/>
+        <p:cNvPr id="423" name="Shape 423"/>
         <p:cNvGrpSpPr/>
         <p:nvPr/>
       </p:nvGrpSpPr>
@@ -25085,7 +25126,1033 @@
       </p:grpSpPr>
       <p:sp>
         <p:nvSpPr>
-          <p:cNvPr id="425" name="Google Shape;425;p17"/>
+          <p:cNvPr id="424" name="Google Shape;424;p16"/>
+          <p:cNvSpPr txBox="1"/>
+          <p:nvPr/>
+        </p:nvSpPr>
+        <p:spPr>
+          <a:xfrm>
+            <a:off x="685800" y="502920"/>
+            <a:ext cx="8229600" cy="274320"/>
+          </a:xfrm>
+          <a:prstGeom prst="rect">
+            <a:avLst/>
+          </a:prstGeom>
+          <a:noFill/>
+          <a:ln>
+            <a:noFill/>
+          </a:ln>
+        </p:spPr>
+        <p:txBody>
+          <a:bodyPr anchorCtr="0" anchor="t" bIns="0" lIns="0" spcFirstLastPara="1" rIns="0" wrap="square" tIns="0">
+            <a:spAutoFit/>
+          </a:bodyPr>
+          <a:lstStyle/>
+          <a:p>
+            <a:pPr indent="0" lvl="0" marL="0" marR="0" rtl="0" algn="l">
+              <a:lnSpc>
+                <a:spcPct val="110000"/>
+              </a:lnSpc>
+              <a:spcBef>
+                <a:spcPts val="0"/>
+              </a:spcBef>
+              <a:spcAft>
+                <a:spcPts val="0"/>
+              </a:spcAft>
+              <a:buClr>
+                <a:srgbClr val="000000"/>
+              </a:buClr>
+              <a:buSzPts val="1200"/>
+              <a:buFont typeface="Arial"/>
+              <a:buNone/>
+            </a:pPr>
+            <a:r>
+              <a:rPr b="1" i="0" lang="en-US" spc="200" sz="1200" u="none" cap="none" strike="noStrike">
+                <a:solidFill>
+                  <a:srgbClr val="0B5FD9"/>
+                </a:solidFill>
+                <a:latin typeface="Plus Jakarta Sans"/>
+                <a:ea typeface="Plus Jakarta Sans"/>
+                <a:cs typeface="Plus Jakarta Sans"/>
+                <a:sym typeface="Plus Jakarta Sans"/>
+              </a:rPr>
+              <a:t>REFERÊNCIAS</a:t>
+            </a:r>
+            <a:endParaRPr b="0" i="0" spc="0" sz="1400" u="none" cap="none" strike="noStrike">
+              <a:solidFill>
+                <a:srgbClr val="000000"/>
+              </a:solidFill>
+              <a:latin typeface="Arial"/>
+              <a:ea typeface="Arial"/>
+              <a:cs typeface="Arial"/>
+              <a:sym typeface="Arial"/>
+            </a:endParaRPr>
+          </a:p>
+        </p:txBody>
+      </p:sp>
+      <p:sp>
+        <p:nvSpPr>
+          <p:cNvPr id="425" name="Google Shape;425;p16"/>
+          <p:cNvSpPr txBox="1"/>
+          <p:nvPr/>
+        </p:nvSpPr>
+        <p:spPr>
+          <a:xfrm>
+            <a:off x="685800" y="6419088"/>
+            <a:ext cx="7315200" cy="228600"/>
+          </a:xfrm>
+          <a:prstGeom prst="rect">
+            <a:avLst/>
+          </a:prstGeom>
+          <a:noFill/>
+          <a:ln>
+            <a:noFill/>
+          </a:ln>
+        </p:spPr>
+        <p:txBody>
+          <a:bodyPr anchorCtr="0" anchor="t" bIns="0" lIns="0" spcFirstLastPara="1" rIns="0" wrap="square" tIns="0">
+            <a:spAutoFit/>
+          </a:bodyPr>
+          <a:lstStyle/>
+          <a:p>
+            <a:pPr indent="0" lvl="0" marL="0" marR="0" rtl="0" algn="l">
+              <a:lnSpc>
+                <a:spcPct val="110000"/>
+              </a:lnSpc>
+              <a:spcBef>
+                <a:spcPts val="0"/>
+              </a:spcBef>
+              <a:spcAft>
+                <a:spcPts val="0"/>
+              </a:spcAft>
+              <a:buClr>
+                <a:srgbClr val="000000"/>
+              </a:buClr>
+              <a:buSzPts val="1000"/>
+              <a:buFont typeface="Arial"/>
+              <a:buNone/>
+            </a:pPr>
+            <a:r>
+              <a:rPr b="0" i="0" lang="en-US" spc="0" sz="1000" u="none" cap="none" strike="noStrike">
+                <a:solidFill>
+                  <a:srgbClr val="545F73"/>
+                </a:solidFill>
+                <a:latin typeface="Plus Jakarta Sans"/>
+                <a:ea typeface="Plus Jakarta Sans"/>
+                <a:cs typeface="Plus Jakarta Sans"/>
+                <a:sym typeface="Plus Jakarta Sans"/>
+              </a:rPr>
+              <a:t>Mapill  ·  Gabriel Steffens  ·  Sistemas de Informação, UNIDAVI</a:t>
+            </a:r>
+            <a:endParaRPr b="0" i="0" spc="0" sz="1400" u="none" cap="none" strike="noStrike">
+              <a:solidFill>
+                <a:srgbClr val="000000"/>
+              </a:solidFill>
+              <a:latin typeface="Arial"/>
+              <a:ea typeface="Arial"/>
+              <a:cs typeface="Arial"/>
+              <a:sym typeface="Arial"/>
+            </a:endParaRPr>
+          </a:p>
+        </p:txBody>
+      </p:sp>
+      <p:sp>
+        <p:nvSpPr>
+          <p:cNvPr id="426" name="Google Shape;426;p16"/>
+          <p:cNvSpPr txBox="1"/>
+          <p:nvPr/>
+        </p:nvSpPr>
+        <p:spPr>
+          <a:xfrm>
+            <a:off x="10591495" y="6419088"/>
+            <a:ext cx="914400" cy="228600"/>
+          </a:xfrm>
+          <a:prstGeom prst="rect">
+            <a:avLst/>
+          </a:prstGeom>
+          <a:noFill/>
+          <a:ln>
+            <a:noFill/>
+          </a:ln>
+        </p:spPr>
+        <p:txBody>
+          <a:bodyPr anchorCtr="0" anchor="t" bIns="0" lIns="0" spcFirstLastPara="1" rIns="0" wrap="square" tIns="0">
+            <a:spAutoFit/>
+          </a:bodyPr>
+          <a:lstStyle/>
+          <a:p>
+            <a:pPr indent="0" lvl="0" marL="0" marR="0" rtl="0" algn="r">
+              <a:lnSpc>
+                <a:spcPct val="110000"/>
+              </a:lnSpc>
+              <a:spcBef>
+                <a:spcPts val="0"/>
+              </a:spcBef>
+              <a:spcAft>
+                <a:spcPts val="0"/>
+              </a:spcAft>
+              <a:buClr>
+                <a:srgbClr val="000000"/>
+              </a:buClr>
+              <a:buSzPts val="1000"/>
+              <a:buFont typeface="Arial"/>
+              <a:buNone/>
+            </a:pPr>
+            <a:r>
+              <a:rPr b="1" i="0" lang="en-US" spc="0" sz="1000" u="none" cap="none" strike="noStrike">
+                <a:solidFill>
+                  <a:srgbClr val="545F73"/>
+                </a:solidFill>
+                <a:latin typeface="Plus Jakarta Sans"/>
+                <a:ea typeface="Plus Jakarta Sans"/>
+                <a:cs typeface="Plus Jakarta Sans"/>
+                <a:sym typeface="Plus Jakarta Sans"/>
+              </a:rPr>
+              <a:t>16</a:t>
+            </a:r>
+            <a:endParaRPr b="0" i="0" spc="0" sz="1400" u="none" cap="none" strike="noStrike">
+              <a:solidFill>
+                <a:srgbClr val="000000"/>
+              </a:solidFill>
+              <a:latin typeface="Arial"/>
+              <a:ea typeface="Arial"/>
+              <a:cs typeface="Arial"/>
+              <a:sym typeface="Arial"/>
+            </a:endParaRPr>
+          </a:p>
+        </p:txBody>
+      </p:sp>
+      <p:sp>
+        <p:nvSpPr>
+          <p:cNvPr id="427" name="Google Shape;427;p16"/>
+          <p:cNvSpPr txBox="1"/>
+          <p:nvPr/>
+        </p:nvSpPr>
+        <p:spPr>
+          <a:xfrm>
+            <a:off x="685800" y="1005840"/>
+            <a:ext cx="5257800" cy="5120640"/>
+          </a:xfrm>
+          <a:prstGeom prst="rect">
+            <a:avLst/>
+          </a:prstGeom>
+          <a:noFill/>
+          <a:ln>
+            <a:noFill/>
+          </a:ln>
+        </p:spPr>
+        <p:txBody>
+          <a:bodyPr anchorCtr="0" anchor="t" bIns="0" lIns="0" spcFirstLastPara="1" rIns="0" wrap="square" tIns="0">
+            <a:spAutoFit/>
+          </a:bodyPr>
+          <a:lstStyle/>
+          <a:p>
+            <a:pPr indent="0" lvl="0" marL="0" marR="0" rtl="0" algn="l">
+              <a:lnSpc>
+                <a:spcPct val="105000"/>
+              </a:lnSpc>
+              <a:spcBef>
+                <a:spcPts val="0"/>
+              </a:spcBef>
+              <a:spcAft>
+                <a:spcPts val="0"/>
+              </a:spcAft>
+              <a:buClr>
+                <a:srgbClr val="000000"/>
+              </a:buClr>
+              <a:buSzPts val="1100"/>
+              <a:buFont typeface="Arial"/>
+              <a:buNone/>
+            </a:pPr>
+            <a:r>
+              <a:rPr b="0" i="0" lang="en-US" spc="0" sz="1100" u="none" cap="none" strike="noStrike">
+                <a:solidFill>
+                  <a:srgbClr val="191C1E"/>
+                </a:solidFill>
+                <a:latin typeface="Plus Jakarta Sans"/>
+                <a:ea typeface="Plus Jakarta Sans"/>
+                <a:cs typeface="Plus Jakarta Sans"/>
+                <a:sym typeface="Plus Jakarta Sans"/>
+              </a:rPr>
+              <a:t>ALLSOPP, John. </a:t>
+            </a:r>
+            <a:r>
+              <a:rPr b="1" i="0" lang="en-US" spc="0" sz="1100" u="none" cap="none" strike="noStrike">
+                <a:solidFill>
+                  <a:srgbClr val="191C1E"/>
+                </a:solidFill>
+                <a:latin typeface="Plus Jakarta Sans"/>
+                <a:ea typeface="Plus Jakarta Sans"/>
+                <a:cs typeface="Plus Jakarta Sans"/>
+                <a:sym typeface="Plus Jakarta Sans"/>
+              </a:rPr>
+              <a:t>The web's future is offline</a:t>
+            </a:r>
+            <a:r>
+              <a:rPr b="0" i="0" lang="en-US" spc="0" sz="1100" u="none" cap="none" strike="noStrike">
+                <a:solidFill>
+                  <a:srgbClr val="191C1E"/>
+                </a:solidFill>
+                <a:latin typeface="Plus Jakarta Sans"/>
+                <a:ea typeface="Plus Jakarta Sans"/>
+                <a:cs typeface="Plus Jakarta Sans"/>
+                <a:sym typeface="Plus Jakarta Sans"/>
+              </a:rPr>
+              <a:t>. beyond tellerrand, 2014. Disponível em: https://www.youtube.com/watch?v=VvwhcoZhoI4. Acesso em: 8 maio 2026.</a:t>
+            </a:r>
+            <a:endParaRPr b="0" i="0" spc="0" sz="1400" u="none" cap="none" strike="noStrike">
+              <a:solidFill>
+                <a:srgbClr val="000000"/>
+              </a:solidFill>
+              <a:latin typeface="Arial"/>
+              <a:ea typeface="Arial"/>
+              <a:cs typeface="Arial"/>
+              <a:sym typeface="Arial"/>
+            </a:endParaRPr>
+          </a:p>
+          <a:p>
+            <a:pPr indent="0" lvl="0" marL="0" marR="0" rtl="0" algn="l">
+              <a:lnSpc>
+                <a:spcPct val="105000"/>
+              </a:lnSpc>
+              <a:spcBef>
+                <a:spcPts val="900"/>
+              </a:spcBef>
+              <a:spcAft>
+                <a:spcPts val="0"/>
+              </a:spcAft>
+              <a:buClr>
+                <a:srgbClr val="000000"/>
+              </a:buClr>
+              <a:buSzPts val="1100"/>
+              <a:buFont typeface="Arial"/>
+              <a:buNone/>
+            </a:pPr>
+            <a:r>
+              <a:rPr b="0" i="0" lang="en-US" spc="0" sz="1100" u="none" cap="none" strike="noStrike">
+                <a:solidFill>
+                  <a:srgbClr val="191C1E"/>
+                </a:solidFill>
+                <a:latin typeface="Plus Jakarta Sans"/>
+                <a:ea typeface="Plus Jakarta Sans"/>
+                <a:cs typeface="Plus Jakarta Sans"/>
+                <a:sym typeface="Plus Jakarta Sans"/>
+              </a:rPr>
+              <a:t>BADDELEY, Alan; EYSENCK, Michael W.; ANDERSON, Michael C. </a:t>
+            </a:r>
+            <a:r>
+              <a:rPr b="1" i="0" lang="en-US" spc="0" sz="1100" u="none" cap="none" strike="noStrike">
+                <a:solidFill>
+                  <a:srgbClr val="191C1E"/>
+                </a:solidFill>
+                <a:latin typeface="Plus Jakarta Sans"/>
+                <a:ea typeface="Plus Jakarta Sans"/>
+                <a:cs typeface="Plus Jakarta Sans"/>
+                <a:sym typeface="Plus Jakarta Sans"/>
+              </a:rPr>
+              <a:t>Memória</a:t>
+            </a:r>
+            <a:r>
+              <a:rPr b="0" i="0" lang="en-US" spc="0" sz="1100" u="none" cap="none" strike="noStrike">
+                <a:solidFill>
+                  <a:srgbClr val="191C1E"/>
+                </a:solidFill>
+                <a:latin typeface="Plus Jakarta Sans"/>
+                <a:ea typeface="Plus Jakarta Sans"/>
+                <a:cs typeface="Plus Jakarta Sans"/>
+                <a:sym typeface="Plus Jakarta Sans"/>
+              </a:rPr>
+              <a:t>. Porto Alegre: Artmed, 2010.</a:t>
+            </a:r>
+            <a:endParaRPr b="0" i="0" spc="0" sz="1400" u="none" cap="none" strike="noStrike">
+              <a:solidFill>
+                <a:srgbClr val="000000"/>
+              </a:solidFill>
+              <a:latin typeface="Arial"/>
+              <a:ea typeface="Arial"/>
+              <a:cs typeface="Arial"/>
+              <a:sym typeface="Arial"/>
+            </a:endParaRPr>
+          </a:p>
+          <a:p>
+            <a:pPr indent="0" lvl="0" marL="0" marR="0" rtl="0" algn="l">
+              <a:lnSpc>
+                <a:spcPct val="105000"/>
+              </a:lnSpc>
+              <a:spcBef>
+                <a:spcPts val="900"/>
+              </a:spcBef>
+              <a:spcAft>
+                <a:spcPts val="0"/>
+              </a:spcAft>
+              <a:buClr>
+                <a:srgbClr val="000000"/>
+              </a:buClr>
+              <a:buSzPts val="1100"/>
+              <a:buFont typeface="Arial"/>
+              <a:buNone/>
+            </a:pPr>
+            <a:r>
+              <a:rPr b="0" i="0" lang="en-US" spc="0" sz="1100" u="none" cap="none" strike="noStrike">
+                <a:solidFill>
+                  <a:srgbClr val="191C1E"/>
+                </a:solidFill>
+                <a:latin typeface="Plus Jakarta Sans"/>
+                <a:ea typeface="Plus Jakarta Sans"/>
+                <a:cs typeface="Plus Jakarta Sans"/>
+                <a:sym typeface="Plus Jakarta Sans"/>
+              </a:rPr>
+              <a:t>BRASIL. [Lei Geral de Proteção de Dados Pessoais (LGPD)]. Lei nº 13.709, de 14 de agosto de 2018. Brasília, DF: Presidência da República, 2018.</a:t>
+            </a:r>
+            <a:endParaRPr b="0" i="0" spc="0" sz="1400" u="none" cap="none" strike="noStrike">
+              <a:solidFill>
+                <a:srgbClr val="000000"/>
+              </a:solidFill>
+              <a:latin typeface="Arial"/>
+              <a:ea typeface="Arial"/>
+              <a:cs typeface="Arial"/>
+              <a:sym typeface="Arial"/>
+            </a:endParaRPr>
+          </a:p>
+          <a:p>
+            <a:pPr indent="0" lvl="0" marL="0" marR="0" rtl="0" algn="l">
+              <a:lnSpc>
+                <a:spcPct val="105000"/>
+              </a:lnSpc>
+              <a:spcBef>
+                <a:spcPts val="900"/>
+              </a:spcBef>
+              <a:spcAft>
+                <a:spcPts val="0"/>
+              </a:spcAft>
+              <a:buClr>
+                <a:srgbClr val="000000"/>
+              </a:buClr>
+              <a:buSzPts val="1100"/>
+              <a:buFont typeface="Arial"/>
+              <a:buNone/>
+            </a:pPr>
+            <a:r>
+              <a:rPr b="0" i="0" lang="en-US" spc="0" sz="1100" u="none" cap="none" strike="noStrike">
+                <a:solidFill>
+                  <a:srgbClr val="191C1E"/>
+                </a:solidFill>
+                <a:latin typeface="Plus Jakarta Sans"/>
+                <a:ea typeface="Plus Jakarta Sans"/>
+                <a:cs typeface="Plus Jakarta Sans"/>
+                <a:sym typeface="Plus Jakarta Sans"/>
+              </a:rPr>
+              <a:t>KLEPPMANN, Martin. </a:t>
+            </a:r>
+            <a:r>
+              <a:rPr b="1" i="0" lang="en-US" spc="0" sz="1100" u="none" cap="none" strike="noStrike">
+                <a:solidFill>
+                  <a:srgbClr val="191C1E"/>
+                </a:solidFill>
+                <a:latin typeface="Plus Jakarta Sans"/>
+                <a:ea typeface="Plus Jakarta Sans"/>
+                <a:cs typeface="Plus Jakarta Sans"/>
+                <a:sym typeface="Plus Jakarta Sans"/>
+              </a:rPr>
+              <a:t>Designing data-intensive applications</a:t>
+            </a:r>
+            <a:r>
+              <a:rPr b="0" i="0" lang="en-US" spc="0" sz="1100" u="none" cap="none" strike="noStrike">
+                <a:solidFill>
+                  <a:srgbClr val="191C1E"/>
+                </a:solidFill>
+                <a:latin typeface="Plus Jakarta Sans"/>
+                <a:ea typeface="Plus Jakarta Sans"/>
+                <a:cs typeface="Plus Jakarta Sans"/>
+                <a:sym typeface="Plus Jakarta Sans"/>
+              </a:rPr>
+              <a:t>: the big ideas behind reliable, scalable, and maintainable systems. Sebastopol: O'Reilly Media, 2017.</a:t>
+            </a:r>
+            <a:endParaRPr b="0" i="0" spc="0" sz="1400" u="none" cap="none" strike="noStrike">
+              <a:solidFill>
+                <a:srgbClr val="000000"/>
+              </a:solidFill>
+              <a:latin typeface="Arial"/>
+              <a:ea typeface="Arial"/>
+              <a:cs typeface="Arial"/>
+              <a:sym typeface="Arial"/>
+            </a:endParaRPr>
+          </a:p>
+          <a:p>
+            <a:pPr indent="0" lvl="0" marL="0" marR="0" rtl="0" algn="l">
+              <a:lnSpc>
+                <a:spcPct val="105000"/>
+              </a:lnSpc>
+              <a:spcBef>
+                <a:spcPts val="900"/>
+              </a:spcBef>
+              <a:spcAft>
+                <a:spcPts val="0"/>
+              </a:spcAft>
+              <a:buClr>
+                <a:srgbClr val="000000"/>
+              </a:buClr>
+              <a:buSzPts val="1100"/>
+              <a:buFont typeface="Arial"/>
+              <a:buNone/>
+            </a:pPr>
+            <a:r>
+              <a:rPr b="0" i="0" lang="en-US" spc="0" sz="1100" u="none" cap="none" strike="noStrike">
+                <a:solidFill>
+                  <a:srgbClr val="191C1E"/>
+                </a:solidFill>
+                <a:latin typeface="Plus Jakarta Sans"/>
+                <a:ea typeface="Plus Jakarta Sans"/>
+                <a:cs typeface="Plus Jakarta Sans"/>
+                <a:sym typeface="Plus Jakarta Sans"/>
+              </a:rPr>
+              <a:t>LOSHIN, David. </a:t>
+            </a:r>
+            <a:r>
+              <a:rPr b="1" i="0" lang="en-US" spc="0" sz="1100" u="none" cap="none" strike="noStrike">
+                <a:solidFill>
+                  <a:srgbClr val="191C1E"/>
+                </a:solidFill>
+                <a:latin typeface="Plus Jakarta Sans"/>
+                <a:ea typeface="Plus Jakarta Sans"/>
+                <a:cs typeface="Plus Jakarta Sans"/>
+                <a:sym typeface="Plus Jakarta Sans"/>
+              </a:rPr>
+              <a:t>Master data management</a:t>
+            </a:r>
+            <a:r>
+              <a:rPr b="0" i="0" lang="en-US" spc="0" sz="1100" u="none" cap="none" strike="noStrike">
+                <a:solidFill>
+                  <a:srgbClr val="191C1E"/>
+                </a:solidFill>
+                <a:latin typeface="Plus Jakarta Sans"/>
+                <a:ea typeface="Plus Jakarta Sans"/>
+                <a:cs typeface="Plus Jakarta Sans"/>
+                <a:sym typeface="Plus Jakarta Sans"/>
+              </a:rPr>
+              <a:t>. Burlington: Morgan Kaufmann, 2010.</a:t>
+            </a:r>
+            <a:endParaRPr b="0" i="0" spc="0" sz="1400" u="none" cap="none" strike="noStrike">
+              <a:solidFill>
+                <a:srgbClr val="000000"/>
+              </a:solidFill>
+              <a:latin typeface="Arial"/>
+              <a:ea typeface="Arial"/>
+              <a:cs typeface="Arial"/>
+              <a:sym typeface="Arial"/>
+            </a:endParaRPr>
+          </a:p>
+          <a:p>
+            <a:pPr indent="0" lvl="0" marL="0" marR="0" rtl="0" algn="l">
+              <a:lnSpc>
+                <a:spcPct val="105000"/>
+              </a:lnSpc>
+              <a:spcBef>
+                <a:spcPts val="900"/>
+              </a:spcBef>
+              <a:spcAft>
+                <a:spcPts val="0"/>
+              </a:spcAft>
+              <a:buClr>
+                <a:srgbClr val="000000"/>
+              </a:buClr>
+              <a:buSzPts val="1100"/>
+              <a:buFont typeface="Arial"/>
+              <a:buNone/>
+            </a:pPr>
+            <a:r>
+              <a:rPr b="0" i="0" lang="en-US" spc="0" sz="1100" u="none" cap="none" strike="noStrike">
+                <a:solidFill>
+                  <a:srgbClr val="191C1E"/>
+                </a:solidFill>
+                <a:latin typeface="Plus Jakarta Sans"/>
+                <a:ea typeface="Plus Jakarta Sans"/>
+                <a:cs typeface="Plus Jakarta Sans"/>
+                <a:sym typeface="Plus Jakarta Sans"/>
+              </a:rPr>
+              <a:t>MARTIN, Robert C. </a:t>
+            </a:r>
+            <a:r>
+              <a:rPr b="1" i="0" lang="en-US" spc="0" sz="1100" u="none" cap="none" strike="noStrike">
+                <a:solidFill>
+                  <a:srgbClr val="191C1E"/>
+                </a:solidFill>
+                <a:latin typeface="Plus Jakarta Sans"/>
+                <a:ea typeface="Plus Jakarta Sans"/>
+                <a:cs typeface="Plus Jakarta Sans"/>
+                <a:sym typeface="Plus Jakarta Sans"/>
+              </a:rPr>
+              <a:t>Arquitetura limpa</a:t>
+            </a:r>
+            <a:r>
+              <a:rPr b="0" i="0" lang="en-US" spc="0" sz="1100" u="none" cap="none" strike="noStrike">
+                <a:solidFill>
+                  <a:srgbClr val="191C1E"/>
+                </a:solidFill>
+                <a:latin typeface="Plus Jakarta Sans"/>
+                <a:ea typeface="Plus Jakarta Sans"/>
+                <a:cs typeface="Plus Jakarta Sans"/>
+                <a:sym typeface="Plus Jakarta Sans"/>
+              </a:rPr>
+              <a:t>: o guia do artesão para estrutura e design de software. Rio de Janeiro: Alta Books, 2019.</a:t>
+            </a:r>
+            <a:endParaRPr b="0" i="0" spc="0" sz="1400" u="none" cap="none" strike="noStrike">
+              <a:solidFill>
+                <a:srgbClr val="000000"/>
+              </a:solidFill>
+              <a:latin typeface="Arial"/>
+              <a:ea typeface="Arial"/>
+              <a:cs typeface="Arial"/>
+              <a:sym typeface="Arial"/>
+            </a:endParaRPr>
+          </a:p>
+        </p:txBody>
+      </p:sp>
+      <p:sp>
+        <p:nvSpPr>
+          <p:cNvPr id="428" name="Google Shape;428;p16"/>
+          <p:cNvSpPr txBox="1"/>
+          <p:nvPr/>
+        </p:nvSpPr>
+        <p:spPr>
+          <a:xfrm>
+            <a:off x="6217920" y="1005840"/>
+            <a:ext cx="5257800" cy="5120640"/>
+          </a:xfrm>
+          <a:prstGeom prst="rect">
+            <a:avLst/>
+          </a:prstGeom>
+          <a:noFill/>
+          <a:ln>
+            <a:noFill/>
+          </a:ln>
+        </p:spPr>
+        <p:txBody>
+          <a:bodyPr anchorCtr="0" anchor="t" bIns="0" lIns="0" spcFirstLastPara="1" rIns="0" wrap="square" tIns="0">
+            <a:spAutoFit/>
+          </a:bodyPr>
+          <a:lstStyle/>
+          <a:p>
+            <a:pPr indent="0" lvl="0" marL="0" marR="0" rtl="0" algn="l">
+              <a:lnSpc>
+                <a:spcPct val="105000"/>
+              </a:lnSpc>
+              <a:spcBef>
+                <a:spcPts val="0"/>
+              </a:spcBef>
+              <a:spcAft>
+                <a:spcPts val="0"/>
+              </a:spcAft>
+              <a:buClr>
+                <a:srgbClr val="000000"/>
+              </a:buClr>
+              <a:buSzPts val="1100"/>
+              <a:buFont typeface="Arial"/>
+              <a:buNone/>
+            </a:pPr>
+            <a:r>
+              <a:rPr b="0" i="0" lang="en-US" spc="0" sz="1100" u="none" cap="none" strike="noStrike">
+                <a:solidFill>
+                  <a:srgbClr val="191C1E"/>
+                </a:solidFill>
+                <a:latin typeface="Plus Jakarta Sans"/>
+                <a:ea typeface="Plus Jakarta Sans"/>
+                <a:cs typeface="Plus Jakarta Sans"/>
+                <a:sym typeface="Plus Jakarta Sans"/>
+              </a:rPr>
+              <a:t>MEDISAFE. </a:t>
+            </a:r>
+            <a:r>
+              <a:rPr b="1" i="0" lang="en-US" spc="0" sz="1100" u="none" cap="none" strike="noStrike">
+                <a:solidFill>
+                  <a:srgbClr val="191C1E"/>
+                </a:solidFill>
+                <a:latin typeface="Plus Jakarta Sans"/>
+                <a:ea typeface="Plus Jakarta Sans"/>
+                <a:cs typeface="Plus Jakarta Sans"/>
+                <a:sym typeface="Plus Jakarta Sans"/>
+              </a:rPr>
+              <a:t>Medisafe</a:t>
+            </a:r>
+            <a:r>
+              <a:rPr b="0" i="0" lang="en-US" spc="0" sz="1100" u="none" cap="none" strike="noStrike">
+                <a:solidFill>
+                  <a:srgbClr val="191C1E"/>
+                </a:solidFill>
+                <a:latin typeface="Plus Jakarta Sans"/>
+                <a:ea typeface="Plus Jakarta Sans"/>
+                <a:cs typeface="Plus Jakarta Sans"/>
+                <a:sym typeface="Plus Jakarta Sans"/>
+              </a:rPr>
+              <a:t>: medication management. 2026. Disponível em: https://www.medisafe.com. Acesso em: 20 ago. 2026.</a:t>
+            </a:r>
+            <a:endParaRPr b="0" i="0" spc="0" sz="1400" u="none" cap="none" strike="noStrike">
+              <a:solidFill>
+                <a:srgbClr val="000000"/>
+              </a:solidFill>
+              <a:latin typeface="Arial"/>
+              <a:ea typeface="Arial"/>
+              <a:cs typeface="Arial"/>
+              <a:sym typeface="Arial"/>
+            </a:endParaRPr>
+          </a:p>
+          <a:p>
+            <a:pPr indent="0" lvl="0" marL="0" marR="0" rtl="0" algn="l">
+              <a:lnSpc>
+                <a:spcPct val="105000"/>
+              </a:lnSpc>
+              <a:spcBef>
+                <a:spcPts val="900"/>
+              </a:spcBef>
+              <a:spcAft>
+                <a:spcPts val="0"/>
+              </a:spcAft>
+              <a:buClr>
+                <a:srgbClr val="000000"/>
+              </a:buClr>
+              <a:buSzPts val="1100"/>
+              <a:buFont typeface="Arial"/>
+              <a:buNone/>
+            </a:pPr>
+            <a:r>
+              <a:rPr b="0" i="0" lang="en-US" spc="0" sz="1100" u="none" cap="none" strike="noStrike">
+                <a:solidFill>
+                  <a:srgbClr val="191C1E"/>
+                </a:solidFill>
+                <a:latin typeface="Plus Jakarta Sans"/>
+                <a:ea typeface="Plus Jakarta Sans"/>
+                <a:cs typeface="Plus Jakarta Sans"/>
+                <a:sym typeface="Plus Jakarta Sans"/>
+              </a:rPr>
+              <a:t>MYTHERAPY. </a:t>
+            </a:r>
+            <a:r>
+              <a:rPr b="1" i="0" lang="en-US" spc="0" sz="1100" u="none" cap="none" strike="noStrike">
+                <a:solidFill>
+                  <a:srgbClr val="191C1E"/>
+                </a:solidFill>
+                <a:latin typeface="Plus Jakarta Sans"/>
+                <a:ea typeface="Plus Jakarta Sans"/>
+                <a:cs typeface="Plus Jakarta Sans"/>
+                <a:sym typeface="Plus Jakarta Sans"/>
+              </a:rPr>
+              <a:t>MyTherapy</a:t>
+            </a:r>
+            <a:r>
+              <a:rPr b="0" i="0" lang="en-US" spc="0" sz="1100" u="none" cap="none" strike="noStrike">
+                <a:solidFill>
+                  <a:srgbClr val="191C1E"/>
+                </a:solidFill>
+                <a:latin typeface="Plus Jakarta Sans"/>
+                <a:ea typeface="Plus Jakarta Sans"/>
+                <a:cs typeface="Plus Jakarta Sans"/>
+                <a:sym typeface="Plus Jakarta Sans"/>
+              </a:rPr>
+              <a:t>: medication reminder and pill tracker. 2026. Disponível em: https://www.mytherapyapp.com. Acesso em: 20 ago. 2026.</a:t>
+            </a:r>
+            <a:endParaRPr b="0" i="0" spc="0" sz="1400" u="none" cap="none" strike="noStrike">
+              <a:solidFill>
+                <a:srgbClr val="000000"/>
+              </a:solidFill>
+              <a:latin typeface="Arial"/>
+              <a:ea typeface="Arial"/>
+              <a:cs typeface="Arial"/>
+              <a:sym typeface="Arial"/>
+            </a:endParaRPr>
+          </a:p>
+          <a:p>
+            <a:pPr indent="0" lvl="0" marL="0" marR="0" rtl="0" algn="l">
+              <a:lnSpc>
+                <a:spcPct val="105000"/>
+              </a:lnSpc>
+              <a:spcBef>
+                <a:spcPts val="900"/>
+              </a:spcBef>
+              <a:spcAft>
+                <a:spcPts val="0"/>
+              </a:spcAft>
+              <a:buClr>
+                <a:srgbClr val="000000"/>
+              </a:buClr>
+              <a:buSzPts val="1100"/>
+              <a:buFont typeface="Arial"/>
+              <a:buNone/>
+            </a:pPr>
+            <a:r>
+              <a:rPr b="0" i="0" lang="en-US" spc="0" sz="1100" u="none" cap="none" strike="noStrike">
+                <a:solidFill>
+                  <a:srgbClr val="191C1E"/>
+                </a:solidFill>
+                <a:latin typeface="Plus Jakarta Sans"/>
+                <a:ea typeface="Plus Jakarta Sans"/>
+                <a:cs typeface="Plus Jakarta Sans"/>
+                <a:sym typeface="Plus Jakarta Sans"/>
+              </a:rPr>
+              <a:t>NIELSEN, Jakob. </a:t>
+            </a:r>
+            <a:r>
+              <a:rPr b="1" i="0" lang="en-US" spc="0" sz="1100" u="none" cap="none" strike="noStrike">
+                <a:solidFill>
+                  <a:srgbClr val="191C1E"/>
+                </a:solidFill>
+                <a:latin typeface="Plus Jakarta Sans"/>
+                <a:ea typeface="Plus Jakarta Sans"/>
+                <a:cs typeface="Plus Jakarta Sans"/>
+                <a:sym typeface="Plus Jakarta Sans"/>
+              </a:rPr>
+              <a:t>Usability engineering</a:t>
+            </a:r>
+            <a:r>
+              <a:rPr b="0" i="0" lang="en-US" spc="0" sz="1100" u="none" cap="none" strike="noStrike">
+                <a:solidFill>
+                  <a:srgbClr val="191C1E"/>
+                </a:solidFill>
+                <a:latin typeface="Plus Jakarta Sans"/>
+                <a:ea typeface="Plus Jakarta Sans"/>
+                <a:cs typeface="Plus Jakarta Sans"/>
+                <a:sym typeface="Plus Jakarta Sans"/>
+              </a:rPr>
+              <a:t>. San Diego: Academic Press, 1994.</a:t>
+            </a:r>
+            <a:endParaRPr b="0" i="0" spc="0" sz="1400" u="none" cap="none" strike="noStrike">
+              <a:solidFill>
+                <a:srgbClr val="000000"/>
+              </a:solidFill>
+              <a:latin typeface="Arial"/>
+              <a:ea typeface="Arial"/>
+              <a:cs typeface="Arial"/>
+              <a:sym typeface="Arial"/>
+            </a:endParaRPr>
+          </a:p>
+          <a:p>
+            <a:pPr indent="0" lvl="0" marL="0" marR="0" rtl="0" algn="l">
+              <a:lnSpc>
+                <a:spcPct val="105000"/>
+              </a:lnSpc>
+              <a:spcBef>
+                <a:spcPts val="900"/>
+              </a:spcBef>
+              <a:spcAft>
+                <a:spcPts val="0"/>
+              </a:spcAft>
+              <a:buClr>
+                <a:srgbClr val="000000"/>
+              </a:buClr>
+              <a:buSzPts val="1100"/>
+              <a:buFont typeface="Arial"/>
+              <a:buNone/>
+            </a:pPr>
+            <a:r>
+              <a:rPr b="0" i="0" lang="en-US" spc="0" sz="1100" u="none" cap="none" strike="noStrike">
+                <a:solidFill>
+                  <a:srgbClr val="191C1E"/>
+                </a:solidFill>
+                <a:latin typeface="Plus Jakarta Sans"/>
+                <a:ea typeface="Plus Jakarta Sans"/>
+                <a:cs typeface="Plus Jakarta Sans"/>
+                <a:sym typeface="Plus Jakarta Sans"/>
+              </a:rPr>
+              <a:t>RISKO, Evan F.; GILBERT, Sam J. Cognitive offloading. </a:t>
+            </a:r>
+            <a:r>
+              <a:rPr b="1" i="0" lang="en-US" spc="0" sz="1100" u="none" cap="none" strike="noStrike">
+                <a:solidFill>
+                  <a:srgbClr val="191C1E"/>
+                </a:solidFill>
+                <a:latin typeface="Plus Jakarta Sans"/>
+                <a:ea typeface="Plus Jakarta Sans"/>
+                <a:cs typeface="Plus Jakarta Sans"/>
+                <a:sym typeface="Plus Jakarta Sans"/>
+              </a:rPr>
+              <a:t>Trends in Cognitive Sciences</a:t>
+            </a:r>
+            <a:r>
+              <a:rPr b="0" i="0" lang="en-US" spc="0" sz="1100" u="none" cap="none" strike="noStrike">
+                <a:solidFill>
+                  <a:srgbClr val="191C1E"/>
+                </a:solidFill>
+                <a:latin typeface="Plus Jakarta Sans"/>
+                <a:ea typeface="Plus Jakarta Sans"/>
+                <a:cs typeface="Plus Jakarta Sans"/>
+                <a:sym typeface="Plus Jakarta Sans"/>
+              </a:rPr>
+              <a:t>, v. 20, n. 9, p. 676-688, 2016.</a:t>
+            </a:r>
+            <a:endParaRPr b="0" i="0" spc="0" sz="1400" u="none" cap="none" strike="noStrike">
+              <a:solidFill>
+                <a:srgbClr val="000000"/>
+              </a:solidFill>
+              <a:latin typeface="Arial"/>
+              <a:ea typeface="Arial"/>
+              <a:cs typeface="Arial"/>
+              <a:sym typeface="Arial"/>
+            </a:endParaRPr>
+          </a:p>
+          <a:p>
+            <a:pPr indent="0" lvl="0" marL="0" marR="0" rtl="0" algn="l">
+              <a:lnSpc>
+                <a:spcPct val="105000"/>
+              </a:lnSpc>
+              <a:spcBef>
+                <a:spcPts val="900"/>
+              </a:spcBef>
+              <a:spcAft>
+                <a:spcPts val="0"/>
+              </a:spcAft>
+              <a:buClr>
+                <a:srgbClr val="000000"/>
+              </a:buClr>
+              <a:buSzPts val="1100"/>
+              <a:buFont typeface="Arial"/>
+              <a:buNone/>
+            </a:pPr>
+            <a:r>
+              <a:rPr b="0" i="0" lang="en-US" spc="0" sz="1100" u="none" cap="none" strike="noStrike">
+                <a:solidFill>
+                  <a:srgbClr val="191C1E"/>
+                </a:solidFill>
+                <a:latin typeface="Plus Jakarta Sans"/>
+                <a:ea typeface="Plus Jakarta Sans"/>
+                <a:cs typeface="Plus Jakarta Sans"/>
+                <a:sym typeface="Plus Jakarta Sans"/>
+              </a:rPr>
+              <a:t>WORLD HEALTH ORGANIZATION (WHO). </a:t>
+            </a:r>
+            <a:r>
+              <a:rPr b="1" i="0" lang="en-US" spc="0" sz="1100" u="none" cap="none" strike="noStrike">
+                <a:solidFill>
+                  <a:srgbClr val="191C1E"/>
+                </a:solidFill>
+                <a:latin typeface="Plus Jakarta Sans"/>
+                <a:ea typeface="Plus Jakarta Sans"/>
+                <a:cs typeface="Plus Jakarta Sans"/>
+                <a:sym typeface="Plus Jakarta Sans"/>
+              </a:rPr>
+              <a:t>Adherence to long-term therapies</a:t>
+            </a:r>
+            <a:r>
+              <a:rPr b="0" i="0" lang="en-US" spc="0" sz="1100" u="none" cap="none" strike="noStrike">
+                <a:solidFill>
+                  <a:srgbClr val="191C1E"/>
+                </a:solidFill>
+                <a:latin typeface="Plus Jakarta Sans"/>
+                <a:ea typeface="Plus Jakarta Sans"/>
+                <a:cs typeface="Plus Jakarta Sans"/>
+                <a:sym typeface="Plus Jakarta Sans"/>
+              </a:rPr>
+              <a:t>: evidence for action. Geneva: World Health Organization, 2003.</a:t>
+            </a:r>
+            <a:endParaRPr b="0" i="0" spc="0" sz="1400" u="none" cap="none" strike="noStrike">
+              <a:solidFill>
+                <a:srgbClr val="000000"/>
+              </a:solidFill>
+              <a:latin typeface="Arial"/>
+              <a:ea typeface="Arial"/>
+              <a:cs typeface="Arial"/>
+              <a:sym typeface="Arial"/>
+            </a:endParaRPr>
+          </a:p>
+          <a:p>
+            <a:pPr indent="0" lvl="0" marL="0" marR="0" rtl="0" algn="l">
+              <a:lnSpc>
+                <a:spcPct val="105000"/>
+              </a:lnSpc>
+              <a:spcBef>
+                <a:spcPts val="900"/>
+              </a:spcBef>
+              <a:spcAft>
+                <a:spcPts val="0"/>
+              </a:spcAft>
+              <a:buClr>
+                <a:srgbClr val="000000"/>
+              </a:buClr>
+              <a:buSzPts val="1100"/>
+              <a:buFont typeface="Arial"/>
+              <a:buNone/>
+            </a:pPr>
+            <a:r>
+              <a:rPr b="0" i="0" lang="en-US" spc="0" sz="1100" u="none" cap="none" strike="noStrike">
+                <a:solidFill>
+                  <a:srgbClr val="191C1E"/>
+                </a:solidFill>
+                <a:latin typeface="Plus Jakarta Sans"/>
+                <a:ea typeface="Plus Jakarta Sans"/>
+                <a:cs typeface="Plus Jakarta Sans"/>
+                <a:sym typeface="Plus Jakarta Sans"/>
+              </a:rPr>
+              <a:t>WORLD WIDE WEB CONSORTIUM (W3C). </a:t>
+            </a:r>
+            <a:r>
+              <a:rPr b="1" i="0" lang="en-US" spc="0" sz="1100" u="none" cap="none" strike="noStrike">
+                <a:solidFill>
+                  <a:srgbClr val="191C1E"/>
+                </a:solidFill>
+                <a:latin typeface="Plus Jakarta Sans"/>
+                <a:ea typeface="Plus Jakarta Sans"/>
+                <a:cs typeface="Plus Jakarta Sans"/>
+                <a:sym typeface="Plus Jakarta Sans"/>
+              </a:rPr>
+              <a:t>Web Content Accessibility Guidelines (WCAG) 2.1</a:t>
+            </a:r>
+            <a:r>
+              <a:rPr b="0" i="0" lang="en-US" spc="0" sz="1100" u="none" cap="none" strike="noStrike">
+                <a:solidFill>
+                  <a:srgbClr val="191C1E"/>
+                </a:solidFill>
+                <a:latin typeface="Plus Jakarta Sans"/>
+                <a:ea typeface="Plus Jakarta Sans"/>
+                <a:cs typeface="Plus Jakarta Sans"/>
+                <a:sym typeface="Plus Jakarta Sans"/>
+              </a:rPr>
+              <a:t>. Cambridge, MA: W3C, 2018. Disponível em: https://www.w3.org/TR/WCAG21/. Acesso em: 10 set. 2026.</a:t>
+            </a:r>
+            <a:endParaRPr b="0" i="0" spc="0" sz="1400" u="none" cap="none" strike="noStrike">
+              <a:solidFill>
+                <a:srgbClr val="000000"/>
+              </a:solidFill>
+              <a:latin typeface="Arial"/>
+              <a:ea typeface="Arial"/>
+              <a:cs typeface="Arial"/>
+              <a:sym typeface="Arial"/>
+            </a:endParaRPr>
+          </a:p>
+        </p:txBody>
+      </p:sp>
+    </p:spTree>
+  </p:cSld>
+  <p:clrMapOvr>
+    <a:masterClrMapping/>
+  </p:clrMapOvr>
+</p:sld>
+</file>
+
+<file path=ppt/slides/slide17.xml><?xml version="1.0" encoding="utf-8"?>
+<p:sld xmlns:a="http://schemas.openxmlformats.org/drawingml/2006/main" xmlns:r="http://schemas.openxmlformats.org/officeDocument/2006/relationships" xmlns:mc="http://schemas.openxmlformats.org/markup-compatibility/2006" xmlns:mv="urn:schemas-microsoft-com:mac:vml" xmlns:p="http://schemas.openxmlformats.org/presentationml/2006/main" xmlns:c="http://schemas.openxmlformats.org/drawingml/2006/chart" xmlns:dgm="http://schemas.openxmlformats.org/drawingml/2006/diagram" xmlns:o="urn:schemas-microsoft-com:office:office" xmlns:v="urn:schemas-microsoft-com:vml" xmlns:pvml="urn:schemas-microsoft-com:office:powerpoint" xmlns:com="http://schemas.openxmlformats.org/drawingml/2006/compatibility" xmlns:p14="http://schemas.microsoft.com/office/powerpoint/2010/main" xmlns:p15="http://schemas.microsoft.com/office/powerpoint/2012/main" xmlns:ahyp="http://schemas.microsoft.com/office/drawing/2018/hyperlinkcolor">
+  <p:cSld>
+    <p:bg>
+      <p:bgPr>
+        <a:solidFill>
+          <a:srgbClr val="F5F7FA"/>
+        </a:solidFill>
+      </p:bgPr>
+    </p:bg>
+    <p:spTree>
+      <p:nvGrpSpPr>
+        <p:cNvPr id="433" name="Shape 433"/>
+        <p:cNvGrpSpPr/>
+        <p:nvPr/>
+      </p:nvGrpSpPr>
+      <p:grpSpPr>
+        <a:xfrm>
+          <a:off x="0" y="0"/>
+          <a:ext cx="0" cy="0"/>
+          <a:chOff x="0" y="0"/>
+          <a:chExt cx="0" cy="0"/>
+        </a:xfrm>
+      </p:grpSpPr>
+      <p:sp>
+        <p:nvSpPr>
+          <p:cNvPr id="434" name="Google Shape;434;p17"/>
           <p:cNvSpPr/>
           <p:nvPr/>
         </p:nvSpPr>
@@ -25144,7 +26211,7 @@
       </p:sp>
       <p:sp>
         <p:nvSpPr>
-          <p:cNvPr id="426" name="Google Shape;426;p17"/>
+          <p:cNvPr id="435" name="Google Shape;435;p17"/>
           <p:cNvSpPr/>
           <p:nvPr/>
         </p:nvSpPr>
@@ -25205,7 +26272,7 @@
       </p:sp>
       <p:pic>
         <p:nvPicPr>
-          <p:cNvPr descr="qr.png" id="427" name="Google Shape;427;p17"/>
+          <p:cNvPr descr="qr.png" id="436" name="Google Shape;436;p17"/>
           <p:cNvPicPr preferRelativeResize="0"/>
           <p:nvPr/>
         </p:nvPicPr>
@@ -25232,7 +26299,7 @@
       </p:pic>
       <p:sp>
         <p:nvSpPr>
-          <p:cNvPr id="428" name="Google Shape;428;p17"/>
+          <p:cNvPr id="437" name="Google Shape;437;p17"/>
           <p:cNvSpPr txBox="1"/>
           <p:nvPr/>
         </p:nvSpPr>
@@ -25409,7 +26476,7 @@
       </p:sp>
       <p:pic>
         <p:nvPicPr>
-          <p:cNvPr descr="lockup-claro.png" id="429" name="Google Shape;429;p17"/>
+          <p:cNvPr descr="lockup-claro.png" id="438" name="Google Shape;438;p17"/>
           <p:cNvPicPr preferRelativeResize="0"/>
           <p:nvPr/>
         </p:nvPicPr>
@@ -25436,7 +26503,7 @@
       </p:pic>
       <p:sp>
         <p:nvSpPr>
-          <p:cNvPr id="430" name="Google Shape;430;p17"/>
+          <p:cNvPr id="439" name="Google Shape;439;p17"/>
           <p:cNvSpPr txBox="1"/>
           <p:nvPr/>
         </p:nvSpPr>
@@ -25502,7 +26569,7 @@
       </p:sp>
       <p:sp>
         <p:nvSpPr>
-          <p:cNvPr id="431" name="Google Shape;431;p17"/>
+          <p:cNvPr id="440" name="Google Shape;440;p17"/>
           <p:cNvSpPr txBox="1"/>
           <p:nvPr/>
         </p:nvSpPr>
@@ -25719,7 +26786,7 @@
       </p:sp>
       <p:pic>
         <p:nvPicPr>
-          <p:cNvPr descr="unidavi.png" id="432" name="Google Shape;432;p17"/>
+          <p:cNvPr descr="unidavi.png" id="441" name="Google Shape;441;p17"/>
           <p:cNvPicPr preferRelativeResize="0"/>
           <p:nvPr/>
         </p:nvPicPr>
@@ -34836,7 +35903,7 @@
                 <a:cs typeface="Plus Jakarta Sans"/>
                 <a:sym typeface="Plus Jakarta Sans"/>
               </a:rPr>
-              <a:t>9</a:t>
+              <a:t>8</a:t>
             </a:r>
             <a:endParaRPr b="0" i="0" spc="0" sz="1400" u="none" cap="none" strike="noStrike">
               <a:solidFill>
@@ -36454,7 +37521,7 @@
                 <a:cs typeface="Plus Jakarta Sans"/>
                 <a:sym typeface="Plus Jakarta Sans"/>
               </a:rPr>
-              <a:t>10</a:t>
+              <a:t>9</a:t>
             </a:r>
             <a:endParaRPr b="0" i="0" spc="0" sz="1400" u="none" cap="none" strike="noStrike">
               <a:solidFill>
@@ -37719,6 +38786,285 @@
 </file>
 
 <file path=ppt/theme/theme1.xml><?xml version="1.0" encoding="utf-8"?>
+<a:theme xmlns:a="http://schemas.openxmlformats.org/drawingml/2006/main" xmlns:r="http://schemas.openxmlformats.org/officeDocument/2006/relationships" name="Office Theme">
+  <a:themeElements>
+    <a:clrScheme name="Office">
+      <a:dk1>
+        <a:srgbClr val="000000"/>
+      </a:dk1>
+      <a:lt1>
+        <a:srgbClr val="FFFFFF"/>
+      </a:lt1>
+      <a:dk2>
+        <a:srgbClr val="1F497D"/>
+      </a:dk2>
+      <a:lt2>
+        <a:srgbClr val="EEECE1"/>
+      </a:lt2>
+      <a:accent1>
+        <a:srgbClr val="4F81BD"/>
+      </a:accent1>
+      <a:accent2>
+        <a:srgbClr val="C0504D"/>
+      </a:accent2>
+      <a:accent3>
+        <a:srgbClr val="9BBB59"/>
+      </a:accent3>
+      <a:accent4>
+        <a:srgbClr val="8064A2"/>
+      </a:accent4>
+      <a:accent5>
+        <a:srgbClr val="4BACC6"/>
+      </a:accent5>
+      <a:accent6>
+        <a:srgbClr val="F79646"/>
+      </a:accent6>
+      <a:hlink>
+        <a:srgbClr val="0000FF"/>
+      </a:hlink>
+      <a:folHlink>
+        <a:srgbClr val="800080"/>
+      </a:folHlink>
+    </a:clrScheme>
+    <a:fontScheme name="Office">
+      <a:majorFont>
+        <a:latin typeface="Arial"/>
+        <a:ea typeface=""/>
+        <a:cs typeface=""/>
+        <a:font script="Jpan" typeface="ＭＳ Ｐゴシック"/>
+        <a:font script="Hang" typeface="맑은 고딕"/>
+        <a:font script="Hans" typeface="宋体"/>
+        <a:font script="Hant" typeface="新細明體"/>
+        <a:font script="Arab" typeface="Times New Roman"/>
+        <a:font script="Hebr" typeface="Times New Roman"/>
+        <a:font script="Thai" typeface="Angsana New"/>
+        <a:font script="Ethi" typeface="Nyala"/>
+        <a:font script="Beng" typeface="Vrinda"/>
+        <a:font script="Gujr" typeface="Shruti"/>
+        <a:font script="Khmr" typeface="MoolBoran"/>
+        <a:font script="Knda" typeface="Tunga"/>
+        <a:font script="Guru" typeface="Raavi"/>
+        <a:font script="Cans" typeface="Euphemia"/>
+        <a:font script="Cher" typeface="Plantagenet Cherokee"/>
+        <a:font script="Yiii" typeface="Microsoft Yi Baiti"/>
+        <a:font script="Tibt" typeface="Microsoft Himalaya"/>
+        <a:font script="Thaa" typeface="MV Boli"/>
+        <a:font script="Deva" typeface="Mangal"/>
+        <a:font script="Telu" typeface="Gautami"/>
+        <a:font script="Taml" typeface="Latha"/>
+        <a:font script="Syrc" typeface="Estrangelo Edessa"/>
+        <a:font script="Orya" typeface="Kalinga"/>
+        <a:font script="Mlym" typeface="Kartika"/>
+        <a:font script="Laoo" typeface="DokChampa"/>
+        <a:font script="Sinh" typeface="Iskoola Pota"/>
+        <a:font script="Mong" typeface="Mongolian Baiti"/>
+        <a:font script="Viet" typeface="Times New Roman"/>
+        <a:font script="Uigh" typeface="Microsoft Uighur"/>
+        <a:font script="Geor" typeface="Sylfaen"/>
+      </a:majorFont>
+      <a:minorFont>
+        <a:latin typeface="Arial"/>
+        <a:ea typeface=""/>
+        <a:cs typeface=""/>
+        <a:font script="Jpan" typeface="ＭＳ Ｐゴシック"/>
+        <a:font script="Hang" typeface="맑은 고딕"/>
+        <a:font script="Hans" typeface="宋体"/>
+        <a:font script="Hant" typeface="新細明體"/>
+        <a:font script="Arab" typeface="Arial"/>
+        <a:font script="Hebr" typeface="Arial"/>
+        <a:font script="Thai" typeface="Cordia New"/>
+        <a:font script="Ethi" typeface="Nyala"/>
+        <a:font script="Beng" typeface="Vrinda"/>
+        <a:font script="Gujr" typeface="Shruti"/>
+        <a:font script="Khmr" typeface="DaunPenh"/>
+        <a:font script="Knda" typeface="Tunga"/>
+        <a:font script="Guru" typeface="Raavi"/>
+        <a:font script="Cans" typeface="Euphemia"/>
+        <a:font script="Cher" typeface="Plantagenet Cherokee"/>
+        <a:font script="Yiii" typeface="Microsoft Yi Baiti"/>
+        <a:font script="Tibt" typeface="Microsoft Himalaya"/>
+        <a:font script="Thaa" typeface="MV Boli"/>
+        <a:font script="Deva" typeface="Mangal"/>
+        <a:font script="Telu" typeface="Gautami"/>
+        <a:font script="Taml" typeface="Latha"/>
+        <a:font script="Syrc" typeface="Estrangelo Edessa"/>
+        <a:font script="Orya" typeface="Kalinga"/>
+        <a:font script="Mlym" typeface="Kartika"/>
+        <a:font script="Laoo" typeface="DokChampa"/>
+        <a:font script="Sinh" typeface="Iskoola Pota"/>
+        <a:font script="Mong" typeface="Mongolian Baiti"/>
+        <a:font script="Viet" typeface="Arial"/>
+        <a:font script="Uigh" typeface="Microsoft Uighur"/>
+        <a:font script="Geor" typeface="Sylfaen"/>
+      </a:minorFont>
+    </a:fontScheme>
+    <a:fmtScheme name="Office">
+      <a:fillStyleLst>
+        <a:solidFill>
+          <a:schemeClr val="phClr"/>
+        </a:solidFill>
+        <a:gradFill rotWithShape="1">
+          <a:gsLst>
+            <a:gs pos="0">
+              <a:schemeClr val="phClr">
+                <a:tint val="50000"/>
+                <a:satMod val="300000"/>
+              </a:schemeClr>
+            </a:gs>
+            <a:gs pos="35000">
+              <a:schemeClr val="phClr">
+                <a:tint val="37000"/>
+                <a:satMod val="300000"/>
+              </a:schemeClr>
+            </a:gs>
+            <a:gs pos="100000">
+              <a:schemeClr val="phClr">
+                <a:tint val="15000"/>
+                <a:satMod val="350000"/>
+              </a:schemeClr>
+            </a:gs>
+          </a:gsLst>
+          <a:lin ang="16200000" scaled="1"/>
+        </a:gradFill>
+        <a:gradFill rotWithShape="1">
+          <a:gsLst>
+            <a:gs pos="0">
+              <a:schemeClr val="phClr">
+                <a:tint val="100000"/>
+                <a:shade val="100000"/>
+                <a:satMod val="130000"/>
+              </a:schemeClr>
+            </a:gs>
+            <a:gs pos="100000">
+              <a:schemeClr val="phClr">
+                <a:tint val="50000"/>
+                <a:shade val="100000"/>
+                <a:satMod val="350000"/>
+              </a:schemeClr>
+            </a:gs>
+          </a:gsLst>
+          <a:lin ang="16200000" scaled="0"/>
+        </a:gradFill>
+      </a:fillStyleLst>
+      <a:lnStyleLst>
+        <a:ln w="9525" cap="flat" cmpd="sng" algn="ctr">
+          <a:solidFill>
+            <a:schemeClr val="phClr">
+              <a:shade val="95000"/>
+              <a:satMod val="105000"/>
+            </a:schemeClr>
+          </a:solidFill>
+          <a:prstDash val="solid"/>
+        </a:ln>
+        <a:ln w="25400" cap="flat" cmpd="sng" algn="ctr">
+          <a:solidFill>
+            <a:schemeClr val="phClr"/>
+          </a:solidFill>
+          <a:prstDash val="solid"/>
+        </a:ln>
+        <a:ln w="38100" cap="flat" cmpd="sng" algn="ctr">
+          <a:solidFill>
+            <a:schemeClr val="phClr"/>
+          </a:solidFill>
+          <a:prstDash val="solid"/>
+        </a:ln>
+      </a:lnStyleLst>
+      <a:effectStyleLst>
+        <a:effectStyle>
+          <a:effectLst>
+            <a:outerShdw blurRad="40000" dist="20000" dir="5400000" rotWithShape="0">
+              <a:srgbClr val="000000">
+                <a:alpha val="38000"/>
+              </a:srgbClr>
+            </a:outerShdw>
+          </a:effectLst>
+        </a:effectStyle>
+        <a:effectStyle>
+          <a:effectLst>
+            <a:outerShdw blurRad="40000" dist="23000" dir="5400000" rotWithShape="0">
+              <a:srgbClr val="000000">
+                <a:alpha val="35000"/>
+              </a:srgbClr>
+            </a:outerShdw>
+          </a:effectLst>
+        </a:effectStyle>
+        <a:effectStyle>
+          <a:effectLst>
+            <a:outerShdw blurRad="40000" dist="23000" dir="5400000" rotWithShape="0">
+              <a:srgbClr val="000000">
+                <a:alpha val="35000"/>
+              </a:srgbClr>
+            </a:outerShdw>
+          </a:effectLst>
+          <a:scene3d>
+            <a:camera prst="orthographicFront">
+              <a:rot lat="0" lon="0" rev="0"/>
+            </a:camera>
+            <a:lightRig rig="threePt" dir="t">
+              <a:rot lat="0" lon="0" rev="1200000"/>
+            </a:lightRig>
+          </a:scene3d>
+          <a:sp3d>
+            <a:bevelT w="63500" h="25400"/>
+          </a:sp3d>
+        </a:effectStyle>
+      </a:effectStyleLst>
+      <a:bgFillStyleLst>
+        <a:solidFill>
+          <a:schemeClr val="phClr"/>
+        </a:solidFill>
+        <a:gradFill rotWithShape="1">
+          <a:gsLst>
+            <a:gs pos="0">
+              <a:schemeClr val="phClr">
+                <a:tint val="40000"/>
+                <a:satMod val="350000"/>
+              </a:schemeClr>
+            </a:gs>
+            <a:gs pos="40000">
+              <a:schemeClr val="phClr">
+                <a:tint val="45000"/>
+                <a:shade val="99000"/>
+                <a:satMod val="350000"/>
+              </a:schemeClr>
+            </a:gs>
+            <a:gs pos="100000">
+              <a:schemeClr val="phClr">
+                <a:shade val="20000"/>
+                <a:satMod val="255000"/>
+              </a:schemeClr>
+            </a:gs>
+          </a:gsLst>
+          <a:path path="circle">
+            <a:fillToRect l="50000" t="-80000" r="50000" b="180000"/>
+          </a:path>
+        </a:gradFill>
+        <a:gradFill rotWithShape="1">
+          <a:gsLst>
+            <a:gs pos="0">
+              <a:schemeClr val="phClr">
+                <a:tint val="80000"/>
+                <a:satMod val="300000"/>
+              </a:schemeClr>
+            </a:gs>
+            <a:gs pos="100000">
+              <a:schemeClr val="phClr">
+                <a:shade val="30000"/>
+                <a:satMod val="200000"/>
+              </a:schemeClr>
+            </a:gs>
+          </a:gsLst>
+          <a:path path="circle">
+            <a:fillToRect l="50000" t="50000" r="50000" b="50000"/>
+          </a:path>
+        </a:gradFill>
+      </a:bgFillStyleLst>
+    </a:fmtScheme>
+  </a:themeElements>
+</a:theme>
+</file>
+
+<file path=ppt/theme/theme2.xml><?xml version="1.0" encoding="utf-8"?>
 <a:theme xmlns:a="http://schemas.openxmlformats.org/drawingml/2006/main" xmlns:r="http://schemas.openxmlformats.org/officeDocument/2006/relationships">
   <a:themeElements>
     <a:clrScheme name="Default">
@@ -37995,283 +39341,4 @@
     </a:fmtScheme>
   </a:themeElements>
 </a:theme>
-</file>
-
-<file path=ppt/theme/theme2.xml><?xml version="1.0" encoding="utf-8"?>
-<a:theme xmlns:a="http://schemas.openxmlformats.org/drawingml/2006/main" xmlns:r="http://schemas.openxmlformats.org/officeDocument/2006/relationships" name="Office Theme">
-  <a:themeElements>
-    <a:clrScheme name="Office">
-      <a:dk1>
-        <a:srgbClr val="000000"/>
-      </a:dk1>
-      <a:lt1>
-        <a:srgbClr val="FFFFFF"/>
-      </a:lt1>
-      <a:dk2>
-        <a:srgbClr val="1F497D"/>
-      </a:dk2>
-      <a:lt2>
-        <a:srgbClr val="EEECE1"/>
-      </a:lt2>
-      <a:accent1>
-        <a:srgbClr val="4F81BD"/>
-      </a:accent1>
-      <a:accent2>
-        <a:srgbClr val="C0504D"/>
-      </a:accent2>
-      <a:accent3>
-        <a:srgbClr val="9BBB59"/>
-      </a:accent3>
-      <a:accent4>
-        <a:srgbClr val="8064A2"/>
-      </a:accent4>
-      <a:accent5>
-        <a:srgbClr val="4BACC6"/>
-      </a:accent5>
-      <a:accent6>
-        <a:srgbClr val="F79646"/>
-      </a:accent6>
-      <a:hlink>
-        <a:srgbClr val="0000FF"/>
-      </a:hlink>
-      <a:folHlink>
-        <a:srgbClr val="800080"/>
-      </a:folHlink>
-    </a:clrScheme>
-    <a:fontScheme name="Office">
-      <a:majorFont>
-        <a:latin typeface="Arial"/>
-        <a:ea typeface=""/>
-        <a:cs typeface=""/>
-        <a:font script="Jpan" typeface="ＭＳ Ｐゴシック"/>
-        <a:font script="Hang" typeface="맑은 고딕"/>
-        <a:font script="Hans" typeface="宋体"/>
-        <a:font script="Hant" typeface="新細明體"/>
-        <a:font script="Arab" typeface="Times New Roman"/>
-        <a:font script="Hebr" typeface="Times New Roman"/>
-        <a:font script="Thai" typeface="Angsana New"/>
-        <a:font script="Ethi" typeface="Nyala"/>
-        <a:font script="Beng" typeface="Vrinda"/>
-        <a:font script="Gujr" typeface="Shruti"/>
-        <a:font script="Khmr" typeface="MoolBoran"/>
-        <a:font script="Knda" typeface="Tunga"/>
-        <a:font script="Guru" typeface="Raavi"/>
-        <a:font script="Cans" typeface="Euphemia"/>
-        <a:font script="Cher" typeface="Plantagenet Cherokee"/>
-        <a:font script="Yiii" typeface="Microsoft Yi Baiti"/>
-        <a:font script="Tibt" typeface="Microsoft Himalaya"/>
-        <a:font script="Thaa" typeface="MV Boli"/>
-        <a:font script="Deva" typeface="Mangal"/>
-        <a:font script="Telu" typeface="Gautami"/>
-        <a:font script="Taml" typeface="Latha"/>
-        <a:font script="Syrc" typeface="Estrangelo Edessa"/>
-        <a:font script="Orya" typeface="Kalinga"/>
-        <a:font script="Mlym" typeface="Kartika"/>
-        <a:font script="Laoo" typeface="DokChampa"/>
-        <a:font script="Sinh" typeface="Iskoola Pota"/>
-        <a:font script="Mong" typeface="Mongolian Baiti"/>
-        <a:font script="Viet" typeface="Times New Roman"/>
-        <a:font script="Uigh" typeface="Microsoft Uighur"/>
-        <a:font script="Geor" typeface="Sylfaen"/>
-      </a:majorFont>
-      <a:minorFont>
-        <a:latin typeface="Arial"/>
-        <a:ea typeface=""/>
-        <a:cs typeface=""/>
-        <a:font script="Jpan" typeface="ＭＳ Ｐゴシック"/>
-        <a:font script="Hang" typeface="맑은 고딕"/>
-        <a:font script="Hans" typeface="宋体"/>
-        <a:font script="Hant" typeface="新細明體"/>
-        <a:font script="Arab" typeface="Arial"/>
-        <a:font script="Hebr" typeface="Arial"/>
-        <a:font script="Thai" typeface="Cordia New"/>
-        <a:font script="Ethi" typeface="Nyala"/>
-        <a:font script="Beng" typeface="Vrinda"/>
-        <a:font script="Gujr" typeface="Shruti"/>
-        <a:font script="Khmr" typeface="DaunPenh"/>
-        <a:font script="Knda" typeface="Tunga"/>
-        <a:font script="Guru" typeface="Raavi"/>
-        <a:font script="Cans" typeface="Euphemia"/>
-        <a:font script="Cher" typeface="Plantagenet Cherokee"/>
-        <a:font script="Yiii" typeface="Microsoft Yi Baiti"/>
-        <a:font script="Tibt" typeface="Microsoft Himalaya"/>
-        <a:font script="Thaa" typeface="MV Boli"/>
-        <a:font script="Deva" typeface="Mangal"/>
-        <a:font script="Telu" typeface="Gautami"/>
-        <a:font script="Taml" typeface="Latha"/>
-        <a:font script="Syrc" typeface="Estrangelo Edessa"/>
-        <a:font script="Orya" typeface="Kalinga"/>
-        <a:font script="Mlym" typeface="Kartika"/>
-        <a:font script="Laoo" typeface="DokChampa"/>
-        <a:font script="Sinh" typeface="Iskoola Pota"/>
-        <a:font script="Mong" typeface="Mongolian Baiti"/>
-        <a:font script="Viet" typeface="Arial"/>
-        <a:font script="Uigh" typeface="Microsoft Uighur"/>
-        <a:font script="Geor" typeface="Sylfaen"/>
-      </a:minorFont>
-    </a:fontScheme>
-    <a:fmtScheme name="Office">
-      <a:fillStyleLst>
-        <a:solidFill>
-          <a:schemeClr val="phClr"/>
-        </a:solidFill>
-        <a:gradFill rotWithShape="1">
-          <a:gsLst>
-            <a:gs pos="0">
-              <a:schemeClr val="phClr">
-                <a:tint val="50000"/>
-                <a:satMod val="300000"/>
-              </a:schemeClr>
-            </a:gs>
-            <a:gs pos="35000">
-              <a:schemeClr val="phClr">
-                <a:tint val="37000"/>
-                <a:satMod val="300000"/>
-              </a:schemeClr>
-            </a:gs>
-            <a:gs pos="100000">
-              <a:schemeClr val="phClr">
-                <a:tint val="15000"/>
-                <a:satMod val="350000"/>
-              </a:schemeClr>
-            </a:gs>
-          </a:gsLst>
-          <a:lin ang="16200000" scaled="1"/>
-        </a:gradFill>
-        <a:gradFill rotWithShape="1">
-          <a:gsLst>
-            <a:gs pos="0">
-              <a:schemeClr val="phClr">
-                <a:tint val="100000"/>
-                <a:shade val="100000"/>
-                <a:satMod val="130000"/>
-              </a:schemeClr>
-            </a:gs>
-            <a:gs pos="100000">
-              <a:schemeClr val="phClr">
-                <a:tint val="50000"/>
-                <a:shade val="100000"/>
-                <a:satMod val="350000"/>
-              </a:schemeClr>
-            </a:gs>
-          </a:gsLst>
-          <a:lin ang="16200000" scaled="0"/>
-        </a:gradFill>
-      </a:fillStyleLst>
-      <a:lnStyleLst>
-        <a:ln w="9525" cap="flat" cmpd="sng" algn="ctr">
-          <a:solidFill>
-            <a:schemeClr val="phClr">
-              <a:shade val="95000"/>
-              <a:satMod val="105000"/>
-            </a:schemeClr>
-          </a:solidFill>
-          <a:prstDash val="solid"/>
-        </a:ln>
-        <a:ln w="25400" cap="flat" cmpd="sng" algn="ctr">
-          <a:solidFill>
-            <a:schemeClr val="phClr"/>
-          </a:solidFill>
-          <a:prstDash val="solid"/>
-        </a:ln>
-        <a:ln w="38100" cap="flat" cmpd="sng" algn="ctr">
-          <a:solidFill>
-            <a:schemeClr val="phClr"/>
-          </a:solidFill>
-          <a:prstDash val="solid"/>
-        </a:ln>
-      </a:lnStyleLst>
-      <a:effectStyleLst>
-        <a:effectStyle>
-          <a:effectLst>
-            <a:outerShdw blurRad="40000" dist="20000" dir="5400000" rotWithShape="0">
-              <a:srgbClr val="000000">
-                <a:alpha val="38000"/>
-              </a:srgbClr>
-            </a:outerShdw>
-          </a:effectLst>
-        </a:effectStyle>
-        <a:effectStyle>
-          <a:effectLst>
-            <a:outerShdw blurRad="40000" dist="23000" dir="5400000" rotWithShape="0">
-              <a:srgbClr val="000000">
-                <a:alpha val="35000"/>
-              </a:srgbClr>
-            </a:outerShdw>
-          </a:effectLst>
-        </a:effectStyle>
-        <a:effectStyle>
-          <a:effectLst>
-            <a:outerShdw blurRad="40000" dist="23000" dir="5400000" rotWithShape="0">
-              <a:srgbClr val="000000">
-                <a:alpha val="35000"/>
-              </a:srgbClr>
-            </a:outerShdw>
-          </a:effectLst>
-          <a:scene3d>
-            <a:camera prst="orthographicFront">
-              <a:rot lat="0" lon="0" rev="0"/>
-            </a:camera>
-            <a:lightRig rig="threePt" dir="t">
-              <a:rot lat="0" lon="0" rev="1200000"/>
-            </a:lightRig>
-          </a:scene3d>
-          <a:sp3d>
-            <a:bevelT w="63500" h="25400"/>
-          </a:sp3d>
-        </a:effectStyle>
-      </a:effectStyleLst>
-      <a:bgFillStyleLst>
-        <a:solidFill>
-          <a:schemeClr val="phClr"/>
-        </a:solidFill>
-        <a:gradFill rotWithShape="1">
-          <a:gsLst>
-            <a:gs pos="0">
-              <a:schemeClr val="phClr">
-                <a:tint val="40000"/>
-                <a:satMod val="350000"/>
-              </a:schemeClr>
-            </a:gs>
-            <a:gs pos="40000">
-              <a:schemeClr val="phClr">
-                <a:tint val="45000"/>
-                <a:shade val="99000"/>
-                <a:satMod val="350000"/>
-              </a:schemeClr>
-            </a:gs>
-            <a:gs pos="100000">
-              <a:schemeClr val="phClr">
-                <a:shade val="20000"/>
-                <a:satMod val="255000"/>
-              </a:schemeClr>
-            </a:gs>
-          </a:gsLst>
-          <a:path path="circle">
-            <a:fillToRect l="50000" t="-80000" r="50000" b="180000"/>
-          </a:path>
-        </a:gradFill>
-        <a:gradFill rotWithShape="1">
-          <a:gsLst>
-            <a:gs pos="0">
-              <a:schemeClr val="phClr">
-                <a:tint val="80000"/>
-                <a:satMod val="300000"/>
-              </a:schemeClr>
-            </a:gs>
-            <a:gs pos="100000">
-              <a:schemeClr val="phClr">
-                <a:shade val="30000"/>
-                <a:satMod val="200000"/>
-              </a:schemeClr>
-            </a:gs>
-          </a:gsLst>
-          <a:path path="circle">
-            <a:fillToRect l="50000" t="50000" r="50000" b="50000"/>
-          </a:path>
-        </a:gradFill>
-      </a:bgFillStyleLst>
-    </a:fmtScheme>
-  </a:themeElements>
-</a:theme>
 </file>
--- a/docs/tcc/apresentacao-mapill.pptx
+++ b/docs/tcc/apresentacao-mapill.pptx
@@ -3429,44 +3429,14 @@
           </a:bodyPr>
           <a:lstStyle/>
           <a:p>
-            <a:pPr indent="0" lvl="0" marL="0" rtl="0" algn="l">
-              <a:lnSpc>
-                <a:spcPct val="100000"/>
-              </a:lnSpc>
-              <a:spcBef>
-                <a:spcPts val="0"/>
-              </a:spcBef>
-              <a:spcAft>
-                <a:spcPts val="0"/>
-              </a:spcAft>
-              <a:buSzPts val="1100"/>
-              <a:buNone/>
-            </a:pPr>
-            <a:r>
-              <a:rPr lang="en-US"/>
+            <a:r>
               <a:t>[45 s]</a:t>
             </a:r>
-            <a:endParaRPr/>
-          </a:p>
-          <a:p>
-            <a:pPr indent="0" lvl="0" marL="0" rtl="0" algn="l">
-              <a:lnSpc>
-                <a:spcPct val="100000"/>
-              </a:lnSpc>
-              <a:spcBef>
-                <a:spcPts val="0"/>
-              </a:spcBef>
-              <a:spcAft>
-                <a:spcPts val="0"/>
-              </a:spcAft>
-              <a:buSzPts val="1100"/>
-              <a:buNone/>
-            </a:pPr>
-            <a:r>
-              <a:rPr lang="en-US"/>
-              <a:t>Essa frase abre o meu trabalho, e resume por que ele existe. As duas falhas que eu comentei aparecem no dia a dia de formas bem concretas. Na cognitiva, o paciente esquece a dose, ou não lembra se já tomou. O Mapill avisa no horário, mesmo com o aplicativo fechado, e guarda cada resposta com data e hora. Na logística, o remédio acaba sem aviso, ou a consulta e a receita passam do prazo. O app desconta o estoque a cada dose e avisa antes de acabar, e lembra dos compromissos e da validade da receita.</a:t>
-            </a:r>
-            <a:endParaRPr/>
+          </a:p>
+          <a:p>
+            <a:r>
+              <a:t>Essa frase abre o meu trabalho, e resume por que ele existe. E não é um problema pequeno, a Organização Mundial da Saúde reconhece a baixa adesão ao tratamento como um dos maiores desafios da saúde pública. As duas falhas que eu comentei aparecem no dia a dia de formas bem concretas. Na cognitiva, o paciente esquece a dose, ou não lembra se já tomou. O Mapill avisa no horário, mesmo com o aplicativo fechado, e guarda cada resposta com data e hora. Na logística, o remédio acaba sem aviso, ou a consulta e a receita passam do prazo. O app desconta o estoque a cada dose e avisa antes de acabar, e lembra dos compromissos e da validade da receita.</a:t>
+            </a:r>
           </a:p>
         </p:txBody>
       </p:sp>
@@ -28483,7 +28453,7 @@
         <p:spPr>
           <a:xfrm>
             <a:off x="685800" y="2377440"/>
-            <a:ext cx="5272887" cy="3429000"/>
+            <a:ext cx="5272887" cy="3017520"/>
           </a:xfrm>
           <a:prstGeom prst="roundRect">
             <a:avLst>
@@ -28905,7 +28875,7 @@
         <p:spPr>
           <a:xfrm>
             <a:off x="6233007" y="2377440"/>
-            <a:ext cx="5272887" cy="3429000"/>
+            <a:ext cx="5272887" cy="3017520"/>
           </a:xfrm>
           <a:prstGeom prst="roundRect">
             <a:avLst>
@@ -29305,6 +29275,145 @@
                 <a:sym typeface="Plus Jakarta Sans"/>
               </a:rPr>
               <a:t>compromissos e validade da receita com lembrete</a:t>
+            </a:r>
+            <a:endParaRPr b="0" i="0" spc="0" sz="1400" u="none" cap="none" strike="noStrike">
+              <a:solidFill>
+                <a:srgbClr val="000000"/>
+              </a:solidFill>
+              <a:latin typeface="Arial"/>
+              <a:ea typeface="Arial"/>
+              <a:cs typeface="Arial"/>
+              <a:sym typeface="Arial"/>
+            </a:endParaRPr>
+          </a:p>
+        </p:txBody>
+      </p:sp>
+      <p:sp>
+        <p:nvSpPr>
+          <p:cNvPr id="950" name="Mapill;950"/>
+          <p:cNvSpPr/>
+          <p:nvPr/>
+        </p:nvSpPr>
+        <p:spPr>
+          <a:xfrm>
+            <a:off x="685800" y="5577840"/>
+            <a:ext cx="10820095" cy="640080"/>
+          </a:xfrm>
+          <a:prstGeom prst="roundRect">
+            <a:avLst>
+              <a:gd name="adj" fmla="val 16470"/>
+            </a:avLst>
+          </a:prstGeom>
+          <a:solidFill>
+            <a:srgbClr val="E6EFFD"/>
+          </a:solidFill>
+          <a:ln>
+            <a:noFill/>
+          </a:ln>
+        </p:spPr>
+        <p:txBody>
+          <a:bodyPr anchorCtr="0" anchor="ctr" bIns="45700" lIns="91425" spcFirstLastPara="1" rIns="91425" wrap="square" tIns="45700">
+            <a:noAutofit/>
+          </a:bodyPr>
+          <a:lstStyle/>
+          <a:p>
+            <a:pPr indent="0" lvl="0" marL="0" marR="0" rtl="0" algn="l">
+              <a:lnSpc>
+                <a:spcPct val="100000"/>
+              </a:lnSpc>
+              <a:spcBef>
+                <a:spcPts val="0"/>
+              </a:spcBef>
+              <a:spcAft>
+                <a:spcPts val="0"/>
+              </a:spcAft>
+              <a:buClr>
+                <a:srgbClr val="000000"/>
+              </a:buClr>
+              <a:buSzPts val="1800"/>
+              <a:buFont typeface="Arial"/>
+              <a:buNone/>
+            </a:pPr>
+            <a:r>
+              <a:t/>
+            </a:r>
+            <a:endParaRPr b="0" i="0" spc="0" sz="1800" u="none" cap="none" strike="noStrike">
+              <a:solidFill>
+                <a:schemeClr val="dk1"/>
+              </a:solidFill>
+              <a:latin typeface="Calibri"/>
+              <a:ea typeface="Calibri"/>
+              <a:cs typeface="Calibri"/>
+              <a:sym typeface="Calibri"/>
+            </a:endParaRPr>
+          </a:p>
+        </p:txBody>
+      </p:sp>
+      <p:sp>
+        <p:nvSpPr>
+          <p:cNvPr id="951" name="Mapill;951"/>
+          <p:cNvSpPr txBox="1"/>
+          <p:nvPr/>
+        </p:nvSpPr>
+        <p:spPr>
+          <a:xfrm>
+            <a:off x="1051560" y="5577840"/>
+            <a:ext cx="10088700" cy="640080"/>
+          </a:xfrm>
+          <a:prstGeom prst="rect">
+            <a:avLst/>
+          </a:prstGeom>
+          <a:noFill/>
+          <a:ln>
+            <a:noFill/>
+          </a:ln>
+        </p:spPr>
+        <p:txBody>
+          <a:bodyPr anchorCtr="0" anchor="ctr" bIns="0" lIns="0" spcFirstLastPara="1" rIns="0" wrap="square" tIns="0">
+            <a:noAutofit/>
+          </a:bodyPr>
+          <a:lstStyle/>
+          <a:p>
+            <a:pPr indent="0" lvl="0" marL="0" marR="0" rtl="0" algn="l">
+              <a:lnSpc>
+                <a:spcPct val="110000"/>
+              </a:lnSpc>
+              <a:spcBef>
+                <a:spcPts val="0"/>
+              </a:spcBef>
+              <a:spcAft>
+                <a:spcPts val="0"/>
+              </a:spcAft>
+              <a:buClr>
+                <a:srgbClr val="000000"/>
+              </a:buClr>
+              <a:buSzPts val="1900"/>
+              <a:buFont typeface="Arial"/>
+              <a:buNone/>
+            </a:pPr>
+            <a:r>
+              <a:rPr b="1" i="0" lang="en-US" spc="0" sz="1900" u="none" cap="none" strike="noStrike">
+                <a:solidFill>
+                  <a:srgbClr val="0B5FD9"/>
+                </a:solidFill>
+                <a:latin typeface="Plus Jakarta Sans"/>
+                <a:ea typeface="Plus Jakarta Sans"/>
+                <a:cs typeface="Plus Jakarta Sans"/>
+                <a:sym typeface="Plus Jakarta Sans"/>
+              </a:rPr>
+              <a:t>Um dos maiores desafios da saúde pública</a:t>
+            </a:r>
+            <a:r>
+              <a:rPr b="0" i="0" lang="en-US" spc="0" sz="1700" u="none" cap="none" strike="noStrike">
+                <a:solidFill>
+                  <a:srgbClr val="545F73"/>
+                </a:solidFill>
+                <a:latin typeface="Plus Jakarta Sans"/>
+                <a:ea typeface="Plus Jakarta Sans"/>
+                <a:cs typeface="Plus Jakarta Sans"/>
+                <a:sym typeface="Plus Jakarta Sans"/>
+              </a:rPr>
+              <a:t>   ·   reconhecido pela OMS (WHO, 2003)</a:t>
             </a:r>
             <a:endParaRPr b="0" i="0" spc="0" sz="1400" u="none" cap="none" strike="noStrike">
               <a:solidFill>

--- a/docs/tcc/apresentacao-mapill.pptx
+++ b/docs/tcc/apresentacao-mapill.pptx
@@ -21,6 +21,7 @@
     <p:sldId id="266" r:id="rId16"/>
     <p:sldId id="267" r:id="rId17"/>
     <p:sldId id="268" r:id="rId18"/>
+    <p:sldId id="273" r:id="rId28"/>
     <p:sldId id="269" r:id="rId19"/>
     <p:sldId id="270" r:id="rId20"/>
     <p:sldId id="271" r:id="rId21"/>
@@ -2172,44 +2173,14 @@
           </a:bodyPr>
           <a:lstStyle/>
           <a:p>
-            <a:pPr indent="0" lvl="0" marL="0" rtl="0" algn="l">
-              <a:lnSpc>
-                <a:spcPct val="100000"/>
-              </a:lnSpc>
-              <a:spcBef>
-                <a:spcPts val="0"/>
-              </a:spcBef>
-              <a:spcAft>
-                <a:spcPts val="0"/>
-              </a:spcAft>
-              <a:buSzPts val="1100"/>
-              <a:buNone/>
-            </a:pPr>
-            <a:r>
-              <a:rPr lang="en-US"/>
+            <a:r>
               <a:t>[1 min]</a:t>
             </a:r>
-            <a:endParaRPr/>
-          </a:p>
-          <a:p>
-            <a:pPr indent="0" lvl="0" marL="0" rtl="0" algn="l">
-              <a:lnSpc>
-                <a:spcPct val="100000"/>
-              </a:lnSpc>
-              <a:spcBef>
-                <a:spcPts val="0"/>
-              </a:spcBef>
-              <a:spcAft>
-                <a:spcPts val="0"/>
-              </a:spcAft>
-              <a:buSzPts val="1100"/>
-              <a:buNone/>
-            </a:pPr>
-            <a:r>
-              <a:rPr lang="en-US"/>
-              <a:t>A validação foi feita por mim, num aparelho físico, seguindo um roteiro escrito em que cada passo tinha o resultado esperado. O segundo aparelho foi simulado direto na base remota. Os cinco cenários da arquitetura offline-first foram aprovados, três deles depois de ajustes que os próprios testes revelaram, como fazer a edição mais recente prevalecer também no servidor. O alarme funcionou nas quatro combinações de celular bloqueado ou em uso, com o app nos recentes ou fora deles. A limitação apareceu depois de reiniciar o celular. O alarme só tocou quando o aparelho foi desbloqueado, por uma restrição de inicialização automática que o fabricante aplica, e que o Android não deixa contornar. O app passou a orientar o paciente a liberar essa permissão.</a:t>
-            </a:r>
-            <a:endParaRPr/>
+          </a:p>
+          <a:p>
+            <a:r>
+              <a:t>A validação foi feita por mim, num aparelho físico, seguindo um roteiro escrito em que cada passo tinha o resultado esperado. O segundo aparelho foi simulado direto na base remota. Os cinco cenários da arquitetura offline-first foram aprovados, e três deles só depois de ajustes que os próprios testes revelaram. Na restauração, o app pedia de novo os termos e a ficha de saúde, porque olhava o banco local antes de receber os dados da nuvem. Doses futuras excluídas voltavam a aparecer, e a exclusão passou a ser lógica. Entre dois aparelhos, vencia a versão sincronizada por último, e não a mais recente, então o servidor passou a aplicar o mesmo critério. E as edições feitas sem conexão não chegavam ao outro aparelho, o que foi resolvido olhando o momento em que o dado chega à nuvem.</a:t>
+            </a:r>
           </a:p>
         </p:txBody>
       </p:sp>
@@ -3007,6 +2978,69 @@
               <a:cs typeface="Arial"/>
               <a:sym typeface="Arial"/>
             </a:endParaRPr>
+          </a:p>
+        </p:txBody>
+      </p:sp>
+    </p:spTree>
+  </p:cSld>
+  <p:clrMapOvr>
+    <a:masterClrMapping/>
+  </p:clrMapOvr>
+</p:notes>
+</file>
+
+<file path=ppt/notesSlides/notesSlide18.xml><?xml version="1.0" encoding="utf-8"?>
+<p:notes xmlns:a="http://schemas.openxmlformats.org/drawingml/2006/main" xmlns:p="http://schemas.openxmlformats.org/presentationml/2006/main" xmlns:r="http://schemas.openxmlformats.org/officeDocument/2006/relationships">
+  <p:cSld>
+    <p:spTree>
+      <p:nvGrpSpPr>
+        <p:cNvPr id="1" name=""/>
+        <p:cNvGrpSpPr/>
+        <p:nvPr/>
+      </p:nvGrpSpPr>
+      <p:grpSpPr>
+        <a:xfrm>
+          <a:off x="0" y="0"/>
+          <a:ext cx="0" cy="0"/>
+          <a:chOff x="0" y="0"/>
+          <a:chExt cx="0" cy="0"/>
+        </a:xfrm>
+      </p:grpSpPr>
+      <p:sp>
+        <p:nvSpPr>
+          <p:cNvPr id="2" name="Slide Image Placeholder 1"/>
+          <p:cNvSpPr>
+            <a:spLocks noGrp="1"/>
+          </p:cNvSpPr>
+          <p:nvPr>
+            <p:ph type="sldImg" idx="2"/>
+          </p:nvPr>
+        </p:nvSpPr>
+        <p:spPr/>
+      </p:sp>
+      <p:sp>
+        <p:nvSpPr>
+          <p:cNvPr id="3" name="Notes Placeholder 2"/>
+          <p:cNvSpPr>
+            <a:spLocks noGrp="1"/>
+          </p:cNvSpPr>
+          <p:nvPr>
+            <p:ph type="body" idx="1"/>
+          </p:nvPr>
+        </p:nvSpPr>
+        <p:spPr/>
+        <p:txBody>
+          <a:bodyPr/>
+          <a:lstStyle/>
+          <a:p>
+            <a:r>
+              <a:t>[1 min]</a:t>
+            </a:r>
+          </a:p>
+          <a:p>
+            <a:r>
+              <a:t>O alarme, que é o centro do app, foi testado nas quatro combinações de celular bloqueado ou em uso, com o app nos recentes ou fora deles. Com o celular bloqueado, a tela do alarme apareceu por cima da tela de bloqueio. Com o celular em uso, apareceu a notificação com os botões de tomar e pular. Nos testes, percebi que a tela do alarme herdava a permissão de aparecer sobre o bloqueio que era do app inteiro, então isolei essa tela, e ao fechar o alarme o celular volta a ficar bloqueado, sem expor os outros dados. A ressalva veio depois de reiniciar o celular. O alarme só tocou quando o aparelho foi desbloqueado, por uma restrição de inicialização automática que o fabricante aplica e que o Android não deixa contornar. O app passou a orientar o paciente a liberar essa permissão.</a:t>
+            </a:r>
           </a:p>
         </p:txBody>
       </p:sp>
@@ -21572,7 +21606,7 @@
         <p:spPr>
           <a:xfrm>
             <a:off x="7680960" y="1783080"/>
-            <a:ext cx="3822191" cy="1920240"/>
+            <a:ext cx="3822191" cy="4160400"/>
           </a:xfrm>
           <a:prstGeom prst="roundRect">
             <a:avLst>
@@ -21632,8 +21666,8 @@
         </p:nvSpPr>
         <p:spPr>
           <a:xfrm>
-            <a:off x="7946100" y="2163580"/>
-            <a:ext cx="3291900" cy="1262100"/>
+            <a:off x="7946100" y="1965960"/>
+            <a:ext cx="3291900" cy="3794760"/>
           </a:xfrm>
           <a:prstGeom prst="rect">
             <a:avLst/>
@@ -21676,7 +21710,7 @@
                 <a:cs typeface="Plus Jakarta Sans"/>
                 <a:sym typeface="Plus Jakarta Sans"/>
               </a:rPr>
-              <a:t>ALARME</a:t>
+              <a:t>O QUE OS TESTES CORRIGIRAM</a:t>
             </a:r>
             <a:endParaRPr b="1" i="0" spc="200" sz="1100" u="none" cap="none" strike="noStrike">
               <a:solidFill>
@@ -21707,6 +21741,15 @@
               <a:buNone/>
             </a:pPr>
             <a:r>
+              <a:rPr b="1" i="0" lang="en-US" spc="200" sz="800" u="none" cap="none" strike="noStrike">
+                <a:solidFill>
+                  <a:srgbClr val="11803E"/>
+                </a:solidFill>
+                <a:latin typeface="Plus Jakarta Sans"/>
+                <a:ea typeface="Plus Jakarta Sans"/>
+                <a:cs typeface="Plus Jakarta Sans"/>
+                <a:sym typeface="Plus Jakarta Sans"/>
+              </a:rPr>
               <a:t/>
             </a:r>
             <a:endParaRPr b="1" i="0" spc="200" sz="1100" u="none" cap="none" strike="noStrike">
@@ -21725,20 +21768,20 @@
                 <a:spcPct val="110000"/>
               </a:lnSpc>
               <a:spcBef>
-                <a:spcPts val="400"/>
-              </a:spcBef>
-              <a:spcAft>
-                <a:spcPts val="0"/>
-              </a:spcAft>
-              <a:buClr>
-                <a:srgbClr val="000000"/>
-              </a:buClr>
-              <a:buSzPts val="1800"/>
-              <a:buFont typeface="Arial"/>
-              <a:buNone/>
-            </a:pPr>
-            <a:r>
-              <a:rPr b="1" i="0" lang="en-US" spc="0" sz="1800" u="none" cap="none" strike="noStrike">
+                <a:spcPts val="0"/>
+              </a:spcBef>
+              <a:spcAft>
+                <a:spcPts val="0"/>
+              </a:spcAft>
+              <a:buClr>
+                <a:srgbClr val="000000"/>
+              </a:buClr>
+              <a:buSzPts val="1100"/>
+              <a:buFont typeface="Arial"/>
+              <a:buNone/>
+            </a:pPr>
+            <a:r>
+              <a:rPr b="1" i="0" lang="en-US" spc="0" sz="1400" u="none" cap="none" strike="noStrike">
                 <a:solidFill>
                   <a:srgbClr val="191C1E"/>
                 </a:solidFill>
@@ -21747,7 +21790,595 @@
                 <a:cs typeface="Plus Jakarta Sans"/>
                 <a:sym typeface="Plus Jakarta Sans"/>
               </a:rPr>
-              <a:t>Aprovado nas 4 combinações</a:t>
+              <a:t>Restauração pedia os termos de novo</a:t>
+            </a:r>
+            <a:endParaRPr b="1" i="0" spc="200" sz="1100" u="none" cap="none" strike="noStrike">
+              <a:solidFill>
+                <a:srgbClr val="11803E"/>
+              </a:solidFill>
+              <a:latin typeface="Plus Jakarta Sans"/>
+              <a:ea typeface="Plus Jakarta Sans"/>
+              <a:cs typeface="Plus Jakarta Sans"/>
+              <a:sym typeface="Plus Jakarta Sans"/>
+            </a:endParaRPr>
+          </a:p>
+          <a:p>
+            <a:pPr indent="0" lvl="0" marL="0" marR="0" rtl="0" algn="l">
+              <a:lnSpc>
+                <a:spcPct val="110000"/>
+              </a:lnSpc>
+              <a:spcBef>
+                <a:spcPts val="0"/>
+              </a:spcBef>
+              <a:spcAft>
+                <a:spcPts val="0"/>
+              </a:spcAft>
+              <a:buClr>
+                <a:srgbClr val="000000"/>
+              </a:buClr>
+              <a:buSzPts val="1100"/>
+              <a:buFont typeface="Arial"/>
+              <a:buNone/>
+            </a:pPr>
+            <a:r>
+              <a:rPr b="0" i="0" lang="en-US" spc="0" sz="1300" u="none" cap="none" strike="noStrike">
+                <a:solidFill>
+                  <a:srgbClr val="545F73"/>
+                </a:solidFill>
+                <a:latin typeface="Plus Jakarta Sans"/>
+                <a:ea typeface="Plus Jakarta Sans"/>
+                <a:cs typeface="Plus Jakarta Sans"/>
+                <a:sym typeface="Plus Jakarta Sans"/>
+              </a:rPr>
+              <a:t>agora espera os dados da nuvem</a:t>
+            </a:r>
+            <a:endParaRPr b="1" i="0" spc="200" sz="1100" u="none" cap="none" strike="noStrike">
+              <a:solidFill>
+                <a:srgbClr val="11803E"/>
+              </a:solidFill>
+              <a:latin typeface="Plus Jakarta Sans"/>
+              <a:ea typeface="Plus Jakarta Sans"/>
+              <a:cs typeface="Plus Jakarta Sans"/>
+              <a:sym typeface="Plus Jakarta Sans"/>
+            </a:endParaRPr>
+          </a:p>
+          <a:p>
+            <a:pPr indent="0" lvl="0" marL="0" marR="0" rtl="0" algn="l">
+              <a:lnSpc>
+                <a:spcPct val="110000"/>
+              </a:lnSpc>
+              <a:spcBef>
+                <a:spcPts val="0"/>
+              </a:spcBef>
+              <a:spcAft>
+                <a:spcPts val="0"/>
+              </a:spcAft>
+              <a:buClr>
+                <a:srgbClr val="000000"/>
+              </a:buClr>
+              <a:buSzPts val="1100"/>
+              <a:buFont typeface="Arial"/>
+              <a:buNone/>
+            </a:pPr>
+            <a:r>
+              <a:rPr b="1" i="0" lang="en-US" spc="200" sz="800" u="none" cap="none" strike="noStrike">
+                <a:solidFill>
+                  <a:srgbClr val="11803E"/>
+                </a:solidFill>
+                <a:latin typeface="Plus Jakarta Sans"/>
+                <a:ea typeface="Plus Jakarta Sans"/>
+                <a:cs typeface="Plus Jakarta Sans"/>
+                <a:sym typeface="Plus Jakarta Sans"/>
+              </a:rPr>
+              <a:t/>
+            </a:r>
+            <a:endParaRPr b="1" i="0" spc="200" sz="1100" u="none" cap="none" strike="noStrike">
+              <a:solidFill>
+                <a:srgbClr val="11803E"/>
+              </a:solidFill>
+              <a:latin typeface="Plus Jakarta Sans"/>
+              <a:ea typeface="Plus Jakarta Sans"/>
+              <a:cs typeface="Plus Jakarta Sans"/>
+              <a:sym typeface="Plus Jakarta Sans"/>
+            </a:endParaRPr>
+          </a:p>
+          <a:p>
+            <a:pPr indent="0" lvl="0" marL="0" marR="0" rtl="0" algn="l">
+              <a:lnSpc>
+                <a:spcPct val="110000"/>
+              </a:lnSpc>
+              <a:spcBef>
+                <a:spcPts val="0"/>
+              </a:spcBef>
+              <a:spcAft>
+                <a:spcPts val="0"/>
+              </a:spcAft>
+              <a:buClr>
+                <a:srgbClr val="000000"/>
+              </a:buClr>
+              <a:buSzPts val="1100"/>
+              <a:buFont typeface="Arial"/>
+              <a:buNone/>
+            </a:pPr>
+            <a:r>
+              <a:rPr b="1" i="0" lang="en-US" spc="0" sz="1400" u="none" cap="none" strike="noStrike">
+                <a:solidFill>
+                  <a:srgbClr val="191C1E"/>
+                </a:solidFill>
+                <a:latin typeface="Plus Jakarta Sans"/>
+                <a:ea typeface="Plus Jakarta Sans"/>
+                <a:cs typeface="Plus Jakarta Sans"/>
+                <a:sym typeface="Plus Jakarta Sans"/>
+              </a:rPr>
+              <a:t>Doses excluídas reapareciam</a:t>
+            </a:r>
+            <a:endParaRPr b="1" i="0" spc="200" sz="1100" u="none" cap="none" strike="noStrike">
+              <a:solidFill>
+                <a:srgbClr val="11803E"/>
+              </a:solidFill>
+              <a:latin typeface="Plus Jakarta Sans"/>
+              <a:ea typeface="Plus Jakarta Sans"/>
+              <a:cs typeface="Plus Jakarta Sans"/>
+              <a:sym typeface="Plus Jakarta Sans"/>
+            </a:endParaRPr>
+          </a:p>
+          <a:p>
+            <a:pPr indent="0" lvl="0" marL="0" marR="0" rtl="0" algn="l">
+              <a:lnSpc>
+                <a:spcPct val="110000"/>
+              </a:lnSpc>
+              <a:spcBef>
+                <a:spcPts val="0"/>
+              </a:spcBef>
+              <a:spcAft>
+                <a:spcPts val="0"/>
+              </a:spcAft>
+              <a:buClr>
+                <a:srgbClr val="000000"/>
+              </a:buClr>
+              <a:buSzPts val="1100"/>
+              <a:buFont typeface="Arial"/>
+              <a:buNone/>
+            </a:pPr>
+            <a:r>
+              <a:rPr b="0" i="0" lang="en-US" spc="0" sz="1300" u="none" cap="none" strike="noStrike">
+                <a:solidFill>
+                  <a:srgbClr val="545F73"/>
+                </a:solidFill>
+                <a:latin typeface="Plus Jakarta Sans"/>
+                <a:ea typeface="Plus Jakarta Sans"/>
+                <a:cs typeface="Plus Jakarta Sans"/>
+                <a:sym typeface="Plus Jakarta Sans"/>
+              </a:rPr>
+              <a:t>a exclusão passou a ser lógica</a:t>
+            </a:r>
+            <a:endParaRPr b="1" i="0" spc="200" sz="1100" u="none" cap="none" strike="noStrike">
+              <a:solidFill>
+                <a:srgbClr val="11803E"/>
+              </a:solidFill>
+              <a:latin typeface="Plus Jakarta Sans"/>
+              <a:ea typeface="Plus Jakarta Sans"/>
+              <a:cs typeface="Plus Jakarta Sans"/>
+              <a:sym typeface="Plus Jakarta Sans"/>
+            </a:endParaRPr>
+          </a:p>
+          <a:p>
+            <a:pPr indent="0" lvl="0" marL="0" marR="0" rtl="0" algn="l">
+              <a:lnSpc>
+                <a:spcPct val="110000"/>
+              </a:lnSpc>
+              <a:spcBef>
+                <a:spcPts val="0"/>
+              </a:spcBef>
+              <a:spcAft>
+                <a:spcPts val="0"/>
+              </a:spcAft>
+              <a:buClr>
+                <a:srgbClr val="000000"/>
+              </a:buClr>
+              <a:buSzPts val="1100"/>
+              <a:buFont typeface="Arial"/>
+              <a:buNone/>
+            </a:pPr>
+            <a:r>
+              <a:rPr b="1" i="0" lang="en-US" spc="200" sz="800" u="none" cap="none" strike="noStrike">
+                <a:solidFill>
+                  <a:srgbClr val="11803E"/>
+                </a:solidFill>
+                <a:latin typeface="Plus Jakarta Sans"/>
+                <a:ea typeface="Plus Jakarta Sans"/>
+                <a:cs typeface="Plus Jakarta Sans"/>
+                <a:sym typeface="Plus Jakarta Sans"/>
+              </a:rPr>
+              <a:t/>
+            </a:r>
+            <a:endParaRPr b="1" i="0" spc="200" sz="1100" u="none" cap="none" strike="noStrike">
+              <a:solidFill>
+                <a:srgbClr val="11803E"/>
+              </a:solidFill>
+              <a:latin typeface="Plus Jakarta Sans"/>
+              <a:ea typeface="Plus Jakarta Sans"/>
+              <a:cs typeface="Plus Jakarta Sans"/>
+              <a:sym typeface="Plus Jakarta Sans"/>
+            </a:endParaRPr>
+          </a:p>
+          <a:p>
+            <a:pPr indent="0" lvl="0" marL="0" marR="0" rtl="0" algn="l">
+              <a:lnSpc>
+                <a:spcPct val="110000"/>
+              </a:lnSpc>
+              <a:spcBef>
+                <a:spcPts val="0"/>
+              </a:spcBef>
+              <a:spcAft>
+                <a:spcPts val="0"/>
+              </a:spcAft>
+              <a:buClr>
+                <a:srgbClr val="000000"/>
+              </a:buClr>
+              <a:buSzPts val="1100"/>
+              <a:buFont typeface="Arial"/>
+              <a:buNone/>
+            </a:pPr>
+            <a:r>
+              <a:rPr b="1" i="0" lang="en-US" spc="0" sz="1400" u="none" cap="none" strike="noStrike">
+                <a:solidFill>
+                  <a:srgbClr val="191C1E"/>
+                </a:solidFill>
+                <a:latin typeface="Plus Jakarta Sans"/>
+                <a:ea typeface="Plus Jakarta Sans"/>
+                <a:cs typeface="Plus Jakarta Sans"/>
+                <a:sym typeface="Plus Jakarta Sans"/>
+              </a:rPr>
+              <a:t>Vencia a última sincronizada</a:t>
+            </a:r>
+            <a:endParaRPr b="1" i="0" spc="200" sz="1100" u="none" cap="none" strike="noStrike">
+              <a:solidFill>
+                <a:srgbClr val="11803E"/>
+              </a:solidFill>
+              <a:latin typeface="Plus Jakarta Sans"/>
+              <a:ea typeface="Plus Jakarta Sans"/>
+              <a:cs typeface="Plus Jakarta Sans"/>
+              <a:sym typeface="Plus Jakarta Sans"/>
+            </a:endParaRPr>
+          </a:p>
+          <a:p>
+            <a:pPr indent="0" lvl="0" marL="0" marR="0" rtl="0" algn="l">
+              <a:lnSpc>
+                <a:spcPct val="110000"/>
+              </a:lnSpc>
+              <a:spcBef>
+                <a:spcPts val="0"/>
+              </a:spcBef>
+              <a:spcAft>
+                <a:spcPts val="0"/>
+              </a:spcAft>
+              <a:buClr>
+                <a:srgbClr val="000000"/>
+              </a:buClr>
+              <a:buSzPts val="1100"/>
+              <a:buFont typeface="Arial"/>
+              <a:buNone/>
+            </a:pPr>
+            <a:r>
+              <a:rPr b="0" i="0" lang="en-US" spc="0" sz="1300" u="none" cap="none" strike="noStrike">
+                <a:solidFill>
+                  <a:srgbClr val="545F73"/>
+                </a:solidFill>
+                <a:latin typeface="Plus Jakarta Sans"/>
+                <a:ea typeface="Plus Jakarta Sans"/>
+                <a:cs typeface="Plus Jakarta Sans"/>
+                <a:sym typeface="Plus Jakarta Sans"/>
+              </a:rPr>
+              <a:t>o servidor passou a aplicar o LWW</a:t>
+            </a:r>
+            <a:endParaRPr b="1" i="0" spc="200" sz="1100" u="none" cap="none" strike="noStrike">
+              <a:solidFill>
+                <a:srgbClr val="11803E"/>
+              </a:solidFill>
+              <a:latin typeface="Plus Jakarta Sans"/>
+              <a:ea typeface="Plus Jakarta Sans"/>
+              <a:cs typeface="Plus Jakarta Sans"/>
+              <a:sym typeface="Plus Jakarta Sans"/>
+            </a:endParaRPr>
+          </a:p>
+          <a:p>
+            <a:pPr indent="0" lvl="0" marL="0" marR="0" rtl="0" algn="l">
+              <a:lnSpc>
+                <a:spcPct val="110000"/>
+              </a:lnSpc>
+              <a:spcBef>
+                <a:spcPts val="0"/>
+              </a:spcBef>
+              <a:spcAft>
+                <a:spcPts val="0"/>
+              </a:spcAft>
+              <a:buClr>
+                <a:srgbClr val="000000"/>
+              </a:buClr>
+              <a:buSzPts val="1100"/>
+              <a:buFont typeface="Arial"/>
+              <a:buNone/>
+            </a:pPr>
+            <a:r>
+              <a:rPr b="1" i="0" lang="en-US" spc="200" sz="800" u="none" cap="none" strike="noStrike">
+                <a:solidFill>
+                  <a:srgbClr val="11803E"/>
+                </a:solidFill>
+                <a:latin typeface="Plus Jakarta Sans"/>
+                <a:ea typeface="Plus Jakarta Sans"/>
+                <a:cs typeface="Plus Jakarta Sans"/>
+                <a:sym typeface="Plus Jakarta Sans"/>
+              </a:rPr>
+              <a:t/>
+            </a:r>
+            <a:endParaRPr b="1" i="0" spc="200" sz="1100" u="none" cap="none" strike="noStrike">
+              <a:solidFill>
+                <a:srgbClr val="11803E"/>
+              </a:solidFill>
+              <a:latin typeface="Plus Jakarta Sans"/>
+              <a:ea typeface="Plus Jakarta Sans"/>
+              <a:cs typeface="Plus Jakarta Sans"/>
+              <a:sym typeface="Plus Jakarta Sans"/>
+            </a:endParaRPr>
+          </a:p>
+          <a:p>
+            <a:pPr indent="0" lvl="0" marL="0" marR="0" rtl="0" algn="l">
+              <a:lnSpc>
+                <a:spcPct val="110000"/>
+              </a:lnSpc>
+              <a:spcBef>
+                <a:spcPts val="0"/>
+              </a:spcBef>
+              <a:spcAft>
+                <a:spcPts val="0"/>
+              </a:spcAft>
+              <a:buClr>
+                <a:srgbClr val="000000"/>
+              </a:buClr>
+              <a:buSzPts val="1100"/>
+              <a:buFont typeface="Arial"/>
+              <a:buNone/>
+            </a:pPr>
+            <a:r>
+              <a:rPr b="1" i="0" lang="en-US" spc="0" sz="1400" u="none" cap="none" strike="noStrike">
+                <a:solidFill>
+                  <a:srgbClr val="191C1E"/>
+                </a:solidFill>
+                <a:latin typeface="Plus Jakarta Sans"/>
+                <a:ea typeface="Plus Jakarta Sans"/>
+                <a:cs typeface="Plus Jakarta Sans"/>
+                <a:sym typeface="Plus Jakarta Sans"/>
+              </a:rPr>
+              <a:t>Edição offline não chegava ao outro aparelho</a:t>
+            </a:r>
+            <a:endParaRPr b="1" i="0" spc="200" sz="1100" u="none" cap="none" strike="noStrike">
+              <a:solidFill>
+                <a:srgbClr val="11803E"/>
+              </a:solidFill>
+              <a:latin typeface="Plus Jakarta Sans"/>
+              <a:ea typeface="Plus Jakarta Sans"/>
+              <a:cs typeface="Plus Jakarta Sans"/>
+              <a:sym typeface="Plus Jakarta Sans"/>
+            </a:endParaRPr>
+          </a:p>
+          <a:p>
+            <a:pPr indent="0" lvl="0" marL="0" marR="0" rtl="0" algn="l">
+              <a:lnSpc>
+                <a:spcPct val="110000"/>
+              </a:lnSpc>
+              <a:spcBef>
+                <a:spcPts val="0"/>
+              </a:spcBef>
+              <a:spcAft>
+                <a:spcPts val="0"/>
+              </a:spcAft>
+              <a:buClr>
+                <a:srgbClr val="000000"/>
+              </a:buClr>
+              <a:buSzPts val="1100"/>
+              <a:buFont typeface="Arial"/>
+              <a:buNone/>
+            </a:pPr>
+            <a:r>
+              <a:rPr b="0" i="0" lang="en-US" spc="0" sz="1300" u="none" cap="none" strike="noStrike">
+                <a:solidFill>
+                  <a:srgbClr val="545F73"/>
+                </a:solidFill>
+                <a:latin typeface="Plus Jakarta Sans"/>
+                <a:ea typeface="Plus Jakarta Sans"/>
+                <a:cs typeface="Plus Jakarta Sans"/>
+                <a:sym typeface="Plus Jakarta Sans"/>
+              </a:rPr>
+              <a:t>o recebimento usa a chegada à nuvem</a:t>
+            </a:r>
+            <a:endParaRPr b="1" i="0" spc="200" sz="1100" u="none" cap="none" strike="noStrike">
+              <a:solidFill>
+                <a:srgbClr val="11803E"/>
+              </a:solidFill>
+              <a:latin typeface="Plus Jakarta Sans"/>
+              <a:ea typeface="Plus Jakarta Sans"/>
+              <a:cs typeface="Plus Jakarta Sans"/>
+              <a:sym typeface="Plus Jakarta Sans"/>
+            </a:endParaRPr>
+          </a:p>
+        </p:txBody>
+      </p:sp>
+      <p:sp>
+        <p:nvSpPr>
+          <p:cNvPr id="373" name="Google Shape;373;p13"/>
+          <p:cNvSpPr/>
+          <p:nvPr/>
+        </p:nvSpPr>
+        <p:spPr>
+          <a:xfrm>
+            <a:off x="5852110" y="4333790"/>
+            <a:ext cx="1234500" cy="329100"/>
+          </a:xfrm>
+          <a:prstGeom prst="roundRect">
+            <a:avLst>
+              <a:gd fmla="val 50000" name="adj"/>
+            </a:avLst>
+          </a:prstGeom>
+          <a:solidFill>
+            <a:srgbClr val="E3F6EA"/>
+          </a:solidFill>
+          <a:ln>
+            <a:noFill/>
+          </a:ln>
+        </p:spPr>
+        <p:txBody>
+          <a:bodyPr anchorCtr="0" anchor="ctr" bIns="45700" lIns="91425" spcFirstLastPara="1" rIns="91425" wrap="square" tIns="45700">
+            <a:noAutofit/>
+          </a:bodyPr>
+          <a:lstStyle/>
+          <a:p>
+            <a:pPr indent="0" lvl="0" marL="0" marR="0" rtl="0" algn="l">
+              <a:lnSpc>
+                <a:spcPct val="100000"/>
+              </a:lnSpc>
+              <a:spcBef>
+                <a:spcPts val="0"/>
+              </a:spcBef>
+              <a:spcAft>
+                <a:spcPts val="0"/>
+              </a:spcAft>
+              <a:buClr>
+                <a:srgbClr val="000000"/>
+              </a:buClr>
+              <a:buSzPts val="1800"/>
+              <a:buFont typeface="Arial"/>
+              <a:buNone/>
+            </a:pPr>
+            <a:r>
+              <a:t/>
+            </a:r>
+            <a:endParaRPr b="0" i="0" spc="0" sz="1800" u="none" cap="none" strike="noStrike">
+              <a:solidFill>
+                <a:schemeClr val="dk1"/>
+              </a:solidFill>
+              <a:latin typeface="Calibri"/>
+              <a:ea typeface="Calibri"/>
+              <a:cs typeface="Calibri"/>
+              <a:sym typeface="Calibri"/>
+            </a:endParaRPr>
+          </a:p>
+        </p:txBody>
+      </p:sp>
+      <p:sp>
+        <p:nvSpPr>
+          <p:cNvPr id="374" name="Google Shape;374;p13"/>
+          <p:cNvSpPr/>
+          <p:nvPr/>
+        </p:nvSpPr>
+        <p:spPr>
+          <a:xfrm>
+            <a:off x="5852110" y="5119415"/>
+            <a:ext cx="1234500" cy="329100"/>
+          </a:xfrm>
+          <a:prstGeom prst="roundRect">
+            <a:avLst>
+              <a:gd fmla="val 50000" name="adj"/>
+            </a:avLst>
+          </a:prstGeom>
+          <a:solidFill>
+            <a:srgbClr val="E3F6EA"/>
+          </a:solidFill>
+          <a:ln>
+            <a:noFill/>
+          </a:ln>
+        </p:spPr>
+        <p:txBody>
+          <a:bodyPr anchorCtr="0" anchor="ctr" bIns="45700" lIns="91425" spcFirstLastPara="1" rIns="91425" wrap="square" tIns="45700">
+            <a:noAutofit/>
+          </a:bodyPr>
+          <a:lstStyle/>
+          <a:p>
+            <a:pPr indent="0" lvl="0" marL="0" marR="0" rtl="0" algn="l">
+              <a:lnSpc>
+                <a:spcPct val="100000"/>
+              </a:lnSpc>
+              <a:spcBef>
+                <a:spcPts val="0"/>
+              </a:spcBef>
+              <a:spcAft>
+                <a:spcPts val="0"/>
+              </a:spcAft>
+              <a:buClr>
+                <a:srgbClr val="000000"/>
+              </a:buClr>
+              <a:buSzPts val="1800"/>
+              <a:buFont typeface="Arial"/>
+              <a:buNone/>
+            </a:pPr>
+            <a:r>
+              <a:t/>
+            </a:r>
+            <a:endParaRPr b="0" i="0" spc="0" sz="1800" u="none" cap="none" strike="noStrike">
+              <a:solidFill>
+                <a:schemeClr val="dk1"/>
+              </a:solidFill>
+              <a:latin typeface="Calibri"/>
+              <a:ea typeface="Calibri"/>
+              <a:cs typeface="Calibri"/>
+              <a:sym typeface="Calibri"/>
+            </a:endParaRPr>
+          </a:p>
+        </p:txBody>
+      </p:sp>
+      <p:sp>
+        <p:nvSpPr>
+          <p:cNvPr id="375" name="Google Shape;375;p13"/>
+          <p:cNvSpPr txBox="1"/>
+          <p:nvPr/>
+        </p:nvSpPr>
+        <p:spPr>
+          <a:xfrm>
+            <a:off x="5852110" y="4405953"/>
+            <a:ext cx="1234500" cy="184800"/>
+          </a:xfrm>
+          <a:prstGeom prst="rect">
+            <a:avLst/>
+          </a:prstGeom>
+          <a:noFill/>
+          <a:ln>
+            <a:noFill/>
+          </a:ln>
+        </p:spPr>
+        <p:txBody>
+          <a:bodyPr anchorCtr="0" anchor="ctr" bIns="0" lIns="0" spcFirstLastPara="1" rIns="0" wrap="square" tIns="0">
+            <a:spAutoFit/>
+          </a:bodyPr>
+          <a:lstStyle/>
+          <a:p>
+            <a:pPr indent="0" lvl="0" marL="0" marR="0" rtl="0" algn="ctr">
+              <a:lnSpc>
+                <a:spcPct val="110000"/>
+              </a:lnSpc>
+              <a:spcBef>
+                <a:spcPts val="0"/>
+              </a:spcBef>
+              <a:spcAft>
+                <a:spcPts val="0"/>
+              </a:spcAft>
+              <a:buClr>
+                <a:srgbClr val="000000"/>
+              </a:buClr>
+              <a:buSzPts val="1200"/>
+              <a:buFont typeface="Arial"/>
+              <a:buNone/>
+            </a:pPr>
+            <a:r>
+              <a:rPr b="1" i="0" lang="en-US" spc="0" sz="1200" u="none" cap="none" strike="noStrike">
+                <a:solidFill>
+                  <a:srgbClr val="11803E"/>
+                </a:solidFill>
+                <a:latin typeface="Plus Jakarta Sans"/>
+                <a:ea typeface="Plus Jakarta Sans"/>
+                <a:cs typeface="Plus Jakarta Sans"/>
+                <a:sym typeface="Plus Jakarta Sans"/>
+              </a:rPr>
+              <a:t>Aprovado</a:t>
             </a:r>
             <a:endParaRPr b="0" i="0" spc="0" sz="1400" u="none" cap="none" strike="noStrike">
               <a:solidFill>
@@ -21759,39 +22390,1319 @@
               <a:sym typeface="Arial"/>
             </a:endParaRPr>
           </a:p>
+        </p:txBody>
+      </p:sp>
+      <p:sp>
+        <p:nvSpPr>
+          <p:cNvPr id="376" name="Google Shape;376;p13"/>
+          <p:cNvSpPr/>
+          <p:nvPr/>
+        </p:nvSpPr>
+        <p:spPr>
+          <a:xfrm>
+            <a:off x="5852135" y="3584253"/>
+            <a:ext cx="1234500" cy="329100"/>
+          </a:xfrm>
+          <a:prstGeom prst="roundRect">
+            <a:avLst>
+              <a:gd fmla="val 50000" name="adj"/>
+            </a:avLst>
+          </a:prstGeom>
+          <a:solidFill>
+            <a:srgbClr val="E3F6EA"/>
+          </a:solidFill>
+          <a:ln>
+            <a:noFill/>
+          </a:ln>
+        </p:spPr>
+        <p:txBody>
+          <a:bodyPr anchorCtr="0" anchor="ctr" bIns="45700" lIns="91425" spcFirstLastPara="1" rIns="91425" wrap="square" tIns="45700">
+            <a:noAutofit/>
+          </a:bodyPr>
+          <a:lstStyle/>
           <a:p>
             <a:pPr indent="0" lvl="0" marL="0" marR="0" rtl="0" algn="l">
               <a:lnSpc>
                 <a:spcPct val="100000"/>
               </a:lnSpc>
               <a:spcBef>
-                <a:spcPts val="400"/>
-              </a:spcBef>
-              <a:spcAft>
-                <a:spcPts val="0"/>
-              </a:spcAft>
-              <a:buClr>
-                <a:srgbClr val="000000"/>
-              </a:buClr>
-              <a:buSzPts val="1400"/>
-              <a:buFont typeface="Arial"/>
-              <a:buNone/>
-            </a:pPr>
-            <a:r>
-              <a:rPr b="0" i="0" lang="en-US" spc="0" sz="1400" u="none" cap="none" strike="noStrike">
-                <a:solidFill>
-                  <a:srgbClr val="545F73"/>
+                <a:spcPts val="0"/>
+              </a:spcBef>
+              <a:spcAft>
+                <a:spcPts val="0"/>
+              </a:spcAft>
+              <a:buClr>
+                <a:srgbClr val="000000"/>
+              </a:buClr>
+              <a:buSzPts val="1800"/>
+              <a:buFont typeface="Arial"/>
+              <a:buNone/>
+            </a:pPr>
+            <a:r>
+              <a:t/>
+            </a:r>
+            <a:endParaRPr b="0" i="0" spc="0" sz="1800" u="none" cap="none" strike="noStrike">
+              <a:solidFill>
+                <a:schemeClr val="dk1"/>
+              </a:solidFill>
+              <a:latin typeface="Calibri"/>
+              <a:ea typeface="Calibri"/>
+              <a:cs typeface="Calibri"/>
+              <a:sym typeface="Calibri"/>
+            </a:endParaRPr>
+          </a:p>
+        </p:txBody>
+      </p:sp>
+      <p:sp>
+        <p:nvSpPr>
+          <p:cNvPr id="377" name="Google Shape;377;p13"/>
+          <p:cNvSpPr txBox="1"/>
+          <p:nvPr/>
+        </p:nvSpPr>
+        <p:spPr>
+          <a:xfrm>
+            <a:off x="5852135" y="3656415"/>
+            <a:ext cx="1234500" cy="184800"/>
+          </a:xfrm>
+          <a:prstGeom prst="rect">
+            <a:avLst/>
+          </a:prstGeom>
+          <a:noFill/>
+          <a:ln>
+            <a:noFill/>
+          </a:ln>
+        </p:spPr>
+        <p:txBody>
+          <a:bodyPr anchorCtr="0" anchor="ctr" bIns="0" lIns="0" spcFirstLastPara="1" rIns="0" wrap="square" tIns="0">
+            <a:spAutoFit/>
+          </a:bodyPr>
+          <a:lstStyle/>
+          <a:p>
+            <a:pPr indent="0" lvl="0" marL="0" marR="0" rtl="0" algn="ctr">
+              <a:lnSpc>
+                <a:spcPct val="110000"/>
+              </a:lnSpc>
+              <a:spcBef>
+                <a:spcPts val="0"/>
+              </a:spcBef>
+              <a:spcAft>
+                <a:spcPts val="0"/>
+              </a:spcAft>
+              <a:buClr>
+                <a:srgbClr val="000000"/>
+              </a:buClr>
+              <a:buSzPts val="1200"/>
+              <a:buFont typeface="Arial"/>
+              <a:buNone/>
+            </a:pPr>
+            <a:r>
+              <a:rPr b="1" i="0" lang="en-US" spc="0" sz="1200" u="none" cap="none" strike="noStrike">
+                <a:solidFill>
+                  <a:srgbClr val="11803E"/>
                 </a:solidFill>
                 <a:latin typeface="Plus Jakarta Sans"/>
                 <a:ea typeface="Plus Jakarta Sans"/>
                 <a:cs typeface="Plus Jakarta Sans"/>
                 <a:sym typeface="Plus Jakarta Sans"/>
               </a:rPr>
-              <a:t>Bloqueado ou em uso / </a:t>
+              <a:t>Aprovado</a:t>
             </a:r>
             <a:endParaRPr b="0" i="0" spc="0" sz="1400" u="none" cap="none" strike="noStrike">
               <a:solidFill>
-                <a:srgbClr val="545F73"/>
+                <a:srgbClr val="000000"/>
+              </a:solidFill>
+              <a:latin typeface="Arial"/>
+              <a:ea typeface="Arial"/>
+              <a:cs typeface="Arial"/>
+              <a:sym typeface="Arial"/>
+            </a:endParaRPr>
+          </a:p>
+        </p:txBody>
+      </p:sp>
+      <p:sp>
+        <p:nvSpPr>
+          <p:cNvPr id="378" name="Google Shape;378;p13"/>
+          <p:cNvSpPr txBox="1"/>
+          <p:nvPr/>
+        </p:nvSpPr>
+        <p:spPr>
+          <a:xfrm>
+            <a:off x="5852110" y="5191578"/>
+            <a:ext cx="1234500" cy="184800"/>
+          </a:xfrm>
+          <a:prstGeom prst="rect">
+            <a:avLst/>
+          </a:prstGeom>
+          <a:noFill/>
+          <a:ln>
+            <a:noFill/>
+          </a:ln>
+        </p:spPr>
+        <p:txBody>
+          <a:bodyPr anchorCtr="0" anchor="ctr" bIns="0" lIns="0" spcFirstLastPara="1" rIns="0" wrap="square" tIns="0">
+            <a:spAutoFit/>
+          </a:bodyPr>
+          <a:lstStyle/>
+          <a:p>
+            <a:pPr indent="0" lvl="0" marL="0" marR="0" rtl="0" algn="ctr">
+              <a:lnSpc>
+                <a:spcPct val="110000"/>
+              </a:lnSpc>
+              <a:spcBef>
+                <a:spcPts val="0"/>
+              </a:spcBef>
+              <a:spcAft>
+                <a:spcPts val="0"/>
+              </a:spcAft>
+              <a:buClr>
+                <a:srgbClr val="000000"/>
+              </a:buClr>
+              <a:buSzPts val="1200"/>
+              <a:buFont typeface="Arial"/>
+              <a:buNone/>
+            </a:pPr>
+            <a:r>
+              <a:rPr b="1" i="0" lang="en-US" spc="0" sz="1200" u="none" cap="none" strike="noStrike">
+                <a:solidFill>
+                  <a:srgbClr val="11803E"/>
+                </a:solidFill>
+                <a:latin typeface="Plus Jakarta Sans"/>
+                <a:ea typeface="Plus Jakarta Sans"/>
+                <a:cs typeface="Plus Jakarta Sans"/>
+                <a:sym typeface="Plus Jakarta Sans"/>
+              </a:rPr>
+              <a:t>Aprovado</a:t>
+            </a:r>
+            <a:endParaRPr b="0" i="0" spc="0" sz="1400" u="none" cap="none" strike="noStrike">
+              <a:solidFill>
+                <a:srgbClr val="000000"/>
+              </a:solidFill>
+              <a:latin typeface="Arial"/>
+              <a:ea typeface="Arial"/>
+              <a:cs typeface="Arial"/>
+              <a:sym typeface="Arial"/>
+            </a:endParaRPr>
+          </a:p>
+        </p:txBody>
+      </p:sp>
+    </p:spTree>
+  </p:cSld>
+  <p:clrMapOvr>
+    <a:masterClrMapping/>
+  </p:clrMapOvr>
+</p:sld>
+</file>
+
+<file path=ppt/slides/slide14.xml><?xml version="1.0" encoding="utf-8"?>
+<p:sld xmlns:a="http://schemas.openxmlformats.org/drawingml/2006/main" xmlns:p="http://schemas.openxmlformats.org/presentationml/2006/main" xmlns:r="http://schemas.openxmlformats.org/officeDocument/2006/relationships">
+  <p:cSld>
+    <p:bg>
+      <p:bgPr>
+        <a:solidFill>
+          <a:srgbClr val="F5F7FA"/>
+        </a:solidFill>
+      </p:bgPr>
+    </p:bg>
+    <p:spTree>
+      <p:nvGrpSpPr>
+        <p:cNvPr id="1" name=""/>
+        <p:cNvGrpSpPr/>
+        <p:nvPr/>
+      </p:nvGrpSpPr>
+      <p:grpSpPr/>
+      <p:sp>
+        <p:nvSpPr>
+          <p:cNvPr id="354" name="Google Shape;354;p13"/>
+          <p:cNvSpPr txBox="1"/>
+          <p:nvPr/>
+        </p:nvSpPr>
+        <p:spPr>
+          <a:xfrm>
+            <a:off x="685800" y="502920"/>
+            <a:ext cx="8229600" cy="274320"/>
+          </a:xfrm>
+          <a:prstGeom prst="rect">
+            <a:avLst/>
+          </a:prstGeom>
+          <a:noFill/>
+          <a:ln>
+            <a:noFill/>
+          </a:ln>
+        </p:spPr>
+        <p:txBody>
+          <a:bodyPr anchorCtr="0" anchor="t" bIns="0" lIns="0" spcFirstLastPara="1" rIns="0" wrap="square" tIns="0">
+            <a:spAutoFit/>
+          </a:bodyPr>
+          <a:lstStyle/>
+          <a:p>
+            <a:pPr indent="0" lvl="0" marL="0" marR="0" rtl="0" algn="l">
+              <a:lnSpc>
+                <a:spcPct val="110000"/>
+              </a:lnSpc>
+              <a:spcBef>
+                <a:spcPts val="0"/>
+              </a:spcBef>
+              <a:spcAft>
+                <a:spcPts val="0"/>
+              </a:spcAft>
+              <a:buClr>
+                <a:srgbClr val="000000"/>
+              </a:buClr>
+              <a:buSzPts val="1200"/>
+              <a:buFont typeface="Arial"/>
+              <a:buNone/>
+            </a:pPr>
+            <a:r>
+              <a:rPr b="1" i="0" lang="en-US" spc="200" sz="1200" u="none" cap="none" strike="noStrike">
+                <a:solidFill>
+                  <a:srgbClr val="0B5FD9"/>
+                </a:solidFill>
+                <a:latin typeface="Plus Jakarta Sans"/>
+                <a:ea typeface="Plus Jakarta Sans"/>
+                <a:cs typeface="Plus Jakarta Sans"/>
+                <a:sym typeface="Plus Jakarta Sans"/>
+              </a:rPr>
+              <a:t>RESULTADOS · ALARME</a:t>
+            </a:r>
+            <a:endParaRPr b="0" i="0" spc="0" sz="1400" u="none" cap="none" strike="noStrike">
+              <a:solidFill>
+                <a:srgbClr val="000000"/>
+              </a:solidFill>
+              <a:latin typeface="Arial"/>
+              <a:ea typeface="Arial"/>
+              <a:cs typeface="Arial"/>
+              <a:sym typeface="Arial"/>
+            </a:endParaRPr>
+          </a:p>
+        </p:txBody>
+      </p:sp>
+      <p:sp>
+        <p:nvSpPr>
+          <p:cNvPr id="355" name="Google Shape;355;p13"/>
+          <p:cNvSpPr txBox="1"/>
+          <p:nvPr/>
+        </p:nvSpPr>
+        <p:spPr>
+          <a:xfrm>
+            <a:off x="685800" y="804672"/>
+            <a:ext cx="10820095" cy="822960"/>
+          </a:xfrm>
+          <a:prstGeom prst="rect">
+            <a:avLst/>
+          </a:prstGeom>
+          <a:noFill/>
+          <a:ln>
+            <a:noFill/>
+          </a:ln>
+        </p:spPr>
+        <p:txBody>
+          <a:bodyPr anchorCtr="0" anchor="t" bIns="0" lIns="0" spcFirstLastPara="1" rIns="0" wrap="square" tIns="0">
+            <a:spAutoFit/>
+          </a:bodyPr>
+          <a:lstStyle/>
+          <a:p>
+            <a:pPr indent="0" lvl="0" marL="0" marR="0" rtl="0" algn="l">
+              <a:lnSpc>
+                <a:spcPct val="100000"/>
+              </a:lnSpc>
+              <a:spcBef>
+                <a:spcPts val="0"/>
+              </a:spcBef>
+              <a:spcAft>
+                <a:spcPts val="0"/>
+              </a:spcAft>
+              <a:buClr>
+                <a:srgbClr val="000000"/>
+              </a:buClr>
+              <a:buSzPts val="2800"/>
+              <a:buFont typeface="Arial"/>
+              <a:buNone/>
+            </a:pPr>
+            <a:r>
+              <a:rPr b="1" i="0" lang="en-US" spc="0" sz="2800" u="none" cap="none" strike="noStrike">
+                <a:solidFill>
+                  <a:srgbClr val="191C1E"/>
+                </a:solidFill>
+                <a:latin typeface="Plus Jakarta Sans"/>
+                <a:ea typeface="Plus Jakarta Sans"/>
+                <a:cs typeface="Plus Jakarta Sans"/>
+                <a:sym typeface="Plus Jakarta Sans"/>
+              </a:rPr>
+              <a:t>O alarme tocou nas quatro situações testadas</a:t>
+            </a:r>
+            <a:endParaRPr b="0" i="0" spc="0" sz="1400" u="none" cap="none" strike="noStrike">
+              <a:solidFill>
+                <a:srgbClr val="000000"/>
+              </a:solidFill>
+              <a:latin typeface="Arial"/>
+              <a:ea typeface="Arial"/>
+              <a:cs typeface="Arial"/>
+              <a:sym typeface="Arial"/>
+            </a:endParaRPr>
+          </a:p>
+        </p:txBody>
+      </p:sp>
+      <p:sp>
+        <p:nvSpPr>
+          <p:cNvPr id="356" name="Google Shape;356;p13"/>
+          <p:cNvSpPr txBox="1"/>
+          <p:nvPr/>
+        </p:nvSpPr>
+        <p:spPr>
+          <a:xfrm>
+            <a:off x="685800" y="6419088"/>
+            <a:ext cx="7315200" cy="228600"/>
+          </a:xfrm>
+          <a:prstGeom prst="rect">
+            <a:avLst/>
+          </a:prstGeom>
+          <a:noFill/>
+          <a:ln>
+            <a:noFill/>
+          </a:ln>
+        </p:spPr>
+        <p:txBody>
+          <a:bodyPr anchorCtr="0" anchor="t" bIns="0" lIns="0" spcFirstLastPara="1" rIns="0" wrap="square" tIns="0">
+            <a:spAutoFit/>
+          </a:bodyPr>
+          <a:lstStyle/>
+          <a:p>
+            <a:pPr indent="0" lvl="0" marL="0" marR="0" rtl="0" algn="l">
+              <a:lnSpc>
+                <a:spcPct val="110000"/>
+              </a:lnSpc>
+              <a:spcBef>
+                <a:spcPts val="0"/>
+              </a:spcBef>
+              <a:spcAft>
+                <a:spcPts val="0"/>
+              </a:spcAft>
+              <a:buClr>
+                <a:srgbClr val="000000"/>
+              </a:buClr>
+              <a:buSzPts val="1000"/>
+              <a:buFont typeface="Arial"/>
+              <a:buNone/>
+            </a:pPr>
+            <a:r>
+              <a:rPr b="0" i="0" lang="en-US" spc="0" sz="1000" u="none" cap="none" strike="noStrike">
+                <a:solidFill>
+                  <a:srgbClr val="545F73"/>
+                </a:solidFill>
+                <a:latin typeface="Plus Jakarta Sans"/>
+                <a:ea typeface="Plus Jakarta Sans"/>
+                <a:cs typeface="Plus Jakarta Sans"/>
+                <a:sym typeface="Plus Jakarta Sans"/>
+              </a:rPr>
+              <a:t>Mapill  ·  Gabriel Steffens  ·  Sistemas de Informação, UNIDAVI</a:t>
+            </a:r>
+            <a:endParaRPr b="0" i="0" spc="0" sz="1400" u="none" cap="none" strike="noStrike">
+              <a:solidFill>
+                <a:srgbClr val="000000"/>
+              </a:solidFill>
+              <a:latin typeface="Arial"/>
+              <a:ea typeface="Arial"/>
+              <a:cs typeface="Arial"/>
+              <a:sym typeface="Arial"/>
+            </a:endParaRPr>
+          </a:p>
+        </p:txBody>
+      </p:sp>
+      <p:sp>
+        <p:nvSpPr>
+          <p:cNvPr id="357" name="Google Shape;357;p13"/>
+          <p:cNvSpPr txBox="1"/>
+          <p:nvPr/>
+        </p:nvSpPr>
+        <p:spPr>
+          <a:xfrm>
+            <a:off x="10591495" y="6419088"/>
+            <a:ext cx="914400" cy="228600"/>
+          </a:xfrm>
+          <a:prstGeom prst="rect">
+            <a:avLst/>
+          </a:prstGeom>
+          <a:noFill/>
+          <a:ln>
+            <a:noFill/>
+          </a:ln>
+        </p:spPr>
+        <p:txBody>
+          <a:bodyPr anchorCtr="0" anchor="t" bIns="0" lIns="0" spcFirstLastPara="1" rIns="0" wrap="square" tIns="0">
+            <a:spAutoFit/>
+          </a:bodyPr>
+          <a:lstStyle/>
+          <a:p>
+            <a:pPr indent="0" lvl="0" marL="0" marR="0" rtl="0" algn="r">
+              <a:lnSpc>
+                <a:spcPct val="110000"/>
+              </a:lnSpc>
+              <a:spcBef>
+                <a:spcPts val="0"/>
+              </a:spcBef>
+              <a:spcAft>
+                <a:spcPts val="0"/>
+              </a:spcAft>
+              <a:buClr>
+                <a:srgbClr val="000000"/>
+              </a:buClr>
+              <a:buSzPts val="1000"/>
+              <a:buFont typeface="Arial"/>
+              <a:buNone/>
+            </a:pPr>
+            <a:r>
+              <a:rPr b="1" i="0" lang="en-US" spc="0" sz="1000" u="none" cap="none" strike="noStrike">
+                <a:solidFill>
+                  <a:srgbClr val="545F73"/>
+                </a:solidFill>
+                <a:latin typeface="Plus Jakarta Sans"/>
+                <a:ea typeface="Plus Jakarta Sans"/>
+                <a:cs typeface="Plus Jakarta Sans"/>
+                <a:sym typeface="Plus Jakarta Sans"/>
+              </a:rPr>
+              <a:t>14</a:t>
+            </a:r>
+            <a:endParaRPr b="0" i="0" spc="0" sz="1400" u="none" cap="none" strike="noStrike">
+              <a:solidFill>
+                <a:srgbClr val="000000"/>
+              </a:solidFill>
+              <a:latin typeface="Arial"/>
+              <a:ea typeface="Arial"/>
+              <a:cs typeface="Arial"/>
+              <a:sym typeface="Arial"/>
+            </a:endParaRPr>
+          </a:p>
+        </p:txBody>
+      </p:sp>
+      <p:sp>
+        <p:nvSpPr>
+          <p:cNvPr id="358" name="Google Shape;358;p13"/>
+          <p:cNvSpPr/>
+          <p:nvPr/>
+        </p:nvSpPr>
+        <p:spPr>
+          <a:xfrm>
+            <a:off x="685800" y="1783080"/>
+            <a:ext cx="6675000" cy="4160400"/>
+          </a:xfrm>
+          <a:prstGeom prst="roundRect">
+            <a:avLst>
+              <a:gd fmla="val 3076" name="adj"/>
+            </a:avLst>
+          </a:prstGeom>
+          <a:solidFill>
+            <a:srgbClr val="FFFFFF"/>
+          </a:solidFill>
+          <a:ln>
+            <a:noFill/>
+          </a:ln>
+        </p:spPr>
+        <p:txBody>
+          <a:bodyPr anchorCtr="0" anchor="ctr" bIns="45700" lIns="91425" spcFirstLastPara="1" rIns="91425" wrap="square" tIns="45700">
+            <a:noAutofit/>
+          </a:bodyPr>
+          <a:lstStyle/>
+          <a:p>
+            <a:pPr indent="0" lvl="0" marL="0" marR="0" rtl="0" algn="l">
+              <a:lnSpc>
+                <a:spcPct val="100000"/>
+              </a:lnSpc>
+              <a:spcBef>
+                <a:spcPts val="0"/>
+              </a:spcBef>
+              <a:spcAft>
+                <a:spcPts val="0"/>
+              </a:spcAft>
+              <a:buClr>
+                <a:srgbClr val="000000"/>
+              </a:buClr>
+              <a:buSzPts val="1800"/>
+              <a:buFont typeface="Arial"/>
+              <a:buNone/>
+            </a:pPr>
+            <a:r>
+              <a:t/>
+            </a:r>
+            <a:endParaRPr b="0" i="0" spc="0" sz="1800" u="none" cap="none" strike="noStrike">
+              <a:solidFill>
+                <a:schemeClr val="dk1"/>
+              </a:solidFill>
+              <a:latin typeface="Calibri"/>
+              <a:ea typeface="Calibri"/>
+              <a:cs typeface="Calibri"/>
+              <a:sym typeface="Calibri"/>
+            </a:endParaRPr>
+          </a:p>
+        </p:txBody>
+      </p:sp>
+      <p:sp>
+        <p:nvSpPr>
+          <p:cNvPr id="359" name="Google Shape;359;p13"/>
+          <p:cNvSpPr txBox="1"/>
+          <p:nvPr/>
+        </p:nvSpPr>
+        <p:spPr>
+          <a:xfrm>
+            <a:off x="1005840" y="1965960"/>
+            <a:ext cx="3931920" cy="548640"/>
+          </a:xfrm>
+          <a:prstGeom prst="rect">
+            <a:avLst/>
+          </a:prstGeom>
+          <a:noFill/>
+          <a:ln>
+            <a:noFill/>
+          </a:ln>
+        </p:spPr>
+        <p:txBody>
+          <a:bodyPr anchorCtr="0" anchor="ctr" bIns="0" lIns="0" spcFirstLastPara="1" rIns="0" wrap="square" tIns="0">
+            <a:spAutoFit/>
+          </a:bodyPr>
+          <a:lstStyle/>
+          <a:p>
+            <a:pPr indent="0" lvl="0" marL="0" marR="0" rtl="0" algn="l">
+              <a:lnSpc>
+                <a:spcPct val="110000"/>
+              </a:lnSpc>
+              <a:spcBef>
+                <a:spcPts val="0"/>
+              </a:spcBef>
+              <a:spcAft>
+                <a:spcPts val="0"/>
+              </a:spcAft>
+              <a:buClr>
+                <a:srgbClr val="000000"/>
+              </a:buClr>
+              <a:buSzPts val="1600"/>
+              <a:buFont typeface="Arial"/>
+              <a:buNone/>
+            </a:pPr>
+            <a:r>
+              <a:rPr b="0" i="0" lang="en-US" spc="0" sz="1600" u="none" cap="none" strike="noStrike">
+                <a:solidFill>
+                  <a:srgbClr val="191C1E"/>
+                </a:solidFill>
+                <a:latin typeface="Plus Jakarta Sans"/>
+                <a:ea typeface="Plus Jakarta Sans"/>
+                <a:cs typeface="Plus Jakarta Sans"/>
+                <a:sym typeface="Plus Jakarta Sans"/>
+              </a:rPr>
+              <a:t>Bloqueado, app nos recentes</a:t>
+            </a:r>
+            <a:endParaRPr b="0" i="0" spc="0" sz="1400" u="none" cap="none" strike="noStrike">
+              <a:solidFill>
+                <a:srgbClr val="000000"/>
+              </a:solidFill>
+              <a:latin typeface="Arial"/>
+              <a:ea typeface="Arial"/>
+              <a:cs typeface="Arial"/>
+              <a:sym typeface="Arial"/>
+            </a:endParaRPr>
+          </a:p>
+        </p:txBody>
+      </p:sp>
+      <p:sp>
+        <p:nvSpPr>
+          <p:cNvPr id="360" name="Google Shape;360;p13"/>
+          <p:cNvSpPr/>
+          <p:nvPr/>
+        </p:nvSpPr>
+        <p:spPr>
+          <a:xfrm>
+            <a:off x="5852160" y="2075688"/>
+            <a:ext cx="1234440" cy="329184"/>
+          </a:xfrm>
+          <a:prstGeom prst="roundRect">
+            <a:avLst>
+              <a:gd fmla="val 50000" name="adj"/>
+            </a:avLst>
+          </a:prstGeom>
+          <a:solidFill>
+            <a:srgbClr val="E3F6EA"/>
+          </a:solidFill>
+          <a:ln>
+            <a:noFill/>
+          </a:ln>
+        </p:spPr>
+        <p:txBody>
+          <a:bodyPr anchorCtr="0" anchor="ctr" bIns="45700" lIns="91425" spcFirstLastPara="1" rIns="91425" wrap="square" tIns="45700">
+            <a:noAutofit/>
+          </a:bodyPr>
+          <a:lstStyle/>
+          <a:p>
+            <a:pPr indent="0" lvl="0" marL="0" marR="0" rtl="0" algn="l">
+              <a:lnSpc>
+                <a:spcPct val="100000"/>
+              </a:lnSpc>
+              <a:spcBef>
+                <a:spcPts val="0"/>
+              </a:spcBef>
+              <a:spcAft>
+                <a:spcPts val="0"/>
+              </a:spcAft>
+              <a:buClr>
+                <a:srgbClr val="000000"/>
+              </a:buClr>
+              <a:buSzPts val="1800"/>
+              <a:buFont typeface="Arial"/>
+              <a:buNone/>
+            </a:pPr>
+            <a:r>
+              <a:t/>
+            </a:r>
+            <a:endParaRPr b="0" i="0" spc="0" sz="1800" u="none" cap="none" strike="noStrike">
+              <a:solidFill>
+                <a:schemeClr val="dk1"/>
+              </a:solidFill>
+              <a:latin typeface="Calibri"/>
+              <a:ea typeface="Calibri"/>
+              <a:cs typeface="Calibri"/>
+              <a:sym typeface="Calibri"/>
+            </a:endParaRPr>
+          </a:p>
+        </p:txBody>
+      </p:sp>
+      <p:sp>
+        <p:nvSpPr>
+          <p:cNvPr id="361" name="Google Shape;361;p13"/>
+          <p:cNvSpPr txBox="1"/>
+          <p:nvPr/>
+        </p:nvSpPr>
+        <p:spPr>
+          <a:xfrm>
+            <a:off x="5852160" y="2075688"/>
+            <a:ext cx="1234440" cy="329184"/>
+          </a:xfrm>
+          <a:prstGeom prst="rect">
+            <a:avLst/>
+          </a:prstGeom>
+          <a:noFill/>
+          <a:ln>
+            <a:noFill/>
+          </a:ln>
+        </p:spPr>
+        <p:txBody>
+          <a:bodyPr anchorCtr="0" anchor="ctr" bIns="0" lIns="0" spcFirstLastPara="1" rIns="0" wrap="square" tIns="0">
+            <a:spAutoFit/>
+          </a:bodyPr>
+          <a:lstStyle/>
+          <a:p>
+            <a:pPr indent="0" lvl="0" marL="0" marR="0" rtl="0" algn="ctr">
+              <a:lnSpc>
+                <a:spcPct val="110000"/>
+              </a:lnSpc>
+              <a:spcBef>
+                <a:spcPts val="0"/>
+              </a:spcBef>
+              <a:spcAft>
+                <a:spcPts val="0"/>
+              </a:spcAft>
+              <a:buClr>
+                <a:srgbClr val="000000"/>
+              </a:buClr>
+              <a:buSzPts val="1200"/>
+              <a:buFont typeface="Arial"/>
+              <a:buNone/>
+            </a:pPr>
+            <a:r>
+              <a:rPr b="1" i="0" lang="en-US" spc="0" sz="1200" u="none" cap="none" strike="noStrike">
+                <a:solidFill>
+                  <a:srgbClr val="11803E"/>
+                </a:solidFill>
+                <a:latin typeface="Plus Jakarta Sans"/>
+                <a:ea typeface="Plus Jakarta Sans"/>
+                <a:cs typeface="Plus Jakarta Sans"/>
+                <a:sym typeface="Plus Jakarta Sans"/>
+              </a:rPr>
+              <a:t>Aprovado</a:t>
+            </a:r>
+            <a:endParaRPr b="0" i="0" spc="0" sz="1400" u="none" cap="none" strike="noStrike">
+              <a:solidFill>
+                <a:srgbClr val="000000"/>
+              </a:solidFill>
+              <a:latin typeface="Arial"/>
+              <a:ea typeface="Arial"/>
+              <a:cs typeface="Arial"/>
+              <a:sym typeface="Arial"/>
+            </a:endParaRPr>
+          </a:p>
+        </p:txBody>
+      </p:sp>
+      <p:sp>
+        <p:nvSpPr>
+          <p:cNvPr id="362" name="Google Shape;362;p13"/>
+          <p:cNvSpPr txBox="1"/>
+          <p:nvPr/>
+        </p:nvSpPr>
+        <p:spPr>
+          <a:xfrm>
+            <a:off x="1005840" y="2724912"/>
+            <a:ext cx="3931920" cy="548640"/>
+          </a:xfrm>
+          <a:prstGeom prst="rect">
+            <a:avLst/>
+          </a:prstGeom>
+          <a:noFill/>
+          <a:ln>
+            <a:noFill/>
+          </a:ln>
+        </p:spPr>
+        <p:txBody>
+          <a:bodyPr anchorCtr="0" anchor="ctr" bIns="0" lIns="0" spcFirstLastPara="1" rIns="0" wrap="square" tIns="0">
+            <a:spAutoFit/>
+          </a:bodyPr>
+          <a:lstStyle/>
+          <a:p>
+            <a:pPr indent="0" lvl="0" marL="0" marR="0" rtl="0" algn="l">
+              <a:lnSpc>
+                <a:spcPct val="110000"/>
+              </a:lnSpc>
+              <a:spcBef>
+                <a:spcPts val="0"/>
+              </a:spcBef>
+              <a:spcAft>
+                <a:spcPts val="0"/>
+              </a:spcAft>
+              <a:buClr>
+                <a:srgbClr val="000000"/>
+              </a:buClr>
+              <a:buSzPts val="1600"/>
+              <a:buFont typeface="Arial"/>
+              <a:buNone/>
+            </a:pPr>
+            <a:r>
+              <a:rPr b="0" i="0" lang="en-US" spc="0" sz="1600" u="none" cap="none" strike="noStrike">
+                <a:solidFill>
+                  <a:srgbClr val="191C1E"/>
+                </a:solidFill>
+                <a:latin typeface="Plus Jakarta Sans"/>
+                <a:ea typeface="Plus Jakarta Sans"/>
+                <a:cs typeface="Plus Jakarta Sans"/>
+                <a:sym typeface="Plus Jakarta Sans"/>
+              </a:rPr>
+              <a:t>Bloqueado, fora dos recentes</a:t>
+            </a:r>
+            <a:endParaRPr b="0" i="0" spc="0" sz="1400" u="none" cap="none" strike="noStrike">
+              <a:solidFill>
+                <a:srgbClr val="000000"/>
+              </a:solidFill>
+              <a:latin typeface="Arial"/>
+              <a:ea typeface="Arial"/>
+              <a:cs typeface="Arial"/>
+              <a:sym typeface="Arial"/>
+            </a:endParaRPr>
+          </a:p>
+        </p:txBody>
+      </p:sp>
+      <p:sp>
+        <p:nvSpPr>
+          <p:cNvPr id="363" name="Google Shape;363;p13"/>
+          <p:cNvSpPr/>
+          <p:nvPr/>
+        </p:nvSpPr>
+        <p:spPr>
+          <a:xfrm>
+            <a:off x="5852160" y="2834640"/>
+            <a:ext cx="1234440" cy="329184"/>
+          </a:xfrm>
+          <a:prstGeom prst="roundRect">
+            <a:avLst>
+              <a:gd fmla="val 50000" name="adj"/>
+            </a:avLst>
+          </a:prstGeom>
+          <a:solidFill>
+            <a:srgbClr val="E3F6EA"/>
+          </a:solidFill>
+          <a:ln>
+            <a:noFill/>
+          </a:ln>
+        </p:spPr>
+        <p:txBody>
+          <a:bodyPr anchorCtr="0" anchor="ctr" bIns="45700" lIns="91425" spcFirstLastPara="1" rIns="91425" wrap="square" tIns="45700">
+            <a:noAutofit/>
+          </a:bodyPr>
+          <a:lstStyle/>
+          <a:p>
+            <a:pPr indent="0" lvl="0" marL="0" marR="0" rtl="0" algn="l">
+              <a:lnSpc>
+                <a:spcPct val="100000"/>
+              </a:lnSpc>
+              <a:spcBef>
+                <a:spcPts val="0"/>
+              </a:spcBef>
+              <a:spcAft>
+                <a:spcPts val="0"/>
+              </a:spcAft>
+              <a:buClr>
+                <a:srgbClr val="000000"/>
+              </a:buClr>
+              <a:buSzPts val="1800"/>
+              <a:buFont typeface="Arial"/>
+              <a:buNone/>
+            </a:pPr>
+            <a:r>
+              <a:t/>
+            </a:r>
+            <a:endParaRPr b="0" i="0" spc="0" sz="1800" u="none" cap="none" strike="noStrike">
+              <a:solidFill>
+                <a:schemeClr val="dk1"/>
+              </a:solidFill>
+              <a:latin typeface="Calibri"/>
+              <a:ea typeface="Calibri"/>
+              <a:cs typeface="Calibri"/>
+              <a:sym typeface="Calibri"/>
+            </a:endParaRPr>
+          </a:p>
+        </p:txBody>
+      </p:sp>
+      <p:sp>
+        <p:nvSpPr>
+          <p:cNvPr id="364" name="Google Shape;364;p13"/>
+          <p:cNvSpPr txBox="1"/>
+          <p:nvPr/>
+        </p:nvSpPr>
+        <p:spPr>
+          <a:xfrm>
+            <a:off x="5852135" y="2906840"/>
+            <a:ext cx="1234500" cy="184800"/>
+          </a:xfrm>
+          <a:prstGeom prst="rect">
+            <a:avLst/>
+          </a:prstGeom>
+          <a:noFill/>
+          <a:ln>
+            <a:noFill/>
+          </a:ln>
+        </p:spPr>
+        <p:txBody>
+          <a:bodyPr anchorCtr="0" anchor="ctr" bIns="0" lIns="0" spcFirstLastPara="1" rIns="0" wrap="square" tIns="0">
+            <a:spAutoFit/>
+          </a:bodyPr>
+          <a:lstStyle/>
+          <a:p>
+            <a:pPr indent="0" lvl="0" marL="0" marR="0" rtl="0" algn="ctr">
+              <a:lnSpc>
+                <a:spcPct val="110000"/>
+              </a:lnSpc>
+              <a:spcBef>
+                <a:spcPts val="0"/>
+              </a:spcBef>
+              <a:spcAft>
+                <a:spcPts val="0"/>
+              </a:spcAft>
+              <a:buClr>
+                <a:srgbClr val="000000"/>
+              </a:buClr>
+              <a:buSzPts val="1200"/>
+              <a:buFont typeface="Arial"/>
+              <a:buNone/>
+            </a:pPr>
+            <a:r>
+              <a:rPr b="1" i="0" lang="en-US" spc="0" sz="1200" u="none" cap="none" strike="noStrike">
+                <a:solidFill>
+                  <a:srgbClr val="11803E"/>
+                </a:solidFill>
+                <a:latin typeface="Plus Jakarta Sans"/>
+                <a:ea typeface="Plus Jakarta Sans"/>
+                <a:cs typeface="Plus Jakarta Sans"/>
+                <a:sym typeface="Plus Jakarta Sans"/>
+              </a:rPr>
+              <a:t>Aprovado</a:t>
+            </a:r>
+            <a:endParaRPr b="0" i="0" spc="0" sz="1400" u="none" cap="none" strike="noStrike">
+              <a:solidFill>
+                <a:srgbClr val="000000"/>
+              </a:solidFill>
+              <a:latin typeface="Arial"/>
+              <a:ea typeface="Arial"/>
+              <a:cs typeface="Arial"/>
+              <a:sym typeface="Arial"/>
+            </a:endParaRPr>
+          </a:p>
+        </p:txBody>
+      </p:sp>
+      <p:sp>
+        <p:nvSpPr>
+          <p:cNvPr id="365" name="Google Shape;365;p13"/>
+          <p:cNvSpPr txBox="1"/>
+          <p:nvPr/>
+        </p:nvSpPr>
+        <p:spPr>
+          <a:xfrm>
+            <a:off x="1005840" y="3483863"/>
+            <a:ext cx="3931920" cy="548640"/>
+          </a:xfrm>
+          <a:prstGeom prst="rect">
+            <a:avLst/>
+          </a:prstGeom>
+          <a:noFill/>
+          <a:ln>
+            <a:noFill/>
+          </a:ln>
+        </p:spPr>
+        <p:txBody>
+          <a:bodyPr anchorCtr="0" anchor="ctr" bIns="0" lIns="0" spcFirstLastPara="1" rIns="0" wrap="square" tIns="0">
+            <a:spAutoFit/>
+          </a:bodyPr>
+          <a:lstStyle/>
+          <a:p>
+            <a:pPr indent="0" lvl="0" marL="0" marR="0" rtl="0" algn="l">
+              <a:lnSpc>
+                <a:spcPct val="110000"/>
+              </a:lnSpc>
+              <a:spcBef>
+                <a:spcPts val="0"/>
+              </a:spcBef>
+              <a:spcAft>
+                <a:spcPts val="0"/>
+              </a:spcAft>
+              <a:buClr>
+                <a:srgbClr val="000000"/>
+              </a:buClr>
+              <a:buSzPts val="1600"/>
+              <a:buFont typeface="Arial"/>
+              <a:buNone/>
+            </a:pPr>
+            <a:r>
+              <a:rPr b="0" i="0" lang="en-US" spc="0" sz="1600" u="none" cap="none" strike="noStrike">
+                <a:solidFill>
+                  <a:srgbClr val="191C1E"/>
+                </a:solidFill>
+                <a:latin typeface="Plus Jakarta Sans"/>
+                <a:ea typeface="Plus Jakarta Sans"/>
+                <a:cs typeface="Plus Jakarta Sans"/>
+                <a:sym typeface="Plus Jakarta Sans"/>
+              </a:rPr>
+              <a:t>Em uso, app nos recentes</a:t>
+            </a:r>
+            <a:endParaRPr b="0" i="0" spc="0" sz="1400" u="none" cap="none" strike="noStrike">
+              <a:solidFill>
+                <a:srgbClr val="000000"/>
+              </a:solidFill>
+              <a:latin typeface="Arial"/>
+              <a:ea typeface="Arial"/>
+              <a:cs typeface="Arial"/>
+              <a:sym typeface="Arial"/>
+            </a:endParaRPr>
+          </a:p>
+        </p:txBody>
+      </p:sp>
+      <p:sp>
+        <p:nvSpPr>
+          <p:cNvPr id="366" name="Google Shape;366;p13"/>
+          <p:cNvSpPr txBox="1"/>
+          <p:nvPr/>
+        </p:nvSpPr>
+        <p:spPr>
+          <a:xfrm>
+            <a:off x="1005840" y="4242816"/>
+            <a:ext cx="3931920" cy="548640"/>
+          </a:xfrm>
+          <a:prstGeom prst="rect">
+            <a:avLst/>
+          </a:prstGeom>
+          <a:noFill/>
+          <a:ln>
+            <a:noFill/>
+          </a:ln>
+        </p:spPr>
+        <p:txBody>
+          <a:bodyPr anchorCtr="0" anchor="ctr" bIns="0" lIns="0" spcFirstLastPara="1" rIns="0" wrap="square" tIns="0">
+            <a:spAutoFit/>
+          </a:bodyPr>
+          <a:lstStyle/>
+          <a:p>
+            <a:pPr indent="0" lvl="0" marL="0" marR="0" rtl="0" algn="l">
+              <a:lnSpc>
+                <a:spcPct val="110000"/>
+              </a:lnSpc>
+              <a:spcBef>
+                <a:spcPts val="0"/>
+              </a:spcBef>
+              <a:spcAft>
+                <a:spcPts val="0"/>
+              </a:spcAft>
+              <a:buClr>
+                <a:srgbClr val="000000"/>
+              </a:buClr>
+              <a:buSzPts val="1600"/>
+              <a:buFont typeface="Arial"/>
+              <a:buNone/>
+            </a:pPr>
+            <a:r>
+              <a:rPr b="0" i="0" lang="en-US" spc="0" sz="1600" u="none" cap="none" strike="noStrike">
+                <a:solidFill>
+                  <a:srgbClr val="191C1E"/>
+                </a:solidFill>
+                <a:latin typeface="Plus Jakarta Sans"/>
+                <a:ea typeface="Plus Jakarta Sans"/>
+                <a:cs typeface="Plus Jakarta Sans"/>
+                <a:sym typeface="Plus Jakarta Sans"/>
+              </a:rPr>
+              <a:t>Em uso, fora dos recentes</a:t>
+            </a:r>
+            <a:endParaRPr b="0" i="0" spc="0" sz="1400" u="none" cap="none" strike="noStrike">
+              <a:solidFill>
+                <a:srgbClr val="000000"/>
+              </a:solidFill>
+              <a:latin typeface="Arial"/>
+              <a:ea typeface="Arial"/>
+              <a:cs typeface="Arial"/>
+              <a:sym typeface="Arial"/>
+            </a:endParaRPr>
+          </a:p>
+        </p:txBody>
+      </p:sp>
+      <p:sp>
+        <p:nvSpPr>
+          <p:cNvPr id="367" name="Google Shape;367;p13"/>
+          <p:cNvSpPr txBox="1"/>
+          <p:nvPr/>
+        </p:nvSpPr>
+        <p:spPr>
+          <a:xfrm>
+            <a:off x="1005840" y="5001768"/>
+            <a:ext cx="3931920" cy="548640"/>
+          </a:xfrm>
+          <a:prstGeom prst="rect">
+            <a:avLst/>
+          </a:prstGeom>
+          <a:noFill/>
+          <a:ln>
+            <a:noFill/>
+          </a:ln>
+        </p:spPr>
+        <p:txBody>
+          <a:bodyPr anchorCtr="0" anchor="ctr" bIns="0" lIns="0" spcFirstLastPara="1" rIns="0" wrap="square" tIns="0">
+            <a:spAutoFit/>
+          </a:bodyPr>
+          <a:lstStyle/>
+          <a:p>
+            <a:pPr indent="0" lvl="0" marL="0" marR="0" rtl="0" algn="l">
+              <a:lnSpc>
+                <a:spcPct val="110000"/>
+              </a:lnSpc>
+              <a:spcBef>
+                <a:spcPts val="0"/>
+              </a:spcBef>
+              <a:spcAft>
+                <a:spcPts val="0"/>
+              </a:spcAft>
+              <a:buClr>
+                <a:srgbClr val="000000"/>
+              </a:buClr>
+              <a:buSzPts val="1600"/>
+              <a:buFont typeface="Arial"/>
+              <a:buNone/>
+            </a:pPr>
+            <a:r>
+              <a:rPr b="0" i="0" lang="en-US" spc="0" sz="1600" u="none" cap="none" strike="noStrike">
+                <a:solidFill>
+                  <a:srgbClr val="191C1E"/>
+                </a:solidFill>
+                <a:latin typeface="Plus Jakarta Sans"/>
+                <a:ea typeface="Plus Jakarta Sans"/>
+                <a:cs typeface="Plus Jakarta Sans"/>
+                <a:sym typeface="Plus Jakarta Sans"/>
+              </a:rPr>
+              <a:t>Após reiniciar o aparelho</a:t>
+            </a:r>
+            <a:endParaRPr b="0" i="0" spc="0" sz="1400" u="none" cap="none" strike="noStrike">
+              <a:solidFill>
+                <a:srgbClr val="000000"/>
+              </a:solidFill>
+              <a:latin typeface="Arial"/>
+              <a:ea typeface="Arial"/>
+              <a:cs typeface="Arial"/>
+              <a:sym typeface="Arial"/>
+            </a:endParaRPr>
+          </a:p>
+        </p:txBody>
+      </p:sp>
+      <p:sp>
+        <p:nvSpPr>
+          <p:cNvPr id="368" name="Google Shape;368;p13"/>
+          <p:cNvSpPr txBox="1"/>
+          <p:nvPr/>
+        </p:nvSpPr>
+        <p:spPr>
+          <a:xfrm>
+            <a:off x="685800" y="6053328"/>
+            <a:ext cx="7315200" cy="274320"/>
+          </a:xfrm>
+          <a:prstGeom prst="rect">
+            <a:avLst/>
+          </a:prstGeom>
+          <a:noFill/>
+          <a:ln>
+            <a:noFill/>
+          </a:ln>
+        </p:spPr>
+        <p:txBody>
+          <a:bodyPr anchorCtr="0" anchor="t" bIns="0" lIns="0" spcFirstLastPara="1" rIns="0" wrap="square" tIns="0">
+            <a:spAutoFit/>
+          </a:bodyPr>
+          <a:lstStyle/>
+          <a:p>
+            <a:pPr indent="0" lvl="0" marL="0" marR="0" rtl="0" algn="l">
+              <a:lnSpc>
+                <a:spcPct val="110000"/>
+              </a:lnSpc>
+              <a:spcBef>
+                <a:spcPts val="0"/>
+              </a:spcBef>
+              <a:spcAft>
+                <a:spcPts val="0"/>
+              </a:spcAft>
+              <a:buClr>
+                <a:srgbClr val="000000"/>
+              </a:buClr>
+              <a:buSzPts val="1000"/>
+              <a:buFont typeface="Arial"/>
+              <a:buNone/>
+            </a:pPr>
+            <a:r>
+              <a:rPr b="0" i="0" lang="en-US" spc="0" sz="1000" u="none" cap="none" strike="noStrike">
+                <a:solidFill>
+                  <a:srgbClr val="545F73"/>
+                </a:solidFill>
+                <a:latin typeface="Plus Jakarta Sans"/>
+                <a:ea typeface="Plus Jakarta Sans"/>
+                <a:cs typeface="Plus Jakarta Sans"/>
+                <a:sym typeface="Plus Jakarta Sans"/>
+              </a:rPr>
+              <a:t>Fonte: seção 5.3 do TCC. Xiaomi Redmi Note 14 Pro 5G, Android 16.</a:t>
+            </a:r>
+            <a:endParaRPr b="0" i="0" spc="0" sz="1400" u="none" cap="none" strike="noStrike">
+              <a:solidFill>
+                <a:srgbClr val="000000"/>
+              </a:solidFill>
+              <a:latin typeface="Arial"/>
+              <a:ea typeface="Arial"/>
+              <a:cs typeface="Arial"/>
+              <a:sym typeface="Arial"/>
+            </a:endParaRPr>
+          </a:p>
+        </p:txBody>
+      </p:sp>
+      <p:sp>
+        <p:nvSpPr>
+          <p:cNvPr id="369" name="Google Shape;369;p13"/>
+          <p:cNvSpPr/>
+          <p:nvPr/>
+        </p:nvSpPr>
+        <p:spPr>
+          <a:xfrm>
+            <a:off x="7680960" y="1783080"/>
+            <a:ext cx="3822191" cy="1920240"/>
+          </a:xfrm>
+          <a:prstGeom prst="roundRect">
+            <a:avLst>
+              <a:gd fmla="val 6666" name="adj"/>
+            </a:avLst>
+          </a:prstGeom>
+          <a:solidFill>
+            <a:srgbClr val="FFFFFF"/>
+          </a:solidFill>
+          <a:ln>
+            <a:noFill/>
+          </a:ln>
+        </p:spPr>
+        <p:txBody>
+          <a:bodyPr anchorCtr="0" anchor="ctr" bIns="45700" lIns="91425" spcFirstLastPara="1" rIns="91425" wrap="square" tIns="45700">
+            <a:noAutofit/>
+          </a:bodyPr>
+          <a:lstStyle/>
+          <a:p>
+            <a:pPr indent="0" lvl="0" marL="0" marR="0" rtl="0" algn="l">
+              <a:lnSpc>
+                <a:spcPct val="100000"/>
+              </a:lnSpc>
+              <a:spcBef>
+                <a:spcPts val="0"/>
+              </a:spcBef>
+              <a:spcAft>
+                <a:spcPts val="0"/>
+              </a:spcAft>
+              <a:buClr>
+                <a:srgbClr val="000000"/>
+              </a:buClr>
+              <a:buSzPts val="1800"/>
+              <a:buFont typeface="Arial"/>
+              <a:buNone/>
+            </a:pPr>
+            <a:r>
+              <a:t/>
+            </a:r>
+            <a:endParaRPr b="0" i="0" spc="0" sz="1800" u="none" cap="none" strike="noStrike">
+              <a:solidFill>
+                <a:schemeClr val="dk1"/>
+              </a:solidFill>
+              <a:latin typeface="Calibri"/>
+              <a:ea typeface="Calibri"/>
+              <a:cs typeface="Calibri"/>
+              <a:sym typeface="Calibri"/>
+            </a:endParaRPr>
+          </a:p>
+        </p:txBody>
+      </p:sp>
+      <p:sp>
+        <p:nvSpPr>
+          <p:cNvPr id="370" name="Google Shape;370;p13"/>
+          <p:cNvSpPr txBox="1"/>
+          <p:nvPr/>
+        </p:nvSpPr>
+        <p:spPr>
+          <a:xfrm>
+            <a:off x="7946100" y="2163580"/>
+            <a:ext cx="3291900" cy="1262100"/>
+          </a:xfrm>
+          <a:prstGeom prst="rect">
+            <a:avLst/>
+          </a:prstGeom>
+          <a:noFill/>
+          <a:ln>
+            <a:noFill/>
+          </a:ln>
+        </p:spPr>
+        <p:txBody>
+          <a:bodyPr anchorCtr="0" anchor="ctr" bIns="0" lIns="0" spcFirstLastPara="1" rIns="0" wrap="square" tIns="0">
+            <a:spAutoFit/>
+          </a:bodyPr>
+          <a:lstStyle/>
+          <a:p>
+            <a:pPr indent="0" lvl="0" marL="0" marR="0" rtl="0" algn="l">
+              <a:lnSpc>
+                <a:spcPct val="110000"/>
+              </a:lnSpc>
+              <a:spcBef>
+                <a:spcPts val="0"/>
+              </a:spcBef>
+              <a:spcAft>
+                <a:spcPts val="0"/>
+              </a:spcAft>
+              <a:buClr>
+                <a:srgbClr val="000000"/>
+              </a:buClr>
+              <a:buSzPts val="1100"/>
+              <a:buFont typeface="Arial"/>
+              <a:buNone/>
+            </a:pPr>
+            <a:r>
+              <a:rPr b="1" i="0" lang="en-US" spc="200" sz="1100" u="none" cap="none" strike="noStrike">
+                <a:solidFill>
+                  <a:srgbClr val="11803E"/>
+                </a:solidFill>
+                <a:latin typeface="Plus Jakarta Sans"/>
+                <a:ea typeface="Plus Jakarta Sans"/>
+                <a:cs typeface="Plus Jakarta Sans"/>
+                <a:sym typeface="Plus Jakarta Sans"/>
+              </a:rPr>
+              <a:t>AJUSTE DE PRIVACIDADE</a:t>
+            </a:r>
+            <a:endParaRPr b="1" i="0" spc="200" sz="1100" u="none" cap="none" strike="noStrike">
+              <a:solidFill>
+                <a:srgbClr val="11803E"/>
               </a:solidFill>
               <a:latin typeface="Plus Jakarta Sans"/>
               <a:ea typeface="Plus Jakarta Sans"/>
@@ -21802,41 +23713,121 @@
           <a:p>
             <a:pPr indent="0" lvl="0" marL="0" marR="0" rtl="0" algn="l">
               <a:lnSpc>
-                <a:spcPct val="100000"/>
-              </a:lnSpc>
-              <a:spcBef>
-                <a:spcPts val="400"/>
-              </a:spcBef>
-              <a:spcAft>
-                <a:spcPts val="0"/>
-              </a:spcAft>
-              <a:buClr>
-                <a:srgbClr val="000000"/>
-              </a:buClr>
-              <a:buSzPts val="1400"/>
-              <a:buFont typeface="Arial"/>
-              <a:buNone/>
-            </a:pPr>
-            <a:r>
-              <a:rPr b="0" i="0" lang="en-US" spc="0" sz="1400" u="none" cap="none" strike="noStrike">
-                <a:solidFill>
-                  <a:srgbClr val="545F73"/>
+                <a:spcPct val="110000"/>
+              </a:lnSpc>
+              <a:spcBef>
+                <a:spcPts val="0"/>
+              </a:spcBef>
+              <a:spcAft>
+                <a:spcPts val="0"/>
+              </a:spcAft>
+              <a:buClr>
+                <a:srgbClr val="000000"/>
+              </a:buClr>
+              <a:buSzPts val="1100"/>
+              <a:buFont typeface="Arial"/>
+              <a:buNone/>
+            </a:pPr>
+            <a:r>
+              <a:rPr b="1" i="0" lang="en-US" spc="200" sz="800" u="none" cap="none" strike="noStrike">
+                <a:solidFill>
+                  <a:srgbClr val="11803E"/>
                 </a:solidFill>
                 <a:latin typeface="Plus Jakarta Sans"/>
                 <a:ea typeface="Plus Jakarta Sans"/>
                 <a:cs typeface="Plus Jakarta Sans"/>
                 <a:sym typeface="Plus Jakarta Sans"/>
               </a:rPr>
-              <a:t>app nos recentes ou não</a:t>
-            </a:r>
-            <a:endParaRPr b="0" i="0" spc="0" sz="1400" u="none" cap="none" strike="noStrike">
+              <a:t/>
+            </a:r>
+            <a:endParaRPr b="1" i="0" spc="200" sz="1100" u="none" cap="none" strike="noStrike">
               <a:solidFill>
-                <a:srgbClr val="000000"/>
+                <a:srgbClr val="11803E"/>
               </a:solidFill>
-              <a:latin typeface="Arial"/>
-              <a:ea typeface="Arial"/>
-              <a:cs typeface="Arial"/>
-              <a:sym typeface="Arial"/>
+              <a:latin typeface="Plus Jakarta Sans"/>
+              <a:ea typeface="Plus Jakarta Sans"/>
+              <a:cs typeface="Plus Jakarta Sans"/>
+              <a:sym typeface="Plus Jakarta Sans"/>
+            </a:endParaRPr>
+          </a:p>
+          <a:p>
+            <a:pPr indent="0" lvl="0" marL="0" marR="0" rtl="0" algn="l">
+              <a:lnSpc>
+                <a:spcPct val="110000"/>
+              </a:lnSpc>
+              <a:spcBef>
+                <a:spcPts val="0"/>
+              </a:spcBef>
+              <a:spcAft>
+                <a:spcPts val="0"/>
+              </a:spcAft>
+              <a:buClr>
+                <a:srgbClr val="000000"/>
+              </a:buClr>
+              <a:buSzPts val="1100"/>
+              <a:buFont typeface="Arial"/>
+              <a:buNone/>
+            </a:pPr>
+            <a:r>
+              <a:rPr b="1" i="0" lang="en-US" spc="0" sz="1700" u="none" cap="none" strike="noStrike">
+                <a:solidFill>
+                  <a:srgbClr val="191C1E"/>
+                </a:solidFill>
+                <a:latin typeface="Plus Jakarta Sans"/>
+                <a:ea typeface="Plus Jakarta Sans"/>
+                <a:cs typeface="Plus Jakarta Sans"/>
+                <a:sym typeface="Plus Jakarta Sans"/>
+              </a:rPr>
+              <a:t>Fechar o alarme devolve o bloqueio</a:t>
+            </a:r>
+            <a:endParaRPr b="1" i="0" spc="200" sz="1100" u="none" cap="none" strike="noStrike">
+              <a:solidFill>
+                <a:srgbClr val="11803E"/>
+              </a:solidFill>
+              <a:latin typeface="Plus Jakarta Sans"/>
+              <a:ea typeface="Plus Jakarta Sans"/>
+              <a:cs typeface="Plus Jakarta Sans"/>
+              <a:sym typeface="Plus Jakarta Sans"/>
+            </a:endParaRPr>
+          </a:p>
+          <a:p>
+            <a:pPr indent="0" lvl="0" marL="0" marR="0" rtl="0" algn="l">
+              <a:lnSpc>
+                <a:spcPct val="110000"/>
+              </a:lnSpc>
+              <a:spcBef>
+                <a:spcPts val="0"/>
+              </a:spcBef>
+              <a:spcAft>
+                <a:spcPts val="0"/>
+              </a:spcAft>
+              <a:buClr>
+                <a:srgbClr val="000000"/>
+              </a:buClr>
+              <a:buSzPts val="1100"/>
+              <a:buFont typeface="Arial"/>
+              <a:buNone/>
+            </a:pPr>
+            <a:r>
+              <a:rPr b="0" i="0" lang="en-US" spc="0" sz="1400" u="none" cap="none" strike="noStrike">
+                <a:solidFill>
+                  <a:srgbClr val="545F73"/>
+                </a:solidFill>
+                <a:latin typeface="Plus Jakarta Sans"/>
+                <a:ea typeface="Plus Jakarta Sans"/>
+                <a:cs typeface="Plus Jakarta Sans"/>
+                <a:sym typeface="Plus Jakarta Sans"/>
+              </a:rPr>
+              <a:t>sem expor o resto do app</a:t>
+            </a:r>
+            <a:endParaRPr b="1" i="0" spc="200" sz="1100" u="none" cap="none" strike="noStrike">
+              <a:solidFill>
+                <a:srgbClr val="11803E"/>
+              </a:solidFill>
+              <a:latin typeface="Plus Jakarta Sans"/>
+              <a:ea typeface="Plus Jakarta Sans"/>
+              <a:cs typeface="Plus Jakarta Sans"/>
+              <a:sym typeface="Plus Jakarta Sans"/>
             </a:endParaRPr>
           </a:p>
         </p:txBody>
@@ -22031,7 +24022,7 @@
                 <a:cs typeface="Plus Jakarta Sans"/>
                 <a:sym typeface="Plus Jakarta Sans"/>
               </a:rPr>
-              <a:t>Após reiniciar, o alarme esperou o desbloqueio</a:t>
+              <a:t>Após reiniciar, esperou o desbloqueio</a:t>
             </a:r>
             <a:endParaRPr b="0" i="0" spc="0" sz="1400" u="none" cap="none" strike="noStrike">
               <a:solidFill>
@@ -22071,31 +24062,7 @@
                 <a:cs typeface="Plus Jakarta Sans"/>
                 <a:sym typeface="Plus Jakarta Sans"/>
               </a:rPr>
-              <a:t>Restrição de </a:t>
-            </a:r>
-            <a:r>
-              <a:rPr b="0" i="1" lang="en-US" spc="0" sz="1400" u="none" cap="none" strike="noStrike">
-                <a:solidFill>
-                  <a:srgbClr val="5C4A0F"/>
-                </a:solidFill>
-                <a:latin typeface="Plus Jakarta Sans"/>
-                <a:ea typeface="Plus Jakarta Sans"/>
-                <a:cs typeface="Plus Jakarta Sans"/>
-                <a:sym typeface="Plus Jakarta Sans"/>
-              </a:rPr>
-              <a:t>Autostart</a:t>
-            </a:r>
-            <a:r>
-              <a:rPr b="0" i="0" lang="en-US" spc="0" sz="1400" u="none" cap="none" strike="noStrike">
-                <a:solidFill>
-                  <a:srgbClr val="5C4A0F"/>
-                </a:solidFill>
-                <a:latin typeface="Plus Jakarta Sans"/>
-                <a:ea typeface="Plus Jakarta Sans"/>
-                <a:cs typeface="Plus Jakarta Sans"/>
-                <a:sym typeface="Plus Jakarta Sans"/>
-              </a:rPr>
-              <a:t> do fabricante</a:t>
+              <a:t>o app orienta liberar o início automático</a:t>
             </a:r>
             <a:endParaRPr b="0" i="0" spc="0" sz="1400" u="none" cap="none" strike="noStrike">
               <a:solidFill>
@@ -22187,7 +24154,7 @@
             </a:avLst>
           </a:prstGeom>
           <a:solidFill>
-            <a:srgbClr val="E3F6EA"/>
+            <a:srgbClr val="FDF3C4"/>
           </a:solidFill>
           <a:ln>
             <a:noFill/>
@@ -22469,14 +24436,14 @@
             <a:r>
               <a:rPr b="1" i="0" lang="en-US" spc="0" sz="1200" u="none" cap="none" strike="noStrike">
                 <a:solidFill>
-                  <a:srgbClr val="11803E"/>
+                  <a:srgbClr val="5C4A0F"/>
                 </a:solidFill>
                 <a:latin typeface="Plus Jakarta Sans"/>
                 <a:ea typeface="Plus Jakarta Sans"/>
                 <a:cs typeface="Plus Jakarta Sans"/>
                 <a:sym typeface="Plus Jakarta Sans"/>
               </a:rPr>
-              <a:t>Aprovado</a:t>
+              <a:t>Com ressalva</a:t>
             </a:r>
             <a:endParaRPr b="0" i="0" spc="0" sz="1400" u="none" cap="none" strike="noStrike">
               <a:solidFill>
@@ -22498,7 +24465,7 @@
 </p:sld>
 </file>
 
-<file path=ppt/slides/slide14.xml><?xml version="1.0" encoding="utf-8"?>
+<file path=ppt/slides/slide15.xml><?xml version="1.0" encoding="utf-8"?>
 <p:sld xmlns:a="http://schemas.openxmlformats.org/drawingml/2006/main" xmlns:r="http://schemas.openxmlformats.org/officeDocument/2006/relationships" xmlns:mc="http://schemas.openxmlformats.org/markup-compatibility/2006" xmlns:mv="urn:schemas-microsoft-com:mac:vml" xmlns:p="http://schemas.openxmlformats.org/presentationml/2006/main" xmlns:c="http://schemas.openxmlformats.org/drawingml/2006/chart" xmlns:dgm="http://schemas.openxmlformats.org/drawingml/2006/diagram" xmlns:o="urn:schemas-microsoft-com:office:office" xmlns:v="urn:schemas-microsoft-com:vml" xmlns:pvml="urn:schemas-microsoft-com:office:powerpoint" xmlns:com="http://schemas.openxmlformats.org/drawingml/2006/compatibility" xmlns:p14="http://schemas.microsoft.com/office/powerpoint/2010/main" xmlns:p15="http://schemas.microsoft.com/office/powerpoint/2012/main" xmlns:ahyp="http://schemas.microsoft.com/office/drawing/2018/hyperlinkcolor">
   <p:cSld>
     <p:bg>
@@ -22772,7 +24739,7 @@
                 <a:cs typeface="Plus Jakarta Sans"/>
                 <a:sym typeface="Plus Jakarta Sans"/>
               </a:rPr>
-              <a:t>14</a:t>
+              <a:t>15</a:t>
             </a:r>
             <a:endParaRPr b="0" i="0" spc="0" sz="1400" u="none" cap="none" strike="noStrike">
               <a:solidFill>
@@ -23729,7 +25696,7 @@
 </p:sld>
 </file>
 
-<file path=ppt/slides/slide15.xml><?xml version="1.0" encoding="utf-8"?>
+<file path=ppt/slides/slide16.xml><?xml version="1.0" encoding="utf-8"?>
 <p:sld xmlns:a="http://schemas.openxmlformats.org/drawingml/2006/main" xmlns:r="http://schemas.openxmlformats.org/officeDocument/2006/relationships" xmlns:mc="http://schemas.openxmlformats.org/markup-compatibility/2006" xmlns:mv="urn:schemas-microsoft-com:mac:vml" xmlns:p="http://schemas.openxmlformats.org/presentationml/2006/main" xmlns:c="http://schemas.openxmlformats.org/drawingml/2006/chart" xmlns:dgm="http://schemas.openxmlformats.org/drawingml/2006/diagram" xmlns:o="urn:schemas-microsoft-com:office:office" xmlns:v="urn:schemas-microsoft-com:vml" xmlns:pvml="urn:schemas-microsoft-com:office:powerpoint" xmlns:com="http://schemas.openxmlformats.org/drawingml/2006/compatibility" xmlns:p14="http://schemas.microsoft.com/office/powerpoint/2010/main" xmlns:p15="http://schemas.microsoft.com/office/powerpoint/2012/main" xmlns:ahyp="http://schemas.microsoft.com/office/drawing/2018/hyperlinkcolor">
   <p:cSld>
     <p:bg>
@@ -24003,7 +25970,7 @@
                 <a:cs typeface="Plus Jakarta Sans"/>
                 <a:sym typeface="Plus Jakarta Sans"/>
               </a:rPr>
-              <a:t>15</a:t>
+              <a:t>16</a:t>
             </a:r>
             <a:endParaRPr b="0" i="0" spc="0" sz="1400" u="none" cap="none" strike="noStrike">
               <a:solidFill>
@@ -25308,7 +27275,7 @@
 </p:sld>
 </file>
 
-<file path=ppt/slides/slide16.xml><?xml version="1.0" encoding="utf-8"?>
+<file path=ppt/slides/slide17.xml><?xml version="1.0" encoding="utf-8"?>
 <p:sld xmlns:a="http://schemas.openxmlformats.org/drawingml/2006/main" xmlns:r="http://schemas.openxmlformats.org/officeDocument/2006/relationships" xmlns:mc="http://schemas.openxmlformats.org/markup-compatibility/2006" xmlns:mv="urn:schemas-microsoft-com:mac:vml" xmlns:p="http://schemas.openxmlformats.org/presentationml/2006/main" xmlns:c="http://schemas.openxmlformats.org/drawingml/2006/chart" xmlns:dgm="http://schemas.openxmlformats.org/drawingml/2006/diagram" xmlns:o="urn:schemas-microsoft-com:office:office" xmlns:v="urn:schemas-microsoft-com:vml" xmlns:pvml="urn:schemas-microsoft-com:office:powerpoint" xmlns:com="http://schemas.openxmlformats.org/drawingml/2006/compatibility" xmlns:p14="http://schemas.microsoft.com/office/powerpoint/2010/main" xmlns:p15="http://schemas.microsoft.com/office/powerpoint/2012/main" xmlns:ahyp="http://schemas.microsoft.com/office/drawing/2018/hyperlinkcolor">
   <p:cSld>
     <p:bg>
@@ -25516,7 +27483,7 @@
                 <a:cs typeface="Plus Jakarta Sans"/>
                 <a:sym typeface="Plus Jakarta Sans"/>
               </a:rPr>
-              <a:t>16</a:t>
+              <a:t>17</a:t>
             </a:r>
             <a:endParaRPr b="0" i="0" spc="0" sz="1400" u="none" cap="none" strike="noStrike">
               <a:solidFill>
@@ -26334,7 +28301,7 @@
 </p:sld>
 </file>
 
-<file path=ppt/slides/slide17.xml><?xml version="1.0" encoding="utf-8"?>
+<file path=ppt/slides/slide18.xml><?xml version="1.0" encoding="utf-8"?>
 <p:sld xmlns:a="http://schemas.openxmlformats.org/drawingml/2006/main" xmlns:r="http://schemas.openxmlformats.org/officeDocument/2006/relationships" xmlns:mc="http://schemas.openxmlformats.org/markup-compatibility/2006" xmlns:mv="urn:schemas-microsoft-com:mac:vml" xmlns:p="http://schemas.openxmlformats.org/presentationml/2006/main" xmlns:c="http://schemas.openxmlformats.org/drawingml/2006/chart" xmlns:dgm="http://schemas.openxmlformats.org/drawingml/2006/diagram" xmlns:o="urn:schemas-microsoft-com:office:office" xmlns:v="urn:schemas-microsoft-com:vml" xmlns:pvml="urn:schemas-microsoft-com:office:powerpoint" xmlns:com="http://schemas.openxmlformats.org/drawingml/2006/compatibility" xmlns:p14="http://schemas.microsoft.com/office/powerpoint/2010/main" xmlns:p15="http://schemas.microsoft.com/office/powerpoint/2012/main" xmlns:ahyp="http://schemas.microsoft.com/office/drawing/2018/hyperlinkcolor">
   <p:cSld>
     <p:bg>
@@ -37201,7 +39168,7 @@
                 <a:cs typeface="Plus Jakarta Sans"/>
                 <a:sym typeface="Plus Jakarta Sans"/>
               </a:rPr>
-              <a:t>Fonte: elaborado pelo autor (2026), a partir da seção 4.4.</a:t>
+              <a:t>Fonte: elaborado pelo autor (2026), com base em Martin (2019) e na seção 4.4 do TCC.</a:t>
             </a:r>
             <a:endParaRPr b="0" i="0" spc="0" sz="1400" u="none" cap="none" strike="noStrike">
               <a:solidFill>

--- a/docs/tcc/apresentacao-mapill.pptx
+++ b/docs/tcc/apresentacao-mapill.pptx
@@ -21,21 +21,21 @@
     <p:sldId id="266" r:id="rId16"/>
     <p:sldId id="267" r:id="rId17"/>
     <p:sldId id="268" r:id="rId18"/>
-    <p:sldId id="273" r:id="rId28"/>
     <p:sldId id="269" r:id="rId19"/>
     <p:sldId id="270" r:id="rId20"/>
     <p:sldId id="271" r:id="rId21"/>
     <p:sldId id="272" r:id="rId22"/>
+    <p:sldId id="273" r:id="rId23"/>
   </p:sldIdLst>
   <p:sldSz cy="6858000" cx="12191675"/>
   <p:notesSz cx="6858000" cy="9144000"/>
   <p:embeddedFontLst>
     <p:embeddedFont>
       <p:font typeface="Plus Jakarta Sans"/>
-      <p:regular r:id="rId23"/>
-      <p:bold r:id="rId24"/>
-      <p:italic r:id="rId25"/>
-      <p:boldItalic r:id="rId26"/>
+      <p:regular r:id="rId24"/>
+      <p:bold r:id="rId25"/>
+      <p:italic r:id="rId26"/>
+      <p:boldItalic r:id="rId27"/>
     </p:embeddedFont>
   </p:embeddedFontLst>
   <p:defaultTextStyle>
@@ -283,7 +283,7 @@
       </p15:sldGuideLst>
     </p:ext>
     <p:ext uri="GoogleSlidesCustomDataVersion2">
-      <go:slidesCustomData xmlns:go="http://customooxmlschemas.google.com/" r:id="rId27" roundtripDataSignature="AMtx7migJzHqPEDzeaDoLyFypKWRNwS/SQ=="/>
+      <go:slidesCustomData xmlns:go="http://customooxmlschemas.google.com/" r:id="rId28" roundtripDataSignature="AMtx7mgrs0JLhFSvVX4VZMJTaG8Cf8WUSw=="/>
     </p:ext>
   </p:extLst>
 </p:presentation>
@@ -1046,7 +1046,7 @@
   <p:cSld>
     <p:spTree>
       <p:nvGrpSpPr>
-        <p:cNvPr id="299" name="Shape 299"/>
+        <p:cNvPr id="311" name="Shape 311"/>
         <p:cNvGrpSpPr/>
         <p:nvPr/>
       </p:nvGrpSpPr>
@@ -1060,7 +1060,7 @@
       </p:grpSpPr>
       <p:sp>
         <p:nvSpPr>
-          <p:cNvPr id="300" name="Google Shape;300;p11:notes"/>
+          <p:cNvPr id="312" name="Google Shape;312;p11:notes"/>
           <p:cNvSpPr/>
           <p:nvPr>
             <p:ph idx="2" type="sldImg"/>
@@ -1099,7 +1099,7 @@
       </p:sp>
       <p:sp>
         <p:nvSpPr>
-          <p:cNvPr id="301" name="Google Shape;301;p11:notes"/>
+          <p:cNvPr id="313" name="Google Shape;313;p11:notes"/>
           <p:cNvSpPr txBox="1"/>
           <p:nvPr>
             <p:ph idx="1" type="body"/>
@@ -1167,7 +1167,7 @@
       </p:sp>
       <p:sp>
         <p:nvSpPr>
-          <p:cNvPr id="302" name="Google Shape;302;p11:notes"/>
+          <p:cNvPr id="314" name="Google Shape;314;p11:notes"/>
           <p:cNvSpPr txBox="1"/>
           <p:nvPr>
             <p:ph idx="12" type="sldNum"/>
@@ -1237,7 +1237,7 @@
   <p:cSld>
     <p:spTree>
       <p:nvGrpSpPr>
-        <p:cNvPr id="318" name="Shape 318"/>
+        <p:cNvPr id="330" name="Shape 330"/>
         <p:cNvGrpSpPr/>
         <p:nvPr/>
       </p:nvGrpSpPr>
@@ -1251,7 +1251,7 @@
       </p:grpSpPr>
       <p:sp>
         <p:nvSpPr>
-          <p:cNvPr id="319" name="Google Shape;319;p12:notes"/>
+          <p:cNvPr id="331" name="Google Shape;331;p12:notes"/>
           <p:cNvSpPr/>
           <p:nvPr>
             <p:ph idx="2" type="sldImg"/>
@@ -1290,7 +1290,7 @@
       </p:sp>
       <p:sp>
         <p:nvSpPr>
-          <p:cNvPr id="320" name="Google Shape;320;p12:notes"/>
+          <p:cNvPr id="332" name="Google Shape;332;p12:notes"/>
           <p:cNvSpPr txBox="1"/>
           <p:nvPr>
             <p:ph idx="1" type="body"/>
@@ -1596,7 +1596,7 @@
       </p:sp>
       <p:sp>
         <p:nvSpPr>
-          <p:cNvPr id="321" name="Google Shape;321;p12:notes"/>
+          <p:cNvPr id="333" name="Google Shape;333;p12:notes"/>
           <p:cNvSpPr txBox="1"/>
           <p:nvPr>
             <p:ph idx="12" type="sldNum"/>
@@ -1666,7 +1666,7 @@
   <p:cSld>
     <p:spTree>
       <p:nvGrpSpPr>
-        <p:cNvPr id="340" name="Shape 340"/>
+        <p:cNvPr id="352" name="Shape 352"/>
         <p:cNvGrpSpPr/>
         <p:nvPr/>
       </p:nvGrpSpPr>
@@ -1680,7 +1680,7 @@
       </p:grpSpPr>
       <p:sp>
         <p:nvSpPr>
-          <p:cNvPr id="341" name="Google Shape;341;h16db80fa709ec415_0_4:notes"/>
+          <p:cNvPr id="353" name="Google Shape;353;h16db80fa709ec415_0_4:notes"/>
           <p:cNvSpPr/>
           <p:nvPr>
             <p:ph idx="2" type="sldImg"/>
@@ -1719,7 +1719,7 @@
       </p:sp>
       <p:sp>
         <p:nvSpPr>
-          <p:cNvPr id="342" name="Google Shape;342;h16db80fa709ec415_0_4:notes"/>
+          <p:cNvPr id="354" name="Google Shape;354;h16db80fa709ec415_0_4:notes"/>
           <p:cNvSpPr txBox="1"/>
           <p:nvPr>
             <p:ph idx="1" type="body"/>
@@ -2025,7 +2025,7 @@
       </p:sp>
       <p:sp>
         <p:nvSpPr>
-          <p:cNvPr id="343" name="Google Shape;343;h16db80fa709ec415_0_4:notes"/>
+          <p:cNvPr id="355" name="Google Shape;355;h16db80fa709ec415_0_4:notes"/>
           <p:cNvSpPr txBox="1"/>
           <p:nvPr>
             <p:ph idx="12" type="sldNum"/>
@@ -2095,7 +2095,7 @@
   <p:cSld>
     <p:spTree>
       <p:nvGrpSpPr>
-        <p:cNvPr id="349" name="Shape 349"/>
+        <p:cNvPr id="361" name="Shape 361"/>
         <p:cNvGrpSpPr/>
         <p:nvPr/>
       </p:nvGrpSpPr>
@@ -2109,7 +2109,7 @@
       </p:grpSpPr>
       <p:sp>
         <p:nvSpPr>
-          <p:cNvPr id="350" name="Google Shape;350;p13:notes"/>
+          <p:cNvPr id="362" name="Google Shape;362;p13:notes"/>
           <p:cNvSpPr/>
           <p:nvPr>
             <p:ph idx="2" type="sldImg"/>
@@ -2148,7 +2148,7 @@
       </p:sp>
       <p:sp>
         <p:nvSpPr>
-          <p:cNvPr id="351" name="Google Shape;351;p13:notes"/>
+          <p:cNvPr id="363" name="Google Shape;363;p13:notes"/>
           <p:cNvSpPr txBox="1"/>
           <p:nvPr>
             <p:ph idx="1" type="body"/>
@@ -2173,20 +2173,74 @@
           </a:bodyPr>
           <a:lstStyle/>
           <a:p>
-            <a:r>
+            <a:pPr indent="-298450" lvl="0" marL="457200" marR="0" rtl="0" algn="l">
+              <a:lnSpc>
+                <a:spcPct val="100000"/>
+              </a:lnSpc>
+              <a:spcBef>
+                <a:spcPts val="0"/>
+              </a:spcBef>
+              <a:spcAft>
+                <a:spcPts val="0"/>
+              </a:spcAft>
+              <a:buClr>
+                <a:srgbClr val="000000"/>
+              </a:buClr>
+              <a:buSzPts val="1100"/>
+              <a:buFont typeface="Arial"/>
+              <a:buChar char="●"/>
+            </a:pPr>
+            <a:r>
+              <a:rPr b="0" i="0" lang="en-US" spc="0" sz="1100" u="none" cap="none" strike="noStrike">
+                <a:solidFill>
+                  <a:srgbClr val="000000"/>
+                </a:solidFill>
+                <a:latin typeface="Arial"/>
+                <a:ea typeface="Arial"/>
+                <a:cs typeface="Arial"/>
+                <a:sym typeface="Arial"/>
+              </a:rPr>
               <a:t>[1 min]</a:t>
             </a:r>
-          </a:p>
-          <a:p>
-            <a:r>
+            <a:endParaRPr/>
+          </a:p>
+          <a:p>
+            <a:pPr indent="-298450" lvl="0" marL="457200" marR="0" rtl="0" algn="l">
+              <a:lnSpc>
+                <a:spcPct val="100000"/>
+              </a:lnSpc>
+              <a:spcBef>
+                <a:spcPts val="0"/>
+              </a:spcBef>
+              <a:spcAft>
+                <a:spcPts val="0"/>
+              </a:spcAft>
+              <a:buClr>
+                <a:srgbClr val="000000"/>
+              </a:buClr>
+              <a:buSzPts val="1100"/>
+              <a:buFont typeface="Arial"/>
+              <a:buChar char="●"/>
+            </a:pPr>
+            <a:r>
+              <a:rPr b="0" i="0" lang="en-US" spc="0" sz="1100" u="none" cap="none" strike="noStrike">
+                <a:solidFill>
+                  <a:srgbClr val="000000"/>
+                </a:solidFill>
+                <a:latin typeface="Arial"/>
+                <a:ea typeface="Arial"/>
+                <a:cs typeface="Arial"/>
+                <a:sym typeface="Arial"/>
+              </a:rPr>
               <a:t>A validação foi feita por mim, num aparelho físico, seguindo um roteiro escrito em que cada passo tinha o resultado esperado. O segundo aparelho foi simulado direto na base remota. Os cinco cenários da arquitetura offline-first foram aprovados, e três deles só depois de ajustes que os próprios testes revelaram. Na restauração, o app pedia de novo os termos e a ficha de saúde, porque olhava o banco local antes de receber os dados da nuvem. Doses futuras excluídas voltavam a aparecer, e a exclusão passou a ser lógica. Entre dois aparelhos, vencia a versão sincronizada por último, e não a mais recente, então o servidor passou a aplicar o mesmo critério. E as edições feitas sem conexão não chegavam ao outro aparelho, o que foi resolvido olhando o momento em que o dado chega à nuvem.</a:t>
             </a:r>
+            <a:endParaRPr/>
           </a:p>
         </p:txBody>
       </p:sp>
       <p:sp>
         <p:nvSpPr>
-          <p:cNvPr id="352" name="Google Shape;352;p13:notes"/>
+          <p:cNvPr id="364" name="Google Shape;364;p13:notes"/>
           <p:cNvSpPr txBox="1"/>
           <p:nvPr>
             <p:ph idx="12" type="sldNum"/>
@@ -2256,7 +2310,7 @@
   <p:cSld>
     <p:spTree>
       <p:nvGrpSpPr>
-        <p:cNvPr id="379" name="Shape 379"/>
+        <p:cNvPr id="388" name="Shape 388"/>
         <p:cNvGrpSpPr/>
         <p:nvPr/>
       </p:nvGrpSpPr>
@@ -2270,7 +2324,7 @@
       </p:grpSpPr>
       <p:sp>
         <p:nvSpPr>
-          <p:cNvPr id="380" name="Google Shape;380;p14:notes"/>
+          <p:cNvPr id="389" name="Google Shape;389;p8:notes"/>
           <p:cNvSpPr/>
           <p:nvPr>
             <p:ph idx="2" type="sldImg"/>
@@ -2278,8 +2332,8 @@
         </p:nvSpPr>
         <p:spPr>
           <a:xfrm>
-            <a:off x="0" y="0"/>
-            <a:ext cx="3000000" cy="3000000"/>
+            <a:off x="1143225" y="685800"/>
+            <a:ext cx="4572225" cy="3429000"/>
           </a:xfrm>
           <a:custGeom>
             <a:rect b="b" l="l" r="r" t="t"/>
@@ -2302,14 +2356,20 @@
             </a:pathLst>
           </a:custGeom>
           <a:noFill/>
-          <a:ln>
-            <a:noFill/>
+          <a:ln cap="flat" cmpd="sng" w="9525">
+            <a:solidFill>
+              <a:srgbClr val="000000"/>
+            </a:solidFill>
+            <a:prstDash val="solid"/>
+            <a:round/>
+            <a:headEnd len="sm" w="sm" type="none"/>
+            <a:tailEnd len="sm" w="sm" type="none"/>
           </a:ln>
         </p:spPr>
       </p:sp>
       <p:sp>
         <p:nvSpPr>
-          <p:cNvPr id="381" name="Google Shape;381;p14:notes"/>
+          <p:cNvPr id="390" name="Google Shape;390;p8:notes"/>
           <p:cNvSpPr txBox="1"/>
           <p:nvPr>
             <p:ph idx="1" type="body"/>
@@ -2317,8 +2377,8 @@
         </p:nvSpPr>
         <p:spPr>
           <a:xfrm>
-            <a:off x="0" y="0"/>
-            <a:ext cx="3000000" cy="3000000"/>
+            <a:off x="685800" y="4343400"/>
+            <a:ext cx="5486400" cy="4114800"/>
           </a:xfrm>
           <a:prstGeom prst="rect">
             <a:avLst/>
@@ -2329,78 +2389,73 @@
           </a:ln>
         </p:spPr>
         <p:txBody>
-          <a:bodyPr anchorCtr="0" anchor="t" bIns="45700" lIns="91425" spcFirstLastPara="1" rIns="91425" wrap="square" tIns="45700">
+          <a:bodyPr anchorCtr="0" anchor="t" bIns="91425" lIns="91425" spcFirstLastPara="1" rIns="91425" wrap="square" tIns="91425">
             <a:noAutofit/>
           </a:bodyPr>
           <a:lstStyle/>
           <a:p>
-            <a:r>
+            <a:pPr indent="-298450" lvl="0" marL="457200" marR="0" rtl="0" algn="l">
+              <a:lnSpc>
+                <a:spcPct val="100000"/>
+              </a:lnSpc>
+              <a:spcBef>
+                <a:spcPts val="0"/>
+              </a:spcBef>
+              <a:spcAft>
+                <a:spcPts val="0"/>
+              </a:spcAft>
+              <a:buClr>
+                <a:srgbClr val="000000"/>
+              </a:buClr>
+              <a:buSzPts val="1100"/>
+              <a:buFont typeface="Arial"/>
+              <a:buChar char="●"/>
+            </a:pPr>
+            <a:r>
+              <a:rPr b="0" i="0" lang="en-US" spc="0" sz="1100" u="none" cap="none" strike="noStrike">
+                <a:solidFill>
+                  <a:srgbClr val="000000"/>
+                </a:solidFill>
+                <a:latin typeface="Arial"/>
+                <a:ea typeface="Arial"/>
+                <a:cs typeface="Arial"/>
+                <a:sym typeface="Arial"/>
+              </a:rPr>
               <a:t>[1 min]</a:t>
             </a:r>
-          </a:p>
-          <a:p>
-            <a:r>
-              <a:t>Para fechar, volto à pergunta do começo. O Mapill centraliza num só aplicativo os remédios, o estoque, as consultas e as receitas. É confiável porque o alarme toca mesmo com o aplicativo fechado, e nenhuma operação depende de internet. É seguro porque cada usuário só acessa os próprios dados, e quem não quiser criar conta pode usar tudo assim mesmo. O design foi guiado pelas heurísticas de Nielsen e por critérios de acessibilidade, mas ainda não foi testado com pacientes, e esse é justamente o primeiro passo que vem a seguir. Com isso, os objetivos do trabalho foram atendidos.</a:t>
-            </a:r>
-          </a:p>
-        </p:txBody>
-      </p:sp>
-      <p:sp>
-        <p:nvSpPr>
-          <p:cNvPr id="382" name="Google Shape;382;p14:notes"/>
-          <p:cNvSpPr txBox="1"/>
-          <p:nvPr>
-            <p:ph idx="12" type="sldNum"/>
-          </p:nvPr>
-        </p:nvSpPr>
-        <p:spPr>
-          <a:xfrm>
-            <a:off x="0" y="0"/>
-            <a:ext cx="3000000" cy="3000000"/>
-          </a:xfrm>
-          <a:prstGeom prst="rect">
-            <a:avLst/>
-          </a:prstGeom>
-          <a:noFill/>
-          <a:ln>
-            <a:noFill/>
-          </a:ln>
-        </p:spPr>
-        <p:txBody>
-          <a:bodyPr anchorCtr="0" anchor="ctr" bIns="91425" lIns="91425" spcFirstLastPara="1" rIns="91425" wrap="square" tIns="91425">
-            <a:noAutofit/>
-          </a:bodyPr>
-          <a:lstStyle/>
-          <a:p>
-            <a:pPr indent="0" lvl="0" marL="0" marR="0" rtl="0" algn="l">
-              <a:lnSpc>
-                <a:spcPct val="100000"/>
-              </a:lnSpc>
-              <a:spcBef>
-                <a:spcPts val="0"/>
-              </a:spcBef>
-              <a:spcAft>
-                <a:spcPts val="0"/>
-              </a:spcAft>
-              <a:buClr>
-                <a:srgbClr val="000000"/>
-              </a:buClr>
-              <a:buSzPts val="1400"/>
-              <a:buFont typeface="Arial"/>
-              <a:buNone/>
-            </a:pPr>
-            <a:r>
-              <a:t/>
-            </a:r>
-            <a:endParaRPr b="0" i="0" spc="0" sz="1400" u="none" cap="none" strike="noStrike">
-              <a:solidFill>
-                <a:srgbClr val="000000"/>
-              </a:solidFill>
-              <a:latin typeface="Arial"/>
-              <a:ea typeface="Arial"/>
-              <a:cs typeface="Arial"/>
-              <a:sym typeface="Arial"/>
-            </a:endParaRPr>
+            <a:endParaRPr/>
+          </a:p>
+          <a:p>
+            <a:pPr indent="-298450" lvl="0" marL="457200" marR="0" rtl="0" algn="l">
+              <a:lnSpc>
+                <a:spcPct val="100000"/>
+              </a:lnSpc>
+              <a:spcBef>
+                <a:spcPts val="0"/>
+              </a:spcBef>
+              <a:spcAft>
+                <a:spcPts val="0"/>
+              </a:spcAft>
+              <a:buClr>
+                <a:srgbClr val="000000"/>
+              </a:buClr>
+              <a:buSzPts val="1100"/>
+              <a:buFont typeface="Arial"/>
+              <a:buChar char="●"/>
+            </a:pPr>
+            <a:r>
+              <a:rPr b="0" i="0" lang="en-US" spc="0" sz="1100" u="none" cap="none" strike="noStrike">
+                <a:solidFill>
+                  <a:srgbClr val="000000"/>
+                </a:solidFill>
+                <a:latin typeface="Arial"/>
+                <a:ea typeface="Arial"/>
+                <a:cs typeface="Arial"/>
+                <a:sym typeface="Arial"/>
+              </a:rPr>
+              <a:t>O alarme, que é o centro do app, foi testado nas quatro combinações de celular bloqueado ou em uso, com o app nos recentes ou fora deles. Com o celular bloqueado, a tela do alarme apareceu por cima da tela de bloqueio. Com o celular em uso, apareceu a notificação com os botões de tomar e pular. Nos testes, percebi que a tela do alarme herdava a permissão de aparecer sobre o bloqueio que era do app inteiro, então isolei essa tela, e ao fechar o alarme o celular volta a ficar bloqueado, sem expor os outros dados. A ressalva veio depois de reiniciar o celular. O alarme só tocou quando o aparelho foi desbloqueado, por uma restrição de inicialização automática que o fabricante aplica e que o Android não deixa contornar. O app passou a orientar o paciente a liberar essa permissão.</a:t>
+            </a:r>
+            <a:endParaRPr/>
           </a:p>
         </p:txBody>
       </p:sp>
@@ -2417,7 +2472,7 @@
   <p:cSld>
     <p:spTree>
       <p:nvGrpSpPr>
-        <p:cNvPr id="402" name="Shape 402"/>
+        <p:cNvPr id="418" name="Shape 418"/>
         <p:cNvGrpSpPr/>
         <p:nvPr/>
       </p:nvGrpSpPr>
@@ -2431,7 +2486,7 @@
       </p:grpSpPr>
       <p:sp>
         <p:nvSpPr>
-          <p:cNvPr id="403" name="Google Shape;403;p15:notes"/>
+          <p:cNvPr id="419" name="Google Shape;419;p14:notes"/>
           <p:cNvSpPr/>
           <p:nvPr>
             <p:ph idx="2" type="sldImg"/>
@@ -2470,7 +2525,7 @@
       </p:sp>
       <p:sp>
         <p:nvSpPr>
-          <p:cNvPr id="404" name="Google Shape;404;p15:notes"/>
+          <p:cNvPr id="420" name="Google Shape;420;p14:notes"/>
           <p:cNvSpPr txBox="1"/>
           <p:nvPr>
             <p:ph idx="1" type="body"/>
@@ -2522,7 +2577,7 @@
                 <a:cs typeface="Arial"/>
                 <a:sym typeface="Arial"/>
               </a:rPr>
-              <a:t>[45 s]</a:t>
+              <a:t>[1 min]</a:t>
             </a:r>
             <a:endParaRPr/>
           </a:p>
@@ -2554,7 +2609,7 @@
                 <a:cs typeface="Arial"/>
                 <a:sym typeface="Arial"/>
               </a:rPr>
-              <a:t>As limitações apontam os próximos passos. Como não testei com usuários, o principal é avaliar o app com os pacientes para quem ele foi pensado, idosos e polimedicados, porque só assim dá para medir o efeito real na adesão. Como testei num só modelo de aparelho, quero validar o alarme em outros fabricantes. Como o app é só para Android, vem a versão para iOS e a publicação nas lojas. Além disso, quero permitir que médicos e cuidadores consultem a conta do paciente, sincronizar as fotos e receitas anexadas, que hoje ficam só no aparelho, e organizar o cuidado por tratamento, como numa terapia oncológica com várias sessões e remédios ao mesmo tempo.</a:t>
+              <a:t>Para fechar, volto à pergunta do começo. O Mapill centraliza num só aplicativo os remédios, o estoque, as consultas e as receitas. É confiável porque o alarme toca mesmo com o aplicativo fechado, e nenhuma operação depende de internet. É seguro porque cada usuário só acessa os próprios dados, e quem não quiser criar conta pode usar tudo assim mesmo. O design foi guiado pelas heurísticas de Nielsen e por critérios de acessibilidade, mas ainda não foi testado com pacientes, e esse é justamente o primeiro passo que vem a seguir. Com isso, os objetivos do trabalho foram atendidos.</a:t>
             </a:r>
             <a:endParaRPr/>
           </a:p>
@@ -2562,7 +2617,7 @@
       </p:sp>
       <p:sp>
         <p:nvSpPr>
-          <p:cNvPr id="405" name="Google Shape;405;p15:notes"/>
+          <p:cNvPr id="421" name="Google Shape;421;p14:notes"/>
           <p:cNvSpPr txBox="1"/>
           <p:nvPr>
             <p:ph idx="12" type="sldNum"/>
@@ -2632,7 +2687,7 @@
   <p:cSld>
     <p:spTree>
       <p:nvGrpSpPr>
-        <p:cNvPr id="429" name="Shape 429"/>
+        <p:cNvPr id="441" name="Shape 441"/>
         <p:cNvGrpSpPr/>
         <p:nvPr/>
       </p:nvGrpSpPr>
@@ -2646,7 +2701,7 @@
       </p:grpSpPr>
       <p:sp>
         <p:nvSpPr>
-          <p:cNvPr id="430" name="Google Shape;430;p16:notes"/>
+          <p:cNvPr id="442" name="Google Shape;442;p15:notes"/>
           <p:cNvSpPr/>
           <p:nvPr>
             <p:ph idx="2" type="sldImg"/>
@@ -2685,7 +2740,7 @@
       </p:sp>
       <p:sp>
         <p:nvSpPr>
-          <p:cNvPr id="431" name="Google Shape;431;p16:notes"/>
+          <p:cNvPr id="443" name="Google Shape;443;p15:notes"/>
           <p:cNvSpPr txBox="1"/>
           <p:nvPr>
             <p:ph idx="1" type="body"/>
@@ -2710,22 +2765,66 @@
           </a:bodyPr>
           <a:lstStyle/>
           <a:p>
-            <a:pPr indent="0" lvl="0" marL="0" rtl="0" algn="l">
-              <a:lnSpc>
-                <a:spcPct val="100000"/>
-              </a:lnSpc>
-              <a:spcBef>
-                <a:spcPts val="0"/>
-              </a:spcBef>
-              <a:spcAft>
-                <a:spcPts val="0"/>
-              </a:spcAft>
+            <a:pPr indent="-298450" lvl="0" marL="457200" marR="0" rtl="0" algn="l">
+              <a:lnSpc>
+                <a:spcPct val="100000"/>
+              </a:lnSpc>
+              <a:spcBef>
+                <a:spcPts val="0"/>
+              </a:spcBef>
+              <a:spcAft>
+                <a:spcPts val="0"/>
+              </a:spcAft>
+              <a:buClr>
+                <a:srgbClr val="000000"/>
+              </a:buClr>
               <a:buSzPts val="1100"/>
-              <a:buNone/>
-            </a:pPr>
-            <a:r>
-              <a:rPr lang="en-US"/>
-              <a:t>[só passar, ou mostrar se a banca pedir]</a:t>
+              <a:buFont typeface="Arial"/>
+              <a:buChar char="●"/>
+            </a:pPr>
+            <a:r>
+              <a:rPr b="0" i="0" lang="en-US" spc="0" sz="1100" u="none" cap="none" strike="noStrike">
+                <a:solidFill>
+                  <a:srgbClr val="000000"/>
+                </a:solidFill>
+                <a:latin typeface="Arial"/>
+                <a:ea typeface="Arial"/>
+                <a:cs typeface="Arial"/>
+                <a:sym typeface="Arial"/>
+              </a:rPr>
+              <a:t>[45 s]</a:t>
+            </a:r>
+            <a:endParaRPr/>
+          </a:p>
+          <a:p>
+            <a:pPr indent="-298450" lvl="0" marL="457200" marR="0" rtl="0" algn="l">
+              <a:lnSpc>
+                <a:spcPct val="100000"/>
+              </a:lnSpc>
+              <a:spcBef>
+                <a:spcPts val="0"/>
+              </a:spcBef>
+              <a:spcAft>
+                <a:spcPts val="0"/>
+              </a:spcAft>
+              <a:buClr>
+                <a:srgbClr val="000000"/>
+              </a:buClr>
+              <a:buSzPts val="1100"/>
+              <a:buFont typeface="Arial"/>
+              <a:buChar char="●"/>
+            </a:pPr>
+            <a:r>
+              <a:rPr b="0" i="0" lang="en-US" spc="0" sz="1100" u="none" cap="none" strike="noStrike">
+                <a:solidFill>
+                  <a:srgbClr val="000000"/>
+                </a:solidFill>
+                <a:latin typeface="Arial"/>
+                <a:ea typeface="Arial"/>
+                <a:cs typeface="Arial"/>
+                <a:sym typeface="Arial"/>
+              </a:rPr>
+              <a:t>As limitações apontam os próximos passos. Como não testei com usuários, o principal é avaliar o app com os pacientes para quem ele foi pensado, idosos e polimedicados, porque só assim dá para medir o efeito real na adesão. Como testei num só modelo de aparelho, quero validar o alarme em outros fabricantes. Como o app é só para Android, vem a versão para iOS e a publicação nas lojas. Além disso, quero permitir que médicos e cuidadores consultem a conta do paciente, sincronizar as fotos e receitas anexadas, que hoje ficam só no aparelho, e organizar o cuidado por tratamento, como numa terapia oncológica com várias sessões e remédios ao mesmo tempo.</a:t>
             </a:r>
             <a:endParaRPr/>
           </a:p>
@@ -2733,7 +2832,7 @@
       </p:sp>
       <p:sp>
         <p:nvSpPr>
-          <p:cNvPr id="432" name="Google Shape;432;p16:notes"/>
+          <p:cNvPr id="444" name="Google Shape;444;p15:notes"/>
           <p:cNvSpPr txBox="1"/>
           <p:nvPr>
             <p:ph idx="12" type="sldNum"/>
@@ -2803,7 +2902,7 @@
   <p:cSld>
     <p:spTree>
       <p:nvGrpSpPr>
-        <p:cNvPr id="439" name="Shape 439"/>
+        <p:cNvPr id="468" name="Shape 468"/>
         <p:cNvGrpSpPr/>
         <p:nvPr/>
       </p:nvGrpSpPr>
@@ -2817,7 +2916,7 @@
       </p:grpSpPr>
       <p:sp>
         <p:nvSpPr>
-          <p:cNvPr id="440" name="Google Shape;440;p17:notes"/>
+          <p:cNvPr id="469" name="Google Shape;469;p16:notes"/>
           <p:cNvSpPr/>
           <p:nvPr>
             <p:ph idx="2" type="sldImg"/>
@@ -2856,7 +2955,7 @@
       </p:sp>
       <p:sp>
         <p:nvSpPr>
-          <p:cNvPr id="441" name="Google Shape;441;p17:notes"/>
+          <p:cNvPr id="470" name="Google Shape;470;p16:notes"/>
           <p:cNvSpPr txBox="1"/>
           <p:nvPr>
             <p:ph idx="1" type="body"/>
@@ -2896,27 +2995,7 @@
             </a:pPr>
             <a:r>
               <a:rPr lang="en-US"/>
-              <a:t>[15 s]</a:t>
-            </a:r>
-            <a:endParaRPr/>
-          </a:p>
-          <a:p>
-            <a:pPr indent="0" lvl="0" marL="0" rtl="0" algn="l">
-              <a:lnSpc>
-                <a:spcPct val="100000"/>
-              </a:lnSpc>
-              <a:spcBef>
-                <a:spcPts val="0"/>
-              </a:spcBef>
-              <a:spcAft>
-                <a:spcPts val="0"/>
-              </a:spcAft>
-              <a:buSzPts val="1100"/>
-              <a:buNone/>
-            </a:pPr>
-            <a:r>
-              <a:rPr lang="en-US"/>
-              <a:t>Encerro por aqui. Quem quiser conhecer o Mapill pode usar o QR code, que leva à página do aplicativo, onde também está o APK para instalar no Android. Obrigado pela atenção, e fico à disposição para as perguntas.</a:t>
+              <a:t>[só passar, ou mostrar se a banca pedir]</a:t>
             </a:r>
             <a:endParaRPr/>
           </a:p>
@@ -2924,7 +3003,7 @@
       </p:sp>
       <p:sp>
         <p:nvSpPr>
-          <p:cNvPr id="442" name="Google Shape;442;p17:notes"/>
+          <p:cNvPr id="471" name="Google Shape;471;p16:notes"/>
           <p:cNvSpPr txBox="1"/>
           <p:nvPr>
             <p:ph idx="12" type="sldNum"/>
@@ -2990,11 +3069,11 @@
 </file>
 
 <file path=ppt/notesSlides/notesSlide18.xml><?xml version="1.0" encoding="utf-8"?>
-<p:notes xmlns:a="http://schemas.openxmlformats.org/drawingml/2006/main" xmlns:p="http://schemas.openxmlformats.org/presentationml/2006/main" xmlns:r="http://schemas.openxmlformats.org/officeDocument/2006/relationships">
+<p:notes xmlns:a="http://schemas.openxmlformats.org/drawingml/2006/main" xmlns:r="http://schemas.openxmlformats.org/officeDocument/2006/relationships" xmlns:mc="http://schemas.openxmlformats.org/markup-compatibility/2006" xmlns:mv="urn:schemas-microsoft-com:mac:vml" xmlns:p="http://schemas.openxmlformats.org/presentationml/2006/main" xmlns:c="http://schemas.openxmlformats.org/drawingml/2006/chart" xmlns:dgm="http://schemas.openxmlformats.org/drawingml/2006/diagram" xmlns:o="urn:schemas-microsoft-com:office:office" xmlns:v="urn:schemas-microsoft-com:vml" xmlns:pvml="urn:schemas-microsoft-com:office:powerpoint" xmlns:com="http://schemas.openxmlformats.org/drawingml/2006/compatibility" xmlns:p14="http://schemas.microsoft.com/office/powerpoint/2010/main" xmlns:p15="http://schemas.microsoft.com/office/powerpoint/2012/main" xmlns:ahyp="http://schemas.microsoft.com/office/drawing/2018/hyperlinkcolor" showMasterPhAnim="0" showMasterSp="0">
   <p:cSld>
     <p:spTree>
       <p:nvGrpSpPr>
-        <p:cNvPr id="1" name=""/>
+        <p:cNvPr id="478" name="Shape 478"/>
         <p:cNvGrpSpPr/>
         <p:nvPr/>
       </p:nvGrpSpPr>
@@ -3008,39 +3087,167 @@
       </p:grpSpPr>
       <p:sp>
         <p:nvSpPr>
-          <p:cNvPr id="2" name="Slide Image Placeholder 1"/>
-          <p:cNvSpPr>
-            <a:spLocks noGrp="1"/>
-          </p:cNvSpPr>
+          <p:cNvPr id="479" name="Google Shape;479;p17:notes"/>
+          <p:cNvSpPr/>
           <p:nvPr>
-            <p:ph type="sldImg" idx="2"/>
+            <p:ph idx="2" type="sldImg"/>
           </p:nvPr>
         </p:nvSpPr>
-        <p:spPr/>
+        <p:spPr>
+          <a:xfrm>
+            <a:off x="0" y="0"/>
+            <a:ext cx="3000000" cy="3000000"/>
+          </a:xfrm>
+          <a:custGeom>
+            <a:rect b="b" l="l" r="r" t="t"/>
+            <a:pathLst>
+              <a:path extrusionOk="0" h="120000" w="120000">
+                <a:moveTo>
+                  <a:pt x="0" y="0"/>
+                </a:moveTo>
+                <a:lnTo>
+                  <a:pt x="120000" y="0"/>
+                </a:lnTo>
+                <a:lnTo>
+                  <a:pt x="120000" y="120000"/>
+                </a:lnTo>
+                <a:lnTo>
+                  <a:pt x="0" y="120000"/>
+                </a:lnTo>
+                <a:close/>
+              </a:path>
+            </a:pathLst>
+          </a:custGeom>
+          <a:noFill/>
+          <a:ln>
+            <a:noFill/>
+          </a:ln>
+        </p:spPr>
       </p:sp>
       <p:sp>
         <p:nvSpPr>
-          <p:cNvPr id="3" name="Notes Placeholder 2"/>
-          <p:cNvSpPr>
-            <a:spLocks noGrp="1"/>
-          </p:cNvSpPr>
+          <p:cNvPr id="480" name="Google Shape;480;p17:notes"/>
+          <p:cNvSpPr txBox="1"/>
           <p:nvPr>
-            <p:ph type="body" idx="1"/>
+            <p:ph idx="1" type="body"/>
           </p:nvPr>
         </p:nvSpPr>
-        <p:spPr/>
+        <p:spPr>
+          <a:xfrm>
+            <a:off x="0" y="0"/>
+            <a:ext cx="3000000" cy="3000000"/>
+          </a:xfrm>
+          <a:prstGeom prst="rect">
+            <a:avLst/>
+          </a:prstGeom>
+          <a:noFill/>
+          <a:ln>
+            <a:noFill/>
+          </a:ln>
+        </p:spPr>
         <p:txBody>
-          <a:bodyPr/>
+          <a:bodyPr anchorCtr="0" anchor="t" bIns="45700" lIns="91425" spcFirstLastPara="1" rIns="91425" wrap="square" tIns="45700">
+            <a:noAutofit/>
+          </a:bodyPr>
           <a:lstStyle/>
           <a:p>
-            <a:r>
-              <a:t>[1 min]</a:t>
-            </a:r>
-          </a:p>
-          <a:p>
-            <a:r>
-              <a:t>O alarme, que é o centro do app, foi testado nas quatro combinações de celular bloqueado ou em uso, com o app nos recentes ou fora deles. Com o celular bloqueado, a tela do alarme apareceu por cima da tela de bloqueio. Com o celular em uso, apareceu a notificação com os botões de tomar e pular. Nos testes, percebi que a tela do alarme herdava a permissão de aparecer sobre o bloqueio que era do app inteiro, então isolei essa tela, e ao fechar o alarme o celular volta a ficar bloqueado, sem expor os outros dados. A ressalva veio depois de reiniciar o celular. O alarme só tocou quando o aparelho foi desbloqueado, por uma restrição de inicialização automática que o fabricante aplica e que o Android não deixa contornar. O app passou a orientar o paciente a liberar essa permissão.</a:t>
-            </a:r>
+            <a:pPr indent="0" lvl="0" marL="0" rtl="0" algn="l">
+              <a:lnSpc>
+                <a:spcPct val="100000"/>
+              </a:lnSpc>
+              <a:spcBef>
+                <a:spcPts val="0"/>
+              </a:spcBef>
+              <a:spcAft>
+                <a:spcPts val="0"/>
+              </a:spcAft>
+              <a:buSzPts val="1100"/>
+              <a:buNone/>
+            </a:pPr>
+            <a:r>
+              <a:rPr lang="en-US"/>
+              <a:t>[15 s]</a:t>
+            </a:r>
+            <a:endParaRPr/>
+          </a:p>
+          <a:p>
+            <a:pPr indent="0" lvl="0" marL="0" rtl="0" algn="l">
+              <a:lnSpc>
+                <a:spcPct val="100000"/>
+              </a:lnSpc>
+              <a:spcBef>
+                <a:spcPts val="0"/>
+              </a:spcBef>
+              <a:spcAft>
+                <a:spcPts val="0"/>
+              </a:spcAft>
+              <a:buSzPts val="1100"/>
+              <a:buNone/>
+            </a:pPr>
+            <a:r>
+              <a:rPr lang="en-US"/>
+              <a:t>Encerro por aqui. Quem quiser conhecer o Mapill pode usar o QR code, que leva à página do aplicativo, onde também está o APK para instalar no Android. Obrigado pela atenção, e fico à disposição para as perguntas.</a:t>
+            </a:r>
+            <a:endParaRPr/>
+          </a:p>
+        </p:txBody>
+      </p:sp>
+      <p:sp>
+        <p:nvSpPr>
+          <p:cNvPr id="481" name="Google Shape;481;p17:notes"/>
+          <p:cNvSpPr txBox="1"/>
+          <p:nvPr>
+            <p:ph idx="12" type="sldNum"/>
+          </p:nvPr>
+        </p:nvSpPr>
+        <p:spPr>
+          <a:xfrm>
+            <a:off x="0" y="0"/>
+            <a:ext cx="3000000" cy="3000000"/>
+          </a:xfrm>
+          <a:prstGeom prst="rect">
+            <a:avLst/>
+          </a:prstGeom>
+          <a:noFill/>
+          <a:ln>
+            <a:noFill/>
+          </a:ln>
+        </p:spPr>
+        <p:txBody>
+          <a:bodyPr anchorCtr="0" anchor="ctr" bIns="91425" lIns="91425" spcFirstLastPara="1" rIns="91425" wrap="square" tIns="91425">
+            <a:noAutofit/>
+          </a:bodyPr>
+          <a:lstStyle/>
+          <a:p>
+            <a:pPr indent="0" lvl="0" marL="0" marR="0" rtl="0" algn="l">
+              <a:lnSpc>
+                <a:spcPct val="100000"/>
+              </a:lnSpc>
+              <a:spcBef>
+                <a:spcPts val="0"/>
+              </a:spcBef>
+              <a:spcAft>
+                <a:spcPts val="0"/>
+              </a:spcAft>
+              <a:buClr>
+                <a:srgbClr val="000000"/>
+              </a:buClr>
+              <a:buSzPts val="1400"/>
+              <a:buFont typeface="Arial"/>
+              <a:buNone/>
+            </a:pPr>
+            <a:r>
+              <a:t/>
+            </a:r>
+            <a:endParaRPr b="0" i="0" spc="0" sz="1400" u="none" cap="none" strike="noStrike">
+              <a:solidFill>
+                <a:srgbClr val="000000"/>
+              </a:solidFill>
+              <a:latin typeface="Arial"/>
+              <a:ea typeface="Arial"/>
+              <a:cs typeface="Arial"/>
+              <a:sym typeface="Arial"/>
+            </a:endParaRPr>
           </a:p>
         </p:txBody>
       </p:sp>
@@ -4496,14 +4703,68 @@
           </a:bodyPr>
           <a:lstStyle/>
           <a:p>
-            <a:r>
+            <a:pPr indent="-298450" lvl="0" marL="457200" marR="0" rtl="0" algn="l">
+              <a:lnSpc>
+                <a:spcPct val="100000"/>
+              </a:lnSpc>
+              <a:spcBef>
+                <a:spcPts val="0"/>
+              </a:spcBef>
+              <a:spcAft>
+                <a:spcPts val="0"/>
+              </a:spcAft>
+              <a:buClr>
+                <a:srgbClr val="000000"/>
+              </a:buClr>
+              <a:buSzPts val="1100"/>
+              <a:buFont typeface="Arial"/>
+              <a:buChar char="●"/>
+            </a:pPr>
+            <a:r>
+              <a:rPr b="0" i="0" lang="en-US" spc="0" sz="1100" u="none" cap="none" strike="noStrike">
+                <a:solidFill>
+                  <a:srgbClr val="000000"/>
+                </a:solidFill>
+                <a:latin typeface="Arial"/>
+                <a:ea typeface="Arial"/>
+                <a:cs typeface="Arial"/>
+                <a:sym typeface="Arial"/>
+              </a:rPr>
               <a:t>[50 s]</a:t>
             </a:r>
-          </a:p>
-          <a:p>
-            <a:r>
+            <a:endParaRPr/>
+          </a:p>
+          <a:p>
+            <a:pPr indent="-298450" lvl="0" marL="457200" marR="0" rtl="0" algn="l">
+              <a:lnSpc>
+                <a:spcPct val="100000"/>
+              </a:lnSpc>
+              <a:spcBef>
+                <a:spcPts val="0"/>
+              </a:spcBef>
+              <a:spcAft>
+                <a:spcPts val="0"/>
+              </a:spcAft>
+              <a:buClr>
+                <a:srgbClr val="000000"/>
+              </a:buClr>
+              <a:buSzPts val="1100"/>
+              <a:buFont typeface="Arial"/>
+              <a:buChar char="●"/>
+            </a:pPr>
+            <a:r>
+              <a:rPr b="0" i="0" lang="en-US" spc="0" sz="1100" u="none" cap="none" strike="noStrike">
+                <a:solidFill>
+                  <a:srgbClr val="000000"/>
+                </a:solidFill>
+                <a:latin typeface="Arial"/>
+                <a:ea typeface="Arial"/>
+                <a:cs typeface="Arial"/>
+                <a:sym typeface="Arial"/>
+              </a:rPr>
               <a:t>Os requisitos partiram dos problemas que o paciente enfrenta. São quarenta e quatro requisitos funcionais, nove não funcionais e vinte regras de negócio, e aqui eles estão organizados pelo problema que resolvem. Para o esquecimento, o alarme toca mesmo com o app fechado, e remédios no mesmo horário geram um aviso só. Para a posologia, o cadastro aceita dez formas farmacêuticas, quatro frequências e uma dose diferente em cada horário. Para o estoque, o app desconta a dose de verdade, e não uma unidade, então quem toma dois comprimidos tem dois descontados, e com isso prevê quando o remédio vai acabar. Consultas e exames aparecem no mesmo calendário das doses, e o app avisa quando a receita está para vencer. E tudo funciona sem internet e sem conta, com o paciente podendo exportar ou apagar os próprios dados.</a:t>
             </a:r>
+            <a:endParaRPr/>
           </a:p>
         </p:txBody>
       </p:sp>
@@ -17694,7 +17955,7 @@
       </p:grpSpPr>
       <p:pic>
         <p:nvPicPr>
-          <p:cNvPr descr="unidavi.png" id="85" name="Google Shape;85;p1"/>
+          <p:cNvPr id="85" name="Google Shape;85;p1" title="image-removebg-preview.png"/>
           <p:cNvPicPr preferRelativeResize="0"/>
           <p:nvPr/>
         </p:nvPicPr>
@@ -17702,13 +17963,13 @@
           <a:blip r:embed="rId3">
             <a:alphaModFix/>
           </a:blip>
-          <a:srcRect b="0" l="0" r="0" t="0"/>
+          <a:srcRect b="8691" l="0" r="0" t="8699"/>
           <a:stretch/>
         </p:blipFill>
         <p:spPr>
           <a:xfrm>
-            <a:off x="685800" y="548640"/>
-            <a:ext cx="686281" cy="566928"/>
+            <a:off x="622300" y="475050"/>
+            <a:ext cx="772350" cy="638025"/>
           </a:xfrm>
           <a:prstGeom prst="rect">
             <a:avLst/>
@@ -17727,8 +17988,8 @@
         </p:nvSpPr>
         <p:spPr>
           <a:xfrm>
-            <a:off x="1463040" y="566928"/>
-            <a:ext cx="5943600" cy="548640"/>
+            <a:off x="1544540" y="600128"/>
+            <a:ext cx="5943600" cy="387900"/>
           </a:xfrm>
           <a:prstGeom prst="rect">
             <a:avLst/>
@@ -17840,8 +18101,8 @@
         </p:blipFill>
         <p:spPr>
           <a:xfrm>
-            <a:off x="685800" y="1874519"/>
-            <a:ext cx="2608649" cy="868680"/>
+            <a:off x="622300" y="1874519"/>
+            <a:ext cx="2608650" cy="868680"/>
           </a:xfrm>
           <a:prstGeom prst="rect">
             <a:avLst/>
@@ -18209,7 +18470,7 @@
     </p:bg>
     <p:spTree>
       <p:nvGrpSpPr>
-        <p:cNvPr id="303" name="Shape 303"/>
+        <p:cNvPr id="315" name="Shape 315"/>
         <p:cNvGrpSpPr/>
         <p:nvPr/>
       </p:nvGrpSpPr>
@@ -18223,7 +18484,7 @@
       </p:grpSpPr>
       <p:sp>
         <p:nvSpPr>
-          <p:cNvPr id="304" name="Google Shape;304;p11"/>
+          <p:cNvPr id="316" name="Google Shape;316;p11"/>
           <p:cNvSpPr txBox="1"/>
           <p:nvPr/>
         </p:nvSpPr>
@@ -18289,7 +18550,7 @@
       </p:sp>
       <p:sp>
         <p:nvSpPr>
-          <p:cNvPr id="305" name="Google Shape;305;p11"/>
+          <p:cNvPr id="317" name="Google Shape;317;p11"/>
           <p:cNvSpPr txBox="1"/>
           <p:nvPr/>
         </p:nvSpPr>
@@ -18339,7 +18600,55 @@
                 <a:cs typeface="Plus Jakarta Sans"/>
                 <a:sym typeface="Plus Jakarta Sans"/>
               </a:rPr>
-              <a:t>Grava primeiro no aparelho, e a nuvem é </a:t>
+              <a:t>Grava primeiro no aparelho</a:t>
+            </a:r>
+            <a:r>
+              <a:rPr b="1" lang="en-US" sz="2800">
+                <a:solidFill>
+                  <a:srgbClr val="191C1E"/>
+                </a:solidFill>
+                <a:latin typeface="Plus Jakarta Sans"/>
+                <a:ea typeface="Plus Jakarta Sans"/>
+                <a:cs typeface="Plus Jakarta Sans"/>
+                <a:sym typeface="Plus Jakarta Sans"/>
+              </a:rPr>
+              <a:t>.</a:t>
+            </a:r>
+            <a:r>
+              <a:rPr b="1" i="0" lang="en-US" spc="0" sz="2800" u="none" cap="none" strike="noStrike">
+                <a:solidFill>
+                  <a:srgbClr val="191C1E"/>
+                </a:solidFill>
+                <a:latin typeface="Plus Jakarta Sans"/>
+                <a:ea typeface="Plus Jakarta Sans"/>
+                <a:cs typeface="Plus Jakarta Sans"/>
+                <a:sym typeface="Plus Jakarta Sans"/>
+              </a:rPr>
+              <a:t> </a:t>
+            </a:r>
+            <a:r>
+              <a:rPr b="1" lang="en-US" sz="2800">
+                <a:solidFill>
+                  <a:srgbClr val="191C1E"/>
+                </a:solidFill>
+                <a:latin typeface="Plus Jakarta Sans"/>
+                <a:ea typeface="Plus Jakarta Sans"/>
+                <a:cs typeface="Plus Jakarta Sans"/>
+                <a:sym typeface="Plus Jakarta Sans"/>
+              </a:rPr>
+              <a:t>A</a:t>
+            </a:r>
+            <a:r>
+              <a:rPr b="1" i="0" lang="en-US" spc="0" sz="2800" u="none" cap="none" strike="noStrike">
+                <a:solidFill>
+                  <a:srgbClr val="191C1E"/>
+                </a:solidFill>
+                <a:latin typeface="Plus Jakarta Sans"/>
+                <a:ea typeface="Plus Jakarta Sans"/>
+                <a:cs typeface="Plus Jakarta Sans"/>
+                <a:sym typeface="Plus Jakarta Sans"/>
+              </a:rPr>
+              <a:t> nuvem é </a:t>
             </a:r>
             <a:r>
               <a:rPr b="1" i="0" lang="en-US" spc="0" sz="2800" u="none" cap="none" strike="noStrike">
@@ -18391,7 +18700,7 @@
       </p:sp>
       <p:sp>
         <p:nvSpPr>
-          <p:cNvPr id="306" name="Google Shape;306;p11"/>
+          <p:cNvPr id="318" name="Google Shape;318;p11"/>
           <p:cNvSpPr txBox="1"/>
           <p:nvPr/>
         </p:nvSpPr>
@@ -18457,7 +18766,7 @@
       </p:sp>
       <p:sp>
         <p:nvSpPr>
-          <p:cNvPr id="307" name="Google Shape;307;p11"/>
+          <p:cNvPr id="319" name="Google Shape;319;p11"/>
           <p:cNvSpPr txBox="1"/>
           <p:nvPr/>
         </p:nvSpPr>
@@ -18523,7 +18832,7 @@
       </p:sp>
       <p:sp>
         <p:nvSpPr>
-          <p:cNvPr id="308" name="Google Shape;308;p11"/>
+          <p:cNvPr id="320" name="Google Shape;320;p11"/>
           <p:cNvSpPr/>
           <p:nvPr/>
         </p:nvSpPr>
@@ -18584,7 +18893,7 @@
       </p:sp>
       <p:pic>
         <p:nvPicPr>
-          <p:cNvPr descr="p55_0.jpeg" id="309" name="Google Shape;309;p11"/>
+          <p:cNvPr descr="p55_0.jpeg" id="321" name="Google Shape;321;p11"/>
           <p:cNvPicPr preferRelativeResize="0"/>
           <p:nvPr/>
         </p:nvPicPr>
@@ -18611,7 +18920,7 @@
       </p:pic>
       <p:sp>
         <p:nvSpPr>
-          <p:cNvPr id="310" name="Google Shape;310;p11"/>
+          <p:cNvPr id="322" name="Google Shape;322;p11"/>
           <p:cNvSpPr txBox="1"/>
           <p:nvPr/>
         </p:nvSpPr>
@@ -18701,7 +19010,7 @@
       </p:sp>
       <p:sp>
         <p:nvSpPr>
-          <p:cNvPr id="311" name="Google Shape;311;p11"/>
+          <p:cNvPr id="323" name="Google Shape;323;p11"/>
           <p:cNvSpPr/>
           <p:nvPr/>
         </p:nvSpPr>
@@ -18762,14 +19071,14 @@
       </p:sp>
       <p:sp>
         <p:nvSpPr>
-          <p:cNvPr id="312" name="Google Shape;312;p11"/>
+          <p:cNvPr id="324" name="Google Shape;324;p11"/>
           <p:cNvSpPr txBox="1"/>
           <p:nvPr/>
         </p:nvSpPr>
         <p:spPr>
           <a:xfrm>
             <a:off x="7818120" y="1783080"/>
-            <a:ext cx="3474720" cy="1234440"/>
+            <a:ext cx="3474600" cy="1234500"/>
           </a:xfrm>
           <a:prstGeom prst="rect">
             <a:avLst/>
@@ -18868,7 +19177,7 @@
       </p:sp>
       <p:sp>
         <p:nvSpPr>
-          <p:cNvPr id="313" name="Google Shape;313;p11"/>
+          <p:cNvPr id="325" name="Google Shape;325;p11"/>
           <p:cNvSpPr/>
           <p:nvPr/>
         </p:nvSpPr>
@@ -18929,14 +19238,14 @@
       </p:sp>
       <p:sp>
         <p:nvSpPr>
-          <p:cNvPr id="314" name="Google Shape;314;p11"/>
+          <p:cNvPr id="326" name="Google Shape;326;p11"/>
           <p:cNvSpPr txBox="1"/>
           <p:nvPr/>
         </p:nvSpPr>
         <p:spPr>
           <a:xfrm>
             <a:off x="7818120" y="3200400"/>
-            <a:ext cx="3474720" cy="1234440"/>
+            <a:ext cx="3474600" cy="1234500"/>
           </a:xfrm>
           <a:prstGeom prst="rect">
             <a:avLst/>
@@ -19035,7 +19344,7 @@
       </p:sp>
       <p:sp>
         <p:nvSpPr>
-          <p:cNvPr id="315" name="Google Shape;315;p11"/>
+          <p:cNvPr id="327" name="Google Shape;327;p11"/>
           <p:cNvSpPr/>
           <p:nvPr/>
         </p:nvSpPr>
@@ -19096,14 +19405,14 @@
       </p:sp>
       <p:sp>
         <p:nvSpPr>
-          <p:cNvPr id="316" name="Google Shape;316;p11"/>
+          <p:cNvPr id="328" name="Google Shape;328;p11"/>
           <p:cNvSpPr txBox="1"/>
           <p:nvPr/>
         </p:nvSpPr>
         <p:spPr>
           <a:xfrm>
-            <a:off x="7818120" y="4617720"/>
-            <a:ext cx="3474720" cy="1234440"/>
+            <a:off x="7818120" y="4871370"/>
+            <a:ext cx="3474600" cy="541800"/>
           </a:xfrm>
           <a:prstGeom prst="rect">
             <a:avLst/>
@@ -19146,7 +19455,7 @@
                 <a:cs typeface="Plus Jakarta Sans"/>
                 <a:sym typeface="Plus Jakarta Sans"/>
               </a:rPr>
-              <a:t>Isolamento por usuário</a:t>
+              <a:t>Isolamento por usuário </a:t>
             </a:r>
             <a:endParaRPr b="0" i="0" spc="0" sz="1400" u="none" cap="none" strike="noStrike">
               <a:solidFill>
@@ -19186,7 +19495,31 @@
                 <a:cs typeface="Plus Jakarta Sans"/>
                 <a:sym typeface="Plus Jakarta Sans"/>
               </a:rPr>
-              <a:t>RLS nas nove tabelas e token JWT</a:t>
+              <a:t>RLS </a:t>
+            </a:r>
+            <a:r>
+              <a:rPr lang="en-US">
+                <a:solidFill>
+                  <a:srgbClr val="545F73"/>
+                </a:solidFill>
+                <a:latin typeface="Plus Jakarta Sans"/>
+                <a:ea typeface="Plus Jakarta Sans"/>
+                <a:cs typeface="Plus Jakarta Sans"/>
+                <a:sym typeface="Plus Jakarta Sans"/>
+              </a:rPr>
+              <a:t>em todas as</a:t>
+            </a:r>
+            <a:r>
+              <a:rPr b="0" i="0" lang="en-US" spc="0" sz="1400" u="none" cap="none" strike="noStrike">
+                <a:solidFill>
+                  <a:srgbClr val="545F73"/>
+                </a:solidFill>
+                <a:latin typeface="Plus Jakarta Sans"/>
+                <a:ea typeface="Plus Jakarta Sans"/>
+                <a:cs typeface="Plus Jakarta Sans"/>
+                <a:sym typeface="Plus Jakarta Sans"/>
+              </a:rPr>
+              <a:t> tabelas e token JWT</a:t>
             </a:r>
             <a:endParaRPr b="0" i="0" spc="0" sz="1400" u="none" cap="none" strike="noStrike">
               <a:solidFill>
@@ -19202,7 +19535,7 @@
       </p:sp>
       <p:sp>
         <p:nvSpPr>
-          <p:cNvPr id="317" name="Google Shape;317;p11"/>
+          <p:cNvPr id="329" name="Google Shape;329;p11"/>
           <p:cNvSpPr txBox="1"/>
           <p:nvPr/>
         </p:nvSpPr>
@@ -19310,7 +19643,7 @@
     </p:bg>
     <p:spTree>
       <p:nvGrpSpPr>
-        <p:cNvPr id="322" name="Shape 322"/>
+        <p:cNvPr id="334" name="Shape 334"/>
         <p:cNvGrpSpPr/>
         <p:nvPr/>
       </p:nvGrpSpPr>
@@ -19324,7 +19657,7 @@
       </p:grpSpPr>
       <p:sp>
         <p:nvSpPr>
-          <p:cNvPr id="323" name="Google Shape;323;p12"/>
+          <p:cNvPr id="335" name="Google Shape;335;p12"/>
           <p:cNvSpPr txBox="1"/>
           <p:nvPr/>
         </p:nvSpPr>
@@ -19390,7 +19723,7 @@
       </p:sp>
       <p:sp>
         <p:nvSpPr>
-          <p:cNvPr id="324" name="Google Shape;324;p12"/>
+          <p:cNvPr id="336" name="Google Shape;336;p12"/>
           <p:cNvSpPr txBox="1"/>
           <p:nvPr/>
         </p:nvSpPr>
@@ -19456,7 +19789,7 @@
       </p:sp>
       <p:sp>
         <p:nvSpPr>
-          <p:cNvPr id="325" name="Google Shape;325;p12"/>
+          <p:cNvPr id="337" name="Google Shape;337;p12"/>
           <p:cNvSpPr txBox="1"/>
           <p:nvPr/>
         </p:nvSpPr>
@@ -19522,7 +19855,7 @@
       </p:sp>
       <p:sp>
         <p:nvSpPr>
-          <p:cNvPr id="326" name="Google Shape;326;p12"/>
+          <p:cNvPr id="338" name="Google Shape;338;p12"/>
           <p:cNvSpPr txBox="1"/>
           <p:nvPr/>
         </p:nvSpPr>
@@ -19588,7 +19921,7 @@
       </p:sp>
       <p:pic>
         <p:nvPicPr>
-          <p:cNvPr descr="p68_2.png" id="327" name="Google Shape;327;p12"/>
+          <p:cNvPr descr="p68_2.png" id="339" name="Google Shape;339;p12"/>
           <p:cNvPicPr preferRelativeResize="0"/>
           <p:nvPr/>
         </p:nvPicPr>
@@ -19617,7 +19950,7 @@
       </p:pic>
       <p:sp>
         <p:nvSpPr>
-          <p:cNvPr id="328" name="Google Shape;328;p12"/>
+          <p:cNvPr id="340" name="Google Shape;340;p12"/>
           <p:cNvSpPr txBox="1"/>
           <p:nvPr/>
         </p:nvSpPr>
@@ -19695,7 +20028,7 @@
       </p:sp>
       <p:pic>
         <p:nvPicPr>
-          <p:cNvPr descr="p71_2.png" id="329" name="Google Shape;329;p12"/>
+          <p:cNvPr descr="p71_2.png" id="341" name="Google Shape;341;p12"/>
           <p:cNvPicPr preferRelativeResize="0"/>
           <p:nvPr/>
         </p:nvPicPr>
@@ -19724,7 +20057,7 @@
       </p:pic>
       <p:sp>
         <p:nvSpPr>
-          <p:cNvPr id="330" name="Google Shape;330;p12"/>
+          <p:cNvPr id="342" name="Google Shape;342;p12"/>
           <p:cNvSpPr txBox="1"/>
           <p:nvPr/>
         </p:nvSpPr>
@@ -19802,7 +20135,7 @@
       </p:sp>
       <p:pic>
         <p:nvPicPr>
-          <p:cNvPr descr="p72_0.png" id="331" name="Google Shape;331;p12"/>
+          <p:cNvPr descr="p72_0.png" id="343" name="Google Shape;343;p12"/>
           <p:cNvPicPr preferRelativeResize="0"/>
           <p:nvPr/>
         </p:nvPicPr>
@@ -19831,7 +20164,7 @@
       </p:pic>
       <p:sp>
         <p:nvSpPr>
-          <p:cNvPr id="332" name="Google Shape;332;p12"/>
+          <p:cNvPr id="344" name="Google Shape;344;p12"/>
           <p:cNvSpPr txBox="1"/>
           <p:nvPr/>
         </p:nvSpPr>
@@ -19909,7 +20242,7 @@
       </p:sp>
       <p:pic>
         <p:nvPicPr>
-          <p:cNvPr descr="p74_0.png" id="333" name="Google Shape;333;p12"/>
+          <p:cNvPr descr="p74_0.png" id="345" name="Google Shape;345;p12"/>
           <p:cNvPicPr preferRelativeResize="0"/>
           <p:nvPr/>
         </p:nvPicPr>
@@ -19938,7 +20271,7 @@
       </p:pic>
       <p:sp>
         <p:nvSpPr>
-          <p:cNvPr id="334" name="Google Shape;334;p12"/>
+          <p:cNvPr id="346" name="Google Shape;346;p12"/>
           <p:cNvSpPr txBox="1"/>
           <p:nvPr/>
         </p:nvSpPr>
@@ -20016,7 +20349,7 @@
       </p:sp>
       <p:pic>
         <p:nvPicPr>
-          <p:cNvPr descr="p75_0.jpeg" id="335" name="Google Shape;335;p12"/>
+          <p:cNvPr descr="p75_0.jpeg" id="347" name="Google Shape;347;p12"/>
           <p:cNvPicPr preferRelativeResize="0"/>
           <p:nvPr/>
         </p:nvPicPr>
@@ -20045,7 +20378,7 @@
       </p:pic>
       <p:sp>
         <p:nvSpPr>
-          <p:cNvPr id="336" name="Google Shape;336;p12"/>
+          <p:cNvPr id="348" name="Google Shape;348;p12"/>
           <p:cNvSpPr txBox="1"/>
           <p:nvPr/>
         </p:nvSpPr>
@@ -20123,7 +20456,7 @@
       </p:sp>
       <p:pic>
         <p:nvPicPr>
-          <p:cNvPr descr="p78_2.png" id="337" name="Google Shape;337;p12"/>
+          <p:cNvPr descr="p78_2.png" id="349" name="Google Shape;349;p12"/>
           <p:cNvPicPr preferRelativeResize="0"/>
           <p:nvPr/>
         </p:nvPicPr>
@@ -20152,7 +20485,7 @@
       </p:pic>
       <p:sp>
         <p:nvSpPr>
-          <p:cNvPr id="338" name="Google Shape;338;p12"/>
+          <p:cNvPr id="350" name="Google Shape;350;p12"/>
           <p:cNvSpPr txBox="1"/>
           <p:nvPr/>
         </p:nvSpPr>
@@ -20230,7 +20563,7 @@
       </p:sp>
       <p:sp>
         <p:nvSpPr>
-          <p:cNvPr id="339" name="Google Shape;339;p12"/>
+          <p:cNvPr id="351" name="Google Shape;351;p12"/>
           <p:cNvSpPr txBox="1"/>
           <p:nvPr/>
         </p:nvSpPr>
@@ -20314,7 +20647,7 @@
     </p:bg>
     <p:spTree>
       <p:nvGrpSpPr>
-        <p:cNvPr id="344" name="Shape 344"/>
+        <p:cNvPr id="356" name="Shape 356"/>
         <p:cNvGrpSpPr/>
         <p:nvPr/>
       </p:nvGrpSpPr>
@@ -20328,7 +20661,7 @@
       </p:grpSpPr>
       <p:sp>
         <p:nvSpPr>
-          <p:cNvPr id="345" name="Google Shape;345;h16db80fa709ec415_0_4"/>
+          <p:cNvPr id="357" name="Google Shape;357;h16db80fa709ec415_0_4"/>
           <p:cNvSpPr txBox="1"/>
           <p:nvPr/>
         </p:nvSpPr>
@@ -20394,7 +20727,7 @@
       </p:sp>
       <p:sp>
         <p:nvSpPr>
-          <p:cNvPr id="346" name="Google Shape;346;h16db80fa709ec415_0_4"/>
+          <p:cNvPr id="358" name="Google Shape;358;h16db80fa709ec415_0_4"/>
           <p:cNvSpPr txBox="1"/>
           <p:nvPr/>
         </p:nvSpPr>
@@ -20460,7 +20793,7 @@
       </p:sp>
       <p:sp>
         <p:nvSpPr>
-          <p:cNvPr id="347" name="Google Shape;347;h16db80fa709ec415_0_4"/>
+          <p:cNvPr id="359" name="Google Shape;359;h16db80fa709ec415_0_4"/>
           <p:cNvSpPr txBox="1"/>
           <p:nvPr/>
         </p:nvSpPr>
@@ -20526,7 +20859,7 @@
       </p:sp>
       <p:sp>
         <p:nvSpPr>
-          <p:cNvPr id="348" name="Google Shape;348;h16db80fa709ec415_0_4"/>
+          <p:cNvPr id="360" name="Google Shape;360;h16db80fa709ec415_0_4"/>
           <p:cNvSpPr txBox="1"/>
           <p:nvPr/>
         </p:nvSpPr>
@@ -20610,7 +20943,7 @@
     </p:bg>
     <p:spTree>
       <p:nvGrpSpPr>
-        <p:cNvPr id="353" name="Shape 353"/>
+        <p:cNvPr id="365" name="Shape 365"/>
         <p:cNvGrpSpPr/>
         <p:nvPr/>
       </p:nvGrpSpPr>
@@ -20624,7 +20957,7 @@
       </p:grpSpPr>
       <p:sp>
         <p:nvSpPr>
-          <p:cNvPr id="354" name="Google Shape;354;p13"/>
+          <p:cNvPr id="366" name="Google Shape;366;p13"/>
           <p:cNvSpPr txBox="1"/>
           <p:nvPr/>
         </p:nvSpPr>
@@ -20690,14 +21023,14 @@
       </p:sp>
       <p:sp>
         <p:nvSpPr>
-          <p:cNvPr id="355" name="Google Shape;355;p13"/>
+          <p:cNvPr id="367" name="Google Shape;367;p13"/>
           <p:cNvSpPr txBox="1"/>
           <p:nvPr/>
         </p:nvSpPr>
         <p:spPr>
           <a:xfrm>
             <a:off x="685800" y="804672"/>
-            <a:ext cx="10820095" cy="822960"/>
+            <a:ext cx="10820100" cy="822900"/>
           </a:xfrm>
           <a:prstGeom prst="rect">
             <a:avLst/>
@@ -20756,7 +21089,7 @@
       </p:sp>
       <p:sp>
         <p:nvSpPr>
-          <p:cNvPr id="356" name="Google Shape;356;p13"/>
+          <p:cNvPr id="368" name="Google Shape;368;p13"/>
           <p:cNvSpPr txBox="1"/>
           <p:nvPr/>
         </p:nvSpPr>
@@ -20822,7 +21155,7 @@
       </p:sp>
       <p:sp>
         <p:nvSpPr>
-          <p:cNvPr id="357" name="Google Shape;357;p13"/>
+          <p:cNvPr id="369" name="Google Shape;369;p13"/>
           <p:cNvSpPr txBox="1"/>
           <p:nvPr/>
         </p:nvSpPr>
@@ -20888,13 +21221,13 @@
       </p:sp>
       <p:sp>
         <p:nvSpPr>
-          <p:cNvPr id="358" name="Google Shape;358;p13"/>
+          <p:cNvPr id="370" name="Google Shape;370;p13"/>
           <p:cNvSpPr/>
           <p:nvPr/>
         </p:nvSpPr>
         <p:spPr>
           <a:xfrm>
-            <a:off x="685800" y="1783080"/>
+            <a:off x="685800" y="1606187"/>
             <a:ext cx="6675000" cy="4160400"/>
           </a:xfrm>
           <a:prstGeom prst="roundRect">
@@ -20949,14 +21282,14 @@
       </p:sp>
       <p:sp>
         <p:nvSpPr>
-          <p:cNvPr id="359" name="Google Shape;359;p13"/>
+          <p:cNvPr id="371" name="Google Shape;371;p13"/>
           <p:cNvSpPr txBox="1"/>
           <p:nvPr/>
         </p:nvSpPr>
         <p:spPr>
           <a:xfrm>
-            <a:off x="1005840" y="1965960"/>
-            <a:ext cx="3931920" cy="548640"/>
+            <a:off x="1005840" y="1789067"/>
+            <a:ext cx="3931800" cy="246300"/>
           </a:xfrm>
           <a:prstGeom prst="rect">
             <a:avLst/>
@@ -21015,14 +21348,14 @@
       </p:sp>
       <p:sp>
         <p:nvSpPr>
-          <p:cNvPr id="360" name="Google Shape;360;p13"/>
+          <p:cNvPr id="372" name="Google Shape;372;p13"/>
           <p:cNvSpPr/>
           <p:nvPr/>
         </p:nvSpPr>
         <p:spPr>
           <a:xfrm>
-            <a:off x="5852160" y="2075688"/>
-            <a:ext cx="1234440" cy="329184"/>
+            <a:off x="5852160" y="1898795"/>
+            <a:ext cx="1234500" cy="329100"/>
           </a:xfrm>
           <a:prstGeom prst="roundRect">
             <a:avLst>
@@ -21076,14 +21409,14 @@
       </p:sp>
       <p:sp>
         <p:nvSpPr>
-          <p:cNvPr id="361" name="Google Shape;361;p13"/>
+          <p:cNvPr id="373" name="Google Shape;373;p13"/>
           <p:cNvSpPr txBox="1"/>
           <p:nvPr/>
         </p:nvSpPr>
         <p:spPr>
           <a:xfrm>
-            <a:off x="5852160" y="2075688"/>
-            <a:ext cx="1234440" cy="329184"/>
+            <a:off x="5852160" y="1898795"/>
+            <a:ext cx="1234500" cy="184800"/>
           </a:xfrm>
           <a:prstGeom prst="rect">
             <a:avLst/>
@@ -21142,14 +21475,14 @@
       </p:sp>
       <p:sp>
         <p:nvSpPr>
-          <p:cNvPr id="362" name="Google Shape;362;p13"/>
+          <p:cNvPr id="374" name="Google Shape;374;p13"/>
           <p:cNvSpPr txBox="1"/>
           <p:nvPr/>
         </p:nvSpPr>
         <p:spPr>
           <a:xfrm>
-            <a:off x="1005840" y="2724912"/>
-            <a:ext cx="3931920" cy="548640"/>
+            <a:off x="1005840" y="2548019"/>
+            <a:ext cx="3931800" cy="246300"/>
           </a:xfrm>
           <a:prstGeom prst="rect">
             <a:avLst/>
@@ -21208,14 +21541,14 @@
       </p:sp>
       <p:sp>
         <p:nvSpPr>
-          <p:cNvPr id="363" name="Google Shape;363;p13"/>
+          <p:cNvPr id="375" name="Google Shape;375;p13"/>
           <p:cNvSpPr/>
           <p:nvPr/>
         </p:nvSpPr>
         <p:spPr>
           <a:xfrm>
-            <a:off x="5852160" y="2834640"/>
-            <a:ext cx="1234440" cy="329184"/>
+            <a:off x="5852160" y="2657747"/>
+            <a:ext cx="1234500" cy="329100"/>
           </a:xfrm>
           <a:prstGeom prst="roundRect">
             <a:avLst>
@@ -21269,13 +21602,13 @@
       </p:sp>
       <p:sp>
         <p:nvSpPr>
-          <p:cNvPr id="364" name="Google Shape;364;p13"/>
+          <p:cNvPr id="376" name="Google Shape;376;p13"/>
           <p:cNvSpPr txBox="1"/>
           <p:nvPr/>
         </p:nvSpPr>
         <p:spPr>
           <a:xfrm>
-            <a:off x="5852135" y="2906840"/>
+            <a:off x="5852135" y="2729947"/>
             <a:ext cx="1234500" cy="184800"/>
           </a:xfrm>
           <a:prstGeom prst="rect">
@@ -21335,14 +21668,14 @@
       </p:sp>
       <p:sp>
         <p:nvSpPr>
-          <p:cNvPr id="365" name="Google Shape;365;p13"/>
+          <p:cNvPr id="377" name="Google Shape;377;p13"/>
           <p:cNvSpPr txBox="1"/>
           <p:nvPr/>
         </p:nvSpPr>
         <p:spPr>
           <a:xfrm>
-            <a:off x="1005840" y="3483863"/>
-            <a:ext cx="3931920" cy="548640"/>
+            <a:off x="1005840" y="3306970"/>
+            <a:ext cx="3931800" cy="246300"/>
           </a:xfrm>
           <a:prstGeom prst="rect">
             <a:avLst/>
@@ -21401,14 +21734,14 @@
       </p:sp>
       <p:sp>
         <p:nvSpPr>
-          <p:cNvPr id="366" name="Google Shape;366;p13"/>
+          <p:cNvPr id="378" name="Google Shape;378;p13"/>
           <p:cNvSpPr txBox="1"/>
           <p:nvPr/>
         </p:nvSpPr>
         <p:spPr>
           <a:xfrm>
-            <a:off x="1005840" y="4242816"/>
-            <a:ext cx="3931920" cy="548640"/>
+            <a:off x="1005840" y="4065923"/>
+            <a:ext cx="3931800" cy="246300"/>
           </a:xfrm>
           <a:prstGeom prst="rect">
             <a:avLst/>
@@ -21467,14 +21800,14 @@
       </p:sp>
       <p:sp>
         <p:nvSpPr>
-          <p:cNvPr id="367" name="Google Shape;367;p13"/>
+          <p:cNvPr id="379" name="Google Shape;379;p13"/>
           <p:cNvSpPr txBox="1"/>
           <p:nvPr/>
         </p:nvSpPr>
         <p:spPr>
           <a:xfrm>
-            <a:off x="1005840" y="5001768"/>
-            <a:ext cx="3931920" cy="548640"/>
+            <a:off x="1005840" y="4824875"/>
+            <a:ext cx="3931800" cy="246300"/>
           </a:xfrm>
           <a:prstGeom prst="rect">
             <a:avLst/>
@@ -21533,7 +21866,7 @@
       </p:sp>
       <p:sp>
         <p:nvSpPr>
-          <p:cNvPr id="368" name="Google Shape;368;p13"/>
+          <p:cNvPr id="380" name="Google Shape;380;p13"/>
           <p:cNvSpPr txBox="1"/>
           <p:nvPr/>
         </p:nvSpPr>
@@ -21599,22 +21932,22 @@
       </p:sp>
       <p:sp>
         <p:nvSpPr>
-          <p:cNvPr id="369" name="Google Shape;369;p13"/>
+          <p:cNvPr id="381" name="Google Shape;381;p13"/>
           <p:cNvSpPr/>
           <p:nvPr/>
         </p:nvSpPr>
         <p:spPr>
           <a:xfrm>
-            <a:off x="7680960" y="1783080"/>
-            <a:ext cx="3822191" cy="4160400"/>
+            <a:off x="5852110" y="4156897"/>
+            <a:ext cx="1234500" cy="329100"/>
           </a:xfrm>
           <a:prstGeom prst="roundRect">
             <a:avLst>
-              <a:gd fmla="val 6666" name="adj"/>
+              <a:gd fmla="val 50000" name="adj"/>
             </a:avLst>
           </a:prstGeom>
           <a:solidFill>
-            <a:srgbClr val="FFFFFF"/>
+            <a:srgbClr val="E3F6EA"/>
           </a:solidFill>
           <a:ln>
             <a:noFill/>
@@ -21660,559 +21993,13 @@
       </p:sp>
       <p:sp>
         <p:nvSpPr>
-          <p:cNvPr id="370" name="Google Shape;370;p13"/>
-          <p:cNvSpPr txBox="1"/>
-          <p:nvPr/>
-        </p:nvSpPr>
-        <p:spPr>
-          <a:xfrm>
-            <a:off x="7946100" y="1965960"/>
-            <a:ext cx="3291900" cy="3794760"/>
-          </a:xfrm>
-          <a:prstGeom prst="rect">
-            <a:avLst/>
-          </a:prstGeom>
-          <a:noFill/>
-          <a:ln>
-            <a:noFill/>
-          </a:ln>
-        </p:spPr>
-        <p:txBody>
-          <a:bodyPr anchorCtr="0" anchor="ctr" bIns="0" lIns="0" spcFirstLastPara="1" rIns="0" wrap="square" tIns="0">
-            <a:spAutoFit/>
-          </a:bodyPr>
-          <a:lstStyle/>
-          <a:p>
-            <a:pPr indent="0" lvl="0" marL="0" marR="0" rtl="0" algn="l">
-              <a:lnSpc>
-                <a:spcPct val="110000"/>
-              </a:lnSpc>
-              <a:spcBef>
-                <a:spcPts val="0"/>
-              </a:spcBef>
-              <a:spcAft>
-                <a:spcPts val="0"/>
-              </a:spcAft>
-              <a:buClr>
-                <a:srgbClr val="000000"/>
-              </a:buClr>
-              <a:buSzPts val="1100"/>
-              <a:buFont typeface="Arial"/>
-              <a:buNone/>
-            </a:pPr>
-            <a:r>
-              <a:rPr b="1" i="0" lang="en-US" spc="200" sz="1100" u="none" cap="none" strike="noStrike">
-                <a:solidFill>
-                  <a:srgbClr val="11803E"/>
-                </a:solidFill>
-                <a:latin typeface="Plus Jakarta Sans"/>
-                <a:ea typeface="Plus Jakarta Sans"/>
-                <a:cs typeface="Plus Jakarta Sans"/>
-                <a:sym typeface="Plus Jakarta Sans"/>
-              </a:rPr>
-              <a:t>O QUE OS TESTES CORRIGIRAM</a:t>
-            </a:r>
-            <a:endParaRPr b="1" i="0" spc="200" sz="1100" u="none" cap="none" strike="noStrike">
-              <a:solidFill>
-                <a:srgbClr val="11803E"/>
-              </a:solidFill>
-              <a:latin typeface="Plus Jakarta Sans"/>
-              <a:ea typeface="Plus Jakarta Sans"/>
-              <a:cs typeface="Plus Jakarta Sans"/>
-              <a:sym typeface="Plus Jakarta Sans"/>
-            </a:endParaRPr>
-          </a:p>
-          <a:p>
-            <a:pPr indent="0" lvl="0" marL="0" marR="0" rtl="0" algn="l">
-              <a:lnSpc>
-                <a:spcPct val="110000"/>
-              </a:lnSpc>
-              <a:spcBef>
-                <a:spcPts val="0"/>
-              </a:spcBef>
-              <a:spcAft>
-                <a:spcPts val="0"/>
-              </a:spcAft>
-              <a:buClr>
-                <a:srgbClr val="000000"/>
-              </a:buClr>
-              <a:buSzPts val="1100"/>
-              <a:buFont typeface="Arial"/>
-              <a:buNone/>
-            </a:pPr>
-            <a:r>
-              <a:rPr b="1" i="0" lang="en-US" spc="200" sz="800" u="none" cap="none" strike="noStrike">
-                <a:solidFill>
-                  <a:srgbClr val="11803E"/>
-                </a:solidFill>
-                <a:latin typeface="Plus Jakarta Sans"/>
-                <a:ea typeface="Plus Jakarta Sans"/>
-                <a:cs typeface="Plus Jakarta Sans"/>
-                <a:sym typeface="Plus Jakarta Sans"/>
-              </a:rPr>
-              <a:t/>
-            </a:r>
-            <a:endParaRPr b="1" i="0" spc="200" sz="1100" u="none" cap="none" strike="noStrike">
-              <a:solidFill>
-                <a:srgbClr val="11803E"/>
-              </a:solidFill>
-              <a:latin typeface="Plus Jakarta Sans"/>
-              <a:ea typeface="Plus Jakarta Sans"/>
-              <a:cs typeface="Plus Jakarta Sans"/>
-              <a:sym typeface="Plus Jakarta Sans"/>
-            </a:endParaRPr>
-          </a:p>
-          <a:p>
-            <a:pPr indent="0" lvl="0" marL="0" marR="0" rtl="0" algn="l">
-              <a:lnSpc>
-                <a:spcPct val="110000"/>
-              </a:lnSpc>
-              <a:spcBef>
-                <a:spcPts val="0"/>
-              </a:spcBef>
-              <a:spcAft>
-                <a:spcPts val="0"/>
-              </a:spcAft>
-              <a:buClr>
-                <a:srgbClr val="000000"/>
-              </a:buClr>
-              <a:buSzPts val="1100"/>
-              <a:buFont typeface="Arial"/>
-              <a:buNone/>
-            </a:pPr>
-            <a:r>
-              <a:rPr b="1" i="0" lang="en-US" spc="0" sz="1400" u="none" cap="none" strike="noStrike">
-                <a:solidFill>
-                  <a:srgbClr val="191C1E"/>
-                </a:solidFill>
-                <a:latin typeface="Plus Jakarta Sans"/>
-                <a:ea typeface="Plus Jakarta Sans"/>
-                <a:cs typeface="Plus Jakarta Sans"/>
-                <a:sym typeface="Plus Jakarta Sans"/>
-              </a:rPr>
-              <a:t>Restauração pedia os termos de novo</a:t>
-            </a:r>
-            <a:endParaRPr b="1" i="0" spc="200" sz="1100" u="none" cap="none" strike="noStrike">
-              <a:solidFill>
-                <a:srgbClr val="11803E"/>
-              </a:solidFill>
-              <a:latin typeface="Plus Jakarta Sans"/>
-              <a:ea typeface="Plus Jakarta Sans"/>
-              <a:cs typeface="Plus Jakarta Sans"/>
-              <a:sym typeface="Plus Jakarta Sans"/>
-            </a:endParaRPr>
-          </a:p>
-          <a:p>
-            <a:pPr indent="0" lvl="0" marL="0" marR="0" rtl="0" algn="l">
-              <a:lnSpc>
-                <a:spcPct val="110000"/>
-              </a:lnSpc>
-              <a:spcBef>
-                <a:spcPts val="0"/>
-              </a:spcBef>
-              <a:spcAft>
-                <a:spcPts val="0"/>
-              </a:spcAft>
-              <a:buClr>
-                <a:srgbClr val="000000"/>
-              </a:buClr>
-              <a:buSzPts val="1100"/>
-              <a:buFont typeface="Arial"/>
-              <a:buNone/>
-            </a:pPr>
-            <a:r>
-              <a:rPr b="0" i="0" lang="en-US" spc="0" sz="1300" u="none" cap="none" strike="noStrike">
-                <a:solidFill>
-                  <a:srgbClr val="545F73"/>
-                </a:solidFill>
-                <a:latin typeface="Plus Jakarta Sans"/>
-                <a:ea typeface="Plus Jakarta Sans"/>
-                <a:cs typeface="Plus Jakarta Sans"/>
-                <a:sym typeface="Plus Jakarta Sans"/>
-              </a:rPr>
-              <a:t>agora espera os dados da nuvem</a:t>
-            </a:r>
-            <a:endParaRPr b="1" i="0" spc="200" sz="1100" u="none" cap="none" strike="noStrike">
-              <a:solidFill>
-                <a:srgbClr val="11803E"/>
-              </a:solidFill>
-              <a:latin typeface="Plus Jakarta Sans"/>
-              <a:ea typeface="Plus Jakarta Sans"/>
-              <a:cs typeface="Plus Jakarta Sans"/>
-              <a:sym typeface="Plus Jakarta Sans"/>
-            </a:endParaRPr>
-          </a:p>
-          <a:p>
-            <a:pPr indent="0" lvl="0" marL="0" marR="0" rtl="0" algn="l">
-              <a:lnSpc>
-                <a:spcPct val="110000"/>
-              </a:lnSpc>
-              <a:spcBef>
-                <a:spcPts val="0"/>
-              </a:spcBef>
-              <a:spcAft>
-                <a:spcPts val="0"/>
-              </a:spcAft>
-              <a:buClr>
-                <a:srgbClr val="000000"/>
-              </a:buClr>
-              <a:buSzPts val="1100"/>
-              <a:buFont typeface="Arial"/>
-              <a:buNone/>
-            </a:pPr>
-            <a:r>
-              <a:rPr b="1" i="0" lang="en-US" spc="200" sz="800" u="none" cap="none" strike="noStrike">
-                <a:solidFill>
-                  <a:srgbClr val="11803E"/>
-                </a:solidFill>
-                <a:latin typeface="Plus Jakarta Sans"/>
-                <a:ea typeface="Plus Jakarta Sans"/>
-                <a:cs typeface="Plus Jakarta Sans"/>
-                <a:sym typeface="Plus Jakarta Sans"/>
-              </a:rPr>
-              <a:t/>
-            </a:r>
-            <a:endParaRPr b="1" i="0" spc="200" sz="1100" u="none" cap="none" strike="noStrike">
-              <a:solidFill>
-                <a:srgbClr val="11803E"/>
-              </a:solidFill>
-              <a:latin typeface="Plus Jakarta Sans"/>
-              <a:ea typeface="Plus Jakarta Sans"/>
-              <a:cs typeface="Plus Jakarta Sans"/>
-              <a:sym typeface="Plus Jakarta Sans"/>
-            </a:endParaRPr>
-          </a:p>
-          <a:p>
-            <a:pPr indent="0" lvl="0" marL="0" marR="0" rtl="0" algn="l">
-              <a:lnSpc>
-                <a:spcPct val="110000"/>
-              </a:lnSpc>
-              <a:spcBef>
-                <a:spcPts val="0"/>
-              </a:spcBef>
-              <a:spcAft>
-                <a:spcPts val="0"/>
-              </a:spcAft>
-              <a:buClr>
-                <a:srgbClr val="000000"/>
-              </a:buClr>
-              <a:buSzPts val="1100"/>
-              <a:buFont typeface="Arial"/>
-              <a:buNone/>
-            </a:pPr>
-            <a:r>
-              <a:rPr b="1" i="0" lang="en-US" spc="0" sz="1400" u="none" cap="none" strike="noStrike">
-                <a:solidFill>
-                  <a:srgbClr val="191C1E"/>
-                </a:solidFill>
-                <a:latin typeface="Plus Jakarta Sans"/>
-                <a:ea typeface="Plus Jakarta Sans"/>
-                <a:cs typeface="Plus Jakarta Sans"/>
-                <a:sym typeface="Plus Jakarta Sans"/>
-              </a:rPr>
-              <a:t>Doses excluídas reapareciam</a:t>
-            </a:r>
-            <a:endParaRPr b="1" i="0" spc="200" sz="1100" u="none" cap="none" strike="noStrike">
-              <a:solidFill>
-                <a:srgbClr val="11803E"/>
-              </a:solidFill>
-              <a:latin typeface="Plus Jakarta Sans"/>
-              <a:ea typeface="Plus Jakarta Sans"/>
-              <a:cs typeface="Plus Jakarta Sans"/>
-              <a:sym typeface="Plus Jakarta Sans"/>
-            </a:endParaRPr>
-          </a:p>
-          <a:p>
-            <a:pPr indent="0" lvl="0" marL="0" marR="0" rtl="0" algn="l">
-              <a:lnSpc>
-                <a:spcPct val="110000"/>
-              </a:lnSpc>
-              <a:spcBef>
-                <a:spcPts val="0"/>
-              </a:spcBef>
-              <a:spcAft>
-                <a:spcPts val="0"/>
-              </a:spcAft>
-              <a:buClr>
-                <a:srgbClr val="000000"/>
-              </a:buClr>
-              <a:buSzPts val="1100"/>
-              <a:buFont typeface="Arial"/>
-              <a:buNone/>
-            </a:pPr>
-            <a:r>
-              <a:rPr b="0" i="0" lang="en-US" spc="0" sz="1300" u="none" cap="none" strike="noStrike">
-                <a:solidFill>
-                  <a:srgbClr val="545F73"/>
-                </a:solidFill>
-                <a:latin typeface="Plus Jakarta Sans"/>
-                <a:ea typeface="Plus Jakarta Sans"/>
-                <a:cs typeface="Plus Jakarta Sans"/>
-                <a:sym typeface="Plus Jakarta Sans"/>
-              </a:rPr>
-              <a:t>a exclusão passou a ser lógica</a:t>
-            </a:r>
-            <a:endParaRPr b="1" i="0" spc="200" sz="1100" u="none" cap="none" strike="noStrike">
-              <a:solidFill>
-                <a:srgbClr val="11803E"/>
-              </a:solidFill>
-              <a:latin typeface="Plus Jakarta Sans"/>
-              <a:ea typeface="Plus Jakarta Sans"/>
-              <a:cs typeface="Plus Jakarta Sans"/>
-              <a:sym typeface="Plus Jakarta Sans"/>
-            </a:endParaRPr>
-          </a:p>
-          <a:p>
-            <a:pPr indent="0" lvl="0" marL="0" marR="0" rtl="0" algn="l">
-              <a:lnSpc>
-                <a:spcPct val="110000"/>
-              </a:lnSpc>
-              <a:spcBef>
-                <a:spcPts val="0"/>
-              </a:spcBef>
-              <a:spcAft>
-                <a:spcPts val="0"/>
-              </a:spcAft>
-              <a:buClr>
-                <a:srgbClr val="000000"/>
-              </a:buClr>
-              <a:buSzPts val="1100"/>
-              <a:buFont typeface="Arial"/>
-              <a:buNone/>
-            </a:pPr>
-            <a:r>
-              <a:rPr b="1" i="0" lang="en-US" spc="200" sz="800" u="none" cap="none" strike="noStrike">
-                <a:solidFill>
-                  <a:srgbClr val="11803E"/>
-                </a:solidFill>
-                <a:latin typeface="Plus Jakarta Sans"/>
-                <a:ea typeface="Plus Jakarta Sans"/>
-                <a:cs typeface="Plus Jakarta Sans"/>
-                <a:sym typeface="Plus Jakarta Sans"/>
-              </a:rPr>
-              <a:t/>
-            </a:r>
-            <a:endParaRPr b="1" i="0" spc="200" sz="1100" u="none" cap="none" strike="noStrike">
-              <a:solidFill>
-                <a:srgbClr val="11803E"/>
-              </a:solidFill>
-              <a:latin typeface="Plus Jakarta Sans"/>
-              <a:ea typeface="Plus Jakarta Sans"/>
-              <a:cs typeface="Plus Jakarta Sans"/>
-              <a:sym typeface="Plus Jakarta Sans"/>
-            </a:endParaRPr>
-          </a:p>
-          <a:p>
-            <a:pPr indent="0" lvl="0" marL="0" marR="0" rtl="0" algn="l">
-              <a:lnSpc>
-                <a:spcPct val="110000"/>
-              </a:lnSpc>
-              <a:spcBef>
-                <a:spcPts val="0"/>
-              </a:spcBef>
-              <a:spcAft>
-                <a:spcPts val="0"/>
-              </a:spcAft>
-              <a:buClr>
-                <a:srgbClr val="000000"/>
-              </a:buClr>
-              <a:buSzPts val="1100"/>
-              <a:buFont typeface="Arial"/>
-              <a:buNone/>
-            </a:pPr>
-            <a:r>
-              <a:rPr b="1" i="0" lang="en-US" spc="0" sz="1400" u="none" cap="none" strike="noStrike">
-                <a:solidFill>
-                  <a:srgbClr val="191C1E"/>
-                </a:solidFill>
-                <a:latin typeface="Plus Jakarta Sans"/>
-                <a:ea typeface="Plus Jakarta Sans"/>
-                <a:cs typeface="Plus Jakarta Sans"/>
-                <a:sym typeface="Plus Jakarta Sans"/>
-              </a:rPr>
-              <a:t>Vencia a última sincronizada</a:t>
-            </a:r>
-            <a:endParaRPr b="1" i="0" spc="200" sz="1100" u="none" cap="none" strike="noStrike">
-              <a:solidFill>
-                <a:srgbClr val="11803E"/>
-              </a:solidFill>
-              <a:latin typeface="Plus Jakarta Sans"/>
-              <a:ea typeface="Plus Jakarta Sans"/>
-              <a:cs typeface="Plus Jakarta Sans"/>
-              <a:sym typeface="Plus Jakarta Sans"/>
-            </a:endParaRPr>
-          </a:p>
-          <a:p>
-            <a:pPr indent="0" lvl="0" marL="0" marR="0" rtl="0" algn="l">
-              <a:lnSpc>
-                <a:spcPct val="110000"/>
-              </a:lnSpc>
-              <a:spcBef>
-                <a:spcPts val="0"/>
-              </a:spcBef>
-              <a:spcAft>
-                <a:spcPts val="0"/>
-              </a:spcAft>
-              <a:buClr>
-                <a:srgbClr val="000000"/>
-              </a:buClr>
-              <a:buSzPts val="1100"/>
-              <a:buFont typeface="Arial"/>
-              <a:buNone/>
-            </a:pPr>
-            <a:r>
-              <a:rPr b="0" i="0" lang="en-US" spc="0" sz="1300" u="none" cap="none" strike="noStrike">
-                <a:solidFill>
-                  <a:srgbClr val="545F73"/>
-                </a:solidFill>
-                <a:latin typeface="Plus Jakarta Sans"/>
-                <a:ea typeface="Plus Jakarta Sans"/>
-                <a:cs typeface="Plus Jakarta Sans"/>
-                <a:sym typeface="Plus Jakarta Sans"/>
-              </a:rPr>
-              <a:t>o servidor passou a aplicar o LWW</a:t>
-            </a:r>
-            <a:endParaRPr b="1" i="0" spc="200" sz="1100" u="none" cap="none" strike="noStrike">
-              <a:solidFill>
-                <a:srgbClr val="11803E"/>
-              </a:solidFill>
-              <a:latin typeface="Plus Jakarta Sans"/>
-              <a:ea typeface="Plus Jakarta Sans"/>
-              <a:cs typeface="Plus Jakarta Sans"/>
-              <a:sym typeface="Plus Jakarta Sans"/>
-            </a:endParaRPr>
-          </a:p>
-          <a:p>
-            <a:pPr indent="0" lvl="0" marL="0" marR="0" rtl="0" algn="l">
-              <a:lnSpc>
-                <a:spcPct val="110000"/>
-              </a:lnSpc>
-              <a:spcBef>
-                <a:spcPts val="0"/>
-              </a:spcBef>
-              <a:spcAft>
-                <a:spcPts val="0"/>
-              </a:spcAft>
-              <a:buClr>
-                <a:srgbClr val="000000"/>
-              </a:buClr>
-              <a:buSzPts val="1100"/>
-              <a:buFont typeface="Arial"/>
-              <a:buNone/>
-            </a:pPr>
-            <a:r>
-              <a:rPr b="1" i="0" lang="en-US" spc="200" sz="800" u="none" cap="none" strike="noStrike">
-                <a:solidFill>
-                  <a:srgbClr val="11803E"/>
-                </a:solidFill>
-                <a:latin typeface="Plus Jakarta Sans"/>
-                <a:ea typeface="Plus Jakarta Sans"/>
-                <a:cs typeface="Plus Jakarta Sans"/>
-                <a:sym typeface="Plus Jakarta Sans"/>
-              </a:rPr>
-              <a:t/>
-            </a:r>
-            <a:endParaRPr b="1" i="0" spc="200" sz="1100" u="none" cap="none" strike="noStrike">
-              <a:solidFill>
-                <a:srgbClr val="11803E"/>
-              </a:solidFill>
-              <a:latin typeface="Plus Jakarta Sans"/>
-              <a:ea typeface="Plus Jakarta Sans"/>
-              <a:cs typeface="Plus Jakarta Sans"/>
-              <a:sym typeface="Plus Jakarta Sans"/>
-            </a:endParaRPr>
-          </a:p>
-          <a:p>
-            <a:pPr indent="0" lvl="0" marL="0" marR="0" rtl="0" algn="l">
-              <a:lnSpc>
-                <a:spcPct val="110000"/>
-              </a:lnSpc>
-              <a:spcBef>
-                <a:spcPts val="0"/>
-              </a:spcBef>
-              <a:spcAft>
-                <a:spcPts val="0"/>
-              </a:spcAft>
-              <a:buClr>
-                <a:srgbClr val="000000"/>
-              </a:buClr>
-              <a:buSzPts val="1100"/>
-              <a:buFont typeface="Arial"/>
-              <a:buNone/>
-            </a:pPr>
-            <a:r>
-              <a:rPr b="1" i="0" lang="en-US" spc="0" sz="1400" u="none" cap="none" strike="noStrike">
-                <a:solidFill>
-                  <a:srgbClr val="191C1E"/>
-                </a:solidFill>
-                <a:latin typeface="Plus Jakarta Sans"/>
-                <a:ea typeface="Plus Jakarta Sans"/>
-                <a:cs typeface="Plus Jakarta Sans"/>
-                <a:sym typeface="Plus Jakarta Sans"/>
-              </a:rPr>
-              <a:t>Edição offline não chegava ao outro aparelho</a:t>
-            </a:r>
-            <a:endParaRPr b="1" i="0" spc="200" sz="1100" u="none" cap="none" strike="noStrike">
-              <a:solidFill>
-                <a:srgbClr val="11803E"/>
-              </a:solidFill>
-              <a:latin typeface="Plus Jakarta Sans"/>
-              <a:ea typeface="Plus Jakarta Sans"/>
-              <a:cs typeface="Plus Jakarta Sans"/>
-              <a:sym typeface="Plus Jakarta Sans"/>
-            </a:endParaRPr>
-          </a:p>
-          <a:p>
-            <a:pPr indent="0" lvl="0" marL="0" marR="0" rtl="0" algn="l">
-              <a:lnSpc>
-                <a:spcPct val="110000"/>
-              </a:lnSpc>
-              <a:spcBef>
-                <a:spcPts val="0"/>
-              </a:spcBef>
-              <a:spcAft>
-                <a:spcPts val="0"/>
-              </a:spcAft>
-              <a:buClr>
-                <a:srgbClr val="000000"/>
-              </a:buClr>
-              <a:buSzPts val="1100"/>
-              <a:buFont typeface="Arial"/>
-              <a:buNone/>
-            </a:pPr>
-            <a:r>
-              <a:rPr b="0" i="0" lang="en-US" spc="0" sz="1300" u="none" cap="none" strike="noStrike">
-                <a:solidFill>
-                  <a:srgbClr val="545F73"/>
-                </a:solidFill>
-                <a:latin typeface="Plus Jakarta Sans"/>
-                <a:ea typeface="Plus Jakarta Sans"/>
-                <a:cs typeface="Plus Jakarta Sans"/>
-                <a:sym typeface="Plus Jakarta Sans"/>
-              </a:rPr>
-              <a:t>o recebimento usa a chegada à nuvem</a:t>
-            </a:r>
-            <a:endParaRPr b="1" i="0" spc="200" sz="1100" u="none" cap="none" strike="noStrike">
-              <a:solidFill>
-                <a:srgbClr val="11803E"/>
-              </a:solidFill>
-              <a:latin typeface="Plus Jakarta Sans"/>
-              <a:ea typeface="Plus Jakarta Sans"/>
-              <a:cs typeface="Plus Jakarta Sans"/>
-              <a:sym typeface="Plus Jakarta Sans"/>
-            </a:endParaRPr>
-          </a:p>
-        </p:txBody>
-      </p:sp>
-      <p:sp>
-        <p:nvSpPr>
-          <p:cNvPr id="373" name="Google Shape;373;p13"/>
+          <p:cNvPr id="382" name="Google Shape;382;p13"/>
           <p:cNvSpPr/>
           <p:nvPr/>
         </p:nvSpPr>
         <p:spPr>
           <a:xfrm>
-            <a:off x="5852110" y="4333790"/>
+            <a:off x="5852110" y="4942522"/>
             <a:ext cx="1234500" cy="329100"/>
           </a:xfrm>
           <a:prstGeom prst="roundRect">
@@ -22267,13 +22054,79 @@
       </p:sp>
       <p:sp>
         <p:nvSpPr>
-          <p:cNvPr id="374" name="Google Shape;374;p13"/>
+          <p:cNvPr id="383" name="Google Shape;383;p13"/>
+          <p:cNvSpPr txBox="1"/>
+          <p:nvPr/>
+        </p:nvSpPr>
+        <p:spPr>
+          <a:xfrm>
+            <a:off x="5852110" y="4229060"/>
+            <a:ext cx="1234500" cy="184800"/>
+          </a:xfrm>
+          <a:prstGeom prst="rect">
+            <a:avLst/>
+          </a:prstGeom>
+          <a:noFill/>
+          <a:ln>
+            <a:noFill/>
+          </a:ln>
+        </p:spPr>
+        <p:txBody>
+          <a:bodyPr anchorCtr="0" anchor="ctr" bIns="0" lIns="0" spcFirstLastPara="1" rIns="0" wrap="square" tIns="0">
+            <a:spAutoFit/>
+          </a:bodyPr>
+          <a:lstStyle/>
+          <a:p>
+            <a:pPr indent="0" lvl="0" marL="0" marR="0" rtl="0" algn="ctr">
+              <a:lnSpc>
+                <a:spcPct val="110000"/>
+              </a:lnSpc>
+              <a:spcBef>
+                <a:spcPts val="0"/>
+              </a:spcBef>
+              <a:spcAft>
+                <a:spcPts val="0"/>
+              </a:spcAft>
+              <a:buClr>
+                <a:srgbClr val="000000"/>
+              </a:buClr>
+              <a:buSzPts val="1200"/>
+              <a:buFont typeface="Arial"/>
+              <a:buNone/>
+            </a:pPr>
+            <a:r>
+              <a:rPr b="1" i="0" lang="en-US" spc="0" sz="1200" u="none" cap="none" strike="noStrike">
+                <a:solidFill>
+                  <a:srgbClr val="11803E"/>
+                </a:solidFill>
+                <a:latin typeface="Plus Jakarta Sans"/>
+                <a:ea typeface="Plus Jakarta Sans"/>
+                <a:cs typeface="Plus Jakarta Sans"/>
+                <a:sym typeface="Plus Jakarta Sans"/>
+              </a:rPr>
+              <a:t>Aprovado</a:t>
+            </a:r>
+            <a:endParaRPr b="0" i="0" spc="0" sz="1400" u="none" cap="none" strike="noStrike">
+              <a:solidFill>
+                <a:srgbClr val="000000"/>
+              </a:solidFill>
+              <a:latin typeface="Arial"/>
+              <a:ea typeface="Arial"/>
+              <a:cs typeface="Arial"/>
+              <a:sym typeface="Arial"/>
+            </a:endParaRPr>
+          </a:p>
+        </p:txBody>
+      </p:sp>
+      <p:sp>
+        <p:nvSpPr>
+          <p:cNvPr id="384" name="Google Shape;384;p13"/>
           <p:cNvSpPr/>
           <p:nvPr/>
         </p:nvSpPr>
         <p:spPr>
           <a:xfrm>
-            <a:off x="5852110" y="5119415"/>
+            <a:off x="5852135" y="3407360"/>
             <a:ext cx="1234500" cy="329100"/>
           </a:xfrm>
           <a:prstGeom prst="roundRect">
@@ -22328,13 +22181,13 @@
       </p:sp>
       <p:sp>
         <p:nvSpPr>
-          <p:cNvPr id="375" name="Google Shape;375;p13"/>
+          <p:cNvPr id="385" name="Google Shape;385;p13"/>
           <p:cNvSpPr txBox="1"/>
           <p:nvPr/>
         </p:nvSpPr>
         <p:spPr>
           <a:xfrm>
-            <a:off x="5852110" y="4405953"/>
+            <a:off x="5852135" y="3479522"/>
             <a:ext cx="1234500" cy="184800"/>
           </a:xfrm>
           <a:prstGeom prst="rect">
@@ -22394,74 +22247,13 @@
       </p:sp>
       <p:sp>
         <p:nvSpPr>
-          <p:cNvPr id="376" name="Google Shape;376;p13"/>
-          <p:cNvSpPr/>
-          <p:nvPr/>
-        </p:nvSpPr>
-        <p:spPr>
-          <a:xfrm>
-            <a:off x="5852135" y="3584253"/>
-            <a:ext cx="1234500" cy="329100"/>
-          </a:xfrm>
-          <a:prstGeom prst="roundRect">
-            <a:avLst>
-              <a:gd fmla="val 50000" name="adj"/>
-            </a:avLst>
-          </a:prstGeom>
-          <a:solidFill>
-            <a:srgbClr val="E3F6EA"/>
-          </a:solidFill>
-          <a:ln>
-            <a:noFill/>
-          </a:ln>
-        </p:spPr>
-        <p:txBody>
-          <a:bodyPr anchorCtr="0" anchor="ctr" bIns="45700" lIns="91425" spcFirstLastPara="1" rIns="91425" wrap="square" tIns="45700">
-            <a:noAutofit/>
-          </a:bodyPr>
-          <a:lstStyle/>
-          <a:p>
-            <a:pPr indent="0" lvl="0" marL="0" marR="0" rtl="0" algn="l">
-              <a:lnSpc>
-                <a:spcPct val="100000"/>
-              </a:lnSpc>
-              <a:spcBef>
-                <a:spcPts val="0"/>
-              </a:spcBef>
-              <a:spcAft>
-                <a:spcPts val="0"/>
-              </a:spcAft>
-              <a:buClr>
-                <a:srgbClr val="000000"/>
-              </a:buClr>
-              <a:buSzPts val="1800"/>
-              <a:buFont typeface="Arial"/>
-              <a:buNone/>
-            </a:pPr>
-            <a:r>
-              <a:t/>
-            </a:r>
-            <a:endParaRPr b="0" i="0" spc="0" sz="1800" u="none" cap="none" strike="noStrike">
-              <a:solidFill>
-                <a:schemeClr val="dk1"/>
-              </a:solidFill>
-              <a:latin typeface="Calibri"/>
-              <a:ea typeface="Calibri"/>
-              <a:cs typeface="Calibri"/>
-              <a:sym typeface="Calibri"/>
-            </a:endParaRPr>
-          </a:p>
-        </p:txBody>
-      </p:sp>
-      <p:sp>
-        <p:nvSpPr>
-          <p:cNvPr id="377" name="Google Shape;377;p13"/>
+          <p:cNvPr id="386" name="Google Shape;386;p13"/>
           <p:cNvSpPr txBox="1"/>
           <p:nvPr/>
         </p:nvSpPr>
         <p:spPr>
           <a:xfrm>
-            <a:off x="5852135" y="3656415"/>
+            <a:off x="5852110" y="5014685"/>
             <a:ext cx="1234500" cy="184800"/>
           </a:xfrm>
           <a:prstGeom prst="rect">
@@ -22519,72 +22311,48 @@
           </a:p>
         </p:txBody>
       </p:sp>
-      <p:sp>
-        <p:nvSpPr>
-          <p:cNvPr id="378" name="Google Shape;378;p13"/>
-          <p:cNvSpPr txBox="1"/>
+      <p:pic>
+        <p:nvPicPr>
+          <p:cNvPr descr="p71_1.png" id="387" name="Google Shape;387;p13"/>
+          <p:cNvPicPr preferRelativeResize="0"/>
           <p:nvPr/>
-        </p:nvSpPr>
-        <p:spPr>
-          <a:xfrm>
-            <a:off x="5852110" y="5191578"/>
-            <a:ext cx="1234500" cy="184800"/>
-          </a:xfrm>
-          <a:prstGeom prst="rect">
-            <a:avLst/>
+        </p:nvPicPr>
+        <p:blipFill rotWithShape="1">
+          <a:blip r:embed="rId3">
+            <a:alphaModFix/>
+          </a:blip>
+          <a:srcRect b="31290" l="0" r="0" t="0"/>
+          <a:stretch/>
+        </p:blipFill>
+        <p:spPr>
+          <a:xfrm>
+            <a:off x="7772400" y="1606175"/>
+            <a:ext cx="3404100" cy="5251800"/>
+          </a:xfrm>
+          <a:prstGeom prst="roundRect">
+            <a:avLst>
+              <a:gd fmla="val 10840" name="adj"/>
+            </a:avLst>
           </a:prstGeom>
           <a:noFill/>
-          <a:ln>
-            <a:noFill/>
-          </a:ln>
-        </p:spPr>
-        <p:txBody>
-          <a:bodyPr anchorCtr="0" anchor="ctr" bIns="0" lIns="0" spcFirstLastPara="1" rIns="0" wrap="square" tIns="0">
-            <a:spAutoFit/>
-          </a:bodyPr>
-          <a:lstStyle/>
-          <a:p>
-            <a:pPr indent="0" lvl="0" marL="0" marR="0" rtl="0" algn="ctr">
-              <a:lnSpc>
-                <a:spcPct val="110000"/>
-              </a:lnSpc>
-              <a:spcBef>
-                <a:spcPts val="0"/>
-              </a:spcBef>
-              <a:spcAft>
-                <a:spcPts val="0"/>
-              </a:spcAft>
-              <a:buClr>
-                <a:srgbClr val="000000"/>
-              </a:buClr>
-              <a:buSzPts val="1200"/>
-              <a:buFont typeface="Arial"/>
-              <a:buNone/>
-            </a:pPr>
-            <a:r>
-              <a:rPr b="1" i="0" lang="en-US" spc="0" sz="1200" u="none" cap="none" strike="noStrike">
-                <a:solidFill>
-                  <a:srgbClr val="11803E"/>
-                </a:solidFill>
-                <a:latin typeface="Plus Jakarta Sans"/>
-                <a:ea typeface="Plus Jakarta Sans"/>
-                <a:cs typeface="Plus Jakarta Sans"/>
-                <a:sym typeface="Plus Jakarta Sans"/>
-              </a:rPr>
-              <a:t>Aprovado</a:t>
-            </a:r>
-            <a:endParaRPr b="0" i="0" spc="0" sz="1400" u="none" cap="none" strike="noStrike">
-              <a:solidFill>
-                <a:srgbClr val="000000"/>
-              </a:solidFill>
-              <a:latin typeface="Arial"/>
-              <a:ea typeface="Arial"/>
-              <a:cs typeface="Arial"/>
-              <a:sym typeface="Arial"/>
-            </a:endParaRPr>
-          </a:p>
-        </p:txBody>
-      </p:sp>
+          <a:ln cap="flat" cmpd="sng" w="38100">
+            <a:solidFill>
+              <a:srgbClr val="434343"/>
+            </a:solidFill>
+            <a:prstDash val="solid"/>
+            <a:round/>
+            <a:headEnd len="sm" w="sm" type="none"/>
+            <a:tailEnd len="sm" w="sm" type="none"/>
+          </a:ln>
+          <a:effectLst>
+            <a:outerShdw blurRad="214313" rotWithShape="0" algn="bl" dir="5400000" dist="66675">
+              <a:srgbClr val="000000">
+                <a:alpha val="10200"/>
+              </a:srgbClr>
+            </a:outerShdw>
+          </a:effectLst>
+        </p:spPr>
+      </p:pic>
     </p:spTree>
   </p:cSld>
   <p:clrMapOvr>
@@ -22594,7 +22362,7 @@
 </file>
 
 <file path=ppt/slides/slide14.xml><?xml version="1.0" encoding="utf-8"?>
-<p:sld xmlns:a="http://schemas.openxmlformats.org/drawingml/2006/main" xmlns:p="http://schemas.openxmlformats.org/presentationml/2006/main" xmlns:r="http://schemas.openxmlformats.org/officeDocument/2006/relationships">
+<p:sld xmlns:a="http://schemas.openxmlformats.org/drawingml/2006/main" xmlns:r="http://schemas.openxmlformats.org/officeDocument/2006/relationships" xmlns:mc="http://schemas.openxmlformats.org/markup-compatibility/2006" xmlns:mv="urn:schemas-microsoft-com:mac:vml" xmlns:p="http://schemas.openxmlformats.org/presentationml/2006/main" xmlns:c="http://schemas.openxmlformats.org/drawingml/2006/chart" xmlns:dgm="http://schemas.openxmlformats.org/drawingml/2006/diagram" xmlns:o="urn:schemas-microsoft-com:office:office" xmlns:v="urn:schemas-microsoft-com:vml" xmlns:pvml="urn:schemas-microsoft-com:office:powerpoint" xmlns:com="http://schemas.openxmlformats.org/drawingml/2006/compatibility" xmlns:p14="http://schemas.microsoft.com/office/powerpoint/2010/main" xmlns:p15="http://schemas.microsoft.com/office/powerpoint/2012/main" xmlns:ahyp="http://schemas.microsoft.com/office/drawing/2018/hyperlinkcolor">
   <p:cSld>
     <p:bg>
       <p:bgPr>
@@ -22605,14 +22373,21 @@
     </p:bg>
     <p:spTree>
       <p:nvGrpSpPr>
-        <p:cNvPr id="1" name=""/>
+        <p:cNvPr id="391" name="Shape 391"/>
         <p:cNvGrpSpPr/>
         <p:nvPr/>
       </p:nvGrpSpPr>
-      <p:grpSpPr/>
+      <p:grpSpPr>
+        <a:xfrm>
+          <a:off x="0" y="0"/>
+          <a:ext cx="0" cy="0"/>
+          <a:chOff x="0" y="0"/>
+          <a:chExt cx="0" cy="0"/>
+        </a:xfrm>
+      </p:grpSpPr>
       <p:sp>
         <p:nvSpPr>
-          <p:cNvPr id="354" name="Google Shape;354;p13"/>
+          <p:cNvPr id="392" name="Google Shape;392;p8"/>
           <p:cNvSpPr txBox="1"/>
           <p:nvPr/>
         </p:nvSpPr>
@@ -22678,7 +22453,7 @@
       </p:sp>
       <p:sp>
         <p:nvSpPr>
-          <p:cNvPr id="355" name="Google Shape;355;p13"/>
+          <p:cNvPr id="393" name="Google Shape;393;p8"/>
           <p:cNvSpPr txBox="1"/>
           <p:nvPr/>
         </p:nvSpPr>
@@ -22744,7 +22519,7 @@
       </p:sp>
       <p:sp>
         <p:nvSpPr>
-          <p:cNvPr id="356" name="Google Shape;356;p13"/>
+          <p:cNvPr id="394" name="Google Shape;394;p8"/>
           <p:cNvSpPr txBox="1"/>
           <p:nvPr/>
         </p:nvSpPr>
@@ -22810,7 +22585,7 @@
       </p:sp>
       <p:sp>
         <p:nvSpPr>
-          <p:cNvPr id="357" name="Google Shape;357;p13"/>
+          <p:cNvPr id="395" name="Google Shape;395;p8"/>
           <p:cNvSpPr txBox="1"/>
           <p:nvPr/>
         </p:nvSpPr>
@@ -22876,7 +22651,7 @@
       </p:sp>
       <p:sp>
         <p:nvSpPr>
-          <p:cNvPr id="358" name="Google Shape;358;p13"/>
+          <p:cNvPr id="396" name="Google Shape;396;p8"/>
           <p:cNvSpPr/>
           <p:nvPr/>
         </p:nvSpPr>
@@ -22937,7 +22712,7 @@
       </p:sp>
       <p:sp>
         <p:nvSpPr>
-          <p:cNvPr id="359" name="Google Shape;359;p13"/>
+          <p:cNvPr id="397" name="Google Shape;397;p8"/>
           <p:cNvSpPr txBox="1"/>
           <p:nvPr/>
         </p:nvSpPr>
@@ -23003,7 +22778,7 @@
       </p:sp>
       <p:sp>
         <p:nvSpPr>
-          <p:cNvPr id="360" name="Google Shape;360;p13"/>
+          <p:cNvPr id="398" name="Google Shape;398;p8"/>
           <p:cNvSpPr/>
           <p:nvPr/>
         </p:nvSpPr>
@@ -23064,7 +22839,7 @@
       </p:sp>
       <p:sp>
         <p:nvSpPr>
-          <p:cNvPr id="361" name="Google Shape;361;p13"/>
+          <p:cNvPr id="399" name="Google Shape;399;p8"/>
           <p:cNvSpPr txBox="1"/>
           <p:nvPr/>
         </p:nvSpPr>
@@ -23130,7 +22905,7 @@
       </p:sp>
       <p:sp>
         <p:nvSpPr>
-          <p:cNvPr id="362" name="Google Shape;362;p13"/>
+          <p:cNvPr id="400" name="Google Shape;400;p8"/>
           <p:cNvSpPr txBox="1"/>
           <p:nvPr/>
         </p:nvSpPr>
@@ -23196,7 +22971,7 @@
       </p:sp>
       <p:sp>
         <p:nvSpPr>
-          <p:cNvPr id="363" name="Google Shape;363;p13"/>
+          <p:cNvPr id="401" name="Google Shape;401;p8"/>
           <p:cNvSpPr/>
           <p:nvPr/>
         </p:nvSpPr>
@@ -23257,7 +23032,7 @@
       </p:sp>
       <p:sp>
         <p:nvSpPr>
-          <p:cNvPr id="364" name="Google Shape;364;p13"/>
+          <p:cNvPr id="402" name="Google Shape;402;p8"/>
           <p:cNvSpPr txBox="1"/>
           <p:nvPr/>
         </p:nvSpPr>
@@ -23323,7 +23098,7 @@
       </p:sp>
       <p:sp>
         <p:nvSpPr>
-          <p:cNvPr id="365" name="Google Shape;365;p13"/>
+          <p:cNvPr id="403" name="Google Shape;403;p8"/>
           <p:cNvSpPr txBox="1"/>
           <p:nvPr/>
         </p:nvSpPr>
@@ -23389,7 +23164,7 @@
       </p:sp>
       <p:sp>
         <p:nvSpPr>
-          <p:cNvPr id="366" name="Google Shape;366;p13"/>
+          <p:cNvPr id="404" name="Google Shape;404;p8"/>
           <p:cNvSpPr txBox="1"/>
           <p:nvPr/>
         </p:nvSpPr>
@@ -23455,7 +23230,7 @@
       </p:sp>
       <p:sp>
         <p:nvSpPr>
-          <p:cNvPr id="367" name="Google Shape;367;p13"/>
+          <p:cNvPr id="405" name="Google Shape;405;p8"/>
           <p:cNvSpPr txBox="1"/>
           <p:nvPr/>
         </p:nvSpPr>
@@ -23521,7 +23296,7 @@
       </p:sp>
       <p:sp>
         <p:nvSpPr>
-          <p:cNvPr id="368" name="Google Shape;368;p13"/>
+          <p:cNvPr id="406" name="Google Shape;406;p8"/>
           <p:cNvSpPr txBox="1"/>
           <p:nvPr/>
         </p:nvSpPr>
@@ -23587,7 +23362,7 @@
       </p:sp>
       <p:sp>
         <p:nvSpPr>
-          <p:cNvPr id="369" name="Google Shape;369;p13"/>
+          <p:cNvPr id="407" name="Google Shape;407;p8"/>
           <p:cNvSpPr/>
           <p:nvPr/>
         </p:nvSpPr>
@@ -23648,14 +23423,14 @@
       </p:sp>
       <p:sp>
         <p:nvSpPr>
-          <p:cNvPr id="370" name="Google Shape;370;p13"/>
+          <p:cNvPr id="408" name="Google Shape;408;p8"/>
           <p:cNvSpPr txBox="1"/>
           <p:nvPr/>
         </p:nvSpPr>
         <p:spPr>
           <a:xfrm>
             <a:off x="7946100" y="2163580"/>
-            <a:ext cx="3291900" cy="1262100"/>
+            <a:ext cx="3291900" cy="1113000"/>
           </a:xfrm>
           <a:prstGeom prst="rect">
             <a:avLst/>
@@ -23689,7 +23464,7 @@
               <a:buNone/>
             </a:pPr>
             <a:r>
-              <a:rPr b="1" i="0" lang="en-US" spc="200" sz="1100" u="none" cap="none" strike="noStrike">
+              <a:rPr b="1" lang="en-US" spc="200" sz="1100">
                 <a:solidFill>
                   <a:srgbClr val="11803E"/>
                 </a:solidFill>
@@ -23698,7 +23473,7 @@
                 <a:cs typeface="Plus Jakarta Sans"/>
                 <a:sym typeface="Plus Jakarta Sans"/>
               </a:rPr>
-              <a:t>AJUSTE DE PRIVACIDADE</a:t>
+              <a:t>QUEM DISPARA O ALARME?</a:t>
             </a:r>
             <a:endParaRPr b="1" i="0" spc="200" sz="1100" u="none" cap="none" strike="noStrike">
               <a:solidFill>
@@ -23729,15 +23504,6 @@
               <a:buNone/>
             </a:pPr>
             <a:r>
-              <a:rPr b="1" i="0" lang="en-US" spc="200" sz="800" u="none" cap="none" strike="noStrike">
-                <a:solidFill>
-                  <a:srgbClr val="11803E"/>
-                </a:solidFill>
-                <a:latin typeface="Plus Jakarta Sans"/>
-                <a:ea typeface="Plus Jakarta Sans"/>
-                <a:cs typeface="Plus Jakarta Sans"/>
-                <a:sym typeface="Plus Jakarta Sans"/>
-              </a:rPr>
               <a:t/>
             </a:r>
             <a:endParaRPr b="1" i="0" spc="200" sz="1100" u="none" cap="none" strike="noStrike">
@@ -23769,7 +23535,7 @@
               <a:buNone/>
             </a:pPr>
             <a:r>
-              <a:rPr b="1" i="0" lang="en-US" spc="0" sz="1700" u="none" cap="none" strike="noStrike">
+              <a:rPr b="1" lang="en-US" sz="1700">
                 <a:solidFill>
                   <a:srgbClr val="191C1E"/>
                 </a:solidFill>
@@ -23778,7 +23544,7 @@
                 <a:cs typeface="Plus Jakarta Sans"/>
                 <a:sym typeface="Plus Jakarta Sans"/>
               </a:rPr>
-              <a:t>Fechar o alarme devolve o bloqueio</a:t>
+              <a:t>O agendador do Android</a:t>
             </a:r>
             <a:endParaRPr b="1" i="0" spc="200" sz="1100" u="none" cap="none" strike="noStrike">
               <a:solidFill>
@@ -23809,7 +23575,7 @@
               <a:buNone/>
             </a:pPr>
             <a:r>
-              <a:rPr b="0" i="0" lang="en-US" spc="0" sz="1400" u="none" cap="none" strike="noStrike">
+              <a:rPr lang="en-US">
                 <a:solidFill>
                   <a:srgbClr val="545F73"/>
                 </a:solidFill>
@@ -23818,7 +23584,7 @@
                 <a:cs typeface="Plus Jakarta Sans"/>
                 <a:sym typeface="Plus Jakarta Sans"/>
               </a:rPr>
-              <a:t>sem expor o resto do app</a:t>
+              <a:t>e não o app, por isso toca com o app fechado</a:t>
             </a:r>
             <a:endParaRPr b="1" i="0" spc="200" sz="1100" u="none" cap="none" strike="noStrike">
               <a:solidFill>
@@ -23834,7 +23600,7 @@
       </p:sp>
       <p:sp>
         <p:nvSpPr>
-          <p:cNvPr id="371" name="Google Shape;371;p13"/>
+          <p:cNvPr id="409" name="Google Shape;409;p8"/>
           <p:cNvSpPr/>
           <p:nvPr/>
         </p:nvSpPr>
@@ -23901,7 +23667,7 @@
       </p:sp>
       <p:sp>
         <p:nvSpPr>
-          <p:cNvPr id="372" name="Google Shape;372;p13"/>
+          <p:cNvPr id="410" name="Google Shape;410;p8"/>
           <p:cNvSpPr txBox="1"/>
           <p:nvPr/>
         </p:nvSpPr>
@@ -24078,7 +23844,7 @@
       </p:sp>
       <p:sp>
         <p:nvSpPr>
-          <p:cNvPr id="373" name="Google Shape;373;p13"/>
+          <p:cNvPr id="411" name="Google Shape;411;p8"/>
           <p:cNvSpPr/>
           <p:nvPr/>
         </p:nvSpPr>
@@ -24139,7 +23905,7 @@
       </p:sp>
       <p:sp>
         <p:nvSpPr>
-          <p:cNvPr id="374" name="Google Shape;374;p13"/>
+          <p:cNvPr id="412" name="Google Shape;412;p8"/>
           <p:cNvSpPr/>
           <p:nvPr/>
         </p:nvSpPr>
@@ -24200,7 +23966,7 @@
       </p:sp>
       <p:sp>
         <p:nvSpPr>
-          <p:cNvPr id="375" name="Google Shape;375;p13"/>
+          <p:cNvPr id="413" name="Google Shape;413;p8"/>
           <p:cNvSpPr txBox="1"/>
           <p:nvPr/>
         </p:nvSpPr>
@@ -24266,7 +24032,7 @@
       </p:sp>
       <p:sp>
         <p:nvSpPr>
-          <p:cNvPr id="376" name="Google Shape;376;p13"/>
+          <p:cNvPr id="414" name="Google Shape;414;p8"/>
           <p:cNvSpPr/>
           <p:nvPr/>
         </p:nvSpPr>
@@ -24327,7 +24093,7 @@
       </p:sp>
       <p:sp>
         <p:nvSpPr>
-          <p:cNvPr id="377" name="Google Shape;377;p13"/>
+          <p:cNvPr id="415" name="Google Shape;415;p8"/>
           <p:cNvSpPr txBox="1"/>
           <p:nvPr/>
         </p:nvSpPr>
@@ -24393,7 +24159,7 @@
       </p:sp>
       <p:sp>
         <p:nvSpPr>
-          <p:cNvPr id="378" name="Google Shape;378;p13"/>
+          <p:cNvPr id="416" name="Google Shape;416;p8"/>
           <p:cNvSpPr txBox="1"/>
           <p:nvPr/>
         </p:nvSpPr>
@@ -24453,6 +24219,64 @@
               <a:ea typeface="Arial"/>
               <a:cs typeface="Arial"/>
               <a:sym typeface="Arial"/>
+            </a:endParaRPr>
+          </a:p>
+        </p:txBody>
+      </p:sp>
+      <p:sp>
+        <p:nvSpPr>
+          <p:cNvPr id="417" name="Google Shape;417;p8"/>
+          <p:cNvSpPr txBox="1"/>
+          <p:nvPr/>
+        </p:nvSpPr>
+        <p:spPr>
+          <a:xfrm>
+            <a:off x="9631800" y="3364750"/>
+            <a:ext cx="1853700" cy="369300"/>
+          </a:xfrm>
+          <a:prstGeom prst="rect">
+            <a:avLst/>
+          </a:prstGeom>
+          <a:noFill/>
+          <a:ln>
+            <a:noFill/>
+          </a:ln>
+        </p:spPr>
+        <p:txBody>
+          <a:bodyPr anchorCtr="0" anchor="t" bIns="91425" lIns="91425" spcFirstLastPara="1" rIns="91425" wrap="square" tIns="91425">
+            <a:spAutoFit/>
+          </a:bodyPr>
+          <a:lstStyle/>
+          <a:p>
+            <a:pPr indent="0" lvl="0" marL="0" rtl="0" algn="l">
+              <a:spcBef>
+                <a:spcPts val="0"/>
+              </a:spcBef>
+              <a:spcAft>
+                <a:spcPts val="0"/>
+              </a:spcAft>
+              <a:buNone/>
+            </a:pPr>
+            <a:r>
+              <a:rPr i="1" lang="en-US" sz="1200">
+                <a:solidFill>
+                  <a:srgbClr val="888888"/>
+                </a:solidFill>
+                <a:latin typeface="Plus Jakarta Sans"/>
+                <a:ea typeface="Plus Jakarta Sans"/>
+                <a:cs typeface="Plus Jakarta Sans"/>
+                <a:sym typeface="Plus Jakarta Sans"/>
+              </a:rPr>
+              <a:t>react-native-notify-kit</a:t>
+            </a:r>
+            <a:endParaRPr i="1" sz="1200">
+              <a:solidFill>
+                <a:srgbClr val="888888"/>
+              </a:solidFill>
+              <a:latin typeface="Plus Jakarta Sans"/>
+              <a:ea typeface="Plus Jakarta Sans"/>
+              <a:cs typeface="Plus Jakarta Sans"/>
+              <a:sym typeface="Plus Jakarta Sans"/>
             </a:endParaRPr>
           </a:p>
         </p:txBody>
@@ -24477,7 +24301,7 @@
     </p:bg>
     <p:spTree>
       <p:nvGrpSpPr>
-        <p:cNvPr id="383" name="Shape 383"/>
+        <p:cNvPr id="422" name="Shape 422"/>
         <p:cNvGrpSpPr/>
         <p:nvPr/>
       </p:nvGrpSpPr>
@@ -24491,7 +24315,7 @@
       </p:grpSpPr>
       <p:sp>
         <p:nvSpPr>
-          <p:cNvPr id="384" name="Google Shape;384;p14"/>
+          <p:cNvPr id="423" name="Google Shape;423;p14"/>
           <p:cNvSpPr txBox="1"/>
           <p:nvPr/>
         </p:nvSpPr>
@@ -24557,7 +24381,7 @@
       </p:sp>
       <p:sp>
         <p:nvSpPr>
-          <p:cNvPr id="385" name="Google Shape;385;p14"/>
+          <p:cNvPr id="424" name="Google Shape;424;p14"/>
           <p:cNvSpPr txBox="1"/>
           <p:nvPr/>
         </p:nvSpPr>
@@ -24623,7 +24447,7 @@
       </p:sp>
       <p:sp>
         <p:nvSpPr>
-          <p:cNvPr id="386" name="Google Shape;386;p14"/>
+          <p:cNvPr id="425" name="Google Shape;425;p14"/>
           <p:cNvSpPr txBox="1"/>
           <p:nvPr/>
         </p:nvSpPr>
@@ -24689,7 +24513,7 @@
       </p:sp>
       <p:sp>
         <p:nvSpPr>
-          <p:cNvPr id="387" name="Google Shape;387;p14"/>
+          <p:cNvPr id="426" name="Google Shape;426;p14"/>
           <p:cNvSpPr txBox="1"/>
           <p:nvPr/>
         </p:nvSpPr>
@@ -24755,7 +24579,7 @@
       </p:sp>
       <p:sp>
         <p:nvSpPr>
-          <p:cNvPr id="388" name="Google Shape;388;p14"/>
+          <p:cNvPr id="427" name="Google Shape;427;p14"/>
           <p:cNvSpPr/>
           <p:nvPr/>
         </p:nvSpPr>
@@ -24816,7 +24640,7 @@
       </p:sp>
       <p:sp>
         <p:nvSpPr>
-          <p:cNvPr id="389" name="Google Shape;389;p14"/>
+          <p:cNvPr id="428" name="Google Shape;428;p14"/>
           <p:cNvSpPr txBox="1"/>
           <p:nvPr/>
         </p:nvSpPr>
@@ -24882,7 +24706,7 @@
       </p:sp>
       <p:sp>
         <p:nvSpPr>
-          <p:cNvPr id="390" name="Google Shape;390;p14"/>
+          <p:cNvPr id="429" name="Google Shape;429;p14"/>
           <p:cNvSpPr txBox="1"/>
           <p:nvPr/>
         </p:nvSpPr>
@@ -24948,7 +24772,7 @@
       </p:sp>
       <p:sp>
         <p:nvSpPr>
-          <p:cNvPr id="391" name="Google Shape;391;p14"/>
+          <p:cNvPr id="430" name="Google Shape;430;p14"/>
           <p:cNvSpPr/>
           <p:nvPr/>
         </p:nvSpPr>
@@ -25009,7 +24833,7 @@
       </p:sp>
       <p:sp>
         <p:nvSpPr>
-          <p:cNvPr id="392" name="Google Shape;392;p14"/>
+          <p:cNvPr id="431" name="Google Shape;431;p14"/>
           <p:cNvSpPr txBox="1"/>
           <p:nvPr/>
         </p:nvSpPr>
@@ -25075,7 +24899,7 @@
       </p:sp>
       <p:sp>
         <p:nvSpPr>
-          <p:cNvPr id="393" name="Google Shape;393;p14"/>
+          <p:cNvPr id="432" name="Google Shape;432;p14"/>
           <p:cNvSpPr txBox="1"/>
           <p:nvPr/>
         </p:nvSpPr>
@@ -25141,7 +24965,7 @@
       </p:sp>
       <p:sp>
         <p:nvSpPr>
-          <p:cNvPr id="394" name="Google Shape;394;p14"/>
+          <p:cNvPr id="433" name="Google Shape;433;p14"/>
           <p:cNvSpPr/>
           <p:nvPr/>
         </p:nvSpPr>
@@ -25202,7 +25026,7 @@
       </p:sp>
       <p:sp>
         <p:nvSpPr>
-          <p:cNvPr id="395" name="Google Shape;395;p14"/>
+          <p:cNvPr id="434" name="Google Shape;434;p14"/>
           <p:cNvSpPr txBox="1"/>
           <p:nvPr/>
         </p:nvSpPr>
@@ -25268,7 +25092,7 @@
       </p:sp>
       <p:sp>
         <p:nvSpPr>
-          <p:cNvPr id="396" name="Google Shape;396;p14"/>
+          <p:cNvPr id="435" name="Google Shape;435;p14"/>
           <p:cNvSpPr txBox="1"/>
           <p:nvPr/>
         </p:nvSpPr>
@@ -25334,7 +25158,7 @@
       </p:sp>
       <p:sp>
         <p:nvSpPr>
-          <p:cNvPr id="397" name="Google Shape;397;p14"/>
+          <p:cNvPr id="436" name="Google Shape;436;p14"/>
           <p:cNvSpPr/>
           <p:nvPr/>
         </p:nvSpPr>
@@ -25395,7 +25219,7 @@
       </p:sp>
       <p:sp>
         <p:nvSpPr>
-          <p:cNvPr id="398" name="Google Shape;398;p14"/>
+          <p:cNvPr id="437" name="Google Shape;437;p14"/>
           <p:cNvSpPr txBox="1"/>
           <p:nvPr/>
         </p:nvSpPr>
@@ -25461,7 +25285,7 @@
       </p:sp>
       <p:sp>
         <p:nvSpPr>
-          <p:cNvPr id="399" name="Google Shape;399;p14"/>
+          <p:cNvPr id="438" name="Google Shape;438;p14"/>
           <p:cNvSpPr txBox="1"/>
           <p:nvPr/>
         </p:nvSpPr>
@@ -25502,7 +25326,7 @@
               <a:buNone/>
             </a:pPr>
             <a:r>
-              <a:rPr lang="en-US" sz="1700">
+              <a:rPr b="0" i="0" lang="en-US" spc="0" sz="1700" u="none" cap="none" strike="noStrike">
                 <a:solidFill>
                   <a:srgbClr val="545F73"/>
                 </a:solidFill>
@@ -25511,43 +25335,7 @@
                 <a:cs typeface="Plus Jakarta Sans"/>
                 <a:sym typeface="Plus Jakarta Sans"/>
               </a:rPr>
-              <a:t>design </a:t>
-            </a:r>
-            <a:r>
-              <a:rPr b="0" i="0" lang="en-US" spc="0" sz="1700" u="none" cap="none" strike="noStrike">
-                <a:solidFill>
-                  <a:srgbClr val="545F73"/>
-                </a:solidFill>
-                <a:latin typeface="Plus Jakarta Sans"/>
-                <a:ea typeface="Plus Jakarta Sans"/>
-                <a:cs typeface="Plus Jakarta Sans"/>
-                <a:sym typeface="Plus Jakarta Sans"/>
-              </a:rPr>
-              <a:t>guiad</a:t>
-            </a:r>
-            <a:r>
-              <a:rPr lang="en-US" sz="1700">
-                <a:solidFill>
-                  <a:srgbClr val="545F73"/>
-                </a:solidFill>
-                <a:latin typeface="Plus Jakarta Sans"/>
-                <a:ea typeface="Plus Jakarta Sans"/>
-                <a:cs typeface="Plus Jakarta Sans"/>
-                <a:sym typeface="Plus Jakarta Sans"/>
-              </a:rPr>
-              <a:t>o</a:t>
-            </a:r>
-            <a:r>
-              <a:rPr b="0" i="0" lang="en-US" spc="0" sz="1700" u="none" cap="none" strike="noStrike">
-                <a:solidFill>
-                  <a:srgbClr val="545F73"/>
-                </a:solidFill>
-                <a:latin typeface="Plus Jakarta Sans"/>
-                <a:ea typeface="Plus Jakarta Sans"/>
-                <a:cs typeface="Plus Jakarta Sans"/>
-                <a:sym typeface="Plus Jakarta Sans"/>
-              </a:rPr>
-              <a:t> pelas heurísticas de Nielsen + tópicos em acessibilidade</a:t>
+              <a:t>design guiado pelas heurísticas de Nielsen + tópicos em acessibilidade</a:t>
             </a:r>
             <a:endParaRPr b="0" i="0" spc="0" sz="1400" u="none" cap="none" strike="noStrike">
               <a:solidFill>
@@ -25563,7 +25351,7 @@
       </p:sp>
       <p:sp>
         <p:nvSpPr>
-          <p:cNvPr id="400" name="Google Shape;400;p14"/>
+          <p:cNvPr id="439" name="Google Shape;439;p14"/>
           <p:cNvSpPr/>
           <p:nvPr/>
         </p:nvSpPr>
@@ -25624,7 +25412,7 @@
       </p:sp>
       <p:sp>
         <p:nvSpPr>
-          <p:cNvPr id="401" name="Google Shape;401;p14"/>
+          <p:cNvPr id="440" name="Google Shape;440;p14"/>
           <p:cNvSpPr txBox="1"/>
           <p:nvPr/>
         </p:nvSpPr>
@@ -25708,7 +25496,7 @@
     </p:bg>
     <p:spTree>
       <p:nvGrpSpPr>
-        <p:cNvPr id="406" name="Shape 406"/>
+        <p:cNvPr id="445" name="Shape 445"/>
         <p:cNvGrpSpPr/>
         <p:nvPr/>
       </p:nvGrpSpPr>
@@ -25722,7 +25510,7 @@
       </p:grpSpPr>
       <p:sp>
         <p:nvSpPr>
-          <p:cNvPr id="407" name="Google Shape;407;p15"/>
+          <p:cNvPr id="446" name="Google Shape;446;p15"/>
           <p:cNvSpPr txBox="1"/>
           <p:nvPr/>
         </p:nvSpPr>
@@ -25788,7 +25576,7 @@
       </p:sp>
       <p:sp>
         <p:nvSpPr>
-          <p:cNvPr id="408" name="Google Shape;408;p15"/>
+          <p:cNvPr id="447" name="Google Shape;447;p15"/>
           <p:cNvSpPr txBox="1"/>
           <p:nvPr/>
         </p:nvSpPr>
@@ -25854,7 +25642,7 @@
       </p:sp>
       <p:sp>
         <p:nvSpPr>
-          <p:cNvPr id="409" name="Google Shape;409;p15"/>
+          <p:cNvPr id="448" name="Google Shape;448;p15"/>
           <p:cNvSpPr txBox="1"/>
           <p:nvPr/>
         </p:nvSpPr>
@@ -25920,7 +25708,7 @@
       </p:sp>
       <p:sp>
         <p:nvSpPr>
-          <p:cNvPr id="410" name="Google Shape;410;p15"/>
+          <p:cNvPr id="449" name="Google Shape;449;p15"/>
           <p:cNvSpPr txBox="1"/>
           <p:nvPr/>
         </p:nvSpPr>
@@ -25986,7 +25774,7 @@
       </p:sp>
       <p:sp>
         <p:nvSpPr>
-          <p:cNvPr id="411" name="Google Shape;411;p15"/>
+          <p:cNvPr id="450" name="Google Shape;450;p15"/>
           <p:cNvSpPr/>
           <p:nvPr/>
         </p:nvSpPr>
@@ -26047,7 +25835,7 @@
       </p:sp>
       <p:sp>
         <p:nvSpPr>
-          <p:cNvPr id="412" name="Google Shape;412;p15"/>
+          <p:cNvPr id="451" name="Google Shape;451;p15"/>
           <p:cNvSpPr txBox="1"/>
           <p:nvPr/>
         </p:nvSpPr>
@@ -26113,7 +25901,7 @@
       </p:sp>
       <p:sp>
         <p:nvSpPr>
-          <p:cNvPr id="413" name="Google Shape;413;p15"/>
+          <p:cNvPr id="452" name="Google Shape;452;p15"/>
           <p:cNvSpPr txBox="1"/>
           <p:nvPr/>
         </p:nvSpPr>
@@ -26179,7 +25967,7 @@
       </p:sp>
       <p:sp>
         <p:nvSpPr>
-          <p:cNvPr id="414" name="Google Shape;414;p15"/>
+          <p:cNvPr id="453" name="Google Shape;453;p15"/>
           <p:cNvSpPr/>
           <p:nvPr/>
         </p:nvSpPr>
@@ -26240,7 +26028,7 @@
       </p:sp>
       <p:sp>
         <p:nvSpPr>
-          <p:cNvPr id="415" name="Google Shape;415;p15"/>
+          <p:cNvPr id="454" name="Google Shape;454;p15"/>
           <p:cNvSpPr txBox="1"/>
           <p:nvPr/>
         </p:nvSpPr>
@@ -26306,7 +26094,7 @@
       </p:sp>
       <p:sp>
         <p:nvSpPr>
-          <p:cNvPr id="416" name="Google Shape;416;p15"/>
+          <p:cNvPr id="455" name="Google Shape;455;p15"/>
           <p:cNvSpPr txBox="1"/>
           <p:nvPr/>
         </p:nvSpPr>
@@ -26372,7 +26160,7 @@
       </p:sp>
       <p:sp>
         <p:nvSpPr>
-          <p:cNvPr id="417" name="Google Shape;417;p15"/>
+          <p:cNvPr id="456" name="Google Shape;456;p15"/>
           <p:cNvSpPr/>
           <p:nvPr/>
         </p:nvSpPr>
@@ -26433,7 +26221,7 @@
       </p:sp>
       <p:sp>
         <p:nvSpPr>
-          <p:cNvPr id="418" name="Google Shape;418;p15"/>
+          <p:cNvPr id="457" name="Google Shape;457;p15"/>
           <p:cNvSpPr txBox="1"/>
           <p:nvPr/>
         </p:nvSpPr>
@@ -26499,7 +26287,7 @@
       </p:sp>
       <p:sp>
         <p:nvSpPr>
-          <p:cNvPr id="419" name="Google Shape;419;p15"/>
+          <p:cNvPr id="458" name="Google Shape;458;p15"/>
           <p:cNvSpPr txBox="1"/>
           <p:nvPr/>
         </p:nvSpPr>
@@ -26565,7 +26353,7 @@
       </p:sp>
       <p:sp>
         <p:nvSpPr>
-          <p:cNvPr id="420" name="Google Shape;420;p15"/>
+          <p:cNvPr id="459" name="Google Shape;459;p15"/>
           <p:cNvSpPr/>
           <p:nvPr/>
         </p:nvSpPr>
@@ -26626,7 +26414,7 @@
       </p:sp>
       <p:sp>
         <p:nvSpPr>
-          <p:cNvPr id="421" name="Google Shape;421;p15"/>
+          <p:cNvPr id="460" name="Google Shape;460;p15"/>
           <p:cNvSpPr txBox="1"/>
           <p:nvPr/>
         </p:nvSpPr>
@@ -26692,7 +26480,7 @@
       </p:sp>
       <p:sp>
         <p:nvSpPr>
-          <p:cNvPr id="422" name="Google Shape;422;p15"/>
+          <p:cNvPr id="461" name="Google Shape;461;p15"/>
           <p:cNvSpPr txBox="1"/>
           <p:nvPr/>
         </p:nvSpPr>
@@ -26758,7 +26546,7 @@
       </p:sp>
       <p:sp>
         <p:nvSpPr>
-          <p:cNvPr id="423" name="Google Shape;423;p15"/>
+          <p:cNvPr id="462" name="Google Shape;462;p15"/>
           <p:cNvSpPr/>
           <p:nvPr/>
         </p:nvSpPr>
@@ -26819,7 +26607,7 @@
       </p:sp>
       <p:sp>
         <p:nvSpPr>
-          <p:cNvPr id="424" name="Google Shape;424;p15"/>
+          <p:cNvPr id="463" name="Google Shape;463;p15"/>
           <p:cNvSpPr txBox="1"/>
           <p:nvPr/>
         </p:nvSpPr>
@@ -26885,7 +26673,7 @@
       </p:sp>
       <p:sp>
         <p:nvSpPr>
-          <p:cNvPr id="425" name="Google Shape;425;p15"/>
+          <p:cNvPr id="464" name="Google Shape;464;p15"/>
           <p:cNvSpPr txBox="1"/>
           <p:nvPr/>
         </p:nvSpPr>
@@ -26951,7 +26739,7 @@
       </p:sp>
       <p:sp>
         <p:nvSpPr>
-          <p:cNvPr id="426" name="Google Shape;426;p15"/>
+          <p:cNvPr id="465" name="Google Shape;465;p15"/>
           <p:cNvSpPr txBox="1"/>
           <p:nvPr/>
         </p:nvSpPr>
@@ -27001,43 +26789,7 @@
                 <a:cs typeface="Plus Jakarta Sans"/>
                 <a:sym typeface="Plus Jakarta Sans"/>
               </a:rPr>
-              <a:t>limitação </a:t>
-            </a:r>
-            <a:r>
-              <a:rPr lang="en-US" sz="1300">
-                <a:solidFill>
-                  <a:srgbClr val="545F73"/>
-                </a:solidFill>
-                <a:latin typeface="Plus Jakarta Sans"/>
-                <a:ea typeface="Plus Jakarta Sans"/>
-                <a:cs typeface="Plus Jakarta Sans"/>
-                <a:sym typeface="Plus Jakarta Sans"/>
-              </a:rPr>
-              <a:t>- </a:t>
-            </a:r>
-            <a:r>
-              <a:rPr b="0" i="0" lang="en-US" spc="0" sz="1300" u="none" cap="none" strike="noStrike">
-                <a:solidFill>
-                  <a:srgbClr val="545F73"/>
-                </a:solidFill>
-                <a:latin typeface="Plus Jakarta Sans"/>
-                <a:ea typeface="Plus Jakarta Sans"/>
-                <a:cs typeface="Plus Jakarta Sans"/>
-                <a:sym typeface="Plus Jakarta Sans"/>
-              </a:rPr>
-              <a:t> sem teste com usuários fina</a:t>
-            </a:r>
-            <a:r>
-              <a:rPr lang="en-US" sz="1300">
-                <a:solidFill>
-                  <a:srgbClr val="545F73"/>
-                </a:solidFill>
-                <a:latin typeface="Plus Jakarta Sans"/>
-                <a:ea typeface="Plus Jakarta Sans"/>
-                <a:cs typeface="Plus Jakarta Sans"/>
-                <a:sym typeface="Plus Jakarta Sans"/>
-              </a:rPr>
-              <a:t>is</a:t>
+              <a:t>limitação -  sem teste com usuários finais</a:t>
             </a:r>
             <a:endParaRPr b="0" i="0" spc="0" sz="1400" u="none" cap="none" strike="noStrike">
               <a:solidFill>
@@ -27053,7 +26805,7 @@
       </p:sp>
       <p:sp>
         <p:nvSpPr>
-          <p:cNvPr id="427" name="Google Shape;427;p15"/>
+          <p:cNvPr id="466" name="Google Shape;466;p15"/>
           <p:cNvSpPr txBox="1"/>
           <p:nvPr/>
         </p:nvSpPr>
@@ -27103,43 +26855,7 @@
                 <a:cs typeface="Plus Jakarta Sans"/>
                 <a:sym typeface="Plus Jakarta Sans"/>
               </a:rPr>
-              <a:t>limitação </a:t>
-            </a:r>
-            <a:r>
-              <a:rPr lang="en-US" sz="1300">
-                <a:solidFill>
-                  <a:srgbClr val="545F73"/>
-                </a:solidFill>
-                <a:latin typeface="Plus Jakarta Sans"/>
-                <a:ea typeface="Plus Jakarta Sans"/>
-                <a:cs typeface="Plus Jakarta Sans"/>
-                <a:sym typeface="Plus Jakarta Sans"/>
-              </a:rPr>
-              <a:t>-</a:t>
-            </a:r>
-            <a:r>
-              <a:rPr b="0" i="0" lang="en-US" spc="0" sz="1300" u="none" cap="none" strike="noStrike">
-                <a:solidFill>
-                  <a:srgbClr val="545F73"/>
-                </a:solidFill>
-                <a:latin typeface="Plus Jakarta Sans"/>
-                <a:ea typeface="Plus Jakarta Sans"/>
-                <a:cs typeface="Plus Jakarta Sans"/>
-                <a:sym typeface="Plus Jakarta Sans"/>
-              </a:rPr>
-              <a:t> </a:t>
-            </a:r>
-            <a:r>
-              <a:rPr lang="en-US" sz="1300">
-                <a:solidFill>
-                  <a:srgbClr val="545F73"/>
-                </a:solidFill>
-                <a:latin typeface="Plus Jakarta Sans"/>
-                <a:ea typeface="Plus Jakarta Sans"/>
-                <a:cs typeface="Plus Jakarta Sans"/>
-                <a:sym typeface="Plus Jakarta Sans"/>
-              </a:rPr>
-              <a:t>100% validado em somente um aparelho</a:t>
+              <a:t>limitação - 100% validado em somente um aparelho</a:t>
             </a:r>
             <a:endParaRPr b="0" i="0" spc="0" sz="1400" u="none" cap="none" strike="noStrike">
               <a:solidFill>
@@ -27155,7 +26871,7 @@
       </p:sp>
       <p:sp>
         <p:nvSpPr>
-          <p:cNvPr id="428" name="Google Shape;428;p15"/>
+          <p:cNvPr id="467" name="Google Shape;467;p15"/>
           <p:cNvSpPr txBox="1"/>
           <p:nvPr/>
         </p:nvSpPr>
@@ -27205,55 +26921,7 @@
                 <a:cs typeface="Plus Jakarta Sans"/>
                 <a:sym typeface="Plus Jakarta Sans"/>
               </a:rPr>
-              <a:t>limitação </a:t>
-            </a:r>
-            <a:r>
-              <a:rPr lang="en-US" sz="1300">
-                <a:solidFill>
-                  <a:srgbClr val="545F73"/>
-                </a:solidFill>
-                <a:latin typeface="Plus Jakarta Sans"/>
-                <a:ea typeface="Plus Jakarta Sans"/>
-                <a:cs typeface="Plus Jakarta Sans"/>
-                <a:sym typeface="Plus Jakarta Sans"/>
-              </a:rPr>
-              <a:t>- </a:t>
-            </a:r>
-            <a:r>
-              <a:rPr b="0" i="0" lang="en-US" spc="0" sz="1300" u="none" cap="none" strike="noStrike">
-                <a:solidFill>
-                  <a:srgbClr val="545F73"/>
-                </a:solidFill>
-                <a:latin typeface="Plus Jakarta Sans"/>
-                <a:ea typeface="Plus Jakarta Sans"/>
-                <a:cs typeface="Plus Jakarta Sans"/>
-                <a:sym typeface="Plus Jakarta Sans"/>
-              </a:rPr>
-              <a:t> </a:t>
-            </a:r>
-            <a:r>
-              <a:rPr lang="en-US" sz="1300">
-                <a:solidFill>
-                  <a:srgbClr val="545F73"/>
-                </a:solidFill>
-                <a:latin typeface="Plus Jakarta Sans"/>
-                <a:ea typeface="Plus Jakarta Sans"/>
-                <a:cs typeface="Plus Jakarta Sans"/>
-                <a:sym typeface="Plus Jakarta Sans"/>
-              </a:rPr>
-              <a:t>disponível somente para dispositivos </a:t>
-            </a:r>
-            <a:r>
-              <a:rPr b="0" i="0" lang="en-US" spc="0" sz="1300" u="none" cap="none" strike="noStrike">
-                <a:solidFill>
-                  <a:srgbClr val="545F73"/>
-                </a:solidFill>
-                <a:latin typeface="Plus Jakarta Sans"/>
-                <a:ea typeface="Plus Jakarta Sans"/>
-                <a:cs typeface="Plus Jakarta Sans"/>
-                <a:sym typeface="Plus Jakarta Sans"/>
-              </a:rPr>
-              <a:t> Android</a:t>
+              <a:t>limitação -  disponível somente para dispositivos  Android</a:t>
             </a:r>
             <a:endParaRPr b="0" i="0" spc="0" sz="1400" u="none" cap="none" strike="noStrike">
               <a:solidFill>
@@ -27287,7 +26955,7 @@
     </p:bg>
     <p:spTree>
       <p:nvGrpSpPr>
-        <p:cNvPr id="433" name="Shape 433"/>
+        <p:cNvPr id="472" name="Shape 472"/>
         <p:cNvGrpSpPr/>
         <p:nvPr/>
       </p:nvGrpSpPr>
@@ -27301,7 +26969,7 @@
       </p:grpSpPr>
       <p:sp>
         <p:nvSpPr>
-          <p:cNvPr id="434" name="Google Shape;434;p16"/>
+          <p:cNvPr id="473" name="Google Shape;473;p16"/>
           <p:cNvSpPr txBox="1"/>
           <p:nvPr/>
         </p:nvSpPr>
@@ -27367,7 +27035,7 @@
       </p:sp>
       <p:sp>
         <p:nvSpPr>
-          <p:cNvPr id="435" name="Google Shape;435;p16"/>
+          <p:cNvPr id="474" name="Google Shape;474;p16"/>
           <p:cNvSpPr txBox="1"/>
           <p:nvPr/>
         </p:nvSpPr>
@@ -27433,7 +27101,7 @@
       </p:sp>
       <p:sp>
         <p:nvSpPr>
-          <p:cNvPr id="436" name="Google Shape;436;p16"/>
+          <p:cNvPr id="475" name="Google Shape;475;p16"/>
           <p:cNvSpPr txBox="1"/>
           <p:nvPr/>
         </p:nvSpPr>
@@ -27499,7 +27167,7 @@
       </p:sp>
       <p:sp>
         <p:nvSpPr>
-          <p:cNvPr id="437" name="Google Shape;437;p16"/>
+          <p:cNvPr id="476" name="Google Shape;476;p16"/>
           <p:cNvSpPr txBox="1"/>
           <p:nvPr/>
         </p:nvSpPr>
@@ -27885,7 +27553,7 @@
       </p:sp>
       <p:sp>
         <p:nvSpPr>
-          <p:cNvPr id="438" name="Google Shape;438;p16"/>
+          <p:cNvPr id="477" name="Google Shape;477;p16"/>
           <p:cNvSpPr txBox="1"/>
           <p:nvPr/>
         </p:nvSpPr>
@@ -28313,7 +27981,7 @@
     </p:bg>
     <p:spTree>
       <p:nvGrpSpPr>
-        <p:cNvPr id="443" name="Shape 443"/>
+        <p:cNvPr id="482" name="Shape 482"/>
         <p:cNvGrpSpPr/>
         <p:nvPr/>
       </p:nvGrpSpPr>
@@ -28327,7 +27995,7 @@
       </p:grpSpPr>
       <p:sp>
         <p:nvSpPr>
-          <p:cNvPr id="444" name="Google Shape;444;p17"/>
+          <p:cNvPr id="483" name="Google Shape;483;p17"/>
           <p:cNvSpPr/>
           <p:nvPr/>
         </p:nvSpPr>
@@ -28386,7 +28054,7 @@
       </p:sp>
       <p:sp>
         <p:nvSpPr>
-          <p:cNvPr id="445" name="Google Shape;445;p17"/>
+          <p:cNvPr id="484" name="Google Shape;484;p17"/>
           <p:cNvSpPr/>
           <p:nvPr/>
         </p:nvSpPr>
@@ -28447,7 +28115,7 @@
       </p:sp>
       <p:pic>
         <p:nvPicPr>
-          <p:cNvPr descr="qr.png" id="446" name="Google Shape;446;p17"/>
+          <p:cNvPr descr="qr.png" id="485" name="Google Shape;485;p17"/>
           <p:cNvPicPr preferRelativeResize="0"/>
           <p:nvPr/>
         </p:nvPicPr>
@@ -28474,7 +28142,7 @@
       </p:pic>
       <p:sp>
         <p:nvSpPr>
-          <p:cNvPr id="447" name="Google Shape;447;p17"/>
+          <p:cNvPr id="486" name="Google Shape;486;p17"/>
           <p:cNvSpPr txBox="1"/>
           <p:nvPr/>
         </p:nvSpPr>
@@ -28515,7 +28183,7 @@
               <a:buNone/>
             </a:pPr>
             <a:r>
-              <a:rPr b="1" lang="en-US" spc="0" sz="1700" cap="none" strike="noStrike">
+              <a:rPr b="1" i="0" lang="en-US" spc="0" sz="1700" u="none" cap="none" strike="noStrike">
                 <a:solidFill>
                   <a:srgbClr val="191C1E"/>
                 </a:solidFill>
@@ -28526,7 +28194,7 @@
               </a:rPr>
               <a:t>Conheça o Mapill</a:t>
             </a:r>
-            <a:endParaRPr b="1" spc="0" sz="1700" cap="none" strike="noStrike">
+            <a:endParaRPr b="1" i="0" spc="0" sz="1700" u="none" cap="none" strike="noStrike">
               <a:solidFill>
                 <a:srgbClr val="191C1E"/>
               </a:solidFill>
@@ -28557,7 +28225,7 @@
             <a:r>
               <a:t/>
             </a:r>
-            <a:endParaRPr b="1" spc="0" sz="1700" cap="none" strike="noStrike">
+            <a:endParaRPr b="1" i="0" spc="0" sz="1700" u="none" cap="none" strike="noStrike">
               <a:solidFill>
                 <a:srgbClr val="191C1E"/>
               </a:solidFill>
@@ -28586,7 +28254,7 @@
               <a:buNone/>
             </a:pPr>
             <a:r>
-              <a:rPr b="0" lang="en-US" spc="0" sz="1200" cap="none" strike="noStrike">
+              <a:rPr b="0" i="0" lang="en-US" spc="0" sz="1200" u="none" cap="none" strike="noStrike">
                 <a:solidFill>
                   <a:srgbClr val="545F73"/>
                 </a:solidFill>
@@ -28597,7 +28265,7 @@
               </a:rPr>
               <a:t>Página do app, com o APK para Android</a:t>
             </a:r>
-            <a:endParaRPr b="0" spc="0" sz="1300" cap="none" strike="noStrike">
+            <a:endParaRPr b="0" i="0" spc="0" sz="1300" u="none" cap="none" strike="noStrike">
               <a:solidFill>
                 <a:srgbClr val="000000"/>
               </a:solidFill>
@@ -28626,7 +28294,7 @@
               <a:buNone/>
             </a:pPr>
             <a:r>
-              <a:rPr b="1" lang="en-US" spc="0" sz="1700" cap="none" strike="noStrike">
+              <a:rPr b="1" i="0" lang="en-US" spc="0" sz="1700" u="none" cap="none" strike="noStrike">
                 <a:solidFill>
                   <a:schemeClr val="hlink"/>
                 </a:solidFill>
@@ -28641,7 +28309,7 @@
               </a:rPr>
               <a:t>mapill-website.vercel.app</a:t>
             </a:r>
-            <a:endParaRPr b="0" spc="0" sz="1800" cap="none" strike="noStrike">
+            <a:endParaRPr b="0" i="0" spc="0" sz="1800" u="none" cap="none" strike="noStrike">
               <a:solidFill>
                 <a:srgbClr val="000000"/>
               </a:solidFill>
@@ -28655,7 +28323,7 @@
       </p:sp>
       <p:pic>
         <p:nvPicPr>
-          <p:cNvPr descr="lockup-claro.png" id="448" name="Google Shape;448;p17"/>
+          <p:cNvPr descr="lockup-claro.png" id="487" name="Google Shape;487;p17"/>
           <p:cNvPicPr preferRelativeResize="0"/>
           <p:nvPr/>
         </p:nvPicPr>
@@ -28682,7 +28350,7 @@
       </p:pic>
       <p:sp>
         <p:nvSpPr>
-          <p:cNvPr id="449" name="Google Shape;449;p17"/>
+          <p:cNvPr id="488" name="Google Shape;488;p17"/>
           <p:cNvSpPr txBox="1"/>
           <p:nvPr/>
         </p:nvSpPr>
@@ -28748,7 +28416,7 @@
       </p:sp>
       <p:sp>
         <p:nvSpPr>
-          <p:cNvPr id="450" name="Google Shape;450;p17"/>
+          <p:cNvPr id="489" name="Google Shape;489;p17"/>
           <p:cNvSpPr txBox="1"/>
           <p:nvPr/>
         </p:nvSpPr>
@@ -28965,7 +28633,7 @@
       </p:sp>
       <p:pic>
         <p:nvPicPr>
-          <p:cNvPr descr="unidavi.png" id="451" name="Google Shape;451;p17"/>
+          <p:cNvPr id="490" name="Google Shape;490;p17" title="image-removebg-preview.png"/>
           <p:cNvPicPr preferRelativeResize="0"/>
           <p:nvPr/>
         </p:nvPicPr>
@@ -28973,13 +28641,13 @@
           <a:blip r:embed="rId6">
             <a:alphaModFix/>
           </a:blip>
-          <a:srcRect b="0" l="0" r="0" t="0"/>
+          <a:srcRect b="8691" l="0" r="0" t="8699"/>
           <a:stretch/>
         </p:blipFill>
         <p:spPr>
           <a:xfrm>
-            <a:off x="685800" y="5715000"/>
-            <a:ext cx="608798" cy="502920"/>
+            <a:off x="685800" y="5601350"/>
+            <a:ext cx="885524" cy="731525"/>
           </a:xfrm>
           <a:prstGeom prst="rect">
             <a:avLst/>
@@ -30530,7 +30198,7 @@
         <p:spPr>
           <a:xfrm>
             <a:off x="685800" y="868680"/>
-            <a:ext cx="10820095" cy="1005840"/>
+            <a:ext cx="10820100" cy="861900"/>
           </a:xfrm>
           <a:prstGeom prst="rect">
             <a:avLst/>
@@ -30573,7 +30241,47 @@
                 <a:cs typeface="Plus Jakarta Sans"/>
                 <a:sym typeface="Plus Jakarta Sans"/>
               </a:rPr>
-              <a:t>“Os medicamentos não funcionam em pacientes que não os tomam.”</a:t>
+              <a:t>“Os medicamentos não funcionam em pacientes </a:t>
+            </a:r>
+            <a:endParaRPr b="1" i="0" spc="0" sz="2800" u="none" cap="none" strike="noStrike">
+              <a:solidFill>
+                <a:srgbClr val="191C1E"/>
+              </a:solidFill>
+              <a:latin typeface="Plus Jakarta Sans"/>
+              <a:ea typeface="Plus Jakarta Sans"/>
+              <a:cs typeface="Plus Jakarta Sans"/>
+              <a:sym typeface="Plus Jakarta Sans"/>
+            </a:endParaRPr>
+          </a:p>
+          <a:p>
+            <a:pPr indent="0" lvl="0" marL="0" marR="0" rtl="0" algn="l">
+              <a:lnSpc>
+                <a:spcPct val="100000"/>
+              </a:lnSpc>
+              <a:spcBef>
+                <a:spcPts val="0"/>
+              </a:spcBef>
+              <a:spcAft>
+                <a:spcPts val="0"/>
+              </a:spcAft>
+              <a:buClr>
+                <a:srgbClr val="000000"/>
+              </a:buClr>
+              <a:buSzPts val="2800"/>
+              <a:buFont typeface="Arial"/>
+              <a:buNone/>
+            </a:pPr>
+            <a:r>
+              <a:rPr b="1" i="0" lang="en-US" spc="0" sz="2800" u="none" cap="none" strike="noStrike">
+                <a:solidFill>
+                  <a:srgbClr val="191C1E"/>
+                </a:solidFill>
+                <a:latin typeface="Plus Jakarta Sans"/>
+                <a:ea typeface="Plus Jakarta Sans"/>
+                <a:cs typeface="Plus Jakarta Sans"/>
+                <a:sym typeface="Plus Jakarta Sans"/>
+              </a:rPr>
+              <a:t>que não os tomam.”</a:t>
             </a:r>
             <a:endParaRPr b="0" i="0" spc="0" sz="1400" u="none" cap="none" strike="noStrike">
               <a:solidFill>
@@ -31601,7 +31309,7 @@
               <a:buNone/>
             </a:pPr>
             <a:r>
-              <a:rPr b="1" i="0" lang="en-US" spc="0" sz="1900" u="none" cap="none" strike="noStrike">
+              <a:rPr b="1" i="0" lang="en-US" spc="0" sz="1500" u="none" cap="none" strike="noStrike">
                 <a:solidFill>
                   <a:srgbClr val="0B5FD9"/>
                 </a:solidFill>
@@ -31613,7 +31321,7 @@
               <a:t>Um dos maiores desafios da saúde pública</a:t>
             </a:r>
             <a:r>
-              <a:rPr b="0" i="0" lang="en-US" spc="0" sz="1700" u="none" cap="none" strike="noStrike">
+              <a:rPr b="0" i="0" lang="en-US" spc="0" sz="1300" u="none" cap="none" strike="noStrike">
                 <a:solidFill>
                   <a:srgbClr val="545F73"/>
                 </a:solidFill>
@@ -31624,7 +31332,7 @@
               </a:rPr>
               <a:t>   ·   reconhecido pela OMS (WHO, 2003)</a:t>
             </a:r>
-            <a:endParaRPr b="0" i="0" spc="0" sz="1400" u="none" cap="none" strike="noStrike">
+            <a:endParaRPr b="0" i="0" spc="0" sz="1000" u="none" cap="none" strike="noStrike">
               <a:solidFill>
                 <a:srgbClr val="000000"/>
               </a:solidFill>
@@ -37019,7 +36727,479 @@
                 <a:cs typeface="Plus Jakarta Sans"/>
                 <a:sym typeface="Plus Jakarta Sans"/>
               </a:rPr>
-              <a:t>passar para uma ferramenta o que a cabeça </a:t>
+              <a:t>passar para uma ferramenta </a:t>
+            </a:r>
+            <a:r>
+              <a:rPr lang="en-US" sz="1300">
+                <a:solidFill>
+                  <a:srgbClr val="191C1E"/>
+                </a:solidFill>
+                <a:latin typeface="Plus Jakarta Sans"/>
+                <a:ea typeface="Plus Jakarta Sans"/>
+                <a:cs typeface="Plus Jakarta Sans"/>
+                <a:sym typeface="Plus Jakarta Sans"/>
+              </a:rPr>
+              <a:t>(app) </a:t>
+            </a:r>
+            <a:r>
+              <a:rPr b="0" i="0" lang="en-US" spc="0" sz="1300" u="none" cap="none" strike="noStrike">
+                <a:solidFill>
+                  <a:srgbClr val="191C1E"/>
+                </a:solidFill>
+                <a:latin typeface="Plus Jakarta Sans"/>
+                <a:ea typeface="Plus Jakarta Sans"/>
+                <a:cs typeface="Plus Jakarta Sans"/>
+                <a:sym typeface="Plus Jakarta Sans"/>
+              </a:rPr>
+              <a:t> o que </a:t>
+            </a:r>
+            <a:r>
+              <a:rPr lang="en-US" sz="1300">
+                <a:solidFill>
+                  <a:srgbClr val="191C1E"/>
+                </a:solidFill>
+                <a:latin typeface="Plus Jakarta Sans"/>
+                <a:ea typeface="Plus Jakarta Sans"/>
+                <a:cs typeface="Plus Jakarta Sans"/>
+                <a:sym typeface="Plus Jakarta Sans"/>
+              </a:rPr>
+              <a:t>o </a:t>
+            </a:r>
+            <a:endParaRPr sz="1300">
+              <a:solidFill>
+                <a:srgbClr val="191C1E"/>
+              </a:solidFill>
+              <a:latin typeface="Plus Jakarta Sans"/>
+              <a:ea typeface="Plus Jakarta Sans"/>
+              <a:cs typeface="Plus Jakarta Sans"/>
+              <a:sym typeface="Plus Jakarta Sans"/>
+            </a:endParaRPr>
+          </a:p>
+          <a:p>
+            <a:pPr indent="0" lvl="0" marL="0" marR="0" rtl="0" algn="l">
+              <a:lnSpc>
+                <a:spcPct val="105000"/>
+              </a:lnSpc>
+              <a:spcBef>
+                <a:spcPts val="0"/>
+              </a:spcBef>
+              <a:spcAft>
+                <a:spcPts val="0"/>
+              </a:spcAft>
+              <a:buClr>
+                <a:srgbClr val="000000"/>
+              </a:buClr>
+              <a:buSzPts val="1300"/>
+              <a:buFont typeface="Arial"/>
+              <a:buNone/>
+            </a:pPr>
+            <a:r>
+              <a:rPr lang="en-US" sz="1300">
+                <a:solidFill>
+                  <a:srgbClr val="191C1E"/>
+                </a:solidFill>
+                <a:latin typeface="Plus Jakarta Sans"/>
+                <a:ea typeface="Plus Jakarta Sans"/>
+                <a:cs typeface="Plus Jakarta Sans"/>
+                <a:sym typeface="Plus Jakarta Sans"/>
+              </a:rPr>
+              <a:t>usuário</a:t>
+            </a:r>
+            <a:r>
+              <a:rPr b="0" i="0" lang="en-US" spc="0" sz="1300" u="none" cap="none" strike="noStrike">
+                <a:solidFill>
+                  <a:srgbClr val="191C1E"/>
+                </a:solidFill>
+                <a:latin typeface="Plus Jakarta Sans"/>
+                <a:ea typeface="Plus Jakarta Sans"/>
+                <a:cs typeface="Plus Jakarta Sans"/>
+                <a:sym typeface="Plus Jakarta Sans"/>
+              </a:rPr>
+              <a:t> teria de </a:t>
+            </a:r>
+            <a:r>
+              <a:rPr lang="en-US" sz="1300">
+                <a:solidFill>
+                  <a:srgbClr val="191C1E"/>
+                </a:solidFill>
+                <a:latin typeface="Plus Jakarta Sans"/>
+                <a:ea typeface="Plus Jakarta Sans"/>
+                <a:cs typeface="Plus Jakarta Sans"/>
+                <a:sym typeface="Plus Jakarta Sans"/>
+              </a:rPr>
+              <a:t>lembrar </a:t>
+            </a:r>
+            <a:r>
+              <a:rPr b="0" i="0" lang="en-US" spc="0" sz="1300" u="none" cap="none" strike="noStrike">
+                <a:solidFill>
+                  <a:srgbClr val="191C1E"/>
+                </a:solidFill>
+                <a:latin typeface="Plus Jakarta Sans"/>
+                <a:ea typeface="Plus Jakarta Sans"/>
+                <a:cs typeface="Plus Jakarta Sans"/>
+                <a:sym typeface="Plus Jakarta Sans"/>
+              </a:rPr>
+              <a:t>ou calcular</a:t>
+            </a:r>
+            <a:endParaRPr b="0" i="0" spc="0" sz="1400" u="none" cap="none" strike="noStrike">
+              <a:solidFill>
+                <a:srgbClr val="000000"/>
+              </a:solidFill>
+              <a:latin typeface="Arial"/>
+              <a:ea typeface="Arial"/>
+              <a:cs typeface="Arial"/>
+              <a:sym typeface="Arial"/>
+            </a:endParaRPr>
+          </a:p>
+        </p:txBody>
+      </p:sp>
+      <p:sp>
+        <p:nvSpPr>
+          <p:cNvPr id="230" name="Google Shape;230;p7"/>
+          <p:cNvSpPr txBox="1"/>
+          <p:nvPr/>
+        </p:nvSpPr>
+        <p:spPr>
+          <a:xfrm>
+            <a:off x="8778240" y="2743200"/>
+            <a:ext cx="2423160" cy="749808"/>
+          </a:xfrm>
+          <a:prstGeom prst="rect">
+            <a:avLst/>
+          </a:prstGeom>
+          <a:noFill/>
+          <a:ln>
+            <a:noFill/>
+          </a:ln>
+        </p:spPr>
+        <p:txBody>
+          <a:bodyPr anchorCtr="0" anchor="ctr" bIns="0" lIns="0" spcFirstLastPara="1" rIns="0" wrap="square" tIns="0">
+            <a:spAutoFit/>
+          </a:bodyPr>
+          <a:lstStyle/>
+          <a:p>
+            <a:pPr indent="0" lvl="0" marL="0" marR="0" rtl="0" algn="l">
+              <a:lnSpc>
+                <a:spcPct val="105000"/>
+              </a:lnSpc>
+              <a:spcBef>
+                <a:spcPts val="0"/>
+              </a:spcBef>
+              <a:spcAft>
+                <a:spcPts val="0"/>
+              </a:spcAft>
+              <a:buClr>
+                <a:srgbClr val="000000"/>
+              </a:buClr>
+              <a:buSzPts val="1300"/>
+              <a:buFont typeface="Arial"/>
+              <a:buNone/>
+            </a:pPr>
+            <a:r>
+              <a:rPr b="1" i="0" lang="en-US" spc="0" sz="1300" u="none" cap="none" strike="noStrike">
+                <a:solidFill>
+                  <a:srgbClr val="0A3F8F"/>
+                </a:solidFill>
+                <a:latin typeface="Plus Jakarta Sans"/>
+                <a:ea typeface="Plus Jakarta Sans"/>
+                <a:cs typeface="Plus Jakarta Sans"/>
+                <a:sym typeface="Plus Jakarta Sans"/>
+              </a:rPr>
+              <a:t>o app calcula estoque e horários</a:t>
+            </a:r>
+            <a:endParaRPr b="0" i="0" spc="0" sz="1400" u="none" cap="none" strike="noStrike">
+              <a:solidFill>
+                <a:srgbClr val="000000"/>
+              </a:solidFill>
+              <a:latin typeface="Arial"/>
+              <a:ea typeface="Arial"/>
+              <a:cs typeface="Arial"/>
+              <a:sym typeface="Arial"/>
+            </a:endParaRPr>
+          </a:p>
+        </p:txBody>
+      </p:sp>
+      <p:sp>
+        <p:nvSpPr>
+          <p:cNvPr id="231" name="Google Shape;231;p7"/>
+          <p:cNvSpPr/>
+          <p:nvPr/>
+        </p:nvSpPr>
+        <p:spPr>
+          <a:xfrm>
+            <a:off x="685800" y="3584448"/>
+            <a:ext cx="10820095" cy="749808"/>
+          </a:xfrm>
+          <a:prstGeom prst="roundRect">
+            <a:avLst>
+              <a:gd fmla="val 17073" name="adj"/>
+            </a:avLst>
+          </a:prstGeom>
+          <a:solidFill>
+            <a:srgbClr val="FFFFFF"/>
+          </a:solidFill>
+          <a:ln>
+            <a:noFill/>
+          </a:ln>
+        </p:spPr>
+        <p:txBody>
+          <a:bodyPr anchorCtr="0" anchor="ctr" bIns="45700" lIns="91425" spcFirstLastPara="1" rIns="91425" wrap="square" tIns="45700">
+            <a:noAutofit/>
+          </a:bodyPr>
+          <a:lstStyle/>
+          <a:p>
+            <a:pPr indent="0" lvl="0" marL="0" marR="0" rtl="0" algn="ctr">
+              <a:lnSpc>
+                <a:spcPct val="100000"/>
+              </a:lnSpc>
+              <a:spcBef>
+                <a:spcPts val="0"/>
+              </a:spcBef>
+              <a:spcAft>
+                <a:spcPts val="0"/>
+              </a:spcAft>
+              <a:buClr>
+                <a:srgbClr val="000000"/>
+              </a:buClr>
+              <a:buSzPts val="1400"/>
+              <a:buFont typeface="Arial"/>
+              <a:buNone/>
+            </a:pPr>
+            <a:r>
+              <a:t/>
+            </a:r>
+            <a:endParaRPr b="0" i="0" spc="0" sz="1400" u="none" cap="none" strike="noStrike">
+              <a:solidFill>
+                <a:srgbClr val="000000"/>
+              </a:solidFill>
+              <a:latin typeface="Arial"/>
+              <a:ea typeface="Arial"/>
+              <a:cs typeface="Arial"/>
+              <a:sym typeface="Arial"/>
+            </a:endParaRPr>
+          </a:p>
+        </p:txBody>
+      </p:sp>
+      <p:sp>
+        <p:nvSpPr>
+          <p:cNvPr id="232" name="Google Shape;232;p7"/>
+          <p:cNvSpPr/>
+          <p:nvPr/>
+        </p:nvSpPr>
+        <p:spPr>
+          <a:xfrm>
+            <a:off x="8549640" y="3584448"/>
+            <a:ext cx="2956255" cy="749808"/>
+          </a:xfrm>
+          <a:prstGeom prst="roundRect">
+            <a:avLst>
+              <a:gd fmla="val 17073" name="adj"/>
+            </a:avLst>
+          </a:prstGeom>
+          <a:solidFill>
+            <a:srgbClr val="EAF1FE"/>
+          </a:solidFill>
+          <a:ln>
+            <a:noFill/>
+          </a:ln>
+        </p:spPr>
+        <p:txBody>
+          <a:bodyPr anchorCtr="0" anchor="ctr" bIns="45700" lIns="91425" spcFirstLastPara="1" rIns="91425" wrap="square" tIns="45700">
+            <a:noAutofit/>
+          </a:bodyPr>
+          <a:lstStyle/>
+          <a:p>
+            <a:pPr indent="0" lvl="0" marL="0" marR="0" rtl="0" algn="ctr">
+              <a:lnSpc>
+                <a:spcPct val="100000"/>
+              </a:lnSpc>
+              <a:spcBef>
+                <a:spcPts val="0"/>
+              </a:spcBef>
+              <a:spcAft>
+                <a:spcPts val="0"/>
+              </a:spcAft>
+              <a:buClr>
+                <a:srgbClr val="000000"/>
+              </a:buClr>
+              <a:buSzPts val="1400"/>
+              <a:buFont typeface="Arial"/>
+              <a:buNone/>
+            </a:pPr>
+            <a:r>
+              <a:t/>
+            </a:r>
+            <a:endParaRPr b="0" i="0" spc="0" sz="1400" u="none" cap="none" strike="noStrike">
+              <a:solidFill>
+                <a:srgbClr val="000000"/>
+              </a:solidFill>
+              <a:latin typeface="Arial"/>
+              <a:ea typeface="Arial"/>
+              <a:cs typeface="Arial"/>
+              <a:sym typeface="Arial"/>
+            </a:endParaRPr>
+          </a:p>
+        </p:txBody>
+      </p:sp>
+      <p:sp>
+        <p:nvSpPr>
+          <p:cNvPr id="233" name="Google Shape;233;p7"/>
+          <p:cNvSpPr txBox="1"/>
+          <p:nvPr/>
+        </p:nvSpPr>
+        <p:spPr>
+          <a:xfrm>
+            <a:off x="1005840" y="3584448"/>
+            <a:ext cx="3017520" cy="749808"/>
+          </a:xfrm>
+          <a:prstGeom prst="rect">
+            <a:avLst/>
+          </a:prstGeom>
+          <a:noFill/>
+          <a:ln>
+            <a:noFill/>
+          </a:ln>
+        </p:spPr>
+        <p:txBody>
+          <a:bodyPr anchorCtr="0" anchor="ctr" bIns="0" lIns="0" spcFirstLastPara="1" rIns="0" wrap="square" tIns="0">
+            <a:spAutoFit/>
+          </a:bodyPr>
+          <a:lstStyle/>
+          <a:p>
+            <a:pPr indent="0" lvl="0" marL="0" marR="0" rtl="0" algn="l">
+              <a:lnSpc>
+                <a:spcPct val="100000"/>
+              </a:lnSpc>
+              <a:spcBef>
+                <a:spcPts val="0"/>
+              </a:spcBef>
+              <a:spcAft>
+                <a:spcPts val="0"/>
+              </a:spcAft>
+              <a:buClr>
+                <a:srgbClr val="000000"/>
+              </a:buClr>
+              <a:buSzPts val="1500"/>
+              <a:buFont typeface="Arial"/>
+              <a:buNone/>
+            </a:pPr>
+            <a:r>
+              <a:rPr b="1" i="0" lang="en-US" spc="0" sz="1500" u="none" cap="none" strike="noStrike">
+                <a:solidFill>
+                  <a:srgbClr val="191C1E"/>
+                </a:solidFill>
+                <a:latin typeface="Plus Jakarta Sans"/>
+                <a:ea typeface="Plus Jakarta Sans"/>
+                <a:cs typeface="Plus Jakarta Sans"/>
+                <a:sym typeface="Plus Jakarta Sans"/>
+              </a:rPr>
+              <a:t>Fonte única de verdade</a:t>
+            </a:r>
+            <a:endParaRPr b="0" i="0" spc="0" sz="1400" u="none" cap="none" strike="noStrike">
+              <a:solidFill>
+                <a:srgbClr val="000000"/>
+              </a:solidFill>
+              <a:latin typeface="Arial"/>
+              <a:ea typeface="Arial"/>
+              <a:cs typeface="Arial"/>
+              <a:sym typeface="Arial"/>
+            </a:endParaRPr>
+          </a:p>
+          <a:p>
+            <a:pPr indent="0" lvl="0" marL="0" marR="0" rtl="0" algn="l">
+              <a:lnSpc>
+                <a:spcPct val="100000"/>
+              </a:lnSpc>
+              <a:spcBef>
+                <a:spcPts val="100"/>
+              </a:spcBef>
+              <a:spcAft>
+                <a:spcPts val="0"/>
+              </a:spcAft>
+              <a:buClr>
+                <a:srgbClr val="000000"/>
+              </a:buClr>
+              <a:buSzPts val="1000"/>
+              <a:buFont typeface="Arial"/>
+              <a:buNone/>
+            </a:pPr>
+            <a:r>
+              <a:rPr b="0" i="0" lang="en-US" spc="0" sz="1000" u="none" cap="none" strike="noStrike">
+                <a:solidFill>
+                  <a:srgbClr val="545F73"/>
+                </a:solidFill>
+                <a:latin typeface="Plus Jakarta Sans"/>
+                <a:ea typeface="Plus Jakarta Sans"/>
+                <a:cs typeface="Plus Jakarta Sans"/>
+                <a:sym typeface="Plus Jakarta Sans"/>
+              </a:rPr>
+              <a:t>Loshin, 2010</a:t>
+            </a:r>
+            <a:endParaRPr b="0" i="0" spc="0" sz="1400" u="none" cap="none" strike="noStrike">
+              <a:solidFill>
+                <a:srgbClr val="000000"/>
+              </a:solidFill>
+              <a:latin typeface="Arial"/>
+              <a:ea typeface="Arial"/>
+              <a:cs typeface="Arial"/>
+              <a:sym typeface="Arial"/>
+            </a:endParaRPr>
+          </a:p>
+        </p:txBody>
+      </p:sp>
+      <p:sp>
+        <p:nvSpPr>
+          <p:cNvPr id="234" name="Google Shape;234;p7"/>
+          <p:cNvSpPr txBox="1"/>
+          <p:nvPr/>
+        </p:nvSpPr>
+        <p:spPr>
+          <a:xfrm>
+            <a:off x="4320605" y="3754298"/>
+            <a:ext cx="4160400" cy="410100"/>
+          </a:xfrm>
+          <a:prstGeom prst="rect">
+            <a:avLst/>
+          </a:prstGeom>
+          <a:noFill/>
+          <a:ln>
+            <a:noFill/>
+          </a:ln>
+        </p:spPr>
+        <p:txBody>
+          <a:bodyPr anchorCtr="0" anchor="ctr" bIns="0" lIns="0" spcFirstLastPara="1" rIns="0" wrap="square" tIns="0">
+            <a:spAutoFit/>
+          </a:bodyPr>
+          <a:lstStyle/>
+          <a:p>
+            <a:pPr indent="0" lvl="0" marL="0" marR="0" rtl="0" algn="l">
+              <a:lnSpc>
+                <a:spcPct val="105000"/>
+              </a:lnSpc>
+              <a:spcBef>
+                <a:spcPts val="0"/>
+              </a:spcBef>
+              <a:spcAft>
+                <a:spcPts val="0"/>
+              </a:spcAft>
+              <a:buClr>
+                <a:srgbClr val="000000"/>
+              </a:buClr>
+              <a:buSzPts val="1300"/>
+              <a:buFont typeface="Arial"/>
+              <a:buNone/>
+            </a:pPr>
+            <a:r>
+              <a:rPr b="0" i="0" lang="en-US" spc="0" sz="1300" u="none" cap="none" strike="noStrike">
+                <a:solidFill>
+                  <a:srgbClr val="191C1E"/>
+                </a:solidFill>
+                <a:latin typeface="Plus Jakarta Sans"/>
+                <a:ea typeface="Plus Jakarta Sans"/>
+                <a:cs typeface="Plus Jakarta Sans"/>
+                <a:sym typeface="Plus Jakarta Sans"/>
+              </a:rPr>
+              <a:t>um só lugar com a versão certa da informação,</a:t>
             </a:r>
             <a:endParaRPr b="0" i="0" spc="0" sz="1300" u="none" cap="none" strike="noStrike">
               <a:solidFill>
@@ -37059,367 +37239,7 @@
                 <a:cs typeface="Plus Jakarta Sans"/>
                 <a:sym typeface="Plus Jakarta Sans"/>
               </a:rPr>
-              <a:t>teria de guardar ou calcular</a:t>
-            </a:r>
-            <a:endParaRPr b="0" i="0" spc="0" sz="1400" u="none" cap="none" strike="noStrike">
-              <a:solidFill>
-                <a:srgbClr val="000000"/>
-              </a:solidFill>
-              <a:latin typeface="Arial"/>
-              <a:ea typeface="Arial"/>
-              <a:cs typeface="Arial"/>
-              <a:sym typeface="Arial"/>
-            </a:endParaRPr>
-          </a:p>
-        </p:txBody>
-      </p:sp>
-      <p:sp>
-        <p:nvSpPr>
-          <p:cNvPr id="230" name="Google Shape;230;p7"/>
-          <p:cNvSpPr txBox="1"/>
-          <p:nvPr/>
-        </p:nvSpPr>
-        <p:spPr>
-          <a:xfrm>
-            <a:off x="8778240" y="2743200"/>
-            <a:ext cx="2423160" cy="749808"/>
-          </a:xfrm>
-          <a:prstGeom prst="rect">
-            <a:avLst/>
-          </a:prstGeom>
-          <a:noFill/>
-          <a:ln>
-            <a:noFill/>
-          </a:ln>
-        </p:spPr>
-        <p:txBody>
-          <a:bodyPr anchorCtr="0" anchor="ctr" bIns="0" lIns="0" spcFirstLastPara="1" rIns="0" wrap="square" tIns="0">
-            <a:spAutoFit/>
-          </a:bodyPr>
-          <a:lstStyle/>
-          <a:p>
-            <a:pPr indent="0" lvl="0" marL="0" marR="0" rtl="0" algn="l">
-              <a:lnSpc>
-                <a:spcPct val="105000"/>
-              </a:lnSpc>
-              <a:spcBef>
-                <a:spcPts val="0"/>
-              </a:spcBef>
-              <a:spcAft>
-                <a:spcPts val="0"/>
-              </a:spcAft>
-              <a:buClr>
-                <a:srgbClr val="000000"/>
-              </a:buClr>
-              <a:buSzPts val="1300"/>
-              <a:buFont typeface="Arial"/>
-              <a:buNone/>
-            </a:pPr>
-            <a:r>
-              <a:rPr b="1" i="0" lang="en-US" spc="0" sz="1300" u="none" cap="none" strike="noStrike">
-                <a:solidFill>
-                  <a:srgbClr val="0A3F8F"/>
-                </a:solidFill>
-                <a:latin typeface="Plus Jakarta Sans"/>
-                <a:ea typeface="Plus Jakarta Sans"/>
-                <a:cs typeface="Plus Jakarta Sans"/>
-                <a:sym typeface="Plus Jakarta Sans"/>
-              </a:rPr>
-              <a:t>o app calcula estoque e horários</a:t>
-            </a:r>
-            <a:endParaRPr b="0" i="0" spc="0" sz="1400" u="none" cap="none" strike="noStrike">
-              <a:solidFill>
-                <a:srgbClr val="000000"/>
-              </a:solidFill>
-              <a:latin typeface="Arial"/>
-              <a:ea typeface="Arial"/>
-              <a:cs typeface="Arial"/>
-              <a:sym typeface="Arial"/>
-            </a:endParaRPr>
-          </a:p>
-        </p:txBody>
-      </p:sp>
-      <p:sp>
-        <p:nvSpPr>
-          <p:cNvPr id="231" name="Google Shape;231;p7"/>
-          <p:cNvSpPr/>
-          <p:nvPr/>
-        </p:nvSpPr>
-        <p:spPr>
-          <a:xfrm>
-            <a:off x="685800" y="3584448"/>
-            <a:ext cx="10820095" cy="749808"/>
-          </a:xfrm>
-          <a:prstGeom prst="roundRect">
-            <a:avLst>
-              <a:gd fmla="val 17073" name="adj"/>
-            </a:avLst>
-          </a:prstGeom>
-          <a:solidFill>
-            <a:srgbClr val="FFFFFF"/>
-          </a:solidFill>
-          <a:ln>
-            <a:noFill/>
-          </a:ln>
-        </p:spPr>
-        <p:txBody>
-          <a:bodyPr anchorCtr="0" anchor="ctr" bIns="45700" lIns="91425" spcFirstLastPara="1" rIns="91425" wrap="square" tIns="45700">
-            <a:noAutofit/>
-          </a:bodyPr>
-          <a:lstStyle/>
-          <a:p>
-            <a:pPr indent="0" lvl="0" marL="0" marR="0" rtl="0" algn="ctr">
-              <a:lnSpc>
-                <a:spcPct val="100000"/>
-              </a:lnSpc>
-              <a:spcBef>
-                <a:spcPts val="0"/>
-              </a:spcBef>
-              <a:spcAft>
-                <a:spcPts val="0"/>
-              </a:spcAft>
-              <a:buClr>
-                <a:srgbClr val="000000"/>
-              </a:buClr>
-              <a:buSzPts val="1400"/>
-              <a:buFont typeface="Arial"/>
-              <a:buNone/>
-            </a:pPr>
-            <a:r>
-              <a:t/>
-            </a:r>
-            <a:endParaRPr b="0" i="0" spc="0" sz="1400" u="none" cap="none" strike="noStrike">
-              <a:solidFill>
-                <a:srgbClr val="000000"/>
-              </a:solidFill>
-              <a:latin typeface="Arial"/>
-              <a:ea typeface="Arial"/>
-              <a:cs typeface="Arial"/>
-              <a:sym typeface="Arial"/>
-            </a:endParaRPr>
-          </a:p>
-        </p:txBody>
-      </p:sp>
-      <p:sp>
-        <p:nvSpPr>
-          <p:cNvPr id="232" name="Google Shape;232;p7"/>
-          <p:cNvSpPr/>
-          <p:nvPr/>
-        </p:nvSpPr>
-        <p:spPr>
-          <a:xfrm>
-            <a:off x="8549640" y="3584448"/>
-            <a:ext cx="2956255" cy="749808"/>
-          </a:xfrm>
-          <a:prstGeom prst="roundRect">
-            <a:avLst>
-              <a:gd fmla="val 17073" name="adj"/>
-            </a:avLst>
-          </a:prstGeom>
-          <a:solidFill>
-            <a:srgbClr val="EAF1FE"/>
-          </a:solidFill>
-          <a:ln>
-            <a:noFill/>
-          </a:ln>
-        </p:spPr>
-        <p:txBody>
-          <a:bodyPr anchorCtr="0" anchor="ctr" bIns="45700" lIns="91425" spcFirstLastPara="1" rIns="91425" wrap="square" tIns="45700">
-            <a:noAutofit/>
-          </a:bodyPr>
-          <a:lstStyle/>
-          <a:p>
-            <a:pPr indent="0" lvl="0" marL="0" marR="0" rtl="0" algn="ctr">
-              <a:lnSpc>
-                <a:spcPct val="100000"/>
-              </a:lnSpc>
-              <a:spcBef>
-                <a:spcPts val="0"/>
-              </a:spcBef>
-              <a:spcAft>
-                <a:spcPts val="0"/>
-              </a:spcAft>
-              <a:buClr>
-                <a:srgbClr val="000000"/>
-              </a:buClr>
-              <a:buSzPts val="1400"/>
-              <a:buFont typeface="Arial"/>
-              <a:buNone/>
-            </a:pPr>
-            <a:r>
-              <a:t/>
-            </a:r>
-            <a:endParaRPr b="0" i="0" spc="0" sz="1400" u="none" cap="none" strike="noStrike">
-              <a:solidFill>
-                <a:srgbClr val="000000"/>
-              </a:solidFill>
-              <a:latin typeface="Arial"/>
-              <a:ea typeface="Arial"/>
-              <a:cs typeface="Arial"/>
-              <a:sym typeface="Arial"/>
-            </a:endParaRPr>
-          </a:p>
-        </p:txBody>
-      </p:sp>
-      <p:sp>
-        <p:nvSpPr>
-          <p:cNvPr id="233" name="Google Shape;233;p7"/>
-          <p:cNvSpPr txBox="1"/>
-          <p:nvPr/>
-        </p:nvSpPr>
-        <p:spPr>
-          <a:xfrm>
-            <a:off x="1005840" y="3584448"/>
-            <a:ext cx="3017520" cy="749808"/>
-          </a:xfrm>
-          <a:prstGeom prst="rect">
-            <a:avLst/>
-          </a:prstGeom>
-          <a:noFill/>
-          <a:ln>
-            <a:noFill/>
-          </a:ln>
-        </p:spPr>
-        <p:txBody>
-          <a:bodyPr anchorCtr="0" anchor="ctr" bIns="0" lIns="0" spcFirstLastPara="1" rIns="0" wrap="square" tIns="0">
-            <a:spAutoFit/>
-          </a:bodyPr>
-          <a:lstStyle/>
-          <a:p>
-            <a:pPr indent="0" lvl="0" marL="0" marR="0" rtl="0" algn="l">
-              <a:lnSpc>
-                <a:spcPct val="100000"/>
-              </a:lnSpc>
-              <a:spcBef>
-                <a:spcPts val="0"/>
-              </a:spcBef>
-              <a:spcAft>
-                <a:spcPts val="0"/>
-              </a:spcAft>
-              <a:buClr>
-                <a:srgbClr val="000000"/>
-              </a:buClr>
-              <a:buSzPts val="1500"/>
-              <a:buFont typeface="Arial"/>
-              <a:buNone/>
-            </a:pPr>
-            <a:r>
-              <a:rPr b="1" i="0" lang="en-US" spc="0" sz="1500" u="none" cap="none" strike="noStrike">
-                <a:solidFill>
-                  <a:srgbClr val="191C1E"/>
-                </a:solidFill>
-                <a:latin typeface="Plus Jakarta Sans"/>
-                <a:ea typeface="Plus Jakarta Sans"/>
-                <a:cs typeface="Plus Jakarta Sans"/>
-                <a:sym typeface="Plus Jakarta Sans"/>
-              </a:rPr>
-              <a:t>Fonte única de verdade</a:t>
-            </a:r>
-            <a:endParaRPr b="0" i="0" spc="0" sz="1400" u="none" cap="none" strike="noStrike">
-              <a:solidFill>
-                <a:srgbClr val="000000"/>
-              </a:solidFill>
-              <a:latin typeface="Arial"/>
-              <a:ea typeface="Arial"/>
-              <a:cs typeface="Arial"/>
-              <a:sym typeface="Arial"/>
-            </a:endParaRPr>
-          </a:p>
-          <a:p>
-            <a:pPr indent="0" lvl="0" marL="0" marR="0" rtl="0" algn="l">
-              <a:lnSpc>
-                <a:spcPct val="100000"/>
-              </a:lnSpc>
-              <a:spcBef>
-                <a:spcPts val="100"/>
-              </a:spcBef>
-              <a:spcAft>
-                <a:spcPts val="0"/>
-              </a:spcAft>
-              <a:buClr>
-                <a:srgbClr val="000000"/>
-              </a:buClr>
-              <a:buSzPts val="1000"/>
-              <a:buFont typeface="Arial"/>
-              <a:buNone/>
-            </a:pPr>
-            <a:r>
-              <a:rPr b="0" i="0" lang="en-US" spc="0" sz="1000" u="none" cap="none" strike="noStrike">
-                <a:solidFill>
-                  <a:srgbClr val="545F73"/>
-                </a:solidFill>
-                <a:latin typeface="Plus Jakarta Sans"/>
-                <a:ea typeface="Plus Jakarta Sans"/>
-                <a:cs typeface="Plus Jakarta Sans"/>
-                <a:sym typeface="Plus Jakarta Sans"/>
-              </a:rPr>
-              <a:t>Loshin, 2010</a:t>
-            </a:r>
-            <a:endParaRPr b="0" i="0" spc="0" sz="1400" u="none" cap="none" strike="noStrike">
-              <a:solidFill>
-                <a:srgbClr val="000000"/>
-              </a:solidFill>
-              <a:latin typeface="Arial"/>
-              <a:ea typeface="Arial"/>
-              <a:cs typeface="Arial"/>
-              <a:sym typeface="Arial"/>
-            </a:endParaRPr>
-          </a:p>
-        </p:txBody>
-      </p:sp>
-      <p:sp>
-        <p:nvSpPr>
-          <p:cNvPr id="234" name="Google Shape;234;p7"/>
-          <p:cNvSpPr txBox="1"/>
-          <p:nvPr/>
-        </p:nvSpPr>
-        <p:spPr>
-          <a:xfrm>
-            <a:off x="4320605" y="3754298"/>
-            <a:ext cx="4160400" cy="410100"/>
-          </a:xfrm>
-          <a:prstGeom prst="rect">
-            <a:avLst/>
-          </a:prstGeom>
-          <a:noFill/>
-          <a:ln>
-            <a:noFill/>
-          </a:ln>
-        </p:spPr>
-        <p:txBody>
-          <a:bodyPr anchorCtr="0" anchor="ctr" bIns="0" lIns="0" spcFirstLastPara="1" rIns="0" wrap="square" tIns="0">
-            <a:spAutoFit/>
-          </a:bodyPr>
-          <a:lstStyle/>
-          <a:p>
-            <a:pPr indent="0" lvl="0" marL="0" marR="0" rtl="0" algn="l">
-              <a:lnSpc>
-                <a:spcPct val="105000"/>
-              </a:lnSpc>
-              <a:spcBef>
-                <a:spcPts val="0"/>
-              </a:spcBef>
-              <a:spcAft>
-                <a:spcPts val="0"/>
-              </a:spcAft>
-              <a:buClr>
-                <a:srgbClr val="000000"/>
-              </a:buClr>
-              <a:buSzPts val="1300"/>
-              <a:buFont typeface="Arial"/>
-              <a:buNone/>
-            </a:pPr>
-            <a:r>
-              <a:rPr b="0" i="0" lang="en-US" spc="0" sz="1300" u="none" cap="none" strike="noStrike">
-                <a:solidFill>
-                  <a:srgbClr val="191C1E"/>
-                </a:solidFill>
-                <a:latin typeface="Plus Jakarta Sans"/>
-                <a:ea typeface="Plus Jakarta Sans"/>
-                <a:cs typeface="Plus Jakarta Sans"/>
-                <a:sym typeface="Plus Jakarta Sans"/>
-              </a:rPr>
-              <a:t>um só lugar com a versão certa da informação,</a:t>
+              <a:t>centralização dos dados</a:t>
             </a:r>
             <a:endParaRPr b="0" i="0" spc="0" sz="1300" u="none" cap="none" strike="noStrike">
               <a:solidFill>
@@ -37431,6 +37251,32 @@
               <a:sym typeface="Plus Jakarta Sans"/>
             </a:endParaRPr>
           </a:p>
+        </p:txBody>
+      </p:sp>
+      <p:sp>
+        <p:nvSpPr>
+          <p:cNvPr id="235" name="Google Shape;235;p7"/>
+          <p:cNvSpPr txBox="1"/>
+          <p:nvPr/>
+        </p:nvSpPr>
+        <p:spPr>
+          <a:xfrm>
+            <a:off x="8778240" y="3584448"/>
+            <a:ext cx="2423160" cy="749808"/>
+          </a:xfrm>
+          <a:prstGeom prst="rect">
+            <a:avLst/>
+          </a:prstGeom>
+          <a:noFill/>
+          <a:ln>
+            <a:noFill/>
+          </a:ln>
+        </p:spPr>
+        <p:txBody>
+          <a:bodyPr anchorCtr="0" anchor="ctr" bIns="0" lIns="0" spcFirstLastPara="1" rIns="0" wrap="square" tIns="0">
+            <a:spAutoFit/>
+          </a:bodyPr>
+          <a:lstStyle/>
           <a:p>
             <a:pPr indent="0" lvl="0" marL="0" marR="0" rtl="0" algn="l">
               <a:lnSpc>
@@ -37450,16 +37296,670 @@
               <a:buNone/>
             </a:pPr>
             <a:r>
-              <a:rPr b="0" i="0" lang="en-US" spc="0" sz="1300" u="none" cap="none" strike="noStrike">
-                <a:solidFill>
-                  <a:srgbClr val="191C1E"/>
+              <a:rPr b="1" i="0" lang="en-US" spc="0" sz="1300" u="none" cap="none" strike="noStrike">
+                <a:solidFill>
+                  <a:srgbClr val="0A3F8F"/>
                 </a:solidFill>
                 <a:latin typeface="Plus Jakarta Sans"/>
                 <a:ea typeface="Plus Jakarta Sans"/>
                 <a:cs typeface="Plus Jakarta Sans"/>
                 <a:sym typeface="Plus Jakarta Sans"/>
               </a:rPr>
-              <a:t>centralização dos dados</a:t>
+              <a:t>remédios, estoque e consultas juntos</a:t>
+            </a:r>
+            <a:endParaRPr b="0" i="0" spc="0" sz="1400" u="none" cap="none" strike="noStrike">
+              <a:solidFill>
+                <a:srgbClr val="000000"/>
+              </a:solidFill>
+              <a:latin typeface="Arial"/>
+              <a:ea typeface="Arial"/>
+              <a:cs typeface="Arial"/>
+              <a:sym typeface="Arial"/>
+            </a:endParaRPr>
+          </a:p>
+        </p:txBody>
+      </p:sp>
+      <p:sp>
+        <p:nvSpPr>
+          <p:cNvPr id="236" name="Google Shape;236;p7"/>
+          <p:cNvSpPr/>
+          <p:nvPr/>
+        </p:nvSpPr>
+        <p:spPr>
+          <a:xfrm>
+            <a:off x="685800" y="4425696"/>
+            <a:ext cx="10820095" cy="749808"/>
+          </a:xfrm>
+          <a:prstGeom prst="roundRect">
+            <a:avLst>
+              <a:gd fmla="val 17073" name="adj"/>
+            </a:avLst>
+          </a:prstGeom>
+          <a:solidFill>
+            <a:srgbClr val="FFFFFF"/>
+          </a:solidFill>
+          <a:ln>
+            <a:noFill/>
+          </a:ln>
+        </p:spPr>
+        <p:txBody>
+          <a:bodyPr anchorCtr="0" anchor="ctr" bIns="45700" lIns="91425" spcFirstLastPara="1" rIns="91425" wrap="square" tIns="45700">
+            <a:noAutofit/>
+          </a:bodyPr>
+          <a:lstStyle/>
+          <a:p>
+            <a:pPr indent="0" lvl="0" marL="0" marR="0" rtl="0" algn="ctr">
+              <a:lnSpc>
+                <a:spcPct val="100000"/>
+              </a:lnSpc>
+              <a:spcBef>
+                <a:spcPts val="0"/>
+              </a:spcBef>
+              <a:spcAft>
+                <a:spcPts val="0"/>
+              </a:spcAft>
+              <a:buClr>
+                <a:srgbClr val="000000"/>
+              </a:buClr>
+              <a:buSzPts val="1400"/>
+              <a:buFont typeface="Arial"/>
+              <a:buNone/>
+            </a:pPr>
+            <a:r>
+              <a:t/>
+            </a:r>
+            <a:endParaRPr b="0" i="0" spc="0" sz="1400" u="none" cap="none" strike="noStrike">
+              <a:solidFill>
+                <a:srgbClr val="000000"/>
+              </a:solidFill>
+              <a:latin typeface="Arial"/>
+              <a:ea typeface="Arial"/>
+              <a:cs typeface="Arial"/>
+              <a:sym typeface="Arial"/>
+            </a:endParaRPr>
+          </a:p>
+        </p:txBody>
+      </p:sp>
+      <p:sp>
+        <p:nvSpPr>
+          <p:cNvPr id="237" name="Google Shape;237;p7"/>
+          <p:cNvSpPr/>
+          <p:nvPr/>
+        </p:nvSpPr>
+        <p:spPr>
+          <a:xfrm>
+            <a:off x="8549640" y="4425696"/>
+            <a:ext cx="2956255" cy="749808"/>
+          </a:xfrm>
+          <a:prstGeom prst="roundRect">
+            <a:avLst>
+              <a:gd fmla="val 17073" name="adj"/>
+            </a:avLst>
+          </a:prstGeom>
+          <a:solidFill>
+            <a:srgbClr val="EAF1FE"/>
+          </a:solidFill>
+          <a:ln>
+            <a:noFill/>
+          </a:ln>
+        </p:spPr>
+        <p:txBody>
+          <a:bodyPr anchorCtr="0" anchor="ctr" bIns="45700" lIns="91425" spcFirstLastPara="1" rIns="91425" wrap="square" tIns="45700">
+            <a:noAutofit/>
+          </a:bodyPr>
+          <a:lstStyle/>
+          <a:p>
+            <a:pPr indent="0" lvl="0" marL="0" marR="0" rtl="0" algn="ctr">
+              <a:lnSpc>
+                <a:spcPct val="100000"/>
+              </a:lnSpc>
+              <a:spcBef>
+                <a:spcPts val="0"/>
+              </a:spcBef>
+              <a:spcAft>
+                <a:spcPts val="0"/>
+              </a:spcAft>
+              <a:buClr>
+                <a:srgbClr val="000000"/>
+              </a:buClr>
+              <a:buSzPts val="1400"/>
+              <a:buFont typeface="Arial"/>
+              <a:buNone/>
+            </a:pPr>
+            <a:r>
+              <a:t/>
+            </a:r>
+            <a:endParaRPr b="0" i="0" spc="0" sz="1400" u="none" cap="none" strike="noStrike">
+              <a:solidFill>
+                <a:srgbClr val="000000"/>
+              </a:solidFill>
+              <a:latin typeface="Arial"/>
+              <a:ea typeface="Arial"/>
+              <a:cs typeface="Arial"/>
+              <a:sym typeface="Arial"/>
+            </a:endParaRPr>
+          </a:p>
+        </p:txBody>
+      </p:sp>
+      <p:sp>
+        <p:nvSpPr>
+          <p:cNvPr id="238" name="Google Shape;238;p7"/>
+          <p:cNvSpPr txBox="1"/>
+          <p:nvPr/>
+        </p:nvSpPr>
+        <p:spPr>
+          <a:xfrm>
+            <a:off x="1005840" y="4425696"/>
+            <a:ext cx="3017520" cy="749808"/>
+          </a:xfrm>
+          <a:prstGeom prst="rect">
+            <a:avLst/>
+          </a:prstGeom>
+          <a:noFill/>
+          <a:ln>
+            <a:noFill/>
+          </a:ln>
+        </p:spPr>
+        <p:txBody>
+          <a:bodyPr anchorCtr="0" anchor="ctr" bIns="0" lIns="0" spcFirstLastPara="1" rIns="0" wrap="square" tIns="0">
+            <a:spAutoFit/>
+          </a:bodyPr>
+          <a:lstStyle/>
+          <a:p>
+            <a:pPr indent="0" lvl="0" marL="0" marR="0" rtl="0" algn="l">
+              <a:lnSpc>
+                <a:spcPct val="100000"/>
+              </a:lnSpc>
+              <a:spcBef>
+                <a:spcPts val="0"/>
+              </a:spcBef>
+              <a:spcAft>
+                <a:spcPts val="0"/>
+              </a:spcAft>
+              <a:buClr>
+                <a:srgbClr val="000000"/>
+              </a:buClr>
+              <a:buSzPts val="1500"/>
+              <a:buFont typeface="Arial"/>
+              <a:buNone/>
+            </a:pPr>
+            <a:r>
+              <a:rPr b="1" i="0" lang="en-US" spc="0" sz="1500" u="none" cap="none" strike="noStrike">
+                <a:solidFill>
+                  <a:srgbClr val="191C1E"/>
+                </a:solidFill>
+                <a:latin typeface="Plus Jakarta Sans"/>
+                <a:ea typeface="Plus Jakarta Sans"/>
+                <a:cs typeface="Plus Jakarta Sans"/>
+                <a:sym typeface="Plus Jakarta Sans"/>
+              </a:rPr>
+              <a:t>Offline-first e Last-Write-Wins</a:t>
+            </a:r>
+            <a:endParaRPr b="0" i="0" spc="0" sz="1400" u="none" cap="none" strike="noStrike">
+              <a:solidFill>
+                <a:srgbClr val="000000"/>
+              </a:solidFill>
+              <a:latin typeface="Arial"/>
+              <a:ea typeface="Arial"/>
+              <a:cs typeface="Arial"/>
+              <a:sym typeface="Arial"/>
+            </a:endParaRPr>
+          </a:p>
+          <a:p>
+            <a:pPr indent="0" lvl="0" marL="0" marR="0" rtl="0" algn="l">
+              <a:lnSpc>
+                <a:spcPct val="100000"/>
+              </a:lnSpc>
+              <a:spcBef>
+                <a:spcPts val="100"/>
+              </a:spcBef>
+              <a:spcAft>
+                <a:spcPts val="0"/>
+              </a:spcAft>
+              <a:buClr>
+                <a:srgbClr val="000000"/>
+              </a:buClr>
+              <a:buSzPts val="1000"/>
+              <a:buFont typeface="Arial"/>
+              <a:buNone/>
+            </a:pPr>
+            <a:r>
+              <a:rPr b="0" i="0" lang="en-US" spc="0" sz="1000" u="none" cap="none" strike="noStrike">
+                <a:solidFill>
+                  <a:srgbClr val="545F73"/>
+                </a:solidFill>
+                <a:latin typeface="Plus Jakarta Sans"/>
+                <a:ea typeface="Plus Jakarta Sans"/>
+                <a:cs typeface="Plus Jakarta Sans"/>
+                <a:sym typeface="Plus Jakarta Sans"/>
+              </a:rPr>
+              <a:t>Allsopp, 2014; Kleppmann, 2017</a:t>
+            </a:r>
+            <a:endParaRPr b="0" i="0" spc="0" sz="1400" u="none" cap="none" strike="noStrike">
+              <a:solidFill>
+                <a:srgbClr val="000000"/>
+              </a:solidFill>
+              <a:latin typeface="Arial"/>
+              <a:ea typeface="Arial"/>
+              <a:cs typeface="Arial"/>
+              <a:sym typeface="Arial"/>
+            </a:endParaRPr>
+          </a:p>
+        </p:txBody>
+      </p:sp>
+      <p:sp>
+        <p:nvSpPr>
+          <p:cNvPr id="239" name="Google Shape;239;p7"/>
+          <p:cNvSpPr txBox="1"/>
+          <p:nvPr/>
+        </p:nvSpPr>
+        <p:spPr>
+          <a:xfrm>
+            <a:off x="4320605" y="4490396"/>
+            <a:ext cx="4160400" cy="620400"/>
+          </a:xfrm>
+          <a:prstGeom prst="rect">
+            <a:avLst/>
+          </a:prstGeom>
+          <a:noFill/>
+          <a:ln>
+            <a:noFill/>
+          </a:ln>
+        </p:spPr>
+        <p:txBody>
+          <a:bodyPr anchorCtr="0" anchor="ctr" bIns="0" lIns="0" spcFirstLastPara="1" rIns="0" wrap="square" tIns="0">
+            <a:spAutoFit/>
+          </a:bodyPr>
+          <a:lstStyle/>
+          <a:p>
+            <a:pPr indent="0" lvl="0" marL="0" marR="0" rtl="0" algn="l">
+              <a:lnSpc>
+                <a:spcPct val="105000"/>
+              </a:lnSpc>
+              <a:spcBef>
+                <a:spcPts val="0"/>
+              </a:spcBef>
+              <a:spcAft>
+                <a:spcPts val="0"/>
+              </a:spcAft>
+              <a:buClr>
+                <a:srgbClr val="000000"/>
+              </a:buClr>
+              <a:buSzPts val="1300"/>
+              <a:buFont typeface="Arial"/>
+              <a:buNone/>
+            </a:pPr>
+            <a:r>
+              <a:rPr b="0" i="0" lang="en-US" spc="0" sz="1300" u="none" cap="none" strike="noStrike">
+                <a:solidFill>
+                  <a:srgbClr val="191C1E"/>
+                </a:solidFill>
+                <a:latin typeface="Plus Jakarta Sans"/>
+                <a:ea typeface="Plus Jakarta Sans"/>
+                <a:cs typeface="Plus Jakarta Sans"/>
+                <a:sym typeface="Plus Jakarta Sans"/>
+              </a:rPr>
+              <a:t>funcionamento integral que independe de conexão, com possibilidade de sincronização dos dados em nuvem</a:t>
+            </a:r>
+            <a:endParaRPr b="0" i="0" spc="0" sz="1400" u="none" cap="none" strike="noStrike">
+              <a:solidFill>
+                <a:srgbClr val="000000"/>
+              </a:solidFill>
+              <a:latin typeface="Arial"/>
+              <a:ea typeface="Arial"/>
+              <a:cs typeface="Arial"/>
+              <a:sym typeface="Arial"/>
+            </a:endParaRPr>
+          </a:p>
+        </p:txBody>
+      </p:sp>
+      <p:sp>
+        <p:nvSpPr>
+          <p:cNvPr id="240" name="Google Shape;240;p7"/>
+          <p:cNvSpPr txBox="1"/>
+          <p:nvPr/>
+        </p:nvSpPr>
+        <p:spPr>
+          <a:xfrm>
+            <a:off x="8778240" y="4425696"/>
+            <a:ext cx="2423160" cy="749808"/>
+          </a:xfrm>
+          <a:prstGeom prst="rect">
+            <a:avLst/>
+          </a:prstGeom>
+          <a:noFill/>
+          <a:ln>
+            <a:noFill/>
+          </a:ln>
+        </p:spPr>
+        <p:txBody>
+          <a:bodyPr anchorCtr="0" anchor="ctr" bIns="0" lIns="0" spcFirstLastPara="1" rIns="0" wrap="square" tIns="0">
+            <a:spAutoFit/>
+          </a:bodyPr>
+          <a:lstStyle/>
+          <a:p>
+            <a:pPr indent="0" lvl="0" marL="0" marR="0" rtl="0" algn="l">
+              <a:lnSpc>
+                <a:spcPct val="105000"/>
+              </a:lnSpc>
+              <a:spcBef>
+                <a:spcPts val="0"/>
+              </a:spcBef>
+              <a:spcAft>
+                <a:spcPts val="0"/>
+              </a:spcAft>
+              <a:buClr>
+                <a:srgbClr val="000000"/>
+              </a:buClr>
+              <a:buSzPts val="1300"/>
+              <a:buFont typeface="Arial"/>
+              <a:buNone/>
+            </a:pPr>
+            <a:r>
+              <a:rPr b="1" i="0" lang="en-US" spc="0" sz="1300" u="none" cap="none" strike="noStrike">
+                <a:solidFill>
+                  <a:srgbClr val="0A3F8F"/>
+                </a:solidFill>
+                <a:latin typeface="Plus Jakarta Sans"/>
+                <a:ea typeface="Plus Jakarta Sans"/>
+                <a:cs typeface="Plus Jakarta Sans"/>
+                <a:sym typeface="Plus Jakarta Sans"/>
+              </a:rPr>
+              <a:t>grava no aparelho e sincroniza depois</a:t>
+            </a:r>
+            <a:endParaRPr b="0" i="0" spc="0" sz="1400" u="none" cap="none" strike="noStrike">
+              <a:solidFill>
+                <a:srgbClr val="000000"/>
+              </a:solidFill>
+              <a:latin typeface="Arial"/>
+              <a:ea typeface="Arial"/>
+              <a:cs typeface="Arial"/>
+              <a:sym typeface="Arial"/>
+            </a:endParaRPr>
+          </a:p>
+        </p:txBody>
+      </p:sp>
+      <p:sp>
+        <p:nvSpPr>
+          <p:cNvPr id="241" name="Google Shape;241;p7"/>
+          <p:cNvSpPr/>
+          <p:nvPr/>
+        </p:nvSpPr>
+        <p:spPr>
+          <a:xfrm>
+            <a:off x="685800" y="5266944"/>
+            <a:ext cx="10820095" cy="749808"/>
+          </a:xfrm>
+          <a:prstGeom prst="roundRect">
+            <a:avLst>
+              <a:gd fmla="val 17073" name="adj"/>
+            </a:avLst>
+          </a:prstGeom>
+          <a:solidFill>
+            <a:srgbClr val="FFFFFF"/>
+          </a:solidFill>
+          <a:ln>
+            <a:noFill/>
+          </a:ln>
+        </p:spPr>
+        <p:txBody>
+          <a:bodyPr anchorCtr="0" anchor="ctr" bIns="45700" lIns="91425" spcFirstLastPara="1" rIns="91425" wrap="square" tIns="45700">
+            <a:noAutofit/>
+          </a:bodyPr>
+          <a:lstStyle/>
+          <a:p>
+            <a:pPr indent="0" lvl="0" marL="0" marR="0" rtl="0" algn="ctr">
+              <a:lnSpc>
+                <a:spcPct val="100000"/>
+              </a:lnSpc>
+              <a:spcBef>
+                <a:spcPts val="0"/>
+              </a:spcBef>
+              <a:spcAft>
+                <a:spcPts val="0"/>
+              </a:spcAft>
+              <a:buClr>
+                <a:srgbClr val="000000"/>
+              </a:buClr>
+              <a:buSzPts val="1400"/>
+              <a:buFont typeface="Arial"/>
+              <a:buNone/>
+            </a:pPr>
+            <a:r>
+              <a:t/>
+            </a:r>
+            <a:endParaRPr b="0" i="0" spc="0" sz="1400" u="none" cap="none" strike="noStrike">
+              <a:solidFill>
+                <a:srgbClr val="000000"/>
+              </a:solidFill>
+              <a:latin typeface="Arial"/>
+              <a:ea typeface="Arial"/>
+              <a:cs typeface="Arial"/>
+              <a:sym typeface="Arial"/>
+            </a:endParaRPr>
+          </a:p>
+        </p:txBody>
+      </p:sp>
+      <p:sp>
+        <p:nvSpPr>
+          <p:cNvPr id="242" name="Google Shape;242;p7"/>
+          <p:cNvSpPr/>
+          <p:nvPr/>
+        </p:nvSpPr>
+        <p:spPr>
+          <a:xfrm>
+            <a:off x="8549640" y="5266944"/>
+            <a:ext cx="2956255" cy="749808"/>
+          </a:xfrm>
+          <a:prstGeom prst="roundRect">
+            <a:avLst>
+              <a:gd fmla="val 17073" name="adj"/>
+            </a:avLst>
+          </a:prstGeom>
+          <a:solidFill>
+            <a:srgbClr val="EAF1FE"/>
+          </a:solidFill>
+          <a:ln>
+            <a:noFill/>
+          </a:ln>
+        </p:spPr>
+        <p:txBody>
+          <a:bodyPr anchorCtr="0" anchor="ctr" bIns="45700" lIns="91425" spcFirstLastPara="1" rIns="91425" wrap="square" tIns="45700">
+            <a:noAutofit/>
+          </a:bodyPr>
+          <a:lstStyle/>
+          <a:p>
+            <a:pPr indent="0" lvl="0" marL="0" marR="0" rtl="0" algn="ctr">
+              <a:lnSpc>
+                <a:spcPct val="100000"/>
+              </a:lnSpc>
+              <a:spcBef>
+                <a:spcPts val="0"/>
+              </a:spcBef>
+              <a:spcAft>
+                <a:spcPts val="0"/>
+              </a:spcAft>
+              <a:buClr>
+                <a:srgbClr val="000000"/>
+              </a:buClr>
+              <a:buSzPts val="1400"/>
+              <a:buFont typeface="Arial"/>
+              <a:buNone/>
+            </a:pPr>
+            <a:r>
+              <a:t/>
+            </a:r>
+            <a:endParaRPr b="0" i="0" spc="0" sz="1400" u="none" cap="none" strike="noStrike">
+              <a:solidFill>
+                <a:srgbClr val="000000"/>
+              </a:solidFill>
+              <a:latin typeface="Arial"/>
+              <a:ea typeface="Arial"/>
+              <a:cs typeface="Arial"/>
+              <a:sym typeface="Arial"/>
+            </a:endParaRPr>
+          </a:p>
+        </p:txBody>
+      </p:sp>
+      <p:sp>
+        <p:nvSpPr>
+          <p:cNvPr id="243" name="Google Shape;243;p7"/>
+          <p:cNvSpPr txBox="1"/>
+          <p:nvPr/>
+        </p:nvSpPr>
+        <p:spPr>
+          <a:xfrm>
+            <a:off x="1005840" y="5266944"/>
+            <a:ext cx="3017520" cy="749808"/>
+          </a:xfrm>
+          <a:prstGeom prst="rect">
+            <a:avLst/>
+          </a:prstGeom>
+          <a:noFill/>
+          <a:ln>
+            <a:noFill/>
+          </a:ln>
+        </p:spPr>
+        <p:txBody>
+          <a:bodyPr anchorCtr="0" anchor="ctr" bIns="0" lIns="0" spcFirstLastPara="1" rIns="0" wrap="square" tIns="0">
+            <a:spAutoFit/>
+          </a:bodyPr>
+          <a:lstStyle/>
+          <a:p>
+            <a:pPr indent="0" lvl="0" marL="0" marR="0" rtl="0" algn="l">
+              <a:lnSpc>
+                <a:spcPct val="100000"/>
+              </a:lnSpc>
+              <a:spcBef>
+                <a:spcPts val="0"/>
+              </a:spcBef>
+              <a:spcAft>
+                <a:spcPts val="0"/>
+              </a:spcAft>
+              <a:buClr>
+                <a:srgbClr val="000000"/>
+              </a:buClr>
+              <a:buSzPts val="1500"/>
+              <a:buFont typeface="Arial"/>
+              <a:buNone/>
+            </a:pPr>
+            <a:r>
+              <a:rPr b="1" i="0" lang="en-US" spc="0" sz="1500" u="none" cap="none" strike="noStrike">
+                <a:solidFill>
+                  <a:srgbClr val="191C1E"/>
+                </a:solidFill>
+                <a:latin typeface="Plus Jakarta Sans"/>
+                <a:ea typeface="Plus Jakarta Sans"/>
+                <a:cs typeface="Plus Jakarta Sans"/>
+                <a:sym typeface="Plus Jakarta Sans"/>
+              </a:rPr>
+              <a:t>Nielsen, WCAG e LGPD</a:t>
+            </a:r>
+            <a:endParaRPr b="0" i="0" spc="0" sz="1400" u="none" cap="none" strike="noStrike">
+              <a:solidFill>
+                <a:srgbClr val="000000"/>
+              </a:solidFill>
+              <a:latin typeface="Arial"/>
+              <a:ea typeface="Arial"/>
+              <a:cs typeface="Arial"/>
+              <a:sym typeface="Arial"/>
+            </a:endParaRPr>
+          </a:p>
+          <a:p>
+            <a:pPr indent="0" lvl="0" marL="0" marR="0" rtl="0" algn="l">
+              <a:lnSpc>
+                <a:spcPct val="100000"/>
+              </a:lnSpc>
+              <a:spcBef>
+                <a:spcPts val="100"/>
+              </a:spcBef>
+              <a:spcAft>
+                <a:spcPts val="0"/>
+              </a:spcAft>
+              <a:buClr>
+                <a:srgbClr val="000000"/>
+              </a:buClr>
+              <a:buSzPts val="1000"/>
+              <a:buFont typeface="Arial"/>
+              <a:buNone/>
+            </a:pPr>
+            <a:r>
+              <a:rPr b="0" i="0" lang="en-US" spc="0" sz="1000" u="none" cap="none" strike="noStrike">
+                <a:solidFill>
+                  <a:srgbClr val="545F73"/>
+                </a:solidFill>
+                <a:latin typeface="Plus Jakarta Sans"/>
+                <a:ea typeface="Plus Jakarta Sans"/>
+                <a:cs typeface="Plus Jakarta Sans"/>
+                <a:sym typeface="Plus Jakarta Sans"/>
+              </a:rPr>
+              <a:t>Nielsen, 1994; W3C, 2018; Brasil, 2018</a:t>
+            </a:r>
+            <a:endParaRPr b="0" i="0" spc="0" sz="1400" u="none" cap="none" strike="noStrike">
+              <a:solidFill>
+                <a:srgbClr val="000000"/>
+              </a:solidFill>
+              <a:latin typeface="Arial"/>
+              <a:ea typeface="Arial"/>
+              <a:cs typeface="Arial"/>
+              <a:sym typeface="Arial"/>
+            </a:endParaRPr>
+          </a:p>
+        </p:txBody>
+      </p:sp>
+      <p:sp>
+        <p:nvSpPr>
+          <p:cNvPr id="244" name="Google Shape;244;p7"/>
+          <p:cNvSpPr txBox="1"/>
+          <p:nvPr/>
+        </p:nvSpPr>
+        <p:spPr>
+          <a:xfrm>
+            <a:off x="4320605" y="5436794"/>
+            <a:ext cx="4160400" cy="410100"/>
+          </a:xfrm>
+          <a:prstGeom prst="rect">
+            <a:avLst/>
+          </a:prstGeom>
+          <a:noFill/>
+          <a:ln>
+            <a:noFill/>
+          </a:ln>
+        </p:spPr>
+        <p:txBody>
+          <a:bodyPr anchorCtr="0" anchor="ctr" bIns="0" lIns="0" spcFirstLastPara="1" rIns="0" wrap="square" tIns="0">
+            <a:spAutoFit/>
+          </a:bodyPr>
+          <a:lstStyle/>
+          <a:p>
+            <a:pPr indent="0" lvl="0" marL="0" marR="0" rtl="0" algn="l">
+              <a:lnSpc>
+                <a:spcPct val="105000"/>
+              </a:lnSpc>
+              <a:spcBef>
+                <a:spcPts val="0"/>
+              </a:spcBef>
+              <a:spcAft>
+                <a:spcPts val="0"/>
+              </a:spcAft>
+              <a:buClr>
+                <a:srgbClr val="000000"/>
+              </a:buClr>
+              <a:buSzPts val="1300"/>
+              <a:buFont typeface="Arial"/>
+              <a:buNone/>
+            </a:pPr>
+            <a:r>
+              <a:rPr b="0" i="0" lang="en-US" spc="0" sz="1300" u="none" cap="none" strike="noStrike">
+                <a:solidFill>
+                  <a:srgbClr val="191C1E"/>
+                </a:solidFill>
+                <a:latin typeface="Plus Jakarta Sans"/>
+                <a:ea typeface="Plus Jakarta Sans"/>
+                <a:cs typeface="Plus Jakarta Sans"/>
+                <a:sym typeface="Plus Jakarta Sans"/>
+              </a:rPr>
+              <a:t>regras de usabilidade,  acessibilidade e de </a:t>
             </a:r>
             <a:endParaRPr b="0" i="0" spc="0" sz="1300" u="none" cap="none" strike="noStrike">
               <a:solidFill>
@@ -37471,32 +37971,6 @@
               <a:sym typeface="Plus Jakarta Sans"/>
             </a:endParaRPr>
           </a:p>
-        </p:txBody>
-      </p:sp>
-      <p:sp>
-        <p:nvSpPr>
-          <p:cNvPr id="235" name="Google Shape;235;p7"/>
-          <p:cNvSpPr txBox="1"/>
-          <p:nvPr/>
-        </p:nvSpPr>
-        <p:spPr>
-          <a:xfrm>
-            <a:off x="8778240" y="3584448"/>
-            <a:ext cx="2423160" cy="749808"/>
-          </a:xfrm>
-          <a:prstGeom prst="rect">
-            <a:avLst/>
-          </a:prstGeom>
-          <a:noFill/>
-          <a:ln>
-            <a:noFill/>
-          </a:ln>
-        </p:spPr>
-        <p:txBody>
-          <a:bodyPr anchorCtr="0" anchor="ctr" bIns="0" lIns="0" spcFirstLastPara="1" rIns="0" wrap="square" tIns="0">
-            <a:spAutoFit/>
-          </a:bodyPr>
-          <a:lstStyle/>
           <a:p>
             <a:pPr indent="0" lvl="0" marL="0" marR="0" rtl="0" algn="l">
               <a:lnSpc>
@@ -37516,670 +37990,16 @@
               <a:buNone/>
             </a:pPr>
             <a:r>
-              <a:rPr b="1" i="0" lang="en-US" spc="0" sz="1300" u="none" cap="none" strike="noStrike">
-                <a:solidFill>
-                  <a:srgbClr val="0A3F8F"/>
+              <a:rPr b="0" i="0" lang="en-US" spc="0" sz="1300" u="none" cap="none" strike="noStrike">
+                <a:solidFill>
+                  <a:srgbClr val="191C1E"/>
                 </a:solidFill>
                 <a:latin typeface="Plus Jakarta Sans"/>
                 <a:ea typeface="Plus Jakarta Sans"/>
                 <a:cs typeface="Plus Jakarta Sans"/>
                 <a:sym typeface="Plus Jakarta Sans"/>
               </a:rPr>
-              <a:t>remédios, estoque e consultas juntos</a:t>
-            </a:r>
-            <a:endParaRPr b="0" i="0" spc="0" sz="1400" u="none" cap="none" strike="noStrike">
-              <a:solidFill>
-                <a:srgbClr val="000000"/>
-              </a:solidFill>
-              <a:latin typeface="Arial"/>
-              <a:ea typeface="Arial"/>
-              <a:cs typeface="Arial"/>
-              <a:sym typeface="Arial"/>
-            </a:endParaRPr>
-          </a:p>
-        </p:txBody>
-      </p:sp>
-      <p:sp>
-        <p:nvSpPr>
-          <p:cNvPr id="236" name="Google Shape;236;p7"/>
-          <p:cNvSpPr/>
-          <p:nvPr/>
-        </p:nvSpPr>
-        <p:spPr>
-          <a:xfrm>
-            <a:off x="685800" y="4425696"/>
-            <a:ext cx="10820095" cy="749808"/>
-          </a:xfrm>
-          <a:prstGeom prst="roundRect">
-            <a:avLst>
-              <a:gd fmla="val 17073" name="adj"/>
-            </a:avLst>
-          </a:prstGeom>
-          <a:solidFill>
-            <a:srgbClr val="FFFFFF"/>
-          </a:solidFill>
-          <a:ln>
-            <a:noFill/>
-          </a:ln>
-        </p:spPr>
-        <p:txBody>
-          <a:bodyPr anchorCtr="0" anchor="ctr" bIns="45700" lIns="91425" spcFirstLastPara="1" rIns="91425" wrap="square" tIns="45700">
-            <a:noAutofit/>
-          </a:bodyPr>
-          <a:lstStyle/>
-          <a:p>
-            <a:pPr indent="0" lvl="0" marL="0" marR="0" rtl="0" algn="ctr">
-              <a:lnSpc>
-                <a:spcPct val="100000"/>
-              </a:lnSpc>
-              <a:spcBef>
-                <a:spcPts val="0"/>
-              </a:spcBef>
-              <a:spcAft>
-                <a:spcPts val="0"/>
-              </a:spcAft>
-              <a:buClr>
-                <a:srgbClr val="000000"/>
-              </a:buClr>
-              <a:buSzPts val="1400"/>
-              <a:buFont typeface="Arial"/>
-              <a:buNone/>
-            </a:pPr>
-            <a:r>
-              <a:t/>
-            </a:r>
-            <a:endParaRPr b="0" i="0" spc="0" sz="1400" u="none" cap="none" strike="noStrike">
-              <a:solidFill>
-                <a:srgbClr val="000000"/>
-              </a:solidFill>
-              <a:latin typeface="Arial"/>
-              <a:ea typeface="Arial"/>
-              <a:cs typeface="Arial"/>
-              <a:sym typeface="Arial"/>
-            </a:endParaRPr>
-          </a:p>
-        </p:txBody>
-      </p:sp>
-      <p:sp>
-        <p:nvSpPr>
-          <p:cNvPr id="237" name="Google Shape;237;p7"/>
-          <p:cNvSpPr/>
-          <p:nvPr/>
-        </p:nvSpPr>
-        <p:spPr>
-          <a:xfrm>
-            <a:off x="8549640" y="4425696"/>
-            <a:ext cx="2956255" cy="749808"/>
-          </a:xfrm>
-          <a:prstGeom prst="roundRect">
-            <a:avLst>
-              <a:gd fmla="val 17073" name="adj"/>
-            </a:avLst>
-          </a:prstGeom>
-          <a:solidFill>
-            <a:srgbClr val="EAF1FE"/>
-          </a:solidFill>
-          <a:ln>
-            <a:noFill/>
-          </a:ln>
-        </p:spPr>
-        <p:txBody>
-          <a:bodyPr anchorCtr="0" anchor="ctr" bIns="45700" lIns="91425" spcFirstLastPara="1" rIns="91425" wrap="square" tIns="45700">
-            <a:noAutofit/>
-          </a:bodyPr>
-          <a:lstStyle/>
-          <a:p>
-            <a:pPr indent="0" lvl="0" marL="0" marR="0" rtl="0" algn="ctr">
-              <a:lnSpc>
-                <a:spcPct val="100000"/>
-              </a:lnSpc>
-              <a:spcBef>
-                <a:spcPts val="0"/>
-              </a:spcBef>
-              <a:spcAft>
-                <a:spcPts val="0"/>
-              </a:spcAft>
-              <a:buClr>
-                <a:srgbClr val="000000"/>
-              </a:buClr>
-              <a:buSzPts val="1400"/>
-              <a:buFont typeface="Arial"/>
-              <a:buNone/>
-            </a:pPr>
-            <a:r>
-              <a:t/>
-            </a:r>
-            <a:endParaRPr b="0" i="0" spc="0" sz="1400" u="none" cap="none" strike="noStrike">
-              <a:solidFill>
-                <a:srgbClr val="000000"/>
-              </a:solidFill>
-              <a:latin typeface="Arial"/>
-              <a:ea typeface="Arial"/>
-              <a:cs typeface="Arial"/>
-              <a:sym typeface="Arial"/>
-            </a:endParaRPr>
-          </a:p>
-        </p:txBody>
-      </p:sp>
-      <p:sp>
-        <p:nvSpPr>
-          <p:cNvPr id="238" name="Google Shape;238;p7"/>
-          <p:cNvSpPr txBox="1"/>
-          <p:nvPr/>
-        </p:nvSpPr>
-        <p:spPr>
-          <a:xfrm>
-            <a:off x="1005840" y="4425696"/>
-            <a:ext cx="3017520" cy="749808"/>
-          </a:xfrm>
-          <a:prstGeom prst="rect">
-            <a:avLst/>
-          </a:prstGeom>
-          <a:noFill/>
-          <a:ln>
-            <a:noFill/>
-          </a:ln>
-        </p:spPr>
-        <p:txBody>
-          <a:bodyPr anchorCtr="0" anchor="ctr" bIns="0" lIns="0" spcFirstLastPara="1" rIns="0" wrap="square" tIns="0">
-            <a:spAutoFit/>
-          </a:bodyPr>
-          <a:lstStyle/>
-          <a:p>
-            <a:pPr indent="0" lvl="0" marL="0" marR="0" rtl="0" algn="l">
-              <a:lnSpc>
-                <a:spcPct val="100000"/>
-              </a:lnSpc>
-              <a:spcBef>
-                <a:spcPts val="0"/>
-              </a:spcBef>
-              <a:spcAft>
-                <a:spcPts val="0"/>
-              </a:spcAft>
-              <a:buClr>
-                <a:srgbClr val="000000"/>
-              </a:buClr>
-              <a:buSzPts val="1500"/>
-              <a:buFont typeface="Arial"/>
-              <a:buNone/>
-            </a:pPr>
-            <a:r>
-              <a:rPr b="1" i="0" lang="en-US" spc="0" sz="1500" u="none" cap="none" strike="noStrike">
-                <a:solidFill>
-                  <a:srgbClr val="191C1E"/>
-                </a:solidFill>
-                <a:latin typeface="Plus Jakarta Sans"/>
-                <a:ea typeface="Plus Jakarta Sans"/>
-                <a:cs typeface="Plus Jakarta Sans"/>
-                <a:sym typeface="Plus Jakarta Sans"/>
-              </a:rPr>
-              <a:t>Offline-first e Last-Write-Wins</a:t>
-            </a:r>
-            <a:endParaRPr b="0" i="0" spc="0" sz="1400" u="none" cap="none" strike="noStrike">
-              <a:solidFill>
-                <a:srgbClr val="000000"/>
-              </a:solidFill>
-              <a:latin typeface="Arial"/>
-              <a:ea typeface="Arial"/>
-              <a:cs typeface="Arial"/>
-              <a:sym typeface="Arial"/>
-            </a:endParaRPr>
-          </a:p>
-          <a:p>
-            <a:pPr indent="0" lvl="0" marL="0" marR="0" rtl="0" algn="l">
-              <a:lnSpc>
-                <a:spcPct val="100000"/>
-              </a:lnSpc>
-              <a:spcBef>
-                <a:spcPts val="100"/>
-              </a:spcBef>
-              <a:spcAft>
-                <a:spcPts val="0"/>
-              </a:spcAft>
-              <a:buClr>
-                <a:srgbClr val="000000"/>
-              </a:buClr>
-              <a:buSzPts val="1000"/>
-              <a:buFont typeface="Arial"/>
-              <a:buNone/>
-            </a:pPr>
-            <a:r>
-              <a:rPr b="0" i="0" lang="en-US" spc="0" sz="1000" u="none" cap="none" strike="noStrike">
-                <a:solidFill>
-                  <a:srgbClr val="545F73"/>
-                </a:solidFill>
-                <a:latin typeface="Plus Jakarta Sans"/>
-                <a:ea typeface="Plus Jakarta Sans"/>
-                <a:cs typeface="Plus Jakarta Sans"/>
-                <a:sym typeface="Plus Jakarta Sans"/>
-              </a:rPr>
-              <a:t>Allsopp, 2014; Kleppmann, 2017</a:t>
-            </a:r>
-            <a:endParaRPr b="0" i="0" spc="0" sz="1400" u="none" cap="none" strike="noStrike">
-              <a:solidFill>
-                <a:srgbClr val="000000"/>
-              </a:solidFill>
-              <a:latin typeface="Arial"/>
-              <a:ea typeface="Arial"/>
-              <a:cs typeface="Arial"/>
-              <a:sym typeface="Arial"/>
-            </a:endParaRPr>
-          </a:p>
-        </p:txBody>
-      </p:sp>
-      <p:sp>
-        <p:nvSpPr>
-          <p:cNvPr id="239" name="Google Shape;239;p7"/>
-          <p:cNvSpPr txBox="1"/>
-          <p:nvPr/>
-        </p:nvSpPr>
-        <p:spPr>
-          <a:xfrm>
-            <a:off x="4320605" y="4490396"/>
-            <a:ext cx="4160400" cy="620400"/>
-          </a:xfrm>
-          <a:prstGeom prst="rect">
-            <a:avLst/>
-          </a:prstGeom>
-          <a:noFill/>
-          <a:ln>
-            <a:noFill/>
-          </a:ln>
-        </p:spPr>
-        <p:txBody>
-          <a:bodyPr anchorCtr="0" anchor="ctr" bIns="0" lIns="0" spcFirstLastPara="1" rIns="0" wrap="square" tIns="0">
-            <a:spAutoFit/>
-          </a:bodyPr>
-          <a:lstStyle/>
-          <a:p>
-            <a:pPr indent="0" lvl="0" marL="0" marR="0" rtl="0" algn="l">
-              <a:lnSpc>
-                <a:spcPct val="105000"/>
-              </a:lnSpc>
-              <a:spcBef>
-                <a:spcPts val="0"/>
-              </a:spcBef>
-              <a:spcAft>
-                <a:spcPts val="0"/>
-              </a:spcAft>
-              <a:buClr>
-                <a:srgbClr val="000000"/>
-              </a:buClr>
-              <a:buSzPts val="1300"/>
-              <a:buFont typeface="Arial"/>
-              <a:buNone/>
-            </a:pPr>
-            <a:r>
-              <a:rPr b="0" i="0" lang="en-US" spc="0" sz="1300" u="none" cap="none" strike="noStrike">
-                <a:solidFill>
-                  <a:srgbClr val="191C1E"/>
-                </a:solidFill>
-                <a:latin typeface="Plus Jakarta Sans"/>
-                <a:ea typeface="Plus Jakarta Sans"/>
-                <a:cs typeface="Plus Jakarta Sans"/>
-                <a:sym typeface="Plus Jakarta Sans"/>
-              </a:rPr>
-              <a:t>funcionamento integral que independe de conexão, com possibilidade de sincronização dos dados em nuvem</a:t>
-            </a:r>
-            <a:endParaRPr b="0" i="0" spc="0" sz="1400" u="none" cap="none" strike="noStrike">
-              <a:solidFill>
-                <a:srgbClr val="000000"/>
-              </a:solidFill>
-              <a:latin typeface="Arial"/>
-              <a:ea typeface="Arial"/>
-              <a:cs typeface="Arial"/>
-              <a:sym typeface="Arial"/>
-            </a:endParaRPr>
-          </a:p>
-        </p:txBody>
-      </p:sp>
-      <p:sp>
-        <p:nvSpPr>
-          <p:cNvPr id="240" name="Google Shape;240;p7"/>
-          <p:cNvSpPr txBox="1"/>
-          <p:nvPr/>
-        </p:nvSpPr>
-        <p:spPr>
-          <a:xfrm>
-            <a:off x="8778240" y="4425696"/>
-            <a:ext cx="2423160" cy="749808"/>
-          </a:xfrm>
-          <a:prstGeom prst="rect">
-            <a:avLst/>
-          </a:prstGeom>
-          <a:noFill/>
-          <a:ln>
-            <a:noFill/>
-          </a:ln>
-        </p:spPr>
-        <p:txBody>
-          <a:bodyPr anchorCtr="0" anchor="ctr" bIns="0" lIns="0" spcFirstLastPara="1" rIns="0" wrap="square" tIns="0">
-            <a:spAutoFit/>
-          </a:bodyPr>
-          <a:lstStyle/>
-          <a:p>
-            <a:pPr indent="0" lvl="0" marL="0" marR="0" rtl="0" algn="l">
-              <a:lnSpc>
-                <a:spcPct val="105000"/>
-              </a:lnSpc>
-              <a:spcBef>
-                <a:spcPts val="0"/>
-              </a:spcBef>
-              <a:spcAft>
-                <a:spcPts val="0"/>
-              </a:spcAft>
-              <a:buClr>
-                <a:srgbClr val="000000"/>
-              </a:buClr>
-              <a:buSzPts val="1300"/>
-              <a:buFont typeface="Arial"/>
-              <a:buNone/>
-            </a:pPr>
-            <a:r>
-              <a:rPr b="1" i="0" lang="en-US" spc="0" sz="1300" u="none" cap="none" strike="noStrike">
-                <a:solidFill>
-                  <a:srgbClr val="0A3F8F"/>
-                </a:solidFill>
-                <a:latin typeface="Plus Jakarta Sans"/>
-                <a:ea typeface="Plus Jakarta Sans"/>
-                <a:cs typeface="Plus Jakarta Sans"/>
-                <a:sym typeface="Plus Jakarta Sans"/>
-              </a:rPr>
-              <a:t>grava no aparelho e sincroniza depois</a:t>
-            </a:r>
-            <a:endParaRPr b="0" i="0" spc="0" sz="1400" u="none" cap="none" strike="noStrike">
-              <a:solidFill>
-                <a:srgbClr val="000000"/>
-              </a:solidFill>
-              <a:latin typeface="Arial"/>
-              <a:ea typeface="Arial"/>
-              <a:cs typeface="Arial"/>
-              <a:sym typeface="Arial"/>
-            </a:endParaRPr>
-          </a:p>
-        </p:txBody>
-      </p:sp>
-      <p:sp>
-        <p:nvSpPr>
-          <p:cNvPr id="241" name="Google Shape;241;p7"/>
-          <p:cNvSpPr/>
-          <p:nvPr/>
-        </p:nvSpPr>
-        <p:spPr>
-          <a:xfrm>
-            <a:off x="685800" y="5266944"/>
-            <a:ext cx="10820095" cy="749808"/>
-          </a:xfrm>
-          <a:prstGeom prst="roundRect">
-            <a:avLst>
-              <a:gd fmla="val 17073" name="adj"/>
-            </a:avLst>
-          </a:prstGeom>
-          <a:solidFill>
-            <a:srgbClr val="FFFFFF"/>
-          </a:solidFill>
-          <a:ln>
-            <a:noFill/>
-          </a:ln>
-        </p:spPr>
-        <p:txBody>
-          <a:bodyPr anchorCtr="0" anchor="ctr" bIns="45700" lIns="91425" spcFirstLastPara="1" rIns="91425" wrap="square" tIns="45700">
-            <a:noAutofit/>
-          </a:bodyPr>
-          <a:lstStyle/>
-          <a:p>
-            <a:pPr indent="0" lvl="0" marL="0" marR="0" rtl="0" algn="ctr">
-              <a:lnSpc>
-                <a:spcPct val="100000"/>
-              </a:lnSpc>
-              <a:spcBef>
-                <a:spcPts val="0"/>
-              </a:spcBef>
-              <a:spcAft>
-                <a:spcPts val="0"/>
-              </a:spcAft>
-              <a:buClr>
-                <a:srgbClr val="000000"/>
-              </a:buClr>
-              <a:buSzPts val="1400"/>
-              <a:buFont typeface="Arial"/>
-              <a:buNone/>
-            </a:pPr>
-            <a:r>
-              <a:t/>
-            </a:r>
-            <a:endParaRPr b="0" i="0" spc="0" sz="1400" u="none" cap="none" strike="noStrike">
-              <a:solidFill>
-                <a:srgbClr val="000000"/>
-              </a:solidFill>
-              <a:latin typeface="Arial"/>
-              <a:ea typeface="Arial"/>
-              <a:cs typeface="Arial"/>
-              <a:sym typeface="Arial"/>
-            </a:endParaRPr>
-          </a:p>
-        </p:txBody>
-      </p:sp>
-      <p:sp>
-        <p:nvSpPr>
-          <p:cNvPr id="242" name="Google Shape;242;p7"/>
-          <p:cNvSpPr/>
-          <p:nvPr/>
-        </p:nvSpPr>
-        <p:spPr>
-          <a:xfrm>
-            <a:off x="8549640" y="5266944"/>
-            <a:ext cx="2956255" cy="749808"/>
-          </a:xfrm>
-          <a:prstGeom prst="roundRect">
-            <a:avLst>
-              <a:gd fmla="val 17073" name="adj"/>
-            </a:avLst>
-          </a:prstGeom>
-          <a:solidFill>
-            <a:srgbClr val="EAF1FE"/>
-          </a:solidFill>
-          <a:ln>
-            <a:noFill/>
-          </a:ln>
-        </p:spPr>
-        <p:txBody>
-          <a:bodyPr anchorCtr="0" anchor="ctr" bIns="45700" lIns="91425" spcFirstLastPara="1" rIns="91425" wrap="square" tIns="45700">
-            <a:noAutofit/>
-          </a:bodyPr>
-          <a:lstStyle/>
-          <a:p>
-            <a:pPr indent="0" lvl="0" marL="0" marR="0" rtl="0" algn="ctr">
-              <a:lnSpc>
-                <a:spcPct val="100000"/>
-              </a:lnSpc>
-              <a:spcBef>
-                <a:spcPts val="0"/>
-              </a:spcBef>
-              <a:spcAft>
-                <a:spcPts val="0"/>
-              </a:spcAft>
-              <a:buClr>
-                <a:srgbClr val="000000"/>
-              </a:buClr>
-              <a:buSzPts val="1400"/>
-              <a:buFont typeface="Arial"/>
-              <a:buNone/>
-            </a:pPr>
-            <a:r>
-              <a:t/>
-            </a:r>
-            <a:endParaRPr b="0" i="0" spc="0" sz="1400" u="none" cap="none" strike="noStrike">
-              <a:solidFill>
-                <a:srgbClr val="000000"/>
-              </a:solidFill>
-              <a:latin typeface="Arial"/>
-              <a:ea typeface="Arial"/>
-              <a:cs typeface="Arial"/>
-              <a:sym typeface="Arial"/>
-            </a:endParaRPr>
-          </a:p>
-        </p:txBody>
-      </p:sp>
-      <p:sp>
-        <p:nvSpPr>
-          <p:cNvPr id="243" name="Google Shape;243;p7"/>
-          <p:cNvSpPr txBox="1"/>
-          <p:nvPr/>
-        </p:nvSpPr>
-        <p:spPr>
-          <a:xfrm>
-            <a:off x="1005840" y="5266944"/>
-            <a:ext cx="3017520" cy="749808"/>
-          </a:xfrm>
-          <a:prstGeom prst="rect">
-            <a:avLst/>
-          </a:prstGeom>
-          <a:noFill/>
-          <a:ln>
-            <a:noFill/>
-          </a:ln>
-        </p:spPr>
-        <p:txBody>
-          <a:bodyPr anchorCtr="0" anchor="ctr" bIns="0" lIns="0" spcFirstLastPara="1" rIns="0" wrap="square" tIns="0">
-            <a:spAutoFit/>
-          </a:bodyPr>
-          <a:lstStyle/>
-          <a:p>
-            <a:pPr indent="0" lvl="0" marL="0" marR="0" rtl="0" algn="l">
-              <a:lnSpc>
-                <a:spcPct val="100000"/>
-              </a:lnSpc>
-              <a:spcBef>
-                <a:spcPts val="0"/>
-              </a:spcBef>
-              <a:spcAft>
-                <a:spcPts val="0"/>
-              </a:spcAft>
-              <a:buClr>
-                <a:srgbClr val="000000"/>
-              </a:buClr>
-              <a:buSzPts val="1500"/>
-              <a:buFont typeface="Arial"/>
-              <a:buNone/>
-            </a:pPr>
-            <a:r>
-              <a:rPr b="1" i="0" lang="en-US" spc="0" sz="1500" u="none" cap="none" strike="noStrike">
-                <a:solidFill>
-                  <a:srgbClr val="191C1E"/>
-                </a:solidFill>
-                <a:latin typeface="Plus Jakarta Sans"/>
-                <a:ea typeface="Plus Jakarta Sans"/>
-                <a:cs typeface="Plus Jakarta Sans"/>
-                <a:sym typeface="Plus Jakarta Sans"/>
-              </a:rPr>
-              <a:t>Nielsen, WCAG e LGPD</a:t>
-            </a:r>
-            <a:endParaRPr b="0" i="0" spc="0" sz="1400" u="none" cap="none" strike="noStrike">
-              <a:solidFill>
-                <a:srgbClr val="000000"/>
-              </a:solidFill>
-              <a:latin typeface="Arial"/>
-              <a:ea typeface="Arial"/>
-              <a:cs typeface="Arial"/>
-              <a:sym typeface="Arial"/>
-            </a:endParaRPr>
-          </a:p>
-          <a:p>
-            <a:pPr indent="0" lvl="0" marL="0" marR="0" rtl="0" algn="l">
-              <a:lnSpc>
-                <a:spcPct val="100000"/>
-              </a:lnSpc>
-              <a:spcBef>
-                <a:spcPts val="100"/>
-              </a:spcBef>
-              <a:spcAft>
-                <a:spcPts val="0"/>
-              </a:spcAft>
-              <a:buClr>
-                <a:srgbClr val="000000"/>
-              </a:buClr>
-              <a:buSzPts val="1000"/>
-              <a:buFont typeface="Arial"/>
-              <a:buNone/>
-            </a:pPr>
-            <a:r>
-              <a:rPr b="0" i="0" lang="en-US" spc="0" sz="1000" u="none" cap="none" strike="noStrike">
-                <a:solidFill>
-                  <a:srgbClr val="545F73"/>
-                </a:solidFill>
-                <a:latin typeface="Plus Jakarta Sans"/>
-                <a:ea typeface="Plus Jakarta Sans"/>
-                <a:cs typeface="Plus Jakarta Sans"/>
-                <a:sym typeface="Plus Jakarta Sans"/>
-              </a:rPr>
-              <a:t>Nielsen, 1994; W3C, 2018; Brasil, 2018</a:t>
-            </a:r>
-            <a:endParaRPr b="0" i="0" spc="0" sz="1400" u="none" cap="none" strike="noStrike">
-              <a:solidFill>
-                <a:srgbClr val="000000"/>
-              </a:solidFill>
-              <a:latin typeface="Arial"/>
-              <a:ea typeface="Arial"/>
-              <a:cs typeface="Arial"/>
-              <a:sym typeface="Arial"/>
-            </a:endParaRPr>
-          </a:p>
-        </p:txBody>
-      </p:sp>
-      <p:sp>
-        <p:nvSpPr>
-          <p:cNvPr id="244" name="Google Shape;244;p7"/>
-          <p:cNvSpPr txBox="1"/>
-          <p:nvPr/>
-        </p:nvSpPr>
-        <p:spPr>
-          <a:xfrm>
-            <a:off x="4320605" y="5436794"/>
-            <a:ext cx="4160400" cy="410100"/>
-          </a:xfrm>
-          <a:prstGeom prst="rect">
-            <a:avLst/>
-          </a:prstGeom>
-          <a:noFill/>
-          <a:ln>
-            <a:noFill/>
-          </a:ln>
-        </p:spPr>
-        <p:txBody>
-          <a:bodyPr anchorCtr="0" anchor="ctr" bIns="0" lIns="0" spcFirstLastPara="1" rIns="0" wrap="square" tIns="0">
-            <a:spAutoFit/>
-          </a:bodyPr>
-          <a:lstStyle/>
-          <a:p>
-            <a:pPr indent="0" lvl="0" marL="0" marR="0" rtl="0" algn="l">
-              <a:lnSpc>
-                <a:spcPct val="105000"/>
-              </a:lnSpc>
-              <a:spcBef>
-                <a:spcPts val="0"/>
-              </a:spcBef>
-              <a:spcAft>
-                <a:spcPts val="0"/>
-              </a:spcAft>
-              <a:buClr>
-                <a:srgbClr val="000000"/>
-              </a:buClr>
-              <a:buSzPts val="1300"/>
-              <a:buFont typeface="Arial"/>
-              <a:buNone/>
-            </a:pPr>
-            <a:r>
-              <a:rPr b="0" i="0" lang="en-US" spc="0" sz="1300" u="none" cap="none" strike="noStrike">
-                <a:solidFill>
-                  <a:srgbClr val="191C1E"/>
-                </a:solidFill>
-                <a:latin typeface="Plus Jakarta Sans"/>
-                <a:ea typeface="Plus Jakarta Sans"/>
-                <a:cs typeface="Plus Jakarta Sans"/>
-                <a:sym typeface="Plus Jakarta Sans"/>
-              </a:rPr>
-              <a:t>regras de usabilidade,  acessibilidade e de proteção de dados pessoais</a:t>
+              <a:t>proteção de dados pessoais</a:t>
             </a:r>
             <a:endParaRPr b="0" i="0" spc="0" sz="1400" u="none" cap="none" strike="noStrike">
               <a:solidFill>
@@ -38740,8 +38560,8 @@
         </p:nvSpPr>
         <p:spPr>
           <a:xfrm>
-            <a:off x="1965960" y="1911096"/>
-            <a:ext cx="2743200" cy="457200"/>
+            <a:off x="1965960" y="1947671"/>
+            <a:ext cx="2743200" cy="369300"/>
           </a:xfrm>
           <a:prstGeom prst="rect">
             <a:avLst/>
@@ -38846,8 +38666,8 @@
         </p:nvSpPr>
         <p:spPr>
           <a:xfrm>
-            <a:off x="1965960" y="2551176"/>
-            <a:ext cx="2743200" cy="457200"/>
+            <a:off x="1965960" y="2606051"/>
+            <a:ext cx="2743200" cy="369300"/>
           </a:xfrm>
           <a:prstGeom prst="rect">
             <a:avLst/>
@@ -40175,7 +39995,7 @@
       </p:sp>
       <p:sp>
         <p:nvSpPr>
-          <p:cNvPr id="298" name="Google Shape;298;p10"/>
+          <p:cNvPr id="282" name="Google Shape;282;p10"/>
           <p:cNvSpPr txBox="1"/>
           <p:nvPr/>
         </p:nvSpPr>
@@ -40241,7 +40061,7 @@
       </p:sp>
       <p:sp>
         <p:nvSpPr>
-          <p:cNvPr id="1000" name="Mapill;1000"/>
+          <p:cNvPr id="283" name="Google Shape;283;p10"/>
           <p:cNvSpPr txBox="1"/>
           <p:nvPr/>
         </p:nvSpPr>
@@ -40307,7 +40127,7 @@
       </p:sp>
       <p:sp>
         <p:nvSpPr>
-          <p:cNvPr id="1001" name="Mapill;1001"/>
+          <p:cNvPr id="284" name="Google Shape;284;p10"/>
           <p:cNvSpPr txBox="1"/>
           <p:nvPr/>
         </p:nvSpPr>
@@ -40373,7 +40193,7 @@
       </p:sp>
       <p:sp>
         <p:nvSpPr>
-          <p:cNvPr id="1002" name="Mapill;1002"/>
+          <p:cNvPr id="285" name="Google Shape;285;p10"/>
           <p:cNvSpPr txBox="1"/>
           <p:nvPr/>
         </p:nvSpPr>
@@ -40439,7 +40259,7 @@
       </p:sp>
       <p:sp>
         <p:nvSpPr>
-          <p:cNvPr id="1003" name="Mapill;1003"/>
+          <p:cNvPr id="286" name="Google Shape;286;p10"/>
           <p:cNvSpPr/>
           <p:nvPr/>
         </p:nvSpPr>
@@ -40500,7 +40320,7 @@
       </p:sp>
       <p:sp>
         <p:nvSpPr>
-          <p:cNvPr id="1004" name="Mapill;1004"/>
+          <p:cNvPr id="287" name="Google Shape;287;p10"/>
           <p:cNvSpPr/>
           <p:nvPr/>
         </p:nvSpPr>
@@ -40561,14 +40381,14 @@
       </p:sp>
       <p:sp>
         <p:nvSpPr>
-          <p:cNvPr id="1005" name="Mapill;1005"/>
+          <p:cNvPr id="288" name="Google Shape;288;p10"/>
           <p:cNvSpPr txBox="1"/>
           <p:nvPr/>
         </p:nvSpPr>
         <p:spPr>
           <a:xfrm>
-            <a:off x="1005840" y="1901952"/>
-            <a:ext cx="3017520" cy="685800"/>
+            <a:off x="1005840" y="2140027"/>
+            <a:ext cx="3017400" cy="231000"/>
           </a:xfrm>
           <a:prstGeom prst="rect">
             <a:avLst/>
@@ -40602,7 +40422,7 @@
               <a:buNone/>
             </a:pPr>
             <a:r>
-              <a:rPr b="1" i="0" lang="en-US" spc="0" sz="1500" u="none" cap="none" strike="noStrike">
+              <a:rPr b="1" lang="en-US" sz="1500">
                 <a:solidFill>
                   <a:srgbClr val="191C1E"/>
                 </a:solidFill>
@@ -40611,7 +40431,7 @@
                 <a:cs typeface="Plus Jakarta Sans"/>
                 <a:sym typeface="Plus Jakarta Sans"/>
               </a:rPr>
-              <a:t>Esquecer a dose</a:t>
+              <a:t>Esquecer ou atrasar a dose</a:t>
             </a:r>
             <a:endParaRPr b="0" i="0" spc="0" sz="1400" u="none" cap="none" strike="noStrike">
               <a:solidFill>
@@ -40627,7 +40447,7 @@
       </p:sp>
       <p:sp>
         <p:nvSpPr>
-          <p:cNvPr id="1006" name="Mapill;1006"/>
+          <p:cNvPr id="289" name="Google Shape;289;p10"/>
           <p:cNvSpPr txBox="1"/>
           <p:nvPr/>
         </p:nvSpPr>
@@ -40668,7 +40488,7 @@
               <a:buNone/>
             </a:pPr>
             <a:r>
-              <a:rPr b="0" i="0" lang="en-US" spc="0" sz="1300" u="none" cap="none" strike="noStrike">
+              <a:rPr lang="en-US" sz="1300">
                 <a:solidFill>
                   <a:srgbClr val="191C1E"/>
                 </a:solidFill>
@@ -40677,7 +40497,47 @@
                 <a:cs typeface="Plus Jakarta Sans"/>
                 <a:sym typeface="Plus Jakarta Sans"/>
               </a:rPr>
-              <a:t>alarme com o app fechado, e um aviso só para remédios no mesmo horário</a:t>
+              <a:t>alarme com o app fechado, um aviso por horário, </a:t>
+            </a:r>
+            <a:endParaRPr sz="1300">
+              <a:solidFill>
+                <a:srgbClr val="191C1E"/>
+              </a:solidFill>
+              <a:latin typeface="Plus Jakarta Sans"/>
+              <a:ea typeface="Plus Jakarta Sans"/>
+              <a:cs typeface="Plus Jakarta Sans"/>
+              <a:sym typeface="Plus Jakarta Sans"/>
+            </a:endParaRPr>
+          </a:p>
+          <a:p>
+            <a:pPr indent="0" lvl="0" marL="0" marR="0" rtl="0" algn="l">
+              <a:lnSpc>
+                <a:spcPct val="105000"/>
+              </a:lnSpc>
+              <a:spcBef>
+                <a:spcPts val="0"/>
+              </a:spcBef>
+              <a:spcAft>
+                <a:spcPts val="0"/>
+              </a:spcAft>
+              <a:buClr>
+                <a:srgbClr val="000000"/>
+              </a:buClr>
+              <a:buSzPts val="1300"/>
+              <a:buFont typeface="Arial"/>
+              <a:buNone/>
+            </a:pPr>
+            <a:r>
+              <a:rPr lang="en-US" sz="1300">
+                <a:solidFill>
+                  <a:srgbClr val="191C1E"/>
+                </a:solidFill>
+                <a:latin typeface="Plus Jakarta Sans"/>
+                <a:ea typeface="Plus Jakarta Sans"/>
+                <a:cs typeface="Plus Jakarta Sans"/>
+                <a:sym typeface="Plus Jakarta Sans"/>
+              </a:rPr>
+              <a:t>e as atrasadas confirmadas de uma vez</a:t>
             </a:r>
             <a:endParaRPr b="0" i="0" spc="0" sz="1300" u="none" cap="none" strike="noStrike">
               <a:solidFill>
@@ -40693,14 +40553,14 @@
       </p:sp>
       <p:sp>
         <p:nvSpPr>
-          <p:cNvPr id="1007" name="Mapill;1007"/>
+          <p:cNvPr id="290" name="Google Shape;290;p10"/>
           <p:cNvSpPr txBox="1"/>
           <p:nvPr/>
         </p:nvSpPr>
         <p:spPr>
           <a:xfrm>
-            <a:off x="8778240" y="1901952"/>
-            <a:ext cx="2423160" cy="685800"/>
+            <a:off x="8778340" y="2155477"/>
+            <a:ext cx="2423100" cy="200100"/>
           </a:xfrm>
           <a:prstGeom prst="rect">
             <a:avLst/>
@@ -40734,7 +40594,7 @@
               <a:buNone/>
             </a:pPr>
             <a:r>
-              <a:rPr b="1" i="0" lang="en-US" spc="0" sz="1300" u="none" cap="none" strike="noStrike">
+              <a:rPr b="1" lang="en-US" sz="1300">
                 <a:solidFill>
                   <a:srgbClr val="0A3F8F"/>
                 </a:solidFill>
@@ -40743,7 +40603,7 @@
                 <a:cs typeface="Plus Jakarta Sans"/>
                 <a:sym typeface="Plus Jakarta Sans"/>
               </a:rPr>
-              <a:t>RF 25, 29 · RNF 02 · RN 11</a:t>
+              <a:t>RF 21, 25, 29 · RNF 02 · RN 11</a:t>
             </a:r>
             <a:endParaRPr b="0" i="0" spc="0" sz="1400" u="none" cap="none" strike="noStrike">
               <a:solidFill>
@@ -40759,7 +40619,7 @@
       </p:sp>
       <p:sp>
         <p:nvSpPr>
-          <p:cNvPr id="1008" name="Mapill;1008"/>
+          <p:cNvPr id="291" name="Google Shape;291;p10"/>
           <p:cNvSpPr/>
           <p:nvPr/>
         </p:nvSpPr>
@@ -40820,7 +40680,7 @@
       </p:sp>
       <p:sp>
         <p:nvSpPr>
-          <p:cNvPr id="1009" name="Mapill;1009"/>
+          <p:cNvPr id="292" name="Google Shape;292;p10"/>
           <p:cNvSpPr/>
           <p:nvPr/>
         </p:nvSpPr>
@@ -40881,7 +40741,7 @@
       </p:sp>
       <p:sp>
         <p:nvSpPr>
-          <p:cNvPr id="1010" name="Mapill;1010"/>
+          <p:cNvPr id="293" name="Google Shape;293;p10"/>
           <p:cNvSpPr txBox="1"/>
           <p:nvPr/>
         </p:nvSpPr>
@@ -40947,7 +40807,7 @@
       </p:sp>
       <p:sp>
         <p:nvSpPr>
-          <p:cNvPr id="1011" name="Mapill;1011"/>
+          <p:cNvPr id="294" name="Google Shape;294;p10"/>
           <p:cNvSpPr txBox="1"/>
           <p:nvPr/>
         </p:nvSpPr>
@@ -40997,7 +40857,7 @@
                 <a:cs typeface="Plus Jakarta Sans"/>
                 <a:sym typeface="Plus Jakarta Sans"/>
               </a:rPr>
-              <a:t>dez formas farmacêuticas, quatro frequências e dose variável por horário</a:t>
+              <a:t>dez formas farmacêuticas, quatro frequências </a:t>
             </a:r>
             <a:endParaRPr b="0" i="0" spc="0" sz="1300" u="none" cap="none" strike="noStrike">
               <a:solidFill>
@@ -41009,32 +40869,6 @@
               <a:sym typeface="Plus Jakarta Sans"/>
             </a:endParaRPr>
           </a:p>
-        </p:txBody>
-      </p:sp>
-      <p:sp>
-        <p:nvSpPr>
-          <p:cNvPr id="1012" name="Mapill;1012"/>
-          <p:cNvSpPr txBox="1"/>
-          <p:nvPr/>
-        </p:nvSpPr>
-        <p:spPr>
-          <a:xfrm>
-            <a:off x="8778240" y="2663952"/>
-            <a:ext cx="2423160" cy="685800"/>
-          </a:xfrm>
-          <a:prstGeom prst="rect">
-            <a:avLst/>
-          </a:prstGeom>
-          <a:noFill/>
-          <a:ln>
-            <a:noFill/>
-          </a:ln>
-        </p:spPr>
-        <p:txBody>
-          <a:bodyPr anchorCtr="0" anchor="ctr" bIns="0" lIns="0" spcFirstLastPara="1" rIns="0" wrap="square" tIns="0">
-            <a:spAutoFit/>
-          </a:bodyPr>
-          <a:lstStyle/>
           <a:p>
             <a:pPr indent="0" lvl="0" marL="0" marR="0" rtl="0" algn="l">
               <a:lnSpc>
@@ -41054,270 +40888,16 @@
               <a:buNone/>
             </a:pPr>
             <a:r>
-              <a:rPr b="1" i="0" lang="en-US" spc="0" sz="1300" u="none" cap="none" strike="noStrike">
-                <a:solidFill>
-                  <a:srgbClr val="0A3F8F"/>
+              <a:rPr b="0" i="0" lang="en-US" spc="0" sz="1300" u="none" cap="none" strike="noStrike">
+                <a:solidFill>
+                  <a:srgbClr val="191C1E"/>
                 </a:solidFill>
                 <a:latin typeface="Plus Jakarta Sans"/>
                 <a:ea typeface="Plus Jakarta Sans"/>
                 <a:cs typeface="Plus Jakarta Sans"/>
                 <a:sym typeface="Plus Jakarta Sans"/>
               </a:rPr>
-              <a:t>RF 07, 09, 10 · RN 08, 09</a:t>
-            </a:r>
-            <a:endParaRPr b="0" i="0" spc="0" sz="1400" u="none" cap="none" strike="noStrike">
-              <a:solidFill>
-                <a:srgbClr val="000000"/>
-              </a:solidFill>
-              <a:latin typeface="Arial"/>
-              <a:ea typeface="Arial"/>
-              <a:cs typeface="Arial"/>
-              <a:sym typeface="Arial"/>
-            </a:endParaRPr>
-          </a:p>
-        </p:txBody>
-      </p:sp>
-      <p:sp>
-        <p:nvSpPr>
-          <p:cNvPr id="1013" name="Mapill;1013"/>
-          <p:cNvSpPr/>
-          <p:nvPr/>
-        </p:nvSpPr>
-        <p:spPr>
-          <a:xfrm>
-            <a:off x="685800" y="3425952"/>
-            <a:ext cx="10820095" cy="685800"/>
-          </a:xfrm>
-          <a:prstGeom prst="roundRect">
-            <a:avLst>
-              <a:gd fmla="val 17073" name="adj"/>
-            </a:avLst>
-          </a:prstGeom>
-          <a:solidFill>
-            <a:srgbClr val="FFFFFF"/>
-          </a:solidFill>
-          <a:ln>
-            <a:noFill/>
-          </a:ln>
-        </p:spPr>
-        <p:txBody>
-          <a:bodyPr anchorCtr="0" anchor="ctr" bIns="45700" lIns="91425" spcFirstLastPara="1" rIns="91425" wrap="square" tIns="45700">
-            <a:noAutofit/>
-          </a:bodyPr>
-          <a:lstStyle/>
-          <a:p>
-            <a:pPr indent="0" lvl="0" marL="0" marR="0" rtl="0" algn="ctr">
-              <a:lnSpc>
-                <a:spcPct val="100000"/>
-              </a:lnSpc>
-              <a:spcBef>
-                <a:spcPts val="0"/>
-              </a:spcBef>
-              <a:spcAft>
-                <a:spcPts val="0"/>
-              </a:spcAft>
-              <a:buClr>
-                <a:srgbClr val="000000"/>
-              </a:buClr>
-              <a:buSzPts val="1400"/>
-              <a:buFont typeface="Arial"/>
-              <a:buNone/>
-            </a:pPr>
-            <a:r>
-              <a:t/>
-            </a:r>
-            <a:endParaRPr b="0" i="0" spc="0" sz="1400" u="none" cap="none" strike="noStrike">
-              <a:solidFill>
-                <a:srgbClr val="000000"/>
-              </a:solidFill>
-              <a:latin typeface="Arial"/>
-              <a:ea typeface="Arial"/>
-              <a:cs typeface="Arial"/>
-              <a:sym typeface="Arial"/>
-            </a:endParaRPr>
-          </a:p>
-        </p:txBody>
-      </p:sp>
-      <p:sp>
-        <p:nvSpPr>
-          <p:cNvPr id="1014" name="Mapill;1014"/>
-          <p:cNvSpPr/>
-          <p:nvPr/>
-        </p:nvSpPr>
-        <p:spPr>
-          <a:xfrm>
-            <a:off x="8549640" y="3425952"/>
-            <a:ext cx="2956255" cy="685800"/>
-          </a:xfrm>
-          <a:prstGeom prst="roundRect">
-            <a:avLst>
-              <a:gd fmla="val 17073" name="adj"/>
-            </a:avLst>
-          </a:prstGeom>
-          <a:solidFill>
-            <a:srgbClr val="EAF1FE"/>
-          </a:solidFill>
-          <a:ln>
-            <a:noFill/>
-          </a:ln>
-        </p:spPr>
-        <p:txBody>
-          <a:bodyPr anchorCtr="0" anchor="ctr" bIns="45700" lIns="91425" spcFirstLastPara="1" rIns="91425" wrap="square" tIns="45700">
-            <a:noAutofit/>
-          </a:bodyPr>
-          <a:lstStyle/>
-          <a:p>
-            <a:pPr indent="0" lvl="0" marL="0" marR="0" rtl="0" algn="ctr">
-              <a:lnSpc>
-                <a:spcPct val="100000"/>
-              </a:lnSpc>
-              <a:spcBef>
-                <a:spcPts val="0"/>
-              </a:spcBef>
-              <a:spcAft>
-                <a:spcPts val="0"/>
-              </a:spcAft>
-              <a:buClr>
-                <a:srgbClr val="000000"/>
-              </a:buClr>
-              <a:buSzPts val="1400"/>
-              <a:buFont typeface="Arial"/>
-              <a:buNone/>
-            </a:pPr>
-            <a:r>
-              <a:t/>
-            </a:r>
-            <a:endParaRPr b="0" i="0" spc="0" sz="1400" u="none" cap="none" strike="noStrike">
-              <a:solidFill>
-                <a:srgbClr val="000000"/>
-              </a:solidFill>
-              <a:latin typeface="Arial"/>
-              <a:ea typeface="Arial"/>
-              <a:cs typeface="Arial"/>
-              <a:sym typeface="Arial"/>
-            </a:endParaRPr>
-          </a:p>
-        </p:txBody>
-      </p:sp>
-      <p:sp>
-        <p:nvSpPr>
-          <p:cNvPr id="1015" name="Mapill;1015"/>
-          <p:cNvSpPr txBox="1"/>
-          <p:nvPr/>
-        </p:nvSpPr>
-        <p:spPr>
-          <a:xfrm>
-            <a:off x="1005840" y="3425952"/>
-            <a:ext cx="3017520" cy="685800"/>
-          </a:xfrm>
-          <a:prstGeom prst="rect">
-            <a:avLst/>
-          </a:prstGeom>
-          <a:noFill/>
-          <a:ln>
-            <a:noFill/>
-          </a:ln>
-        </p:spPr>
-        <p:txBody>
-          <a:bodyPr anchorCtr="0" anchor="ctr" bIns="0" lIns="0" spcFirstLastPara="1" rIns="0" wrap="square" tIns="0">
-            <a:spAutoFit/>
-          </a:bodyPr>
-          <a:lstStyle/>
-          <a:p>
-            <a:pPr indent="0" lvl="0" marL="0" marR="0" rtl="0" algn="l">
-              <a:lnSpc>
-                <a:spcPct val="100000"/>
-              </a:lnSpc>
-              <a:spcBef>
-                <a:spcPts val="0"/>
-              </a:spcBef>
-              <a:spcAft>
-                <a:spcPts val="0"/>
-              </a:spcAft>
-              <a:buClr>
-                <a:srgbClr val="000000"/>
-              </a:buClr>
-              <a:buSzPts val="1500"/>
-              <a:buFont typeface="Arial"/>
-              <a:buNone/>
-            </a:pPr>
-            <a:r>
-              <a:rPr b="1" i="0" lang="en-US" spc="0" sz="1500" u="none" cap="none" strike="noStrike">
-                <a:solidFill>
-                  <a:srgbClr val="191C1E"/>
-                </a:solidFill>
-                <a:latin typeface="Plus Jakarta Sans"/>
-                <a:ea typeface="Plus Jakarta Sans"/>
-                <a:cs typeface="Plus Jakarta Sans"/>
-                <a:sym typeface="Plus Jakarta Sans"/>
-              </a:rPr>
-              <a:t>O remédio acabar</a:t>
-            </a:r>
-            <a:endParaRPr b="0" i="0" spc="0" sz="1400" u="none" cap="none" strike="noStrike">
-              <a:solidFill>
-                <a:srgbClr val="000000"/>
-              </a:solidFill>
-              <a:latin typeface="Arial"/>
-              <a:ea typeface="Arial"/>
-              <a:cs typeface="Arial"/>
-              <a:sym typeface="Arial"/>
-            </a:endParaRPr>
-          </a:p>
-        </p:txBody>
-      </p:sp>
-      <p:sp>
-        <p:nvSpPr>
-          <p:cNvPr id="1016" name="Mapill;1016"/>
-          <p:cNvSpPr txBox="1"/>
-          <p:nvPr/>
-        </p:nvSpPr>
-        <p:spPr>
-          <a:xfrm>
-            <a:off x="4320600" y="3425952"/>
-            <a:ext cx="4160400" cy="685800"/>
-          </a:xfrm>
-          <a:prstGeom prst="rect">
-            <a:avLst/>
-          </a:prstGeom>
-          <a:noFill/>
-          <a:ln>
-            <a:noFill/>
-          </a:ln>
-        </p:spPr>
-        <p:txBody>
-          <a:bodyPr anchorCtr="0" anchor="ctr" bIns="0" lIns="0" spcFirstLastPara="1" rIns="0" wrap="square" tIns="0">
-            <a:noAutofit/>
-          </a:bodyPr>
-          <a:lstStyle/>
-          <a:p>
-            <a:pPr indent="0" lvl="0" marL="0" marR="0" rtl="0" algn="l">
-              <a:lnSpc>
-                <a:spcPct val="105000"/>
-              </a:lnSpc>
-              <a:spcBef>
-                <a:spcPts val="0"/>
-              </a:spcBef>
-              <a:spcAft>
-                <a:spcPts val="0"/>
-              </a:spcAft>
-              <a:buClr>
-                <a:srgbClr val="000000"/>
-              </a:buClr>
-              <a:buSzPts val="1300"/>
-              <a:buFont typeface="Arial"/>
-              <a:buNone/>
-            </a:pPr>
-            <a:r>
-              <a:rPr b="0" i="0" lang="en-US" spc="0" sz="1300" u="none" cap="none" strike="noStrike">
-                <a:solidFill>
-                  <a:srgbClr val="191C1E"/>
-                </a:solidFill>
-                <a:latin typeface="Plus Jakarta Sans"/>
-                <a:ea typeface="Plus Jakarta Sans"/>
-                <a:cs typeface="Plus Jakarta Sans"/>
-                <a:sym typeface="Plus Jakarta Sans"/>
-              </a:rPr>
-              <a:t>desconta a dose, não a unidade, e prevê quando o remédio acaba</a:t>
+              <a:t>e dose variável por horário</a:t>
             </a:r>
             <a:endParaRPr b="0" i="0" spc="0" sz="1300" u="none" cap="none" strike="noStrike">
               <a:solidFill>
@@ -41333,13 +40913,13 @@
       </p:sp>
       <p:sp>
         <p:nvSpPr>
-          <p:cNvPr id="1017" name="Mapill;1017"/>
+          <p:cNvPr id="295" name="Google Shape;295;p10"/>
           <p:cNvSpPr txBox="1"/>
           <p:nvPr/>
         </p:nvSpPr>
         <p:spPr>
           <a:xfrm>
-            <a:off x="8778240" y="3425952"/>
+            <a:off x="8778240" y="2663952"/>
             <a:ext cx="2423160" cy="685800"/>
           </a:xfrm>
           <a:prstGeom prst="rect">
@@ -41383,7 +40963,7 @@
                 <a:cs typeface="Plus Jakarta Sans"/>
                 <a:sym typeface="Plus Jakarta Sans"/>
               </a:rPr>
-              <a:t>RF 18, 22 · RN 02, 03</a:t>
+              <a:t>RF 07, 09, 10 · RN 08, 09</a:t>
             </a:r>
             <a:endParaRPr b="0" i="0" spc="0" sz="1400" u="none" cap="none" strike="noStrike">
               <a:solidFill>
@@ -41399,13 +40979,13 @@
       </p:sp>
       <p:sp>
         <p:nvSpPr>
-          <p:cNvPr id="1018" name="Mapill;1018"/>
+          <p:cNvPr id="296" name="Google Shape;296;p10"/>
           <p:cNvSpPr/>
           <p:nvPr/>
         </p:nvSpPr>
         <p:spPr>
           <a:xfrm>
-            <a:off x="685800" y="4187952"/>
+            <a:off x="685800" y="3425952"/>
             <a:ext cx="10820095" cy="685800"/>
           </a:xfrm>
           <a:prstGeom prst="roundRect">
@@ -41460,13 +41040,13 @@
       </p:sp>
       <p:sp>
         <p:nvSpPr>
-          <p:cNvPr id="1019" name="Mapill;1019"/>
+          <p:cNvPr id="297" name="Google Shape;297;p10"/>
           <p:cNvSpPr/>
           <p:nvPr/>
         </p:nvSpPr>
         <p:spPr>
           <a:xfrm>
-            <a:off x="8549640" y="4187952"/>
+            <a:off x="8549640" y="3425952"/>
             <a:ext cx="2956255" cy="685800"/>
           </a:xfrm>
           <a:prstGeom prst="roundRect">
@@ -41521,14 +41101,14 @@
       </p:sp>
       <p:sp>
         <p:nvSpPr>
-          <p:cNvPr id="1020" name="Mapill;1020"/>
+          <p:cNvPr id="298" name="Google Shape;298;p10"/>
           <p:cNvSpPr txBox="1"/>
           <p:nvPr/>
         </p:nvSpPr>
         <p:spPr>
           <a:xfrm>
-            <a:off x="1005840" y="4187952"/>
-            <a:ext cx="3017520" cy="685800"/>
+            <a:off x="1005940" y="3653352"/>
+            <a:ext cx="3017400" cy="231000"/>
           </a:xfrm>
           <a:prstGeom prst="rect">
             <a:avLst/>
@@ -41571,7 +41151,31 @@
                 <a:cs typeface="Plus Jakarta Sans"/>
                 <a:sym typeface="Plus Jakarta Sans"/>
               </a:rPr>
-              <a:t>Consulta ou receita passar</a:t>
+              <a:t>O es</a:t>
+            </a:r>
+            <a:r>
+              <a:rPr b="1" lang="en-US" sz="1500">
+                <a:solidFill>
+                  <a:srgbClr val="191C1E"/>
+                </a:solidFill>
+                <a:latin typeface="Plus Jakarta Sans"/>
+                <a:ea typeface="Plus Jakarta Sans"/>
+                <a:cs typeface="Plus Jakarta Sans"/>
+                <a:sym typeface="Plus Jakarta Sans"/>
+              </a:rPr>
+              <a:t>toque do </a:t>
+            </a:r>
+            <a:r>
+              <a:rPr b="1" i="0" lang="en-US" spc="0" sz="1500" u="none" cap="none" strike="noStrike">
+                <a:solidFill>
+                  <a:srgbClr val="191C1E"/>
+                </a:solidFill>
+                <a:latin typeface="Plus Jakarta Sans"/>
+                <a:ea typeface="Plus Jakarta Sans"/>
+                <a:cs typeface="Plus Jakarta Sans"/>
+                <a:sym typeface="Plus Jakarta Sans"/>
+              </a:rPr>
+              <a:t>remédio acabar</a:t>
             </a:r>
             <a:endParaRPr b="0" i="0" spc="0" sz="1400" u="none" cap="none" strike="noStrike">
               <a:solidFill>
@@ -41587,13 +41191,13 @@
       </p:sp>
       <p:sp>
         <p:nvSpPr>
-          <p:cNvPr id="1021" name="Mapill;1021"/>
+          <p:cNvPr id="299" name="Google Shape;299;p10"/>
           <p:cNvSpPr txBox="1"/>
           <p:nvPr/>
         </p:nvSpPr>
         <p:spPr>
           <a:xfrm>
-            <a:off x="4320600" y="4187952"/>
+            <a:off x="4320600" y="3425952"/>
             <a:ext cx="4160400" cy="685800"/>
           </a:xfrm>
           <a:prstGeom prst="rect">
@@ -41637,7 +41241,7 @@
                 <a:cs typeface="Plus Jakarta Sans"/>
                 <a:sym typeface="Plus Jakarta Sans"/>
               </a:rPr>
-              <a:t>compromissos no mesmo calendário das doses, e aviso de receita vencendo</a:t>
+              <a:t>desconta a dose, não a unidade, e prevê quando o remédio acaba</a:t>
             </a:r>
             <a:endParaRPr b="0" i="0" spc="0" sz="1300" u="none" cap="none" strike="noStrike">
               <a:solidFill>
@@ -41653,13 +41257,13 @@
       </p:sp>
       <p:sp>
         <p:nvSpPr>
-          <p:cNvPr id="1022" name="Mapill;1022"/>
+          <p:cNvPr id="300" name="Google Shape;300;p10"/>
           <p:cNvSpPr txBox="1"/>
           <p:nvPr/>
         </p:nvSpPr>
         <p:spPr>
           <a:xfrm>
-            <a:off x="8778240" y="4187952"/>
+            <a:off x="8778240" y="3425952"/>
             <a:ext cx="2423160" cy="685800"/>
           </a:xfrm>
           <a:prstGeom prst="rect">
@@ -41703,7 +41307,7 @@
                 <a:cs typeface="Plus Jakarta Sans"/>
                 <a:sym typeface="Plus Jakarta Sans"/>
               </a:rPr>
-              <a:t>RF 34, 35, 38 · RN 16</a:t>
+              <a:t>RF 18, 22 · RN 02, 03</a:t>
             </a:r>
             <a:endParaRPr b="0" i="0" spc="0" sz="1400" u="none" cap="none" strike="noStrike">
               <a:solidFill>
@@ -41719,13 +41323,13 @@
       </p:sp>
       <p:sp>
         <p:nvSpPr>
-          <p:cNvPr id="1023" name="Mapill;1023"/>
+          <p:cNvPr id="301" name="Google Shape;301;p10"/>
           <p:cNvSpPr/>
           <p:nvPr/>
         </p:nvSpPr>
         <p:spPr>
           <a:xfrm>
-            <a:off x="685800" y="4949952"/>
+            <a:off x="685800" y="4187952"/>
             <a:ext cx="10820095" cy="685800"/>
           </a:xfrm>
           <a:prstGeom prst="roundRect">
@@ -41780,13 +41384,13 @@
       </p:sp>
       <p:sp>
         <p:nvSpPr>
-          <p:cNvPr id="1024" name="Mapill;1024"/>
+          <p:cNvPr id="302" name="Google Shape;302;p10"/>
           <p:cNvSpPr/>
           <p:nvPr/>
         </p:nvSpPr>
         <p:spPr>
           <a:xfrm>
-            <a:off x="8549640" y="4949952"/>
+            <a:off x="8549640" y="4187952"/>
             <a:ext cx="2956255" cy="685800"/>
           </a:xfrm>
           <a:prstGeom prst="roundRect">
@@ -41841,14 +41445,14 @@
       </p:sp>
       <p:sp>
         <p:nvSpPr>
-          <p:cNvPr id="1025" name="Mapill;1025"/>
+          <p:cNvPr id="303" name="Google Shape;303;p10"/>
           <p:cNvSpPr txBox="1"/>
           <p:nvPr/>
         </p:nvSpPr>
         <p:spPr>
           <a:xfrm>
-            <a:off x="1005840" y="4949952"/>
-            <a:ext cx="3017520" cy="685800"/>
+            <a:off x="1005940" y="4300002"/>
+            <a:ext cx="3017400" cy="461700"/>
           </a:xfrm>
           <a:prstGeom prst="rect">
             <a:avLst/>
@@ -41882,7 +41486,7 @@
               <a:buNone/>
             </a:pPr>
             <a:r>
-              <a:rPr b="1" i="0" lang="en-US" spc="0" sz="1500" u="none" cap="none" strike="noStrike">
+              <a:rPr b="1" lang="en-US" sz="1500">
                 <a:solidFill>
                   <a:srgbClr val="191C1E"/>
                 </a:solidFill>
@@ -41891,7 +41495,47 @@
                 <a:cs typeface="Plus Jakarta Sans"/>
                 <a:sym typeface="Plus Jakarta Sans"/>
               </a:rPr>
-              <a:t>Sem internet ou privacidade</a:t>
+              <a:t>Perder consulta ou prazo </a:t>
+            </a:r>
+            <a:endParaRPr b="1" sz="1500">
+              <a:solidFill>
+                <a:srgbClr val="191C1E"/>
+              </a:solidFill>
+              <a:latin typeface="Plus Jakarta Sans"/>
+              <a:ea typeface="Plus Jakarta Sans"/>
+              <a:cs typeface="Plus Jakarta Sans"/>
+              <a:sym typeface="Plus Jakarta Sans"/>
+            </a:endParaRPr>
+          </a:p>
+          <a:p>
+            <a:pPr indent="0" lvl="0" marL="0" marR="0" rtl="0" algn="l">
+              <a:lnSpc>
+                <a:spcPct val="100000"/>
+              </a:lnSpc>
+              <a:spcBef>
+                <a:spcPts val="0"/>
+              </a:spcBef>
+              <a:spcAft>
+                <a:spcPts val="0"/>
+              </a:spcAft>
+              <a:buClr>
+                <a:srgbClr val="000000"/>
+              </a:buClr>
+              <a:buSzPts val="1500"/>
+              <a:buFont typeface="Arial"/>
+              <a:buNone/>
+            </a:pPr>
+            <a:r>
+              <a:rPr b="1" lang="en-US" sz="1500">
+                <a:solidFill>
+                  <a:srgbClr val="191C1E"/>
+                </a:solidFill>
+                <a:latin typeface="Plus Jakarta Sans"/>
+                <a:ea typeface="Plus Jakarta Sans"/>
+                <a:cs typeface="Plus Jakarta Sans"/>
+                <a:sym typeface="Plus Jakarta Sans"/>
+              </a:rPr>
+              <a:t>da receita</a:t>
             </a:r>
             <a:endParaRPr b="0" i="0" spc="0" sz="1400" u="none" cap="none" strike="noStrike">
               <a:solidFill>
@@ -41907,13 +41551,13 @@
       </p:sp>
       <p:sp>
         <p:nvSpPr>
-          <p:cNvPr id="1026" name="Mapill;1026"/>
+          <p:cNvPr id="304" name="Google Shape;304;p10"/>
           <p:cNvSpPr txBox="1"/>
           <p:nvPr/>
         </p:nvSpPr>
         <p:spPr>
           <a:xfrm>
-            <a:off x="4320600" y="4949952"/>
+            <a:off x="4320600" y="4187952"/>
             <a:ext cx="4160400" cy="685800"/>
           </a:xfrm>
           <a:prstGeom prst="rect">
@@ -41948,7 +41592,7 @@
               <a:buNone/>
             </a:pPr>
             <a:r>
-              <a:rPr b="0" i="0" lang="en-US" spc="0" sz="1300" u="none" cap="none" strike="noStrike">
+              <a:rPr lang="en-US" sz="1300">
                 <a:solidFill>
                   <a:srgbClr val="191C1E"/>
                 </a:solidFill>
@@ -41957,7 +41601,47 @@
                 <a:cs typeface="Plus Jakarta Sans"/>
                 <a:sym typeface="Plus Jakarta Sans"/>
               </a:rPr>
-              <a:t>funciona offline e sem conta, e o paciente exporta ou apaga os dados</a:t>
+              <a:t>consultas e exames no mesmo calendário das </a:t>
+            </a:r>
+            <a:endParaRPr sz="1300">
+              <a:solidFill>
+                <a:srgbClr val="191C1E"/>
+              </a:solidFill>
+              <a:latin typeface="Plus Jakarta Sans"/>
+              <a:ea typeface="Plus Jakarta Sans"/>
+              <a:cs typeface="Plus Jakarta Sans"/>
+              <a:sym typeface="Plus Jakarta Sans"/>
+            </a:endParaRPr>
+          </a:p>
+          <a:p>
+            <a:pPr indent="0" lvl="0" marL="0" marR="0" rtl="0" algn="l">
+              <a:lnSpc>
+                <a:spcPct val="105000"/>
+              </a:lnSpc>
+              <a:spcBef>
+                <a:spcPts val="0"/>
+              </a:spcBef>
+              <a:spcAft>
+                <a:spcPts val="0"/>
+              </a:spcAft>
+              <a:buClr>
+                <a:srgbClr val="000000"/>
+              </a:buClr>
+              <a:buSzPts val="1300"/>
+              <a:buFont typeface="Arial"/>
+              <a:buNone/>
+            </a:pPr>
+            <a:r>
+              <a:rPr lang="en-US" sz="1300">
+                <a:solidFill>
+                  <a:srgbClr val="191C1E"/>
+                </a:solidFill>
+                <a:latin typeface="Plus Jakarta Sans"/>
+                <a:ea typeface="Plus Jakarta Sans"/>
+                <a:cs typeface="Plus Jakarta Sans"/>
+                <a:sym typeface="Plus Jakarta Sans"/>
+              </a:rPr>
+              <a:t>doses, e aviso de receita vencendo</a:t>
             </a:r>
             <a:endParaRPr b="0" i="0" spc="0" sz="1300" u="none" cap="none" strike="noStrike">
               <a:solidFill>
@@ -41973,7 +41657,427 @@
       </p:sp>
       <p:sp>
         <p:nvSpPr>
-          <p:cNvPr id="1027" name="Mapill;1027"/>
+          <p:cNvPr id="305" name="Google Shape;305;p10"/>
+          <p:cNvSpPr txBox="1"/>
+          <p:nvPr/>
+        </p:nvSpPr>
+        <p:spPr>
+          <a:xfrm>
+            <a:off x="8778240" y="4187952"/>
+            <a:ext cx="2423160" cy="685800"/>
+          </a:xfrm>
+          <a:prstGeom prst="rect">
+            <a:avLst/>
+          </a:prstGeom>
+          <a:noFill/>
+          <a:ln>
+            <a:noFill/>
+          </a:ln>
+        </p:spPr>
+        <p:txBody>
+          <a:bodyPr anchorCtr="0" anchor="ctr" bIns="0" lIns="0" spcFirstLastPara="1" rIns="0" wrap="square" tIns="0">
+            <a:spAutoFit/>
+          </a:bodyPr>
+          <a:lstStyle/>
+          <a:p>
+            <a:pPr indent="0" lvl="0" marL="0" marR="0" rtl="0" algn="l">
+              <a:lnSpc>
+                <a:spcPct val="105000"/>
+              </a:lnSpc>
+              <a:spcBef>
+                <a:spcPts val="0"/>
+              </a:spcBef>
+              <a:spcAft>
+                <a:spcPts val="0"/>
+              </a:spcAft>
+              <a:buClr>
+                <a:srgbClr val="000000"/>
+              </a:buClr>
+              <a:buSzPts val="1300"/>
+              <a:buFont typeface="Arial"/>
+              <a:buNone/>
+            </a:pPr>
+            <a:r>
+              <a:rPr b="1" i="0" lang="en-US" spc="0" sz="1300" u="none" cap="none" strike="noStrike">
+                <a:solidFill>
+                  <a:srgbClr val="0A3F8F"/>
+                </a:solidFill>
+                <a:latin typeface="Plus Jakarta Sans"/>
+                <a:ea typeface="Plus Jakarta Sans"/>
+                <a:cs typeface="Plus Jakarta Sans"/>
+                <a:sym typeface="Plus Jakarta Sans"/>
+              </a:rPr>
+              <a:t>RF 34, 35, 38 · RN 16</a:t>
+            </a:r>
+            <a:endParaRPr b="0" i="0" spc="0" sz="1400" u="none" cap="none" strike="noStrike">
+              <a:solidFill>
+                <a:srgbClr val="000000"/>
+              </a:solidFill>
+              <a:latin typeface="Arial"/>
+              <a:ea typeface="Arial"/>
+              <a:cs typeface="Arial"/>
+              <a:sym typeface="Arial"/>
+            </a:endParaRPr>
+          </a:p>
+        </p:txBody>
+      </p:sp>
+      <p:sp>
+        <p:nvSpPr>
+          <p:cNvPr id="306" name="Google Shape;306;p10"/>
+          <p:cNvSpPr/>
+          <p:nvPr/>
+        </p:nvSpPr>
+        <p:spPr>
+          <a:xfrm>
+            <a:off x="685800" y="4949952"/>
+            <a:ext cx="10820095" cy="685800"/>
+          </a:xfrm>
+          <a:prstGeom prst="roundRect">
+            <a:avLst>
+              <a:gd fmla="val 17073" name="adj"/>
+            </a:avLst>
+          </a:prstGeom>
+          <a:solidFill>
+            <a:srgbClr val="FFFFFF"/>
+          </a:solidFill>
+          <a:ln>
+            <a:noFill/>
+          </a:ln>
+        </p:spPr>
+        <p:txBody>
+          <a:bodyPr anchorCtr="0" anchor="ctr" bIns="45700" lIns="91425" spcFirstLastPara="1" rIns="91425" wrap="square" tIns="45700">
+            <a:noAutofit/>
+          </a:bodyPr>
+          <a:lstStyle/>
+          <a:p>
+            <a:pPr indent="0" lvl="0" marL="0" marR="0" rtl="0" algn="ctr">
+              <a:lnSpc>
+                <a:spcPct val="100000"/>
+              </a:lnSpc>
+              <a:spcBef>
+                <a:spcPts val="0"/>
+              </a:spcBef>
+              <a:spcAft>
+                <a:spcPts val="0"/>
+              </a:spcAft>
+              <a:buClr>
+                <a:srgbClr val="000000"/>
+              </a:buClr>
+              <a:buSzPts val="1400"/>
+              <a:buFont typeface="Arial"/>
+              <a:buNone/>
+            </a:pPr>
+            <a:r>
+              <a:t/>
+            </a:r>
+            <a:endParaRPr b="0" i="0" spc="0" sz="1400" u="none" cap="none" strike="noStrike">
+              <a:solidFill>
+                <a:srgbClr val="000000"/>
+              </a:solidFill>
+              <a:latin typeface="Arial"/>
+              <a:ea typeface="Arial"/>
+              <a:cs typeface="Arial"/>
+              <a:sym typeface="Arial"/>
+            </a:endParaRPr>
+          </a:p>
+        </p:txBody>
+      </p:sp>
+      <p:sp>
+        <p:nvSpPr>
+          <p:cNvPr id="307" name="Google Shape;307;p10"/>
+          <p:cNvSpPr/>
+          <p:nvPr/>
+        </p:nvSpPr>
+        <p:spPr>
+          <a:xfrm>
+            <a:off x="8549640" y="4949952"/>
+            <a:ext cx="2956255" cy="685800"/>
+          </a:xfrm>
+          <a:prstGeom prst="roundRect">
+            <a:avLst>
+              <a:gd fmla="val 17073" name="adj"/>
+            </a:avLst>
+          </a:prstGeom>
+          <a:solidFill>
+            <a:srgbClr val="EAF1FE"/>
+          </a:solidFill>
+          <a:ln>
+            <a:noFill/>
+          </a:ln>
+        </p:spPr>
+        <p:txBody>
+          <a:bodyPr anchorCtr="0" anchor="ctr" bIns="45700" lIns="91425" spcFirstLastPara="1" rIns="91425" wrap="square" tIns="45700">
+            <a:noAutofit/>
+          </a:bodyPr>
+          <a:lstStyle/>
+          <a:p>
+            <a:pPr indent="0" lvl="0" marL="0" marR="0" rtl="0" algn="ctr">
+              <a:lnSpc>
+                <a:spcPct val="100000"/>
+              </a:lnSpc>
+              <a:spcBef>
+                <a:spcPts val="0"/>
+              </a:spcBef>
+              <a:spcAft>
+                <a:spcPts val="0"/>
+              </a:spcAft>
+              <a:buClr>
+                <a:srgbClr val="000000"/>
+              </a:buClr>
+              <a:buSzPts val="1400"/>
+              <a:buFont typeface="Arial"/>
+              <a:buNone/>
+            </a:pPr>
+            <a:r>
+              <a:t/>
+            </a:r>
+            <a:endParaRPr b="0" i="0" spc="0" sz="1400" u="none" cap="none" strike="noStrike">
+              <a:solidFill>
+                <a:srgbClr val="000000"/>
+              </a:solidFill>
+              <a:latin typeface="Arial"/>
+              <a:ea typeface="Arial"/>
+              <a:cs typeface="Arial"/>
+              <a:sym typeface="Arial"/>
+            </a:endParaRPr>
+          </a:p>
+        </p:txBody>
+      </p:sp>
+      <p:sp>
+        <p:nvSpPr>
+          <p:cNvPr id="308" name="Google Shape;308;p10"/>
+          <p:cNvSpPr txBox="1"/>
+          <p:nvPr/>
+        </p:nvSpPr>
+        <p:spPr>
+          <a:xfrm>
+            <a:off x="1005940" y="5062002"/>
+            <a:ext cx="3017400" cy="461700"/>
+          </a:xfrm>
+          <a:prstGeom prst="rect">
+            <a:avLst/>
+          </a:prstGeom>
+          <a:noFill/>
+          <a:ln>
+            <a:noFill/>
+          </a:ln>
+        </p:spPr>
+        <p:txBody>
+          <a:bodyPr anchorCtr="0" anchor="ctr" bIns="0" lIns="0" spcFirstLastPara="1" rIns="0" wrap="square" tIns="0">
+            <a:spAutoFit/>
+          </a:bodyPr>
+          <a:lstStyle/>
+          <a:p>
+            <a:pPr indent="0" lvl="0" marL="0" marR="0" rtl="0" algn="l">
+              <a:lnSpc>
+                <a:spcPct val="100000"/>
+              </a:lnSpc>
+              <a:spcBef>
+                <a:spcPts val="0"/>
+              </a:spcBef>
+              <a:spcAft>
+                <a:spcPts val="0"/>
+              </a:spcAft>
+              <a:buClr>
+                <a:srgbClr val="000000"/>
+              </a:buClr>
+              <a:buSzPts val="1500"/>
+              <a:buFont typeface="Arial"/>
+              <a:buNone/>
+            </a:pPr>
+            <a:r>
+              <a:rPr b="1" i="0" lang="en-US" spc="0" sz="1500" u="none" cap="none" strike="noStrike">
+                <a:solidFill>
+                  <a:srgbClr val="191C1E"/>
+                </a:solidFill>
+                <a:latin typeface="Plus Jakarta Sans"/>
+                <a:ea typeface="Plus Jakarta Sans"/>
+                <a:cs typeface="Plus Jakarta Sans"/>
+                <a:sym typeface="Plus Jakarta Sans"/>
+              </a:rPr>
+              <a:t>Sem internet </a:t>
+            </a:r>
+            <a:r>
+              <a:rPr b="1" lang="en-US" sz="1500">
+                <a:solidFill>
+                  <a:srgbClr val="191C1E"/>
+                </a:solidFill>
+                <a:latin typeface="Plus Jakarta Sans"/>
+                <a:ea typeface="Plus Jakarta Sans"/>
+                <a:cs typeface="Plus Jakarta Sans"/>
+                <a:sym typeface="Plus Jakarta Sans"/>
+              </a:rPr>
+              <a:t>/ Controle sobre </a:t>
+            </a:r>
+            <a:endParaRPr b="1" sz="1500">
+              <a:solidFill>
+                <a:srgbClr val="191C1E"/>
+              </a:solidFill>
+              <a:latin typeface="Plus Jakarta Sans"/>
+              <a:ea typeface="Plus Jakarta Sans"/>
+              <a:cs typeface="Plus Jakarta Sans"/>
+              <a:sym typeface="Plus Jakarta Sans"/>
+            </a:endParaRPr>
+          </a:p>
+          <a:p>
+            <a:pPr indent="0" lvl="0" marL="0" marR="0" rtl="0" algn="l">
+              <a:lnSpc>
+                <a:spcPct val="100000"/>
+              </a:lnSpc>
+              <a:spcBef>
+                <a:spcPts val="0"/>
+              </a:spcBef>
+              <a:spcAft>
+                <a:spcPts val="0"/>
+              </a:spcAft>
+              <a:buClr>
+                <a:srgbClr val="000000"/>
+              </a:buClr>
+              <a:buSzPts val="1500"/>
+              <a:buFont typeface="Arial"/>
+              <a:buNone/>
+            </a:pPr>
+            <a:r>
+              <a:rPr b="1" lang="en-US" sz="1500">
+                <a:solidFill>
+                  <a:srgbClr val="191C1E"/>
+                </a:solidFill>
+                <a:latin typeface="Plus Jakarta Sans"/>
+                <a:ea typeface="Plus Jakarta Sans"/>
+                <a:cs typeface="Plus Jakarta Sans"/>
+                <a:sym typeface="Plus Jakarta Sans"/>
+              </a:rPr>
+              <a:t>os dados</a:t>
+            </a:r>
+            <a:endParaRPr b="0" i="0" spc="0" sz="1400" u="none" cap="none" strike="noStrike">
+              <a:solidFill>
+                <a:srgbClr val="000000"/>
+              </a:solidFill>
+              <a:latin typeface="Arial"/>
+              <a:ea typeface="Arial"/>
+              <a:cs typeface="Arial"/>
+              <a:sym typeface="Arial"/>
+            </a:endParaRPr>
+          </a:p>
+        </p:txBody>
+      </p:sp>
+      <p:sp>
+        <p:nvSpPr>
+          <p:cNvPr id="309" name="Google Shape;309;p10"/>
+          <p:cNvSpPr txBox="1"/>
+          <p:nvPr/>
+        </p:nvSpPr>
+        <p:spPr>
+          <a:xfrm>
+            <a:off x="4320600" y="4949952"/>
+            <a:ext cx="4160400" cy="685800"/>
+          </a:xfrm>
+          <a:prstGeom prst="rect">
+            <a:avLst/>
+          </a:prstGeom>
+          <a:noFill/>
+          <a:ln>
+            <a:noFill/>
+          </a:ln>
+        </p:spPr>
+        <p:txBody>
+          <a:bodyPr anchorCtr="0" anchor="ctr" bIns="0" lIns="0" spcFirstLastPara="1" rIns="0" wrap="square" tIns="0">
+            <a:noAutofit/>
+          </a:bodyPr>
+          <a:lstStyle/>
+          <a:p>
+            <a:pPr indent="0" lvl="0" marL="0" marR="0" rtl="0" algn="l">
+              <a:lnSpc>
+                <a:spcPct val="105000"/>
+              </a:lnSpc>
+              <a:spcBef>
+                <a:spcPts val="0"/>
+              </a:spcBef>
+              <a:spcAft>
+                <a:spcPts val="0"/>
+              </a:spcAft>
+              <a:buClr>
+                <a:srgbClr val="000000"/>
+              </a:buClr>
+              <a:buSzPts val="1300"/>
+              <a:buFont typeface="Arial"/>
+              <a:buNone/>
+            </a:pPr>
+            <a:r>
+              <a:rPr b="0" i="0" lang="en-US" spc="0" sz="1300" u="none" cap="none" strike="noStrike">
+                <a:solidFill>
+                  <a:srgbClr val="191C1E"/>
+                </a:solidFill>
+                <a:latin typeface="Plus Jakarta Sans"/>
+                <a:ea typeface="Plus Jakarta Sans"/>
+                <a:cs typeface="Plus Jakarta Sans"/>
+                <a:sym typeface="Plus Jakarta Sans"/>
+              </a:rPr>
+              <a:t>funciona offline e sem conta, e o paciente</a:t>
+            </a:r>
+            <a:r>
+              <a:rPr lang="en-US" sz="1300">
+                <a:solidFill>
+                  <a:srgbClr val="191C1E"/>
+                </a:solidFill>
+                <a:latin typeface="Plus Jakarta Sans"/>
+                <a:ea typeface="Plus Jakarta Sans"/>
+                <a:cs typeface="Plus Jakarta Sans"/>
+                <a:sym typeface="Plus Jakarta Sans"/>
+              </a:rPr>
+              <a:t> pode </a:t>
+            </a:r>
+            <a:r>
+              <a:rPr b="0" i="0" lang="en-US" spc="0" sz="1300" u="none" cap="none" strike="noStrike">
+                <a:solidFill>
+                  <a:srgbClr val="191C1E"/>
+                </a:solidFill>
+                <a:latin typeface="Plus Jakarta Sans"/>
+                <a:ea typeface="Plus Jakarta Sans"/>
+                <a:cs typeface="Plus Jakarta Sans"/>
+                <a:sym typeface="Plus Jakarta Sans"/>
+              </a:rPr>
+              <a:t>exporta</a:t>
+            </a:r>
+            <a:r>
+              <a:rPr lang="en-US" sz="1300">
+                <a:solidFill>
+                  <a:srgbClr val="191C1E"/>
+                </a:solidFill>
+                <a:latin typeface="Plus Jakarta Sans"/>
+                <a:ea typeface="Plus Jakarta Sans"/>
+                <a:cs typeface="Plus Jakarta Sans"/>
+                <a:sym typeface="Plus Jakarta Sans"/>
+              </a:rPr>
+              <a:t>r</a:t>
+            </a:r>
+            <a:r>
+              <a:rPr b="0" i="0" lang="en-US" spc="0" sz="1300" u="none" cap="none" strike="noStrike">
+                <a:solidFill>
+                  <a:srgbClr val="191C1E"/>
+                </a:solidFill>
+                <a:latin typeface="Plus Jakarta Sans"/>
+                <a:ea typeface="Plus Jakarta Sans"/>
+                <a:cs typeface="Plus Jakarta Sans"/>
+                <a:sym typeface="Plus Jakarta Sans"/>
+              </a:rPr>
+              <a:t> ou apaga os dados a qualquer momento</a:t>
+            </a:r>
+            <a:endParaRPr b="0" i="0" spc="0" sz="1300" u="none" cap="none" strike="noStrike">
+              <a:solidFill>
+                <a:srgbClr val="191C1E"/>
+              </a:solidFill>
+              <a:latin typeface="Plus Jakarta Sans"/>
+              <a:ea typeface="Plus Jakarta Sans"/>
+              <a:cs typeface="Plus Jakarta Sans"/>
+              <a:sym typeface="Plus Jakarta Sans"/>
+            </a:endParaRPr>
+          </a:p>
+        </p:txBody>
+      </p:sp>
+      <p:sp>
+        <p:nvSpPr>
+          <p:cNvPr id="310" name="Google Shape;310;p10"/>
           <p:cNvSpPr txBox="1"/>
           <p:nvPr/>
         </p:nvSpPr>
@@ -42069,6 +42173,285 @@
 </file>
 
 <file path=ppt/theme/theme1.xml><?xml version="1.0" encoding="utf-8"?>
+<a:theme xmlns:a="http://schemas.openxmlformats.org/drawingml/2006/main" xmlns:r="http://schemas.openxmlformats.org/officeDocument/2006/relationships" name="Office Theme">
+  <a:themeElements>
+    <a:clrScheme name="Office">
+      <a:dk1>
+        <a:srgbClr val="000000"/>
+      </a:dk1>
+      <a:lt1>
+        <a:srgbClr val="FFFFFF"/>
+      </a:lt1>
+      <a:dk2>
+        <a:srgbClr val="1F497D"/>
+      </a:dk2>
+      <a:lt2>
+        <a:srgbClr val="EEECE1"/>
+      </a:lt2>
+      <a:accent1>
+        <a:srgbClr val="4F81BD"/>
+      </a:accent1>
+      <a:accent2>
+        <a:srgbClr val="C0504D"/>
+      </a:accent2>
+      <a:accent3>
+        <a:srgbClr val="9BBB59"/>
+      </a:accent3>
+      <a:accent4>
+        <a:srgbClr val="8064A2"/>
+      </a:accent4>
+      <a:accent5>
+        <a:srgbClr val="4BACC6"/>
+      </a:accent5>
+      <a:accent6>
+        <a:srgbClr val="F79646"/>
+      </a:accent6>
+      <a:hlink>
+        <a:srgbClr val="0000FF"/>
+      </a:hlink>
+      <a:folHlink>
+        <a:srgbClr val="800080"/>
+      </a:folHlink>
+    </a:clrScheme>
+    <a:fontScheme name="Office">
+      <a:majorFont>
+        <a:latin typeface="Arial"/>
+        <a:ea typeface=""/>
+        <a:cs typeface=""/>
+        <a:font script="Jpan" typeface="ＭＳ Ｐゴシック"/>
+        <a:font script="Hang" typeface="맑은 고딕"/>
+        <a:font script="Hans" typeface="宋体"/>
+        <a:font script="Hant" typeface="新細明體"/>
+        <a:font script="Arab" typeface="Times New Roman"/>
+        <a:font script="Hebr" typeface="Times New Roman"/>
+        <a:font script="Thai" typeface="Angsana New"/>
+        <a:font script="Ethi" typeface="Nyala"/>
+        <a:font script="Beng" typeface="Vrinda"/>
+        <a:font script="Gujr" typeface="Shruti"/>
+        <a:font script="Khmr" typeface="MoolBoran"/>
+        <a:font script="Knda" typeface="Tunga"/>
+        <a:font script="Guru" typeface="Raavi"/>
+        <a:font script="Cans" typeface="Euphemia"/>
+        <a:font script="Cher" typeface="Plantagenet Cherokee"/>
+        <a:font script="Yiii" typeface="Microsoft Yi Baiti"/>
+        <a:font script="Tibt" typeface="Microsoft Himalaya"/>
+        <a:font script="Thaa" typeface="MV Boli"/>
+        <a:font script="Deva" typeface="Mangal"/>
+        <a:font script="Telu" typeface="Gautami"/>
+        <a:font script="Taml" typeface="Latha"/>
+        <a:font script="Syrc" typeface="Estrangelo Edessa"/>
+        <a:font script="Orya" typeface="Kalinga"/>
+        <a:font script="Mlym" typeface="Kartika"/>
+        <a:font script="Laoo" typeface="DokChampa"/>
+        <a:font script="Sinh" typeface="Iskoola Pota"/>
+        <a:font script="Mong" typeface="Mongolian Baiti"/>
+        <a:font script="Viet" typeface="Times New Roman"/>
+        <a:font script="Uigh" typeface="Microsoft Uighur"/>
+        <a:font script="Geor" typeface="Sylfaen"/>
+      </a:majorFont>
+      <a:minorFont>
+        <a:latin typeface="Arial"/>
+        <a:ea typeface=""/>
+        <a:cs typeface=""/>
+        <a:font script="Jpan" typeface="ＭＳ Ｐゴシック"/>
+        <a:font script="Hang" typeface="맑은 고딕"/>
+        <a:font script="Hans" typeface="宋体"/>
+        <a:font script="Hant" typeface="新細明體"/>
+        <a:font script="Arab" typeface="Arial"/>
+        <a:font script="Hebr" typeface="Arial"/>
+        <a:font script="Thai" typeface="Cordia New"/>
+        <a:font script="Ethi" typeface="Nyala"/>
+        <a:font script="Beng" typeface="Vrinda"/>
+        <a:font script="Gujr" typeface="Shruti"/>
+        <a:font script="Khmr" typeface="DaunPenh"/>
+        <a:font script="Knda" typeface="Tunga"/>
+        <a:font script="Guru" typeface="Raavi"/>
+        <a:font script="Cans" typeface="Euphemia"/>
+        <a:font script="Cher" typeface="Plantagenet Cherokee"/>
+        <a:font script="Yiii" typeface="Microsoft Yi Baiti"/>
+        <a:font script="Tibt" typeface="Microsoft Himalaya"/>
+        <a:font script="Thaa" typeface="MV Boli"/>
+        <a:font script="Deva" typeface="Mangal"/>
+        <a:font script="Telu" typeface="Gautami"/>
+        <a:font script="Taml" typeface="Latha"/>
+        <a:font script="Syrc" typeface="Estrangelo Edessa"/>
+        <a:font script="Orya" typeface="Kalinga"/>
+        <a:font script="Mlym" typeface="Kartika"/>
+        <a:font script="Laoo" typeface="DokChampa"/>
+        <a:font script="Sinh" typeface="Iskoola Pota"/>
+        <a:font script="Mong" typeface="Mongolian Baiti"/>
+        <a:font script="Viet" typeface="Arial"/>
+        <a:font script="Uigh" typeface="Microsoft Uighur"/>
+        <a:font script="Geor" typeface="Sylfaen"/>
+      </a:minorFont>
+    </a:fontScheme>
+    <a:fmtScheme name="Office">
+      <a:fillStyleLst>
+        <a:solidFill>
+          <a:schemeClr val="phClr"/>
+        </a:solidFill>
+        <a:gradFill rotWithShape="1">
+          <a:gsLst>
+            <a:gs pos="0">
+              <a:schemeClr val="phClr">
+                <a:tint val="50000"/>
+                <a:satMod val="300000"/>
+              </a:schemeClr>
+            </a:gs>
+            <a:gs pos="35000">
+              <a:schemeClr val="phClr">
+                <a:tint val="37000"/>
+                <a:satMod val="300000"/>
+              </a:schemeClr>
+            </a:gs>
+            <a:gs pos="100000">
+              <a:schemeClr val="phClr">
+                <a:tint val="15000"/>
+                <a:satMod val="350000"/>
+              </a:schemeClr>
+            </a:gs>
+          </a:gsLst>
+          <a:lin ang="16200000" scaled="1"/>
+        </a:gradFill>
+        <a:gradFill rotWithShape="1">
+          <a:gsLst>
+            <a:gs pos="0">
+              <a:schemeClr val="phClr">
+                <a:tint val="100000"/>
+                <a:shade val="100000"/>
+                <a:satMod val="130000"/>
+              </a:schemeClr>
+            </a:gs>
+            <a:gs pos="100000">
+              <a:schemeClr val="phClr">
+                <a:tint val="50000"/>
+                <a:shade val="100000"/>
+                <a:satMod val="350000"/>
+              </a:schemeClr>
+            </a:gs>
+          </a:gsLst>
+          <a:lin ang="16200000" scaled="0"/>
+        </a:gradFill>
+      </a:fillStyleLst>
+      <a:lnStyleLst>
+        <a:ln w="9525" cap="flat" cmpd="sng" algn="ctr">
+          <a:solidFill>
+            <a:schemeClr val="phClr">
+              <a:shade val="95000"/>
+              <a:satMod val="105000"/>
+            </a:schemeClr>
+          </a:solidFill>
+          <a:prstDash val="solid"/>
+        </a:ln>
+        <a:ln w="25400" cap="flat" cmpd="sng" algn="ctr">
+          <a:solidFill>
+            <a:schemeClr val="phClr"/>
+          </a:solidFill>
+          <a:prstDash val="solid"/>
+        </a:ln>
+        <a:ln w="38100" cap="flat" cmpd="sng" algn="ctr">
+          <a:solidFill>
+            <a:schemeClr val="phClr"/>
+          </a:solidFill>
+          <a:prstDash val="solid"/>
+        </a:ln>
+      </a:lnStyleLst>
+      <a:effectStyleLst>
+        <a:effectStyle>
+          <a:effectLst>
+            <a:outerShdw blurRad="40000" dist="20000" dir="5400000" rotWithShape="0">
+              <a:srgbClr val="000000">
+                <a:alpha val="38000"/>
+              </a:srgbClr>
+            </a:outerShdw>
+          </a:effectLst>
+        </a:effectStyle>
+        <a:effectStyle>
+          <a:effectLst>
+            <a:outerShdw blurRad="40000" dist="23000" dir="5400000" rotWithShape="0">
+              <a:srgbClr val="000000">
+                <a:alpha val="35000"/>
+              </a:srgbClr>
+            </a:outerShdw>
+          </a:effectLst>
+        </a:effectStyle>
+        <a:effectStyle>
+          <a:effectLst>
+            <a:outerShdw blurRad="40000" dist="23000" dir="5400000" rotWithShape="0">
+              <a:srgbClr val="000000">
+                <a:alpha val="35000"/>
+              </a:srgbClr>
+            </a:outerShdw>
+          </a:effectLst>
+          <a:scene3d>
+            <a:camera prst="orthographicFront">
+              <a:rot lat="0" lon="0" rev="0"/>
+            </a:camera>
+            <a:lightRig rig="threePt" dir="t">
+              <a:rot lat="0" lon="0" rev="1200000"/>
+            </a:lightRig>
+          </a:scene3d>
+          <a:sp3d>
+            <a:bevelT w="63500" h="25400"/>
+          </a:sp3d>
+        </a:effectStyle>
+      </a:effectStyleLst>
+      <a:bgFillStyleLst>
+        <a:solidFill>
+          <a:schemeClr val="phClr"/>
+        </a:solidFill>
+        <a:gradFill rotWithShape="1">
+          <a:gsLst>
+            <a:gs pos="0">
+              <a:schemeClr val="phClr">
+                <a:tint val="40000"/>
+                <a:satMod val="350000"/>
+              </a:schemeClr>
+            </a:gs>
+            <a:gs pos="40000">
+              <a:schemeClr val="phClr">
+                <a:tint val="45000"/>
+                <a:shade val="99000"/>
+                <a:satMod val="350000"/>
+              </a:schemeClr>
+            </a:gs>
+            <a:gs pos="100000">
+              <a:schemeClr val="phClr">
+                <a:shade val="20000"/>
+                <a:satMod val="255000"/>
+              </a:schemeClr>
+            </a:gs>
+          </a:gsLst>
+          <a:path path="circle">
+            <a:fillToRect l="50000" t="-80000" r="50000" b="180000"/>
+          </a:path>
+        </a:gradFill>
+        <a:gradFill rotWithShape="1">
+          <a:gsLst>
+            <a:gs pos="0">
+              <a:schemeClr val="phClr">
+                <a:tint val="80000"/>
+                <a:satMod val="300000"/>
+              </a:schemeClr>
+            </a:gs>
+            <a:gs pos="100000">
+              <a:schemeClr val="phClr">
+                <a:shade val="30000"/>
+                <a:satMod val="200000"/>
+              </a:schemeClr>
+            </a:gs>
+          </a:gsLst>
+          <a:path path="circle">
+            <a:fillToRect l="50000" t="50000" r="50000" b="50000"/>
+          </a:path>
+        </a:gradFill>
+      </a:bgFillStyleLst>
+    </a:fmtScheme>
+  </a:themeElements>
+</a:theme>
+</file>
+
+<file path=ppt/theme/theme2.xml><?xml version="1.0" encoding="utf-8"?>
 <a:theme xmlns:a="http://schemas.openxmlformats.org/drawingml/2006/main" xmlns:r="http://schemas.openxmlformats.org/officeDocument/2006/relationships">
   <a:themeElements>
     <a:clrScheme name="Default">
@@ -42345,283 +42728,4 @@
     </a:fmtScheme>
   </a:themeElements>
 </a:theme>
-</file>
-
-<file path=ppt/theme/theme2.xml><?xml version="1.0" encoding="utf-8"?>
-<a:theme xmlns:a="http://schemas.openxmlformats.org/drawingml/2006/main" xmlns:r="http://schemas.openxmlformats.org/officeDocument/2006/relationships" name="Office Theme">
-  <a:themeElements>
-    <a:clrScheme name="Office">
-      <a:dk1>
-        <a:srgbClr val="000000"/>
-      </a:dk1>
-      <a:lt1>
-        <a:srgbClr val="FFFFFF"/>
-      </a:lt1>
-      <a:dk2>
-        <a:srgbClr val="1F497D"/>
-      </a:dk2>
-      <a:lt2>
-        <a:srgbClr val="EEECE1"/>
-      </a:lt2>
-      <a:accent1>
-        <a:srgbClr val="4F81BD"/>
-      </a:accent1>
-      <a:accent2>
-        <a:srgbClr val="C0504D"/>
-      </a:accent2>
-      <a:accent3>
-        <a:srgbClr val="9BBB59"/>
-      </a:accent3>
-      <a:accent4>
-        <a:srgbClr val="8064A2"/>
-      </a:accent4>
-      <a:accent5>
-        <a:srgbClr val="4BACC6"/>
-      </a:accent5>
-      <a:accent6>
-        <a:srgbClr val="F79646"/>
-      </a:accent6>
-      <a:hlink>
-        <a:srgbClr val="0000FF"/>
-      </a:hlink>
-      <a:folHlink>
-        <a:srgbClr val="800080"/>
-      </a:folHlink>
-    </a:clrScheme>
-    <a:fontScheme name="Office">
-      <a:majorFont>
-        <a:latin typeface="Arial"/>
-        <a:ea typeface=""/>
-        <a:cs typeface=""/>
-        <a:font script="Jpan" typeface="ＭＳ Ｐゴシック"/>
-        <a:font script="Hang" typeface="맑은 고딕"/>
-        <a:font script="Hans" typeface="宋体"/>
-        <a:font script="Hant" typeface="新細明體"/>
-        <a:font script="Arab" typeface="Times New Roman"/>
-        <a:font script="Hebr" typeface="Times New Roman"/>
-        <a:font script="Thai" typeface="Angsana New"/>
-        <a:font script="Ethi" typeface="Nyala"/>
-        <a:font script="Beng" typeface="Vrinda"/>
-        <a:font script="Gujr" typeface="Shruti"/>
-        <a:font script="Khmr" typeface="MoolBoran"/>
-        <a:font script="Knda" typeface="Tunga"/>
-        <a:font script="Guru" typeface="Raavi"/>
-        <a:font script="Cans" typeface="Euphemia"/>
-        <a:font script="Cher" typeface="Plantagenet Cherokee"/>
-        <a:font script="Yiii" typeface="Microsoft Yi Baiti"/>
-        <a:font script="Tibt" typeface="Microsoft Himalaya"/>
-        <a:font script="Thaa" typeface="MV Boli"/>
-        <a:font script="Deva" typeface="Mangal"/>
-        <a:font script="Telu" typeface="Gautami"/>
-        <a:font script="Taml" typeface="Latha"/>
-        <a:font script="Syrc" typeface="Estrangelo Edessa"/>
-        <a:font script="Orya" typeface="Kalinga"/>
-        <a:font script="Mlym" typeface="Kartika"/>
-        <a:font script="Laoo" typeface="DokChampa"/>
-        <a:font script="Sinh" typeface="Iskoola Pota"/>
-        <a:font script="Mong" typeface="Mongolian Baiti"/>
-        <a:font script="Viet" typeface="Times New Roman"/>
-        <a:font script="Uigh" typeface="Microsoft Uighur"/>
-        <a:font script="Geor" typeface="Sylfaen"/>
-      </a:majorFont>
-      <a:minorFont>
-        <a:latin typeface="Arial"/>
-        <a:ea typeface=""/>
-        <a:cs typeface=""/>
-        <a:font script="Jpan" typeface="ＭＳ Ｐゴシック"/>
-        <a:font script="Hang" typeface="맑은 고딕"/>
-        <a:font script="Hans" typeface="宋体"/>
-        <a:font script="Hant" typeface="新細明體"/>
-        <a:font script="Arab" typeface="Arial"/>
-        <a:font script="Hebr" typeface="Arial"/>
-        <a:font script="Thai" typeface="Cordia New"/>
-        <a:font script="Ethi" typeface="Nyala"/>
-        <a:font script="Beng" typeface="Vrinda"/>
-        <a:font script="Gujr" typeface="Shruti"/>
-        <a:font script="Khmr" typeface="DaunPenh"/>
-        <a:font script="Knda" typeface="Tunga"/>
-        <a:font script="Guru" typeface="Raavi"/>
-        <a:font script="Cans" typeface="Euphemia"/>
-        <a:font script="Cher" typeface="Plantagenet Cherokee"/>
-        <a:font script="Yiii" typeface="Microsoft Yi Baiti"/>
-        <a:font script="Tibt" typeface="Microsoft Himalaya"/>
-        <a:font script="Thaa" typeface="MV Boli"/>
-        <a:font script="Deva" typeface="Mangal"/>
-        <a:font script="Telu" typeface="Gautami"/>
-        <a:font script="Taml" typeface="Latha"/>
-        <a:font script="Syrc" typeface="Estrangelo Edessa"/>
-        <a:font script="Orya" typeface="Kalinga"/>
-        <a:font script="Mlym" typeface="Kartika"/>
-        <a:font script="Laoo" typeface="DokChampa"/>
-        <a:font script="Sinh" typeface="Iskoola Pota"/>
-        <a:font script="Mong" typeface="Mongolian Baiti"/>
-        <a:font script="Viet" typeface="Arial"/>
-        <a:font script="Uigh" typeface="Microsoft Uighur"/>
-        <a:font script="Geor" typeface="Sylfaen"/>
-      </a:minorFont>
-    </a:fontScheme>
-    <a:fmtScheme name="Office">
-      <a:fillStyleLst>
-        <a:solidFill>
-          <a:schemeClr val="phClr"/>
-        </a:solidFill>
-        <a:gradFill rotWithShape="1">
-          <a:gsLst>
-            <a:gs pos="0">
-              <a:schemeClr val="phClr">
-                <a:tint val="50000"/>
-                <a:satMod val="300000"/>
-              </a:schemeClr>
-            </a:gs>
-            <a:gs pos="35000">
-              <a:schemeClr val="phClr">
-                <a:tint val="37000"/>
-                <a:satMod val="300000"/>
-              </a:schemeClr>
-            </a:gs>
-            <a:gs pos="100000">
-              <a:schemeClr val="phClr">
-                <a:tint val="15000"/>
-                <a:satMod val="350000"/>
-              </a:schemeClr>
-            </a:gs>
-          </a:gsLst>
-          <a:lin ang="16200000" scaled="1"/>
-        </a:gradFill>
-        <a:gradFill rotWithShape="1">
-          <a:gsLst>
-            <a:gs pos="0">
-              <a:schemeClr val="phClr">
-                <a:tint val="100000"/>
-                <a:shade val="100000"/>
-                <a:satMod val="130000"/>
-              </a:schemeClr>
-            </a:gs>
-            <a:gs pos="100000">
-              <a:schemeClr val="phClr">
-                <a:tint val="50000"/>
-                <a:shade val="100000"/>
-                <a:satMod val="350000"/>
-              </a:schemeClr>
-            </a:gs>
-          </a:gsLst>
-          <a:lin ang="16200000" scaled="0"/>
-        </a:gradFill>
-      </a:fillStyleLst>
-      <a:lnStyleLst>
-        <a:ln w="9525" cap="flat" cmpd="sng" algn="ctr">
-          <a:solidFill>
-            <a:schemeClr val="phClr">
-              <a:shade val="95000"/>
-              <a:satMod val="105000"/>
-            </a:schemeClr>
-          </a:solidFill>
-          <a:prstDash val="solid"/>
-        </a:ln>
-        <a:ln w="25400" cap="flat" cmpd="sng" algn="ctr">
-          <a:solidFill>
-            <a:schemeClr val="phClr"/>
-          </a:solidFill>
-          <a:prstDash val="solid"/>
-        </a:ln>
-        <a:ln w="38100" cap="flat" cmpd="sng" algn="ctr">
-          <a:solidFill>
-            <a:schemeClr val="phClr"/>
-          </a:solidFill>
-          <a:prstDash val="solid"/>
-        </a:ln>
-      </a:lnStyleLst>
-      <a:effectStyleLst>
-        <a:effectStyle>
-          <a:effectLst>
-            <a:outerShdw blurRad="40000" dist="20000" dir="5400000" rotWithShape="0">
-              <a:srgbClr val="000000">
-                <a:alpha val="38000"/>
-              </a:srgbClr>
-            </a:outerShdw>
-          </a:effectLst>
-        </a:effectStyle>
-        <a:effectStyle>
-          <a:effectLst>
-            <a:outerShdw blurRad="40000" dist="23000" dir="5400000" rotWithShape="0">
-              <a:srgbClr val="000000">
-                <a:alpha val="35000"/>
-              </a:srgbClr>
-            </a:outerShdw>
-          </a:effectLst>
-        </a:effectStyle>
-        <a:effectStyle>
-          <a:effectLst>
-            <a:outerShdw blurRad="40000" dist="23000" dir="5400000" rotWithShape="0">
-              <a:srgbClr val="000000">
-                <a:alpha val="35000"/>
-              </a:srgbClr>
-            </a:outerShdw>
-          </a:effectLst>
-          <a:scene3d>
-            <a:camera prst="orthographicFront">
-              <a:rot lat="0" lon="0" rev="0"/>
-            </a:camera>
-            <a:lightRig rig="threePt" dir="t">
-              <a:rot lat="0" lon="0" rev="1200000"/>
-            </a:lightRig>
-          </a:scene3d>
-          <a:sp3d>
-            <a:bevelT w="63500" h="25400"/>
-          </a:sp3d>
-        </a:effectStyle>
-      </a:effectStyleLst>
-      <a:bgFillStyleLst>
-        <a:solidFill>
-          <a:schemeClr val="phClr"/>
-        </a:solidFill>
-        <a:gradFill rotWithShape="1">
-          <a:gsLst>
-            <a:gs pos="0">
-              <a:schemeClr val="phClr">
-                <a:tint val="40000"/>
-                <a:satMod val="350000"/>
-              </a:schemeClr>
-            </a:gs>
-            <a:gs pos="40000">
-              <a:schemeClr val="phClr">
-                <a:tint val="45000"/>
-                <a:shade val="99000"/>
-                <a:satMod val="350000"/>
-              </a:schemeClr>
-            </a:gs>
-            <a:gs pos="100000">
-              <a:schemeClr val="phClr">
-                <a:shade val="20000"/>
-                <a:satMod val="255000"/>
-              </a:schemeClr>
-            </a:gs>
-          </a:gsLst>
-          <a:path path="circle">
-            <a:fillToRect l="50000" t="-80000" r="50000" b="180000"/>
-          </a:path>
-        </a:gradFill>
-        <a:gradFill rotWithShape="1">
-          <a:gsLst>
-            <a:gs pos="0">
-              <a:schemeClr val="phClr">
-                <a:tint val="80000"/>
-                <a:satMod val="300000"/>
-              </a:schemeClr>
-            </a:gs>
-            <a:gs pos="100000">
-              <a:schemeClr val="phClr">
-                <a:shade val="30000"/>
-                <a:satMod val="200000"/>
-              </a:schemeClr>
-            </a:gs>
-          </a:gsLst>
-          <a:path path="circle">
-            <a:fillToRect l="50000" t="50000" r="50000" b="50000"/>
-          </a:path>
-        </a:gradFill>
-      </a:bgFillStyleLst>
-    </a:fmtScheme>
-  </a:themeElements>
-</a:theme>
 </file>
--- a/docs/tcc/apresentacao-mapill.pptx
+++ b/docs/tcc/apresentacao-mapill.pptx
@@ -1315,282 +1315,66 @@
           </a:bodyPr>
           <a:lstStyle/>
           <a:p>
-            <a:pPr indent="0" lvl="0" marL="0" rtl="0" algn="l">
-              <a:lnSpc>
-                <a:spcPct val="100000"/>
-              </a:lnSpc>
-              <a:spcBef>
-                <a:spcPts val="0"/>
-              </a:spcBef>
-              <a:spcAft>
-                <a:spcPts val="0"/>
-              </a:spcAft>
-              <a:buSzPts val="1100"/>
-              <a:buNone/>
-            </a:pPr>
-            <a:r>
-              <a:rPr lang="en-US"/>
-              <a:t>[8 min]</a:t>
-            </a:r>
-            <a:endParaRPr/>
-          </a:p>
-          <a:p>
-            <a:pPr indent="0" lvl="0" marL="0" rtl="0" algn="l">
-              <a:lnSpc>
-                <a:spcPct val="100000"/>
-              </a:lnSpc>
-              <a:spcBef>
-                <a:spcPts val="0"/>
-              </a:spcBef>
-              <a:spcAft>
-                <a:spcPts val="0"/>
-              </a:spcAft>
-              <a:buSzPts val="1100"/>
-              <a:buNone/>
-            </a:pPr>
-            <a:r>
-              <a:rPr lang="en-US"/>
+            <a:r>
+              <a:t>[7 min 30 s]</a:t>
+            </a:r>
+          </a:p>
+          <a:p>
+            <a:r>
               <a:t>Agora vou mostrar o aplicativo funcionando no meu celular.</a:t>
             </a:r>
-            <a:endParaRPr/>
-          </a:p>
-          <a:p>
-            <a:pPr indent="0" lvl="0" marL="0" rtl="0" algn="l">
-              <a:lnSpc>
-                <a:spcPct val="100000"/>
-              </a:lnSpc>
-              <a:spcBef>
-                <a:spcPts val="0"/>
-              </a:spcBef>
-              <a:spcAft>
-                <a:spcPts val="0"/>
-              </a:spcAft>
-              <a:buSzPts val="1100"/>
-              <a:buNone/>
-            </a:pPr>
-            <a:r>
-              <a:t/>
-            </a:r>
-            <a:endParaRPr/>
-          </a:p>
-          <a:p>
-            <a:pPr indent="0" lvl="0" marL="0" rtl="0" algn="l">
-              <a:lnSpc>
-                <a:spcPct val="100000"/>
-              </a:lnSpc>
-              <a:spcBef>
-                <a:spcPts val="0"/>
-              </a:spcBef>
-              <a:spcAft>
-                <a:spcPts val="0"/>
-              </a:spcAft>
-              <a:buSzPts val="1100"/>
-              <a:buNone/>
-            </a:pPr>
-            <a:r>
-              <a:rPr lang="en-US"/>
+          </a:p>
+          <a:p/>
+          <a:p>
+            <a:r>
               <a:t>Caminho (detalhe no roteiro):</a:t>
             </a:r>
-            <a:endParaRPr/>
-          </a:p>
-          <a:p>
-            <a:pPr indent="0" lvl="0" marL="0" rtl="0" algn="l">
-              <a:lnSpc>
-                <a:spcPct val="100000"/>
-              </a:lnSpc>
-              <a:spcBef>
-                <a:spcPts val="0"/>
-              </a:spcBef>
-              <a:spcAft>
-                <a:spcPts val="0"/>
-              </a:spcAft>
-              <a:buSzPts val="1100"/>
-              <a:buNone/>
-            </a:pPr>
-            <a:r>
-              <a:rPr lang="en-US"/>
+          </a:p>
+          <a:p>
+            <a:r>
               <a:t>a. Cadastro por código de barras (1 min 30 s)</a:t>
             </a:r>
-            <a:endParaRPr/>
-          </a:p>
-          <a:p>
-            <a:pPr indent="0" lvl="0" marL="0" rtl="0" algn="l">
-              <a:lnSpc>
-                <a:spcPct val="100000"/>
-              </a:lnSpc>
-              <a:spcBef>
-                <a:spcPts val="0"/>
-              </a:spcBef>
-              <a:spcAft>
-                <a:spcPts val="0"/>
-              </a:spcAft>
-              <a:buSzPts val="1100"/>
-              <a:buNone/>
-            </a:pPr>
-            <a:r>
-              <a:rPr lang="en-US"/>
+          </a:p>
+          <a:p>
+            <a:r>
               <a:t>b. Tela inicial (45 s)</a:t>
             </a:r>
-            <a:endParaRPr/>
-          </a:p>
-          <a:p>
-            <a:pPr indent="0" lvl="0" marL="0" rtl="0" algn="l">
-              <a:lnSpc>
-                <a:spcPct val="100000"/>
-              </a:lnSpc>
-              <a:spcBef>
-                <a:spcPts val="0"/>
-              </a:spcBef>
-              <a:spcAft>
-                <a:spcPts val="0"/>
-              </a:spcAft>
-              <a:buSzPts val="1100"/>
-              <a:buNone/>
-            </a:pPr>
-            <a:r>
-              <a:rPr lang="en-US"/>
+          </a:p>
+          <a:p>
+            <a:r>
               <a:t>c. Alarme com o celular bloqueado (2 min)</a:t>
             </a:r>
-            <a:endParaRPr/>
-          </a:p>
-          <a:p>
-            <a:pPr indent="0" lvl="0" marL="0" rtl="0" algn="l">
-              <a:lnSpc>
-                <a:spcPct val="100000"/>
-              </a:lnSpc>
-              <a:spcBef>
-                <a:spcPts val="0"/>
-              </a:spcBef>
-              <a:spcAft>
-                <a:spcPts val="0"/>
-              </a:spcAft>
-              <a:buSzPts val="1100"/>
-              <a:buNone/>
-            </a:pPr>
-            <a:r>
-              <a:rPr lang="en-US"/>
-              <a:t>d. Adesão, calendário e correção (1 min 30 s)</a:t>
-            </a:r>
-            <a:endParaRPr/>
-          </a:p>
-          <a:p>
-            <a:pPr indent="0" lvl="0" marL="0" rtl="0" algn="l">
-              <a:lnSpc>
-                <a:spcPct val="100000"/>
-              </a:lnSpc>
-              <a:spcBef>
-                <a:spcPts val="0"/>
-              </a:spcBef>
-              <a:spcAft>
-                <a:spcPts val="0"/>
-              </a:spcAft>
-              <a:buSzPts val="1100"/>
-              <a:buNone/>
-            </a:pPr>
-            <a:r>
-              <a:rPr lang="en-US"/>
+          </a:p>
+          <a:p>
+            <a:r>
+              <a:t>d. Adesão e calendário (1 min)</a:t>
+            </a:r>
+          </a:p>
+          <a:p>
+            <a:r>
               <a:t>e. Relatório em PDF (1 min)</a:t>
             </a:r>
-            <a:endParaRPr/>
-          </a:p>
-          <a:p>
-            <a:pPr indent="0" lvl="0" marL="0" rtl="0" algn="l">
-              <a:lnSpc>
-                <a:spcPct val="100000"/>
-              </a:lnSpc>
-              <a:spcBef>
-                <a:spcPts val="0"/>
-              </a:spcBef>
-              <a:spcAft>
-                <a:spcPts val="0"/>
-              </a:spcAft>
-              <a:buSzPts val="1100"/>
-              <a:buNone/>
-            </a:pPr>
-            <a:r>
-              <a:rPr lang="en-US"/>
+          </a:p>
+          <a:p>
+            <a:r>
               <a:t>f. Temas e cores (45 s)</a:t>
             </a:r>
-            <a:endParaRPr/>
-          </a:p>
-          <a:p>
-            <a:pPr indent="0" lvl="0" marL="0" rtl="0" algn="l">
-              <a:lnSpc>
-                <a:spcPct val="100000"/>
-              </a:lnSpc>
-              <a:spcBef>
-                <a:spcPts val="0"/>
-              </a:spcBef>
-              <a:spcAft>
-                <a:spcPts val="0"/>
-              </a:spcAft>
-              <a:buSzPts val="1100"/>
-              <a:buNone/>
-            </a:pPr>
-            <a:r>
-              <a:rPr lang="en-US"/>
+          </a:p>
+          <a:p>
+            <a:r>
               <a:t>Folga de 30 s.</a:t>
             </a:r>
-            <a:endParaRPr/>
-          </a:p>
-          <a:p>
-            <a:pPr indent="0" lvl="0" marL="0" rtl="0" algn="l">
-              <a:lnSpc>
-                <a:spcPct val="100000"/>
-              </a:lnSpc>
-              <a:spcBef>
-                <a:spcPts val="0"/>
-              </a:spcBef>
-              <a:spcAft>
-                <a:spcPts val="0"/>
-              </a:spcAft>
-              <a:buSzPts val="1100"/>
-              <a:buNone/>
-            </a:pPr>
-            <a:r>
-              <a:t/>
-            </a:r>
-            <a:endParaRPr/>
-          </a:p>
-          <a:p>
-            <a:pPr indent="0" lvl="0" marL="0" rtl="0" algn="l">
-              <a:lnSpc>
-                <a:spcPct val="100000"/>
-              </a:lnSpc>
-              <a:spcBef>
-                <a:spcPts val="0"/>
-              </a:spcBef>
-              <a:spcAft>
-                <a:spcPts val="0"/>
-              </a:spcAft>
-              <a:buSzPts val="1100"/>
-              <a:buNone/>
-            </a:pPr>
-            <a:r>
-              <a:rPr lang="en-US"/>
-              <a:t>Se o espelhamento falhar, abrir o vídeo reserva no trecho correspondente. Se tudo falhar, narrar a partir das telas deste slide.</a:t>
-            </a:r>
-            <a:endParaRPr/>
-          </a:p>
-          <a:p>
-            <a:pPr indent="0" lvl="0" marL="0" rtl="0" algn="l">
-              <a:lnSpc>
-                <a:spcPct val="100000"/>
-              </a:lnSpc>
-              <a:spcBef>
-                <a:spcPts val="0"/>
-              </a:spcBef>
-              <a:spcAft>
-                <a:spcPts val="0"/>
-              </a:spcAft>
-              <a:buSzPts val="1100"/>
-              <a:buNone/>
-            </a:pPr>
-            <a:r>
-              <a:rPr lang="en-US"/>
-              <a:t>Se atrasar, cortar nesta ordem: f, depois e, depois a correção em d.</a:t>
-            </a:r>
-            <a:endParaRPr/>
+          </a:p>
+          <a:p/>
+          <a:p>
+            <a:r>
+              <a:t>Se o espelhamento falhar, ir para o slide 12 e rodar o vídeo no trecho correspondente. Se tudo falhar, narrar a partir das telas do slide 11.</a:t>
+            </a:r>
+          </a:p>
+          <a:p>
+            <a:r>
+              <a:t>Se atrasar, cortar nesta ordem: f, depois e.</a:t>
+            </a:r>
           </a:p>
         </p:txBody>
       </p:sp>
@@ -1744,282 +1528,66 @@
           </a:bodyPr>
           <a:lstStyle/>
           <a:p>
-            <a:pPr indent="0" lvl="0" marL="0" rtl="0" algn="l">
-              <a:lnSpc>
-                <a:spcPct val="100000"/>
-              </a:lnSpc>
-              <a:spcBef>
-                <a:spcPts val="0"/>
-              </a:spcBef>
-              <a:spcAft>
-                <a:spcPts val="0"/>
-              </a:spcAft>
-              <a:buSzPts val="1100"/>
-              <a:buNone/>
-            </a:pPr>
-            <a:r>
-              <a:rPr lang="en-US"/>
-              <a:t>[8 min]</a:t>
-            </a:r>
-            <a:endParaRPr/>
-          </a:p>
-          <a:p>
-            <a:pPr indent="0" lvl="0" marL="0" rtl="0" algn="l">
-              <a:lnSpc>
-                <a:spcPct val="100000"/>
-              </a:lnSpc>
-              <a:spcBef>
-                <a:spcPts val="0"/>
-              </a:spcBef>
-              <a:spcAft>
-                <a:spcPts val="0"/>
-              </a:spcAft>
-              <a:buSzPts val="1100"/>
-              <a:buNone/>
-            </a:pPr>
-            <a:r>
-              <a:rPr lang="en-US"/>
+            <a:r>
+              <a:t>[só se o espelhamento falhar]</a:t>
+            </a:r>
+          </a:p>
+          <a:p>
+            <a:r>
               <a:t>Agora vou mostrar o aplicativo funcionando no meu celular.</a:t>
             </a:r>
-            <a:endParaRPr/>
-          </a:p>
-          <a:p>
-            <a:pPr indent="0" lvl="0" marL="0" rtl="0" algn="l">
-              <a:lnSpc>
-                <a:spcPct val="100000"/>
-              </a:lnSpc>
-              <a:spcBef>
-                <a:spcPts val="0"/>
-              </a:spcBef>
-              <a:spcAft>
-                <a:spcPts val="0"/>
-              </a:spcAft>
-              <a:buSzPts val="1100"/>
-              <a:buNone/>
-            </a:pPr>
-            <a:r>
-              <a:t/>
-            </a:r>
-            <a:endParaRPr/>
-          </a:p>
-          <a:p>
-            <a:pPr indent="0" lvl="0" marL="0" rtl="0" algn="l">
-              <a:lnSpc>
-                <a:spcPct val="100000"/>
-              </a:lnSpc>
-              <a:spcBef>
-                <a:spcPts val="0"/>
-              </a:spcBef>
-              <a:spcAft>
-                <a:spcPts val="0"/>
-              </a:spcAft>
-              <a:buSzPts val="1100"/>
-              <a:buNone/>
-            </a:pPr>
-            <a:r>
-              <a:rPr lang="en-US"/>
+          </a:p>
+          <a:p/>
+          <a:p>
+            <a:r>
               <a:t>Caminho (detalhe no roteiro):</a:t>
             </a:r>
-            <a:endParaRPr/>
-          </a:p>
-          <a:p>
-            <a:pPr indent="0" lvl="0" marL="0" rtl="0" algn="l">
-              <a:lnSpc>
-                <a:spcPct val="100000"/>
-              </a:lnSpc>
-              <a:spcBef>
-                <a:spcPts val="0"/>
-              </a:spcBef>
-              <a:spcAft>
-                <a:spcPts val="0"/>
-              </a:spcAft>
-              <a:buSzPts val="1100"/>
-              <a:buNone/>
-            </a:pPr>
-            <a:r>
-              <a:rPr lang="en-US"/>
+          </a:p>
+          <a:p>
+            <a:r>
               <a:t>a. Cadastro por código de barras (1 min 30 s)</a:t>
             </a:r>
-            <a:endParaRPr/>
-          </a:p>
-          <a:p>
-            <a:pPr indent="0" lvl="0" marL="0" rtl="0" algn="l">
-              <a:lnSpc>
-                <a:spcPct val="100000"/>
-              </a:lnSpc>
-              <a:spcBef>
-                <a:spcPts val="0"/>
-              </a:spcBef>
-              <a:spcAft>
-                <a:spcPts val="0"/>
-              </a:spcAft>
-              <a:buSzPts val="1100"/>
-              <a:buNone/>
-            </a:pPr>
-            <a:r>
-              <a:rPr lang="en-US"/>
+          </a:p>
+          <a:p>
+            <a:r>
               <a:t>b. Tela inicial (45 s)</a:t>
             </a:r>
-            <a:endParaRPr/>
-          </a:p>
-          <a:p>
-            <a:pPr indent="0" lvl="0" marL="0" rtl="0" algn="l">
-              <a:lnSpc>
-                <a:spcPct val="100000"/>
-              </a:lnSpc>
-              <a:spcBef>
-                <a:spcPts val="0"/>
-              </a:spcBef>
-              <a:spcAft>
-                <a:spcPts val="0"/>
-              </a:spcAft>
-              <a:buSzPts val="1100"/>
-              <a:buNone/>
-            </a:pPr>
-            <a:r>
-              <a:rPr lang="en-US"/>
+          </a:p>
+          <a:p>
+            <a:r>
               <a:t>c. Alarme com o celular bloqueado (2 min)</a:t>
             </a:r>
-            <a:endParaRPr/>
-          </a:p>
-          <a:p>
-            <a:pPr indent="0" lvl="0" marL="0" rtl="0" algn="l">
-              <a:lnSpc>
-                <a:spcPct val="100000"/>
-              </a:lnSpc>
-              <a:spcBef>
-                <a:spcPts val="0"/>
-              </a:spcBef>
-              <a:spcAft>
-                <a:spcPts val="0"/>
-              </a:spcAft>
-              <a:buSzPts val="1100"/>
-              <a:buNone/>
-            </a:pPr>
-            <a:r>
-              <a:rPr lang="en-US"/>
-              <a:t>d. Adesão, calendário e correção (1 min 30 s)</a:t>
-            </a:r>
-            <a:endParaRPr/>
-          </a:p>
-          <a:p>
-            <a:pPr indent="0" lvl="0" marL="0" rtl="0" algn="l">
-              <a:lnSpc>
-                <a:spcPct val="100000"/>
-              </a:lnSpc>
-              <a:spcBef>
-                <a:spcPts val="0"/>
-              </a:spcBef>
-              <a:spcAft>
-                <a:spcPts val="0"/>
-              </a:spcAft>
-              <a:buSzPts val="1100"/>
-              <a:buNone/>
-            </a:pPr>
-            <a:r>
-              <a:rPr lang="en-US"/>
+          </a:p>
+          <a:p>
+            <a:r>
+              <a:t>d. Adesão e calendário (1 min)</a:t>
+            </a:r>
+          </a:p>
+          <a:p>
+            <a:r>
               <a:t>e. Relatório em PDF (1 min)</a:t>
             </a:r>
-            <a:endParaRPr/>
-          </a:p>
-          <a:p>
-            <a:pPr indent="0" lvl="0" marL="0" rtl="0" algn="l">
-              <a:lnSpc>
-                <a:spcPct val="100000"/>
-              </a:lnSpc>
-              <a:spcBef>
-                <a:spcPts val="0"/>
-              </a:spcBef>
-              <a:spcAft>
-                <a:spcPts val="0"/>
-              </a:spcAft>
-              <a:buSzPts val="1100"/>
-              <a:buNone/>
-            </a:pPr>
-            <a:r>
-              <a:rPr lang="en-US"/>
+          </a:p>
+          <a:p>
+            <a:r>
               <a:t>f. Temas e cores (45 s)</a:t>
             </a:r>
-            <a:endParaRPr/>
-          </a:p>
-          <a:p>
-            <a:pPr indent="0" lvl="0" marL="0" rtl="0" algn="l">
-              <a:lnSpc>
-                <a:spcPct val="100000"/>
-              </a:lnSpc>
-              <a:spcBef>
-                <a:spcPts val="0"/>
-              </a:spcBef>
-              <a:spcAft>
-                <a:spcPts val="0"/>
-              </a:spcAft>
-              <a:buSzPts val="1100"/>
-              <a:buNone/>
-            </a:pPr>
-            <a:r>
-              <a:rPr lang="en-US"/>
+          </a:p>
+          <a:p>
+            <a:r>
               <a:t>Folga de 30 s.</a:t>
             </a:r>
-            <a:endParaRPr/>
-          </a:p>
-          <a:p>
-            <a:pPr indent="0" lvl="0" marL="0" rtl="0" algn="l">
-              <a:lnSpc>
-                <a:spcPct val="100000"/>
-              </a:lnSpc>
-              <a:spcBef>
-                <a:spcPts val="0"/>
-              </a:spcBef>
-              <a:spcAft>
-                <a:spcPts val="0"/>
-              </a:spcAft>
-              <a:buSzPts val="1100"/>
-              <a:buNone/>
-            </a:pPr>
-            <a:r>
-              <a:t/>
-            </a:r>
-            <a:endParaRPr/>
-          </a:p>
-          <a:p>
-            <a:pPr indent="0" lvl="0" marL="0" rtl="0" algn="l">
-              <a:lnSpc>
-                <a:spcPct val="100000"/>
-              </a:lnSpc>
-              <a:spcBef>
-                <a:spcPts val="0"/>
-              </a:spcBef>
-              <a:spcAft>
-                <a:spcPts val="0"/>
-              </a:spcAft>
-              <a:buSzPts val="1100"/>
-              <a:buNone/>
-            </a:pPr>
-            <a:r>
-              <a:rPr lang="en-US"/>
-              <a:t>Se o espelhamento falhar, abrir o vídeo reserva no trecho correspondente. Se tudo falhar, narrar a partir das telas deste slide.</a:t>
-            </a:r>
-            <a:endParaRPr/>
-          </a:p>
-          <a:p>
-            <a:pPr indent="0" lvl="0" marL="0" rtl="0" algn="l">
-              <a:lnSpc>
-                <a:spcPct val="100000"/>
-              </a:lnSpc>
-              <a:spcBef>
-                <a:spcPts val="0"/>
-              </a:spcBef>
-              <a:spcAft>
-                <a:spcPts val="0"/>
-              </a:spcAft>
-              <a:buSzPts val="1100"/>
-              <a:buNone/>
-            </a:pPr>
-            <a:r>
-              <a:rPr lang="en-US"/>
-              <a:t>Se atrasar, cortar nesta ordem: f, depois e, depois a correção em d.</a:t>
-            </a:r>
-            <a:endParaRPr/>
+          </a:p>
+          <a:p/>
+          <a:p>
+            <a:r>
+              <a:t>Se o espelhamento falhar, ir para o slide 12 e rodar o vídeo no trecho correspondente. Se tudo falhar, narrar a partir das telas do slide 11.</a:t>
+            </a:r>
+          </a:p>
+          <a:p>
+            <a:r>
+              <a:t>Se atrasar, cortar nesta ordem: f, depois e.</a:t>
+            </a:r>
           </a:p>
         </p:txBody>
       </p:sp>
@@ -2394,68 +1962,14 @@
           </a:bodyPr>
           <a:lstStyle/>
           <a:p>
-            <a:pPr indent="-298450" lvl="0" marL="457200" marR="0" rtl="0" algn="l">
-              <a:lnSpc>
-                <a:spcPct val="100000"/>
-              </a:lnSpc>
-              <a:spcBef>
-                <a:spcPts val="0"/>
-              </a:spcBef>
-              <a:spcAft>
-                <a:spcPts val="0"/>
-              </a:spcAft>
-              <a:buClr>
-                <a:srgbClr val="000000"/>
-              </a:buClr>
-              <a:buSzPts val="1100"/>
-              <a:buFont typeface="Arial"/>
-              <a:buChar char="●"/>
-            </a:pPr>
-            <a:r>
-              <a:rPr b="0" i="0" lang="en-US" spc="0" sz="1100" u="none" cap="none" strike="noStrike">
-                <a:solidFill>
-                  <a:srgbClr val="000000"/>
-                </a:solidFill>
-                <a:latin typeface="Arial"/>
-                <a:ea typeface="Arial"/>
-                <a:cs typeface="Arial"/>
-                <a:sym typeface="Arial"/>
-              </a:rPr>
+            <a:r>
               <a:t>[1 min]</a:t>
             </a:r>
-            <a:endParaRPr/>
-          </a:p>
-          <a:p>
-            <a:pPr indent="-298450" lvl="0" marL="457200" marR="0" rtl="0" algn="l">
-              <a:lnSpc>
-                <a:spcPct val="100000"/>
-              </a:lnSpc>
-              <a:spcBef>
-                <a:spcPts val="0"/>
-              </a:spcBef>
-              <a:spcAft>
-                <a:spcPts val="0"/>
-              </a:spcAft>
-              <a:buClr>
-                <a:srgbClr val="000000"/>
-              </a:buClr>
-              <a:buSzPts val="1100"/>
-              <a:buFont typeface="Arial"/>
-              <a:buChar char="●"/>
-            </a:pPr>
-            <a:r>
-              <a:rPr b="0" i="0" lang="en-US" spc="0" sz="1100" u="none" cap="none" strike="noStrike">
-                <a:solidFill>
-                  <a:srgbClr val="000000"/>
-                </a:solidFill>
-                <a:latin typeface="Arial"/>
-                <a:ea typeface="Arial"/>
-                <a:cs typeface="Arial"/>
-                <a:sym typeface="Arial"/>
-              </a:rPr>
-              <a:t>O alarme, que é o centro do app, foi testado nas quatro combinações de celular bloqueado ou em uso, com o app nos recentes ou fora deles. Com o celular bloqueado, a tela do alarme apareceu por cima da tela de bloqueio. Com o celular em uso, apareceu a notificação com os botões de tomar e pular. Nos testes, percebi que a tela do alarme herdava a permissão de aparecer sobre o bloqueio que era do app inteiro, então isolei essa tela, e ao fechar o alarme o celular volta a ficar bloqueado, sem expor os outros dados. A ressalva veio depois de reiniciar o celular. O alarme só tocou quando o aparelho foi desbloqueado, por uma restrição de inicialização automática que o fabricante aplica e que o Android não deixa contornar. O app passou a orientar o paciente a liberar essa permissão.</a:t>
-            </a:r>
-            <a:endParaRPr/>
+          </a:p>
+          <a:p>
+            <a:r>
+              <a:t>O alarme, que é o centro do app, foi testado nas quatro combinações de celular bloqueado ou em uso, com o app nos recentes ou fora deles. Com o celular bloqueado, a tela do alarme apareceu por cima da tela de bloqueio, e com o celular em uso, apareceu a notificação com os botões de tomar e pular. Em todas elas, quem dispara o alarme é o agendador do próprio Android, e não o app, por isso ele toca mesmo com o aplicativo fechado. A ressalva veio depois de reiniciar o celular. O alarme só tocou quando o aparelho foi desbloqueado, por uma restrição de inicialização automática que o fabricante aplica e que o Android não deixa contornar. O app passou a orientar o paciente a liberar essa permissão.</a:t>
+            </a:r>
           </a:p>
         </p:txBody>
       </p:sp>
@@ -4703,68 +4217,14 @@
           </a:bodyPr>
           <a:lstStyle/>
           <a:p>
-            <a:pPr indent="-298450" lvl="0" marL="457200" marR="0" rtl="0" algn="l">
-              <a:lnSpc>
-                <a:spcPct val="100000"/>
-              </a:lnSpc>
-              <a:spcBef>
-                <a:spcPts val="0"/>
-              </a:spcBef>
-              <a:spcAft>
-                <a:spcPts val="0"/>
-              </a:spcAft>
-              <a:buClr>
-                <a:srgbClr val="000000"/>
-              </a:buClr>
-              <a:buSzPts val="1100"/>
-              <a:buFont typeface="Arial"/>
-              <a:buChar char="●"/>
-            </a:pPr>
-            <a:r>
-              <a:rPr b="0" i="0" lang="en-US" spc="0" sz="1100" u="none" cap="none" strike="noStrike">
-                <a:solidFill>
-                  <a:srgbClr val="000000"/>
-                </a:solidFill>
-                <a:latin typeface="Arial"/>
-                <a:ea typeface="Arial"/>
-                <a:cs typeface="Arial"/>
-                <a:sym typeface="Arial"/>
-              </a:rPr>
+            <a:r>
               <a:t>[50 s]</a:t>
             </a:r>
-            <a:endParaRPr/>
-          </a:p>
-          <a:p>
-            <a:pPr indent="-298450" lvl="0" marL="457200" marR="0" rtl="0" algn="l">
-              <a:lnSpc>
-                <a:spcPct val="100000"/>
-              </a:lnSpc>
-              <a:spcBef>
-                <a:spcPts val="0"/>
-              </a:spcBef>
-              <a:spcAft>
-                <a:spcPts val="0"/>
-              </a:spcAft>
-              <a:buClr>
-                <a:srgbClr val="000000"/>
-              </a:buClr>
-              <a:buSzPts val="1100"/>
-              <a:buFont typeface="Arial"/>
-              <a:buChar char="●"/>
-            </a:pPr>
-            <a:r>
-              <a:rPr b="0" i="0" lang="en-US" spc="0" sz="1100" u="none" cap="none" strike="noStrike">
-                <a:solidFill>
-                  <a:srgbClr val="000000"/>
-                </a:solidFill>
-                <a:latin typeface="Arial"/>
-                <a:ea typeface="Arial"/>
-                <a:cs typeface="Arial"/>
-                <a:sym typeface="Arial"/>
-              </a:rPr>
-              <a:t>Os requisitos partiram dos problemas que o paciente enfrenta. São quarenta e quatro requisitos funcionais, nove não funcionais e vinte regras de negócio, e aqui eles estão organizados pelo problema que resolvem. Para o esquecimento, o alarme toca mesmo com o app fechado, e remédios no mesmo horário geram um aviso só. Para a posologia, o cadastro aceita dez formas farmacêuticas, quatro frequências e uma dose diferente em cada horário. Para o estoque, o app desconta a dose de verdade, e não uma unidade, então quem toma dois comprimidos tem dois descontados, e com isso prevê quando o remédio vai acabar. Consultas e exames aparecem no mesmo calendário das doses, e o app avisa quando a receita está para vencer. E tudo funciona sem internet e sem conta, com o paciente podendo exportar ou apagar os próprios dados.</a:t>
-            </a:r>
-            <a:endParaRPr/>
+          </a:p>
+          <a:p>
+            <a:r>
+              <a:t>Os requisitos partiram dos problemas que o paciente enfrenta. São quarenta e quatro requisitos funcionais, nove não funcionais e vinte regras de negócio, e aqui eles estão organizados pelo problema que resolvem. Para o esquecimento, o alarme toca mesmo com o app fechado, remédios no mesmo horário geram um aviso só, e quem tomou atrasado confirma as doses de uma vez. Para a posologia, o cadastro aceita dez formas farmacêuticas, quatro frequências e uma dose diferente em cada horário. Para o estoque, o app desconta a dose de verdade, e não uma unidade, então quem toma dois comprimidos tem dois descontados, e com isso prevê quando o remédio vai acabar. Como complemento, consultas e exames ficam no mesmo calendário das doses, e o app avisa quando a receita está para vencer, mas só a dose tem alarme, porque é ela que tem consequência imediata. E tudo funciona sem internet e sem conta, com o paciente podendo exportar ou apagar os próprios dados a qualquer momento.</a:t>
+            </a:r>
           </a:p>
         </p:txBody>
       </p:sp>
